--- a/output/sigma_summary_latest.pptx
+++ b/output/sigma_summary_latest.pptx
@@ -3558,9 +3558,9 @@
                       </a:solidFill>
                       <a:prstDash val="solid"/>
                     </a:lnL>
-                    <a:lnR algn="ctr" cmpd="sng" cap="flat" w="10160">
-                      <a:solidFill>
-                        <a:srgbClr val="8C8C8C">
+                    <a:lnR algn="ctr" cmpd="sng" cap="flat" w="4445">
+                      <a:solidFill>
+                        <a:srgbClr val="CCCCCC">
                           <a:alpha val="100000"/>
                         </a:srgbClr>
                       </a:solidFill>
@@ -3623,9 +3623,9 @@
                       <a:noFill/>
                       <a:prstDash val="solid"/>
                     </a:lnL>
-                    <a:lnR algn="ctr" cmpd="sng" cap="flat" w="10160">
-                      <a:solidFill>
-                        <a:srgbClr val="8C8C8C">
+                    <a:lnR algn="ctr" cmpd="sng" cap="flat" w="4445">
+                      <a:solidFill>
+                        <a:srgbClr val="CCCCCC">
                           <a:alpha val="100000"/>
                         </a:srgbClr>
                       </a:solidFill>
@@ -3684,9 +3684,9 @@
                     </a:p>
                   </a:txBody>
                   <a:tcPr anchor="ctr" marB="12700" marT="12700" marR="0" marL="0">
-                    <a:lnL algn="ctr" cmpd="sng" cap="flat" w="10160">
-                      <a:solidFill>
-                        <a:srgbClr val="8C8C8C">
+                    <a:lnL algn="ctr" cmpd="sng" cap="flat" w="4445">
+                      <a:solidFill>
+                        <a:srgbClr val="CCCCCC">
                           <a:alpha val="100000"/>
                         </a:srgbClr>
                       </a:solidFill>
@@ -3814,8 +3814,12 @@
                       <a:noFill/>
                       <a:prstDash val="solid"/>
                     </a:lnL>
-                    <a:lnR algn="ctr" cmpd="sng" cap="flat" w="0">
-                      <a:noFill/>
+                    <a:lnR algn="ctr" cmpd="sng" cap="flat" w="10160">
+                      <a:solidFill>
+                        <a:srgbClr val="8C8C8C">
+                          <a:alpha val="100000"/>
+                        </a:srgbClr>
+                      </a:solidFill>
                       <a:prstDash val="solid"/>
                     </a:lnR>
                     <a:lnT algn="ctr" cmpd="sng" cap="flat" w="15240">
@@ -3875,12 +3879,20 @@
                     </a:p>
                   </a:txBody>
                   <a:tcPr anchor="ctr" marB="12700" marT="12700" marR="0" marL="0">
-                    <a:lnL algn="ctr" cmpd="sng" cap="flat" w="0">
-                      <a:noFill/>
+                    <a:lnL algn="ctr" cmpd="sng" cap="flat" w="10160">
+                      <a:solidFill>
+                        <a:srgbClr val="8C8C8C">
+                          <a:alpha val="100000"/>
+                        </a:srgbClr>
+                      </a:solidFill>
                       <a:prstDash val="solid"/>
                     </a:lnL>
-                    <a:lnR algn="ctr" cmpd="sng" cap="flat" w="0">
-                      <a:noFill/>
+                    <a:lnR algn="ctr" cmpd="sng" cap="flat" w="10160">
+                      <a:solidFill>
+                        <a:srgbClr val="8C8C8C">
+                          <a:alpha val="100000"/>
+                        </a:srgbClr>
+                      </a:solidFill>
                       <a:prstDash val="solid"/>
                     </a:lnR>
                     <a:lnT algn="ctr" cmpd="sng" cap="flat" w="15240">
@@ -3940,8 +3952,12 @@
                     </a:p>
                   </a:txBody>
                   <a:tcPr anchor="ctr" marB="12700" marT="12700" marR="0" marL="0">
-                    <a:lnL algn="ctr" cmpd="sng" cap="flat" w="0">
-                      <a:noFill/>
+                    <a:lnL algn="ctr" cmpd="sng" cap="flat" w="10160">
+                      <a:solidFill>
+                        <a:srgbClr val="8C8C8C">
+                          <a:alpha val="100000"/>
+                        </a:srgbClr>
+                      </a:solidFill>
                       <a:prstDash val="solid"/>
                     </a:lnL>
                     <a:lnR algn="ctr" cmpd="sng" cap="flat" w="0">
@@ -4332,9 +4348,9 @@
                       <a:noFill/>
                       <a:prstDash val="solid"/>
                     </a:lnL>
-                    <a:lnR algn="ctr" cmpd="sng" cap="flat" w="10160">
-                      <a:solidFill>
-                        <a:srgbClr val="8C8C8C">
+                    <a:lnR algn="ctr" cmpd="sng" cap="flat" w="4445">
+                      <a:solidFill>
+                        <a:srgbClr val="CCCCCC">
                           <a:alpha val="100000"/>
                         </a:srgbClr>
                       </a:solidFill>
@@ -4393,9 +4409,9 @@
                     </a:p>
                   </a:txBody>
                   <a:tcPr anchor="ctr" marB="12700" marT="12700" marR="0" marL="0">
-                    <a:lnL algn="ctr" cmpd="sng" cap="flat" w="10160">
-                      <a:solidFill>
-                        <a:srgbClr val="8C8C8C">
+                    <a:lnL algn="ctr" cmpd="sng" cap="flat" w="4445">
+                      <a:solidFill>
+                        <a:srgbClr val="CCCCCC">
                           <a:alpha val="100000"/>
                         </a:srgbClr>
                       </a:solidFill>
@@ -4523,8 +4539,12 @@
                       <a:noFill/>
                       <a:prstDash val="solid"/>
                     </a:lnL>
-                    <a:lnR algn="ctr" cmpd="sng" cap="flat" w="0">
-                      <a:noFill/>
+                    <a:lnR algn="ctr" cmpd="sng" cap="flat" w="10160">
+                      <a:solidFill>
+                        <a:srgbClr val="8C8C8C">
+                          <a:alpha val="100000"/>
+                        </a:srgbClr>
+                      </a:solidFill>
                       <a:prstDash val="solid"/>
                     </a:lnR>
                     <a:lnT algn="ctr" cmpd="sng" cap="flat" w="0">
@@ -4580,12 +4600,20 @@
                     </a:p>
                   </a:txBody>
                   <a:tcPr anchor="ctr" marB="12700" marT="12700" marR="0" marL="0">
-                    <a:lnL algn="ctr" cmpd="sng" cap="flat" w="0">
-                      <a:noFill/>
+                    <a:lnL algn="ctr" cmpd="sng" cap="flat" w="10160">
+                      <a:solidFill>
+                        <a:srgbClr val="8C8C8C">
+                          <a:alpha val="100000"/>
+                        </a:srgbClr>
+                      </a:solidFill>
                       <a:prstDash val="solid"/>
                     </a:lnL>
-                    <a:lnR algn="ctr" cmpd="sng" cap="flat" w="0">
-                      <a:noFill/>
+                    <a:lnR algn="ctr" cmpd="sng" cap="flat" w="10160">
+                      <a:solidFill>
+                        <a:srgbClr val="8C8C8C">
+                          <a:alpha val="100000"/>
+                        </a:srgbClr>
+                      </a:solidFill>
                       <a:prstDash val="solid"/>
                     </a:lnR>
                     <a:lnT algn="ctr" cmpd="sng" cap="flat" w="0">
@@ -4641,8 +4669,12 @@
                     </a:p>
                   </a:txBody>
                   <a:tcPr anchor="ctr" marB="12700" marT="12700" marR="0" marL="0">
-                    <a:lnL algn="ctr" cmpd="sng" cap="flat" w="0">
-                      <a:noFill/>
+                    <a:lnL algn="ctr" cmpd="sng" cap="flat" w="10160">
+                      <a:solidFill>
+                        <a:srgbClr val="8C8C8C">
+                          <a:alpha val="100000"/>
+                        </a:srgbClr>
+                      </a:solidFill>
                       <a:prstDash val="solid"/>
                     </a:lnL>
                     <a:lnR algn="ctr" cmpd="sng" cap="flat" w="0">
@@ -5029,9 +5061,9 @@
                       <a:noFill/>
                       <a:prstDash val="solid"/>
                     </a:lnL>
-                    <a:lnR algn="ctr" cmpd="sng" cap="flat" w="10160">
-                      <a:solidFill>
-                        <a:srgbClr val="8C8C8C">
+                    <a:lnR algn="ctr" cmpd="sng" cap="flat" w="4445">
+                      <a:solidFill>
+                        <a:srgbClr val="CCCCCC">
                           <a:alpha val="100000"/>
                         </a:srgbClr>
                       </a:solidFill>
@@ -5090,9 +5122,9 @@
                     </a:p>
                   </a:txBody>
                   <a:tcPr anchor="ctr" marB="12700" marT="12700" marR="0" marL="0">
-                    <a:lnL algn="ctr" cmpd="sng" cap="flat" w="10160">
-                      <a:solidFill>
-                        <a:srgbClr val="8C8C8C">
+                    <a:lnL algn="ctr" cmpd="sng" cap="flat" w="4445">
+                      <a:solidFill>
+                        <a:srgbClr val="CCCCCC">
                           <a:alpha val="100000"/>
                         </a:srgbClr>
                       </a:solidFill>
@@ -5220,8 +5252,12 @@
                       <a:noFill/>
                       <a:prstDash val="solid"/>
                     </a:lnL>
-                    <a:lnR algn="ctr" cmpd="sng" cap="flat" w="0">
-                      <a:noFill/>
+                    <a:lnR algn="ctr" cmpd="sng" cap="flat" w="10160">
+                      <a:solidFill>
+                        <a:srgbClr val="8C8C8C">
+                          <a:alpha val="100000"/>
+                        </a:srgbClr>
+                      </a:solidFill>
                       <a:prstDash val="solid"/>
                     </a:lnR>
                     <a:lnT algn="ctr" cmpd="sng" cap="flat" w="0">
@@ -5277,12 +5313,20 @@
                     </a:p>
                   </a:txBody>
                   <a:tcPr anchor="ctr" marB="12700" marT="12700" marR="0" marL="0">
-                    <a:lnL algn="ctr" cmpd="sng" cap="flat" w="0">
-                      <a:noFill/>
+                    <a:lnL algn="ctr" cmpd="sng" cap="flat" w="10160">
+                      <a:solidFill>
+                        <a:srgbClr val="8C8C8C">
+                          <a:alpha val="100000"/>
+                        </a:srgbClr>
+                      </a:solidFill>
                       <a:prstDash val="solid"/>
                     </a:lnL>
-                    <a:lnR algn="ctr" cmpd="sng" cap="flat" w="0">
-                      <a:noFill/>
+                    <a:lnR algn="ctr" cmpd="sng" cap="flat" w="10160">
+                      <a:solidFill>
+                        <a:srgbClr val="8C8C8C">
+                          <a:alpha val="100000"/>
+                        </a:srgbClr>
+                      </a:solidFill>
                       <a:prstDash val="solid"/>
                     </a:lnR>
                     <a:lnT algn="ctr" cmpd="sng" cap="flat" w="0">
@@ -5338,8 +5382,12 @@
                     </a:p>
                   </a:txBody>
                   <a:tcPr anchor="ctr" marB="12700" marT="12700" marR="0" marL="0">
-                    <a:lnL algn="ctr" cmpd="sng" cap="flat" w="0">
-                      <a:noFill/>
+                    <a:lnL algn="ctr" cmpd="sng" cap="flat" w="10160">
+                      <a:solidFill>
+                        <a:srgbClr val="8C8C8C">
+                          <a:alpha val="100000"/>
+                        </a:srgbClr>
+                      </a:solidFill>
                       <a:prstDash val="solid"/>
                     </a:lnL>
                     <a:lnR algn="ctr" cmpd="sng" cap="flat" w="0">
@@ -5746,9 +5794,9 @@
                       <a:noFill/>
                       <a:prstDash val="solid"/>
                     </a:lnL>
-                    <a:lnR algn="ctr" cmpd="sng" cap="flat" w="10160">
-                      <a:solidFill>
-                        <a:srgbClr val="8C8C8C">
+                    <a:lnR algn="ctr" cmpd="sng" cap="flat" w="4445">
+                      <a:solidFill>
+                        <a:srgbClr val="CCCCCC">
                           <a:alpha val="100000"/>
                         </a:srgbClr>
                       </a:solidFill>
@@ -5811,9 +5859,9 @@
                     </a:p>
                   </a:txBody>
                   <a:tcPr anchor="ctr" marB="12700" marT="12700" marR="0" marL="0">
-                    <a:lnL algn="ctr" cmpd="sng" cap="flat" w="10160">
-                      <a:solidFill>
-                        <a:srgbClr val="8C8C8C">
+                    <a:lnL algn="ctr" cmpd="sng" cap="flat" w="4445">
+                      <a:solidFill>
+                        <a:srgbClr val="CCCCCC">
                           <a:alpha val="100000"/>
                         </a:srgbClr>
                       </a:solidFill>
@@ -5949,8 +5997,12 @@
                       <a:noFill/>
                       <a:prstDash val="solid"/>
                     </a:lnL>
-                    <a:lnR algn="ctr" cmpd="sng" cap="flat" w="0">
-                      <a:noFill/>
+                    <a:lnR algn="ctr" cmpd="sng" cap="flat" w="10160">
+                      <a:solidFill>
+                        <a:srgbClr val="8C8C8C">
+                          <a:alpha val="100000"/>
+                        </a:srgbClr>
+                      </a:solidFill>
                       <a:prstDash val="solid"/>
                     </a:lnR>
                     <a:lnT algn="ctr" cmpd="sng" cap="flat" w="4445">
@@ -6010,12 +6062,20 @@
                     </a:p>
                   </a:txBody>
                   <a:tcPr anchor="ctr" marB="12700" marT="12700" marR="0" marL="0">
-                    <a:lnL algn="ctr" cmpd="sng" cap="flat" w="0">
-                      <a:noFill/>
+                    <a:lnL algn="ctr" cmpd="sng" cap="flat" w="10160">
+                      <a:solidFill>
+                        <a:srgbClr val="8C8C8C">
+                          <a:alpha val="100000"/>
+                        </a:srgbClr>
+                      </a:solidFill>
                       <a:prstDash val="solid"/>
                     </a:lnL>
-                    <a:lnR algn="ctr" cmpd="sng" cap="flat" w="0">
-                      <a:noFill/>
+                    <a:lnR algn="ctr" cmpd="sng" cap="flat" w="10160">
+                      <a:solidFill>
+                        <a:srgbClr val="8C8C8C">
+                          <a:alpha val="100000"/>
+                        </a:srgbClr>
+                      </a:solidFill>
                       <a:prstDash val="solid"/>
                     </a:lnR>
                     <a:lnT algn="ctr" cmpd="sng" cap="flat" w="4445">
@@ -6075,8 +6135,12 @@
                     </a:p>
                   </a:txBody>
                   <a:tcPr anchor="ctr" marB="12700" marT="12700" marR="0" marL="0">
-                    <a:lnL algn="ctr" cmpd="sng" cap="flat" w="0">
-                      <a:noFill/>
+                    <a:lnL algn="ctr" cmpd="sng" cap="flat" w="10160">
+                      <a:solidFill>
+                        <a:srgbClr val="8C8C8C">
+                          <a:alpha val="100000"/>
+                        </a:srgbClr>
+                      </a:solidFill>
                       <a:prstDash val="solid"/>
                     </a:lnL>
                     <a:lnR algn="ctr" cmpd="sng" cap="flat" w="0">
@@ -6487,9 +6551,9 @@
                       <a:noFill/>
                       <a:prstDash val="solid"/>
                     </a:lnL>
-                    <a:lnR algn="ctr" cmpd="sng" cap="flat" w="10160">
-                      <a:solidFill>
-                        <a:srgbClr val="8C8C8C">
+                    <a:lnR algn="ctr" cmpd="sng" cap="flat" w="4445">
+                      <a:solidFill>
+                        <a:srgbClr val="CCCCCC">
                           <a:alpha val="100000"/>
                         </a:srgbClr>
                       </a:solidFill>
@@ -6552,9 +6616,9 @@
                     </a:p>
                   </a:txBody>
                   <a:tcPr anchor="ctr" marB="12700" marT="12700" marR="0" marL="0">
-                    <a:lnL algn="ctr" cmpd="sng" cap="flat" w="10160">
-                      <a:solidFill>
-                        <a:srgbClr val="8C8C8C">
+                    <a:lnL algn="ctr" cmpd="sng" cap="flat" w="4445">
+                      <a:solidFill>
+                        <a:srgbClr val="CCCCCC">
                           <a:alpha val="100000"/>
                         </a:srgbClr>
                       </a:solidFill>
@@ -6690,8 +6754,12 @@
                       <a:noFill/>
                       <a:prstDash val="solid"/>
                     </a:lnL>
-                    <a:lnR algn="ctr" cmpd="sng" cap="flat" w="0">
-                      <a:noFill/>
+                    <a:lnR algn="ctr" cmpd="sng" cap="flat" w="10160">
+                      <a:solidFill>
+                        <a:srgbClr val="8C8C8C">
+                          <a:alpha val="100000"/>
+                        </a:srgbClr>
+                      </a:solidFill>
                       <a:prstDash val="solid"/>
                     </a:lnR>
                     <a:lnT algn="ctr" cmpd="sng" cap="flat" w="4445">
@@ -6751,12 +6819,20 @@
                     </a:p>
                   </a:txBody>
                   <a:tcPr anchor="ctr" marB="12700" marT="12700" marR="0" marL="0">
-                    <a:lnL algn="ctr" cmpd="sng" cap="flat" w="0">
-                      <a:noFill/>
+                    <a:lnL algn="ctr" cmpd="sng" cap="flat" w="10160">
+                      <a:solidFill>
+                        <a:srgbClr val="8C8C8C">
+                          <a:alpha val="100000"/>
+                        </a:srgbClr>
+                      </a:solidFill>
                       <a:prstDash val="solid"/>
                     </a:lnL>
-                    <a:lnR algn="ctr" cmpd="sng" cap="flat" w="0">
-                      <a:noFill/>
+                    <a:lnR algn="ctr" cmpd="sng" cap="flat" w="10160">
+                      <a:solidFill>
+                        <a:srgbClr val="8C8C8C">
+                          <a:alpha val="100000"/>
+                        </a:srgbClr>
+                      </a:solidFill>
                       <a:prstDash val="solid"/>
                     </a:lnR>
                     <a:lnT algn="ctr" cmpd="sng" cap="flat" w="4445">
@@ -6816,8 +6892,12 @@
                     </a:p>
                   </a:txBody>
                   <a:tcPr anchor="ctr" marB="12700" marT="12700" marR="0" marL="0">
-                    <a:lnL algn="ctr" cmpd="sng" cap="flat" w="0">
-                      <a:noFill/>
+                    <a:lnL algn="ctr" cmpd="sng" cap="flat" w="10160">
+                      <a:solidFill>
+                        <a:srgbClr val="8C8C8C">
+                          <a:alpha val="100000"/>
+                        </a:srgbClr>
+                      </a:solidFill>
                       <a:prstDash val="solid"/>
                     </a:lnL>
                     <a:lnR algn="ctr" cmpd="sng" cap="flat" w="0">
@@ -7228,9 +7308,9 @@
                       <a:noFill/>
                       <a:prstDash val="solid"/>
                     </a:lnL>
-                    <a:lnR algn="ctr" cmpd="sng" cap="flat" w="10160">
-                      <a:solidFill>
-                        <a:srgbClr val="8C8C8C">
+                    <a:lnR algn="ctr" cmpd="sng" cap="flat" w="4445">
+                      <a:solidFill>
+                        <a:srgbClr val="CCCCCC">
                           <a:alpha val="100000"/>
                         </a:srgbClr>
                       </a:solidFill>
@@ -7293,9 +7373,9 @@
                     </a:p>
                   </a:txBody>
                   <a:tcPr anchor="ctr" marB="12700" marT="12700" marR="0" marL="0">
-                    <a:lnL algn="ctr" cmpd="sng" cap="flat" w="10160">
-                      <a:solidFill>
-                        <a:srgbClr val="8C8C8C">
+                    <a:lnL algn="ctr" cmpd="sng" cap="flat" w="4445">
+                      <a:solidFill>
+                        <a:srgbClr val="CCCCCC">
                           <a:alpha val="100000"/>
                         </a:srgbClr>
                       </a:solidFill>
@@ -7431,8 +7511,12 @@
                       <a:noFill/>
                       <a:prstDash val="solid"/>
                     </a:lnL>
-                    <a:lnR algn="ctr" cmpd="sng" cap="flat" w="0">
-                      <a:noFill/>
+                    <a:lnR algn="ctr" cmpd="sng" cap="flat" w="10160">
+                      <a:solidFill>
+                        <a:srgbClr val="8C8C8C">
+                          <a:alpha val="100000"/>
+                        </a:srgbClr>
+                      </a:solidFill>
                       <a:prstDash val="solid"/>
                     </a:lnR>
                     <a:lnT algn="ctr" cmpd="sng" cap="flat" w="4445">
@@ -7492,12 +7576,20 @@
                     </a:p>
                   </a:txBody>
                   <a:tcPr anchor="ctr" marB="12700" marT="12700" marR="0" marL="0">
-                    <a:lnL algn="ctr" cmpd="sng" cap="flat" w="0">
-                      <a:noFill/>
+                    <a:lnL algn="ctr" cmpd="sng" cap="flat" w="10160">
+                      <a:solidFill>
+                        <a:srgbClr val="8C8C8C">
+                          <a:alpha val="100000"/>
+                        </a:srgbClr>
+                      </a:solidFill>
                       <a:prstDash val="solid"/>
                     </a:lnL>
-                    <a:lnR algn="ctr" cmpd="sng" cap="flat" w="0">
-                      <a:noFill/>
+                    <a:lnR algn="ctr" cmpd="sng" cap="flat" w="10160">
+                      <a:solidFill>
+                        <a:srgbClr val="8C8C8C">
+                          <a:alpha val="100000"/>
+                        </a:srgbClr>
+                      </a:solidFill>
                       <a:prstDash val="solid"/>
                     </a:lnR>
                     <a:lnT algn="ctr" cmpd="sng" cap="flat" w="4445">
@@ -7557,8 +7649,12 @@
                     </a:p>
                   </a:txBody>
                   <a:tcPr anchor="ctr" marB="12700" marT="12700" marR="0" marL="0">
-                    <a:lnL algn="ctr" cmpd="sng" cap="flat" w="0">
-                      <a:noFill/>
+                    <a:lnL algn="ctr" cmpd="sng" cap="flat" w="10160">
+                      <a:solidFill>
+                        <a:srgbClr val="8C8C8C">
+                          <a:alpha val="100000"/>
+                        </a:srgbClr>
+                      </a:solidFill>
                       <a:prstDash val="solid"/>
                     </a:lnL>
                     <a:lnR algn="ctr" cmpd="sng" cap="flat" w="0">
@@ -7969,9 +8065,9 @@
                       <a:noFill/>
                       <a:prstDash val="solid"/>
                     </a:lnL>
-                    <a:lnR algn="ctr" cmpd="sng" cap="flat" w="10160">
-                      <a:solidFill>
-                        <a:srgbClr val="8C8C8C">
+                    <a:lnR algn="ctr" cmpd="sng" cap="flat" w="4445">
+                      <a:solidFill>
+                        <a:srgbClr val="CCCCCC">
                           <a:alpha val="100000"/>
                         </a:srgbClr>
                       </a:solidFill>
@@ -8034,9 +8130,9 @@
                     </a:p>
                   </a:txBody>
                   <a:tcPr anchor="ctr" marB="12700" marT="12700" marR="0" marL="0">
-                    <a:lnL algn="ctr" cmpd="sng" cap="flat" w="10160">
-                      <a:solidFill>
-                        <a:srgbClr val="8C8C8C">
+                    <a:lnL algn="ctr" cmpd="sng" cap="flat" w="4445">
+                      <a:solidFill>
+                        <a:srgbClr val="CCCCCC">
                           <a:alpha val="100000"/>
                         </a:srgbClr>
                       </a:solidFill>
@@ -8172,8 +8268,12 @@
                       <a:noFill/>
                       <a:prstDash val="solid"/>
                     </a:lnL>
-                    <a:lnR algn="ctr" cmpd="sng" cap="flat" w="0">
-                      <a:noFill/>
+                    <a:lnR algn="ctr" cmpd="sng" cap="flat" w="10160">
+                      <a:solidFill>
+                        <a:srgbClr val="8C8C8C">
+                          <a:alpha val="100000"/>
+                        </a:srgbClr>
+                      </a:solidFill>
                       <a:prstDash val="solid"/>
                     </a:lnR>
                     <a:lnT algn="ctr" cmpd="sng" cap="flat" w="4445">
@@ -8233,12 +8333,20 @@
                     </a:p>
                   </a:txBody>
                   <a:tcPr anchor="ctr" marB="12700" marT="12700" marR="0" marL="0">
-                    <a:lnL algn="ctr" cmpd="sng" cap="flat" w="0">
-                      <a:noFill/>
+                    <a:lnL algn="ctr" cmpd="sng" cap="flat" w="10160">
+                      <a:solidFill>
+                        <a:srgbClr val="8C8C8C">
+                          <a:alpha val="100000"/>
+                        </a:srgbClr>
+                      </a:solidFill>
                       <a:prstDash val="solid"/>
                     </a:lnL>
-                    <a:lnR algn="ctr" cmpd="sng" cap="flat" w="0">
-                      <a:noFill/>
+                    <a:lnR algn="ctr" cmpd="sng" cap="flat" w="10160">
+                      <a:solidFill>
+                        <a:srgbClr val="8C8C8C">
+                          <a:alpha val="100000"/>
+                        </a:srgbClr>
+                      </a:solidFill>
                       <a:prstDash val="solid"/>
                     </a:lnR>
                     <a:lnT algn="ctr" cmpd="sng" cap="flat" w="4445">
@@ -8298,8 +8406,12 @@
                     </a:p>
                   </a:txBody>
                   <a:tcPr anchor="ctr" marB="12700" marT="12700" marR="0" marL="0">
-                    <a:lnL algn="ctr" cmpd="sng" cap="flat" w="0">
-                      <a:noFill/>
+                    <a:lnL algn="ctr" cmpd="sng" cap="flat" w="10160">
+                      <a:solidFill>
+                        <a:srgbClr val="8C8C8C">
+                          <a:alpha val="100000"/>
+                        </a:srgbClr>
+                      </a:solidFill>
                       <a:prstDash val="solid"/>
                     </a:lnL>
                     <a:lnR algn="ctr" cmpd="sng" cap="flat" w="0">
@@ -8710,9 +8822,9 @@
                       <a:noFill/>
                       <a:prstDash val="solid"/>
                     </a:lnL>
-                    <a:lnR algn="ctr" cmpd="sng" cap="flat" w="10160">
-                      <a:solidFill>
-                        <a:srgbClr val="8C8C8C">
+                    <a:lnR algn="ctr" cmpd="sng" cap="flat" w="4445">
+                      <a:solidFill>
+                        <a:srgbClr val="CCCCCC">
                           <a:alpha val="100000"/>
                         </a:srgbClr>
                       </a:solidFill>
@@ -8775,9 +8887,9 @@
                     </a:p>
                   </a:txBody>
                   <a:tcPr anchor="ctr" marB="12700" marT="12700" marR="0" marL="0">
-                    <a:lnL algn="ctr" cmpd="sng" cap="flat" w="10160">
-                      <a:solidFill>
-                        <a:srgbClr val="8C8C8C">
+                    <a:lnL algn="ctr" cmpd="sng" cap="flat" w="4445">
+                      <a:solidFill>
+                        <a:srgbClr val="CCCCCC">
                           <a:alpha val="100000"/>
                         </a:srgbClr>
                       </a:solidFill>
@@ -8913,8 +9025,12 @@
                       <a:noFill/>
                       <a:prstDash val="solid"/>
                     </a:lnL>
-                    <a:lnR algn="ctr" cmpd="sng" cap="flat" w="0">
-                      <a:noFill/>
+                    <a:lnR algn="ctr" cmpd="sng" cap="flat" w="10160">
+                      <a:solidFill>
+                        <a:srgbClr val="8C8C8C">
+                          <a:alpha val="100000"/>
+                        </a:srgbClr>
+                      </a:solidFill>
                       <a:prstDash val="solid"/>
                     </a:lnR>
                     <a:lnT algn="ctr" cmpd="sng" cap="flat" w="4445">
@@ -8974,12 +9090,20 @@
                     </a:p>
                   </a:txBody>
                   <a:tcPr anchor="ctr" marB="12700" marT="12700" marR="0" marL="0">
-                    <a:lnL algn="ctr" cmpd="sng" cap="flat" w="0">
-                      <a:noFill/>
+                    <a:lnL algn="ctr" cmpd="sng" cap="flat" w="10160">
+                      <a:solidFill>
+                        <a:srgbClr val="8C8C8C">
+                          <a:alpha val="100000"/>
+                        </a:srgbClr>
+                      </a:solidFill>
                       <a:prstDash val="solid"/>
                     </a:lnL>
-                    <a:lnR algn="ctr" cmpd="sng" cap="flat" w="0">
-                      <a:noFill/>
+                    <a:lnR algn="ctr" cmpd="sng" cap="flat" w="10160">
+                      <a:solidFill>
+                        <a:srgbClr val="8C8C8C">
+                          <a:alpha val="100000"/>
+                        </a:srgbClr>
+                      </a:solidFill>
                       <a:prstDash val="solid"/>
                     </a:lnR>
                     <a:lnT algn="ctr" cmpd="sng" cap="flat" w="4445">
@@ -9039,8 +9163,12 @@
                     </a:p>
                   </a:txBody>
                   <a:tcPr anchor="ctr" marB="12700" marT="12700" marR="0" marL="0">
-                    <a:lnL algn="ctr" cmpd="sng" cap="flat" w="0">
-                      <a:noFill/>
+                    <a:lnL algn="ctr" cmpd="sng" cap="flat" w="10160">
+                      <a:solidFill>
+                        <a:srgbClr val="8C8C8C">
+                          <a:alpha val="100000"/>
+                        </a:srgbClr>
+                      </a:solidFill>
                       <a:prstDash val="solid"/>
                     </a:lnL>
                     <a:lnR algn="ctr" cmpd="sng" cap="flat" w="0">
@@ -9451,9 +9579,9 @@
                       <a:noFill/>
                       <a:prstDash val="solid"/>
                     </a:lnL>
-                    <a:lnR algn="ctr" cmpd="sng" cap="flat" w="10160">
-                      <a:solidFill>
-                        <a:srgbClr val="8C8C8C">
+                    <a:lnR algn="ctr" cmpd="sng" cap="flat" w="4445">
+                      <a:solidFill>
+                        <a:srgbClr val="CCCCCC">
                           <a:alpha val="100000"/>
                         </a:srgbClr>
                       </a:solidFill>
@@ -9516,9 +9644,9 @@
                     </a:p>
                   </a:txBody>
                   <a:tcPr anchor="ctr" marB="12700" marT="12700" marR="0" marL="0">
-                    <a:lnL algn="ctr" cmpd="sng" cap="flat" w="10160">
-                      <a:solidFill>
-                        <a:srgbClr val="8C8C8C">
+                    <a:lnL algn="ctr" cmpd="sng" cap="flat" w="4445">
+                      <a:solidFill>
+                        <a:srgbClr val="CCCCCC">
                           <a:alpha val="100000"/>
                         </a:srgbClr>
                       </a:solidFill>
@@ -9654,8 +9782,12 @@
                       <a:noFill/>
                       <a:prstDash val="solid"/>
                     </a:lnL>
-                    <a:lnR algn="ctr" cmpd="sng" cap="flat" w="0">
-                      <a:noFill/>
+                    <a:lnR algn="ctr" cmpd="sng" cap="flat" w="10160">
+                      <a:solidFill>
+                        <a:srgbClr val="8C8C8C">
+                          <a:alpha val="100000"/>
+                        </a:srgbClr>
+                      </a:solidFill>
                       <a:prstDash val="solid"/>
                     </a:lnR>
                     <a:lnT algn="ctr" cmpd="sng" cap="flat" w="4445">
@@ -9715,12 +9847,20 @@
                     </a:p>
                   </a:txBody>
                   <a:tcPr anchor="ctr" marB="12700" marT="12700" marR="0" marL="0">
-                    <a:lnL algn="ctr" cmpd="sng" cap="flat" w="0">
-                      <a:noFill/>
+                    <a:lnL algn="ctr" cmpd="sng" cap="flat" w="10160">
+                      <a:solidFill>
+                        <a:srgbClr val="8C8C8C">
+                          <a:alpha val="100000"/>
+                        </a:srgbClr>
+                      </a:solidFill>
                       <a:prstDash val="solid"/>
                     </a:lnL>
-                    <a:lnR algn="ctr" cmpd="sng" cap="flat" w="0">
-                      <a:noFill/>
+                    <a:lnR algn="ctr" cmpd="sng" cap="flat" w="10160">
+                      <a:solidFill>
+                        <a:srgbClr val="8C8C8C">
+                          <a:alpha val="100000"/>
+                        </a:srgbClr>
+                      </a:solidFill>
                       <a:prstDash val="solid"/>
                     </a:lnR>
                     <a:lnT algn="ctr" cmpd="sng" cap="flat" w="4445">
@@ -9780,8 +9920,12 @@
                     </a:p>
                   </a:txBody>
                   <a:tcPr anchor="ctr" marB="12700" marT="12700" marR="0" marL="0">
-                    <a:lnL algn="ctr" cmpd="sng" cap="flat" w="0">
-                      <a:noFill/>
+                    <a:lnL algn="ctr" cmpd="sng" cap="flat" w="10160">
+                      <a:solidFill>
+                        <a:srgbClr val="8C8C8C">
+                          <a:alpha val="100000"/>
+                        </a:srgbClr>
+                      </a:solidFill>
                       <a:prstDash val="solid"/>
                     </a:lnL>
                     <a:lnR algn="ctr" cmpd="sng" cap="flat" w="0">
@@ -10192,9 +10336,9 @@
                       <a:noFill/>
                       <a:prstDash val="solid"/>
                     </a:lnL>
-                    <a:lnR algn="ctr" cmpd="sng" cap="flat" w="10160">
-                      <a:solidFill>
-                        <a:srgbClr val="8C8C8C">
+                    <a:lnR algn="ctr" cmpd="sng" cap="flat" w="4445">
+                      <a:solidFill>
+                        <a:srgbClr val="CCCCCC">
                           <a:alpha val="100000"/>
                         </a:srgbClr>
                       </a:solidFill>
@@ -10257,9 +10401,9 @@
                     </a:p>
                   </a:txBody>
                   <a:tcPr anchor="ctr" marB="12700" marT="12700" marR="0" marL="0">
-                    <a:lnL algn="ctr" cmpd="sng" cap="flat" w="10160">
-                      <a:solidFill>
-                        <a:srgbClr val="8C8C8C">
+                    <a:lnL algn="ctr" cmpd="sng" cap="flat" w="4445">
+                      <a:solidFill>
+                        <a:srgbClr val="CCCCCC">
                           <a:alpha val="100000"/>
                         </a:srgbClr>
                       </a:solidFill>
@@ -10395,8 +10539,12 @@
                       <a:noFill/>
                       <a:prstDash val="solid"/>
                     </a:lnL>
-                    <a:lnR algn="ctr" cmpd="sng" cap="flat" w="0">
-                      <a:noFill/>
+                    <a:lnR algn="ctr" cmpd="sng" cap="flat" w="10160">
+                      <a:solidFill>
+                        <a:srgbClr val="8C8C8C">
+                          <a:alpha val="100000"/>
+                        </a:srgbClr>
+                      </a:solidFill>
                       <a:prstDash val="solid"/>
                     </a:lnR>
                     <a:lnT algn="ctr" cmpd="sng" cap="flat" w="4445">
@@ -10456,12 +10604,20 @@
                     </a:p>
                   </a:txBody>
                   <a:tcPr anchor="ctr" marB="12700" marT="12700" marR="0" marL="0">
-                    <a:lnL algn="ctr" cmpd="sng" cap="flat" w="0">
-                      <a:noFill/>
+                    <a:lnL algn="ctr" cmpd="sng" cap="flat" w="10160">
+                      <a:solidFill>
+                        <a:srgbClr val="8C8C8C">
+                          <a:alpha val="100000"/>
+                        </a:srgbClr>
+                      </a:solidFill>
                       <a:prstDash val="solid"/>
                     </a:lnL>
-                    <a:lnR algn="ctr" cmpd="sng" cap="flat" w="0">
-                      <a:noFill/>
+                    <a:lnR algn="ctr" cmpd="sng" cap="flat" w="10160">
+                      <a:solidFill>
+                        <a:srgbClr val="8C8C8C">
+                          <a:alpha val="100000"/>
+                        </a:srgbClr>
+                      </a:solidFill>
                       <a:prstDash val="solid"/>
                     </a:lnR>
                     <a:lnT algn="ctr" cmpd="sng" cap="flat" w="4445">
@@ -10521,8 +10677,12 @@
                     </a:p>
                   </a:txBody>
                   <a:tcPr anchor="ctr" marB="12700" marT="12700" marR="0" marL="0">
-                    <a:lnL algn="ctr" cmpd="sng" cap="flat" w="0">
-                      <a:noFill/>
+                    <a:lnL algn="ctr" cmpd="sng" cap="flat" w="10160">
+                      <a:solidFill>
+                        <a:srgbClr val="8C8C8C">
+                          <a:alpha val="100000"/>
+                        </a:srgbClr>
+                      </a:solidFill>
                       <a:prstDash val="solid"/>
                     </a:lnL>
                     <a:lnR algn="ctr" cmpd="sng" cap="flat" w="0">
@@ -10933,9 +11093,9 @@
                       <a:noFill/>
                       <a:prstDash val="solid"/>
                     </a:lnL>
-                    <a:lnR algn="ctr" cmpd="sng" cap="flat" w="10160">
-                      <a:solidFill>
-                        <a:srgbClr val="8C8C8C">
+                    <a:lnR algn="ctr" cmpd="sng" cap="flat" w="4445">
+                      <a:solidFill>
+                        <a:srgbClr val="CCCCCC">
                           <a:alpha val="100000"/>
                         </a:srgbClr>
                       </a:solidFill>
@@ -10998,9 +11158,9 @@
                     </a:p>
                   </a:txBody>
                   <a:tcPr anchor="ctr" marB="12700" marT="12700" marR="0" marL="0">
-                    <a:lnL algn="ctr" cmpd="sng" cap="flat" w="10160">
-                      <a:solidFill>
-                        <a:srgbClr val="8C8C8C">
+                    <a:lnL algn="ctr" cmpd="sng" cap="flat" w="4445">
+                      <a:solidFill>
+                        <a:srgbClr val="CCCCCC">
                           <a:alpha val="100000"/>
                         </a:srgbClr>
                       </a:solidFill>
@@ -11136,8 +11296,12 @@
                       <a:noFill/>
                       <a:prstDash val="solid"/>
                     </a:lnL>
-                    <a:lnR algn="ctr" cmpd="sng" cap="flat" w="0">
-                      <a:noFill/>
+                    <a:lnR algn="ctr" cmpd="sng" cap="flat" w="10160">
+                      <a:solidFill>
+                        <a:srgbClr val="8C8C8C">
+                          <a:alpha val="100000"/>
+                        </a:srgbClr>
+                      </a:solidFill>
                       <a:prstDash val="solid"/>
                     </a:lnR>
                     <a:lnT algn="ctr" cmpd="sng" cap="flat" w="4445">
@@ -11197,12 +11361,20 @@
                     </a:p>
                   </a:txBody>
                   <a:tcPr anchor="ctr" marB="12700" marT="12700" marR="0" marL="0">
-                    <a:lnL algn="ctr" cmpd="sng" cap="flat" w="0">
-                      <a:noFill/>
+                    <a:lnL algn="ctr" cmpd="sng" cap="flat" w="10160">
+                      <a:solidFill>
+                        <a:srgbClr val="8C8C8C">
+                          <a:alpha val="100000"/>
+                        </a:srgbClr>
+                      </a:solidFill>
                       <a:prstDash val="solid"/>
                     </a:lnL>
-                    <a:lnR algn="ctr" cmpd="sng" cap="flat" w="0">
-                      <a:noFill/>
+                    <a:lnR algn="ctr" cmpd="sng" cap="flat" w="10160">
+                      <a:solidFill>
+                        <a:srgbClr val="8C8C8C">
+                          <a:alpha val="100000"/>
+                        </a:srgbClr>
+                      </a:solidFill>
                       <a:prstDash val="solid"/>
                     </a:lnR>
                     <a:lnT algn="ctr" cmpd="sng" cap="flat" w="4445">
@@ -11262,8 +11434,12 @@
                     </a:p>
                   </a:txBody>
                   <a:tcPr anchor="ctr" marB="12700" marT="12700" marR="0" marL="0">
-                    <a:lnL algn="ctr" cmpd="sng" cap="flat" w="0">
-                      <a:noFill/>
+                    <a:lnL algn="ctr" cmpd="sng" cap="flat" w="10160">
+                      <a:solidFill>
+                        <a:srgbClr val="8C8C8C">
+                          <a:alpha val="100000"/>
+                        </a:srgbClr>
+                      </a:solidFill>
                       <a:prstDash val="solid"/>
                     </a:lnL>
                     <a:lnR algn="ctr" cmpd="sng" cap="flat" w="0">
@@ -11674,9 +11850,9 @@
                       <a:noFill/>
                       <a:prstDash val="solid"/>
                     </a:lnL>
-                    <a:lnR algn="ctr" cmpd="sng" cap="flat" w="10160">
-                      <a:solidFill>
-                        <a:srgbClr val="8C8C8C">
+                    <a:lnR algn="ctr" cmpd="sng" cap="flat" w="4445">
+                      <a:solidFill>
+                        <a:srgbClr val="CCCCCC">
                           <a:alpha val="100000"/>
                         </a:srgbClr>
                       </a:solidFill>
@@ -11739,9 +11915,9 @@
                     </a:p>
                   </a:txBody>
                   <a:tcPr anchor="ctr" marB="12700" marT="12700" marR="0" marL="0">
-                    <a:lnL algn="ctr" cmpd="sng" cap="flat" w="10160">
-                      <a:solidFill>
-                        <a:srgbClr val="8C8C8C">
+                    <a:lnL algn="ctr" cmpd="sng" cap="flat" w="4445">
+                      <a:solidFill>
+                        <a:srgbClr val="CCCCCC">
                           <a:alpha val="100000"/>
                         </a:srgbClr>
                       </a:solidFill>
@@ -11877,8 +12053,12 @@
                       <a:noFill/>
                       <a:prstDash val="solid"/>
                     </a:lnL>
-                    <a:lnR algn="ctr" cmpd="sng" cap="flat" w="0">
-                      <a:noFill/>
+                    <a:lnR algn="ctr" cmpd="sng" cap="flat" w="10160">
+                      <a:solidFill>
+                        <a:srgbClr val="8C8C8C">
+                          <a:alpha val="100000"/>
+                        </a:srgbClr>
+                      </a:solidFill>
                       <a:prstDash val="solid"/>
                     </a:lnR>
                     <a:lnT algn="ctr" cmpd="sng" cap="flat" w="4445">
@@ -11938,12 +12118,20 @@
                     </a:p>
                   </a:txBody>
                   <a:tcPr anchor="ctr" marB="12700" marT="12700" marR="0" marL="0">
-                    <a:lnL algn="ctr" cmpd="sng" cap="flat" w="0">
-                      <a:noFill/>
+                    <a:lnL algn="ctr" cmpd="sng" cap="flat" w="10160">
+                      <a:solidFill>
+                        <a:srgbClr val="8C8C8C">
+                          <a:alpha val="100000"/>
+                        </a:srgbClr>
+                      </a:solidFill>
                       <a:prstDash val="solid"/>
                     </a:lnL>
-                    <a:lnR algn="ctr" cmpd="sng" cap="flat" w="0">
-                      <a:noFill/>
+                    <a:lnR algn="ctr" cmpd="sng" cap="flat" w="10160">
+                      <a:solidFill>
+                        <a:srgbClr val="8C8C8C">
+                          <a:alpha val="100000"/>
+                        </a:srgbClr>
+                      </a:solidFill>
                       <a:prstDash val="solid"/>
                     </a:lnR>
                     <a:lnT algn="ctr" cmpd="sng" cap="flat" w="4445">
@@ -12003,8 +12191,12 @@
                     </a:p>
                   </a:txBody>
                   <a:tcPr anchor="ctr" marB="12700" marT="12700" marR="0" marL="0">
-                    <a:lnL algn="ctr" cmpd="sng" cap="flat" w="0">
-                      <a:noFill/>
+                    <a:lnL algn="ctr" cmpd="sng" cap="flat" w="10160">
+                      <a:solidFill>
+                        <a:srgbClr val="8C8C8C">
+                          <a:alpha val="100000"/>
+                        </a:srgbClr>
+                      </a:solidFill>
                       <a:prstDash val="solid"/>
                     </a:lnL>
                     <a:lnR algn="ctr" cmpd="sng" cap="flat" w="0">
@@ -12415,9 +12607,9 @@
                       <a:noFill/>
                       <a:prstDash val="solid"/>
                     </a:lnL>
-                    <a:lnR algn="ctr" cmpd="sng" cap="flat" w="10160">
-                      <a:solidFill>
-                        <a:srgbClr val="8C8C8C">
+                    <a:lnR algn="ctr" cmpd="sng" cap="flat" w="4445">
+                      <a:solidFill>
+                        <a:srgbClr val="CCCCCC">
                           <a:alpha val="100000"/>
                         </a:srgbClr>
                       </a:solidFill>
@@ -12480,9 +12672,9 @@
                     </a:p>
                   </a:txBody>
                   <a:tcPr anchor="ctr" marB="12700" marT="12700" marR="0" marL="0">
-                    <a:lnL algn="ctr" cmpd="sng" cap="flat" w="10160">
-                      <a:solidFill>
-                        <a:srgbClr val="8C8C8C">
+                    <a:lnL algn="ctr" cmpd="sng" cap="flat" w="4445">
+                      <a:solidFill>
+                        <a:srgbClr val="CCCCCC">
                           <a:alpha val="100000"/>
                         </a:srgbClr>
                       </a:solidFill>
@@ -12618,8 +12810,12 @@
                       <a:noFill/>
                       <a:prstDash val="solid"/>
                     </a:lnL>
-                    <a:lnR algn="ctr" cmpd="sng" cap="flat" w="0">
-                      <a:noFill/>
+                    <a:lnR algn="ctr" cmpd="sng" cap="flat" w="10160">
+                      <a:solidFill>
+                        <a:srgbClr val="8C8C8C">
+                          <a:alpha val="100000"/>
+                        </a:srgbClr>
+                      </a:solidFill>
                       <a:prstDash val="solid"/>
                     </a:lnR>
                     <a:lnT algn="ctr" cmpd="sng" cap="flat" w="4445">
@@ -12679,12 +12875,20 @@
                     </a:p>
                   </a:txBody>
                   <a:tcPr anchor="ctr" marB="12700" marT="12700" marR="0" marL="0">
-                    <a:lnL algn="ctr" cmpd="sng" cap="flat" w="0">
-                      <a:noFill/>
+                    <a:lnL algn="ctr" cmpd="sng" cap="flat" w="10160">
+                      <a:solidFill>
+                        <a:srgbClr val="8C8C8C">
+                          <a:alpha val="100000"/>
+                        </a:srgbClr>
+                      </a:solidFill>
                       <a:prstDash val="solid"/>
                     </a:lnL>
-                    <a:lnR algn="ctr" cmpd="sng" cap="flat" w="0">
-                      <a:noFill/>
+                    <a:lnR algn="ctr" cmpd="sng" cap="flat" w="10160">
+                      <a:solidFill>
+                        <a:srgbClr val="8C8C8C">
+                          <a:alpha val="100000"/>
+                        </a:srgbClr>
+                      </a:solidFill>
                       <a:prstDash val="solid"/>
                     </a:lnR>
                     <a:lnT algn="ctr" cmpd="sng" cap="flat" w="4445">
@@ -12744,8 +12948,12 @@
                     </a:p>
                   </a:txBody>
                   <a:tcPr anchor="ctr" marB="12700" marT="12700" marR="0" marL="0">
-                    <a:lnL algn="ctr" cmpd="sng" cap="flat" w="0">
-                      <a:noFill/>
+                    <a:lnL algn="ctr" cmpd="sng" cap="flat" w="10160">
+                      <a:solidFill>
+                        <a:srgbClr val="8C8C8C">
+                          <a:alpha val="100000"/>
+                        </a:srgbClr>
+                      </a:solidFill>
                       <a:prstDash val="solid"/>
                     </a:lnL>
                     <a:lnR algn="ctr" cmpd="sng" cap="flat" w="0">
@@ -13156,9 +13364,9 @@
                       <a:noFill/>
                       <a:prstDash val="solid"/>
                     </a:lnL>
-                    <a:lnR algn="ctr" cmpd="sng" cap="flat" w="10160">
-                      <a:solidFill>
-                        <a:srgbClr val="8C8C8C">
+                    <a:lnR algn="ctr" cmpd="sng" cap="flat" w="4445">
+                      <a:solidFill>
+                        <a:srgbClr val="CCCCCC">
                           <a:alpha val="100000"/>
                         </a:srgbClr>
                       </a:solidFill>
@@ -13221,9 +13429,9 @@
                     </a:p>
                   </a:txBody>
                   <a:tcPr anchor="ctr" marB="12700" marT="12700" marR="0" marL="0">
-                    <a:lnL algn="ctr" cmpd="sng" cap="flat" w="10160">
-                      <a:solidFill>
-                        <a:srgbClr val="8C8C8C">
+                    <a:lnL algn="ctr" cmpd="sng" cap="flat" w="4445">
+                      <a:solidFill>
+                        <a:srgbClr val="CCCCCC">
                           <a:alpha val="100000"/>
                         </a:srgbClr>
                       </a:solidFill>
@@ -13359,8 +13567,12 @@
                       <a:noFill/>
                       <a:prstDash val="solid"/>
                     </a:lnL>
-                    <a:lnR algn="ctr" cmpd="sng" cap="flat" w="0">
-                      <a:noFill/>
+                    <a:lnR algn="ctr" cmpd="sng" cap="flat" w="10160">
+                      <a:solidFill>
+                        <a:srgbClr val="8C8C8C">
+                          <a:alpha val="100000"/>
+                        </a:srgbClr>
+                      </a:solidFill>
                       <a:prstDash val="solid"/>
                     </a:lnR>
                     <a:lnT algn="ctr" cmpd="sng" cap="flat" w="4445">
@@ -13420,12 +13632,20 @@
                     </a:p>
                   </a:txBody>
                   <a:tcPr anchor="ctr" marB="12700" marT="12700" marR="0" marL="0">
-                    <a:lnL algn="ctr" cmpd="sng" cap="flat" w="0">
-                      <a:noFill/>
+                    <a:lnL algn="ctr" cmpd="sng" cap="flat" w="10160">
+                      <a:solidFill>
+                        <a:srgbClr val="8C8C8C">
+                          <a:alpha val="100000"/>
+                        </a:srgbClr>
+                      </a:solidFill>
                       <a:prstDash val="solid"/>
                     </a:lnL>
-                    <a:lnR algn="ctr" cmpd="sng" cap="flat" w="0">
-                      <a:noFill/>
+                    <a:lnR algn="ctr" cmpd="sng" cap="flat" w="10160">
+                      <a:solidFill>
+                        <a:srgbClr val="8C8C8C">
+                          <a:alpha val="100000"/>
+                        </a:srgbClr>
+                      </a:solidFill>
                       <a:prstDash val="solid"/>
                     </a:lnR>
                     <a:lnT algn="ctr" cmpd="sng" cap="flat" w="4445">
@@ -13485,8 +13705,12 @@
                     </a:p>
                   </a:txBody>
                   <a:tcPr anchor="ctr" marB="12700" marT="12700" marR="0" marL="0">
-                    <a:lnL algn="ctr" cmpd="sng" cap="flat" w="0">
-                      <a:noFill/>
+                    <a:lnL algn="ctr" cmpd="sng" cap="flat" w="10160">
+                      <a:solidFill>
+                        <a:srgbClr val="8C8C8C">
+                          <a:alpha val="100000"/>
+                        </a:srgbClr>
+                      </a:solidFill>
                       <a:prstDash val="solid"/>
                     </a:lnL>
                     <a:lnR algn="ctr" cmpd="sng" cap="flat" w="0">

--- a/output/sigma_summary_latest.pptx
+++ b/output/sigma_summary_latest.pptx
@@ -3248,8 +3248,8 @@
                 <a:gridCol w="594360"/>
                 <a:gridCol w="594360"/>
                 <a:gridCol w="640080"/>
+                <a:gridCol w="2231136"/>
                 <a:gridCol w="3474720"/>
-                <a:gridCol w="2231136"/>
               </a:tblGrid>
               <a:tr h="210312">
                 <a:tc gridSpan="3">
@@ -3874,7 +3874,7 @@
                           <a:ea typeface="Arial"/>
                           <a:sym typeface="Arial"/>
                         </a:rPr>
-                        <a:t>TREND</a:t>
+                        <a:t>비고</a:t>
                       </a:r>
                     </a:p>
                   </a:txBody>
@@ -3947,7 +3947,7 @@
                           <a:ea typeface="Arial"/>
                           <a:sym typeface="Arial"/>
                         </a:rPr>
-                        <a:t>비고</a:t>
+                        <a:t>TREND</a:t>
                       </a:r>
                     </a:p>
                   </a:txBody>

--- a/output/sigma_summary_latest.pptx
+++ b/output/sigma_summary_latest.pptx
@@ -11,6 +11,7 @@
     <p:sldId id="259" r:id="rId10"/>
     <p:sldId id="260" r:id="rId11"/>
     <p:sldId id="261" r:id="rId12"/>
+    <p:sldId id="262" r:id="rId13"/>
   </p:sldIdLst>
   <p:sldSz cx="12191695" cy="6858000" type="screen4x3"/>
   <p:notesSz cx="6858000" cy="9144000"/>
@@ -13887,6 +13888,3091 @@
                 <a:ea typeface="Arial"/>
                 <a:sym typeface="Arial"/>
               </a:rPr>
+              <a:t> GOOBAE: WL trend by REF/TARGET</a:t>
+            </a:r>
+          </a:p>
+          <a:p>
+            <a:pPr algn="l" marL="0" marR="0">
+              <a:lnSpc>
+                <a:spcPct val="100000"/>
+              </a:lnSpc>
+              <a:spcBef>
+                <a:spcPts val="0"/>
+              </a:spcBef>
+              <a:spcAft>
+                <a:spcPts val="0"/>
+              </a:spcAft>
+              <a:buNone/>
+            </a:pPr>
+            <a:r>
+              <a:rPr cap="none" sz="1100" i="0" b="1" u="none" strike="noStrike">
+                <a:solidFill>
+                  <a:srgbClr val="333333">
+                    <a:alpha val="100000"/>
+                  </a:srgbClr>
+                </a:solidFill>
+                <a:latin typeface="Arial"/>
+                <a:cs typeface="Arial"/>
+                <a:ea typeface="Arial"/>
+                <a:sym typeface="Arial"/>
+              </a:rPr>
+              <a:t>■</a:t>
+            </a:r>
+            <a:r>
+              <a:rPr cap="none" sz="1100" i="0" b="0" u="none" strike="noStrike">
+                <a:solidFill>
+                  <a:srgbClr val="333333">
+                    <a:alpha val="100000"/>
+                  </a:srgbClr>
+                </a:solidFill>
+                <a:latin typeface="Arial"/>
+                <a:cs typeface="Arial"/>
+                <a:ea typeface="Arial"/>
+                <a:sym typeface="Arial"/>
+              </a:rPr>
+              <a:t> REF: A / TARGET: B</a:t>
+            </a:r>
+          </a:p>
+          <a:p>
+            <a:pPr algn="l" marL="0" marR="0">
+              <a:lnSpc>
+                <a:spcPct val="100000"/>
+              </a:lnSpc>
+              <a:spcBef>
+                <a:spcPts val="0"/>
+              </a:spcBef>
+              <a:spcAft>
+                <a:spcPts val="0"/>
+              </a:spcAft>
+              <a:buNone/>
+            </a:pPr>
+            <a:r>
+              <a:rPr cap="none" sz="1100" i="0" b="1" u="none" strike="noStrike">
+                <a:solidFill>
+                  <a:srgbClr val="333333">
+                    <a:alpha val="100000"/>
+                  </a:srgbClr>
+                </a:solidFill>
+                <a:latin typeface="Arial"/>
+                <a:cs typeface="Arial"/>
+                <a:ea typeface="Arial"/>
+                <a:sym typeface="Arial"/>
+              </a:rPr>
+              <a:t>■</a:t>
+            </a:r>
+            <a:r>
+              <a:rPr cap="none" sz="1100" i="0" b="0" u="none" strike="noStrike">
+                <a:solidFill>
+                  <a:srgbClr val="333333">
+                    <a:alpha val="100000"/>
+                  </a:srgbClr>
+                </a:solidFill>
+                <a:latin typeface="Arial"/>
+                <a:cs typeface="Arial"/>
+                <a:ea typeface="Arial"/>
+                <a:sym typeface="Arial"/>
+              </a:rPr>
+              <a:t> Showing GOOBAE 1-3 of 3</a:t>
+            </a:r>
+          </a:p>
+        </p:txBody>
+      </p:sp>
+      <p:graphicFrame>
+        <p:nvGraphicFramePr>
+          <p:cNvPr id="4" name=""/>
+          <p:cNvGraphicFramePr>
+            <a:graphicFrameLocks noGrp="true"/>
+          </p:cNvGraphicFramePr>
+          <p:nvPr/>
+        </p:nvGraphicFramePr>
+        <p:xfrm rot="0">
+          <a:off x="292608" y="1536192"/>
+          <a:ext cx="11603736" cy="4864608"/>
+        </p:xfrm>
+        <a:graphic>
+          <a:graphicData uri="http://schemas.openxmlformats.org/drawingml/2006/table">
+            <a:tbl>
+              <a:tblPr/>
+              <a:tblGrid>
+                <a:gridCol w="966978"/>
+                <a:gridCol w="966978"/>
+                <a:gridCol w="966978"/>
+                <a:gridCol w="966978"/>
+                <a:gridCol w="966978"/>
+                <a:gridCol w="966978"/>
+                <a:gridCol w="966978"/>
+                <a:gridCol w="966978"/>
+                <a:gridCol w="966978"/>
+                <a:gridCol w="966978"/>
+                <a:gridCol w="966978"/>
+                <a:gridCol w="966978"/>
+              </a:tblGrid>
+              <a:tr h="292608">
+                <a:tc gridSpan="2">
+                  <a:txBody>
+                    <a:bodyPr/>
+                    <a:lstStyle/>
+                    <a:p>
+                      <a:pPr algn="ctr" marL="0" marR="0">
+                        <a:lnSpc>
+                          <a:spcPct val="10000"/>
+                        </a:lnSpc>
+                        <a:spcBef>
+                          <a:spcPts val="0"/>
+                        </a:spcBef>
+                        <a:spcAft>
+                          <a:spcPts val="0"/>
+                        </a:spcAft>
+                        <a:buNone/>
+                      </a:pPr>
+                      <a:r>
+                        <a:rPr cap="none" sz="850" i="0" b="1" u="none" strike="noStrike">
+                          <a:solidFill>
+                            <a:srgbClr val="333333">
+                              <a:alpha val="100000"/>
+                            </a:srgbClr>
+                          </a:solidFill>
+                          <a:latin typeface="Arial"/>
+                          <a:cs typeface="Arial"/>
+                          <a:ea typeface="Arial"/>
+                          <a:sym typeface="Arial"/>
+                        </a:rPr>
+                        <a:t>WLS</a:t>
+                      </a:r>
+                    </a:p>
+                  </a:txBody>
+                  <a:tcPr anchor="ctr" marB="0" marT="0" marR="0" marL="0">
+                    <a:lnL algn="ctr" cmpd="sng" cap="flat" w="6350">
+                      <a:solidFill>
+                        <a:srgbClr val="D9D9D9">
+                          <a:alpha val="100000"/>
+                        </a:srgbClr>
+                      </a:solidFill>
+                      <a:prstDash val="solid"/>
+                    </a:lnL>
+                    <a:lnR algn="ctr" cmpd="sng" cap="flat" w="6350">
+                      <a:solidFill>
+                        <a:srgbClr val="D9D9D9">
+                          <a:alpha val="100000"/>
+                        </a:srgbClr>
+                      </a:solidFill>
+                      <a:prstDash val="solid"/>
+                    </a:lnR>
+                    <a:lnT algn="ctr" cmpd="sng" cap="flat" w="6350">
+                      <a:solidFill>
+                        <a:srgbClr val="D9D9D9">
+                          <a:alpha val="100000"/>
+                        </a:srgbClr>
+                      </a:solidFill>
+                      <a:prstDash val="solid"/>
+                    </a:lnT>
+                    <a:lnB algn="ctr" cmpd="sng" cap="flat" w="6350">
+                      <a:solidFill>
+                        <a:srgbClr val="D9D9D9">
+                          <a:alpha val="100000"/>
+                        </a:srgbClr>
+                      </a:solidFill>
+                      <a:prstDash val="solid"/>
+                    </a:lnB>
+                    <a:solidFill>
+                      <a:srgbClr val="E0E0E0">
+                        <a:alpha val="100000"/>
+                      </a:srgbClr>
+                    </a:solidFill>
+                  </a:tcPr>
+                </a:tc>
+                <a:tc hMerge="true">
+                  <a:txBody>
+                    <a:bodyPr/>
+                    <a:lstStyle/>
+                    <a:p>
+                      <a:pPr algn="ctr" marL="0" marR="0">
+                        <a:lnSpc>
+                          <a:spcPct val="10000"/>
+                        </a:lnSpc>
+                        <a:spcBef>
+                          <a:spcPts val="0"/>
+                        </a:spcBef>
+                        <a:spcAft>
+                          <a:spcPts val="0"/>
+                        </a:spcAft>
+                        <a:buNone/>
+                      </a:pPr>
+                      <a:r>
+                        <a:rPr cap="none" sz="850" i="0" b="1" u="none" strike="noStrike">
+                          <a:solidFill>
+                            <a:srgbClr val="333333">
+                              <a:alpha val="100000"/>
+                            </a:srgbClr>
+                          </a:solidFill>
+                          <a:latin typeface="Arial"/>
+                          <a:cs typeface="Arial"/>
+                          <a:ea typeface="Arial"/>
+                          <a:sym typeface="Arial"/>
+                        </a:rPr>
+                        <a:t>WLS</a:t>
+                      </a:r>
+                    </a:p>
+                  </a:txBody>
+                  <a:tcPr anchor="ctr" marB="0" marT="0" marR="0" marL="0">
+                    <a:lnL algn="ctr" cmpd="sng" cap="flat" w="6350">
+                      <a:solidFill>
+                        <a:srgbClr val="D9D9D9">
+                          <a:alpha val="100000"/>
+                        </a:srgbClr>
+                      </a:solidFill>
+                      <a:prstDash val="solid"/>
+                    </a:lnL>
+                    <a:lnR algn="ctr" cmpd="sng" cap="flat" w="6350">
+                      <a:solidFill>
+                        <a:srgbClr val="D9D9D9">
+                          <a:alpha val="100000"/>
+                        </a:srgbClr>
+                      </a:solidFill>
+                      <a:prstDash val="solid"/>
+                    </a:lnR>
+                    <a:lnT algn="ctr" cmpd="sng" cap="flat" w="6350">
+                      <a:solidFill>
+                        <a:srgbClr val="D9D9D9">
+                          <a:alpha val="100000"/>
+                        </a:srgbClr>
+                      </a:solidFill>
+                      <a:prstDash val="solid"/>
+                    </a:lnT>
+                    <a:lnB algn="ctr" cmpd="sng" cap="flat" w="6350">
+                      <a:solidFill>
+                        <a:srgbClr val="D9D9D9">
+                          <a:alpha val="100000"/>
+                        </a:srgbClr>
+                      </a:solidFill>
+                      <a:prstDash val="solid"/>
+                    </a:lnB>
+                    <a:solidFill>
+                      <a:srgbClr val="E0E0E0">
+                        <a:alpha val="100000"/>
+                      </a:srgbClr>
+                    </a:solidFill>
+                  </a:tcPr>
+                </a:tc>
+                <a:tc>
+                  <a:txBody>
+                    <a:bodyPr/>
+                    <a:lstStyle/>
+                    <a:p>
+                      <a:pPr algn="ctr" marL="0" marR="0">
+                        <a:lnSpc>
+                          <a:spcPct val="10000"/>
+                        </a:lnSpc>
+                        <a:spcBef>
+                          <a:spcPts val="0"/>
+                        </a:spcBef>
+                        <a:spcAft>
+                          <a:spcPts val="0"/>
+                        </a:spcAft>
+                        <a:buNone/>
+                      </a:pPr>
+                      <a:r>
+                        <a:rPr cap="none" sz="850" i="0" b="1" u="none" strike="noStrike">
+                          <a:solidFill>
+                            <a:srgbClr val="333333">
+                              <a:alpha val="100000"/>
+                            </a:srgbClr>
+                          </a:solidFill>
+                          <a:latin typeface="Arial"/>
+                          <a:cs typeface="Arial"/>
+                          <a:ea typeface="Arial"/>
+                          <a:sym typeface="Arial"/>
+                        </a:rPr>
+                        <a:t>WTC</a:t>
+                      </a:r>
+                    </a:p>
+                  </a:txBody>
+                  <a:tcPr anchor="ctr" marB="0" marT="0" marR="0" marL="0">
+                    <a:lnL algn="ctr" cmpd="sng" cap="flat" w="6350">
+                      <a:solidFill>
+                        <a:srgbClr val="D9D9D9">
+                          <a:alpha val="100000"/>
+                        </a:srgbClr>
+                      </a:solidFill>
+                      <a:prstDash val="solid"/>
+                    </a:lnL>
+                    <a:lnR algn="ctr" cmpd="sng" cap="flat" w="6350">
+                      <a:solidFill>
+                        <a:srgbClr val="D9D9D9">
+                          <a:alpha val="100000"/>
+                        </a:srgbClr>
+                      </a:solidFill>
+                      <a:prstDash val="solid"/>
+                    </a:lnR>
+                    <a:lnT algn="ctr" cmpd="sng" cap="flat" w="6350">
+                      <a:solidFill>
+                        <a:srgbClr val="D9D9D9">
+                          <a:alpha val="100000"/>
+                        </a:srgbClr>
+                      </a:solidFill>
+                      <a:prstDash val="solid"/>
+                    </a:lnT>
+                    <a:lnB algn="ctr" cmpd="sng" cap="flat" w="6350">
+                      <a:solidFill>
+                        <a:srgbClr val="D9D9D9">
+                          <a:alpha val="100000"/>
+                        </a:srgbClr>
+                      </a:solidFill>
+                      <a:prstDash val="solid"/>
+                    </a:lnB>
+                    <a:solidFill>
+                      <a:srgbClr val="E0E0E0">
+                        <a:alpha val="100000"/>
+                      </a:srgbClr>
+                    </a:solidFill>
+                  </a:tcPr>
+                </a:tc>
+                <a:tc gridSpan="9">
+                  <a:txBody>
+                    <a:bodyPr/>
+                    <a:lstStyle/>
+                    <a:p>
+                      <a:pPr algn="ctr" marL="0" marR="0">
+                        <a:lnSpc>
+                          <a:spcPct val="10000"/>
+                        </a:lnSpc>
+                        <a:spcBef>
+                          <a:spcPts val="0"/>
+                        </a:spcBef>
+                        <a:spcAft>
+                          <a:spcPts val="0"/>
+                        </a:spcAft>
+                        <a:buNone/>
+                      </a:pPr>
+                      <a:r>
+                        <a:rPr cap="none" sz="850" i="0" b="1" u="none" strike="noStrike">
+                          <a:solidFill>
+                            <a:srgbClr val="333333">
+                              <a:alpha val="100000"/>
+                            </a:srgbClr>
+                          </a:solidFill>
+                          <a:latin typeface="Arial"/>
+                          <a:cs typeface="Arial"/>
+                          <a:ea typeface="Arial"/>
+                          <a:sym typeface="Arial"/>
+                        </a:rPr>
+                        <a:t> </a:t>
+                      </a:r>
+                    </a:p>
+                  </a:txBody>
+                  <a:tcPr anchor="ctr" marB="0" marT="0" marR="0" marL="0">
+                    <a:lnL algn="ctr" cmpd="sng" cap="flat" w="6350">
+                      <a:solidFill>
+                        <a:srgbClr val="D9D9D9">
+                          <a:alpha val="100000"/>
+                        </a:srgbClr>
+                      </a:solidFill>
+                      <a:prstDash val="solid"/>
+                    </a:lnL>
+                    <a:lnR algn="ctr" cmpd="sng" cap="flat" w="6350">
+                      <a:solidFill>
+                        <a:srgbClr val="D9D9D9">
+                          <a:alpha val="100000"/>
+                        </a:srgbClr>
+                      </a:solidFill>
+                      <a:prstDash val="solid"/>
+                    </a:lnR>
+                    <a:lnT algn="ctr" cmpd="sng" cap="flat" w="6350">
+                      <a:solidFill>
+                        <a:srgbClr val="D9D9D9">
+                          <a:alpha val="100000"/>
+                        </a:srgbClr>
+                      </a:solidFill>
+                      <a:prstDash val="solid"/>
+                    </a:lnT>
+                    <a:lnB algn="ctr" cmpd="sng" cap="flat" w="6350">
+                      <a:solidFill>
+                        <a:srgbClr val="D9D9D9">
+                          <a:alpha val="100000"/>
+                        </a:srgbClr>
+                      </a:solidFill>
+                      <a:prstDash val="solid"/>
+                    </a:lnB>
+                    <a:solidFill>
+                      <a:srgbClr val="E0E0E0">
+                        <a:alpha val="100000"/>
+                      </a:srgbClr>
+                    </a:solidFill>
+                  </a:tcPr>
+                </a:tc>
+                <a:tc hMerge="true">
+                  <a:txBody>
+                    <a:bodyPr/>
+                    <a:lstStyle/>
+                    <a:p>
+                      <a:pPr algn="ctr" marL="0" marR="0">
+                        <a:lnSpc>
+                          <a:spcPct val="10000"/>
+                        </a:lnSpc>
+                        <a:spcBef>
+                          <a:spcPts val="0"/>
+                        </a:spcBef>
+                        <a:spcAft>
+                          <a:spcPts val="0"/>
+                        </a:spcAft>
+                        <a:buNone/>
+                      </a:pPr>
+                      <a:r>
+                        <a:rPr cap="none" sz="850" i="0" b="1" u="none" strike="noStrike">
+                          <a:solidFill>
+                            <a:srgbClr val="333333">
+                              <a:alpha val="100000"/>
+                            </a:srgbClr>
+                          </a:solidFill>
+                          <a:latin typeface="Arial"/>
+                          <a:cs typeface="Arial"/>
+                          <a:ea typeface="Arial"/>
+                          <a:sym typeface="Arial"/>
+                        </a:rPr>
+                        <a:t> </a:t>
+                      </a:r>
+                    </a:p>
+                  </a:txBody>
+                  <a:tcPr anchor="ctr" marB="0" marT="0" marR="0" marL="0">
+                    <a:lnL algn="ctr" cmpd="sng" cap="flat" w="6350">
+                      <a:solidFill>
+                        <a:srgbClr val="D9D9D9">
+                          <a:alpha val="100000"/>
+                        </a:srgbClr>
+                      </a:solidFill>
+                      <a:prstDash val="solid"/>
+                    </a:lnL>
+                    <a:lnR algn="ctr" cmpd="sng" cap="flat" w="6350">
+                      <a:solidFill>
+                        <a:srgbClr val="D9D9D9">
+                          <a:alpha val="100000"/>
+                        </a:srgbClr>
+                      </a:solidFill>
+                      <a:prstDash val="solid"/>
+                    </a:lnR>
+                    <a:lnT algn="ctr" cmpd="sng" cap="flat" w="6350">
+                      <a:solidFill>
+                        <a:srgbClr val="D9D9D9">
+                          <a:alpha val="100000"/>
+                        </a:srgbClr>
+                      </a:solidFill>
+                      <a:prstDash val="solid"/>
+                    </a:lnT>
+                    <a:lnB algn="ctr" cmpd="sng" cap="flat" w="6350">
+                      <a:solidFill>
+                        <a:srgbClr val="D9D9D9">
+                          <a:alpha val="100000"/>
+                        </a:srgbClr>
+                      </a:solidFill>
+                      <a:prstDash val="solid"/>
+                    </a:lnB>
+                    <a:solidFill>
+                      <a:srgbClr val="E0E0E0">
+                        <a:alpha val="100000"/>
+                      </a:srgbClr>
+                    </a:solidFill>
+                  </a:tcPr>
+                </a:tc>
+                <a:tc hMerge="true">
+                  <a:txBody>
+                    <a:bodyPr/>
+                    <a:lstStyle/>
+                    <a:p>
+                      <a:pPr algn="ctr" marL="0" marR="0">
+                        <a:lnSpc>
+                          <a:spcPct val="10000"/>
+                        </a:lnSpc>
+                        <a:spcBef>
+                          <a:spcPts val="0"/>
+                        </a:spcBef>
+                        <a:spcAft>
+                          <a:spcPts val="0"/>
+                        </a:spcAft>
+                        <a:buNone/>
+                      </a:pPr>
+                      <a:r>
+                        <a:rPr cap="none" sz="850" i="0" b="1" u="none" strike="noStrike">
+                          <a:solidFill>
+                            <a:srgbClr val="333333">
+                              <a:alpha val="100000"/>
+                            </a:srgbClr>
+                          </a:solidFill>
+                          <a:latin typeface="Arial"/>
+                          <a:cs typeface="Arial"/>
+                          <a:ea typeface="Arial"/>
+                          <a:sym typeface="Arial"/>
+                        </a:rPr>
+                        <a:t> </a:t>
+                      </a:r>
+                    </a:p>
+                  </a:txBody>
+                  <a:tcPr anchor="ctr" marB="0" marT="0" marR="0" marL="0">
+                    <a:lnL algn="ctr" cmpd="sng" cap="flat" w="6350">
+                      <a:solidFill>
+                        <a:srgbClr val="D9D9D9">
+                          <a:alpha val="100000"/>
+                        </a:srgbClr>
+                      </a:solidFill>
+                      <a:prstDash val="solid"/>
+                    </a:lnL>
+                    <a:lnR algn="ctr" cmpd="sng" cap="flat" w="6350">
+                      <a:solidFill>
+                        <a:srgbClr val="D9D9D9">
+                          <a:alpha val="100000"/>
+                        </a:srgbClr>
+                      </a:solidFill>
+                      <a:prstDash val="solid"/>
+                    </a:lnR>
+                    <a:lnT algn="ctr" cmpd="sng" cap="flat" w="6350">
+                      <a:solidFill>
+                        <a:srgbClr val="D9D9D9">
+                          <a:alpha val="100000"/>
+                        </a:srgbClr>
+                      </a:solidFill>
+                      <a:prstDash val="solid"/>
+                    </a:lnT>
+                    <a:lnB algn="ctr" cmpd="sng" cap="flat" w="6350">
+                      <a:solidFill>
+                        <a:srgbClr val="D9D9D9">
+                          <a:alpha val="100000"/>
+                        </a:srgbClr>
+                      </a:solidFill>
+                      <a:prstDash val="solid"/>
+                    </a:lnB>
+                    <a:solidFill>
+                      <a:srgbClr val="E0E0E0">
+                        <a:alpha val="100000"/>
+                      </a:srgbClr>
+                    </a:solidFill>
+                  </a:tcPr>
+                </a:tc>
+                <a:tc hMerge="true">
+                  <a:txBody>
+                    <a:bodyPr/>
+                    <a:lstStyle/>
+                    <a:p>
+                      <a:pPr algn="ctr" marL="0" marR="0">
+                        <a:lnSpc>
+                          <a:spcPct val="10000"/>
+                        </a:lnSpc>
+                        <a:spcBef>
+                          <a:spcPts val="0"/>
+                        </a:spcBef>
+                        <a:spcAft>
+                          <a:spcPts val="0"/>
+                        </a:spcAft>
+                        <a:buNone/>
+                      </a:pPr>
+                      <a:r>
+                        <a:rPr cap="none" sz="850" i="0" b="1" u="none" strike="noStrike">
+                          <a:solidFill>
+                            <a:srgbClr val="333333">
+                              <a:alpha val="100000"/>
+                            </a:srgbClr>
+                          </a:solidFill>
+                          <a:latin typeface="Arial"/>
+                          <a:cs typeface="Arial"/>
+                          <a:ea typeface="Arial"/>
+                          <a:sym typeface="Arial"/>
+                        </a:rPr>
+                        <a:t> </a:t>
+                      </a:r>
+                    </a:p>
+                  </a:txBody>
+                  <a:tcPr anchor="ctr" marB="0" marT="0" marR="0" marL="0">
+                    <a:lnL algn="ctr" cmpd="sng" cap="flat" w="6350">
+                      <a:solidFill>
+                        <a:srgbClr val="D9D9D9">
+                          <a:alpha val="100000"/>
+                        </a:srgbClr>
+                      </a:solidFill>
+                      <a:prstDash val="solid"/>
+                    </a:lnL>
+                    <a:lnR algn="ctr" cmpd="sng" cap="flat" w="6350">
+                      <a:solidFill>
+                        <a:srgbClr val="D9D9D9">
+                          <a:alpha val="100000"/>
+                        </a:srgbClr>
+                      </a:solidFill>
+                      <a:prstDash val="solid"/>
+                    </a:lnR>
+                    <a:lnT algn="ctr" cmpd="sng" cap="flat" w="6350">
+                      <a:solidFill>
+                        <a:srgbClr val="D9D9D9">
+                          <a:alpha val="100000"/>
+                        </a:srgbClr>
+                      </a:solidFill>
+                      <a:prstDash val="solid"/>
+                    </a:lnT>
+                    <a:lnB algn="ctr" cmpd="sng" cap="flat" w="6350">
+                      <a:solidFill>
+                        <a:srgbClr val="D9D9D9">
+                          <a:alpha val="100000"/>
+                        </a:srgbClr>
+                      </a:solidFill>
+                      <a:prstDash val="solid"/>
+                    </a:lnB>
+                    <a:solidFill>
+                      <a:srgbClr val="E0E0E0">
+                        <a:alpha val="100000"/>
+                      </a:srgbClr>
+                    </a:solidFill>
+                  </a:tcPr>
+                </a:tc>
+                <a:tc hMerge="true">
+                  <a:txBody>
+                    <a:bodyPr/>
+                    <a:lstStyle/>
+                    <a:p>
+                      <a:pPr algn="ctr" marL="0" marR="0">
+                        <a:lnSpc>
+                          <a:spcPct val="10000"/>
+                        </a:lnSpc>
+                        <a:spcBef>
+                          <a:spcPts val="0"/>
+                        </a:spcBef>
+                        <a:spcAft>
+                          <a:spcPts val="0"/>
+                        </a:spcAft>
+                        <a:buNone/>
+                      </a:pPr>
+                      <a:r>
+                        <a:rPr cap="none" sz="850" i="0" b="1" u="none" strike="noStrike">
+                          <a:solidFill>
+                            <a:srgbClr val="333333">
+                              <a:alpha val="100000"/>
+                            </a:srgbClr>
+                          </a:solidFill>
+                          <a:latin typeface="Arial"/>
+                          <a:cs typeface="Arial"/>
+                          <a:ea typeface="Arial"/>
+                          <a:sym typeface="Arial"/>
+                        </a:rPr>
+                        <a:t> </a:t>
+                      </a:r>
+                    </a:p>
+                  </a:txBody>
+                  <a:tcPr anchor="ctr" marB="0" marT="0" marR="0" marL="0">
+                    <a:lnL algn="ctr" cmpd="sng" cap="flat" w="6350">
+                      <a:solidFill>
+                        <a:srgbClr val="D9D9D9">
+                          <a:alpha val="100000"/>
+                        </a:srgbClr>
+                      </a:solidFill>
+                      <a:prstDash val="solid"/>
+                    </a:lnL>
+                    <a:lnR algn="ctr" cmpd="sng" cap="flat" w="6350">
+                      <a:solidFill>
+                        <a:srgbClr val="D9D9D9">
+                          <a:alpha val="100000"/>
+                        </a:srgbClr>
+                      </a:solidFill>
+                      <a:prstDash val="solid"/>
+                    </a:lnR>
+                    <a:lnT algn="ctr" cmpd="sng" cap="flat" w="6350">
+                      <a:solidFill>
+                        <a:srgbClr val="D9D9D9">
+                          <a:alpha val="100000"/>
+                        </a:srgbClr>
+                      </a:solidFill>
+                      <a:prstDash val="solid"/>
+                    </a:lnT>
+                    <a:lnB algn="ctr" cmpd="sng" cap="flat" w="6350">
+                      <a:solidFill>
+                        <a:srgbClr val="D9D9D9">
+                          <a:alpha val="100000"/>
+                        </a:srgbClr>
+                      </a:solidFill>
+                      <a:prstDash val="solid"/>
+                    </a:lnB>
+                    <a:solidFill>
+                      <a:srgbClr val="E0E0E0">
+                        <a:alpha val="100000"/>
+                      </a:srgbClr>
+                    </a:solidFill>
+                  </a:tcPr>
+                </a:tc>
+                <a:tc hMerge="true">
+                  <a:txBody>
+                    <a:bodyPr/>
+                    <a:lstStyle/>
+                    <a:p>
+                      <a:pPr algn="ctr" marL="0" marR="0">
+                        <a:lnSpc>
+                          <a:spcPct val="10000"/>
+                        </a:lnSpc>
+                        <a:spcBef>
+                          <a:spcPts val="0"/>
+                        </a:spcBef>
+                        <a:spcAft>
+                          <a:spcPts val="0"/>
+                        </a:spcAft>
+                        <a:buNone/>
+                      </a:pPr>
+                      <a:r>
+                        <a:rPr cap="none" sz="850" i="0" b="1" u="none" strike="noStrike">
+                          <a:solidFill>
+                            <a:srgbClr val="333333">
+                              <a:alpha val="100000"/>
+                            </a:srgbClr>
+                          </a:solidFill>
+                          <a:latin typeface="Arial"/>
+                          <a:cs typeface="Arial"/>
+                          <a:ea typeface="Arial"/>
+                          <a:sym typeface="Arial"/>
+                        </a:rPr>
+                        <a:t> </a:t>
+                      </a:r>
+                    </a:p>
+                  </a:txBody>
+                  <a:tcPr anchor="ctr" marB="0" marT="0" marR="0" marL="0">
+                    <a:lnL algn="ctr" cmpd="sng" cap="flat" w="6350">
+                      <a:solidFill>
+                        <a:srgbClr val="D9D9D9">
+                          <a:alpha val="100000"/>
+                        </a:srgbClr>
+                      </a:solidFill>
+                      <a:prstDash val="solid"/>
+                    </a:lnL>
+                    <a:lnR algn="ctr" cmpd="sng" cap="flat" w="6350">
+                      <a:solidFill>
+                        <a:srgbClr val="D9D9D9">
+                          <a:alpha val="100000"/>
+                        </a:srgbClr>
+                      </a:solidFill>
+                      <a:prstDash val="solid"/>
+                    </a:lnR>
+                    <a:lnT algn="ctr" cmpd="sng" cap="flat" w="6350">
+                      <a:solidFill>
+                        <a:srgbClr val="D9D9D9">
+                          <a:alpha val="100000"/>
+                        </a:srgbClr>
+                      </a:solidFill>
+                      <a:prstDash val="solid"/>
+                    </a:lnT>
+                    <a:lnB algn="ctr" cmpd="sng" cap="flat" w="6350">
+                      <a:solidFill>
+                        <a:srgbClr val="D9D9D9">
+                          <a:alpha val="100000"/>
+                        </a:srgbClr>
+                      </a:solidFill>
+                      <a:prstDash val="solid"/>
+                    </a:lnB>
+                    <a:solidFill>
+                      <a:srgbClr val="E0E0E0">
+                        <a:alpha val="100000"/>
+                      </a:srgbClr>
+                    </a:solidFill>
+                  </a:tcPr>
+                </a:tc>
+                <a:tc hMerge="true">
+                  <a:txBody>
+                    <a:bodyPr/>
+                    <a:lstStyle/>
+                    <a:p>
+                      <a:pPr algn="ctr" marL="0" marR="0">
+                        <a:lnSpc>
+                          <a:spcPct val="10000"/>
+                        </a:lnSpc>
+                        <a:spcBef>
+                          <a:spcPts val="0"/>
+                        </a:spcBef>
+                        <a:spcAft>
+                          <a:spcPts val="0"/>
+                        </a:spcAft>
+                        <a:buNone/>
+                      </a:pPr>
+                      <a:r>
+                        <a:rPr cap="none" sz="850" i="0" b="1" u="none" strike="noStrike">
+                          <a:solidFill>
+                            <a:srgbClr val="333333">
+                              <a:alpha val="100000"/>
+                            </a:srgbClr>
+                          </a:solidFill>
+                          <a:latin typeface="Arial"/>
+                          <a:cs typeface="Arial"/>
+                          <a:ea typeface="Arial"/>
+                          <a:sym typeface="Arial"/>
+                        </a:rPr>
+                        <a:t> </a:t>
+                      </a:r>
+                    </a:p>
+                  </a:txBody>
+                  <a:tcPr anchor="ctr" marB="0" marT="0" marR="0" marL="0">
+                    <a:lnL algn="ctr" cmpd="sng" cap="flat" w="6350">
+                      <a:solidFill>
+                        <a:srgbClr val="D9D9D9">
+                          <a:alpha val="100000"/>
+                        </a:srgbClr>
+                      </a:solidFill>
+                      <a:prstDash val="solid"/>
+                    </a:lnL>
+                    <a:lnR algn="ctr" cmpd="sng" cap="flat" w="6350">
+                      <a:solidFill>
+                        <a:srgbClr val="D9D9D9">
+                          <a:alpha val="100000"/>
+                        </a:srgbClr>
+                      </a:solidFill>
+                      <a:prstDash val="solid"/>
+                    </a:lnR>
+                    <a:lnT algn="ctr" cmpd="sng" cap="flat" w="6350">
+                      <a:solidFill>
+                        <a:srgbClr val="D9D9D9">
+                          <a:alpha val="100000"/>
+                        </a:srgbClr>
+                      </a:solidFill>
+                      <a:prstDash val="solid"/>
+                    </a:lnT>
+                    <a:lnB algn="ctr" cmpd="sng" cap="flat" w="6350">
+                      <a:solidFill>
+                        <a:srgbClr val="D9D9D9">
+                          <a:alpha val="100000"/>
+                        </a:srgbClr>
+                      </a:solidFill>
+                      <a:prstDash val="solid"/>
+                    </a:lnB>
+                    <a:solidFill>
+                      <a:srgbClr val="E0E0E0">
+                        <a:alpha val="100000"/>
+                      </a:srgbClr>
+                    </a:solidFill>
+                  </a:tcPr>
+                </a:tc>
+                <a:tc hMerge="true">
+                  <a:txBody>
+                    <a:bodyPr/>
+                    <a:lstStyle/>
+                    <a:p>
+                      <a:pPr algn="ctr" marL="0" marR="0">
+                        <a:lnSpc>
+                          <a:spcPct val="10000"/>
+                        </a:lnSpc>
+                        <a:spcBef>
+                          <a:spcPts val="0"/>
+                        </a:spcBef>
+                        <a:spcAft>
+                          <a:spcPts val="0"/>
+                        </a:spcAft>
+                        <a:buNone/>
+                      </a:pPr>
+                      <a:r>
+                        <a:rPr cap="none" sz="850" i="0" b="1" u="none" strike="noStrike">
+                          <a:solidFill>
+                            <a:srgbClr val="333333">
+                              <a:alpha val="100000"/>
+                            </a:srgbClr>
+                          </a:solidFill>
+                          <a:latin typeface="Arial"/>
+                          <a:cs typeface="Arial"/>
+                          <a:ea typeface="Arial"/>
+                          <a:sym typeface="Arial"/>
+                        </a:rPr>
+                        <a:t> </a:t>
+                      </a:r>
+                    </a:p>
+                  </a:txBody>
+                  <a:tcPr anchor="ctr" marB="0" marT="0" marR="0" marL="0">
+                    <a:lnL algn="ctr" cmpd="sng" cap="flat" w="6350">
+                      <a:solidFill>
+                        <a:srgbClr val="D9D9D9">
+                          <a:alpha val="100000"/>
+                        </a:srgbClr>
+                      </a:solidFill>
+                      <a:prstDash val="solid"/>
+                    </a:lnL>
+                    <a:lnR algn="ctr" cmpd="sng" cap="flat" w="6350">
+                      <a:solidFill>
+                        <a:srgbClr val="D9D9D9">
+                          <a:alpha val="100000"/>
+                        </a:srgbClr>
+                      </a:solidFill>
+                      <a:prstDash val="solid"/>
+                    </a:lnR>
+                    <a:lnT algn="ctr" cmpd="sng" cap="flat" w="6350">
+                      <a:solidFill>
+                        <a:srgbClr val="D9D9D9">
+                          <a:alpha val="100000"/>
+                        </a:srgbClr>
+                      </a:solidFill>
+                      <a:prstDash val="solid"/>
+                    </a:lnT>
+                    <a:lnB algn="ctr" cmpd="sng" cap="flat" w="6350">
+                      <a:solidFill>
+                        <a:srgbClr val="D9D9D9">
+                          <a:alpha val="100000"/>
+                        </a:srgbClr>
+                      </a:solidFill>
+                      <a:prstDash val="solid"/>
+                    </a:lnB>
+                    <a:solidFill>
+                      <a:srgbClr val="E0E0E0">
+                        <a:alpha val="100000"/>
+                      </a:srgbClr>
+                    </a:solidFill>
+                  </a:tcPr>
+                </a:tc>
+                <a:tc hMerge="true">
+                  <a:txBody>
+                    <a:bodyPr/>
+                    <a:lstStyle/>
+                    <a:p>
+                      <a:pPr algn="ctr" marL="0" marR="0">
+                        <a:lnSpc>
+                          <a:spcPct val="10000"/>
+                        </a:lnSpc>
+                        <a:spcBef>
+                          <a:spcPts val="0"/>
+                        </a:spcBef>
+                        <a:spcAft>
+                          <a:spcPts val="0"/>
+                        </a:spcAft>
+                        <a:buNone/>
+                      </a:pPr>
+                      <a:r>
+                        <a:rPr cap="none" sz="850" i="0" b="1" u="none" strike="noStrike">
+                          <a:solidFill>
+                            <a:srgbClr val="333333">
+                              <a:alpha val="100000"/>
+                            </a:srgbClr>
+                          </a:solidFill>
+                          <a:latin typeface="Arial"/>
+                          <a:cs typeface="Arial"/>
+                          <a:ea typeface="Arial"/>
+                          <a:sym typeface="Arial"/>
+                        </a:rPr>
+                        <a:t> </a:t>
+                      </a:r>
+                    </a:p>
+                  </a:txBody>
+                  <a:tcPr anchor="ctr" marB="0" marT="0" marR="0" marL="0">
+                    <a:lnL algn="ctr" cmpd="sng" cap="flat" w="6350">
+                      <a:solidFill>
+                        <a:srgbClr val="D9D9D9">
+                          <a:alpha val="100000"/>
+                        </a:srgbClr>
+                      </a:solidFill>
+                      <a:prstDash val="solid"/>
+                    </a:lnL>
+                    <a:lnR algn="ctr" cmpd="sng" cap="flat" w="6350">
+                      <a:solidFill>
+                        <a:srgbClr val="D9D9D9">
+                          <a:alpha val="100000"/>
+                        </a:srgbClr>
+                      </a:solidFill>
+                      <a:prstDash val="solid"/>
+                    </a:lnR>
+                    <a:lnT algn="ctr" cmpd="sng" cap="flat" w="6350">
+                      <a:solidFill>
+                        <a:srgbClr val="D9D9D9">
+                          <a:alpha val="100000"/>
+                        </a:srgbClr>
+                      </a:solidFill>
+                      <a:prstDash val="solid"/>
+                    </a:lnT>
+                    <a:lnB algn="ctr" cmpd="sng" cap="flat" w="6350">
+                      <a:solidFill>
+                        <a:srgbClr val="D9D9D9">
+                          <a:alpha val="100000"/>
+                        </a:srgbClr>
+                      </a:solidFill>
+                      <a:prstDash val="solid"/>
+                    </a:lnB>
+                    <a:solidFill>
+                      <a:srgbClr val="E0E0E0">
+                        <a:alpha val="100000"/>
+                      </a:srgbClr>
+                    </a:solidFill>
+                  </a:tcPr>
+                </a:tc>
+              </a:tr>
+              <a:tr h="256032">
+                <a:tc>
+                  <a:txBody>
+                    <a:bodyPr/>
+                    <a:lstStyle/>
+                    <a:p>
+                      <a:pPr algn="ctr" marL="0" marR="0">
+                        <a:lnSpc>
+                          <a:spcPct val="10000"/>
+                        </a:lnSpc>
+                        <a:spcBef>
+                          <a:spcPts val="0"/>
+                        </a:spcBef>
+                        <a:spcAft>
+                          <a:spcPts val="0"/>
+                        </a:spcAft>
+                        <a:buNone/>
+                      </a:pPr>
+                      <a:r>
+                        <a:rPr cap="none" sz="850" i="0" b="0" u="none" strike="noStrike">
+                          <a:solidFill>
+                            <a:srgbClr val="333333">
+                              <a:alpha val="100000"/>
+                            </a:srgbClr>
+                          </a:solidFill>
+                          <a:latin typeface="Arial"/>
+                          <a:cs typeface="Arial"/>
+                          <a:ea typeface="Arial"/>
+                          <a:sym typeface="Arial"/>
+                        </a:rPr>
+                        <a:t>1WL</a:t>
+                      </a:r>
+                    </a:p>
+                  </a:txBody>
+                  <a:tcPr anchor="ctr" marB="0" marT="0" marR="0" marL="0">
+                    <a:lnL algn="ctr" cmpd="sng" cap="flat" w="6350">
+                      <a:solidFill>
+                        <a:srgbClr val="D9D9D9">
+                          <a:alpha val="100000"/>
+                        </a:srgbClr>
+                      </a:solidFill>
+                      <a:prstDash val="solid"/>
+                    </a:lnL>
+                    <a:lnR algn="ctr" cmpd="sng" cap="flat" w="6350">
+                      <a:solidFill>
+                        <a:srgbClr val="D9D9D9">
+                          <a:alpha val="100000"/>
+                        </a:srgbClr>
+                      </a:solidFill>
+                      <a:prstDash val="solid"/>
+                    </a:lnR>
+                    <a:lnT algn="ctr" cmpd="sng" cap="flat" w="6350">
+                      <a:solidFill>
+                        <a:srgbClr val="D9D9D9">
+                          <a:alpha val="100000"/>
+                        </a:srgbClr>
+                      </a:solidFill>
+                      <a:prstDash val="solid"/>
+                    </a:lnT>
+                    <a:lnB algn="ctr" cmpd="sng" cap="flat" w="6350">
+                      <a:solidFill>
+                        <a:srgbClr val="D9D9D9">
+                          <a:alpha val="100000"/>
+                        </a:srgbClr>
+                      </a:solidFill>
+                      <a:prstDash val="solid"/>
+                    </a:lnB>
+                    <a:solidFill>
+                      <a:srgbClr val="F2F2F2">
+                        <a:alpha val="100000"/>
+                      </a:srgbClr>
+                    </a:solidFill>
+                  </a:tcPr>
+                </a:tc>
+                <a:tc>
+                  <a:txBody>
+                    <a:bodyPr/>
+                    <a:lstStyle/>
+                    <a:p>
+                      <a:pPr algn="ctr" marL="0" marR="0">
+                        <a:lnSpc>
+                          <a:spcPct val="10000"/>
+                        </a:lnSpc>
+                        <a:spcBef>
+                          <a:spcPts val="0"/>
+                        </a:spcBef>
+                        <a:spcAft>
+                          <a:spcPts val="0"/>
+                        </a:spcAft>
+                        <a:buNone/>
+                      </a:pPr>
+                      <a:r>
+                        <a:rPr cap="none" sz="850" i="0" b="0" u="none" strike="noStrike">
+                          <a:solidFill>
+                            <a:srgbClr val="333333">
+                              <a:alpha val="100000"/>
+                            </a:srgbClr>
+                          </a:solidFill>
+                          <a:latin typeface="Arial"/>
+                          <a:cs typeface="Arial"/>
+                          <a:ea typeface="Arial"/>
+                          <a:sym typeface="Arial"/>
+                        </a:rPr>
+                        <a:t>2WL</a:t>
+                      </a:r>
+                    </a:p>
+                  </a:txBody>
+                  <a:tcPr anchor="ctr" marB="0" marT="0" marR="0" marL="0">
+                    <a:lnL algn="ctr" cmpd="sng" cap="flat" w="6350">
+                      <a:solidFill>
+                        <a:srgbClr val="D9D9D9">
+                          <a:alpha val="100000"/>
+                        </a:srgbClr>
+                      </a:solidFill>
+                      <a:prstDash val="solid"/>
+                    </a:lnL>
+                    <a:lnR algn="ctr" cmpd="sng" cap="flat" w="6350">
+                      <a:solidFill>
+                        <a:srgbClr val="D9D9D9">
+                          <a:alpha val="100000"/>
+                        </a:srgbClr>
+                      </a:solidFill>
+                      <a:prstDash val="solid"/>
+                    </a:lnR>
+                    <a:lnT algn="ctr" cmpd="sng" cap="flat" w="6350">
+                      <a:solidFill>
+                        <a:srgbClr val="D9D9D9">
+                          <a:alpha val="100000"/>
+                        </a:srgbClr>
+                      </a:solidFill>
+                      <a:prstDash val="solid"/>
+                    </a:lnT>
+                    <a:lnB algn="ctr" cmpd="sng" cap="flat" w="6350">
+                      <a:solidFill>
+                        <a:srgbClr val="D9D9D9">
+                          <a:alpha val="100000"/>
+                        </a:srgbClr>
+                      </a:solidFill>
+                      <a:prstDash val="solid"/>
+                    </a:lnB>
+                    <a:solidFill>
+                      <a:srgbClr val="F2F2F2">
+                        <a:alpha val="100000"/>
+                      </a:srgbClr>
+                    </a:solidFill>
+                  </a:tcPr>
+                </a:tc>
+                <a:tc>
+                  <a:txBody>
+                    <a:bodyPr/>
+                    <a:lstStyle/>
+                    <a:p>
+                      <a:pPr algn="ctr" marL="0" marR="0">
+                        <a:lnSpc>
+                          <a:spcPct val="10000"/>
+                        </a:lnSpc>
+                        <a:spcBef>
+                          <a:spcPts val="0"/>
+                        </a:spcBef>
+                        <a:spcAft>
+                          <a:spcPts val="0"/>
+                        </a:spcAft>
+                        <a:buNone/>
+                      </a:pPr>
+                      <a:r>
+                        <a:rPr cap="none" sz="850" i="0" b="0" u="none" strike="noStrike">
+                          <a:solidFill>
+                            <a:srgbClr val="333333">
+                              <a:alpha val="100000"/>
+                            </a:srgbClr>
+                          </a:solidFill>
+                          <a:latin typeface="Arial"/>
+                          <a:cs typeface="Arial"/>
+                          <a:ea typeface="Arial"/>
+                          <a:sym typeface="Arial"/>
+                        </a:rPr>
+                        <a:t>1WL</a:t>
+                      </a:r>
+                    </a:p>
+                  </a:txBody>
+                  <a:tcPr anchor="ctr" marB="0" marT="0" marR="0" marL="0">
+                    <a:lnL algn="ctr" cmpd="sng" cap="flat" w="6350">
+                      <a:solidFill>
+                        <a:srgbClr val="D9D9D9">
+                          <a:alpha val="100000"/>
+                        </a:srgbClr>
+                      </a:solidFill>
+                      <a:prstDash val="solid"/>
+                    </a:lnL>
+                    <a:lnR algn="ctr" cmpd="sng" cap="flat" w="6350">
+                      <a:solidFill>
+                        <a:srgbClr val="D9D9D9">
+                          <a:alpha val="100000"/>
+                        </a:srgbClr>
+                      </a:solidFill>
+                      <a:prstDash val="solid"/>
+                    </a:lnR>
+                    <a:lnT algn="ctr" cmpd="sng" cap="flat" w="6350">
+                      <a:solidFill>
+                        <a:srgbClr val="D9D9D9">
+                          <a:alpha val="100000"/>
+                        </a:srgbClr>
+                      </a:solidFill>
+                      <a:prstDash val="solid"/>
+                    </a:lnT>
+                    <a:lnB algn="ctr" cmpd="sng" cap="flat" w="6350">
+                      <a:solidFill>
+                        <a:srgbClr val="D9D9D9">
+                          <a:alpha val="100000"/>
+                        </a:srgbClr>
+                      </a:solidFill>
+                      <a:prstDash val="solid"/>
+                    </a:lnB>
+                    <a:solidFill>
+                      <a:srgbClr val="F2F2F2">
+                        <a:alpha val="100000"/>
+                      </a:srgbClr>
+                    </a:solidFill>
+                  </a:tcPr>
+                </a:tc>
+                <a:tc>
+                  <a:txBody>
+                    <a:bodyPr/>
+                    <a:lstStyle/>
+                    <a:p>
+                      <a:pPr algn="ctr" marL="0" marR="0">
+                        <a:lnSpc>
+                          <a:spcPct val="10000"/>
+                        </a:lnSpc>
+                        <a:spcBef>
+                          <a:spcPts val="0"/>
+                        </a:spcBef>
+                        <a:spcAft>
+                          <a:spcPts val="0"/>
+                        </a:spcAft>
+                        <a:buNone/>
+                      </a:pPr>
+                      <a:r>
+                        <a:rPr cap="none" sz="850" i="0" b="0" u="none" strike="noStrike">
+                          <a:solidFill>
+                            <a:srgbClr val="333333">
+                              <a:alpha val="100000"/>
+                            </a:srgbClr>
+                          </a:solidFill>
+                          <a:latin typeface="Arial"/>
+                          <a:cs typeface="Arial"/>
+                          <a:ea typeface="Arial"/>
+                          <a:sym typeface="Arial"/>
+                        </a:rPr>
+                        <a:t> </a:t>
+                      </a:r>
+                    </a:p>
+                  </a:txBody>
+                  <a:tcPr anchor="ctr" marB="0" marT="0" marR="0" marL="0">
+                    <a:lnL algn="ctr" cmpd="sng" cap="flat" w="6350">
+                      <a:solidFill>
+                        <a:srgbClr val="D9D9D9">
+                          <a:alpha val="100000"/>
+                        </a:srgbClr>
+                      </a:solidFill>
+                      <a:prstDash val="solid"/>
+                    </a:lnL>
+                    <a:lnR algn="ctr" cmpd="sng" cap="flat" w="6350">
+                      <a:solidFill>
+                        <a:srgbClr val="D9D9D9">
+                          <a:alpha val="100000"/>
+                        </a:srgbClr>
+                      </a:solidFill>
+                      <a:prstDash val="solid"/>
+                    </a:lnR>
+                    <a:lnT algn="ctr" cmpd="sng" cap="flat" w="6350">
+                      <a:solidFill>
+                        <a:srgbClr val="D9D9D9">
+                          <a:alpha val="100000"/>
+                        </a:srgbClr>
+                      </a:solidFill>
+                      <a:prstDash val="solid"/>
+                    </a:lnT>
+                    <a:lnB algn="ctr" cmpd="sng" cap="flat" w="6350">
+                      <a:solidFill>
+                        <a:srgbClr val="D9D9D9">
+                          <a:alpha val="100000"/>
+                        </a:srgbClr>
+                      </a:solidFill>
+                      <a:prstDash val="solid"/>
+                    </a:lnB>
+                    <a:solidFill>
+                      <a:srgbClr val="F2F2F2">
+                        <a:alpha val="100000"/>
+                      </a:srgbClr>
+                    </a:solidFill>
+                  </a:tcPr>
+                </a:tc>
+                <a:tc>
+                  <a:txBody>
+                    <a:bodyPr/>
+                    <a:lstStyle/>
+                    <a:p>
+                      <a:pPr algn="ctr" marL="0" marR="0">
+                        <a:lnSpc>
+                          <a:spcPct val="10000"/>
+                        </a:lnSpc>
+                        <a:spcBef>
+                          <a:spcPts val="0"/>
+                        </a:spcBef>
+                        <a:spcAft>
+                          <a:spcPts val="0"/>
+                        </a:spcAft>
+                        <a:buNone/>
+                      </a:pPr>
+                      <a:r>
+                        <a:rPr cap="none" sz="850" i="0" b="0" u="none" strike="noStrike">
+                          <a:solidFill>
+                            <a:srgbClr val="333333">
+                              <a:alpha val="100000"/>
+                            </a:srgbClr>
+                          </a:solidFill>
+                          <a:latin typeface="Arial"/>
+                          <a:cs typeface="Arial"/>
+                          <a:ea typeface="Arial"/>
+                          <a:sym typeface="Arial"/>
+                        </a:rPr>
+                        <a:t> </a:t>
+                      </a:r>
+                    </a:p>
+                  </a:txBody>
+                  <a:tcPr anchor="ctr" marB="0" marT="0" marR="0" marL="0">
+                    <a:lnL algn="ctr" cmpd="sng" cap="flat" w="6350">
+                      <a:solidFill>
+                        <a:srgbClr val="D9D9D9">
+                          <a:alpha val="100000"/>
+                        </a:srgbClr>
+                      </a:solidFill>
+                      <a:prstDash val="solid"/>
+                    </a:lnL>
+                    <a:lnR algn="ctr" cmpd="sng" cap="flat" w="6350">
+                      <a:solidFill>
+                        <a:srgbClr val="D9D9D9">
+                          <a:alpha val="100000"/>
+                        </a:srgbClr>
+                      </a:solidFill>
+                      <a:prstDash val="solid"/>
+                    </a:lnR>
+                    <a:lnT algn="ctr" cmpd="sng" cap="flat" w="6350">
+                      <a:solidFill>
+                        <a:srgbClr val="D9D9D9">
+                          <a:alpha val="100000"/>
+                        </a:srgbClr>
+                      </a:solidFill>
+                      <a:prstDash val="solid"/>
+                    </a:lnT>
+                    <a:lnB algn="ctr" cmpd="sng" cap="flat" w="6350">
+                      <a:solidFill>
+                        <a:srgbClr val="D9D9D9">
+                          <a:alpha val="100000"/>
+                        </a:srgbClr>
+                      </a:solidFill>
+                      <a:prstDash val="solid"/>
+                    </a:lnB>
+                    <a:solidFill>
+                      <a:srgbClr val="F2F2F2">
+                        <a:alpha val="100000"/>
+                      </a:srgbClr>
+                    </a:solidFill>
+                  </a:tcPr>
+                </a:tc>
+                <a:tc>
+                  <a:txBody>
+                    <a:bodyPr/>
+                    <a:lstStyle/>
+                    <a:p>
+                      <a:pPr algn="ctr" marL="0" marR="0">
+                        <a:lnSpc>
+                          <a:spcPct val="10000"/>
+                        </a:lnSpc>
+                        <a:spcBef>
+                          <a:spcPts val="0"/>
+                        </a:spcBef>
+                        <a:spcAft>
+                          <a:spcPts val="0"/>
+                        </a:spcAft>
+                        <a:buNone/>
+                      </a:pPr>
+                      <a:r>
+                        <a:rPr cap="none" sz="850" i="0" b="0" u="none" strike="noStrike">
+                          <a:solidFill>
+                            <a:srgbClr val="333333">
+                              <a:alpha val="100000"/>
+                            </a:srgbClr>
+                          </a:solidFill>
+                          <a:latin typeface="Arial"/>
+                          <a:cs typeface="Arial"/>
+                          <a:ea typeface="Arial"/>
+                          <a:sym typeface="Arial"/>
+                        </a:rPr>
+                        <a:t> </a:t>
+                      </a:r>
+                    </a:p>
+                  </a:txBody>
+                  <a:tcPr anchor="ctr" marB="0" marT="0" marR="0" marL="0">
+                    <a:lnL algn="ctr" cmpd="sng" cap="flat" w="6350">
+                      <a:solidFill>
+                        <a:srgbClr val="D9D9D9">
+                          <a:alpha val="100000"/>
+                        </a:srgbClr>
+                      </a:solidFill>
+                      <a:prstDash val="solid"/>
+                    </a:lnL>
+                    <a:lnR algn="ctr" cmpd="sng" cap="flat" w="6350">
+                      <a:solidFill>
+                        <a:srgbClr val="D9D9D9">
+                          <a:alpha val="100000"/>
+                        </a:srgbClr>
+                      </a:solidFill>
+                      <a:prstDash val="solid"/>
+                    </a:lnR>
+                    <a:lnT algn="ctr" cmpd="sng" cap="flat" w="6350">
+                      <a:solidFill>
+                        <a:srgbClr val="D9D9D9">
+                          <a:alpha val="100000"/>
+                        </a:srgbClr>
+                      </a:solidFill>
+                      <a:prstDash val="solid"/>
+                    </a:lnT>
+                    <a:lnB algn="ctr" cmpd="sng" cap="flat" w="6350">
+                      <a:solidFill>
+                        <a:srgbClr val="D9D9D9">
+                          <a:alpha val="100000"/>
+                        </a:srgbClr>
+                      </a:solidFill>
+                      <a:prstDash val="solid"/>
+                    </a:lnB>
+                    <a:solidFill>
+                      <a:srgbClr val="F2F2F2">
+                        <a:alpha val="100000"/>
+                      </a:srgbClr>
+                    </a:solidFill>
+                  </a:tcPr>
+                </a:tc>
+                <a:tc>
+                  <a:txBody>
+                    <a:bodyPr/>
+                    <a:lstStyle/>
+                    <a:p>
+                      <a:pPr algn="ctr" marL="0" marR="0">
+                        <a:lnSpc>
+                          <a:spcPct val="10000"/>
+                        </a:lnSpc>
+                        <a:spcBef>
+                          <a:spcPts val="0"/>
+                        </a:spcBef>
+                        <a:spcAft>
+                          <a:spcPts val="0"/>
+                        </a:spcAft>
+                        <a:buNone/>
+                      </a:pPr>
+                      <a:r>
+                        <a:rPr cap="none" sz="850" i="0" b="0" u="none" strike="noStrike">
+                          <a:solidFill>
+                            <a:srgbClr val="333333">
+                              <a:alpha val="100000"/>
+                            </a:srgbClr>
+                          </a:solidFill>
+                          <a:latin typeface="Arial"/>
+                          <a:cs typeface="Arial"/>
+                          <a:ea typeface="Arial"/>
+                          <a:sym typeface="Arial"/>
+                        </a:rPr>
+                        <a:t> </a:t>
+                      </a:r>
+                    </a:p>
+                  </a:txBody>
+                  <a:tcPr anchor="ctr" marB="0" marT="0" marR="0" marL="0">
+                    <a:lnL algn="ctr" cmpd="sng" cap="flat" w="6350">
+                      <a:solidFill>
+                        <a:srgbClr val="D9D9D9">
+                          <a:alpha val="100000"/>
+                        </a:srgbClr>
+                      </a:solidFill>
+                      <a:prstDash val="solid"/>
+                    </a:lnL>
+                    <a:lnR algn="ctr" cmpd="sng" cap="flat" w="6350">
+                      <a:solidFill>
+                        <a:srgbClr val="D9D9D9">
+                          <a:alpha val="100000"/>
+                        </a:srgbClr>
+                      </a:solidFill>
+                      <a:prstDash val="solid"/>
+                    </a:lnR>
+                    <a:lnT algn="ctr" cmpd="sng" cap="flat" w="6350">
+                      <a:solidFill>
+                        <a:srgbClr val="D9D9D9">
+                          <a:alpha val="100000"/>
+                        </a:srgbClr>
+                      </a:solidFill>
+                      <a:prstDash val="solid"/>
+                    </a:lnT>
+                    <a:lnB algn="ctr" cmpd="sng" cap="flat" w="6350">
+                      <a:solidFill>
+                        <a:srgbClr val="D9D9D9">
+                          <a:alpha val="100000"/>
+                        </a:srgbClr>
+                      </a:solidFill>
+                      <a:prstDash val="solid"/>
+                    </a:lnB>
+                    <a:solidFill>
+                      <a:srgbClr val="F2F2F2">
+                        <a:alpha val="100000"/>
+                      </a:srgbClr>
+                    </a:solidFill>
+                  </a:tcPr>
+                </a:tc>
+                <a:tc>
+                  <a:txBody>
+                    <a:bodyPr/>
+                    <a:lstStyle/>
+                    <a:p>
+                      <a:pPr algn="ctr" marL="0" marR="0">
+                        <a:lnSpc>
+                          <a:spcPct val="10000"/>
+                        </a:lnSpc>
+                        <a:spcBef>
+                          <a:spcPts val="0"/>
+                        </a:spcBef>
+                        <a:spcAft>
+                          <a:spcPts val="0"/>
+                        </a:spcAft>
+                        <a:buNone/>
+                      </a:pPr>
+                      <a:r>
+                        <a:rPr cap="none" sz="850" i="0" b="0" u="none" strike="noStrike">
+                          <a:solidFill>
+                            <a:srgbClr val="333333">
+                              <a:alpha val="100000"/>
+                            </a:srgbClr>
+                          </a:solidFill>
+                          <a:latin typeface="Arial"/>
+                          <a:cs typeface="Arial"/>
+                          <a:ea typeface="Arial"/>
+                          <a:sym typeface="Arial"/>
+                        </a:rPr>
+                        <a:t> </a:t>
+                      </a:r>
+                    </a:p>
+                  </a:txBody>
+                  <a:tcPr anchor="ctr" marB="0" marT="0" marR="0" marL="0">
+                    <a:lnL algn="ctr" cmpd="sng" cap="flat" w="6350">
+                      <a:solidFill>
+                        <a:srgbClr val="D9D9D9">
+                          <a:alpha val="100000"/>
+                        </a:srgbClr>
+                      </a:solidFill>
+                      <a:prstDash val="solid"/>
+                    </a:lnL>
+                    <a:lnR algn="ctr" cmpd="sng" cap="flat" w="6350">
+                      <a:solidFill>
+                        <a:srgbClr val="D9D9D9">
+                          <a:alpha val="100000"/>
+                        </a:srgbClr>
+                      </a:solidFill>
+                      <a:prstDash val="solid"/>
+                    </a:lnR>
+                    <a:lnT algn="ctr" cmpd="sng" cap="flat" w="6350">
+                      <a:solidFill>
+                        <a:srgbClr val="D9D9D9">
+                          <a:alpha val="100000"/>
+                        </a:srgbClr>
+                      </a:solidFill>
+                      <a:prstDash val="solid"/>
+                    </a:lnT>
+                    <a:lnB algn="ctr" cmpd="sng" cap="flat" w="6350">
+                      <a:solidFill>
+                        <a:srgbClr val="D9D9D9">
+                          <a:alpha val="100000"/>
+                        </a:srgbClr>
+                      </a:solidFill>
+                      <a:prstDash val="solid"/>
+                    </a:lnB>
+                    <a:solidFill>
+                      <a:srgbClr val="F2F2F2">
+                        <a:alpha val="100000"/>
+                      </a:srgbClr>
+                    </a:solidFill>
+                  </a:tcPr>
+                </a:tc>
+                <a:tc>
+                  <a:txBody>
+                    <a:bodyPr/>
+                    <a:lstStyle/>
+                    <a:p>
+                      <a:pPr algn="ctr" marL="0" marR="0">
+                        <a:lnSpc>
+                          <a:spcPct val="10000"/>
+                        </a:lnSpc>
+                        <a:spcBef>
+                          <a:spcPts val="0"/>
+                        </a:spcBef>
+                        <a:spcAft>
+                          <a:spcPts val="0"/>
+                        </a:spcAft>
+                        <a:buNone/>
+                      </a:pPr>
+                      <a:r>
+                        <a:rPr cap="none" sz="850" i="0" b="0" u="none" strike="noStrike">
+                          <a:solidFill>
+                            <a:srgbClr val="333333">
+                              <a:alpha val="100000"/>
+                            </a:srgbClr>
+                          </a:solidFill>
+                          <a:latin typeface="Arial"/>
+                          <a:cs typeface="Arial"/>
+                          <a:ea typeface="Arial"/>
+                          <a:sym typeface="Arial"/>
+                        </a:rPr>
+                        <a:t> </a:t>
+                      </a:r>
+                    </a:p>
+                  </a:txBody>
+                  <a:tcPr anchor="ctr" marB="0" marT="0" marR="0" marL="0">
+                    <a:lnL algn="ctr" cmpd="sng" cap="flat" w="6350">
+                      <a:solidFill>
+                        <a:srgbClr val="D9D9D9">
+                          <a:alpha val="100000"/>
+                        </a:srgbClr>
+                      </a:solidFill>
+                      <a:prstDash val="solid"/>
+                    </a:lnL>
+                    <a:lnR algn="ctr" cmpd="sng" cap="flat" w="6350">
+                      <a:solidFill>
+                        <a:srgbClr val="D9D9D9">
+                          <a:alpha val="100000"/>
+                        </a:srgbClr>
+                      </a:solidFill>
+                      <a:prstDash val="solid"/>
+                    </a:lnR>
+                    <a:lnT algn="ctr" cmpd="sng" cap="flat" w="6350">
+                      <a:solidFill>
+                        <a:srgbClr val="D9D9D9">
+                          <a:alpha val="100000"/>
+                        </a:srgbClr>
+                      </a:solidFill>
+                      <a:prstDash val="solid"/>
+                    </a:lnT>
+                    <a:lnB algn="ctr" cmpd="sng" cap="flat" w="6350">
+                      <a:solidFill>
+                        <a:srgbClr val="D9D9D9">
+                          <a:alpha val="100000"/>
+                        </a:srgbClr>
+                      </a:solidFill>
+                      <a:prstDash val="solid"/>
+                    </a:lnB>
+                    <a:solidFill>
+                      <a:srgbClr val="F2F2F2">
+                        <a:alpha val="100000"/>
+                      </a:srgbClr>
+                    </a:solidFill>
+                  </a:tcPr>
+                </a:tc>
+                <a:tc>
+                  <a:txBody>
+                    <a:bodyPr/>
+                    <a:lstStyle/>
+                    <a:p>
+                      <a:pPr algn="ctr" marL="0" marR="0">
+                        <a:lnSpc>
+                          <a:spcPct val="10000"/>
+                        </a:lnSpc>
+                        <a:spcBef>
+                          <a:spcPts val="0"/>
+                        </a:spcBef>
+                        <a:spcAft>
+                          <a:spcPts val="0"/>
+                        </a:spcAft>
+                        <a:buNone/>
+                      </a:pPr>
+                      <a:r>
+                        <a:rPr cap="none" sz="850" i="0" b="0" u="none" strike="noStrike">
+                          <a:solidFill>
+                            <a:srgbClr val="333333">
+                              <a:alpha val="100000"/>
+                            </a:srgbClr>
+                          </a:solidFill>
+                          <a:latin typeface="Arial"/>
+                          <a:cs typeface="Arial"/>
+                          <a:ea typeface="Arial"/>
+                          <a:sym typeface="Arial"/>
+                        </a:rPr>
+                        <a:t> </a:t>
+                      </a:r>
+                    </a:p>
+                  </a:txBody>
+                  <a:tcPr anchor="ctr" marB="0" marT="0" marR="0" marL="0">
+                    <a:lnL algn="ctr" cmpd="sng" cap="flat" w="6350">
+                      <a:solidFill>
+                        <a:srgbClr val="D9D9D9">
+                          <a:alpha val="100000"/>
+                        </a:srgbClr>
+                      </a:solidFill>
+                      <a:prstDash val="solid"/>
+                    </a:lnL>
+                    <a:lnR algn="ctr" cmpd="sng" cap="flat" w="6350">
+                      <a:solidFill>
+                        <a:srgbClr val="D9D9D9">
+                          <a:alpha val="100000"/>
+                        </a:srgbClr>
+                      </a:solidFill>
+                      <a:prstDash val="solid"/>
+                    </a:lnR>
+                    <a:lnT algn="ctr" cmpd="sng" cap="flat" w="6350">
+                      <a:solidFill>
+                        <a:srgbClr val="D9D9D9">
+                          <a:alpha val="100000"/>
+                        </a:srgbClr>
+                      </a:solidFill>
+                      <a:prstDash val="solid"/>
+                    </a:lnT>
+                    <a:lnB algn="ctr" cmpd="sng" cap="flat" w="6350">
+                      <a:solidFill>
+                        <a:srgbClr val="D9D9D9">
+                          <a:alpha val="100000"/>
+                        </a:srgbClr>
+                      </a:solidFill>
+                      <a:prstDash val="solid"/>
+                    </a:lnB>
+                    <a:solidFill>
+                      <a:srgbClr val="F2F2F2">
+                        <a:alpha val="100000"/>
+                      </a:srgbClr>
+                    </a:solidFill>
+                  </a:tcPr>
+                </a:tc>
+                <a:tc>
+                  <a:txBody>
+                    <a:bodyPr/>
+                    <a:lstStyle/>
+                    <a:p>
+                      <a:pPr algn="ctr" marL="0" marR="0">
+                        <a:lnSpc>
+                          <a:spcPct val="10000"/>
+                        </a:lnSpc>
+                        <a:spcBef>
+                          <a:spcPts val="0"/>
+                        </a:spcBef>
+                        <a:spcAft>
+                          <a:spcPts val="0"/>
+                        </a:spcAft>
+                        <a:buNone/>
+                      </a:pPr>
+                      <a:r>
+                        <a:rPr cap="none" sz="850" i="0" b="0" u="none" strike="noStrike">
+                          <a:solidFill>
+                            <a:srgbClr val="333333">
+                              <a:alpha val="100000"/>
+                            </a:srgbClr>
+                          </a:solidFill>
+                          <a:latin typeface="Arial"/>
+                          <a:cs typeface="Arial"/>
+                          <a:ea typeface="Arial"/>
+                          <a:sym typeface="Arial"/>
+                        </a:rPr>
+                        <a:t> </a:t>
+                      </a:r>
+                    </a:p>
+                  </a:txBody>
+                  <a:tcPr anchor="ctr" marB="0" marT="0" marR="0" marL="0">
+                    <a:lnL algn="ctr" cmpd="sng" cap="flat" w="6350">
+                      <a:solidFill>
+                        <a:srgbClr val="D9D9D9">
+                          <a:alpha val="100000"/>
+                        </a:srgbClr>
+                      </a:solidFill>
+                      <a:prstDash val="solid"/>
+                    </a:lnL>
+                    <a:lnR algn="ctr" cmpd="sng" cap="flat" w="6350">
+                      <a:solidFill>
+                        <a:srgbClr val="D9D9D9">
+                          <a:alpha val="100000"/>
+                        </a:srgbClr>
+                      </a:solidFill>
+                      <a:prstDash val="solid"/>
+                    </a:lnR>
+                    <a:lnT algn="ctr" cmpd="sng" cap="flat" w="6350">
+                      <a:solidFill>
+                        <a:srgbClr val="D9D9D9">
+                          <a:alpha val="100000"/>
+                        </a:srgbClr>
+                      </a:solidFill>
+                      <a:prstDash val="solid"/>
+                    </a:lnT>
+                    <a:lnB algn="ctr" cmpd="sng" cap="flat" w="6350">
+                      <a:solidFill>
+                        <a:srgbClr val="D9D9D9">
+                          <a:alpha val="100000"/>
+                        </a:srgbClr>
+                      </a:solidFill>
+                      <a:prstDash val="solid"/>
+                    </a:lnB>
+                    <a:solidFill>
+                      <a:srgbClr val="F2F2F2">
+                        <a:alpha val="100000"/>
+                      </a:srgbClr>
+                    </a:solidFill>
+                  </a:tcPr>
+                </a:tc>
+                <a:tc>
+                  <a:txBody>
+                    <a:bodyPr/>
+                    <a:lstStyle/>
+                    <a:p>
+                      <a:pPr algn="ctr" marL="0" marR="0">
+                        <a:lnSpc>
+                          <a:spcPct val="10000"/>
+                        </a:lnSpc>
+                        <a:spcBef>
+                          <a:spcPts val="0"/>
+                        </a:spcBef>
+                        <a:spcAft>
+                          <a:spcPts val="0"/>
+                        </a:spcAft>
+                        <a:buNone/>
+                      </a:pPr>
+                      <a:r>
+                        <a:rPr cap="none" sz="850" i="0" b="0" u="none" strike="noStrike">
+                          <a:solidFill>
+                            <a:srgbClr val="333333">
+                              <a:alpha val="100000"/>
+                            </a:srgbClr>
+                          </a:solidFill>
+                          <a:latin typeface="Arial"/>
+                          <a:cs typeface="Arial"/>
+                          <a:ea typeface="Arial"/>
+                          <a:sym typeface="Arial"/>
+                        </a:rPr>
+                        <a:t> </a:t>
+                      </a:r>
+                    </a:p>
+                  </a:txBody>
+                  <a:tcPr anchor="ctr" marB="0" marT="0" marR="0" marL="0">
+                    <a:lnL algn="ctr" cmpd="sng" cap="flat" w="6350">
+                      <a:solidFill>
+                        <a:srgbClr val="D9D9D9">
+                          <a:alpha val="100000"/>
+                        </a:srgbClr>
+                      </a:solidFill>
+                      <a:prstDash val="solid"/>
+                    </a:lnL>
+                    <a:lnR algn="ctr" cmpd="sng" cap="flat" w="6350">
+                      <a:solidFill>
+                        <a:srgbClr val="D9D9D9">
+                          <a:alpha val="100000"/>
+                        </a:srgbClr>
+                      </a:solidFill>
+                      <a:prstDash val="solid"/>
+                    </a:lnR>
+                    <a:lnT algn="ctr" cmpd="sng" cap="flat" w="6350">
+                      <a:solidFill>
+                        <a:srgbClr val="D9D9D9">
+                          <a:alpha val="100000"/>
+                        </a:srgbClr>
+                      </a:solidFill>
+                      <a:prstDash val="solid"/>
+                    </a:lnT>
+                    <a:lnB algn="ctr" cmpd="sng" cap="flat" w="6350">
+                      <a:solidFill>
+                        <a:srgbClr val="D9D9D9">
+                          <a:alpha val="100000"/>
+                        </a:srgbClr>
+                      </a:solidFill>
+                      <a:prstDash val="solid"/>
+                    </a:lnB>
+                    <a:solidFill>
+                      <a:srgbClr val="F2F2F2">
+                        <a:alpha val="100000"/>
+                      </a:srgbClr>
+                    </a:solidFill>
+                  </a:tcPr>
+                </a:tc>
+              </a:tr>
+              <a:tr h="4315968">
+                <a:tc>
+                  <a:txBody>
+                    <a:bodyPr/>
+                    <a:lstStyle/>
+                    <a:p>
+                      <a:pPr algn="ctr" marL="0" marR="0">
+                        <a:lnSpc>
+                          <a:spcPct val="10000"/>
+                        </a:lnSpc>
+                        <a:spcBef>
+                          <a:spcPts val="0"/>
+                        </a:spcBef>
+                        <a:spcAft>
+                          <a:spcPts val="0"/>
+                        </a:spcAft>
+                        <a:buNone/>
+                      </a:pPr>
+                      <a:r>
+                        <a:rPr cap="none" sz="400" i="0" b="0" u="none" strike="noStrike">
+                          <a:solidFill>
+                            <a:srgbClr val="000000">
+                              <a:alpha val="100000"/>
+                            </a:srgbClr>
+                          </a:solidFill>
+                          <a:latin typeface="Arial"/>
+                          <a:cs typeface="Arial"/>
+                          <a:ea typeface="Arial"/>
+                          <a:sym typeface="Arial"/>
+                        </a:rPr>
+                        <a:t> </a:t>
+                      </a:r>
+                    </a:p>
+                  </a:txBody>
+                  <a:tcPr anchor="ctr" marB="0" marT="0" marR="0" marL="0">
+                    <a:lnL algn="ctr" cmpd="sng" cap="flat" w="6350">
+                      <a:solidFill>
+                        <a:srgbClr val="D9D9D9">
+                          <a:alpha val="100000"/>
+                        </a:srgbClr>
+                      </a:solidFill>
+                      <a:prstDash val="solid"/>
+                    </a:lnL>
+                    <a:lnR algn="ctr" cmpd="sng" cap="flat" w="6350">
+                      <a:solidFill>
+                        <a:srgbClr val="D9D9D9">
+                          <a:alpha val="100000"/>
+                        </a:srgbClr>
+                      </a:solidFill>
+                      <a:prstDash val="solid"/>
+                    </a:lnR>
+                    <a:lnT algn="ctr" cmpd="sng" cap="flat" w="6350">
+                      <a:solidFill>
+                        <a:srgbClr val="D9D9D9">
+                          <a:alpha val="100000"/>
+                        </a:srgbClr>
+                      </a:solidFill>
+                      <a:prstDash val="solid"/>
+                    </a:lnT>
+                    <a:lnB algn="ctr" cmpd="sng" cap="flat" w="6350">
+                      <a:solidFill>
+                        <a:srgbClr val="D9D9D9">
+                          <a:alpha val="100000"/>
+                        </a:srgbClr>
+                      </a:solidFill>
+                      <a:prstDash val="solid"/>
+                    </a:lnB>
+                    <a:solidFill>
+                      <a:srgbClr val="FFFFFF">
+                        <a:alpha val="0"/>
+                      </a:srgbClr>
+                    </a:solidFill>
+                  </a:tcPr>
+                </a:tc>
+                <a:tc>
+                  <a:txBody>
+                    <a:bodyPr/>
+                    <a:lstStyle/>
+                    <a:p>
+                      <a:pPr algn="ctr" marL="0" marR="0">
+                        <a:lnSpc>
+                          <a:spcPct val="10000"/>
+                        </a:lnSpc>
+                        <a:spcBef>
+                          <a:spcPts val="0"/>
+                        </a:spcBef>
+                        <a:spcAft>
+                          <a:spcPts val="0"/>
+                        </a:spcAft>
+                        <a:buNone/>
+                      </a:pPr>
+                      <a:r>
+                        <a:rPr cap="none" sz="400" i="0" b="0" u="none" strike="noStrike">
+                          <a:solidFill>
+                            <a:srgbClr val="000000">
+                              <a:alpha val="100000"/>
+                            </a:srgbClr>
+                          </a:solidFill>
+                          <a:latin typeface="Arial"/>
+                          <a:cs typeface="Arial"/>
+                          <a:ea typeface="Arial"/>
+                          <a:sym typeface="Arial"/>
+                        </a:rPr>
+                        <a:t> </a:t>
+                      </a:r>
+                    </a:p>
+                  </a:txBody>
+                  <a:tcPr anchor="ctr" marB="0" marT="0" marR="0" marL="0">
+                    <a:lnL algn="ctr" cmpd="sng" cap="flat" w="6350">
+                      <a:solidFill>
+                        <a:srgbClr val="D9D9D9">
+                          <a:alpha val="100000"/>
+                        </a:srgbClr>
+                      </a:solidFill>
+                      <a:prstDash val="solid"/>
+                    </a:lnL>
+                    <a:lnR algn="ctr" cmpd="sng" cap="flat" w="6350">
+                      <a:solidFill>
+                        <a:srgbClr val="D9D9D9">
+                          <a:alpha val="100000"/>
+                        </a:srgbClr>
+                      </a:solidFill>
+                      <a:prstDash val="solid"/>
+                    </a:lnR>
+                    <a:lnT algn="ctr" cmpd="sng" cap="flat" w="6350">
+                      <a:solidFill>
+                        <a:srgbClr val="D9D9D9">
+                          <a:alpha val="100000"/>
+                        </a:srgbClr>
+                      </a:solidFill>
+                      <a:prstDash val="solid"/>
+                    </a:lnT>
+                    <a:lnB algn="ctr" cmpd="sng" cap="flat" w="6350">
+                      <a:solidFill>
+                        <a:srgbClr val="D9D9D9">
+                          <a:alpha val="100000"/>
+                        </a:srgbClr>
+                      </a:solidFill>
+                      <a:prstDash val="solid"/>
+                    </a:lnB>
+                    <a:solidFill>
+                      <a:srgbClr val="FFFFFF">
+                        <a:alpha val="0"/>
+                      </a:srgbClr>
+                    </a:solidFill>
+                  </a:tcPr>
+                </a:tc>
+                <a:tc>
+                  <a:txBody>
+                    <a:bodyPr/>
+                    <a:lstStyle/>
+                    <a:p>
+                      <a:pPr algn="ctr" marL="0" marR="0">
+                        <a:lnSpc>
+                          <a:spcPct val="10000"/>
+                        </a:lnSpc>
+                        <a:spcBef>
+                          <a:spcPts val="0"/>
+                        </a:spcBef>
+                        <a:spcAft>
+                          <a:spcPts val="0"/>
+                        </a:spcAft>
+                        <a:buNone/>
+                      </a:pPr>
+                      <a:r>
+                        <a:rPr cap="none" sz="400" i="0" b="0" u="none" strike="noStrike">
+                          <a:solidFill>
+                            <a:srgbClr val="000000">
+                              <a:alpha val="100000"/>
+                            </a:srgbClr>
+                          </a:solidFill>
+                          <a:latin typeface="Arial"/>
+                          <a:cs typeface="Arial"/>
+                          <a:ea typeface="Arial"/>
+                          <a:sym typeface="Arial"/>
+                        </a:rPr>
+                        <a:t> </a:t>
+                      </a:r>
+                    </a:p>
+                  </a:txBody>
+                  <a:tcPr anchor="ctr" marB="0" marT="0" marR="0" marL="0">
+                    <a:lnL algn="ctr" cmpd="sng" cap="flat" w="6350">
+                      <a:solidFill>
+                        <a:srgbClr val="D9D9D9">
+                          <a:alpha val="100000"/>
+                        </a:srgbClr>
+                      </a:solidFill>
+                      <a:prstDash val="solid"/>
+                    </a:lnL>
+                    <a:lnR algn="ctr" cmpd="sng" cap="flat" w="6350">
+                      <a:solidFill>
+                        <a:srgbClr val="D9D9D9">
+                          <a:alpha val="100000"/>
+                        </a:srgbClr>
+                      </a:solidFill>
+                      <a:prstDash val="solid"/>
+                    </a:lnR>
+                    <a:lnT algn="ctr" cmpd="sng" cap="flat" w="6350">
+                      <a:solidFill>
+                        <a:srgbClr val="D9D9D9">
+                          <a:alpha val="100000"/>
+                        </a:srgbClr>
+                      </a:solidFill>
+                      <a:prstDash val="solid"/>
+                    </a:lnT>
+                    <a:lnB algn="ctr" cmpd="sng" cap="flat" w="6350">
+                      <a:solidFill>
+                        <a:srgbClr val="D9D9D9">
+                          <a:alpha val="100000"/>
+                        </a:srgbClr>
+                      </a:solidFill>
+                      <a:prstDash val="solid"/>
+                    </a:lnB>
+                    <a:solidFill>
+                      <a:srgbClr val="FFFFFF">
+                        <a:alpha val="0"/>
+                      </a:srgbClr>
+                    </a:solidFill>
+                  </a:tcPr>
+                </a:tc>
+                <a:tc>
+                  <a:txBody>
+                    <a:bodyPr/>
+                    <a:lstStyle/>
+                    <a:p>
+                      <a:pPr algn="ctr" marL="0" marR="0">
+                        <a:lnSpc>
+                          <a:spcPct val="10000"/>
+                        </a:lnSpc>
+                        <a:spcBef>
+                          <a:spcPts val="0"/>
+                        </a:spcBef>
+                        <a:spcAft>
+                          <a:spcPts val="0"/>
+                        </a:spcAft>
+                        <a:buNone/>
+                      </a:pPr>
+                      <a:r>
+                        <a:rPr cap="none" sz="400" i="0" b="0" u="none" strike="noStrike">
+                          <a:solidFill>
+                            <a:srgbClr val="000000">
+                              <a:alpha val="100000"/>
+                            </a:srgbClr>
+                          </a:solidFill>
+                          <a:latin typeface="Arial"/>
+                          <a:cs typeface="Arial"/>
+                          <a:ea typeface="Arial"/>
+                          <a:sym typeface="Arial"/>
+                        </a:rPr>
+                        <a:t> </a:t>
+                      </a:r>
+                    </a:p>
+                  </a:txBody>
+                  <a:tcPr anchor="ctr" marB="0" marT="0" marR="0" marL="0">
+                    <a:lnL algn="ctr" cmpd="sng" cap="flat" w="6350">
+                      <a:solidFill>
+                        <a:srgbClr val="D9D9D9">
+                          <a:alpha val="100000"/>
+                        </a:srgbClr>
+                      </a:solidFill>
+                      <a:prstDash val="solid"/>
+                    </a:lnL>
+                    <a:lnR algn="ctr" cmpd="sng" cap="flat" w="6350">
+                      <a:solidFill>
+                        <a:srgbClr val="D9D9D9">
+                          <a:alpha val="100000"/>
+                        </a:srgbClr>
+                      </a:solidFill>
+                      <a:prstDash val="solid"/>
+                    </a:lnR>
+                    <a:lnT algn="ctr" cmpd="sng" cap="flat" w="6350">
+                      <a:solidFill>
+                        <a:srgbClr val="D9D9D9">
+                          <a:alpha val="100000"/>
+                        </a:srgbClr>
+                      </a:solidFill>
+                      <a:prstDash val="solid"/>
+                    </a:lnT>
+                    <a:lnB algn="ctr" cmpd="sng" cap="flat" w="6350">
+                      <a:solidFill>
+                        <a:srgbClr val="D9D9D9">
+                          <a:alpha val="100000"/>
+                        </a:srgbClr>
+                      </a:solidFill>
+                      <a:prstDash val="solid"/>
+                    </a:lnB>
+                    <a:solidFill>
+                      <a:srgbClr val="FFFFFF">
+                        <a:alpha val="0"/>
+                      </a:srgbClr>
+                    </a:solidFill>
+                  </a:tcPr>
+                </a:tc>
+                <a:tc>
+                  <a:txBody>
+                    <a:bodyPr/>
+                    <a:lstStyle/>
+                    <a:p>
+                      <a:pPr algn="ctr" marL="0" marR="0">
+                        <a:lnSpc>
+                          <a:spcPct val="10000"/>
+                        </a:lnSpc>
+                        <a:spcBef>
+                          <a:spcPts val="0"/>
+                        </a:spcBef>
+                        <a:spcAft>
+                          <a:spcPts val="0"/>
+                        </a:spcAft>
+                        <a:buNone/>
+                      </a:pPr>
+                      <a:r>
+                        <a:rPr cap="none" sz="400" i="0" b="0" u="none" strike="noStrike">
+                          <a:solidFill>
+                            <a:srgbClr val="000000">
+                              <a:alpha val="100000"/>
+                            </a:srgbClr>
+                          </a:solidFill>
+                          <a:latin typeface="Arial"/>
+                          <a:cs typeface="Arial"/>
+                          <a:ea typeface="Arial"/>
+                          <a:sym typeface="Arial"/>
+                        </a:rPr>
+                        <a:t> </a:t>
+                      </a:r>
+                    </a:p>
+                  </a:txBody>
+                  <a:tcPr anchor="ctr" marB="0" marT="0" marR="0" marL="0">
+                    <a:lnL algn="ctr" cmpd="sng" cap="flat" w="6350">
+                      <a:solidFill>
+                        <a:srgbClr val="D9D9D9">
+                          <a:alpha val="100000"/>
+                        </a:srgbClr>
+                      </a:solidFill>
+                      <a:prstDash val="solid"/>
+                    </a:lnL>
+                    <a:lnR algn="ctr" cmpd="sng" cap="flat" w="6350">
+                      <a:solidFill>
+                        <a:srgbClr val="D9D9D9">
+                          <a:alpha val="100000"/>
+                        </a:srgbClr>
+                      </a:solidFill>
+                      <a:prstDash val="solid"/>
+                    </a:lnR>
+                    <a:lnT algn="ctr" cmpd="sng" cap="flat" w="6350">
+                      <a:solidFill>
+                        <a:srgbClr val="D9D9D9">
+                          <a:alpha val="100000"/>
+                        </a:srgbClr>
+                      </a:solidFill>
+                      <a:prstDash val="solid"/>
+                    </a:lnT>
+                    <a:lnB algn="ctr" cmpd="sng" cap="flat" w="6350">
+                      <a:solidFill>
+                        <a:srgbClr val="D9D9D9">
+                          <a:alpha val="100000"/>
+                        </a:srgbClr>
+                      </a:solidFill>
+                      <a:prstDash val="solid"/>
+                    </a:lnB>
+                    <a:solidFill>
+                      <a:srgbClr val="FFFFFF">
+                        <a:alpha val="0"/>
+                      </a:srgbClr>
+                    </a:solidFill>
+                  </a:tcPr>
+                </a:tc>
+                <a:tc>
+                  <a:txBody>
+                    <a:bodyPr/>
+                    <a:lstStyle/>
+                    <a:p>
+                      <a:pPr algn="ctr" marL="0" marR="0">
+                        <a:lnSpc>
+                          <a:spcPct val="10000"/>
+                        </a:lnSpc>
+                        <a:spcBef>
+                          <a:spcPts val="0"/>
+                        </a:spcBef>
+                        <a:spcAft>
+                          <a:spcPts val="0"/>
+                        </a:spcAft>
+                        <a:buNone/>
+                      </a:pPr>
+                      <a:r>
+                        <a:rPr cap="none" sz="400" i="0" b="0" u="none" strike="noStrike">
+                          <a:solidFill>
+                            <a:srgbClr val="000000">
+                              <a:alpha val="100000"/>
+                            </a:srgbClr>
+                          </a:solidFill>
+                          <a:latin typeface="Arial"/>
+                          <a:cs typeface="Arial"/>
+                          <a:ea typeface="Arial"/>
+                          <a:sym typeface="Arial"/>
+                        </a:rPr>
+                        <a:t> </a:t>
+                      </a:r>
+                    </a:p>
+                  </a:txBody>
+                  <a:tcPr anchor="ctr" marB="0" marT="0" marR="0" marL="0">
+                    <a:lnL algn="ctr" cmpd="sng" cap="flat" w="6350">
+                      <a:solidFill>
+                        <a:srgbClr val="D9D9D9">
+                          <a:alpha val="100000"/>
+                        </a:srgbClr>
+                      </a:solidFill>
+                      <a:prstDash val="solid"/>
+                    </a:lnL>
+                    <a:lnR algn="ctr" cmpd="sng" cap="flat" w="6350">
+                      <a:solidFill>
+                        <a:srgbClr val="D9D9D9">
+                          <a:alpha val="100000"/>
+                        </a:srgbClr>
+                      </a:solidFill>
+                      <a:prstDash val="solid"/>
+                    </a:lnR>
+                    <a:lnT algn="ctr" cmpd="sng" cap="flat" w="6350">
+                      <a:solidFill>
+                        <a:srgbClr val="D9D9D9">
+                          <a:alpha val="100000"/>
+                        </a:srgbClr>
+                      </a:solidFill>
+                      <a:prstDash val="solid"/>
+                    </a:lnT>
+                    <a:lnB algn="ctr" cmpd="sng" cap="flat" w="6350">
+                      <a:solidFill>
+                        <a:srgbClr val="D9D9D9">
+                          <a:alpha val="100000"/>
+                        </a:srgbClr>
+                      </a:solidFill>
+                      <a:prstDash val="solid"/>
+                    </a:lnB>
+                    <a:solidFill>
+                      <a:srgbClr val="FFFFFF">
+                        <a:alpha val="0"/>
+                      </a:srgbClr>
+                    </a:solidFill>
+                  </a:tcPr>
+                </a:tc>
+                <a:tc>
+                  <a:txBody>
+                    <a:bodyPr/>
+                    <a:lstStyle/>
+                    <a:p>
+                      <a:pPr algn="ctr" marL="0" marR="0">
+                        <a:lnSpc>
+                          <a:spcPct val="10000"/>
+                        </a:lnSpc>
+                        <a:spcBef>
+                          <a:spcPts val="0"/>
+                        </a:spcBef>
+                        <a:spcAft>
+                          <a:spcPts val="0"/>
+                        </a:spcAft>
+                        <a:buNone/>
+                      </a:pPr>
+                      <a:r>
+                        <a:rPr cap="none" sz="400" i="0" b="0" u="none" strike="noStrike">
+                          <a:solidFill>
+                            <a:srgbClr val="000000">
+                              <a:alpha val="100000"/>
+                            </a:srgbClr>
+                          </a:solidFill>
+                          <a:latin typeface="Arial"/>
+                          <a:cs typeface="Arial"/>
+                          <a:ea typeface="Arial"/>
+                          <a:sym typeface="Arial"/>
+                        </a:rPr>
+                        <a:t> </a:t>
+                      </a:r>
+                    </a:p>
+                  </a:txBody>
+                  <a:tcPr anchor="ctr" marB="0" marT="0" marR="0" marL="0">
+                    <a:lnL algn="ctr" cmpd="sng" cap="flat" w="6350">
+                      <a:solidFill>
+                        <a:srgbClr val="D9D9D9">
+                          <a:alpha val="100000"/>
+                        </a:srgbClr>
+                      </a:solidFill>
+                      <a:prstDash val="solid"/>
+                    </a:lnL>
+                    <a:lnR algn="ctr" cmpd="sng" cap="flat" w="6350">
+                      <a:solidFill>
+                        <a:srgbClr val="D9D9D9">
+                          <a:alpha val="100000"/>
+                        </a:srgbClr>
+                      </a:solidFill>
+                      <a:prstDash val="solid"/>
+                    </a:lnR>
+                    <a:lnT algn="ctr" cmpd="sng" cap="flat" w="6350">
+                      <a:solidFill>
+                        <a:srgbClr val="D9D9D9">
+                          <a:alpha val="100000"/>
+                        </a:srgbClr>
+                      </a:solidFill>
+                      <a:prstDash val="solid"/>
+                    </a:lnT>
+                    <a:lnB algn="ctr" cmpd="sng" cap="flat" w="6350">
+                      <a:solidFill>
+                        <a:srgbClr val="D9D9D9">
+                          <a:alpha val="100000"/>
+                        </a:srgbClr>
+                      </a:solidFill>
+                      <a:prstDash val="solid"/>
+                    </a:lnB>
+                    <a:solidFill>
+                      <a:srgbClr val="FFFFFF">
+                        <a:alpha val="0"/>
+                      </a:srgbClr>
+                    </a:solidFill>
+                  </a:tcPr>
+                </a:tc>
+                <a:tc>
+                  <a:txBody>
+                    <a:bodyPr/>
+                    <a:lstStyle/>
+                    <a:p>
+                      <a:pPr algn="ctr" marL="0" marR="0">
+                        <a:lnSpc>
+                          <a:spcPct val="10000"/>
+                        </a:lnSpc>
+                        <a:spcBef>
+                          <a:spcPts val="0"/>
+                        </a:spcBef>
+                        <a:spcAft>
+                          <a:spcPts val="0"/>
+                        </a:spcAft>
+                        <a:buNone/>
+                      </a:pPr>
+                      <a:r>
+                        <a:rPr cap="none" sz="400" i="0" b="0" u="none" strike="noStrike">
+                          <a:solidFill>
+                            <a:srgbClr val="000000">
+                              <a:alpha val="100000"/>
+                            </a:srgbClr>
+                          </a:solidFill>
+                          <a:latin typeface="Arial"/>
+                          <a:cs typeface="Arial"/>
+                          <a:ea typeface="Arial"/>
+                          <a:sym typeface="Arial"/>
+                        </a:rPr>
+                        <a:t> </a:t>
+                      </a:r>
+                    </a:p>
+                  </a:txBody>
+                  <a:tcPr anchor="ctr" marB="0" marT="0" marR="0" marL="0">
+                    <a:lnL algn="ctr" cmpd="sng" cap="flat" w="6350">
+                      <a:solidFill>
+                        <a:srgbClr val="D9D9D9">
+                          <a:alpha val="100000"/>
+                        </a:srgbClr>
+                      </a:solidFill>
+                      <a:prstDash val="solid"/>
+                    </a:lnL>
+                    <a:lnR algn="ctr" cmpd="sng" cap="flat" w="6350">
+                      <a:solidFill>
+                        <a:srgbClr val="D9D9D9">
+                          <a:alpha val="100000"/>
+                        </a:srgbClr>
+                      </a:solidFill>
+                      <a:prstDash val="solid"/>
+                    </a:lnR>
+                    <a:lnT algn="ctr" cmpd="sng" cap="flat" w="6350">
+                      <a:solidFill>
+                        <a:srgbClr val="D9D9D9">
+                          <a:alpha val="100000"/>
+                        </a:srgbClr>
+                      </a:solidFill>
+                      <a:prstDash val="solid"/>
+                    </a:lnT>
+                    <a:lnB algn="ctr" cmpd="sng" cap="flat" w="6350">
+                      <a:solidFill>
+                        <a:srgbClr val="D9D9D9">
+                          <a:alpha val="100000"/>
+                        </a:srgbClr>
+                      </a:solidFill>
+                      <a:prstDash val="solid"/>
+                    </a:lnB>
+                    <a:solidFill>
+                      <a:srgbClr val="FFFFFF">
+                        <a:alpha val="0"/>
+                      </a:srgbClr>
+                    </a:solidFill>
+                  </a:tcPr>
+                </a:tc>
+                <a:tc>
+                  <a:txBody>
+                    <a:bodyPr/>
+                    <a:lstStyle/>
+                    <a:p>
+                      <a:pPr algn="ctr" marL="0" marR="0">
+                        <a:lnSpc>
+                          <a:spcPct val="10000"/>
+                        </a:lnSpc>
+                        <a:spcBef>
+                          <a:spcPts val="0"/>
+                        </a:spcBef>
+                        <a:spcAft>
+                          <a:spcPts val="0"/>
+                        </a:spcAft>
+                        <a:buNone/>
+                      </a:pPr>
+                      <a:r>
+                        <a:rPr cap="none" sz="400" i="0" b="0" u="none" strike="noStrike">
+                          <a:solidFill>
+                            <a:srgbClr val="000000">
+                              <a:alpha val="100000"/>
+                            </a:srgbClr>
+                          </a:solidFill>
+                          <a:latin typeface="Arial"/>
+                          <a:cs typeface="Arial"/>
+                          <a:ea typeface="Arial"/>
+                          <a:sym typeface="Arial"/>
+                        </a:rPr>
+                        <a:t> </a:t>
+                      </a:r>
+                    </a:p>
+                  </a:txBody>
+                  <a:tcPr anchor="ctr" marB="0" marT="0" marR="0" marL="0">
+                    <a:lnL algn="ctr" cmpd="sng" cap="flat" w="6350">
+                      <a:solidFill>
+                        <a:srgbClr val="D9D9D9">
+                          <a:alpha val="100000"/>
+                        </a:srgbClr>
+                      </a:solidFill>
+                      <a:prstDash val="solid"/>
+                    </a:lnL>
+                    <a:lnR algn="ctr" cmpd="sng" cap="flat" w="6350">
+                      <a:solidFill>
+                        <a:srgbClr val="D9D9D9">
+                          <a:alpha val="100000"/>
+                        </a:srgbClr>
+                      </a:solidFill>
+                      <a:prstDash val="solid"/>
+                    </a:lnR>
+                    <a:lnT algn="ctr" cmpd="sng" cap="flat" w="6350">
+                      <a:solidFill>
+                        <a:srgbClr val="D9D9D9">
+                          <a:alpha val="100000"/>
+                        </a:srgbClr>
+                      </a:solidFill>
+                      <a:prstDash val="solid"/>
+                    </a:lnT>
+                    <a:lnB algn="ctr" cmpd="sng" cap="flat" w="6350">
+                      <a:solidFill>
+                        <a:srgbClr val="D9D9D9">
+                          <a:alpha val="100000"/>
+                        </a:srgbClr>
+                      </a:solidFill>
+                      <a:prstDash val="solid"/>
+                    </a:lnB>
+                    <a:solidFill>
+                      <a:srgbClr val="FFFFFF">
+                        <a:alpha val="0"/>
+                      </a:srgbClr>
+                    </a:solidFill>
+                  </a:tcPr>
+                </a:tc>
+                <a:tc>
+                  <a:txBody>
+                    <a:bodyPr/>
+                    <a:lstStyle/>
+                    <a:p>
+                      <a:pPr algn="ctr" marL="0" marR="0">
+                        <a:lnSpc>
+                          <a:spcPct val="10000"/>
+                        </a:lnSpc>
+                        <a:spcBef>
+                          <a:spcPts val="0"/>
+                        </a:spcBef>
+                        <a:spcAft>
+                          <a:spcPts val="0"/>
+                        </a:spcAft>
+                        <a:buNone/>
+                      </a:pPr>
+                      <a:r>
+                        <a:rPr cap="none" sz="400" i="0" b="0" u="none" strike="noStrike">
+                          <a:solidFill>
+                            <a:srgbClr val="000000">
+                              <a:alpha val="100000"/>
+                            </a:srgbClr>
+                          </a:solidFill>
+                          <a:latin typeface="Arial"/>
+                          <a:cs typeface="Arial"/>
+                          <a:ea typeface="Arial"/>
+                          <a:sym typeface="Arial"/>
+                        </a:rPr>
+                        <a:t> </a:t>
+                      </a:r>
+                    </a:p>
+                  </a:txBody>
+                  <a:tcPr anchor="ctr" marB="0" marT="0" marR="0" marL="0">
+                    <a:lnL algn="ctr" cmpd="sng" cap="flat" w="6350">
+                      <a:solidFill>
+                        <a:srgbClr val="D9D9D9">
+                          <a:alpha val="100000"/>
+                        </a:srgbClr>
+                      </a:solidFill>
+                      <a:prstDash val="solid"/>
+                    </a:lnL>
+                    <a:lnR algn="ctr" cmpd="sng" cap="flat" w="6350">
+                      <a:solidFill>
+                        <a:srgbClr val="D9D9D9">
+                          <a:alpha val="100000"/>
+                        </a:srgbClr>
+                      </a:solidFill>
+                      <a:prstDash val="solid"/>
+                    </a:lnR>
+                    <a:lnT algn="ctr" cmpd="sng" cap="flat" w="6350">
+                      <a:solidFill>
+                        <a:srgbClr val="D9D9D9">
+                          <a:alpha val="100000"/>
+                        </a:srgbClr>
+                      </a:solidFill>
+                      <a:prstDash val="solid"/>
+                    </a:lnT>
+                    <a:lnB algn="ctr" cmpd="sng" cap="flat" w="6350">
+                      <a:solidFill>
+                        <a:srgbClr val="D9D9D9">
+                          <a:alpha val="100000"/>
+                        </a:srgbClr>
+                      </a:solidFill>
+                      <a:prstDash val="solid"/>
+                    </a:lnB>
+                    <a:solidFill>
+                      <a:srgbClr val="FFFFFF">
+                        <a:alpha val="0"/>
+                      </a:srgbClr>
+                    </a:solidFill>
+                  </a:tcPr>
+                </a:tc>
+                <a:tc>
+                  <a:txBody>
+                    <a:bodyPr/>
+                    <a:lstStyle/>
+                    <a:p>
+                      <a:pPr algn="ctr" marL="0" marR="0">
+                        <a:lnSpc>
+                          <a:spcPct val="10000"/>
+                        </a:lnSpc>
+                        <a:spcBef>
+                          <a:spcPts val="0"/>
+                        </a:spcBef>
+                        <a:spcAft>
+                          <a:spcPts val="0"/>
+                        </a:spcAft>
+                        <a:buNone/>
+                      </a:pPr>
+                      <a:r>
+                        <a:rPr cap="none" sz="400" i="0" b="0" u="none" strike="noStrike">
+                          <a:solidFill>
+                            <a:srgbClr val="000000">
+                              <a:alpha val="100000"/>
+                            </a:srgbClr>
+                          </a:solidFill>
+                          <a:latin typeface="Arial"/>
+                          <a:cs typeface="Arial"/>
+                          <a:ea typeface="Arial"/>
+                          <a:sym typeface="Arial"/>
+                        </a:rPr>
+                        <a:t> </a:t>
+                      </a:r>
+                    </a:p>
+                  </a:txBody>
+                  <a:tcPr anchor="ctr" marB="0" marT="0" marR="0" marL="0">
+                    <a:lnL algn="ctr" cmpd="sng" cap="flat" w="6350">
+                      <a:solidFill>
+                        <a:srgbClr val="D9D9D9">
+                          <a:alpha val="100000"/>
+                        </a:srgbClr>
+                      </a:solidFill>
+                      <a:prstDash val="solid"/>
+                    </a:lnL>
+                    <a:lnR algn="ctr" cmpd="sng" cap="flat" w="6350">
+                      <a:solidFill>
+                        <a:srgbClr val="D9D9D9">
+                          <a:alpha val="100000"/>
+                        </a:srgbClr>
+                      </a:solidFill>
+                      <a:prstDash val="solid"/>
+                    </a:lnR>
+                    <a:lnT algn="ctr" cmpd="sng" cap="flat" w="6350">
+                      <a:solidFill>
+                        <a:srgbClr val="D9D9D9">
+                          <a:alpha val="100000"/>
+                        </a:srgbClr>
+                      </a:solidFill>
+                      <a:prstDash val="solid"/>
+                    </a:lnT>
+                    <a:lnB algn="ctr" cmpd="sng" cap="flat" w="6350">
+                      <a:solidFill>
+                        <a:srgbClr val="D9D9D9">
+                          <a:alpha val="100000"/>
+                        </a:srgbClr>
+                      </a:solidFill>
+                      <a:prstDash val="solid"/>
+                    </a:lnB>
+                    <a:solidFill>
+                      <a:srgbClr val="FFFFFF">
+                        <a:alpha val="0"/>
+                      </a:srgbClr>
+                    </a:solidFill>
+                  </a:tcPr>
+                </a:tc>
+                <a:tc>
+                  <a:txBody>
+                    <a:bodyPr/>
+                    <a:lstStyle/>
+                    <a:p>
+                      <a:pPr algn="ctr" marL="0" marR="0">
+                        <a:lnSpc>
+                          <a:spcPct val="10000"/>
+                        </a:lnSpc>
+                        <a:spcBef>
+                          <a:spcPts val="0"/>
+                        </a:spcBef>
+                        <a:spcAft>
+                          <a:spcPts val="0"/>
+                        </a:spcAft>
+                        <a:buNone/>
+                      </a:pPr>
+                      <a:r>
+                        <a:rPr cap="none" sz="400" i="0" b="0" u="none" strike="noStrike">
+                          <a:solidFill>
+                            <a:srgbClr val="000000">
+                              <a:alpha val="100000"/>
+                            </a:srgbClr>
+                          </a:solidFill>
+                          <a:latin typeface="Arial"/>
+                          <a:cs typeface="Arial"/>
+                          <a:ea typeface="Arial"/>
+                          <a:sym typeface="Arial"/>
+                        </a:rPr>
+                        <a:t> </a:t>
+                      </a:r>
+                    </a:p>
+                  </a:txBody>
+                  <a:tcPr anchor="ctr" marB="0" marT="0" marR="0" marL="0">
+                    <a:lnL algn="ctr" cmpd="sng" cap="flat" w="6350">
+                      <a:solidFill>
+                        <a:srgbClr val="D9D9D9">
+                          <a:alpha val="100000"/>
+                        </a:srgbClr>
+                      </a:solidFill>
+                      <a:prstDash val="solid"/>
+                    </a:lnL>
+                    <a:lnR algn="ctr" cmpd="sng" cap="flat" w="6350">
+                      <a:solidFill>
+                        <a:srgbClr val="D9D9D9">
+                          <a:alpha val="100000"/>
+                        </a:srgbClr>
+                      </a:solidFill>
+                      <a:prstDash val="solid"/>
+                    </a:lnR>
+                    <a:lnT algn="ctr" cmpd="sng" cap="flat" w="6350">
+                      <a:solidFill>
+                        <a:srgbClr val="D9D9D9">
+                          <a:alpha val="100000"/>
+                        </a:srgbClr>
+                      </a:solidFill>
+                      <a:prstDash val="solid"/>
+                    </a:lnT>
+                    <a:lnB algn="ctr" cmpd="sng" cap="flat" w="6350">
+                      <a:solidFill>
+                        <a:srgbClr val="D9D9D9">
+                          <a:alpha val="100000"/>
+                        </a:srgbClr>
+                      </a:solidFill>
+                      <a:prstDash val="solid"/>
+                    </a:lnB>
+                    <a:solidFill>
+                      <a:srgbClr val="FFFFFF">
+                        <a:alpha val="0"/>
+                      </a:srgbClr>
+                    </a:solidFill>
+                  </a:tcPr>
+                </a:tc>
+              </a:tr>
+            </a:tbl>
+          </a:graphicData>
+        </a:graphic>
+      </p:graphicFrame>
+      <p:pic>
+        <p:nvPicPr>
+          <p:cNvPr id="5" name="" descr=""/>
+          <p:cNvPicPr>
+            <a:picLocks noGrp="1"/>
+          </p:cNvPicPr>
+          <p:nvPr>
+            <p:ph/>
+          </p:nvPr>
+        </p:nvPicPr>
+        <p:blipFill>
+          <a:blip r:embed="rId2"/>
+          <a:stretch>
+            <a:fillRect/>
+          </a:stretch>
+        </p:blipFill>
+        <p:spPr>
+          <a:xfrm>
+            <a:off x="9144" y="2139696"/>
+            <a:ext cx="310896" cy="4206240"/>
+          </a:xfrm>
+          <a:prstGeom prst="rect">
+            <a:avLst/>
+          </a:prstGeom>
+        </p:spPr>
+      </p:pic>
+      <p:pic>
+        <p:nvPicPr>
+          <p:cNvPr id="6" name="" descr=""/>
+          <p:cNvPicPr>
+            <a:picLocks noGrp="1"/>
+          </p:cNvPicPr>
+          <p:nvPr>
+            <p:ph/>
+          </p:nvPr>
+        </p:nvPicPr>
+        <p:blipFill>
+          <a:blip r:embed="rId3"/>
+          <a:stretch>
+            <a:fillRect/>
+          </a:stretch>
+        </p:blipFill>
+        <p:spPr>
+          <a:xfrm>
+            <a:off x="338328" y="2139696"/>
+            <a:ext cx="875538" cy="4206240"/>
+          </a:xfrm>
+          <a:prstGeom prst="rect">
+            <a:avLst/>
+          </a:prstGeom>
+        </p:spPr>
+      </p:pic>
+      <p:pic>
+        <p:nvPicPr>
+          <p:cNvPr id="7" name="" descr=""/>
+          <p:cNvPicPr>
+            <a:picLocks noGrp="1"/>
+          </p:cNvPicPr>
+          <p:nvPr>
+            <p:ph/>
+          </p:nvPr>
+        </p:nvPicPr>
+        <p:blipFill>
+          <a:blip r:embed="rId4"/>
+          <a:stretch>
+            <a:fillRect/>
+          </a:stretch>
+        </p:blipFill>
+        <p:spPr>
+          <a:xfrm>
+            <a:off x="1305306" y="2139696"/>
+            <a:ext cx="875538" cy="4206240"/>
+          </a:xfrm>
+          <a:prstGeom prst="rect">
+            <a:avLst/>
+          </a:prstGeom>
+        </p:spPr>
+      </p:pic>
+      <p:pic>
+        <p:nvPicPr>
+          <p:cNvPr id="8" name="" descr=""/>
+          <p:cNvPicPr>
+            <a:picLocks noGrp="1"/>
+          </p:cNvPicPr>
+          <p:nvPr>
+            <p:ph/>
+          </p:nvPr>
+        </p:nvPicPr>
+        <p:blipFill>
+          <a:blip r:embed="rId5"/>
+          <a:stretch>
+            <a:fillRect/>
+          </a:stretch>
+        </p:blipFill>
+        <p:spPr>
+          <a:xfrm>
+            <a:off x="2272284" y="2139696"/>
+            <a:ext cx="875538" cy="4206240"/>
+          </a:xfrm>
+          <a:prstGeom prst="rect">
+            <a:avLst/>
+          </a:prstGeom>
+        </p:spPr>
+      </p:pic>
+      <p:sp>
+        <p:nvSpPr>
+          <p:cNvPr id="9" name=""/>
+          <p:cNvSpPr>
+            <a:spLocks noGrp="1"/>
+          </p:cNvSpPr>
+          <p:nvPr>
+            <p:ph/>
+          </p:nvPr>
+        </p:nvSpPr>
+        <p:spPr>
+          <a:xfrm>
+            <a:off x="4711446" y="6446520"/>
+            <a:ext cx="2766060" cy="219456"/>
+          </a:xfrm>
+          <a:solidFill>
+            <a:srgbClr val="FFFFFF">
+              <a:alpha val="0"/>
+            </a:srgbClr>
+          </a:solidFill>
+        </p:spPr>
+        <p:txBody>
+          <a:bodyPr/>
+          <a:lstStyle/>
+          <a:p>
+            <a:pPr algn="ctr" marL="0" marR="0">
+              <a:lnSpc>
+                <a:spcPct val="100000"/>
+              </a:lnSpc>
+              <a:spcBef>
+                <a:spcPts val="0"/>
+              </a:spcBef>
+              <a:spcAft>
+                <a:spcPts val="0"/>
+              </a:spcAft>
+              <a:buNone/>
+            </a:pPr>
+            <a:r>
+              <a:rPr cap="none" sz="1000" i="0" b="1" u="none" strike="noStrike">
+                <a:solidFill>
+                  <a:srgbClr val="6489FA">
+                    <a:alpha val="100000"/>
+                  </a:srgbClr>
+                </a:solidFill>
+                <a:latin typeface="Arial"/>
+                <a:cs typeface="Arial"/>
+                <a:ea typeface="Arial"/>
+                <a:sym typeface="Arial"/>
+              </a:rPr>
+              <a:t>● A (REF, 16매)</a:t>
+            </a:r>
+            <a:r>
+              <a:rPr cap="none" sz="1000" i="0" b="0" u="none" strike="noStrike">
+                <a:solidFill>
+                  <a:srgbClr val="333333">
+                    <a:alpha val="100000"/>
+                  </a:srgbClr>
+                </a:solidFill>
+                <a:latin typeface="Arial"/>
+                <a:cs typeface="Arial"/>
+                <a:ea typeface="Arial"/>
+                <a:sym typeface="Arial"/>
+              </a:rPr>
+              <a:t>    </a:t>
+            </a:r>
+            <a:r>
+              <a:rPr cap="none" sz="1000" i="0" b="1" u="none" strike="noStrike">
+                <a:solidFill>
+                  <a:srgbClr val="FA7864">
+                    <a:alpha val="100000"/>
+                  </a:srgbClr>
+                </a:solidFill>
+                <a:latin typeface="Arial"/>
+                <a:cs typeface="Arial"/>
+                <a:ea typeface="Arial"/>
+                <a:sym typeface="Arial"/>
+              </a:rPr>
+              <a:t>● B (TARGET, 10매)</a:t>
+            </a:r>
+          </a:p>
+        </p:txBody>
+      </p:sp>
+    </p:spTree>
+  </p:cSld>
+  <p:clrMapOvr>
+    <a:masterClrMapping/>
+  </p:clrMapOvr>
+</p:sld>
+</file>
+
+<file path=ppt/slides/slide3.xml><?xml version="1.0" encoding="utf-8"?>
+<p:sld xmlns:a="http://schemas.openxmlformats.org/drawingml/2006/main" xmlns:r="http://schemas.openxmlformats.org/officeDocument/2006/relationships" xmlns:p="http://schemas.openxmlformats.org/presentationml/2006/main">
+  <p:cSld>
+    <p:spTree>
+      <p:nvGrpSpPr>
+        <p:cNvPr id="1" name=""/>
+        <p:cNvGrpSpPr/>
+        <p:nvPr/>
+      </p:nvGrpSpPr>
+      <p:grpSpPr>
+        <a:xfrm>
+          <a:off x="0" y="0"/>
+          <a:ext cx="0" cy="0"/>
+          <a:chOff x="0" y="0"/>
+          <a:chExt cx="0" cy="0"/>
+        </a:xfrm>
+      </p:grpSpPr>
+      <p:sp>
+        <p:nvSpPr>
+          <p:cNvPr id="2" name=""/>
+          <p:cNvSpPr>
+            <a:spLocks noGrp="1"/>
+          </p:cNvSpPr>
+          <p:nvPr>
+            <p:ph/>
+          </p:nvPr>
+        </p:nvSpPr>
+        <p:spPr>
+          <a:xfrm>
+            <a:off x="457200" y="237744"/>
+            <a:ext cx="11155680" cy="310896"/>
+          </a:xfrm>
+          <a:solidFill>
+            <a:srgbClr val="FFFFFF">
+              <a:alpha val="0"/>
+            </a:srgbClr>
+          </a:solidFill>
+        </p:spPr>
+        <p:txBody>
+          <a:bodyPr/>
+          <a:lstStyle/>
+          <a:p>
+            <a:pPr algn="l" marL="0" marR="0">
+              <a:lnSpc>
+                <a:spcPct val="100000"/>
+              </a:lnSpc>
+              <a:spcBef>
+                <a:spcPts val="0"/>
+              </a:spcBef>
+              <a:spcAft>
+                <a:spcPts val="0"/>
+              </a:spcAft>
+              <a:buNone/>
+            </a:pPr>
+            <a:r>
+              <a:rPr cap="none" sz="2000" i="0" b="1" u="none" strike="noStrike">
+                <a:solidFill>
+                  <a:srgbClr val="111111">
+                    <a:alpha val="100000"/>
+                  </a:srgbClr>
+                </a:solidFill>
+                <a:latin typeface="Arial"/>
+                <a:cs typeface="Arial"/>
+                <a:ea typeface="Arial"/>
+                <a:sym typeface="Arial"/>
+              </a:rPr>
+              <a:t>[DM] Data Review Board Auto Report</a:t>
+            </a:r>
+          </a:p>
+        </p:txBody>
+      </p:sp>
+      <p:sp>
+        <p:nvSpPr>
+          <p:cNvPr id="3" name=""/>
+          <p:cNvSpPr>
+            <a:spLocks noGrp="1"/>
+          </p:cNvSpPr>
+          <p:nvPr>
+            <p:ph/>
+          </p:nvPr>
+        </p:nvSpPr>
+        <p:spPr>
+          <a:xfrm>
+            <a:off x="457200" y="676656"/>
+            <a:ext cx="11155680" cy="640080"/>
+          </a:xfrm>
+          <a:solidFill>
+            <a:srgbClr val="FFFFFF">
+              <a:alpha val="0"/>
+            </a:srgbClr>
+          </a:solidFill>
+        </p:spPr>
+        <p:txBody>
+          <a:bodyPr/>
+          <a:lstStyle/>
+          <a:p>
+            <a:pPr algn="l" marL="0" marR="0">
+              <a:lnSpc>
+                <a:spcPct val="100000"/>
+              </a:lnSpc>
+              <a:spcBef>
+                <a:spcPts val="0"/>
+              </a:spcBef>
+              <a:spcAft>
+                <a:spcPts val="0"/>
+              </a:spcAft>
+              <a:buNone/>
+            </a:pPr>
+            <a:r>
+              <a:rPr cap="none" sz="1100" i="0" b="1" u="none" strike="noStrike">
+                <a:solidFill>
+                  <a:srgbClr val="333333">
+                    <a:alpha val="100000"/>
+                  </a:srgbClr>
+                </a:solidFill>
+                <a:latin typeface="Arial"/>
+                <a:cs typeface="Arial"/>
+                <a:ea typeface="Arial"/>
+                <a:sym typeface="Arial"/>
+              </a:rPr>
+              <a:t>■</a:t>
+            </a:r>
+            <a:r>
+              <a:rPr cap="none" sz="1100" i="0" b="0" u="none" strike="noStrike">
+                <a:solidFill>
+                  <a:srgbClr val="333333">
+                    <a:alpha val="100000"/>
+                  </a:srgbClr>
+                </a:solidFill>
+                <a:latin typeface="Arial"/>
+                <a:cs typeface="Arial"/>
+                <a:ea typeface="Arial"/>
+                <a:sym typeface="Arial"/>
+              </a:rPr>
               <a:t> Category: Category2: PB</a:t>
             </a:r>
           </a:p>
@@ -16372,8 +19458,8 @@
         </p:nvSpPr>
         <p:spPr>
           <a:xfrm>
-            <a:off x="4642866" y="6446520"/>
-            <a:ext cx="2903220" cy="219456"/>
+            <a:off x="4711446" y="6446520"/>
+            <a:ext cx="2766060" cy="219456"/>
           </a:xfrm>
           <a:solidFill>
             <a:srgbClr val="FFFFFF">
@@ -16450,7 +19536,7 @@
 </p:sld>
 </file>
 
-<file path=ppt/slides/slide3.xml><?xml version="1.0" encoding="utf-8"?>
+<file path=ppt/slides/slide4.xml><?xml version="1.0" encoding="utf-8"?>
 <p:sld xmlns:a="http://schemas.openxmlformats.org/drawingml/2006/main" xmlns:r="http://schemas.openxmlformats.org/officeDocument/2006/relationships" xmlns:p="http://schemas.openxmlformats.org/presentationml/2006/main">
   <p:cSld>
     <p:spTree>
@@ -18625,8 +21711,8 @@
         </p:nvSpPr>
         <p:spPr>
           <a:xfrm>
-            <a:off x="4642866" y="6446520"/>
-            <a:ext cx="2903220" cy="219456"/>
+            <a:off x="4711446" y="6446520"/>
+            <a:ext cx="2766060" cy="219456"/>
           </a:xfrm>
           <a:solidFill>
             <a:srgbClr val="FFFFFF">
@@ -18703,7 +21789,7 @@
 </p:sld>
 </file>
 
-<file path=ppt/slides/slide4.xml><?xml version="1.0" encoding="utf-8"?>
+<file path=ppt/slides/slide5.xml><?xml version="1.0" encoding="utf-8"?>
 <p:sld xmlns:a="http://schemas.openxmlformats.org/drawingml/2006/main" xmlns:r="http://schemas.openxmlformats.org/officeDocument/2006/relationships" xmlns:p="http://schemas.openxmlformats.org/presentationml/2006/main">
   <p:cSld>
     <p:spTree>
@@ -21322,8 +24408,8 @@
         </p:nvSpPr>
         <p:spPr>
           <a:xfrm>
-            <a:off x="4642866" y="6446520"/>
-            <a:ext cx="2903220" cy="219456"/>
+            <a:off x="4711446" y="6446520"/>
+            <a:ext cx="2766060" cy="219456"/>
           </a:xfrm>
           <a:solidFill>
             <a:srgbClr val="FFFFFF">
@@ -21400,7 +24486,7 @@
 </p:sld>
 </file>
 
-<file path=ppt/slides/slide5.xml><?xml version="1.0" encoding="utf-8"?>
+<file path=ppt/slides/slide6.xml><?xml version="1.0" encoding="utf-8"?>
 <p:sld xmlns:a="http://schemas.openxmlformats.org/drawingml/2006/main" xmlns:r="http://schemas.openxmlformats.org/officeDocument/2006/relationships" xmlns:p="http://schemas.openxmlformats.org/presentationml/2006/main">
   <p:cSld>
     <p:spTree>
@@ -23723,8 +26809,8 @@
         </p:nvSpPr>
         <p:spPr>
           <a:xfrm>
-            <a:off x="4642866" y="6446520"/>
-            <a:ext cx="2903220" cy="219456"/>
+            <a:off x="4711446" y="6446520"/>
+            <a:ext cx="2766060" cy="219456"/>
           </a:xfrm>
           <a:solidFill>
             <a:srgbClr val="FFFFFF">
@@ -23801,7 +26887,7 @@
 </p:sld>
 </file>
 
-<file path=ppt/slides/slide6.xml><?xml version="1.0" encoding="utf-8"?>
+<file path=ppt/slides/slide7.xml><?xml version="1.0" encoding="utf-8"?>
 <p:sld xmlns:a="http://schemas.openxmlformats.org/drawingml/2006/main" xmlns:r="http://schemas.openxmlformats.org/officeDocument/2006/relationships" xmlns:p="http://schemas.openxmlformats.org/presentationml/2006/main">
   <p:cSld>
     <p:spTree>
@@ -26420,8 +29506,8 @@
         </p:nvSpPr>
         <p:spPr>
           <a:xfrm>
-            <a:off x="4642866" y="6446520"/>
-            <a:ext cx="2903220" cy="219456"/>
+            <a:off x="4711446" y="6446520"/>
+            <a:ext cx="2766060" cy="219456"/>
           </a:xfrm>
           <a:solidFill>
             <a:srgbClr val="FFFFFF">

--- a/output/sigma_summary_latest.pptx
+++ b/output/sigma_summary_latest.pptx
@@ -3145,10 +3145,10 @@
                     <a:alpha val="100000"/>
                   </a:srgbClr>
                 </a:solidFill>
-                <a:latin typeface="Arial"/>
-                <a:cs typeface="Arial"/>
-                <a:ea typeface="Arial"/>
-                <a:sym typeface="Arial"/>
+                <a:latin typeface="Malgun Gothic"/>
+                <a:cs typeface="Malgun Gothic"/>
+                <a:ea typeface="Malgun Gothic"/>
+                <a:sym typeface="Malgun Gothic"/>
               </a:rPr>
               <a:t>[DM] Data Review Board Auto Report</a:t>
             </a:r>
@@ -3199,10 +3199,10 @@
                     <a:alpha val="100000"/>
                   </a:srgbClr>
                 </a:solidFill>
-                <a:latin typeface="Arial"/>
-                <a:cs typeface="Arial"/>
-                <a:ea typeface="Arial"/>
-                <a:sym typeface="Arial"/>
+                <a:latin typeface="Malgun Gothic"/>
+                <a:cs typeface="Malgun Gothic"/>
+                <a:ea typeface="Malgun Gothic"/>
+                <a:sym typeface="Malgun Gothic"/>
               </a:rPr>
               <a:t>■</a:t>
             </a:r>
@@ -3213,10 +3213,10 @@
                     <a:alpha val="100000"/>
                   </a:srgbClr>
                 </a:solidFill>
-                <a:latin typeface="Arial"/>
-                <a:cs typeface="Arial"/>
-                <a:ea typeface="Arial"/>
-                <a:sym typeface="Arial"/>
+                <a:latin typeface="Malgun Gothic"/>
+                <a:cs typeface="Malgun Gothic"/>
+                <a:ea typeface="Malgun Gothic"/>
+                <a:sym typeface="Malgun Gothic"/>
               </a:rPr>
               <a:t> REF: A / TARGET: B | Threshold: 0.5 | TREND: plot 수동 부착 / 비고: 수동 작성</a:t>
             </a:r>
@@ -3260,7 +3260,7 @@
                     <a:p>
                       <a:pPr algn="ctr" marL="19050" marR="19050">
                         <a:lnSpc>
-                          <a:spcPct val="110000"/>
+                          <a:spcPct val="100000"/>
                         </a:lnSpc>
                         <a:spcBef>
                           <a:spcPts val="150"/>
@@ -3277,10 +3277,10 @@
                               <a:alpha val="100000"/>
                             </a:srgbClr>
                           </a:solidFill>
-                          <a:latin typeface="Arial"/>
-                          <a:cs typeface="Arial"/>
-                          <a:ea typeface="Arial"/>
-                          <a:sym typeface="Arial"/>
+                          <a:latin typeface="Malgun Gothic"/>
+                          <a:cs typeface="Malgun Gothic"/>
+                          <a:ea typeface="Malgun Gothic"/>
+                          <a:sym typeface="Malgun Gothic"/>
                         </a:rPr>
                         <a:t>구분</a:t>
                       </a:r>
@@ -3325,7 +3325,7 @@
                     <a:p>
                       <a:pPr algn="ctr" marL="19050" marR="19050">
                         <a:lnSpc>
-                          <a:spcPct val="110000"/>
+                          <a:spcPct val="100000"/>
                         </a:lnSpc>
                         <a:spcBef>
                           <a:spcPts val="150"/>
@@ -3342,10 +3342,10 @@
                               <a:alpha val="100000"/>
                             </a:srgbClr>
                           </a:solidFill>
-                          <a:latin typeface="Arial"/>
-                          <a:cs typeface="Arial"/>
-                          <a:ea typeface="Arial"/>
-                          <a:sym typeface="Arial"/>
+                          <a:latin typeface="Malgun Gothic"/>
+                          <a:cs typeface="Malgun Gothic"/>
+                          <a:ea typeface="Malgun Gothic"/>
+                          <a:sym typeface="Malgun Gothic"/>
                         </a:rPr>
                         <a:t>구분</a:t>
                       </a:r>
@@ -3386,7 +3386,7 @@
                     <a:p>
                       <a:pPr algn="ctr" marL="19050" marR="19050">
                         <a:lnSpc>
-                          <a:spcPct val="110000"/>
+                          <a:spcPct val="100000"/>
                         </a:lnSpc>
                         <a:spcBef>
                           <a:spcPts val="150"/>
@@ -3403,10 +3403,10 @@
                               <a:alpha val="100000"/>
                             </a:srgbClr>
                           </a:solidFill>
-                          <a:latin typeface="Arial"/>
-                          <a:cs typeface="Arial"/>
-                          <a:ea typeface="Arial"/>
-                          <a:sym typeface="Arial"/>
+                          <a:latin typeface="Malgun Gothic"/>
+                          <a:cs typeface="Malgun Gothic"/>
+                          <a:ea typeface="Malgun Gothic"/>
+                          <a:sym typeface="Malgun Gothic"/>
                         </a:rPr>
                         <a:t>구분</a:t>
                       </a:r>
@@ -3451,7 +3451,7 @@
                     <a:p>
                       <a:pPr algn="ctr" marL="19050" marR="19050">
                         <a:lnSpc>
-                          <a:spcPct val="110000"/>
+                          <a:spcPct val="100000"/>
                         </a:lnSpc>
                         <a:spcBef>
                           <a:spcPts val="150"/>
@@ -3468,10 +3468,10 @@
                               <a:alpha val="100000"/>
                             </a:srgbClr>
                           </a:solidFill>
-                          <a:latin typeface="Arial"/>
-                          <a:cs typeface="Arial"/>
-                          <a:ea typeface="Arial"/>
-                          <a:sym typeface="Arial"/>
+                          <a:latin typeface="Malgun Gothic"/>
+                          <a:cs typeface="Malgun Gothic"/>
+                          <a:ea typeface="Malgun Gothic"/>
+                          <a:sym typeface="Malgun Gothic"/>
                         </a:rPr>
                         <a:t>주요 항목</a:t>
                       </a:r>
@@ -3524,7 +3524,7 @@
                     <a:p>
                       <a:pPr algn="ctr" marL="19050" marR="19050">
                         <a:lnSpc>
-                          <a:spcPct val="110000"/>
+                          <a:spcPct val="100000"/>
                         </a:lnSpc>
                         <a:spcBef>
                           <a:spcPts val="150"/>
@@ -3541,10 +3541,10 @@
                               <a:alpha val="100000"/>
                             </a:srgbClr>
                           </a:solidFill>
-                          <a:latin typeface="Arial"/>
-                          <a:cs typeface="Arial"/>
-                          <a:ea typeface="Arial"/>
-                          <a:sym typeface="Arial"/>
+                          <a:latin typeface="Malgun Gothic"/>
+                          <a:cs typeface="Malgun Gothic"/>
+                          <a:ea typeface="Malgun Gothic"/>
+                          <a:sym typeface="Malgun Gothic"/>
                         </a:rPr>
                         <a:t>지수수준</a:t>
                       </a:r>
@@ -3593,7 +3593,7 @@
                     <a:p>
                       <a:pPr algn="ctr" marL="19050" marR="19050">
                         <a:lnSpc>
-                          <a:spcPct val="110000"/>
+                          <a:spcPct val="100000"/>
                         </a:lnSpc>
                         <a:spcBef>
                           <a:spcPts val="150"/>
@@ -3610,10 +3610,10 @@
                               <a:alpha val="100000"/>
                             </a:srgbClr>
                           </a:solidFill>
-                          <a:latin typeface="Arial"/>
-                          <a:cs typeface="Arial"/>
-                          <a:ea typeface="Arial"/>
-                          <a:sym typeface="Arial"/>
+                          <a:latin typeface="Malgun Gothic"/>
+                          <a:cs typeface="Malgun Gothic"/>
+                          <a:ea typeface="Malgun Gothic"/>
+                          <a:sym typeface="Malgun Gothic"/>
                         </a:rPr>
                         <a:t>지수수준</a:t>
                       </a:r>
@@ -3658,7 +3658,7 @@
                     <a:p>
                       <a:pPr algn="ctr" marL="19050" marR="19050">
                         <a:lnSpc>
-                          <a:spcPct val="110000"/>
+                          <a:spcPct val="100000"/>
                         </a:lnSpc>
                         <a:spcBef>
                           <a:spcPts val="150"/>
@@ -3675,10 +3675,10 @@
                               <a:alpha val="100000"/>
                             </a:srgbClr>
                           </a:solidFill>
-                          <a:latin typeface="Arial"/>
-                          <a:cs typeface="Arial"/>
-                          <a:ea typeface="Arial"/>
-                          <a:sym typeface="Arial"/>
+                          <a:latin typeface="Malgun Gothic"/>
+                          <a:cs typeface="Malgun Gothic"/>
+                          <a:ea typeface="Malgun Gothic"/>
+                          <a:sym typeface="Malgun Gothic"/>
                         </a:rPr>
                         <a:t>Diff</a:t>
                       </a:r>
@@ -3723,7 +3723,7 @@
                     <a:p>
                       <a:pPr algn="ctr" marL="19050" marR="19050">
                         <a:lnSpc>
-                          <a:spcPct val="110000"/>
+                          <a:spcPct val="100000"/>
                         </a:lnSpc>
                         <a:spcBef>
                           <a:spcPts val="150"/>
@@ -3740,10 +3740,10 @@
                               <a:alpha val="100000"/>
                             </a:srgbClr>
                           </a:solidFill>
-                          <a:latin typeface="Arial"/>
-                          <a:cs typeface="Arial"/>
-                          <a:ea typeface="Arial"/>
-                          <a:sym typeface="Arial"/>
+                          <a:latin typeface="Malgun Gothic"/>
+                          <a:cs typeface="Malgun Gothic"/>
+                          <a:ea typeface="Malgun Gothic"/>
+                          <a:sym typeface="Malgun Gothic"/>
                         </a:rPr>
                         <a:t>Diff</a:t>
                       </a:r>
@@ -3784,7 +3784,7 @@
                     <a:p>
                       <a:pPr algn="ctr" marL="19050" marR="19050">
                         <a:lnSpc>
-                          <a:spcPct val="110000"/>
+                          <a:spcPct val="100000"/>
                         </a:lnSpc>
                         <a:spcBef>
                           <a:spcPts val="150"/>
@@ -3801,10 +3801,10 @@
                               <a:alpha val="100000"/>
                             </a:srgbClr>
                           </a:solidFill>
-                          <a:latin typeface="Arial"/>
-                          <a:cs typeface="Arial"/>
-                          <a:ea typeface="Arial"/>
-                          <a:sym typeface="Arial"/>
+                          <a:latin typeface="Malgun Gothic"/>
+                          <a:cs typeface="Malgun Gothic"/>
+                          <a:ea typeface="Malgun Gothic"/>
+                          <a:sym typeface="Malgun Gothic"/>
                         </a:rPr>
                         <a:t>변동결과</a:t>
                       </a:r>
@@ -3853,7 +3853,7 @@
                     <a:p>
                       <a:pPr algn="ctr" marL="19050" marR="19050">
                         <a:lnSpc>
-                          <a:spcPct val="110000"/>
+                          <a:spcPct val="100000"/>
                         </a:lnSpc>
                         <a:spcBef>
                           <a:spcPts val="150"/>
@@ -3870,10 +3870,10 @@
                               <a:alpha val="100000"/>
                             </a:srgbClr>
                           </a:solidFill>
-                          <a:latin typeface="Arial"/>
-                          <a:cs typeface="Arial"/>
-                          <a:ea typeface="Arial"/>
-                          <a:sym typeface="Arial"/>
+                          <a:latin typeface="Malgun Gothic"/>
+                          <a:cs typeface="Malgun Gothic"/>
+                          <a:ea typeface="Malgun Gothic"/>
+                          <a:sym typeface="Malgun Gothic"/>
                         </a:rPr>
                         <a:t>비고</a:t>
                       </a:r>
@@ -3926,7 +3926,7 @@
                     <a:p>
                       <a:pPr algn="ctr" marL="19050" marR="19050">
                         <a:lnSpc>
-                          <a:spcPct val="110000"/>
+                          <a:spcPct val="100000"/>
                         </a:lnSpc>
                         <a:spcBef>
                           <a:spcPts val="150"/>
@@ -3943,10 +3943,10 @@
                               <a:alpha val="100000"/>
                             </a:srgbClr>
                           </a:solidFill>
-                          <a:latin typeface="Arial"/>
-                          <a:cs typeface="Arial"/>
-                          <a:ea typeface="Arial"/>
-                          <a:sym typeface="Arial"/>
+                          <a:latin typeface="Malgun Gothic"/>
+                          <a:cs typeface="Malgun Gothic"/>
+                          <a:ea typeface="Malgun Gothic"/>
+                          <a:sym typeface="Malgun Gothic"/>
                         </a:rPr>
                         <a:t>TREND</a:t>
                       </a:r>
@@ -3997,7 +3997,7 @@
                     <a:p>
                       <a:pPr algn="ctr" marL="19050" marR="19050">
                         <a:lnSpc>
-                          <a:spcPct val="110000"/>
+                          <a:spcPct val="100000"/>
                         </a:lnSpc>
                         <a:spcBef>
                           <a:spcPts val="150"/>
@@ -4014,10 +4014,10 @@
                               <a:alpha val="100000"/>
                             </a:srgbClr>
                           </a:solidFill>
-                          <a:latin typeface="Arial"/>
-                          <a:cs typeface="Arial"/>
-                          <a:ea typeface="Arial"/>
-                          <a:sym typeface="Arial"/>
+                          <a:latin typeface="Malgun Gothic"/>
+                          <a:cs typeface="Malgun Gothic"/>
+                          <a:ea typeface="Malgun Gothic"/>
+                          <a:sym typeface="Malgun Gothic"/>
                         </a:rPr>
                         <a:t>Cat1</a:t>
                       </a:r>
@@ -4058,7 +4058,7 @@
                     <a:p>
                       <a:pPr algn="ctr" marL="19050" marR="19050">
                         <a:lnSpc>
-                          <a:spcPct val="110000"/>
+                          <a:spcPct val="100000"/>
                         </a:lnSpc>
                         <a:spcBef>
                           <a:spcPts val="150"/>
@@ -4075,10 +4075,10 @@
                               <a:alpha val="100000"/>
                             </a:srgbClr>
                           </a:solidFill>
-                          <a:latin typeface="Arial"/>
-                          <a:cs typeface="Arial"/>
-                          <a:ea typeface="Arial"/>
-                          <a:sym typeface="Arial"/>
+                          <a:latin typeface="Malgun Gothic"/>
+                          <a:cs typeface="Malgun Gothic"/>
+                          <a:ea typeface="Malgun Gothic"/>
+                          <a:sym typeface="Malgun Gothic"/>
                         </a:rPr>
                         <a:t>Cat2</a:t>
                       </a:r>
@@ -4119,7 +4119,7 @@
                     <a:p>
                       <a:pPr algn="ctr" marL="19050" marR="19050">
                         <a:lnSpc>
-                          <a:spcPct val="110000"/>
+                          <a:spcPct val="100000"/>
                         </a:lnSpc>
                         <a:spcBef>
                           <a:spcPts val="150"/>
@@ -4136,10 +4136,10 @@
                               <a:alpha val="100000"/>
                             </a:srgbClr>
                           </a:solidFill>
-                          <a:latin typeface="Arial"/>
-                          <a:cs typeface="Arial"/>
-                          <a:ea typeface="Arial"/>
-                          <a:sym typeface="Arial"/>
+                          <a:latin typeface="Malgun Gothic"/>
+                          <a:cs typeface="Malgun Gothic"/>
+                          <a:ea typeface="Malgun Gothic"/>
+                          <a:sym typeface="Malgun Gothic"/>
                         </a:rPr>
                         <a:t>Cat3</a:t>
                       </a:r>
@@ -4184,7 +4184,7 @@
                     <a:p>
                       <a:pPr algn="ctr" marL="19050" marR="19050">
                         <a:lnSpc>
-                          <a:spcPct val="110000"/>
+                          <a:spcPct val="100000"/>
                         </a:lnSpc>
                         <a:spcBef>
                           <a:spcPts val="150"/>
@@ -4201,10 +4201,10 @@
                               <a:alpha val="100000"/>
                             </a:srgbClr>
                           </a:solidFill>
-                          <a:latin typeface="Arial"/>
-                          <a:cs typeface="Arial"/>
-                          <a:ea typeface="Arial"/>
-                          <a:sym typeface="Arial"/>
+                          <a:latin typeface="Malgun Gothic"/>
+                          <a:cs typeface="Malgun Gothic"/>
+                          <a:ea typeface="Malgun Gothic"/>
+                          <a:sym typeface="Malgun Gothic"/>
                         </a:rPr>
                         <a:t> </a:t>
                       </a:r>
@@ -4253,7 +4253,7 @@
                     <a:p>
                       <a:pPr algn="ctr" marL="19050" marR="19050">
                         <a:lnSpc>
-                          <a:spcPct val="110000"/>
+                          <a:spcPct val="100000"/>
                         </a:lnSpc>
                         <a:spcBef>
                           <a:spcPts val="150"/>
@@ -4270,10 +4270,10 @@
                               <a:alpha val="100000"/>
                             </a:srgbClr>
                           </a:solidFill>
-                          <a:latin typeface="Arial"/>
-                          <a:cs typeface="Arial"/>
-                          <a:ea typeface="Arial"/>
-                          <a:sym typeface="Arial"/>
+                          <a:latin typeface="Malgun Gothic"/>
+                          <a:cs typeface="Malgun Gothic"/>
+                          <a:ea typeface="Malgun Gothic"/>
+                          <a:sym typeface="Malgun Gothic"/>
                         </a:rPr>
                         <a:t>REF</a:t>
                       </a:r>
@@ -4318,7 +4318,7 @@
                     <a:p>
                       <a:pPr algn="ctr" marL="19050" marR="19050">
                         <a:lnSpc>
-                          <a:spcPct val="110000"/>
+                          <a:spcPct val="100000"/>
                         </a:lnSpc>
                         <a:spcBef>
                           <a:spcPts val="150"/>
@@ -4335,10 +4335,10 @@
                               <a:alpha val="100000"/>
                             </a:srgbClr>
                           </a:solidFill>
-                          <a:latin typeface="Arial"/>
-                          <a:cs typeface="Arial"/>
-                          <a:ea typeface="Arial"/>
-                          <a:sym typeface="Arial"/>
+                          <a:latin typeface="Malgun Gothic"/>
+                          <a:cs typeface="Malgun Gothic"/>
+                          <a:ea typeface="Malgun Gothic"/>
+                          <a:sym typeface="Malgun Gothic"/>
                         </a:rPr>
                         <a:t>TGT</a:t>
                       </a:r>
@@ -4383,7 +4383,7 @@
                     <a:p>
                       <a:pPr algn="ctr" marL="19050" marR="19050">
                         <a:lnSpc>
-                          <a:spcPct val="110000"/>
+                          <a:spcPct val="100000"/>
                         </a:lnSpc>
                         <a:spcBef>
                           <a:spcPts val="150"/>
@@ -4400,10 +4400,10 @@
                               <a:alpha val="100000"/>
                             </a:srgbClr>
                           </a:solidFill>
-                          <a:latin typeface="Arial"/>
-                          <a:cs typeface="Arial"/>
-                          <a:ea typeface="Arial"/>
-                          <a:sym typeface="Arial"/>
+                          <a:latin typeface="Malgun Gothic"/>
+                          <a:cs typeface="Malgun Gothic"/>
+                          <a:ea typeface="Malgun Gothic"/>
+                          <a:sym typeface="Malgun Gothic"/>
                         </a:rPr>
                         <a:t>Delta</a:t>
                       </a:r>
@@ -4448,7 +4448,7 @@
                     <a:p>
                       <a:pPr algn="ctr" marL="19050" marR="19050">
                         <a:lnSpc>
-                          <a:spcPct val="110000"/>
+                          <a:spcPct val="100000"/>
                         </a:lnSpc>
                         <a:spcBef>
                           <a:spcPts val="150"/>
@@ -4465,10 +4465,10 @@
                               <a:alpha val="100000"/>
                             </a:srgbClr>
                           </a:solidFill>
-                          <a:latin typeface="Arial"/>
-                          <a:cs typeface="Arial"/>
-                          <a:ea typeface="Arial"/>
-                          <a:sym typeface="Arial"/>
+                          <a:latin typeface="Malgun Gothic"/>
+                          <a:cs typeface="Malgun Gothic"/>
+                          <a:ea typeface="Malgun Gothic"/>
+                          <a:sym typeface="Malgun Gothic"/>
                         </a:rPr>
                         <a:t>Sigma Delta</a:t>
                       </a:r>
@@ -4509,7 +4509,7 @@
                     <a:p>
                       <a:pPr algn="ctr" marL="19050" marR="19050">
                         <a:lnSpc>
-                          <a:spcPct val="110000"/>
+                          <a:spcPct val="100000"/>
                         </a:lnSpc>
                         <a:spcBef>
                           <a:spcPts val="150"/>
@@ -4526,10 +4526,10 @@
                               <a:alpha val="100000"/>
                             </a:srgbClr>
                           </a:solidFill>
-                          <a:latin typeface="Arial"/>
-                          <a:cs typeface="Arial"/>
-                          <a:ea typeface="Arial"/>
-                          <a:sym typeface="Arial"/>
+                          <a:latin typeface="Malgun Gothic"/>
+                          <a:cs typeface="Malgun Gothic"/>
+                          <a:ea typeface="Malgun Gothic"/>
+                          <a:sym typeface="Malgun Gothic"/>
                         </a:rPr>
                         <a:t> </a:t>
                       </a:r>
@@ -4574,7 +4574,7 @@
                     <a:p>
                       <a:pPr algn="ctr" marL="19050" marR="19050">
                         <a:lnSpc>
-                          <a:spcPct val="110000"/>
+                          <a:spcPct val="100000"/>
                         </a:lnSpc>
                         <a:spcBef>
                           <a:spcPts val="150"/>
@@ -4591,10 +4591,10 @@
                               <a:alpha val="100000"/>
                             </a:srgbClr>
                           </a:solidFill>
-                          <a:latin typeface="Arial"/>
-                          <a:cs typeface="Arial"/>
-                          <a:ea typeface="Arial"/>
-                          <a:sym typeface="Arial"/>
+                          <a:latin typeface="Malgun Gothic"/>
+                          <a:cs typeface="Malgun Gothic"/>
+                          <a:ea typeface="Malgun Gothic"/>
+                          <a:sym typeface="Malgun Gothic"/>
                         </a:rPr>
                         <a:t> </a:t>
                       </a:r>
@@ -4643,7 +4643,7 @@
                     <a:p>
                       <a:pPr algn="ctr" marL="19050" marR="19050">
                         <a:lnSpc>
-                          <a:spcPct val="110000"/>
+                          <a:spcPct val="100000"/>
                         </a:lnSpc>
                         <a:spcBef>
                           <a:spcPts val="150"/>
@@ -4660,10 +4660,10 @@
                               <a:alpha val="100000"/>
                             </a:srgbClr>
                           </a:solidFill>
-                          <a:latin typeface="Arial"/>
-                          <a:cs typeface="Arial"/>
-                          <a:ea typeface="Arial"/>
-                          <a:sym typeface="Arial"/>
+                          <a:latin typeface="Malgun Gothic"/>
+                          <a:cs typeface="Malgun Gothic"/>
+                          <a:ea typeface="Malgun Gothic"/>
+                          <a:sym typeface="Malgun Gothic"/>
                         </a:rPr>
                         <a:t> </a:t>
                       </a:r>
@@ -4710,7 +4710,7 @@
                     <a:p>
                       <a:pPr algn="ctr" marL="19050" marR="19050">
                         <a:lnSpc>
-                          <a:spcPct val="110000"/>
+                          <a:spcPct val="100000"/>
                         </a:lnSpc>
                         <a:spcBef>
                           <a:spcPts val="150"/>
@@ -4727,10 +4727,10 @@
                               <a:alpha val="100000"/>
                             </a:srgbClr>
                           </a:solidFill>
-                          <a:latin typeface="Arial"/>
-                          <a:cs typeface="Arial"/>
-                          <a:ea typeface="Arial"/>
-                          <a:sym typeface="Arial"/>
+                          <a:latin typeface="Malgun Gothic"/>
+                          <a:cs typeface="Malgun Gothic"/>
+                          <a:ea typeface="Malgun Gothic"/>
+                          <a:sym typeface="Malgun Gothic"/>
                         </a:rPr>
                         <a:t>PERI</a:t>
                       </a:r>
@@ -4771,7 +4771,7 @@
                     <a:p>
                       <a:pPr algn="ctr" marL="19050" marR="19050">
                         <a:lnSpc>
-                          <a:spcPct val="110000"/>
+                          <a:spcPct val="100000"/>
                         </a:lnSpc>
                         <a:spcBef>
                           <a:spcPts val="150"/>
@@ -4788,10 +4788,10 @@
                               <a:alpha val="100000"/>
                             </a:srgbClr>
                           </a:solidFill>
-                          <a:latin typeface="Arial"/>
-                          <a:cs typeface="Arial"/>
-                          <a:ea typeface="Arial"/>
-                          <a:sym typeface="Arial"/>
+                          <a:latin typeface="Malgun Gothic"/>
+                          <a:cs typeface="Malgun Gothic"/>
+                          <a:ea typeface="Malgun Gothic"/>
+                          <a:sym typeface="Malgun Gothic"/>
                         </a:rPr>
                         <a:t>PB</a:t>
                       </a:r>
@@ -4832,7 +4832,7 @@
                     <a:p>
                       <a:pPr algn="ctr" marL="19050" marR="19050">
                         <a:lnSpc>
-                          <a:spcPct val="110000"/>
+                          <a:spcPct val="100000"/>
                         </a:lnSpc>
                         <a:spcBef>
                           <a:spcPts val="150"/>
@@ -4849,10 +4849,10 @@
                               <a:alpha val="100000"/>
                             </a:srgbClr>
                           </a:solidFill>
-                          <a:latin typeface="Arial"/>
-                          <a:cs typeface="Arial"/>
-                          <a:ea typeface="Arial"/>
-                          <a:sym typeface="Arial"/>
+                          <a:latin typeface="Malgun Gothic"/>
+                          <a:cs typeface="Malgun Gothic"/>
+                          <a:ea typeface="Malgun Gothic"/>
+                          <a:sym typeface="Malgun Gothic"/>
                         </a:rPr>
                         <a:t>PB_1</a:t>
                       </a:r>
@@ -4897,7 +4897,7 @@
                     <a:p>
                       <a:pPr algn="l" marL="19050" marR="19050">
                         <a:lnSpc>
-                          <a:spcPct val="110000"/>
+                          <a:spcPct val="100000"/>
                         </a:lnSpc>
                         <a:spcBef>
                           <a:spcPts val="150"/>
@@ -4914,10 +4914,10 @@
                               <a:alpha val="100000"/>
                             </a:srgbClr>
                           </a:solidFill>
-                          <a:latin typeface="Arial"/>
-                          <a:cs typeface="Arial"/>
-                          <a:ea typeface="Arial"/>
-                          <a:sym typeface="Arial"/>
+                          <a:latin typeface="Malgun Gothic"/>
+                          <a:cs typeface="Malgun Gothic"/>
+                          <a:ea typeface="Malgun Gothic"/>
+                          <a:sym typeface="Malgun Gothic"/>
                         </a:rPr>
                         <a:t>Peri_PB_004</a:t>
                       </a:r>
@@ -4966,7 +4966,7 @@
                     <a:p>
                       <a:pPr algn="ctr" marL="19050" marR="19050">
                         <a:lnSpc>
-                          <a:spcPct val="110000"/>
+                          <a:spcPct val="100000"/>
                         </a:lnSpc>
                         <a:spcBef>
                           <a:spcPts val="150"/>
@@ -4983,10 +4983,10 @@
                               <a:alpha val="100000"/>
                             </a:srgbClr>
                           </a:solidFill>
-                          <a:latin typeface="Arial"/>
-                          <a:cs typeface="Arial"/>
-                          <a:ea typeface="Arial"/>
-                          <a:sym typeface="Arial"/>
+                          <a:latin typeface="Malgun Gothic"/>
+                          <a:cs typeface="Malgun Gothic"/>
+                          <a:ea typeface="Malgun Gothic"/>
+                          <a:sym typeface="Malgun Gothic"/>
                         </a:rPr>
                         <a:t>0.00</a:t>
                       </a:r>
@@ -5031,7 +5031,7 @@
                     <a:p>
                       <a:pPr algn="ctr" marL="19050" marR="19050">
                         <a:lnSpc>
-                          <a:spcPct val="110000"/>
+                          <a:spcPct val="100000"/>
                         </a:lnSpc>
                         <a:spcBef>
                           <a:spcPts val="150"/>
@@ -5048,10 +5048,10 @@
                               <a:alpha val="100000"/>
                             </a:srgbClr>
                           </a:solidFill>
-                          <a:latin typeface="Arial"/>
-                          <a:cs typeface="Arial"/>
-                          <a:ea typeface="Arial"/>
-                          <a:sym typeface="Arial"/>
+                          <a:latin typeface="Malgun Gothic"/>
+                          <a:cs typeface="Malgun Gothic"/>
+                          <a:ea typeface="Malgun Gothic"/>
+                          <a:sym typeface="Malgun Gothic"/>
                         </a:rPr>
                         <a:t>0.35</a:t>
                       </a:r>
@@ -5096,7 +5096,7 @@
                     <a:p>
                       <a:pPr algn="ctr" marL="19050" marR="19050">
                         <a:lnSpc>
-                          <a:spcPct val="110000"/>
+                          <a:spcPct val="100000"/>
                         </a:lnSpc>
                         <a:spcBef>
                           <a:spcPts val="150"/>
@@ -5113,10 +5113,10 @@
                               <a:alpha val="100000"/>
                             </a:srgbClr>
                           </a:solidFill>
-                          <a:latin typeface="Arial"/>
-                          <a:cs typeface="Arial"/>
-                          <a:ea typeface="Arial"/>
-                          <a:sym typeface="Arial"/>
+                          <a:latin typeface="Malgun Gothic"/>
+                          <a:cs typeface="Malgun Gothic"/>
+                          <a:ea typeface="Malgun Gothic"/>
+                          <a:sym typeface="Malgun Gothic"/>
                         </a:rPr>
                         <a:t>+0.35</a:t>
                       </a:r>
@@ -5161,7 +5161,7 @@
                     <a:p>
                       <a:pPr algn="ctr" marL="19050" marR="19050">
                         <a:lnSpc>
-                          <a:spcPct val="110000"/>
+                          <a:spcPct val="100000"/>
                         </a:lnSpc>
                         <a:spcBef>
                           <a:spcPts val="150"/>
@@ -5178,10 +5178,10 @@
                               <a:alpha val="100000"/>
                             </a:srgbClr>
                           </a:solidFill>
-                          <a:latin typeface="Arial"/>
-                          <a:cs typeface="Arial"/>
-                          <a:ea typeface="Arial"/>
-                          <a:sym typeface="Arial"/>
+                          <a:latin typeface="Malgun Gothic"/>
+                          <a:cs typeface="Malgun Gothic"/>
+                          <a:ea typeface="Malgun Gothic"/>
+                          <a:sym typeface="Malgun Gothic"/>
                         </a:rPr>
                         <a:t>+0.6sig</a:t>
                       </a:r>
@@ -5222,7 +5222,7 @@
                     <a:p>
                       <a:pPr algn="ctr" marL="19050" marR="19050">
                         <a:lnSpc>
-                          <a:spcPct val="110000"/>
+                          <a:spcPct val="100000"/>
                         </a:lnSpc>
                         <a:spcBef>
                           <a:spcPts val="150"/>
@@ -5239,10 +5239,10 @@
                               <a:alpha val="100000"/>
                             </a:srgbClr>
                           </a:solidFill>
-                          <a:latin typeface="Arial"/>
-                          <a:cs typeface="Arial"/>
-                          <a:ea typeface="Arial"/>
-                          <a:sym typeface="Arial"/>
+                          <a:latin typeface="Malgun Gothic"/>
+                          <a:cs typeface="Malgun Gothic"/>
+                          <a:ea typeface="Malgun Gothic"/>
+                          <a:sym typeface="Malgun Gothic"/>
                         </a:rPr>
                         <a:t>⬤ Up</a:t>
                       </a:r>
@@ -5287,7 +5287,7 @@
                     <a:p>
                       <a:pPr algn="l" marL="19050" marR="19050">
                         <a:lnSpc>
-                          <a:spcPct val="110000"/>
+                          <a:spcPct val="100000"/>
                         </a:lnSpc>
                         <a:spcBef>
                           <a:spcPts val="150"/>
@@ -5304,10 +5304,10 @@
                               <a:alpha val="100000"/>
                             </a:srgbClr>
                           </a:solidFill>
-                          <a:latin typeface="Arial"/>
-                          <a:cs typeface="Arial"/>
-                          <a:ea typeface="Arial"/>
-                          <a:sym typeface="Arial"/>
+                          <a:latin typeface="Malgun Gothic"/>
+                          <a:cs typeface="Malgun Gothic"/>
+                          <a:ea typeface="Malgun Gothic"/>
+                          <a:sym typeface="Malgun Gothic"/>
                         </a:rPr>
                         <a:t> </a:t>
                       </a:r>
@@ -5356,7 +5356,7 @@
                     <a:p>
                       <a:pPr algn="l" marL="19050" marR="19050">
                         <a:lnSpc>
-                          <a:spcPct val="110000"/>
+                          <a:spcPct val="100000"/>
                         </a:lnSpc>
                         <a:spcBef>
                           <a:spcPts val="150"/>
@@ -5373,10 +5373,10 @@
                               <a:alpha val="100000"/>
                             </a:srgbClr>
                           </a:solidFill>
-                          <a:latin typeface="Arial"/>
-                          <a:cs typeface="Arial"/>
-                          <a:ea typeface="Arial"/>
-                          <a:sym typeface="Arial"/>
+                          <a:latin typeface="Malgun Gothic"/>
+                          <a:cs typeface="Malgun Gothic"/>
+                          <a:ea typeface="Malgun Gothic"/>
+                          <a:sym typeface="Malgun Gothic"/>
                         </a:rPr>
                         <a:t> </a:t>
                       </a:r>
@@ -5423,7 +5423,7 @@
                     <a:p>
                       <a:pPr algn="ctr" marL="19050" marR="19050">
                         <a:lnSpc>
-                          <a:spcPct val="110000"/>
+                          <a:spcPct val="100000"/>
                         </a:lnSpc>
                         <a:spcBef>
                           <a:spcPts val="150"/>
@@ -5440,10 +5440,10 @@
                               <a:alpha val="100000"/>
                             </a:srgbClr>
                           </a:solidFill>
-                          <a:latin typeface="Arial"/>
-                          <a:cs typeface="Arial"/>
-                          <a:ea typeface="Arial"/>
-                          <a:sym typeface="Arial"/>
+                          <a:latin typeface="Malgun Gothic"/>
+                          <a:cs typeface="Malgun Gothic"/>
+                          <a:ea typeface="Malgun Gothic"/>
+                          <a:sym typeface="Malgun Gothic"/>
                         </a:rPr>
                         <a:t>PERI</a:t>
                       </a:r>
@@ -5488,7 +5488,7 @@
                     <a:p>
                       <a:pPr algn="ctr" marL="19050" marR="19050">
                         <a:lnSpc>
-                          <a:spcPct val="110000"/>
+                          <a:spcPct val="100000"/>
                         </a:lnSpc>
                         <a:spcBef>
                           <a:spcPts val="150"/>
@@ -5505,10 +5505,10 @@
                               <a:alpha val="100000"/>
                             </a:srgbClr>
                           </a:solidFill>
-                          <a:latin typeface="Arial"/>
-                          <a:cs typeface="Arial"/>
-                          <a:ea typeface="Arial"/>
-                          <a:sym typeface="Arial"/>
+                          <a:latin typeface="Malgun Gothic"/>
+                          <a:cs typeface="Malgun Gothic"/>
+                          <a:ea typeface="Malgun Gothic"/>
+                          <a:sym typeface="Malgun Gothic"/>
                         </a:rPr>
                         <a:t>PB</a:t>
                       </a:r>
@@ -5553,7 +5553,7 @@
                     <a:p>
                       <a:pPr algn="ctr" marL="19050" marR="19050">
                         <a:lnSpc>
-                          <a:spcPct val="110000"/>
+                          <a:spcPct val="100000"/>
                         </a:lnSpc>
                         <a:spcBef>
                           <a:spcPts val="150"/>
@@ -5570,10 +5570,10 @@
                               <a:alpha val="100000"/>
                             </a:srgbClr>
                           </a:solidFill>
-                          <a:latin typeface="Arial"/>
-                          <a:cs typeface="Arial"/>
-                          <a:ea typeface="Arial"/>
-                          <a:sym typeface="Arial"/>
+                          <a:latin typeface="Malgun Gothic"/>
+                          <a:cs typeface="Malgun Gothic"/>
+                          <a:ea typeface="Malgun Gothic"/>
+                          <a:sym typeface="Malgun Gothic"/>
                         </a:rPr>
                         <a:t>PB_2</a:t>
                       </a:r>
@@ -5622,7 +5622,7 @@
                     <a:p>
                       <a:pPr algn="l" marL="19050" marR="19050">
                         <a:lnSpc>
-                          <a:spcPct val="110000"/>
+                          <a:spcPct val="100000"/>
                         </a:lnSpc>
                         <a:spcBef>
                           <a:spcPts val="150"/>
@@ -5639,10 +5639,10 @@
                               <a:alpha val="100000"/>
                             </a:srgbClr>
                           </a:solidFill>
-                          <a:latin typeface="Arial"/>
-                          <a:cs typeface="Arial"/>
-                          <a:ea typeface="Arial"/>
-                          <a:sym typeface="Arial"/>
+                          <a:latin typeface="Malgun Gothic"/>
+                          <a:cs typeface="Malgun Gothic"/>
+                          <a:ea typeface="Malgun Gothic"/>
+                          <a:sym typeface="Malgun Gothic"/>
                         </a:rPr>
                         <a:t>Peri_PB_033</a:t>
                       </a:r>
@@ -5695,7 +5695,7 @@
                     <a:p>
                       <a:pPr algn="ctr" marL="19050" marR="19050">
                         <a:lnSpc>
-                          <a:spcPct val="110000"/>
+                          <a:spcPct val="100000"/>
                         </a:lnSpc>
                         <a:spcBef>
                           <a:spcPts val="150"/>
@@ -5712,10 +5712,10 @@
                               <a:alpha val="100000"/>
                             </a:srgbClr>
                           </a:solidFill>
-                          <a:latin typeface="Arial"/>
-                          <a:cs typeface="Arial"/>
-                          <a:ea typeface="Arial"/>
-                          <a:sym typeface="Arial"/>
+                          <a:latin typeface="Malgun Gothic"/>
+                          <a:cs typeface="Malgun Gothic"/>
+                          <a:ea typeface="Malgun Gothic"/>
+                          <a:sym typeface="Malgun Gothic"/>
                         </a:rPr>
                         <a:t>-0.00</a:t>
                       </a:r>
@@ -5764,7 +5764,7 @@
                     <a:p>
                       <a:pPr algn="ctr" marL="19050" marR="19050">
                         <a:lnSpc>
-                          <a:spcPct val="110000"/>
+                          <a:spcPct val="100000"/>
                         </a:lnSpc>
                         <a:spcBef>
                           <a:spcPts val="150"/>
@@ -5781,10 +5781,10 @@
                               <a:alpha val="100000"/>
                             </a:srgbClr>
                           </a:solidFill>
-                          <a:latin typeface="Arial"/>
-                          <a:cs typeface="Arial"/>
-                          <a:ea typeface="Arial"/>
-                          <a:sym typeface="Arial"/>
+                          <a:latin typeface="Malgun Gothic"/>
+                          <a:cs typeface="Malgun Gothic"/>
+                          <a:ea typeface="Malgun Gothic"/>
+                          <a:sym typeface="Malgun Gothic"/>
                         </a:rPr>
                         <a:t>0.00</a:t>
                       </a:r>
@@ -5833,7 +5833,7 @@
                     <a:p>
                       <a:pPr algn="ctr" marL="19050" marR="19050">
                         <a:lnSpc>
-                          <a:spcPct val="110000"/>
+                          <a:spcPct val="100000"/>
                         </a:lnSpc>
                         <a:spcBef>
                           <a:spcPts val="150"/>
@@ -5850,10 +5850,10 @@
                               <a:alpha val="100000"/>
                             </a:srgbClr>
                           </a:solidFill>
-                          <a:latin typeface="Arial"/>
-                          <a:cs typeface="Arial"/>
-                          <a:ea typeface="Arial"/>
-                          <a:sym typeface="Arial"/>
+                          <a:latin typeface="Malgun Gothic"/>
+                          <a:cs typeface="Malgun Gothic"/>
+                          <a:ea typeface="Malgun Gothic"/>
+                          <a:sym typeface="Malgun Gothic"/>
                         </a:rPr>
                         <a:t>+0.01</a:t>
                       </a:r>
@@ -5902,7 +5902,7 @@
                     <a:p>
                       <a:pPr algn="ctr" marL="19050" marR="19050">
                         <a:lnSpc>
-                          <a:spcPct val="110000"/>
+                          <a:spcPct val="100000"/>
                         </a:lnSpc>
                         <a:spcBef>
                           <a:spcPts val="150"/>
@@ -5919,10 +5919,10 @@
                               <a:alpha val="100000"/>
                             </a:srgbClr>
                           </a:solidFill>
-                          <a:latin typeface="Arial"/>
-                          <a:cs typeface="Arial"/>
-                          <a:ea typeface="Arial"/>
-                          <a:sym typeface="Arial"/>
+                          <a:latin typeface="Malgun Gothic"/>
+                          <a:cs typeface="Malgun Gothic"/>
+                          <a:ea typeface="Malgun Gothic"/>
+                          <a:sym typeface="Malgun Gothic"/>
                         </a:rPr>
                         <a:t>+0.0sig</a:t>
                       </a:r>
@@ -5967,7 +5967,7 @@
                     <a:p>
                       <a:pPr algn="ctr" marL="19050" marR="19050">
                         <a:lnSpc>
-                          <a:spcPct val="110000"/>
+                          <a:spcPct val="100000"/>
                         </a:lnSpc>
                         <a:spcBef>
                           <a:spcPts val="150"/>
@@ -5984,10 +5984,10 @@
                               <a:alpha val="100000"/>
                             </a:srgbClr>
                           </a:solidFill>
-                          <a:latin typeface="Arial"/>
-                          <a:cs typeface="Arial"/>
-                          <a:ea typeface="Arial"/>
-                          <a:sym typeface="Arial"/>
+                          <a:latin typeface="Malgun Gothic"/>
+                          <a:cs typeface="Malgun Gothic"/>
+                          <a:ea typeface="Malgun Gothic"/>
+                          <a:sym typeface="Malgun Gothic"/>
                         </a:rPr>
                         <a:t>⬤ Stable</a:t>
                       </a:r>
@@ -6036,7 +6036,7 @@
                     <a:p>
                       <a:pPr algn="l" marL="19050" marR="19050">
                         <a:lnSpc>
-                          <a:spcPct val="110000"/>
+                          <a:spcPct val="100000"/>
                         </a:lnSpc>
                         <a:spcBef>
                           <a:spcPts val="150"/>
@@ -6053,10 +6053,10 @@
                               <a:alpha val="100000"/>
                             </a:srgbClr>
                           </a:solidFill>
-                          <a:latin typeface="Arial"/>
-                          <a:cs typeface="Arial"/>
-                          <a:ea typeface="Arial"/>
-                          <a:sym typeface="Arial"/>
+                          <a:latin typeface="Malgun Gothic"/>
+                          <a:cs typeface="Malgun Gothic"/>
+                          <a:ea typeface="Malgun Gothic"/>
+                          <a:sym typeface="Malgun Gothic"/>
                         </a:rPr>
                         <a:t> </a:t>
                       </a:r>
@@ -6109,7 +6109,7 @@
                     <a:p>
                       <a:pPr algn="l" marL="19050" marR="19050">
                         <a:lnSpc>
-                          <a:spcPct val="110000"/>
+                          <a:spcPct val="100000"/>
                         </a:lnSpc>
                         <a:spcBef>
                           <a:spcPts val="150"/>
@@ -6126,10 +6126,10 @@
                               <a:alpha val="100000"/>
                             </a:srgbClr>
                           </a:solidFill>
-                          <a:latin typeface="Arial"/>
-                          <a:cs typeface="Arial"/>
-                          <a:ea typeface="Arial"/>
-                          <a:sym typeface="Arial"/>
+                          <a:latin typeface="Malgun Gothic"/>
+                          <a:cs typeface="Malgun Gothic"/>
+                          <a:ea typeface="Malgun Gothic"/>
+                          <a:sym typeface="Malgun Gothic"/>
                         </a:rPr>
                         <a:t> </a:t>
                       </a:r>
@@ -6180,7 +6180,7 @@
                     <a:p>
                       <a:pPr algn="ctr" marL="19050" marR="19050">
                         <a:lnSpc>
-                          <a:spcPct val="110000"/>
+                          <a:spcPct val="100000"/>
                         </a:lnSpc>
                         <a:spcBef>
                           <a:spcPts val="150"/>
@@ -6197,10 +6197,10 @@
                               <a:alpha val="100000"/>
                             </a:srgbClr>
                           </a:solidFill>
-                          <a:latin typeface="Arial"/>
-                          <a:cs typeface="Arial"/>
-                          <a:ea typeface="Arial"/>
-                          <a:sym typeface="Arial"/>
+                          <a:latin typeface="Malgun Gothic"/>
+                          <a:cs typeface="Malgun Gothic"/>
+                          <a:ea typeface="Malgun Gothic"/>
+                          <a:sym typeface="Malgun Gothic"/>
                         </a:rPr>
                         <a:t>PERI</a:t>
                       </a:r>
@@ -6245,7 +6245,7 @@
                     <a:p>
                       <a:pPr algn="ctr" marL="19050" marR="19050">
                         <a:lnSpc>
-                          <a:spcPct val="110000"/>
+                          <a:spcPct val="100000"/>
                         </a:lnSpc>
                         <a:spcBef>
                           <a:spcPts val="150"/>
@@ -6262,10 +6262,10 @@
                               <a:alpha val="100000"/>
                             </a:srgbClr>
                           </a:solidFill>
-                          <a:latin typeface="Arial"/>
-                          <a:cs typeface="Arial"/>
-                          <a:ea typeface="Arial"/>
-                          <a:sym typeface="Arial"/>
+                          <a:latin typeface="Malgun Gothic"/>
+                          <a:cs typeface="Malgun Gothic"/>
+                          <a:ea typeface="Malgun Gothic"/>
+                          <a:sym typeface="Malgun Gothic"/>
                         </a:rPr>
                         <a:t>PB</a:t>
                       </a:r>
@@ -6310,7 +6310,7 @@
                     <a:p>
                       <a:pPr algn="ctr" marL="19050" marR="19050">
                         <a:lnSpc>
-                          <a:spcPct val="110000"/>
+                          <a:spcPct val="100000"/>
                         </a:lnSpc>
                         <a:spcBef>
                           <a:spcPts val="150"/>
@@ -6327,10 +6327,10 @@
                               <a:alpha val="100000"/>
                             </a:srgbClr>
                           </a:solidFill>
-                          <a:latin typeface="Arial"/>
-                          <a:cs typeface="Arial"/>
-                          <a:ea typeface="Arial"/>
-                          <a:sym typeface="Arial"/>
+                          <a:latin typeface="Malgun Gothic"/>
+                          <a:cs typeface="Malgun Gothic"/>
+                          <a:ea typeface="Malgun Gothic"/>
+                          <a:sym typeface="Malgun Gothic"/>
                         </a:rPr>
                         <a:t>PB_3</a:t>
                       </a:r>
@@ -6379,7 +6379,7 @@
                     <a:p>
                       <a:pPr algn="l" marL="19050" marR="19050">
                         <a:lnSpc>
-                          <a:spcPct val="110000"/>
+                          <a:spcPct val="100000"/>
                         </a:lnSpc>
                         <a:spcBef>
                           <a:spcPts val="150"/>
@@ -6396,10 +6396,10 @@
                               <a:alpha val="100000"/>
                             </a:srgbClr>
                           </a:solidFill>
-                          <a:latin typeface="Arial"/>
-                          <a:cs typeface="Arial"/>
-                          <a:ea typeface="Arial"/>
-                          <a:sym typeface="Arial"/>
+                          <a:latin typeface="Malgun Gothic"/>
+                          <a:cs typeface="Malgun Gothic"/>
+                          <a:ea typeface="Malgun Gothic"/>
+                          <a:sym typeface="Malgun Gothic"/>
                         </a:rPr>
                         <a:t>Peri_PB_052</a:t>
                       </a:r>
@@ -6452,7 +6452,7 @@
                     <a:p>
                       <a:pPr algn="ctr" marL="19050" marR="19050">
                         <a:lnSpc>
-                          <a:spcPct val="110000"/>
+                          <a:spcPct val="100000"/>
                         </a:lnSpc>
                         <a:spcBef>
                           <a:spcPts val="150"/>
@@ -6469,10 +6469,10 @@
                               <a:alpha val="100000"/>
                             </a:srgbClr>
                           </a:solidFill>
-                          <a:latin typeface="Arial"/>
-                          <a:cs typeface="Arial"/>
-                          <a:ea typeface="Arial"/>
-                          <a:sym typeface="Arial"/>
+                          <a:latin typeface="Malgun Gothic"/>
+                          <a:cs typeface="Malgun Gothic"/>
+                          <a:ea typeface="Malgun Gothic"/>
+                          <a:sym typeface="Malgun Gothic"/>
                         </a:rPr>
                         <a:t>-0.00</a:t>
                       </a:r>
@@ -6521,7 +6521,7 @@
                     <a:p>
                       <a:pPr algn="ctr" marL="19050" marR="19050">
                         <a:lnSpc>
-                          <a:spcPct val="110000"/>
+                          <a:spcPct val="100000"/>
                         </a:lnSpc>
                         <a:spcBef>
                           <a:spcPts val="150"/>
@@ -6538,10 +6538,10 @@
                               <a:alpha val="100000"/>
                             </a:srgbClr>
                           </a:solidFill>
-                          <a:latin typeface="Arial"/>
-                          <a:cs typeface="Arial"/>
-                          <a:ea typeface="Arial"/>
-                          <a:sym typeface="Arial"/>
+                          <a:latin typeface="Malgun Gothic"/>
+                          <a:cs typeface="Malgun Gothic"/>
+                          <a:ea typeface="Malgun Gothic"/>
+                          <a:sym typeface="Malgun Gothic"/>
                         </a:rPr>
                         <a:t>0.34</a:t>
                       </a:r>
@@ -6590,7 +6590,7 @@
                     <a:p>
                       <a:pPr algn="ctr" marL="19050" marR="19050">
                         <a:lnSpc>
-                          <a:spcPct val="110000"/>
+                          <a:spcPct val="100000"/>
                         </a:lnSpc>
                         <a:spcBef>
                           <a:spcPts val="150"/>
@@ -6607,10 +6607,10 @@
                               <a:alpha val="100000"/>
                             </a:srgbClr>
                           </a:solidFill>
-                          <a:latin typeface="Arial"/>
-                          <a:cs typeface="Arial"/>
-                          <a:ea typeface="Arial"/>
-                          <a:sym typeface="Arial"/>
+                          <a:latin typeface="Malgun Gothic"/>
+                          <a:cs typeface="Malgun Gothic"/>
+                          <a:ea typeface="Malgun Gothic"/>
+                          <a:sym typeface="Malgun Gothic"/>
                         </a:rPr>
                         <a:t>+0.35</a:t>
                       </a:r>
@@ -6659,7 +6659,7 @@
                     <a:p>
                       <a:pPr algn="ctr" marL="19050" marR="19050">
                         <a:lnSpc>
-                          <a:spcPct val="110000"/>
+                          <a:spcPct val="100000"/>
                         </a:lnSpc>
                         <a:spcBef>
                           <a:spcPts val="150"/>
@@ -6676,10 +6676,10 @@
                               <a:alpha val="100000"/>
                             </a:srgbClr>
                           </a:solidFill>
-                          <a:latin typeface="Arial"/>
-                          <a:cs typeface="Arial"/>
-                          <a:ea typeface="Arial"/>
-                          <a:sym typeface="Arial"/>
+                          <a:latin typeface="Malgun Gothic"/>
+                          <a:cs typeface="Malgun Gothic"/>
+                          <a:ea typeface="Malgun Gothic"/>
+                          <a:sym typeface="Malgun Gothic"/>
                         </a:rPr>
                         <a:t>+0.3sig</a:t>
                       </a:r>
@@ -6724,7 +6724,7 @@
                     <a:p>
                       <a:pPr algn="ctr" marL="19050" marR="19050">
                         <a:lnSpc>
-                          <a:spcPct val="110000"/>
+                          <a:spcPct val="100000"/>
                         </a:lnSpc>
                         <a:spcBef>
                           <a:spcPts val="150"/>
@@ -6741,10 +6741,10 @@
                               <a:alpha val="100000"/>
                             </a:srgbClr>
                           </a:solidFill>
-                          <a:latin typeface="Arial"/>
-                          <a:cs typeface="Arial"/>
-                          <a:ea typeface="Arial"/>
-                          <a:sym typeface="Arial"/>
+                          <a:latin typeface="Malgun Gothic"/>
+                          <a:cs typeface="Malgun Gothic"/>
+                          <a:ea typeface="Malgun Gothic"/>
+                          <a:sym typeface="Malgun Gothic"/>
                         </a:rPr>
                         <a:t>⬤ Stable</a:t>
                       </a:r>
@@ -6793,7 +6793,7 @@
                     <a:p>
                       <a:pPr algn="l" marL="19050" marR="19050">
                         <a:lnSpc>
-                          <a:spcPct val="110000"/>
+                          <a:spcPct val="100000"/>
                         </a:lnSpc>
                         <a:spcBef>
                           <a:spcPts val="150"/>
@@ -6810,10 +6810,10 @@
                               <a:alpha val="100000"/>
                             </a:srgbClr>
                           </a:solidFill>
-                          <a:latin typeface="Arial"/>
-                          <a:cs typeface="Arial"/>
-                          <a:ea typeface="Arial"/>
-                          <a:sym typeface="Arial"/>
+                          <a:latin typeface="Malgun Gothic"/>
+                          <a:cs typeface="Malgun Gothic"/>
+                          <a:ea typeface="Malgun Gothic"/>
+                          <a:sym typeface="Malgun Gothic"/>
                         </a:rPr>
                         <a:t> </a:t>
                       </a:r>
@@ -6866,7 +6866,7 @@
                     <a:p>
                       <a:pPr algn="l" marL="19050" marR="19050">
                         <a:lnSpc>
-                          <a:spcPct val="110000"/>
+                          <a:spcPct val="100000"/>
                         </a:lnSpc>
                         <a:spcBef>
                           <a:spcPts val="150"/>
@@ -6883,10 +6883,10 @@
                               <a:alpha val="100000"/>
                             </a:srgbClr>
                           </a:solidFill>
-                          <a:latin typeface="Arial"/>
-                          <a:cs typeface="Arial"/>
-                          <a:ea typeface="Arial"/>
-                          <a:sym typeface="Arial"/>
+                          <a:latin typeface="Malgun Gothic"/>
+                          <a:cs typeface="Malgun Gothic"/>
+                          <a:ea typeface="Malgun Gothic"/>
+                          <a:sym typeface="Malgun Gothic"/>
                         </a:rPr>
                         <a:t> </a:t>
                       </a:r>
@@ -6937,7 +6937,7 @@
                     <a:p>
                       <a:pPr algn="ctr" marL="19050" marR="19050">
                         <a:lnSpc>
-                          <a:spcPct val="110000"/>
+                          <a:spcPct val="100000"/>
                         </a:lnSpc>
                         <a:spcBef>
                           <a:spcPts val="150"/>
@@ -6954,10 +6954,10 @@
                               <a:alpha val="100000"/>
                             </a:srgbClr>
                           </a:solidFill>
-                          <a:latin typeface="Arial"/>
-                          <a:cs typeface="Arial"/>
-                          <a:ea typeface="Arial"/>
-                          <a:sym typeface="Arial"/>
+                          <a:latin typeface="Malgun Gothic"/>
+                          <a:cs typeface="Malgun Gothic"/>
+                          <a:ea typeface="Malgun Gothic"/>
+                          <a:sym typeface="Malgun Gothic"/>
                         </a:rPr>
                         <a:t>PERI</a:t>
                       </a:r>
@@ -7002,7 +7002,7 @@
                     <a:p>
                       <a:pPr algn="ctr" marL="19050" marR="19050">
                         <a:lnSpc>
-                          <a:spcPct val="110000"/>
+                          <a:spcPct val="100000"/>
                         </a:lnSpc>
                         <a:spcBef>
                           <a:spcPts val="150"/>
@@ -7019,10 +7019,10 @@
                               <a:alpha val="100000"/>
                             </a:srgbClr>
                           </a:solidFill>
-                          <a:latin typeface="Arial"/>
-                          <a:cs typeface="Arial"/>
-                          <a:ea typeface="Arial"/>
-                          <a:sym typeface="Arial"/>
+                          <a:latin typeface="Malgun Gothic"/>
+                          <a:cs typeface="Malgun Gothic"/>
+                          <a:ea typeface="Malgun Gothic"/>
+                          <a:sym typeface="Malgun Gothic"/>
                         </a:rPr>
                         <a:t>BL</a:t>
                       </a:r>
@@ -7067,7 +7067,7 @@
                     <a:p>
                       <a:pPr algn="ctr" marL="19050" marR="19050">
                         <a:lnSpc>
-                          <a:spcPct val="110000"/>
+                          <a:spcPct val="100000"/>
                         </a:lnSpc>
                         <a:spcBef>
                           <a:spcPts val="150"/>
@@ -7084,10 +7084,10 @@
                               <a:alpha val="100000"/>
                             </a:srgbClr>
                           </a:solidFill>
-                          <a:latin typeface="Arial"/>
-                          <a:cs typeface="Arial"/>
-                          <a:ea typeface="Arial"/>
-                          <a:sym typeface="Arial"/>
+                          <a:latin typeface="Malgun Gothic"/>
+                          <a:cs typeface="Malgun Gothic"/>
+                          <a:ea typeface="Malgun Gothic"/>
+                          <a:sym typeface="Malgun Gothic"/>
                         </a:rPr>
                         <a:t>BL_1</a:t>
                       </a:r>
@@ -7136,7 +7136,7 @@
                     <a:p>
                       <a:pPr algn="l" marL="19050" marR="19050">
                         <a:lnSpc>
-                          <a:spcPct val="110000"/>
+                          <a:spcPct val="100000"/>
                         </a:lnSpc>
                         <a:spcBef>
                           <a:spcPts val="150"/>
@@ -7153,10 +7153,10 @@
                               <a:alpha val="100000"/>
                             </a:srgbClr>
                           </a:solidFill>
-                          <a:latin typeface="Arial"/>
-                          <a:cs typeface="Arial"/>
-                          <a:ea typeface="Arial"/>
-                          <a:sym typeface="Arial"/>
+                          <a:latin typeface="Malgun Gothic"/>
+                          <a:cs typeface="Malgun Gothic"/>
+                          <a:ea typeface="Malgun Gothic"/>
+                          <a:sym typeface="Malgun Gothic"/>
                         </a:rPr>
                         <a:t>Peri_BL_079</a:t>
                       </a:r>
@@ -7209,7 +7209,7 @@
                     <a:p>
                       <a:pPr algn="ctr" marL="19050" marR="19050">
                         <a:lnSpc>
-                          <a:spcPct val="110000"/>
+                          <a:spcPct val="100000"/>
                         </a:lnSpc>
                         <a:spcBef>
                           <a:spcPts val="150"/>
@@ -7226,10 +7226,10 @@
                               <a:alpha val="100000"/>
                             </a:srgbClr>
                           </a:solidFill>
-                          <a:latin typeface="Arial"/>
-                          <a:cs typeface="Arial"/>
-                          <a:ea typeface="Arial"/>
-                          <a:sym typeface="Arial"/>
+                          <a:latin typeface="Malgun Gothic"/>
+                          <a:cs typeface="Malgun Gothic"/>
+                          <a:ea typeface="Malgun Gothic"/>
+                          <a:sym typeface="Malgun Gothic"/>
                         </a:rPr>
                         <a:t>-0.00</a:t>
                       </a:r>
@@ -7278,7 +7278,7 @@
                     <a:p>
                       <a:pPr algn="ctr" marL="19050" marR="19050">
                         <a:lnSpc>
-                          <a:spcPct val="110000"/>
+                          <a:spcPct val="100000"/>
                         </a:lnSpc>
                         <a:spcBef>
                           <a:spcPts val="150"/>
@@ -7295,10 +7295,10 @@
                               <a:alpha val="100000"/>
                             </a:srgbClr>
                           </a:solidFill>
-                          <a:latin typeface="Arial"/>
-                          <a:cs typeface="Arial"/>
-                          <a:ea typeface="Arial"/>
-                          <a:sym typeface="Arial"/>
+                          <a:latin typeface="Malgun Gothic"/>
+                          <a:cs typeface="Malgun Gothic"/>
+                          <a:ea typeface="Malgun Gothic"/>
+                          <a:sym typeface="Malgun Gothic"/>
                         </a:rPr>
                         <a:t>0.35</a:t>
                       </a:r>
@@ -7347,7 +7347,7 @@
                     <a:p>
                       <a:pPr algn="ctr" marL="19050" marR="19050">
                         <a:lnSpc>
-                          <a:spcPct val="110000"/>
+                          <a:spcPct val="100000"/>
                         </a:lnSpc>
                         <a:spcBef>
                           <a:spcPts val="150"/>
@@ -7364,10 +7364,10 @@
                               <a:alpha val="100000"/>
                             </a:srgbClr>
                           </a:solidFill>
-                          <a:latin typeface="Arial"/>
-                          <a:cs typeface="Arial"/>
-                          <a:ea typeface="Arial"/>
-                          <a:sym typeface="Arial"/>
+                          <a:latin typeface="Malgun Gothic"/>
+                          <a:cs typeface="Malgun Gothic"/>
+                          <a:ea typeface="Malgun Gothic"/>
+                          <a:sym typeface="Malgun Gothic"/>
                         </a:rPr>
                         <a:t>+0.35</a:t>
                       </a:r>
@@ -7416,7 +7416,7 @@
                     <a:p>
                       <a:pPr algn="ctr" marL="19050" marR="19050">
                         <a:lnSpc>
-                          <a:spcPct val="110000"/>
+                          <a:spcPct val="100000"/>
                         </a:lnSpc>
                         <a:spcBef>
                           <a:spcPts val="150"/>
@@ -7433,10 +7433,10 @@
                               <a:alpha val="100000"/>
                             </a:srgbClr>
                           </a:solidFill>
-                          <a:latin typeface="Arial"/>
-                          <a:cs typeface="Arial"/>
-                          <a:ea typeface="Arial"/>
-                          <a:sym typeface="Arial"/>
+                          <a:latin typeface="Malgun Gothic"/>
+                          <a:cs typeface="Malgun Gothic"/>
+                          <a:ea typeface="Malgun Gothic"/>
+                          <a:sym typeface="Malgun Gothic"/>
                         </a:rPr>
                         <a:t>+0.4sig</a:t>
                       </a:r>
@@ -7481,7 +7481,7 @@
                     <a:p>
                       <a:pPr algn="ctr" marL="19050" marR="19050">
                         <a:lnSpc>
-                          <a:spcPct val="110000"/>
+                          <a:spcPct val="100000"/>
                         </a:lnSpc>
                         <a:spcBef>
                           <a:spcPts val="150"/>
@@ -7498,10 +7498,10 @@
                               <a:alpha val="100000"/>
                             </a:srgbClr>
                           </a:solidFill>
-                          <a:latin typeface="Arial"/>
-                          <a:cs typeface="Arial"/>
-                          <a:ea typeface="Arial"/>
-                          <a:sym typeface="Arial"/>
+                          <a:latin typeface="Malgun Gothic"/>
+                          <a:cs typeface="Malgun Gothic"/>
+                          <a:ea typeface="Malgun Gothic"/>
+                          <a:sym typeface="Malgun Gothic"/>
                         </a:rPr>
                         <a:t>⬤ Stable</a:t>
                       </a:r>
@@ -7550,7 +7550,7 @@
                     <a:p>
                       <a:pPr algn="l" marL="19050" marR="19050">
                         <a:lnSpc>
-                          <a:spcPct val="110000"/>
+                          <a:spcPct val="100000"/>
                         </a:lnSpc>
                         <a:spcBef>
                           <a:spcPts val="150"/>
@@ -7567,10 +7567,10 @@
                               <a:alpha val="100000"/>
                             </a:srgbClr>
                           </a:solidFill>
-                          <a:latin typeface="Arial"/>
-                          <a:cs typeface="Arial"/>
-                          <a:ea typeface="Arial"/>
-                          <a:sym typeface="Arial"/>
+                          <a:latin typeface="Malgun Gothic"/>
+                          <a:cs typeface="Malgun Gothic"/>
+                          <a:ea typeface="Malgun Gothic"/>
+                          <a:sym typeface="Malgun Gothic"/>
                         </a:rPr>
                         <a:t> </a:t>
                       </a:r>
@@ -7623,7 +7623,7 @@
                     <a:p>
                       <a:pPr algn="l" marL="19050" marR="19050">
                         <a:lnSpc>
-                          <a:spcPct val="110000"/>
+                          <a:spcPct val="100000"/>
                         </a:lnSpc>
                         <a:spcBef>
                           <a:spcPts val="150"/>
@@ -7640,10 +7640,10 @@
                               <a:alpha val="100000"/>
                             </a:srgbClr>
                           </a:solidFill>
-                          <a:latin typeface="Arial"/>
-                          <a:cs typeface="Arial"/>
-                          <a:ea typeface="Arial"/>
-                          <a:sym typeface="Arial"/>
+                          <a:latin typeface="Malgun Gothic"/>
+                          <a:cs typeface="Malgun Gothic"/>
+                          <a:ea typeface="Malgun Gothic"/>
+                          <a:sym typeface="Malgun Gothic"/>
                         </a:rPr>
                         <a:t> </a:t>
                       </a:r>
@@ -7694,7 +7694,7 @@
                     <a:p>
                       <a:pPr algn="ctr" marL="19050" marR="19050">
                         <a:lnSpc>
-                          <a:spcPct val="110000"/>
+                          <a:spcPct val="100000"/>
                         </a:lnSpc>
                         <a:spcBef>
                           <a:spcPts val="150"/>
@@ -7711,10 +7711,10 @@
                               <a:alpha val="100000"/>
                             </a:srgbClr>
                           </a:solidFill>
-                          <a:latin typeface="Arial"/>
-                          <a:cs typeface="Arial"/>
-                          <a:ea typeface="Arial"/>
-                          <a:sym typeface="Arial"/>
+                          <a:latin typeface="Malgun Gothic"/>
+                          <a:cs typeface="Malgun Gothic"/>
+                          <a:ea typeface="Malgun Gothic"/>
+                          <a:sym typeface="Malgun Gothic"/>
                         </a:rPr>
                         <a:t>PERI</a:t>
                       </a:r>
@@ -7759,7 +7759,7 @@
                     <a:p>
                       <a:pPr algn="ctr" marL="19050" marR="19050">
                         <a:lnSpc>
-                          <a:spcPct val="110000"/>
+                          <a:spcPct val="100000"/>
                         </a:lnSpc>
                         <a:spcBef>
                           <a:spcPts val="150"/>
@@ -7776,10 +7776,10 @@
                               <a:alpha val="100000"/>
                             </a:srgbClr>
                           </a:solidFill>
-                          <a:latin typeface="Arial"/>
-                          <a:cs typeface="Arial"/>
-                          <a:ea typeface="Arial"/>
-                          <a:sym typeface="Arial"/>
+                          <a:latin typeface="Malgun Gothic"/>
+                          <a:cs typeface="Malgun Gothic"/>
+                          <a:ea typeface="Malgun Gothic"/>
+                          <a:sym typeface="Malgun Gothic"/>
                         </a:rPr>
                         <a:t>BL</a:t>
                       </a:r>
@@ -7824,7 +7824,7 @@
                     <a:p>
                       <a:pPr algn="ctr" marL="19050" marR="19050">
                         <a:lnSpc>
-                          <a:spcPct val="110000"/>
+                          <a:spcPct val="100000"/>
                         </a:lnSpc>
                         <a:spcBef>
                           <a:spcPts val="150"/>
@@ -7841,10 +7841,10 @@
                               <a:alpha val="100000"/>
                             </a:srgbClr>
                           </a:solidFill>
-                          <a:latin typeface="Arial"/>
-                          <a:cs typeface="Arial"/>
-                          <a:ea typeface="Arial"/>
-                          <a:sym typeface="Arial"/>
+                          <a:latin typeface="Malgun Gothic"/>
+                          <a:cs typeface="Malgun Gothic"/>
+                          <a:ea typeface="Malgun Gothic"/>
+                          <a:sym typeface="Malgun Gothic"/>
                         </a:rPr>
                         <a:t>BL_2</a:t>
                       </a:r>
@@ -7893,7 +7893,7 @@
                     <a:p>
                       <a:pPr algn="l" marL="19050" marR="19050">
                         <a:lnSpc>
-                          <a:spcPct val="110000"/>
+                          <a:spcPct val="100000"/>
                         </a:lnSpc>
                         <a:spcBef>
                           <a:spcPts val="150"/>
@@ -7910,10 +7910,10 @@
                               <a:alpha val="100000"/>
                             </a:srgbClr>
                           </a:solidFill>
-                          <a:latin typeface="Arial"/>
-                          <a:cs typeface="Arial"/>
-                          <a:ea typeface="Arial"/>
-                          <a:sym typeface="Arial"/>
+                          <a:latin typeface="Malgun Gothic"/>
+                          <a:cs typeface="Malgun Gothic"/>
+                          <a:ea typeface="Malgun Gothic"/>
+                          <a:sym typeface="Malgun Gothic"/>
                         </a:rPr>
                         <a:t>Peri_BL_122</a:t>
                       </a:r>
@@ -7966,7 +7966,7 @@
                     <a:p>
                       <a:pPr algn="ctr" marL="19050" marR="19050">
                         <a:lnSpc>
-                          <a:spcPct val="110000"/>
+                          <a:spcPct val="100000"/>
                         </a:lnSpc>
                         <a:spcBef>
                           <a:spcPts val="150"/>
@@ -7983,10 +7983,10 @@
                               <a:alpha val="100000"/>
                             </a:srgbClr>
                           </a:solidFill>
-                          <a:latin typeface="Arial"/>
-                          <a:cs typeface="Arial"/>
-                          <a:ea typeface="Arial"/>
-                          <a:sym typeface="Arial"/>
+                          <a:latin typeface="Malgun Gothic"/>
+                          <a:cs typeface="Malgun Gothic"/>
+                          <a:ea typeface="Malgun Gothic"/>
+                          <a:sym typeface="Malgun Gothic"/>
                         </a:rPr>
                         <a:t>-0.00</a:t>
                       </a:r>
@@ -8035,7 +8035,7 @@
                     <a:p>
                       <a:pPr algn="ctr" marL="19050" marR="19050">
                         <a:lnSpc>
-                          <a:spcPct val="110000"/>
+                          <a:spcPct val="100000"/>
                         </a:lnSpc>
                         <a:spcBef>
                           <a:spcPts val="150"/>
@@ -8052,10 +8052,10 @@
                               <a:alpha val="100000"/>
                             </a:srgbClr>
                           </a:solidFill>
-                          <a:latin typeface="Arial"/>
-                          <a:cs typeface="Arial"/>
-                          <a:ea typeface="Arial"/>
-                          <a:sym typeface="Arial"/>
+                          <a:latin typeface="Malgun Gothic"/>
+                          <a:cs typeface="Malgun Gothic"/>
+                          <a:ea typeface="Malgun Gothic"/>
+                          <a:sym typeface="Malgun Gothic"/>
                         </a:rPr>
                         <a:t>0.35</a:t>
                       </a:r>
@@ -8104,7 +8104,7 @@
                     <a:p>
                       <a:pPr algn="ctr" marL="19050" marR="19050">
                         <a:lnSpc>
-                          <a:spcPct val="110000"/>
+                          <a:spcPct val="100000"/>
                         </a:lnSpc>
                         <a:spcBef>
                           <a:spcPts val="150"/>
@@ -8121,10 +8121,10 @@
                               <a:alpha val="100000"/>
                             </a:srgbClr>
                           </a:solidFill>
-                          <a:latin typeface="Arial"/>
-                          <a:cs typeface="Arial"/>
-                          <a:ea typeface="Arial"/>
-                          <a:sym typeface="Arial"/>
+                          <a:latin typeface="Malgun Gothic"/>
+                          <a:cs typeface="Malgun Gothic"/>
+                          <a:ea typeface="Malgun Gothic"/>
+                          <a:sym typeface="Malgun Gothic"/>
                         </a:rPr>
                         <a:t>+0.35</a:t>
                       </a:r>
@@ -8173,7 +8173,7 @@
                     <a:p>
                       <a:pPr algn="ctr" marL="19050" marR="19050">
                         <a:lnSpc>
-                          <a:spcPct val="110000"/>
+                          <a:spcPct val="100000"/>
                         </a:lnSpc>
                         <a:spcBef>
                           <a:spcPts val="150"/>
@@ -8190,10 +8190,10 @@
                               <a:alpha val="100000"/>
                             </a:srgbClr>
                           </a:solidFill>
-                          <a:latin typeface="Arial"/>
-                          <a:cs typeface="Arial"/>
-                          <a:ea typeface="Arial"/>
-                          <a:sym typeface="Arial"/>
+                          <a:latin typeface="Malgun Gothic"/>
+                          <a:cs typeface="Malgun Gothic"/>
+                          <a:ea typeface="Malgun Gothic"/>
+                          <a:sym typeface="Malgun Gothic"/>
                         </a:rPr>
                         <a:t>+0.7sig</a:t>
                       </a:r>
@@ -8238,7 +8238,7 @@
                     <a:p>
                       <a:pPr algn="ctr" marL="19050" marR="19050">
                         <a:lnSpc>
-                          <a:spcPct val="110000"/>
+                          <a:spcPct val="100000"/>
                         </a:lnSpc>
                         <a:spcBef>
                           <a:spcPts val="150"/>
@@ -8255,10 +8255,10 @@
                               <a:alpha val="100000"/>
                             </a:srgbClr>
                           </a:solidFill>
-                          <a:latin typeface="Arial"/>
-                          <a:cs typeface="Arial"/>
-                          <a:ea typeface="Arial"/>
-                          <a:sym typeface="Arial"/>
+                          <a:latin typeface="Malgun Gothic"/>
+                          <a:cs typeface="Malgun Gothic"/>
+                          <a:ea typeface="Malgun Gothic"/>
+                          <a:sym typeface="Malgun Gothic"/>
                         </a:rPr>
                         <a:t>⬤ Up</a:t>
                       </a:r>
@@ -8307,7 +8307,7 @@
                     <a:p>
                       <a:pPr algn="l" marL="19050" marR="19050">
                         <a:lnSpc>
-                          <a:spcPct val="110000"/>
+                          <a:spcPct val="100000"/>
                         </a:lnSpc>
                         <a:spcBef>
                           <a:spcPts val="150"/>
@@ -8324,10 +8324,10 @@
                               <a:alpha val="100000"/>
                             </a:srgbClr>
                           </a:solidFill>
-                          <a:latin typeface="Arial"/>
-                          <a:cs typeface="Arial"/>
-                          <a:ea typeface="Arial"/>
-                          <a:sym typeface="Arial"/>
+                          <a:latin typeface="Malgun Gothic"/>
+                          <a:cs typeface="Malgun Gothic"/>
+                          <a:ea typeface="Malgun Gothic"/>
+                          <a:sym typeface="Malgun Gothic"/>
                         </a:rPr>
                         <a:t> </a:t>
                       </a:r>
@@ -8380,7 +8380,7 @@
                     <a:p>
                       <a:pPr algn="l" marL="19050" marR="19050">
                         <a:lnSpc>
-                          <a:spcPct val="110000"/>
+                          <a:spcPct val="100000"/>
                         </a:lnSpc>
                         <a:spcBef>
                           <a:spcPts val="150"/>
@@ -8397,10 +8397,10 @@
                               <a:alpha val="100000"/>
                             </a:srgbClr>
                           </a:solidFill>
-                          <a:latin typeface="Arial"/>
-                          <a:cs typeface="Arial"/>
-                          <a:ea typeface="Arial"/>
-                          <a:sym typeface="Arial"/>
+                          <a:latin typeface="Malgun Gothic"/>
+                          <a:cs typeface="Malgun Gothic"/>
+                          <a:ea typeface="Malgun Gothic"/>
+                          <a:sym typeface="Malgun Gothic"/>
                         </a:rPr>
                         <a:t> </a:t>
                       </a:r>
@@ -8451,7 +8451,7 @@
                     <a:p>
                       <a:pPr algn="ctr" marL="19050" marR="19050">
                         <a:lnSpc>
-                          <a:spcPct val="110000"/>
+                          <a:spcPct val="100000"/>
                         </a:lnSpc>
                         <a:spcBef>
                           <a:spcPts val="150"/>
@@ -8468,10 +8468,10 @@
                               <a:alpha val="100000"/>
                             </a:srgbClr>
                           </a:solidFill>
-                          <a:latin typeface="Arial"/>
-                          <a:cs typeface="Arial"/>
-                          <a:ea typeface="Arial"/>
-                          <a:sym typeface="Arial"/>
+                          <a:latin typeface="Malgun Gothic"/>
+                          <a:cs typeface="Malgun Gothic"/>
+                          <a:ea typeface="Malgun Gothic"/>
+                          <a:sym typeface="Malgun Gothic"/>
                         </a:rPr>
                         <a:t>PERI</a:t>
                       </a:r>
@@ -8516,7 +8516,7 @@
                     <a:p>
                       <a:pPr algn="ctr" marL="19050" marR="19050">
                         <a:lnSpc>
-                          <a:spcPct val="110000"/>
+                          <a:spcPct val="100000"/>
                         </a:lnSpc>
                         <a:spcBef>
                           <a:spcPts val="150"/>
@@ -8533,10 +8533,10 @@
                               <a:alpha val="100000"/>
                             </a:srgbClr>
                           </a:solidFill>
-                          <a:latin typeface="Arial"/>
-                          <a:cs typeface="Arial"/>
-                          <a:ea typeface="Arial"/>
-                          <a:sym typeface="Arial"/>
+                          <a:latin typeface="Malgun Gothic"/>
+                          <a:cs typeface="Malgun Gothic"/>
+                          <a:ea typeface="Malgun Gothic"/>
+                          <a:sym typeface="Malgun Gothic"/>
                         </a:rPr>
                         <a:t>BL</a:t>
                       </a:r>
@@ -8581,7 +8581,7 @@
                     <a:p>
                       <a:pPr algn="ctr" marL="19050" marR="19050">
                         <a:lnSpc>
-                          <a:spcPct val="110000"/>
+                          <a:spcPct val="100000"/>
                         </a:lnSpc>
                         <a:spcBef>
                           <a:spcPts val="150"/>
@@ -8598,10 +8598,10 @@
                               <a:alpha val="100000"/>
                             </a:srgbClr>
                           </a:solidFill>
-                          <a:latin typeface="Arial"/>
-                          <a:cs typeface="Arial"/>
-                          <a:ea typeface="Arial"/>
-                          <a:sym typeface="Arial"/>
+                          <a:latin typeface="Malgun Gothic"/>
+                          <a:cs typeface="Malgun Gothic"/>
+                          <a:ea typeface="Malgun Gothic"/>
+                          <a:sym typeface="Malgun Gothic"/>
                         </a:rPr>
                         <a:t>BL_3</a:t>
                       </a:r>
@@ -8650,7 +8650,7 @@
                     <a:p>
                       <a:pPr algn="l" marL="19050" marR="19050">
                         <a:lnSpc>
-                          <a:spcPct val="110000"/>
+                          <a:spcPct val="100000"/>
                         </a:lnSpc>
                         <a:spcBef>
                           <a:spcPts val="150"/>
@@ -8667,10 +8667,10 @@
                               <a:alpha val="100000"/>
                             </a:srgbClr>
                           </a:solidFill>
-                          <a:latin typeface="Arial"/>
-                          <a:cs typeface="Arial"/>
-                          <a:ea typeface="Arial"/>
-                          <a:sym typeface="Arial"/>
+                          <a:latin typeface="Malgun Gothic"/>
+                          <a:cs typeface="Malgun Gothic"/>
+                          <a:ea typeface="Malgun Gothic"/>
+                          <a:sym typeface="Malgun Gothic"/>
                         </a:rPr>
                         <a:t>Peri_BL_134</a:t>
                       </a:r>
@@ -8723,7 +8723,7 @@
                     <a:p>
                       <a:pPr algn="ctr" marL="19050" marR="19050">
                         <a:lnSpc>
-                          <a:spcPct val="110000"/>
+                          <a:spcPct val="100000"/>
                         </a:lnSpc>
                         <a:spcBef>
                           <a:spcPts val="150"/>
@@ -8740,10 +8740,10 @@
                               <a:alpha val="100000"/>
                             </a:srgbClr>
                           </a:solidFill>
-                          <a:latin typeface="Arial"/>
-                          <a:cs typeface="Arial"/>
-                          <a:ea typeface="Arial"/>
-                          <a:sym typeface="Arial"/>
+                          <a:latin typeface="Malgun Gothic"/>
+                          <a:cs typeface="Malgun Gothic"/>
+                          <a:ea typeface="Malgun Gothic"/>
+                          <a:sym typeface="Malgun Gothic"/>
                         </a:rPr>
                         <a:t>0.00</a:t>
                       </a:r>
@@ -8792,7 +8792,7 @@
                     <a:p>
                       <a:pPr algn="ctr" marL="19050" marR="19050">
                         <a:lnSpc>
-                          <a:spcPct val="110000"/>
+                          <a:spcPct val="100000"/>
                         </a:lnSpc>
                         <a:spcBef>
                           <a:spcPts val="150"/>
@@ -8809,10 +8809,10 @@
                               <a:alpha val="100000"/>
                             </a:srgbClr>
                           </a:solidFill>
-                          <a:latin typeface="Arial"/>
-                          <a:cs typeface="Arial"/>
-                          <a:ea typeface="Arial"/>
-                          <a:sym typeface="Arial"/>
+                          <a:latin typeface="Malgun Gothic"/>
+                          <a:cs typeface="Malgun Gothic"/>
+                          <a:ea typeface="Malgun Gothic"/>
+                          <a:sym typeface="Malgun Gothic"/>
                         </a:rPr>
                         <a:t>-0.00</a:t>
                       </a:r>
@@ -8861,7 +8861,7 @@
                     <a:p>
                       <a:pPr algn="ctr" marL="19050" marR="19050">
                         <a:lnSpc>
-                          <a:spcPct val="110000"/>
+                          <a:spcPct val="100000"/>
                         </a:lnSpc>
                         <a:spcBef>
                           <a:spcPts val="150"/>
@@ -8878,10 +8878,10 @@
                               <a:alpha val="100000"/>
                             </a:srgbClr>
                           </a:solidFill>
-                          <a:latin typeface="Arial"/>
-                          <a:cs typeface="Arial"/>
-                          <a:ea typeface="Arial"/>
-                          <a:sym typeface="Arial"/>
+                          <a:latin typeface="Malgun Gothic"/>
+                          <a:cs typeface="Malgun Gothic"/>
+                          <a:ea typeface="Malgun Gothic"/>
+                          <a:sym typeface="Malgun Gothic"/>
                         </a:rPr>
                         <a:t>-0.00</a:t>
                       </a:r>
@@ -8930,7 +8930,7 @@
                     <a:p>
                       <a:pPr algn="ctr" marL="19050" marR="19050">
                         <a:lnSpc>
-                          <a:spcPct val="110000"/>
+                          <a:spcPct val="100000"/>
                         </a:lnSpc>
                         <a:spcBef>
                           <a:spcPts val="150"/>
@@ -8947,10 +8947,10 @@
                               <a:alpha val="100000"/>
                             </a:srgbClr>
                           </a:solidFill>
-                          <a:latin typeface="Arial"/>
-                          <a:cs typeface="Arial"/>
-                          <a:ea typeface="Arial"/>
-                          <a:sym typeface="Arial"/>
+                          <a:latin typeface="Malgun Gothic"/>
+                          <a:cs typeface="Malgun Gothic"/>
+                          <a:ea typeface="Malgun Gothic"/>
+                          <a:sym typeface="Malgun Gothic"/>
                         </a:rPr>
                         <a:t>-0.0sig</a:t>
                       </a:r>
@@ -8995,7 +8995,7 @@
                     <a:p>
                       <a:pPr algn="ctr" marL="19050" marR="19050">
                         <a:lnSpc>
-                          <a:spcPct val="110000"/>
+                          <a:spcPct val="100000"/>
                         </a:lnSpc>
                         <a:spcBef>
                           <a:spcPts val="150"/>
@@ -9012,10 +9012,10 @@
                               <a:alpha val="100000"/>
                             </a:srgbClr>
                           </a:solidFill>
-                          <a:latin typeface="Arial"/>
-                          <a:cs typeface="Arial"/>
-                          <a:ea typeface="Arial"/>
-                          <a:sym typeface="Arial"/>
+                          <a:latin typeface="Malgun Gothic"/>
+                          <a:cs typeface="Malgun Gothic"/>
+                          <a:ea typeface="Malgun Gothic"/>
+                          <a:sym typeface="Malgun Gothic"/>
                         </a:rPr>
                         <a:t>⬤ Stable</a:t>
                       </a:r>
@@ -9064,7 +9064,7 @@
                     <a:p>
                       <a:pPr algn="l" marL="19050" marR="19050">
                         <a:lnSpc>
-                          <a:spcPct val="110000"/>
+                          <a:spcPct val="100000"/>
                         </a:lnSpc>
                         <a:spcBef>
                           <a:spcPts val="150"/>
@@ -9081,10 +9081,10 @@
                               <a:alpha val="100000"/>
                             </a:srgbClr>
                           </a:solidFill>
-                          <a:latin typeface="Arial"/>
-                          <a:cs typeface="Arial"/>
-                          <a:ea typeface="Arial"/>
-                          <a:sym typeface="Arial"/>
+                          <a:latin typeface="Malgun Gothic"/>
+                          <a:cs typeface="Malgun Gothic"/>
+                          <a:ea typeface="Malgun Gothic"/>
+                          <a:sym typeface="Malgun Gothic"/>
                         </a:rPr>
                         <a:t> </a:t>
                       </a:r>
@@ -9137,7 +9137,7 @@
                     <a:p>
                       <a:pPr algn="l" marL="19050" marR="19050">
                         <a:lnSpc>
-                          <a:spcPct val="110000"/>
+                          <a:spcPct val="100000"/>
                         </a:lnSpc>
                         <a:spcBef>
                           <a:spcPts val="150"/>
@@ -9154,10 +9154,10 @@
                               <a:alpha val="100000"/>
                             </a:srgbClr>
                           </a:solidFill>
-                          <a:latin typeface="Arial"/>
-                          <a:cs typeface="Arial"/>
-                          <a:ea typeface="Arial"/>
-                          <a:sym typeface="Arial"/>
+                          <a:latin typeface="Malgun Gothic"/>
+                          <a:cs typeface="Malgun Gothic"/>
+                          <a:ea typeface="Malgun Gothic"/>
+                          <a:sym typeface="Malgun Gothic"/>
                         </a:rPr>
                         <a:t> </a:t>
                       </a:r>
@@ -9208,7 +9208,7 @@
                     <a:p>
                       <a:pPr algn="ctr" marL="19050" marR="19050">
                         <a:lnSpc>
-                          <a:spcPct val="110000"/>
+                          <a:spcPct val="100000"/>
                         </a:lnSpc>
                         <a:spcBef>
                           <a:spcPts val="150"/>
@@ -9225,10 +9225,10 @@
                               <a:alpha val="100000"/>
                             </a:srgbClr>
                           </a:solidFill>
-                          <a:latin typeface="Arial"/>
-                          <a:cs typeface="Arial"/>
-                          <a:ea typeface="Arial"/>
-                          <a:sym typeface="Arial"/>
+                          <a:latin typeface="Malgun Gothic"/>
+                          <a:cs typeface="Malgun Gothic"/>
+                          <a:ea typeface="Malgun Gothic"/>
+                          <a:sym typeface="Malgun Gothic"/>
                         </a:rPr>
                         <a:t>CELL</a:t>
                       </a:r>
@@ -9273,7 +9273,7 @@
                     <a:p>
                       <a:pPr algn="ctr" marL="19050" marR="19050">
                         <a:lnSpc>
-                          <a:spcPct val="110000"/>
+                          <a:spcPct val="100000"/>
                         </a:lnSpc>
                         <a:spcBef>
                           <a:spcPts val="150"/>
@@ -9290,10 +9290,10 @@
                               <a:alpha val="100000"/>
                             </a:srgbClr>
                           </a:solidFill>
-                          <a:latin typeface="Arial"/>
-                          <a:cs typeface="Arial"/>
-                          <a:ea typeface="Arial"/>
-                          <a:sym typeface="Arial"/>
+                          <a:latin typeface="Malgun Gothic"/>
+                          <a:cs typeface="Malgun Gothic"/>
+                          <a:ea typeface="Malgun Gothic"/>
+                          <a:sym typeface="Malgun Gothic"/>
                         </a:rPr>
                         <a:t>WLS</a:t>
                       </a:r>
@@ -9338,7 +9338,7 @@
                     <a:p>
                       <a:pPr algn="ctr" marL="19050" marR="19050">
                         <a:lnSpc>
-                          <a:spcPct val="110000"/>
+                          <a:spcPct val="100000"/>
                         </a:lnSpc>
                         <a:spcBef>
                           <a:spcPts val="150"/>
@@ -9355,10 +9355,10 @@
                               <a:alpha val="100000"/>
                             </a:srgbClr>
                           </a:solidFill>
-                          <a:latin typeface="Arial"/>
-                          <a:cs typeface="Arial"/>
-                          <a:ea typeface="Arial"/>
-                          <a:sym typeface="Arial"/>
+                          <a:latin typeface="Malgun Gothic"/>
+                          <a:cs typeface="Malgun Gothic"/>
+                          <a:ea typeface="Malgun Gothic"/>
+                          <a:sym typeface="Malgun Gothic"/>
                         </a:rPr>
                         <a:t>WLS_1</a:t>
                       </a:r>
@@ -9407,7 +9407,7 @@
                     <a:p>
                       <a:pPr algn="l" marL="19050" marR="19050">
                         <a:lnSpc>
-                          <a:spcPct val="110000"/>
+                          <a:spcPct val="100000"/>
                         </a:lnSpc>
                         <a:spcBef>
                           <a:spcPts val="150"/>
@@ -9424,10 +9424,10 @@
                               <a:alpha val="100000"/>
                             </a:srgbClr>
                           </a:solidFill>
-                          <a:latin typeface="Arial"/>
-                          <a:cs typeface="Arial"/>
-                          <a:ea typeface="Arial"/>
-                          <a:sym typeface="Arial"/>
+                          <a:latin typeface="Malgun Gothic"/>
+                          <a:cs typeface="Malgun Gothic"/>
+                          <a:ea typeface="Malgun Gothic"/>
+                          <a:sym typeface="Malgun Gothic"/>
                         </a:rPr>
                         <a:t>Cell_WLS_153</a:t>
                       </a:r>
@@ -9480,7 +9480,7 @@
                     <a:p>
                       <a:pPr algn="ctr" marL="19050" marR="19050">
                         <a:lnSpc>
-                          <a:spcPct val="110000"/>
+                          <a:spcPct val="100000"/>
                         </a:lnSpc>
                         <a:spcBef>
                           <a:spcPts val="150"/>
@@ -9497,10 +9497,10 @@
                               <a:alpha val="100000"/>
                             </a:srgbClr>
                           </a:solidFill>
-                          <a:latin typeface="Arial"/>
-                          <a:cs typeface="Arial"/>
-                          <a:ea typeface="Arial"/>
-                          <a:sym typeface="Arial"/>
+                          <a:latin typeface="Malgun Gothic"/>
+                          <a:cs typeface="Malgun Gothic"/>
+                          <a:ea typeface="Malgun Gothic"/>
+                          <a:sym typeface="Malgun Gothic"/>
                         </a:rPr>
                         <a:t>-0.00</a:t>
                       </a:r>
@@ -9549,7 +9549,7 @@
                     <a:p>
                       <a:pPr algn="ctr" marL="19050" marR="19050">
                         <a:lnSpc>
-                          <a:spcPct val="110000"/>
+                          <a:spcPct val="100000"/>
                         </a:lnSpc>
                         <a:spcBef>
                           <a:spcPts val="150"/>
@@ -9566,10 +9566,10 @@
                               <a:alpha val="100000"/>
                             </a:srgbClr>
                           </a:solidFill>
-                          <a:latin typeface="Arial"/>
-                          <a:cs typeface="Arial"/>
-                          <a:ea typeface="Arial"/>
-                          <a:sym typeface="Arial"/>
+                          <a:latin typeface="Malgun Gothic"/>
+                          <a:cs typeface="Malgun Gothic"/>
+                          <a:ea typeface="Malgun Gothic"/>
+                          <a:sym typeface="Malgun Gothic"/>
                         </a:rPr>
                         <a:t>0.36</a:t>
                       </a:r>
@@ -9618,7 +9618,7 @@
                     <a:p>
                       <a:pPr algn="ctr" marL="19050" marR="19050">
                         <a:lnSpc>
-                          <a:spcPct val="110000"/>
+                          <a:spcPct val="100000"/>
                         </a:lnSpc>
                         <a:spcBef>
                           <a:spcPts val="150"/>
@@ -9635,10 +9635,10 @@
                               <a:alpha val="100000"/>
                             </a:srgbClr>
                           </a:solidFill>
-                          <a:latin typeface="Arial"/>
-                          <a:cs typeface="Arial"/>
-                          <a:ea typeface="Arial"/>
-                          <a:sym typeface="Arial"/>
+                          <a:latin typeface="Malgun Gothic"/>
+                          <a:cs typeface="Malgun Gothic"/>
+                          <a:ea typeface="Malgun Gothic"/>
+                          <a:sym typeface="Malgun Gothic"/>
                         </a:rPr>
                         <a:t>+0.36</a:t>
                       </a:r>
@@ -9687,7 +9687,7 @@
                     <a:p>
                       <a:pPr algn="ctr" marL="19050" marR="19050">
                         <a:lnSpc>
-                          <a:spcPct val="110000"/>
+                          <a:spcPct val="100000"/>
                         </a:lnSpc>
                         <a:spcBef>
                           <a:spcPts val="150"/>
@@ -9704,10 +9704,10 @@
                               <a:alpha val="100000"/>
                             </a:srgbClr>
                           </a:solidFill>
-                          <a:latin typeface="Arial"/>
-                          <a:cs typeface="Arial"/>
-                          <a:ea typeface="Arial"/>
-                          <a:sym typeface="Arial"/>
+                          <a:latin typeface="Malgun Gothic"/>
+                          <a:cs typeface="Malgun Gothic"/>
+                          <a:ea typeface="Malgun Gothic"/>
+                          <a:sym typeface="Malgun Gothic"/>
                         </a:rPr>
                         <a:t>+0.5sig</a:t>
                       </a:r>
@@ -9752,7 +9752,7 @@
                     <a:p>
                       <a:pPr algn="ctr" marL="19050" marR="19050">
                         <a:lnSpc>
-                          <a:spcPct val="110000"/>
+                          <a:spcPct val="100000"/>
                         </a:lnSpc>
                         <a:spcBef>
                           <a:spcPts val="150"/>
@@ -9769,10 +9769,10 @@
                               <a:alpha val="100000"/>
                             </a:srgbClr>
                           </a:solidFill>
-                          <a:latin typeface="Arial"/>
-                          <a:cs typeface="Arial"/>
-                          <a:ea typeface="Arial"/>
-                          <a:sym typeface="Arial"/>
+                          <a:latin typeface="Malgun Gothic"/>
+                          <a:cs typeface="Malgun Gothic"/>
+                          <a:ea typeface="Malgun Gothic"/>
+                          <a:sym typeface="Malgun Gothic"/>
                         </a:rPr>
                         <a:t>⬤ Stable</a:t>
                       </a:r>
@@ -9821,7 +9821,7 @@
                     <a:p>
                       <a:pPr algn="l" marL="19050" marR="19050">
                         <a:lnSpc>
-                          <a:spcPct val="110000"/>
+                          <a:spcPct val="100000"/>
                         </a:lnSpc>
                         <a:spcBef>
                           <a:spcPts val="150"/>
@@ -9838,10 +9838,10 @@
                               <a:alpha val="100000"/>
                             </a:srgbClr>
                           </a:solidFill>
-                          <a:latin typeface="Arial"/>
-                          <a:cs typeface="Arial"/>
-                          <a:ea typeface="Arial"/>
-                          <a:sym typeface="Arial"/>
+                          <a:latin typeface="Malgun Gothic"/>
+                          <a:cs typeface="Malgun Gothic"/>
+                          <a:ea typeface="Malgun Gothic"/>
+                          <a:sym typeface="Malgun Gothic"/>
                         </a:rPr>
                         <a:t> </a:t>
                       </a:r>
@@ -9894,7 +9894,7 @@
                     <a:p>
                       <a:pPr algn="l" marL="19050" marR="19050">
                         <a:lnSpc>
-                          <a:spcPct val="110000"/>
+                          <a:spcPct val="100000"/>
                         </a:lnSpc>
                         <a:spcBef>
                           <a:spcPts val="150"/>
@@ -9911,10 +9911,10 @@
                               <a:alpha val="100000"/>
                             </a:srgbClr>
                           </a:solidFill>
-                          <a:latin typeface="Arial"/>
-                          <a:cs typeface="Arial"/>
-                          <a:ea typeface="Arial"/>
-                          <a:sym typeface="Arial"/>
+                          <a:latin typeface="Malgun Gothic"/>
+                          <a:cs typeface="Malgun Gothic"/>
+                          <a:ea typeface="Malgun Gothic"/>
+                          <a:sym typeface="Malgun Gothic"/>
                         </a:rPr>
                         <a:t> </a:t>
                       </a:r>
@@ -9965,7 +9965,7 @@
                     <a:p>
                       <a:pPr algn="ctr" marL="19050" marR="19050">
                         <a:lnSpc>
-                          <a:spcPct val="110000"/>
+                          <a:spcPct val="100000"/>
                         </a:lnSpc>
                         <a:spcBef>
                           <a:spcPts val="150"/>
@@ -9982,10 +9982,10 @@
                               <a:alpha val="100000"/>
                             </a:srgbClr>
                           </a:solidFill>
-                          <a:latin typeface="Arial"/>
-                          <a:cs typeface="Arial"/>
-                          <a:ea typeface="Arial"/>
-                          <a:sym typeface="Arial"/>
+                          <a:latin typeface="Malgun Gothic"/>
+                          <a:cs typeface="Malgun Gothic"/>
+                          <a:ea typeface="Malgun Gothic"/>
+                          <a:sym typeface="Malgun Gothic"/>
                         </a:rPr>
                         <a:t>CELL</a:t>
                       </a:r>
@@ -10030,7 +10030,7 @@
                     <a:p>
                       <a:pPr algn="ctr" marL="19050" marR="19050">
                         <a:lnSpc>
-                          <a:spcPct val="110000"/>
+                          <a:spcPct val="100000"/>
                         </a:lnSpc>
                         <a:spcBef>
                           <a:spcPts val="150"/>
@@ -10047,10 +10047,10 @@
                               <a:alpha val="100000"/>
                             </a:srgbClr>
                           </a:solidFill>
-                          <a:latin typeface="Arial"/>
-                          <a:cs typeface="Arial"/>
-                          <a:ea typeface="Arial"/>
-                          <a:sym typeface="Arial"/>
+                          <a:latin typeface="Malgun Gothic"/>
+                          <a:cs typeface="Malgun Gothic"/>
+                          <a:ea typeface="Malgun Gothic"/>
+                          <a:sym typeface="Malgun Gothic"/>
                         </a:rPr>
                         <a:t>WLS</a:t>
                       </a:r>
@@ -10095,7 +10095,7 @@
                     <a:p>
                       <a:pPr algn="ctr" marL="19050" marR="19050">
                         <a:lnSpc>
-                          <a:spcPct val="110000"/>
+                          <a:spcPct val="100000"/>
                         </a:lnSpc>
                         <a:spcBef>
                           <a:spcPts val="150"/>
@@ -10112,10 +10112,10 @@
                               <a:alpha val="100000"/>
                             </a:srgbClr>
                           </a:solidFill>
-                          <a:latin typeface="Arial"/>
-                          <a:cs typeface="Arial"/>
-                          <a:ea typeface="Arial"/>
-                          <a:sym typeface="Arial"/>
+                          <a:latin typeface="Malgun Gothic"/>
+                          <a:cs typeface="Malgun Gothic"/>
+                          <a:ea typeface="Malgun Gothic"/>
+                          <a:sym typeface="Malgun Gothic"/>
                         </a:rPr>
                         <a:t>WLS_2</a:t>
                       </a:r>
@@ -10164,7 +10164,7 @@
                     <a:p>
                       <a:pPr algn="l" marL="19050" marR="19050">
                         <a:lnSpc>
-                          <a:spcPct val="110000"/>
+                          <a:spcPct val="100000"/>
                         </a:lnSpc>
                         <a:spcBef>
                           <a:spcPts val="150"/>
@@ -10181,10 +10181,10 @@
                               <a:alpha val="100000"/>
                             </a:srgbClr>
                           </a:solidFill>
-                          <a:latin typeface="Arial"/>
-                          <a:cs typeface="Arial"/>
-                          <a:ea typeface="Arial"/>
-                          <a:sym typeface="Arial"/>
+                          <a:latin typeface="Malgun Gothic"/>
+                          <a:cs typeface="Malgun Gothic"/>
+                          <a:ea typeface="Malgun Gothic"/>
+                          <a:sym typeface="Malgun Gothic"/>
                         </a:rPr>
                         <a:t>Cell_WLS_196</a:t>
                       </a:r>
@@ -10237,7 +10237,7 @@
                     <a:p>
                       <a:pPr algn="ctr" marL="19050" marR="19050">
                         <a:lnSpc>
-                          <a:spcPct val="110000"/>
+                          <a:spcPct val="100000"/>
                         </a:lnSpc>
                         <a:spcBef>
                           <a:spcPts val="150"/>
@@ -10254,10 +10254,10 @@
                               <a:alpha val="100000"/>
                             </a:srgbClr>
                           </a:solidFill>
-                          <a:latin typeface="Arial"/>
-                          <a:cs typeface="Arial"/>
-                          <a:ea typeface="Arial"/>
-                          <a:sym typeface="Arial"/>
+                          <a:latin typeface="Malgun Gothic"/>
+                          <a:cs typeface="Malgun Gothic"/>
+                          <a:ea typeface="Malgun Gothic"/>
+                          <a:sym typeface="Malgun Gothic"/>
                         </a:rPr>
                         <a:t>-0.00</a:t>
                       </a:r>
@@ -10306,7 +10306,7 @@
                     <a:p>
                       <a:pPr algn="ctr" marL="19050" marR="19050">
                         <a:lnSpc>
-                          <a:spcPct val="110000"/>
+                          <a:spcPct val="100000"/>
                         </a:lnSpc>
                         <a:spcBef>
                           <a:spcPts val="150"/>
@@ -10323,10 +10323,10 @@
                               <a:alpha val="100000"/>
                             </a:srgbClr>
                           </a:solidFill>
-                          <a:latin typeface="Arial"/>
-                          <a:cs typeface="Arial"/>
-                          <a:ea typeface="Arial"/>
-                          <a:sym typeface="Arial"/>
+                          <a:latin typeface="Malgun Gothic"/>
+                          <a:cs typeface="Malgun Gothic"/>
+                          <a:ea typeface="Malgun Gothic"/>
+                          <a:sym typeface="Malgun Gothic"/>
                         </a:rPr>
                         <a:t>0.35</a:t>
                       </a:r>
@@ -10375,7 +10375,7 @@
                     <a:p>
                       <a:pPr algn="ctr" marL="19050" marR="19050">
                         <a:lnSpc>
-                          <a:spcPct val="110000"/>
+                          <a:spcPct val="100000"/>
                         </a:lnSpc>
                         <a:spcBef>
                           <a:spcPts val="150"/>
@@ -10392,10 +10392,10 @@
                               <a:alpha val="100000"/>
                             </a:srgbClr>
                           </a:solidFill>
-                          <a:latin typeface="Arial"/>
-                          <a:cs typeface="Arial"/>
-                          <a:ea typeface="Arial"/>
-                          <a:sym typeface="Arial"/>
+                          <a:latin typeface="Malgun Gothic"/>
+                          <a:cs typeface="Malgun Gothic"/>
+                          <a:ea typeface="Malgun Gothic"/>
+                          <a:sym typeface="Malgun Gothic"/>
                         </a:rPr>
                         <a:t>+0.35</a:t>
                       </a:r>
@@ -10444,7 +10444,7 @@
                     <a:p>
                       <a:pPr algn="ctr" marL="19050" marR="19050">
                         <a:lnSpc>
-                          <a:spcPct val="110000"/>
+                          <a:spcPct val="100000"/>
                         </a:lnSpc>
                         <a:spcBef>
                           <a:spcPts val="150"/>
@@ -10461,10 +10461,10 @@
                               <a:alpha val="100000"/>
                             </a:srgbClr>
                           </a:solidFill>
-                          <a:latin typeface="Arial"/>
-                          <a:cs typeface="Arial"/>
-                          <a:ea typeface="Arial"/>
-                          <a:sym typeface="Arial"/>
+                          <a:latin typeface="Malgun Gothic"/>
+                          <a:cs typeface="Malgun Gothic"/>
+                          <a:ea typeface="Malgun Gothic"/>
+                          <a:sym typeface="Malgun Gothic"/>
                         </a:rPr>
                         <a:t>+0.5sig</a:t>
                       </a:r>
@@ -10509,7 +10509,7 @@
                     <a:p>
                       <a:pPr algn="ctr" marL="19050" marR="19050">
                         <a:lnSpc>
-                          <a:spcPct val="110000"/>
+                          <a:spcPct val="100000"/>
                         </a:lnSpc>
                         <a:spcBef>
                           <a:spcPts val="150"/>
@@ -10526,10 +10526,10 @@
                               <a:alpha val="100000"/>
                             </a:srgbClr>
                           </a:solidFill>
-                          <a:latin typeface="Arial"/>
-                          <a:cs typeface="Arial"/>
-                          <a:ea typeface="Arial"/>
-                          <a:sym typeface="Arial"/>
+                          <a:latin typeface="Malgun Gothic"/>
+                          <a:cs typeface="Malgun Gothic"/>
+                          <a:ea typeface="Malgun Gothic"/>
+                          <a:sym typeface="Malgun Gothic"/>
                         </a:rPr>
                         <a:t>⬤ Up</a:t>
                       </a:r>
@@ -10578,7 +10578,7 @@
                     <a:p>
                       <a:pPr algn="l" marL="19050" marR="19050">
                         <a:lnSpc>
-                          <a:spcPct val="110000"/>
+                          <a:spcPct val="100000"/>
                         </a:lnSpc>
                         <a:spcBef>
                           <a:spcPts val="150"/>
@@ -10595,10 +10595,10 @@
                               <a:alpha val="100000"/>
                             </a:srgbClr>
                           </a:solidFill>
-                          <a:latin typeface="Arial"/>
-                          <a:cs typeface="Arial"/>
-                          <a:ea typeface="Arial"/>
-                          <a:sym typeface="Arial"/>
+                          <a:latin typeface="Malgun Gothic"/>
+                          <a:cs typeface="Malgun Gothic"/>
+                          <a:ea typeface="Malgun Gothic"/>
+                          <a:sym typeface="Malgun Gothic"/>
                         </a:rPr>
                         <a:t> </a:t>
                       </a:r>
@@ -10651,7 +10651,7 @@
                     <a:p>
                       <a:pPr algn="l" marL="19050" marR="19050">
                         <a:lnSpc>
-                          <a:spcPct val="110000"/>
+                          <a:spcPct val="100000"/>
                         </a:lnSpc>
                         <a:spcBef>
                           <a:spcPts val="150"/>
@@ -10668,10 +10668,10 @@
                               <a:alpha val="100000"/>
                             </a:srgbClr>
                           </a:solidFill>
-                          <a:latin typeface="Arial"/>
-                          <a:cs typeface="Arial"/>
-                          <a:ea typeface="Arial"/>
-                          <a:sym typeface="Arial"/>
+                          <a:latin typeface="Malgun Gothic"/>
+                          <a:cs typeface="Malgun Gothic"/>
+                          <a:ea typeface="Malgun Gothic"/>
+                          <a:sym typeface="Malgun Gothic"/>
                         </a:rPr>
                         <a:t> </a:t>
                       </a:r>
@@ -10722,7 +10722,7 @@
                     <a:p>
                       <a:pPr algn="ctr" marL="19050" marR="19050">
                         <a:lnSpc>
-                          <a:spcPct val="110000"/>
+                          <a:spcPct val="100000"/>
                         </a:lnSpc>
                         <a:spcBef>
                           <a:spcPts val="150"/>
@@ -10739,10 +10739,10 @@
                               <a:alpha val="100000"/>
                             </a:srgbClr>
                           </a:solidFill>
-                          <a:latin typeface="Arial"/>
-                          <a:cs typeface="Arial"/>
-                          <a:ea typeface="Arial"/>
-                          <a:sym typeface="Arial"/>
+                          <a:latin typeface="Malgun Gothic"/>
+                          <a:cs typeface="Malgun Gothic"/>
+                          <a:ea typeface="Malgun Gothic"/>
+                          <a:sym typeface="Malgun Gothic"/>
                         </a:rPr>
                         <a:t>CELL</a:t>
                       </a:r>
@@ -10787,7 +10787,7 @@
                     <a:p>
                       <a:pPr algn="ctr" marL="19050" marR="19050">
                         <a:lnSpc>
-                          <a:spcPct val="110000"/>
+                          <a:spcPct val="100000"/>
                         </a:lnSpc>
                         <a:spcBef>
                           <a:spcPts val="150"/>
@@ -10804,10 +10804,10 @@
                               <a:alpha val="100000"/>
                             </a:srgbClr>
                           </a:solidFill>
-                          <a:latin typeface="Arial"/>
-                          <a:cs typeface="Arial"/>
-                          <a:ea typeface="Arial"/>
-                          <a:sym typeface="Arial"/>
+                          <a:latin typeface="Malgun Gothic"/>
+                          <a:cs typeface="Malgun Gothic"/>
+                          <a:ea typeface="Malgun Gothic"/>
+                          <a:sym typeface="Malgun Gothic"/>
                         </a:rPr>
                         <a:t>TCMC</a:t>
                       </a:r>
@@ -10852,7 +10852,7 @@
                     <a:p>
                       <a:pPr algn="ctr" marL="19050" marR="19050">
                         <a:lnSpc>
-                          <a:spcPct val="110000"/>
+                          <a:spcPct val="100000"/>
                         </a:lnSpc>
                         <a:spcBef>
                           <a:spcPts val="150"/>
@@ -10869,10 +10869,10 @@
                               <a:alpha val="100000"/>
                             </a:srgbClr>
                           </a:solidFill>
-                          <a:latin typeface="Arial"/>
-                          <a:cs typeface="Arial"/>
-                          <a:ea typeface="Arial"/>
-                          <a:sym typeface="Arial"/>
+                          <a:latin typeface="Malgun Gothic"/>
+                          <a:cs typeface="Malgun Gothic"/>
+                          <a:ea typeface="Malgun Gothic"/>
+                          <a:sym typeface="Malgun Gothic"/>
                         </a:rPr>
                         <a:t>TCMC_1</a:t>
                       </a:r>
@@ -10921,7 +10921,7 @@
                     <a:p>
                       <a:pPr algn="l" marL="19050" marR="19050">
                         <a:lnSpc>
-                          <a:spcPct val="110000"/>
+                          <a:spcPct val="100000"/>
                         </a:lnSpc>
                         <a:spcBef>
                           <a:spcPts val="150"/>
@@ -10938,10 +10938,10 @@
                               <a:alpha val="100000"/>
                             </a:srgbClr>
                           </a:solidFill>
-                          <a:latin typeface="Arial"/>
-                          <a:cs typeface="Arial"/>
-                          <a:ea typeface="Arial"/>
-                          <a:sym typeface="Arial"/>
+                          <a:latin typeface="Malgun Gothic"/>
+                          <a:cs typeface="Malgun Gothic"/>
+                          <a:ea typeface="Malgun Gothic"/>
+                          <a:sym typeface="Malgun Gothic"/>
                         </a:rPr>
                         <a:t>Cell_TCMC_207</a:t>
                       </a:r>
@@ -10994,7 +10994,7 @@
                     <a:p>
                       <a:pPr algn="ctr" marL="19050" marR="19050">
                         <a:lnSpc>
-                          <a:spcPct val="110000"/>
+                          <a:spcPct val="100000"/>
                         </a:lnSpc>
                         <a:spcBef>
                           <a:spcPts val="150"/>
@@ -11011,10 +11011,10 @@
                               <a:alpha val="100000"/>
                             </a:srgbClr>
                           </a:solidFill>
-                          <a:latin typeface="Arial"/>
-                          <a:cs typeface="Arial"/>
-                          <a:ea typeface="Arial"/>
-                          <a:sym typeface="Arial"/>
+                          <a:latin typeface="Malgun Gothic"/>
+                          <a:cs typeface="Malgun Gothic"/>
+                          <a:ea typeface="Malgun Gothic"/>
+                          <a:sym typeface="Malgun Gothic"/>
                         </a:rPr>
                         <a:t>0.00</a:t>
                       </a:r>
@@ -11063,7 +11063,7 @@
                     <a:p>
                       <a:pPr algn="ctr" marL="19050" marR="19050">
                         <a:lnSpc>
-                          <a:spcPct val="110000"/>
+                          <a:spcPct val="100000"/>
                         </a:lnSpc>
                         <a:spcBef>
                           <a:spcPts val="150"/>
@@ -11080,10 +11080,10 @@
                               <a:alpha val="100000"/>
                             </a:srgbClr>
                           </a:solidFill>
-                          <a:latin typeface="Arial"/>
-                          <a:cs typeface="Arial"/>
-                          <a:ea typeface="Arial"/>
-                          <a:sym typeface="Arial"/>
+                          <a:latin typeface="Malgun Gothic"/>
+                          <a:cs typeface="Malgun Gothic"/>
+                          <a:ea typeface="Malgun Gothic"/>
+                          <a:sym typeface="Malgun Gothic"/>
                         </a:rPr>
                         <a:t>0.35</a:t>
                       </a:r>
@@ -11132,7 +11132,7 @@
                     <a:p>
                       <a:pPr algn="ctr" marL="19050" marR="19050">
                         <a:lnSpc>
-                          <a:spcPct val="110000"/>
+                          <a:spcPct val="100000"/>
                         </a:lnSpc>
                         <a:spcBef>
                           <a:spcPts val="150"/>
@@ -11149,10 +11149,10 @@
                               <a:alpha val="100000"/>
                             </a:srgbClr>
                           </a:solidFill>
-                          <a:latin typeface="Arial"/>
-                          <a:cs typeface="Arial"/>
-                          <a:ea typeface="Arial"/>
-                          <a:sym typeface="Arial"/>
+                          <a:latin typeface="Malgun Gothic"/>
+                          <a:cs typeface="Malgun Gothic"/>
+                          <a:ea typeface="Malgun Gothic"/>
+                          <a:sym typeface="Malgun Gothic"/>
                         </a:rPr>
                         <a:t>+0.35</a:t>
                       </a:r>
@@ -11201,7 +11201,7 @@
                     <a:p>
                       <a:pPr algn="ctr" marL="19050" marR="19050">
                         <a:lnSpc>
-                          <a:spcPct val="110000"/>
+                          <a:spcPct val="100000"/>
                         </a:lnSpc>
                         <a:spcBef>
                           <a:spcPts val="150"/>
@@ -11218,10 +11218,10 @@
                               <a:alpha val="100000"/>
                             </a:srgbClr>
                           </a:solidFill>
-                          <a:latin typeface="Arial"/>
-                          <a:cs typeface="Arial"/>
-                          <a:ea typeface="Arial"/>
-                          <a:sym typeface="Arial"/>
+                          <a:latin typeface="Malgun Gothic"/>
+                          <a:cs typeface="Malgun Gothic"/>
+                          <a:ea typeface="Malgun Gothic"/>
+                          <a:sym typeface="Malgun Gothic"/>
                         </a:rPr>
                         <a:t>+0.7sig</a:t>
                       </a:r>
@@ -11266,7 +11266,7 @@
                     <a:p>
                       <a:pPr algn="ctr" marL="19050" marR="19050">
                         <a:lnSpc>
-                          <a:spcPct val="110000"/>
+                          <a:spcPct val="100000"/>
                         </a:lnSpc>
                         <a:spcBef>
                           <a:spcPts val="150"/>
@@ -11283,10 +11283,10 @@
                               <a:alpha val="100000"/>
                             </a:srgbClr>
                           </a:solidFill>
-                          <a:latin typeface="Arial"/>
-                          <a:cs typeface="Arial"/>
-                          <a:ea typeface="Arial"/>
-                          <a:sym typeface="Arial"/>
+                          <a:latin typeface="Malgun Gothic"/>
+                          <a:cs typeface="Malgun Gothic"/>
+                          <a:ea typeface="Malgun Gothic"/>
+                          <a:sym typeface="Malgun Gothic"/>
                         </a:rPr>
                         <a:t>⬤ Up</a:t>
                       </a:r>
@@ -11335,7 +11335,7 @@
                     <a:p>
                       <a:pPr algn="l" marL="19050" marR="19050">
                         <a:lnSpc>
-                          <a:spcPct val="110000"/>
+                          <a:spcPct val="100000"/>
                         </a:lnSpc>
                         <a:spcBef>
                           <a:spcPts val="150"/>
@@ -11352,10 +11352,10 @@
                               <a:alpha val="100000"/>
                             </a:srgbClr>
                           </a:solidFill>
-                          <a:latin typeface="Arial"/>
-                          <a:cs typeface="Arial"/>
-                          <a:ea typeface="Arial"/>
-                          <a:sym typeface="Arial"/>
+                          <a:latin typeface="Malgun Gothic"/>
+                          <a:cs typeface="Malgun Gothic"/>
+                          <a:ea typeface="Malgun Gothic"/>
+                          <a:sym typeface="Malgun Gothic"/>
                         </a:rPr>
                         <a:t> </a:t>
                       </a:r>
@@ -11408,7 +11408,7 @@
                     <a:p>
                       <a:pPr algn="l" marL="19050" marR="19050">
                         <a:lnSpc>
-                          <a:spcPct val="110000"/>
+                          <a:spcPct val="100000"/>
                         </a:lnSpc>
                         <a:spcBef>
                           <a:spcPts val="150"/>
@@ -11425,10 +11425,10 @@
                               <a:alpha val="100000"/>
                             </a:srgbClr>
                           </a:solidFill>
-                          <a:latin typeface="Arial"/>
-                          <a:cs typeface="Arial"/>
-                          <a:ea typeface="Arial"/>
-                          <a:sym typeface="Arial"/>
+                          <a:latin typeface="Malgun Gothic"/>
+                          <a:cs typeface="Malgun Gothic"/>
+                          <a:ea typeface="Malgun Gothic"/>
+                          <a:sym typeface="Malgun Gothic"/>
                         </a:rPr>
                         <a:t> </a:t>
                       </a:r>
@@ -11479,7 +11479,7 @@
                     <a:p>
                       <a:pPr algn="ctr" marL="19050" marR="19050">
                         <a:lnSpc>
-                          <a:spcPct val="110000"/>
+                          <a:spcPct val="100000"/>
                         </a:lnSpc>
                         <a:spcBef>
                           <a:spcPts val="150"/>
@@ -11496,10 +11496,10 @@
                               <a:alpha val="100000"/>
                             </a:srgbClr>
                           </a:solidFill>
-                          <a:latin typeface="Arial"/>
-                          <a:cs typeface="Arial"/>
-                          <a:ea typeface="Arial"/>
-                          <a:sym typeface="Arial"/>
+                          <a:latin typeface="Malgun Gothic"/>
+                          <a:cs typeface="Malgun Gothic"/>
+                          <a:ea typeface="Malgun Gothic"/>
+                          <a:sym typeface="Malgun Gothic"/>
                         </a:rPr>
                         <a:t>CELL</a:t>
                       </a:r>
@@ -11544,7 +11544,7 @@
                     <a:p>
                       <a:pPr algn="ctr" marL="19050" marR="19050">
                         <a:lnSpc>
-                          <a:spcPct val="110000"/>
+                          <a:spcPct val="100000"/>
                         </a:lnSpc>
                         <a:spcBef>
                           <a:spcPts val="150"/>
@@ -11561,10 +11561,10 @@
                               <a:alpha val="100000"/>
                             </a:srgbClr>
                           </a:solidFill>
-                          <a:latin typeface="Arial"/>
-                          <a:cs typeface="Arial"/>
-                          <a:ea typeface="Arial"/>
-                          <a:sym typeface="Arial"/>
+                          <a:latin typeface="Malgun Gothic"/>
+                          <a:cs typeface="Malgun Gothic"/>
+                          <a:ea typeface="Malgun Gothic"/>
+                          <a:sym typeface="Malgun Gothic"/>
                         </a:rPr>
                         <a:t>TCMC</a:t>
                       </a:r>
@@ -11609,7 +11609,7 @@
                     <a:p>
                       <a:pPr algn="ctr" marL="19050" marR="19050">
                         <a:lnSpc>
-                          <a:spcPct val="110000"/>
+                          <a:spcPct val="100000"/>
                         </a:lnSpc>
                         <a:spcBef>
                           <a:spcPts val="150"/>
@@ -11626,10 +11626,10 @@
                               <a:alpha val="100000"/>
                             </a:srgbClr>
                           </a:solidFill>
-                          <a:latin typeface="Arial"/>
-                          <a:cs typeface="Arial"/>
-                          <a:ea typeface="Arial"/>
-                          <a:sym typeface="Arial"/>
+                          <a:latin typeface="Malgun Gothic"/>
+                          <a:cs typeface="Malgun Gothic"/>
+                          <a:ea typeface="Malgun Gothic"/>
+                          <a:sym typeface="Malgun Gothic"/>
                         </a:rPr>
                         <a:t>TCMC_2</a:t>
                       </a:r>
@@ -11678,7 +11678,7 @@
                     <a:p>
                       <a:pPr algn="l" marL="19050" marR="19050">
                         <a:lnSpc>
-                          <a:spcPct val="110000"/>
+                          <a:spcPct val="100000"/>
                         </a:lnSpc>
                         <a:spcBef>
                           <a:spcPts val="150"/>
@@ -11695,10 +11695,10 @@
                               <a:alpha val="100000"/>
                             </a:srgbClr>
                           </a:solidFill>
-                          <a:latin typeface="Arial"/>
-                          <a:cs typeface="Arial"/>
-                          <a:ea typeface="Arial"/>
-                          <a:sym typeface="Arial"/>
+                          <a:latin typeface="Malgun Gothic"/>
+                          <a:cs typeface="Malgun Gothic"/>
+                          <a:ea typeface="Malgun Gothic"/>
+                          <a:sym typeface="Malgun Gothic"/>
                         </a:rPr>
                         <a:t>Cell_TCMC_234</a:t>
                       </a:r>
@@ -11751,7 +11751,7 @@
                     <a:p>
                       <a:pPr algn="ctr" marL="19050" marR="19050">
                         <a:lnSpc>
-                          <a:spcPct val="110000"/>
+                          <a:spcPct val="100000"/>
                         </a:lnSpc>
                         <a:spcBef>
                           <a:spcPts val="150"/>
@@ -11768,10 +11768,10 @@
                               <a:alpha val="100000"/>
                             </a:srgbClr>
                           </a:solidFill>
-                          <a:latin typeface="Arial"/>
-                          <a:cs typeface="Arial"/>
-                          <a:ea typeface="Arial"/>
-                          <a:sym typeface="Arial"/>
+                          <a:latin typeface="Malgun Gothic"/>
+                          <a:cs typeface="Malgun Gothic"/>
+                          <a:ea typeface="Malgun Gothic"/>
+                          <a:sym typeface="Malgun Gothic"/>
                         </a:rPr>
                         <a:t>0.00</a:t>
                       </a:r>
@@ -11820,7 +11820,7 @@
                     <a:p>
                       <a:pPr algn="ctr" marL="19050" marR="19050">
                         <a:lnSpc>
-                          <a:spcPct val="110000"/>
+                          <a:spcPct val="100000"/>
                         </a:lnSpc>
                         <a:spcBef>
                           <a:spcPts val="150"/>
@@ -11837,10 +11837,10 @@
                               <a:alpha val="100000"/>
                             </a:srgbClr>
                           </a:solidFill>
-                          <a:latin typeface="Arial"/>
-                          <a:cs typeface="Arial"/>
-                          <a:ea typeface="Arial"/>
-                          <a:sym typeface="Arial"/>
+                          <a:latin typeface="Malgun Gothic"/>
+                          <a:cs typeface="Malgun Gothic"/>
+                          <a:ea typeface="Malgun Gothic"/>
+                          <a:sym typeface="Malgun Gothic"/>
                         </a:rPr>
                         <a:t>0.35</a:t>
                       </a:r>
@@ -11889,7 +11889,7 @@
                     <a:p>
                       <a:pPr algn="ctr" marL="19050" marR="19050">
                         <a:lnSpc>
-                          <a:spcPct val="110000"/>
+                          <a:spcPct val="100000"/>
                         </a:lnSpc>
                         <a:spcBef>
                           <a:spcPts val="150"/>
@@ -11906,10 +11906,10 @@
                               <a:alpha val="100000"/>
                             </a:srgbClr>
                           </a:solidFill>
-                          <a:latin typeface="Arial"/>
-                          <a:cs typeface="Arial"/>
-                          <a:ea typeface="Arial"/>
-                          <a:sym typeface="Arial"/>
+                          <a:latin typeface="Malgun Gothic"/>
+                          <a:cs typeface="Malgun Gothic"/>
+                          <a:ea typeface="Malgun Gothic"/>
+                          <a:sym typeface="Malgun Gothic"/>
                         </a:rPr>
                         <a:t>+0.35</a:t>
                       </a:r>
@@ -11958,7 +11958,7 @@
                     <a:p>
                       <a:pPr algn="ctr" marL="19050" marR="19050">
                         <a:lnSpc>
-                          <a:spcPct val="110000"/>
+                          <a:spcPct val="100000"/>
                         </a:lnSpc>
                         <a:spcBef>
                           <a:spcPts val="150"/>
@@ -11975,10 +11975,10 @@
                               <a:alpha val="100000"/>
                             </a:srgbClr>
                           </a:solidFill>
-                          <a:latin typeface="Arial"/>
-                          <a:cs typeface="Arial"/>
-                          <a:ea typeface="Arial"/>
-                          <a:sym typeface="Arial"/>
+                          <a:latin typeface="Malgun Gothic"/>
+                          <a:cs typeface="Malgun Gothic"/>
+                          <a:ea typeface="Malgun Gothic"/>
+                          <a:sym typeface="Malgun Gothic"/>
                         </a:rPr>
                         <a:t>+0.7sig</a:t>
                       </a:r>
@@ -12023,7 +12023,7 @@
                     <a:p>
                       <a:pPr algn="ctr" marL="19050" marR="19050">
                         <a:lnSpc>
-                          <a:spcPct val="110000"/>
+                          <a:spcPct val="100000"/>
                         </a:lnSpc>
                         <a:spcBef>
                           <a:spcPts val="150"/>
@@ -12040,10 +12040,10 @@
                               <a:alpha val="100000"/>
                             </a:srgbClr>
                           </a:solidFill>
-                          <a:latin typeface="Arial"/>
-                          <a:cs typeface="Arial"/>
-                          <a:ea typeface="Arial"/>
-                          <a:sym typeface="Arial"/>
+                          <a:latin typeface="Malgun Gothic"/>
+                          <a:cs typeface="Malgun Gothic"/>
+                          <a:ea typeface="Malgun Gothic"/>
+                          <a:sym typeface="Malgun Gothic"/>
                         </a:rPr>
                         <a:t>⬤ Up</a:t>
                       </a:r>
@@ -12092,7 +12092,7 @@
                     <a:p>
                       <a:pPr algn="l" marL="19050" marR="19050">
                         <a:lnSpc>
-                          <a:spcPct val="110000"/>
+                          <a:spcPct val="100000"/>
                         </a:lnSpc>
                         <a:spcBef>
                           <a:spcPts val="150"/>
@@ -12109,10 +12109,10 @@
                               <a:alpha val="100000"/>
                             </a:srgbClr>
                           </a:solidFill>
-                          <a:latin typeface="Arial"/>
-                          <a:cs typeface="Arial"/>
-                          <a:ea typeface="Arial"/>
-                          <a:sym typeface="Arial"/>
+                          <a:latin typeface="Malgun Gothic"/>
+                          <a:cs typeface="Malgun Gothic"/>
+                          <a:ea typeface="Malgun Gothic"/>
+                          <a:sym typeface="Malgun Gothic"/>
                         </a:rPr>
                         <a:t> </a:t>
                       </a:r>
@@ -12165,7 +12165,7 @@
                     <a:p>
                       <a:pPr algn="l" marL="19050" marR="19050">
                         <a:lnSpc>
-                          <a:spcPct val="110000"/>
+                          <a:spcPct val="100000"/>
                         </a:lnSpc>
                         <a:spcBef>
                           <a:spcPts val="150"/>
@@ -12182,10 +12182,10 @@
                               <a:alpha val="100000"/>
                             </a:srgbClr>
                           </a:solidFill>
-                          <a:latin typeface="Arial"/>
-                          <a:cs typeface="Arial"/>
-                          <a:ea typeface="Arial"/>
-                          <a:sym typeface="Arial"/>
+                          <a:latin typeface="Malgun Gothic"/>
+                          <a:cs typeface="Malgun Gothic"/>
+                          <a:ea typeface="Malgun Gothic"/>
+                          <a:sym typeface="Malgun Gothic"/>
                         </a:rPr>
                         <a:t> </a:t>
                       </a:r>
@@ -12236,7 +12236,7 @@
                     <a:p>
                       <a:pPr algn="ctr" marL="19050" marR="19050">
                         <a:lnSpc>
-                          <a:spcPct val="110000"/>
+                          <a:spcPct val="100000"/>
                         </a:lnSpc>
                         <a:spcBef>
                           <a:spcPts val="150"/>
@@ -12253,10 +12253,10 @@
                               <a:alpha val="100000"/>
                             </a:srgbClr>
                           </a:solidFill>
-                          <a:latin typeface="Arial"/>
-                          <a:cs typeface="Arial"/>
-                          <a:ea typeface="Arial"/>
-                          <a:sym typeface="Arial"/>
+                          <a:latin typeface="Malgun Gothic"/>
+                          <a:cs typeface="Malgun Gothic"/>
+                          <a:ea typeface="Malgun Gothic"/>
+                          <a:sym typeface="Malgun Gothic"/>
                         </a:rPr>
                         <a:t>CELL</a:t>
                       </a:r>
@@ -12301,7 +12301,7 @@
                     <a:p>
                       <a:pPr algn="ctr" marL="19050" marR="19050">
                         <a:lnSpc>
-                          <a:spcPct val="110000"/>
+                          <a:spcPct val="100000"/>
                         </a:lnSpc>
                         <a:spcBef>
                           <a:spcPts val="150"/>
@@ -12318,10 +12318,10 @@
                               <a:alpha val="100000"/>
                             </a:srgbClr>
                           </a:solidFill>
-                          <a:latin typeface="Arial"/>
-                          <a:cs typeface="Arial"/>
-                          <a:ea typeface="Arial"/>
-                          <a:sym typeface="Arial"/>
+                          <a:latin typeface="Malgun Gothic"/>
+                          <a:cs typeface="Malgun Gothic"/>
+                          <a:ea typeface="Malgun Gothic"/>
+                          <a:sym typeface="Malgun Gothic"/>
                         </a:rPr>
                         <a:t>WTC</a:t>
                       </a:r>
@@ -12366,7 +12366,7 @@
                     <a:p>
                       <a:pPr algn="ctr" marL="19050" marR="19050">
                         <a:lnSpc>
-                          <a:spcPct val="110000"/>
+                          <a:spcPct val="100000"/>
                         </a:lnSpc>
                         <a:spcBef>
                           <a:spcPts val="150"/>
@@ -12383,10 +12383,10 @@
                               <a:alpha val="100000"/>
                             </a:srgbClr>
                           </a:solidFill>
-                          <a:latin typeface="Arial"/>
-                          <a:cs typeface="Arial"/>
-                          <a:ea typeface="Arial"/>
-                          <a:sym typeface="Arial"/>
+                          <a:latin typeface="Malgun Gothic"/>
+                          <a:cs typeface="Malgun Gothic"/>
+                          <a:ea typeface="Malgun Gothic"/>
+                          <a:sym typeface="Malgun Gothic"/>
                         </a:rPr>
                         <a:t>WTC_1</a:t>
                       </a:r>
@@ -12435,7 +12435,7 @@
                     <a:p>
                       <a:pPr algn="l" marL="19050" marR="19050">
                         <a:lnSpc>
-                          <a:spcPct val="110000"/>
+                          <a:spcPct val="100000"/>
                         </a:lnSpc>
                         <a:spcBef>
                           <a:spcPts val="150"/>
@@ -12452,10 +12452,10 @@
                               <a:alpha val="100000"/>
                             </a:srgbClr>
                           </a:solidFill>
-                          <a:latin typeface="Arial"/>
-                          <a:cs typeface="Arial"/>
-                          <a:ea typeface="Arial"/>
-                          <a:sym typeface="Arial"/>
+                          <a:latin typeface="Malgun Gothic"/>
+                          <a:cs typeface="Malgun Gothic"/>
+                          <a:ea typeface="Malgun Gothic"/>
+                          <a:sym typeface="Malgun Gothic"/>
                         </a:rPr>
                         <a:t>Cell_WTC_259</a:t>
                       </a:r>
@@ -12508,7 +12508,7 @@
                     <a:p>
                       <a:pPr algn="ctr" marL="19050" marR="19050">
                         <a:lnSpc>
-                          <a:spcPct val="110000"/>
+                          <a:spcPct val="100000"/>
                         </a:lnSpc>
                         <a:spcBef>
                           <a:spcPts val="150"/>
@@ -12525,10 +12525,10 @@
                               <a:alpha val="100000"/>
                             </a:srgbClr>
                           </a:solidFill>
-                          <a:latin typeface="Arial"/>
-                          <a:cs typeface="Arial"/>
-                          <a:ea typeface="Arial"/>
-                          <a:sym typeface="Arial"/>
+                          <a:latin typeface="Malgun Gothic"/>
+                          <a:cs typeface="Malgun Gothic"/>
+                          <a:ea typeface="Malgun Gothic"/>
+                          <a:sym typeface="Malgun Gothic"/>
                         </a:rPr>
                         <a:t>0.00</a:t>
                       </a:r>
@@ -12577,7 +12577,7 @@
                     <a:p>
                       <a:pPr algn="ctr" marL="19050" marR="19050">
                         <a:lnSpc>
-                          <a:spcPct val="110000"/>
+                          <a:spcPct val="100000"/>
                         </a:lnSpc>
                         <a:spcBef>
                           <a:spcPts val="150"/>
@@ -12594,10 +12594,10 @@
                               <a:alpha val="100000"/>
                             </a:srgbClr>
                           </a:solidFill>
-                          <a:latin typeface="Arial"/>
-                          <a:cs typeface="Arial"/>
-                          <a:ea typeface="Arial"/>
-                          <a:sym typeface="Arial"/>
+                          <a:latin typeface="Malgun Gothic"/>
+                          <a:cs typeface="Malgun Gothic"/>
+                          <a:ea typeface="Malgun Gothic"/>
+                          <a:sym typeface="Malgun Gothic"/>
                         </a:rPr>
                         <a:t>-0.01</a:t>
                       </a:r>
@@ -12646,7 +12646,7 @@
                     <a:p>
                       <a:pPr algn="ctr" marL="19050" marR="19050">
                         <a:lnSpc>
-                          <a:spcPct val="110000"/>
+                          <a:spcPct val="100000"/>
                         </a:lnSpc>
                         <a:spcBef>
                           <a:spcPts val="150"/>
@@ -12663,10 +12663,10 @@
                               <a:alpha val="100000"/>
                             </a:srgbClr>
                           </a:solidFill>
-                          <a:latin typeface="Arial"/>
-                          <a:cs typeface="Arial"/>
-                          <a:ea typeface="Arial"/>
-                          <a:sym typeface="Arial"/>
+                          <a:latin typeface="Malgun Gothic"/>
+                          <a:cs typeface="Malgun Gothic"/>
+                          <a:ea typeface="Malgun Gothic"/>
+                          <a:sym typeface="Malgun Gothic"/>
                         </a:rPr>
                         <a:t>-0.02</a:t>
                       </a:r>
@@ -12715,7 +12715,7 @@
                     <a:p>
                       <a:pPr algn="ctr" marL="19050" marR="19050">
                         <a:lnSpc>
-                          <a:spcPct val="110000"/>
+                          <a:spcPct val="100000"/>
                         </a:lnSpc>
                         <a:spcBef>
                           <a:spcPts val="150"/>
@@ -12732,10 +12732,10 @@
                               <a:alpha val="100000"/>
                             </a:srgbClr>
                           </a:solidFill>
-                          <a:latin typeface="Arial"/>
-                          <a:cs typeface="Arial"/>
-                          <a:ea typeface="Arial"/>
-                          <a:sym typeface="Arial"/>
+                          <a:latin typeface="Malgun Gothic"/>
+                          <a:cs typeface="Malgun Gothic"/>
+                          <a:ea typeface="Malgun Gothic"/>
+                          <a:sym typeface="Malgun Gothic"/>
                         </a:rPr>
                         <a:t>-0.0sig</a:t>
                       </a:r>
@@ -12780,7 +12780,7 @@
                     <a:p>
                       <a:pPr algn="ctr" marL="19050" marR="19050">
                         <a:lnSpc>
-                          <a:spcPct val="110000"/>
+                          <a:spcPct val="100000"/>
                         </a:lnSpc>
                         <a:spcBef>
                           <a:spcPts val="150"/>
@@ -12797,10 +12797,10 @@
                               <a:alpha val="100000"/>
                             </a:srgbClr>
                           </a:solidFill>
-                          <a:latin typeface="Arial"/>
-                          <a:cs typeface="Arial"/>
-                          <a:ea typeface="Arial"/>
-                          <a:sym typeface="Arial"/>
+                          <a:latin typeface="Malgun Gothic"/>
+                          <a:cs typeface="Malgun Gothic"/>
+                          <a:ea typeface="Malgun Gothic"/>
+                          <a:sym typeface="Malgun Gothic"/>
                         </a:rPr>
                         <a:t>⬤ Stable</a:t>
                       </a:r>
@@ -12849,7 +12849,7 @@
                     <a:p>
                       <a:pPr algn="l" marL="19050" marR="19050">
                         <a:lnSpc>
-                          <a:spcPct val="110000"/>
+                          <a:spcPct val="100000"/>
                         </a:lnSpc>
                         <a:spcBef>
                           <a:spcPts val="150"/>
@@ -12866,10 +12866,10 @@
                               <a:alpha val="100000"/>
                             </a:srgbClr>
                           </a:solidFill>
-                          <a:latin typeface="Arial"/>
-                          <a:cs typeface="Arial"/>
-                          <a:ea typeface="Arial"/>
-                          <a:sym typeface="Arial"/>
+                          <a:latin typeface="Malgun Gothic"/>
+                          <a:cs typeface="Malgun Gothic"/>
+                          <a:ea typeface="Malgun Gothic"/>
+                          <a:sym typeface="Malgun Gothic"/>
                         </a:rPr>
                         <a:t> </a:t>
                       </a:r>
@@ -12922,7 +12922,7 @@
                     <a:p>
                       <a:pPr algn="l" marL="19050" marR="19050">
                         <a:lnSpc>
-                          <a:spcPct val="110000"/>
+                          <a:spcPct val="100000"/>
                         </a:lnSpc>
                         <a:spcBef>
                           <a:spcPts val="150"/>
@@ -12939,10 +12939,10 @@
                               <a:alpha val="100000"/>
                             </a:srgbClr>
                           </a:solidFill>
-                          <a:latin typeface="Arial"/>
-                          <a:cs typeface="Arial"/>
-                          <a:ea typeface="Arial"/>
-                          <a:sym typeface="Arial"/>
+                          <a:latin typeface="Malgun Gothic"/>
+                          <a:cs typeface="Malgun Gothic"/>
+                          <a:ea typeface="Malgun Gothic"/>
+                          <a:sym typeface="Malgun Gothic"/>
                         </a:rPr>
                         <a:t> </a:t>
                       </a:r>
@@ -12993,7 +12993,7 @@
                     <a:p>
                       <a:pPr algn="ctr" marL="19050" marR="19050">
                         <a:lnSpc>
-                          <a:spcPct val="110000"/>
+                          <a:spcPct val="100000"/>
                         </a:lnSpc>
                         <a:spcBef>
                           <a:spcPts val="150"/>
@@ -13010,10 +13010,10 @@
                               <a:alpha val="100000"/>
                             </a:srgbClr>
                           </a:solidFill>
-                          <a:latin typeface="Arial"/>
-                          <a:cs typeface="Arial"/>
-                          <a:ea typeface="Arial"/>
-                          <a:sym typeface="Arial"/>
+                          <a:latin typeface="Malgun Gothic"/>
+                          <a:cs typeface="Malgun Gothic"/>
+                          <a:ea typeface="Malgun Gothic"/>
+                          <a:sym typeface="Malgun Gothic"/>
                         </a:rPr>
                         <a:t>CELL</a:t>
                       </a:r>
@@ -13058,7 +13058,7 @@
                     <a:p>
                       <a:pPr algn="ctr" marL="19050" marR="19050">
                         <a:lnSpc>
-                          <a:spcPct val="110000"/>
+                          <a:spcPct val="100000"/>
                         </a:lnSpc>
                         <a:spcBef>
                           <a:spcPts val="150"/>
@@ -13075,10 +13075,10 @@
                               <a:alpha val="100000"/>
                             </a:srgbClr>
                           </a:solidFill>
-                          <a:latin typeface="Arial"/>
-                          <a:cs typeface="Arial"/>
-                          <a:ea typeface="Arial"/>
-                          <a:sym typeface="Arial"/>
+                          <a:latin typeface="Malgun Gothic"/>
+                          <a:cs typeface="Malgun Gothic"/>
+                          <a:ea typeface="Malgun Gothic"/>
+                          <a:sym typeface="Malgun Gothic"/>
                         </a:rPr>
                         <a:t>WTC</a:t>
                       </a:r>
@@ -13123,7 +13123,7 @@
                     <a:p>
                       <a:pPr algn="ctr" marL="19050" marR="19050">
                         <a:lnSpc>
-                          <a:spcPct val="110000"/>
+                          <a:spcPct val="100000"/>
                         </a:lnSpc>
                         <a:spcBef>
                           <a:spcPts val="150"/>
@@ -13140,10 +13140,10 @@
                               <a:alpha val="100000"/>
                             </a:srgbClr>
                           </a:solidFill>
-                          <a:latin typeface="Arial"/>
-                          <a:cs typeface="Arial"/>
-                          <a:ea typeface="Arial"/>
-                          <a:sym typeface="Arial"/>
+                          <a:latin typeface="Malgun Gothic"/>
+                          <a:cs typeface="Malgun Gothic"/>
+                          <a:ea typeface="Malgun Gothic"/>
+                          <a:sym typeface="Malgun Gothic"/>
                         </a:rPr>
                         <a:t>WTC_2</a:t>
                       </a:r>
@@ -13192,7 +13192,7 @@
                     <a:p>
                       <a:pPr algn="l" marL="19050" marR="19050">
                         <a:lnSpc>
-                          <a:spcPct val="110000"/>
+                          <a:spcPct val="100000"/>
                         </a:lnSpc>
                         <a:spcBef>
                           <a:spcPts val="150"/>
@@ -13209,10 +13209,10 @@
                               <a:alpha val="100000"/>
                             </a:srgbClr>
                           </a:solidFill>
-                          <a:latin typeface="Arial"/>
-                          <a:cs typeface="Arial"/>
-                          <a:ea typeface="Arial"/>
-                          <a:sym typeface="Arial"/>
+                          <a:latin typeface="Malgun Gothic"/>
+                          <a:cs typeface="Malgun Gothic"/>
+                          <a:ea typeface="Malgun Gothic"/>
+                          <a:sym typeface="Malgun Gothic"/>
                         </a:rPr>
                         <a:t>Cell_WTC_290</a:t>
                       </a:r>
@@ -13265,7 +13265,7 @@
                     <a:p>
                       <a:pPr algn="ctr" marL="19050" marR="19050">
                         <a:lnSpc>
-                          <a:spcPct val="110000"/>
+                          <a:spcPct val="100000"/>
                         </a:lnSpc>
                         <a:spcBef>
                           <a:spcPts val="150"/>
@@ -13282,10 +13282,10 @@
                               <a:alpha val="100000"/>
                             </a:srgbClr>
                           </a:solidFill>
-                          <a:latin typeface="Arial"/>
-                          <a:cs typeface="Arial"/>
-                          <a:ea typeface="Arial"/>
-                          <a:sym typeface="Arial"/>
+                          <a:latin typeface="Malgun Gothic"/>
+                          <a:cs typeface="Malgun Gothic"/>
+                          <a:ea typeface="Malgun Gothic"/>
+                          <a:sym typeface="Malgun Gothic"/>
                         </a:rPr>
                         <a:t>0.00</a:t>
                       </a:r>
@@ -13334,7 +13334,7 @@
                     <a:p>
                       <a:pPr algn="ctr" marL="19050" marR="19050">
                         <a:lnSpc>
-                          <a:spcPct val="110000"/>
+                          <a:spcPct val="100000"/>
                         </a:lnSpc>
                         <a:spcBef>
                           <a:spcPts val="150"/>
@@ -13351,10 +13351,10 @@
                               <a:alpha val="100000"/>
                             </a:srgbClr>
                           </a:solidFill>
-                          <a:latin typeface="Arial"/>
-                          <a:cs typeface="Arial"/>
-                          <a:ea typeface="Arial"/>
-                          <a:sym typeface="Arial"/>
+                          <a:latin typeface="Malgun Gothic"/>
+                          <a:cs typeface="Malgun Gothic"/>
+                          <a:ea typeface="Malgun Gothic"/>
+                          <a:sym typeface="Malgun Gothic"/>
                         </a:rPr>
                         <a:t>0.34</a:t>
                       </a:r>
@@ -13403,7 +13403,7 @@
                     <a:p>
                       <a:pPr algn="ctr" marL="19050" marR="19050">
                         <a:lnSpc>
-                          <a:spcPct val="110000"/>
+                          <a:spcPct val="100000"/>
                         </a:lnSpc>
                         <a:spcBef>
                           <a:spcPts val="150"/>
@@ -13420,10 +13420,10 @@
                               <a:alpha val="100000"/>
                             </a:srgbClr>
                           </a:solidFill>
-                          <a:latin typeface="Arial"/>
-                          <a:cs typeface="Arial"/>
-                          <a:ea typeface="Arial"/>
-                          <a:sym typeface="Arial"/>
+                          <a:latin typeface="Malgun Gothic"/>
+                          <a:cs typeface="Malgun Gothic"/>
+                          <a:ea typeface="Malgun Gothic"/>
+                          <a:sym typeface="Malgun Gothic"/>
                         </a:rPr>
                         <a:t>+0.34</a:t>
                       </a:r>
@@ -13472,7 +13472,7 @@
                     <a:p>
                       <a:pPr algn="ctr" marL="19050" marR="19050">
                         <a:lnSpc>
-                          <a:spcPct val="110000"/>
+                          <a:spcPct val="100000"/>
                         </a:lnSpc>
                         <a:spcBef>
                           <a:spcPts val="150"/>
@@ -13489,10 +13489,10 @@
                               <a:alpha val="100000"/>
                             </a:srgbClr>
                           </a:solidFill>
-                          <a:latin typeface="Arial"/>
-                          <a:cs typeface="Arial"/>
-                          <a:ea typeface="Arial"/>
-                          <a:sym typeface="Arial"/>
+                          <a:latin typeface="Malgun Gothic"/>
+                          <a:cs typeface="Malgun Gothic"/>
+                          <a:ea typeface="Malgun Gothic"/>
+                          <a:sym typeface="Malgun Gothic"/>
                         </a:rPr>
                         <a:t>+0.5sig</a:t>
                       </a:r>
@@ -13537,7 +13537,7 @@
                     <a:p>
                       <a:pPr algn="ctr" marL="19050" marR="19050">
                         <a:lnSpc>
-                          <a:spcPct val="110000"/>
+                          <a:spcPct val="100000"/>
                         </a:lnSpc>
                         <a:spcBef>
                           <a:spcPts val="150"/>
@@ -13554,10 +13554,10 @@
                               <a:alpha val="100000"/>
                             </a:srgbClr>
                           </a:solidFill>
-                          <a:latin typeface="Arial"/>
-                          <a:cs typeface="Arial"/>
-                          <a:ea typeface="Arial"/>
-                          <a:sym typeface="Arial"/>
+                          <a:latin typeface="Malgun Gothic"/>
+                          <a:cs typeface="Malgun Gothic"/>
+                          <a:ea typeface="Malgun Gothic"/>
+                          <a:sym typeface="Malgun Gothic"/>
                         </a:rPr>
                         <a:t>⬤ Up</a:t>
                       </a:r>
@@ -13606,7 +13606,7 @@
                     <a:p>
                       <a:pPr algn="l" marL="19050" marR="19050">
                         <a:lnSpc>
-                          <a:spcPct val="110000"/>
+                          <a:spcPct val="100000"/>
                         </a:lnSpc>
                         <a:spcBef>
                           <a:spcPts val="150"/>
@@ -13623,10 +13623,10 @@
                               <a:alpha val="100000"/>
                             </a:srgbClr>
                           </a:solidFill>
-                          <a:latin typeface="Arial"/>
-                          <a:cs typeface="Arial"/>
-                          <a:ea typeface="Arial"/>
-                          <a:sym typeface="Arial"/>
+                          <a:latin typeface="Malgun Gothic"/>
+                          <a:cs typeface="Malgun Gothic"/>
+                          <a:ea typeface="Malgun Gothic"/>
+                          <a:sym typeface="Malgun Gothic"/>
                         </a:rPr>
                         <a:t> </a:t>
                       </a:r>
@@ -13679,7 +13679,7 @@
                     <a:p>
                       <a:pPr algn="l" marL="19050" marR="19050">
                         <a:lnSpc>
-                          <a:spcPct val="110000"/>
+                          <a:spcPct val="100000"/>
                         </a:lnSpc>
                         <a:spcBef>
                           <a:spcPts val="150"/>
@@ -13696,10 +13696,10 @@
                               <a:alpha val="100000"/>
                             </a:srgbClr>
                           </a:solidFill>
-                          <a:latin typeface="Arial"/>
-                          <a:cs typeface="Arial"/>
-                          <a:ea typeface="Arial"/>
-                          <a:sym typeface="Arial"/>
+                          <a:latin typeface="Malgun Gothic"/>
+                          <a:cs typeface="Malgun Gothic"/>
+                          <a:ea typeface="Malgun Gothic"/>
+                          <a:sym typeface="Malgun Gothic"/>
                         </a:rPr>
                         <a:t> </a:t>
                       </a:r>
@@ -13815,10 +13815,10 @@
                     <a:alpha val="100000"/>
                   </a:srgbClr>
                 </a:solidFill>
-                <a:latin typeface="Arial"/>
-                <a:cs typeface="Arial"/>
-                <a:ea typeface="Arial"/>
-                <a:sym typeface="Arial"/>
+                <a:latin typeface="Malgun Gothic"/>
+                <a:cs typeface="Malgun Gothic"/>
+                <a:ea typeface="Malgun Gothic"/>
+                <a:sym typeface="Malgun Gothic"/>
               </a:rPr>
               <a:t>[DM] Data Review Board Auto Report</a:t>
             </a:r>
@@ -13869,10 +13869,10 @@
                     <a:alpha val="100000"/>
                   </a:srgbClr>
                 </a:solidFill>
-                <a:latin typeface="Arial"/>
-                <a:cs typeface="Arial"/>
-                <a:ea typeface="Arial"/>
-                <a:sym typeface="Arial"/>
+                <a:latin typeface="Malgun Gothic"/>
+                <a:cs typeface="Malgun Gothic"/>
+                <a:ea typeface="Malgun Gothic"/>
+                <a:sym typeface="Malgun Gothic"/>
               </a:rPr>
               <a:t>■</a:t>
             </a:r>
@@ -13883,10 +13883,10 @@
                     <a:alpha val="100000"/>
                   </a:srgbClr>
                 </a:solidFill>
-                <a:latin typeface="Arial"/>
-                <a:cs typeface="Arial"/>
-                <a:ea typeface="Arial"/>
-                <a:sym typeface="Arial"/>
+                <a:latin typeface="Malgun Gothic"/>
+                <a:cs typeface="Malgun Gothic"/>
+                <a:ea typeface="Malgun Gothic"/>
+                <a:sym typeface="Malgun Gothic"/>
               </a:rPr>
               <a:t> GOOBAE: WL trend by REF/TARGET</a:t>
             </a:r>
@@ -13911,10 +13911,10 @@
                     <a:alpha val="100000"/>
                   </a:srgbClr>
                 </a:solidFill>
-                <a:latin typeface="Arial"/>
-                <a:cs typeface="Arial"/>
-                <a:ea typeface="Arial"/>
-                <a:sym typeface="Arial"/>
+                <a:latin typeface="Malgun Gothic"/>
+                <a:cs typeface="Malgun Gothic"/>
+                <a:ea typeface="Malgun Gothic"/>
+                <a:sym typeface="Malgun Gothic"/>
               </a:rPr>
               <a:t>■</a:t>
             </a:r>
@@ -13925,10 +13925,10 @@
                     <a:alpha val="100000"/>
                   </a:srgbClr>
                 </a:solidFill>
-                <a:latin typeface="Arial"/>
-                <a:cs typeface="Arial"/>
-                <a:ea typeface="Arial"/>
-                <a:sym typeface="Arial"/>
+                <a:latin typeface="Malgun Gothic"/>
+                <a:cs typeface="Malgun Gothic"/>
+                <a:ea typeface="Malgun Gothic"/>
+                <a:sym typeface="Malgun Gothic"/>
               </a:rPr>
               <a:t> REF: A / TARGET: B</a:t>
             </a:r>
@@ -13953,10 +13953,10 @@
                     <a:alpha val="100000"/>
                   </a:srgbClr>
                 </a:solidFill>
-                <a:latin typeface="Arial"/>
-                <a:cs typeface="Arial"/>
-                <a:ea typeface="Arial"/>
-                <a:sym typeface="Arial"/>
+                <a:latin typeface="Malgun Gothic"/>
+                <a:cs typeface="Malgun Gothic"/>
+                <a:ea typeface="Malgun Gothic"/>
+                <a:sym typeface="Malgun Gothic"/>
               </a:rPr>
               <a:t>■</a:t>
             </a:r>
@@ -13967,10 +13967,10 @@
                     <a:alpha val="100000"/>
                   </a:srgbClr>
                 </a:solidFill>
-                <a:latin typeface="Arial"/>
-                <a:cs typeface="Arial"/>
-                <a:ea typeface="Arial"/>
-                <a:sym typeface="Arial"/>
+                <a:latin typeface="Malgun Gothic"/>
+                <a:cs typeface="Malgun Gothic"/>
+                <a:ea typeface="Malgun Gothic"/>
+                <a:sym typeface="Malgun Gothic"/>
               </a:rPr>
               <a:t> Showing GOOBAE 1-3 of 3</a:t>
             </a:r>
@@ -14015,7 +14015,7 @@
                     <a:p>
                       <a:pPr algn="ctr" marL="0" marR="0">
                         <a:lnSpc>
-                          <a:spcPct val="10000"/>
+                          <a:spcPct val="100000"/>
                         </a:lnSpc>
                         <a:spcBef>
                           <a:spcPts val="0"/>
@@ -14032,10 +14032,10 @@
                               <a:alpha val="100000"/>
                             </a:srgbClr>
                           </a:solidFill>
-                          <a:latin typeface="Arial"/>
-                          <a:cs typeface="Arial"/>
-                          <a:ea typeface="Arial"/>
-                          <a:sym typeface="Arial"/>
+                          <a:latin typeface="Malgun Gothic"/>
+                          <a:cs typeface="Malgun Gothic"/>
+                          <a:ea typeface="Malgun Gothic"/>
+                          <a:sym typeface="Malgun Gothic"/>
                         </a:rPr>
                         <a:t>WLS</a:t>
                       </a:r>
@@ -14088,7 +14088,7 @@
                     <a:p>
                       <a:pPr algn="ctr" marL="0" marR="0">
                         <a:lnSpc>
-                          <a:spcPct val="10000"/>
+                          <a:spcPct val="100000"/>
                         </a:lnSpc>
                         <a:spcBef>
                           <a:spcPts val="0"/>
@@ -14105,10 +14105,10 @@
                               <a:alpha val="100000"/>
                             </a:srgbClr>
                           </a:solidFill>
-                          <a:latin typeface="Arial"/>
-                          <a:cs typeface="Arial"/>
-                          <a:ea typeface="Arial"/>
-                          <a:sym typeface="Arial"/>
+                          <a:latin typeface="Malgun Gothic"/>
+                          <a:cs typeface="Malgun Gothic"/>
+                          <a:ea typeface="Malgun Gothic"/>
+                          <a:sym typeface="Malgun Gothic"/>
                         </a:rPr>
                         <a:t>WLS</a:t>
                       </a:r>
@@ -14161,7 +14161,7 @@
                     <a:p>
                       <a:pPr algn="ctr" marL="0" marR="0">
                         <a:lnSpc>
-                          <a:spcPct val="10000"/>
+                          <a:spcPct val="100000"/>
                         </a:lnSpc>
                         <a:spcBef>
                           <a:spcPts val="0"/>
@@ -14178,10 +14178,10 @@
                               <a:alpha val="100000"/>
                             </a:srgbClr>
                           </a:solidFill>
-                          <a:latin typeface="Arial"/>
-                          <a:cs typeface="Arial"/>
-                          <a:ea typeface="Arial"/>
-                          <a:sym typeface="Arial"/>
+                          <a:latin typeface="Malgun Gothic"/>
+                          <a:cs typeface="Malgun Gothic"/>
+                          <a:ea typeface="Malgun Gothic"/>
+                          <a:sym typeface="Malgun Gothic"/>
                         </a:rPr>
                         <a:t>WTC</a:t>
                       </a:r>
@@ -14234,7 +14234,7 @@
                     <a:p>
                       <a:pPr algn="ctr" marL="0" marR="0">
                         <a:lnSpc>
-                          <a:spcPct val="10000"/>
+                          <a:spcPct val="100000"/>
                         </a:lnSpc>
                         <a:spcBef>
                           <a:spcPts val="0"/>
@@ -14251,10 +14251,10 @@
                               <a:alpha val="100000"/>
                             </a:srgbClr>
                           </a:solidFill>
-                          <a:latin typeface="Arial"/>
-                          <a:cs typeface="Arial"/>
-                          <a:ea typeface="Arial"/>
-                          <a:sym typeface="Arial"/>
+                          <a:latin typeface="Malgun Gothic"/>
+                          <a:cs typeface="Malgun Gothic"/>
+                          <a:ea typeface="Malgun Gothic"/>
+                          <a:sym typeface="Malgun Gothic"/>
                         </a:rPr>
                         <a:t> </a:t>
                       </a:r>
@@ -14307,7 +14307,7 @@
                     <a:p>
                       <a:pPr algn="ctr" marL="0" marR="0">
                         <a:lnSpc>
-                          <a:spcPct val="10000"/>
+                          <a:spcPct val="100000"/>
                         </a:lnSpc>
                         <a:spcBef>
                           <a:spcPts val="0"/>
@@ -14324,10 +14324,10 @@
                               <a:alpha val="100000"/>
                             </a:srgbClr>
                           </a:solidFill>
-                          <a:latin typeface="Arial"/>
-                          <a:cs typeface="Arial"/>
-                          <a:ea typeface="Arial"/>
-                          <a:sym typeface="Arial"/>
+                          <a:latin typeface="Malgun Gothic"/>
+                          <a:cs typeface="Malgun Gothic"/>
+                          <a:ea typeface="Malgun Gothic"/>
+                          <a:sym typeface="Malgun Gothic"/>
                         </a:rPr>
                         <a:t> </a:t>
                       </a:r>
@@ -14380,7 +14380,7 @@
                     <a:p>
                       <a:pPr algn="ctr" marL="0" marR="0">
                         <a:lnSpc>
-                          <a:spcPct val="10000"/>
+                          <a:spcPct val="100000"/>
                         </a:lnSpc>
                         <a:spcBef>
                           <a:spcPts val="0"/>
@@ -14397,10 +14397,10 @@
                               <a:alpha val="100000"/>
                             </a:srgbClr>
                           </a:solidFill>
-                          <a:latin typeface="Arial"/>
-                          <a:cs typeface="Arial"/>
-                          <a:ea typeface="Arial"/>
-                          <a:sym typeface="Arial"/>
+                          <a:latin typeface="Malgun Gothic"/>
+                          <a:cs typeface="Malgun Gothic"/>
+                          <a:ea typeface="Malgun Gothic"/>
+                          <a:sym typeface="Malgun Gothic"/>
                         </a:rPr>
                         <a:t> </a:t>
                       </a:r>
@@ -14453,7 +14453,7 @@
                     <a:p>
                       <a:pPr algn="ctr" marL="0" marR="0">
                         <a:lnSpc>
-                          <a:spcPct val="10000"/>
+                          <a:spcPct val="100000"/>
                         </a:lnSpc>
                         <a:spcBef>
                           <a:spcPts val="0"/>
@@ -14470,10 +14470,10 @@
                               <a:alpha val="100000"/>
                             </a:srgbClr>
                           </a:solidFill>
-                          <a:latin typeface="Arial"/>
-                          <a:cs typeface="Arial"/>
-                          <a:ea typeface="Arial"/>
-                          <a:sym typeface="Arial"/>
+                          <a:latin typeface="Malgun Gothic"/>
+                          <a:cs typeface="Malgun Gothic"/>
+                          <a:ea typeface="Malgun Gothic"/>
+                          <a:sym typeface="Malgun Gothic"/>
                         </a:rPr>
                         <a:t> </a:t>
                       </a:r>
@@ -14526,7 +14526,7 @@
                     <a:p>
                       <a:pPr algn="ctr" marL="0" marR="0">
                         <a:lnSpc>
-                          <a:spcPct val="10000"/>
+                          <a:spcPct val="100000"/>
                         </a:lnSpc>
                         <a:spcBef>
                           <a:spcPts val="0"/>
@@ -14543,10 +14543,10 @@
                               <a:alpha val="100000"/>
                             </a:srgbClr>
                           </a:solidFill>
-                          <a:latin typeface="Arial"/>
-                          <a:cs typeface="Arial"/>
-                          <a:ea typeface="Arial"/>
-                          <a:sym typeface="Arial"/>
+                          <a:latin typeface="Malgun Gothic"/>
+                          <a:cs typeface="Malgun Gothic"/>
+                          <a:ea typeface="Malgun Gothic"/>
+                          <a:sym typeface="Malgun Gothic"/>
                         </a:rPr>
                         <a:t> </a:t>
                       </a:r>
@@ -14599,7 +14599,7 @@
                     <a:p>
                       <a:pPr algn="ctr" marL="0" marR="0">
                         <a:lnSpc>
-                          <a:spcPct val="10000"/>
+                          <a:spcPct val="100000"/>
                         </a:lnSpc>
                         <a:spcBef>
                           <a:spcPts val="0"/>
@@ -14616,10 +14616,10 @@
                               <a:alpha val="100000"/>
                             </a:srgbClr>
                           </a:solidFill>
-                          <a:latin typeface="Arial"/>
-                          <a:cs typeface="Arial"/>
-                          <a:ea typeface="Arial"/>
-                          <a:sym typeface="Arial"/>
+                          <a:latin typeface="Malgun Gothic"/>
+                          <a:cs typeface="Malgun Gothic"/>
+                          <a:ea typeface="Malgun Gothic"/>
+                          <a:sym typeface="Malgun Gothic"/>
                         </a:rPr>
                         <a:t> </a:t>
                       </a:r>
@@ -14672,7 +14672,7 @@
                     <a:p>
                       <a:pPr algn="ctr" marL="0" marR="0">
                         <a:lnSpc>
-                          <a:spcPct val="10000"/>
+                          <a:spcPct val="100000"/>
                         </a:lnSpc>
                         <a:spcBef>
                           <a:spcPts val="0"/>
@@ -14689,10 +14689,10 @@
                               <a:alpha val="100000"/>
                             </a:srgbClr>
                           </a:solidFill>
-                          <a:latin typeface="Arial"/>
-                          <a:cs typeface="Arial"/>
-                          <a:ea typeface="Arial"/>
-                          <a:sym typeface="Arial"/>
+                          <a:latin typeface="Malgun Gothic"/>
+                          <a:cs typeface="Malgun Gothic"/>
+                          <a:ea typeface="Malgun Gothic"/>
+                          <a:sym typeface="Malgun Gothic"/>
                         </a:rPr>
                         <a:t> </a:t>
                       </a:r>
@@ -14745,7 +14745,7 @@
                     <a:p>
                       <a:pPr algn="ctr" marL="0" marR="0">
                         <a:lnSpc>
-                          <a:spcPct val="10000"/>
+                          <a:spcPct val="100000"/>
                         </a:lnSpc>
                         <a:spcBef>
                           <a:spcPts val="0"/>
@@ -14762,10 +14762,10 @@
                               <a:alpha val="100000"/>
                             </a:srgbClr>
                           </a:solidFill>
-                          <a:latin typeface="Arial"/>
-                          <a:cs typeface="Arial"/>
-                          <a:ea typeface="Arial"/>
-                          <a:sym typeface="Arial"/>
+                          <a:latin typeface="Malgun Gothic"/>
+                          <a:cs typeface="Malgun Gothic"/>
+                          <a:ea typeface="Malgun Gothic"/>
+                          <a:sym typeface="Malgun Gothic"/>
                         </a:rPr>
                         <a:t> </a:t>
                       </a:r>
@@ -14818,7 +14818,7 @@
                     <a:p>
                       <a:pPr algn="ctr" marL="0" marR="0">
                         <a:lnSpc>
-                          <a:spcPct val="10000"/>
+                          <a:spcPct val="100000"/>
                         </a:lnSpc>
                         <a:spcBef>
                           <a:spcPts val="0"/>
@@ -14835,10 +14835,10 @@
                               <a:alpha val="100000"/>
                             </a:srgbClr>
                           </a:solidFill>
-                          <a:latin typeface="Arial"/>
-                          <a:cs typeface="Arial"/>
-                          <a:ea typeface="Arial"/>
-                          <a:sym typeface="Arial"/>
+                          <a:latin typeface="Malgun Gothic"/>
+                          <a:cs typeface="Malgun Gothic"/>
+                          <a:ea typeface="Malgun Gothic"/>
+                          <a:sym typeface="Malgun Gothic"/>
                         </a:rPr>
                         <a:t> </a:t>
                       </a:r>
@@ -14893,7 +14893,7 @@
                     <a:p>
                       <a:pPr algn="ctr" marL="0" marR="0">
                         <a:lnSpc>
-                          <a:spcPct val="10000"/>
+                          <a:spcPct val="100000"/>
                         </a:lnSpc>
                         <a:spcBef>
                           <a:spcPts val="0"/>
@@ -14910,10 +14910,10 @@
                               <a:alpha val="100000"/>
                             </a:srgbClr>
                           </a:solidFill>
-                          <a:latin typeface="Arial"/>
-                          <a:cs typeface="Arial"/>
-                          <a:ea typeface="Arial"/>
-                          <a:sym typeface="Arial"/>
+                          <a:latin typeface="Malgun Gothic"/>
+                          <a:cs typeface="Malgun Gothic"/>
+                          <a:ea typeface="Malgun Gothic"/>
+                          <a:sym typeface="Malgun Gothic"/>
                         </a:rPr>
                         <a:t>1WL</a:t>
                       </a:r>
@@ -14966,7 +14966,7 @@
                     <a:p>
                       <a:pPr algn="ctr" marL="0" marR="0">
                         <a:lnSpc>
-                          <a:spcPct val="10000"/>
+                          <a:spcPct val="100000"/>
                         </a:lnSpc>
                         <a:spcBef>
                           <a:spcPts val="0"/>
@@ -14983,10 +14983,10 @@
                               <a:alpha val="100000"/>
                             </a:srgbClr>
                           </a:solidFill>
-                          <a:latin typeface="Arial"/>
-                          <a:cs typeface="Arial"/>
-                          <a:ea typeface="Arial"/>
-                          <a:sym typeface="Arial"/>
+                          <a:latin typeface="Malgun Gothic"/>
+                          <a:cs typeface="Malgun Gothic"/>
+                          <a:ea typeface="Malgun Gothic"/>
+                          <a:sym typeface="Malgun Gothic"/>
                         </a:rPr>
                         <a:t>2WL</a:t>
                       </a:r>
@@ -15039,7 +15039,7 @@
                     <a:p>
                       <a:pPr algn="ctr" marL="0" marR="0">
                         <a:lnSpc>
-                          <a:spcPct val="10000"/>
+                          <a:spcPct val="100000"/>
                         </a:lnSpc>
                         <a:spcBef>
                           <a:spcPts val="0"/>
@@ -15056,10 +15056,10 @@
                               <a:alpha val="100000"/>
                             </a:srgbClr>
                           </a:solidFill>
-                          <a:latin typeface="Arial"/>
-                          <a:cs typeface="Arial"/>
-                          <a:ea typeface="Arial"/>
-                          <a:sym typeface="Arial"/>
+                          <a:latin typeface="Malgun Gothic"/>
+                          <a:cs typeface="Malgun Gothic"/>
+                          <a:ea typeface="Malgun Gothic"/>
+                          <a:sym typeface="Malgun Gothic"/>
                         </a:rPr>
                         <a:t>1WL</a:t>
                       </a:r>
@@ -15112,7 +15112,7 @@
                     <a:p>
                       <a:pPr algn="ctr" marL="0" marR="0">
                         <a:lnSpc>
-                          <a:spcPct val="10000"/>
+                          <a:spcPct val="100000"/>
                         </a:lnSpc>
                         <a:spcBef>
                           <a:spcPts val="0"/>
@@ -15129,10 +15129,10 @@
                               <a:alpha val="100000"/>
                             </a:srgbClr>
                           </a:solidFill>
-                          <a:latin typeface="Arial"/>
-                          <a:cs typeface="Arial"/>
-                          <a:ea typeface="Arial"/>
-                          <a:sym typeface="Arial"/>
+                          <a:latin typeface="Malgun Gothic"/>
+                          <a:cs typeface="Malgun Gothic"/>
+                          <a:ea typeface="Malgun Gothic"/>
+                          <a:sym typeface="Malgun Gothic"/>
                         </a:rPr>
                         <a:t> </a:t>
                       </a:r>
@@ -15185,7 +15185,7 @@
                     <a:p>
                       <a:pPr algn="ctr" marL="0" marR="0">
                         <a:lnSpc>
-                          <a:spcPct val="10000"/>
+                          <a:spcPct val="100000"/>
                         </a:lnSpc>
                         <a:spcBef>
                           <a:spcPts val="0"/>
@@ -15202,10 +15202,10 @@
                               <a:alpha val="100000"/>
                             </a:srgbClr>
                           </a:solidFill>
-                          <a:latin typeface="Arial"/>
-                          <a:cs typeface="Arial"/>
-                          <a:ea typeface="Arial"/>
-                          <a:sym typeface="Arial"/>
+                          <a:latin typeface="Malgun Gothic"/>
+                          <a:cs typeface="Malgun Gothic"/>
+                          <a:ea typeface="Malgun Gothic"/>
+                          <a:sym typeface="Malgun Gothic"/>
                         </a:rPr>
                         <a:t> </a:t>
                       </a:r>
@@ -15258,7 +15258,7 @@
                     <a:p>
                       <a:pPr algn="ctr" marL="0" marR="0">
                         <a:lnSpc>
-                          <a:spcPct val="10000"/>
+                          <a:spcPct val="100000"/>
                         </a:lnSpc>
                         <a:spcBef>
                           <a:spcPts val="0"/>
@@ -15275,10 +15275,10 @@
                               <a:alpha val="100000"/>
                             </a:srgbClr>
                           </a:solidFill>
-                          <a:latin typeface="Arial"/>
-                          <a:cs typeface="Arial"/>
-                          <a:ea typeface="Arial"/>
-                          <a:sym typeface="Arial"/>
+                          <a:latin typeface="Malgun Gothic"/>
+                          <a:cs typeface="Malgun Gothic"/>
+                          <a:ea typeface="Malgun Gothic"/>
+                          <a:sym typeface="Malgun Gothic"/>
                         </a:rPr>
                         <a:t> </a:t>
                       </a:r>
@@ -15331,7 +15331,7 @@
                     <a:p>
                       <a:pPr algn="ctr" marL="0" marR="0">
                         <a:lnSpc>
-                          <a:spcPct val="10000"/>
+                          <a:spcPct val="100000"/>
                         </a:lnSpc>
                         <a:spcBef>
                           <a:spcPts val="0"/>
@@ -15348,10 +15348,10 @@
                               <a:alpha val="100000"/>
                             </a:srgbClr>
                           </a:solidFill>
-                          <a:latin typeface="Arial"/>
-                          <a:cs typeface="Arial"/>
-                          <a:ea typeface="Arial"/>
-                          <a:sym typeface="Arial"/>
+                          <a:latin typeface="Malgun Gothic"/>
+                          <a:cs typeface="Malgun Gothic"/>
+                          <a:ea typeface="Malgun Gothic"/>
+                          <a:sym typeface="Malgun Gothic"/>
                         </a:rPr>
                         <a:t> </a:t>
                       </a:r>
@@ -15404,7 +15404,7 @@
                     <a:p>
                       <a:pPr algn="ctr" marL="0" marR="0">
                         <a:lnSpc>
-                          <a:spcPct val="10000"/>
+                          <a:spcPct val="100000"/>
                         </a:lnSpc>
                         <a:spcBef>
                           <a:spcPts val="0"/>
@@ -15421,10 +15421,10 @@
                               <a:alpha val="100000"/>
                             </a:srgbClr>
                           </a:solidFill>
-                          <a:latin typeface="Arial"/>
-                          <a:cs typeface="Arial"/>
-                          <a:ea typeface="Arial"/>
-                          <a:sym typeface="Arial"/>
+                          <a:latin typeface="Malgun Gothic"/>
+                          <a:cs typeface="Malgun Gothic"/>
+                          <a:ea typeface="Malgun Gothic"/>
+                          <a:sym typeface="Malgun Gothic"/>
                         </a:rPr>
                         <a:t> </a:t>
                       </a:r>
@@ -15477,7 +15477,7 @@
                     <a:p>
                       <a:pPr algn="ctr" marL="0" marR="0">
                         <a:lnSpc>
-                          <a:spcPct val="10000"/>
+                          <a:spcPct val="100000"/>
                         </a:lnSpc>
                         <a:spcBef>
                           <a:spcPts val="0"/>
@@ -15494,10 +15494,10 @@
                               <a:alpha val="100000"/>
                             </a:srgbClr>
                           </a:solidFill>
-                          <a:latin typeface="Arial"/>
-                          <a:cs typeface="Arial"/>
-                          <a:ea typeface="Arial"/>
-                          <a:sym typeface="Arial"/>
+                          <a:latin typeface="Malgun Gothic"/>
+                          <a:cs typeface="Malgun Gothic"/>
+                          <a:ea typeface="Malgun Gothic"/>
+                          <a:sym typeface="Malgun Gothic"/>
                         </a:rPr>
                         <a:t> </a:t>
                       </a:r>
@@ -15550,7 +15550,7 @@
                     <a:p>
                       <a:pPr algn="ctr" marL="0" marR="0">
                         <a:lnSpc>
-                          <a:spcPct val="10000"/>
+                          <a:spcPct val="100000"/>
                         </a:lnSpc>
                         <a:spcBef>
                           <a:spcPts val="0"/>
@@ -15567,10 +15567,10 @@
                               <a:alpha val="100000"/>
                             </a:srgbClr>
                           </a:solidFill>
-                          <a:latin typeface="Arial"/>
-                          <a:cs typeface="Arial"/>
-                          <a:ea typeface="Arial"/>
-                          <a:sym typeface="Arial"/>
+                          <a:latin typeface="Malgun Gothic"/>
+                          <a:cs typeface="Malgun Gothic"/>
+                          <a:ea typeface="Malgun Gothic"/>
+                          <a:sym typeface="Malgun Gothic"/>
                         </a:rPr>
                         <a:t> </a:t>
                       </a:r>
@@ -15623,7 +15623,7 @@
                     <a:p>
                       <a:pPr algn="ctr" marL="0" marR="0">
                         <a:lnSpc>
-                          <a:spcPct val="10000"/>
+                          <a:spcPct val="100000"/>
                         </a:lnSpc>
                         <a:spcBef>
                           <a:spcPts val="0"/>
@@ -15640,10 +15640,10 @@
                               <a:alpha val="100000"/>
                             </a:srgbClr>
                           </a:solidFill>
-                          <a:latin typeface="Arial"/>
-                          <a:cs typeface="Arial"/>
-                          <a:ea typeface="Arial"/>
-                          <a:sym typeface="Arial"/>
+                          <a:latin typeface="Malgun Gothic"/>
+                          <a:cs typeface="Malgun Gothic"/>
+                          <a:ea typeface="Malgun Gothic"/>
+                          <a:sym typeface="Malgun Gothic"/>
                         </a:rPr>
                         <a:t> </a:t>
                       </a:r>
@@ -15696,7 +15696,7 @@
                     <a:p>
                       <a:pPr algn="ctr" marL="0" marR="0">
                         <a:lnSpc>
-                          <a:spcPct val="10000"/>
+                          <a:spcPct val="100000"/>
                         </a:lnSpc>
                         <a:spcBef>
                           <a:spcPts val="0"/>
@@ -15713,10 +15713,10 @@
                               <a:alpha val="100000"/>
                             </a:srgbClr>
                           </a:solidFill>
-                          <a:latin typeface="Arial"/>
-                          <a:cs typeface="Arial"/>
-                          <a:ea typeface="Arial"/>
-                          <a:sym typeface="Arial"/>
+                          <a:latin typeface="Malgun Gothic"/>
+                          <a:cs typeface="Malgun Gothic"/>
+                          <a:ea typeface="Malgun Gothic"/>
+                          <a:sym typeface="Malgun Gothic"/>
                         </a:rPr>
                         <a:t> </a:t>
                       </a:r>
@@ -15771,7 +15771,7 @@
                     <a:p>
                       <a:pPr algn="ctr" marL="0" marR="0">
                         <a:lnSpc>
-                          <a:spcPct val="10000"/>
+                          <a:spcPct val="100000"/>
                         </a:lnSpc>
                         <a:spcBef>
                           <a:spcPts val="0"/>
@@ -15788,10 +15788,10 @@
                               <a:alpha val="100000"/>
                             </a:srgbClr>
                           </a:solidFill>
-                          <a:latin typeface="Arial"/>
-                          <a:cs typeface="Arial"/>
-                          <a:ea typeface="Arial"/>
-                          <a:sym typeface="Arial"/>
+                          <a:latin typeface="Malgun Gothic"/>
+                          <a:cs typeface="Malgun Gothic"/>
+                          <a:ea typeface="Malgun Gothic"/>
+                          <a:sym typeface="Malgun Gothic"/>
                         </a:rPr>
                         <a:t> </a:t>
                       </a:r>
@@ -15844,7 +15844,7 @@
                     <a:p>
                       <a:pPr algn="ctr" marL="0" marR="0">
                         <a:lnSpc>
-                          <a:spcPct val="10000"/>
+                          <a:spcPct val="100000"/>
                         </a:lnSpc>
                         <a:spcBef>
                           <a:spcPts val="0"/>
@@ -15861,10 +15861,10 @@
                               <a:alpha val="100000"/>
                             </a:srgbClr>
                           </a:solidFill>
-                          <a:latin typeface="Arial"/>
-                          <a:cs typeface="Arial"/>
-                          <a:ea typeface="Arial"/>
-                          <a:sym typeface="Arial"/>
+                          <a:latin typeface="Malgun Gothic"/>
+                          <a:cs typeface="Malgun Gothic"/>
+                          <a:ea typeface="Malgun Gothic"/>
+                          <a:sym typeface="Malgun Gothic"/>
                         </a:rPr>
                         <a:t> </a:t>
                       </a:r>
@@ -15917,7 +15917,7 @@
                     <a:p>
                       <a:pPr algn="ctr" marL="0" marR="0">
                         <a:lnSpc>
-                          <a:spcPct val="10000"/>
+                          <a:spcPct val="100000"/>
                         </a:lnSpc>
                         <a:spcBef>
                           <a:spcPts val="0"/>
@@ -15934,10 +15934,10 @@
                               <a:alpha val="100000"/>
                             </a:srgbClr>
                           </a:solidFill>
-                          <a:latin typeface="Arial"/>
-                          <a:cs typeface="Arial"/>
-                          <a:ea typeface="Arial"/>
-                          <a:sym typeface="Arial"/>
+                          <a:latin typeface="Malgun Gothic"/>
+                          <a:cs typeface="Malgun Gothic"/>
+                          <a:ea typeface="Malgun Gothic"/>
+                          <a:sym typeface="Malgun Gothic"/>
                         </a:rPr>
                         <a:t> </a:t>
                       </a:r>
@@ -15990,7 +15990,7 @@
                     <a:p>
                       <a:pPr algn="ctr" marL="0" marR="0">
                         <a:lnSpc>
-                          <a:spcPct val="10000"/>
+                          <a:spcPct val="100000"/>
                         </a:lnSpc>
                         <a:spcBef>
                           <a:spcPts val="0"/>
@@ -16007,10 +16007,10 @@
                               <a:alpha val="100000"/>
                             </a:srgbClr>
                           </a:solidFill>
-                          <a:latin typeface="Arial"/>
-                          <a:cs typeface="Arial"/>
-                          <a:ea typeface="Arial"/>
-                          <a:sym typeface="Arial"/>
+                          <a:latin typeface="Malgun Gothic"/>
+                          <a:cs typeface="Malgun Gothic"/>
+                          <a:ea typeface="Malgun Gothic"/>
+                          <a:sym typeface="Malgun Gothic"/>
                         </a:rPr>
                         <a:t> </a:t>
                       </a:r>
@@ -16063,7 +16063,7 @@
                     <a:p>
                       <a:pPr algn="ctr" marL="0" marR="0">
                         <a:lnSpc>
-                          <a:spcPct val="10000"/>
+                          <a:spcPct val="100000"/>
                         </a:lnSpc>
                         <a:spcBef>
                           <a:spcPts val="0"/>
@@ -16080,10 +16080,10 @@
                               <a:alpha val="100000"/>
                             </a:srgbClr>
                           </a:solidFill>
-                          <a:latin typeface="Arial"/>
-                          <a:cs typeface="Arial"/>
-                          <a:ea typeface="Arial"/>
-                          <a:sym typeface="Arial"/>
+                          <a:latin typeface="Malgun Gothic"/>
+                          <a:cs typeface="Malgun Gothic"/>
+                          <a:ea typeface="Malgun Gothic"/>
+                          <a:sym typeface="Malgun Gothic"/>
                         </a:rPr>
                         <a:t> </a:t>
                       </a:r>
@@ -16136,7 +16136,7 @@
                     <a:p>
                       <a:pPr algn="ctr" marL="0" marR="0">
                         <a:lnSpc>
-                          <a:spcPct val="10000"/>
+                          <a:spcPct val="100000"/>
                         </a:lnSpc>
                         <a:spcBef>
                           <a:spcPts val="0"/>
@@ -16153,10 +16153,10 @@
                               <a:alpha val="100000"/>
                             </a:srgbClr>
                           </a:solidFill>
-                          <a:latin typeface="Arial"/>
-                          <a:cs typeface="Arial"/>
-                          <a:ea typeface="Arial"/>
-                          <a:sym typeface="Arial"/>
+                          <a:latin typeface="Malgun Gothic"/>
+                          <a:cs typeface="Malgun Gothic"/>
+                          <a:ea typeface="Malgun Gothic"/>
+                          <a:sym typeface="Malgun Gothic"/>
                         </a:rPr>
                         <a:t> </a:t>
                       </a:r>
@@ -16209,7 +16209,7 @@
                     <a:p>
                       <a:pPr algn="ctr" marL="0" marR="0">
                         <a:lnSpc>
-                          <a:spcPct val="10000"/>
+                          <a:spcPct val="100000"/>
                         </a:lnSpc>
                         <a:spcBef>
                           <a:spcPts val="0"/>
@@ -16226,10 +16226,10 @@
                               <a:alpha val="100000"/>
                             </a:srgbClr>
                           </a:solidFill>
-                          <a:latin typeface="Arial"/>
-                          <a:cs typeface="Arial"/>
-                          <a:ea typeface="Arial"/>
-                          <a:sym typeface="Arial"/>
+                          <a:latin typeface="Malgun Gothic"/>
+                          <a:cs typeface="Malgun Gothic"/>
+                          <a:ea typeface="Malgun Gothic"/>
+                          <a:sym typeface="Malgun Gothic"/>
                         </a:rPr>
                         <a:t> </a:t>
                       </a:r>
@@ -16282,7 +16282,7 @@
                     <a:p>
                       <a:pPr algn="ctr" marL="0" marR="0">
                         <a:lnSpc>
-                          <a:spcPct val="10000"/>
+                          <a:spcPct val="100000"/>
                         </a:lnSpc>
                         <a:spcBef>
                           <a:spcPts val="0"/>
@@ -16299,10 +16299,10 @@
                               <a:alpha val="100000"/>
                             </a:srgbClr>
                           </a:solidFill>
-                          <a:latin typeface="Arial"/>
-                          <a:cs typeface="Arial"/>
-                          <a:ea typeface="Arial"/>
-                          <a:sym typeface="Arial"/>
+                          <a:latin typeface="Malgun Gothic"/>
+                          <a:cs typeface="Malgun Gothic"/>
+                          <a:ea typeface="Malgun Gothic"/>
+                          <a:sym typeface="Malgun Gothic"/>
                         </a:rPr>
                         <a:t> </a:t>
                       </a:r>
@@ -16355,7 +16355,7 @@
                     <a:p>
                       <a:pPr algn="ctr" marL="0" marR="0">
                         <a:lnSpc>
-                          <a:spcPct val="10000"/>
+                          <a:spcPct val="100000"/>
                         </a:lnSpc>
                         <a:spcBef>
                           <a:spcPts val="0"/>
@@ -16372,10 +16372,10 @@
                               <a:alpha val="100000"/>
                             </a:srgbClr>
                           </a:solidFill>
-                          <a:latin typeface="Arial"/>
-                          <a:cs typeface="Arial"/>
-                          <a:ea typeface="Arial"/>
-                          <a:sym typeface="Arial"/>
+                          <a:latin typeface="Malgun Gothic"/>
+                          <a:cs typeface="Malgun Gothic"/>
+                          <a:ea typeface="Malgun Gothic"/>
+                          <a:sym typeface="Malgun Gothic"/>
                         </a:rPr>
                         <a:t> </a:t>
                       </a:r>
@@ -16428,7 +16428,7 @@
                     <a:p>
                       <a:pPr algn="ctr" marL="0" marR="0">
                         <a:lnSpc>
-                          <a:spcPct val="10000"/>
+                          <a:spcPct val="100000"/>
                         </a:lnSpc>
                         <a:spcBef>
                           <a:spcPts val="0"/>
@@ -16445,10 +16445,10 @@
                               <a:alpha val="100000"/>
                             </a:srgbClr>
                           </a:solidFill>
-                          <a:latin typeface="Arial"/>
-                          <a:cs typeface="Arial"/>
-                          <a:ea typeface="Arial"/>
-                          <a:sym typeface="Arial"/>
+                          <a:latin typeface="Malgun Gothic"/>
+                          <a:cs typeface="Malgun Gothic"/>
+                          <a:ea typeface="Malgun Gothic"/>
+                          <a:sym typeface="Malgun Gothic"/>
                         </a:rPr>
                         <a:t> </a:t>
                       </a:r>
@@ -16501,7 +16501,7 @@
                     <a:p>
                       <a:pPr algn="ctr" marL="0" marR="0">
                         <a:lnSpc>
-                          <a:spcPct val="10000"/>
+                          <a:spcPct val="100000"/>
                         </a:lnSpc>
                         <a:spcBef>
                           <a:spcPts val="0"/>
@@ -16518,10 +16518,10 @@
                               <a:alpha val="100000"/>
                             </a:srgbClr>
                           </a:solidFill>
-                          <a:latin typeface="Arial"/>
-                          <a:cs typeface="Arial"/>
-                          <a:ea typeface="Arial"/>
-                          <a:sym typeface="Arial"/>
+                          <a:latin typeface="Malgun Gothic"/>
+                          <a:cs typeface="Malgun Gothic"/>
+                          <a:ea typeface="Malgun Gothic"/>
+                          <a:sym typeface="Malgun Gothic"/>
                         </a:rPr>
                         <a:t> </a:t>
                       </a:r>
@@ -16574,7 +16574,7 @@
                     <a:p>
                       <a:pPr algn="ctr" marL="0" marR="0">
                         <a:lnSpc>
-                          <a:spcPct val="10000"/>
+                          <a:spcPct val="100000"/>
                         </a:lnSpc>
                         <a:spcBef>
                           <a:spcPts val="0"/>
@@ -16591,10 +16591,10 @@
                               <a:alpha val="100000"/>
                             </a:srgbClr>
                           </a:solidFill>
-                          <a:latin typeface="Arial"/>
-                          <a:cs typeface="Arial"/>
-                          <a:ea typeface="Arial"/>
-                          <a:sym typeface="Arial"/>
+                          <a:latin typeface="Malgun Gothic"/>
+                          <a:cs typeface="Malgun Gothic"/>
+                          <a:ea typeface="Malgun Gothic"/>
+                          <a:sym typeface="Malgun Gothic"/>
                         </a:rPr>
                         <a:t> </a:t>
                       </a:r>
@@ -16761,8 +16761,8 @@
         </p:nvSpPr>
         <p:spPr>
           <a:xfrm>
-            <a:off x="4711446" y="6446520"/>
-            <a:ext cx="2766060" cy="219456"/>
+            <a:off x="4642866" y="6446520"/>
+            <a:ext cx="2903220" cy="219456"/>
           </a:xfrm>
           <a:solidFill>
             <a:srgbClr val="FFFFFF">
@@ -16793,10 +16793,10 @@
                     <a:alpha val="100000"/>
                   </a:srgbClr>
                 </a:solidFill>
-                <a:latin typeface="Arial"/>
-                <a:cs typeface="Arial"/>
-                <a:ea typeface="Arial"/>
-                <a:sym typeface="Arial"/>
+                <a:latin typeface="Malgun Gothic"/>
+                <a:cs typeface="Malgun Gothic"/>
+                <a:ea typeface="Malgun Gothic"/>
+                <a:sym typeface="Malgun Gothic"/>
               </a:rPr>
               <a:t>● A (REF, 16매)</a:t>
             </a:r>
@@ -16807,10 +16807,10 @@
                     <a:alpha val="100000"/>
                   </a:srgbClr>
                 </a:solidFill>
-                <a:latin typeface="Arial"/>
-                <a:cs typeface="Arial"/>
-                <a:ea typeface="Arial"/>
-                <a:sym typeface="Arial"/>
+                <a:latin typeface="Malgun Gothic"/>
+                <a:cs typeface="Malgun Gothic"/>
+                <a:ea typeface="Malgun Gothic"/>
+                <a:sym typeface="Malgun Gothic"/>
               </a:rPr>
               <a:t>    </a:t>
             </a:r>
@@ -16821,10 +16821,10 @@
                     <a:alpha val="100000"/>
                   </a:srgbClr>
                 </a:solidFill>
-                <a:latin typeface="Arial"/>
-                <a:cs typeface="Arial"/>
-                <a:ea typeface="Arial"/>
-                <a:sym typeface="Arial"/>
+                <a:latin typeface="Malgun Gothic"/>
+                <a:cs typeface="Malgun Gothic"/>
+                <a:ea typeface="Malgun Gothic"/>
+                <a:sym typeface="Malgun Gothic"/>
               </a:rPr>
               <a:t>● B (TARGET, 10매)</a:t>
             </a:r>
@@ -16900,10 +16900,10 @@
                     <a:alpha val="100000"/>
                   </a:srgbClr>
                 </a:solidFill>
-                <a:latin typeface="Arial"/>
-                <a:cs typeface="Arial"/>
-                <a:ea typeface="Arial"/>
-                <a:sym typeface="Arial"/>
+                <a:latin typeface="Malgun Gothic"/>
+                <a:cs typeface="Malgun Gothic"/>
+                <a:ea typeface="Malgun Gothic"/>
+                <a:sym typeface="Malgun Gothic"/>
               </a:rPr>
               <a:t>[DM] Data Review Board Auto Report</a:t>
             </a:r>
@@ -16954,10 +16954,10 @@
                     <a:alpha val="100000"/>
                   </a:srgbClr>
                 </a:solidFill>
-                <a:latin typeface="Arial"/>
-                <a:cs typeface="Arial"/>
-                <a:ea typeface="Arial"/>
-                <a:sym typeface="Arial"/>
+                <a:latin typeface="Malgun Gothic"/>
+                <a:cs typeface="Malgun Gothic"/>
+                <a:ea typeface="Malgun Gothic"/>
+                <a:sym typeface="Malgun Gothic"/>
               </a:rPr>
               <a:t>■</a:t>
             </a:r>
@@ -16968,10 +16968,10 @@
                     <a:alpha val="100000"/>
                   </a:srgbClr>
                 </a:solidFill>
-                <a:latin typeface="Arial"/>
-                <a:cs typeface="Arial"/>
-                <a:ea typeface="Arial"/>
-                <a:sym typeface="Arial"/>
+                <a:latin typeface="Malgun Gothic"/>
+                <a:cs typeface="Malgun Gothic"/>
+                <a:ea typeface="Malgun Gothic"/>
+                <a:sym typeface="Malgun Gothic"/>
               </a:rPr>
               <a:t> Category: Category2: PB</a:t>
             </a:r>
@@ -16996,10 +16996,10 @@
                     <a:alpha val="100000"/>
                   </a:srgbClr>
                 </a:solidFill>
-                <a:latin typeface="Arial"/>
-                <a:cs typeface="Arial"/>
-                <a:ea typeface="Arial"/>
-                <a:sym typeface="Arial"/>
+                <a:latin typeface="Malgun Gothic"/>
+                <a:cs typeface="Malgun Gothic"/>
+                <a:ea typeface="Malgun Gothic"/>
+                <a:sym typeface="Malgun Gothic"/>
               </a:rPr>
               <a:t>■</a:t>
             </a:r>
@@ -17010,10 +17010,10 @@
                     <a:alpha val="100000"/>
                   </a:srgbClr>
                 </a:solidFill>
-                <a:latin typeface="Arial"/>
-                <a:cs typeface="Arial"/>
-                <a:ea typeface="Arial"/>
-                <a:sym typeface="Arial"/>
+                <a:latin typeface="Malgun Gothic"/>
+                <a:cs typeface="Malgun Gothic"/>
+                <a:ea typeface="Malgun Gothic"/>
+                <a:sym typeface="Malgun Gothic"/>
               </a:rPr>
               <a:t> REF: A / TARGET: B</a:t>
             </a:r>
@@ -17038,10 +17038,10 @@
                     <a:alpha val="100000"/>
                   </a:srgbClr>
                 </a:solidFill>
-                <a:latin typeface="Arial"/>
-                <a:cs typeface="Arial"/>
-                <a:ea typeface="Arial"/>
-                <a:sym typeface="Arial"/>
+                <a:latin typeface="Malgun Gothic"/>
+                <a:cs typeface="Malgun Gothic"/>
+                <a:ea typeface="Malgun Gothic"/>
+                <a:sym typeface="Malgun Gothic"/>
               </a:rPr>
               <a:t>■</a:t>
             </a:r>
@@ -17052,10 +17052,10 @@
                     <a:alpha val="100000"/>
                   </a:srgbClr>
                 </a:solidFill>
-                <a:latin typeface="Arial"/>
-                <a:cs typeface="Arial"/>
-                <a:ea typeface="Arial"/>
-                <a:sym typeface="Arial"/>
+                <a:latin typeface="Malgun Gothic"/>
+                <a:cs typeface="Malgun Gothic"/>
+                <a:ea typeface="Malgun Gothic"/>
+                <a:sym typeface="Malgun Gothic"/>
               </a:rPr>
               <a:t> Showing MSR 1-6 of 6; threshold 0.5</a:t>
             </a:r>
@@ -17109,10 +17109,10 @@
                               <a:alpha val="100000"/>
                             </a:srgbClr>
                           </a:solidFill>
-                          <a:latin typeface="Arial"/>
-                          <a:cs typeface="Arial"/>
-                          <a:ea typeface="Arial"/>
-                          <a:sym typeface="Arial"/>
+                          <a:latin typeface="Malgun Gothic"/>
+                          <a:cs typeface="Malgun Gothic"/>
+                          <a:ea typeface="Malgun Gothic"/>
+                          <a:sym typeface="Malgun Gothic"/>
                         </a:rPr>
                         <a:t>Category2: PB - MSR 1-6 of 6</a:t>
                       </a:r>
@@ -17182,10 +17182,10 @@
                               <a:alpha val="100000"/>
                             </a:srgbClr>
                           </a:solidFill>
-                          <a:latin typeface="Arial"/>
-                          <a:cs typeface="Arial"/>
-                          <a:ea typeface="Arial"/>
-                          <a:sym typeface="Arial"/>
+                          <a:latin typeface="Malgun Gothic"/>
+                          <a:cs typeface="Malgun Gothic"/>
+                          <a:ea typeface="Malgun Gothic"/>
+                          <a:sym typeface="Malgun Gothic"/>
                         </a:rPr>
                         <a:t> </a:t>
                       </a:r>
@@ -17255,10 +17255,10 @@
                               <a:alpha val="100000"/>
                             </a:srgbClr>
                           </a:solidFill>
-                          <a:latin typeface="Arial"/>
-                          <a:cs typeface="Arial"/>
-                          <a:ea typeface="Arial"/>
-                          <a:sym typeface="Arial"/>
+                          <a:latin typeface="Malgun Gothic"/>
+                          <a:cs typeface="Malgun Gothic"/>
+                          <a:ea typeface="Malgun Gothic"/>
+                          <a:sym typeface="Malgun Gothic"/>
                         </a:rPr>
                         <a:t> </a:t>
                       </a:r>
@@ -17328,10 +17328,10 @@
                               <a:alpha val="100000"/>
                             </a:srgbClr>
                           </a:solidFill>
-                          <a:latin typeface="Arial"/>
-                          <a:cs typeface="Arial"/>
-                          <a:ea typeface="Arial"/>
-                          <a:sym typeface="Arial"/>
+                          <a:latin typeface="Malgun Gothic"/>
+                          <a:cs typeface="Malgun Gothic"/>
+                          <a:ea typeface="Malgun Gothic"/>
+                          <a:sym typeface="Malgun Gothic"/>
                         </a:rPr>
                         <a:t> </a:t>
                       </a:r>
@@ -17384,9 +17384,9 @@
                     <a:bodyPr/>
                     <a:lstStyle/>
                     <a:p>
-                      <a:pPr algn="l" marL="0" marR="0">
+                      <a:pPr algn="ctr" marL="0" marR="0">
                         <a:lnSpc>
-                          <a:spcPct val="10000"/>
+                          <a:spcPct val="100000"/>
                         </a:lnSpc>
                         <a:spcBef>
                           <a:spcPts val="0"/>
@@ -17403,10 +17403,10 @@
                               <a:alpha val="100000"/>
                             </a:srgbClr>
                           </a:solidFill>
-                          <a:latin typeface="Arial"/>
-                          <a:cs typeface="Arial"/>
-                          <a:ea typeface="Arial"/>
-                          <a:sym typeface="Arial"/>
+                          <a:latin typeface="Malgun Gothic"/>
+                          <a:cs typeface="Malgun Gothic"/>
+                          <a:ea typeface="Malgun Gothic"/>
+                          <a:sym typeface="Malgun Gothic"/>
                         </a:rPr>
                         <a:t> </a:t>
                       </a:r>
@@ -17457,9 +17457,9 @@
                     <a:bodyPr/>
                     <a:lstStyle/>
                     <a:p>
-                      <a:pPr algn="l" marL="0" marR="0">
+                      <a:pPr algn="ctr" marL="0" marR="0">
                         <a:lnSpc>
-                          <a:spcPct val="10000"/>
+                          <a:spcPct val="100000"/>
                         </a:lnSpc>
                         <a:spcBef>
                           <a:spcPts val="0"/>
@@ -17476,10 +17476,10 @@
                               <a:alpha val="100000"/>
                             </a:srgbClr>
                           </a:solidFill>
-                          <a:latin typeface="Arial"/>
-                          <a:cs typeface="Arial"/>
-                          <a:ea typeface="Arial"/>
-                          <a:sym typeface="Arial"/>
+                          <a:latin typeface="Malgun Gothic"/>
+                          <a:cs typeface="Malgun Gothic"/>
+                          <a:ea typeface="Malgun Gothic"/>
+                          <a:sym typeface="Malgun Gothic"/>
                         </a:rPr>
                         <a:t> </a:t>
                       </a:r>
@@ -17530,9 +17530,9 @@
                     <a:bodyPr/>
                     <a:lstStyle/>
                     <a:p>
-                      <a:pPr algn="l" marL="0" marR="0">
+                      <a:pPr algn="ctr" marL="0" marR="0">
                         <a:lnSpc>
-                          <a:spcPct val="10000"/>
+                          <a:spcPct val="100000"/>
                         </a:lnSpc>
                         <a:spcBef>
                           <a:spcPts val="0"/>
@@ -17549,10 +17549,10 @@
                               <a:alpha val="100000"/>
                             </a:srgbClr>
                           </a:solidFill>
-                          <a:latin typeface="Arial"/>
-                          <a:cs typeface="Arial"/>
-                          <a:ea typeface="Arial"/>
-                          <a:sym typeface="Arial"/>
+                          <a:latin typeface="Malgun Gothic"/>
+                          <a:cs typeface="Malgun Gothic"/>
+                          <a:ea typeface="Malgun Gothic"/>
+                          <a:sym typeface="Malgun Gothic"/>
                         </a:rPr>
                         <a:t> </a:t>
                       </a:r>
@@ -17603,9 +17603,9 @@
                     <a:bodyPr/>
                     <a:lstStyle/>
                     <a:p>
-                      <a:pPr algn="l" marL="0" marR="0">
+                      <a:pPr algn="ctr" marL="0" marR="0">
                         <a:lnSpc>
-                          <a:spcPct val="10000"/>
+                          <a:spcPct val="100000"/>
                         </a:lnSpc>
                         <a:spcBef>
                           <a:spcPts val="0"/>
@@ -17622,10 +17622,10 @@
                               <a:alpha val="100000"/>
                             </a:srgbClr>
                           </a:solidFill>
-                          <a:latin typeface="Arial"/>
-                          <a:cs typeface="Arial"/>
-                          <a:ea typeface="Arial"/>
-                          <a:sym typeface="Arial"/>
+                          <a:latin typeface="Malgun Gothic"/>
+                          <a:cs typeface="Malgun Gothic"/>
+                          <a:ea typeface="Malgun Gothic"/>
+                          <a:sym typeface="Malgun Gothic"/>
                         </a:rPr>
                         <a:t> </a:t>
                       </a:r>
@@ -17678,9 +17678,9 @@
                     <a:bodyPr/>
                     <a:lstStyle/>
                     <a:p>
-                      <a:pPr algn="l" marL="0" marR="0">
+                      <a:pPr algn="ctr" marL="0" marR="0">
                         <a:lnSpc>
-                          <a:spcPct val="10000"/>
+                          <a:spcPct val="100000"/>
                         </a:lnSpc>
                         <a:spcBef>
                           <a:spcPts val="0"/>
@@ -17697,10 +17697,10 @@
                               <a:alpha val="100000"/>
                             </a:srgbClr>
                           </a:solidFill>
-                          <a:latin typeface="Arial"/>
-                          <a:cs typeface="Arial"/>
-                          <a:ea typeface="Arial"/>
-                          <a:sym typeface="Arial"/>
+                          <a:latin typeface="Malgun Gothic"/>
+                          <a:cs typeface="Malgun Gothic"/>
+                          <a:ea typeface="Malgun Gothic"/>
+                          <a:sym typeface="Malgun Gothic"/>
                         </a:rPr>
                         <a:t> </a:t>
                       </a:r>
@@ -17751,9 +17751,9 @@
                     <a:bodyPr/>
                     <a:lstStyle/>
                     <a:p>
-                      <a:pPr algn="l" marL="0" marR="0">
+                      <a:pPr algn="ctr" marL="0" marR="0">
                         <a:lnSpc>
-                          <a:spcPct val="10000"/>
+                          <a:spcPct val="100000"/>
                         </a:lnSpc>
                         <a:spcBef>
                           <a:spcPts val="0"/>
@@ -17770,10 +17770,10 @@
                               <a:alpha val="100000"/>
                             </a:srgbClr>
                           </a:solidFill>
-                          <a:latin typeface="Arial"/>
-                          <a:cs typeface="Arial"/>
-                          <a:ea typeface="Arial"/>
-                          <a:sym typeface="Arial"/>
+                          <a:latin typeface="Malgun Gothic"/>
+                          <a:cs typeface="Malgun Gothic"/>
+                          <a:ea typeface="Malgun Gothic"/>
+                          <a:sym typeface="Malgun Gothic"/>
                         </a:rPr>
                         <a:t> </a:t>
                       </a:r>
@@ -17824,9 +17824,9 @@
                     <a:bodyPr/>
                     <a:lstStyle/>
                     <a:p>
-                      <a:pPr algn="l" marL="0" marR="0">
+                      <a:pPr algn="ctr" marL="0" marR="0">
                         <a:lnSpc>
-                          <a:spcPct val="10000"/>
+                          <a:spcPct val="100000"/>
                         </a:lnSpc>
                         <a:spcBef>
                           <a:spcPts val="0"/>
@@ -17843,10 +17843,10 @@
                               <a:alpha val="100000"/>
                             </a:srgbClr>
                           </a:solidFill>
-                          <a:latin typeface="Arial"/>
-                          <a:cs typeface="Arial"/>
-                          <a:ea typeface="Arial"/>
-                          <a:sym typeface="Arial"/>
+                          <a:latin typeface="Malgun Gothic"/>
+                          <a:cs typeface="Malgun Gothic"/>
+                          <a:ea typeface="Malgun Gothic"/>
+                          <a:sym typeface="Malgun Gothic"/>
                         </a:rPr>
                         <a:t> </a:t>
                       </a:r>
@@ -17897,9 +17897,9 @@
                     <a:bodyPr/>
                     <a:lstStyle/>
                     <a:p>
-                      <a:pPr algn="l" marL="0" marR="0">
+                      <a:pPr algn="ctr" marL="0" marR="0">
                         <a:lnSpc>
-                          <a:spcPct val="10000"/>
+                          <a:spcPct val="100000"/>
                         </a:lnSpc>
                         <a:spcBef>
                           <a:spcPts val="0"/>
@@ -17916,10 +17916,10 @@
                               <a:alpha val="100000"/>
                             </a:srgbClr>
                           </a:solidFill>
-                          <a:latin typeface="Arial"/>
-                          <a:cs typeface="Arial"/>
-                          <a:ea typeface="Arial"/>
-                          <a:sym typeface="Arial"/>
+                          <a:latin typeface="Malgun Gothic"/>
+                          <a:cs typeface="Malgun Gothic"/>
+                          <a:ea typeface="Malgun Gothic"/>
+                          <a:sym typeface="Malgun Gothic"/>
                         </a:rPr>
                         <a:t> </a:t>
                       </a:r>
@@ -17972,9 +17972,9 @@
                     <a:bodyPr/>
                     <a:lstStyle/>
                     <a:p>
-                      <a:pPr algn="l" marL="0" marR="0">
+                      <a:pPr algn="ctr" marL="0" marR="0">
                         <a:lnSpc>
-                          <a:spcPct val="10000"/>
+                          <a:spcPct val="100000"/>
                         </a:lnSpc>
                         <a:spcBef>
                           <a:spcPts val="0"/>
@@ -17991,10 +17991,10 @@
                               <a:alpha val="100000"/>
                             </a:srgbClr>
                           </a:solidFill>
-                          <a:latin typeface="Arial"/>
-                          <a:cs typeface="Arial"/>
-                          <a:ea typeface="Arial"/>
-                          <a:sym typeface="Arial"/>
+                          <a:latin typeface="Malgun Gothic"/>
+                          <a:cs typeface="Malgun Gothic"/>
+                          <a:ea typeface="Malgun Gothic"/>
+                          <a:sym typeface="Malgun Gothic"/>
                         </a:rPr>
                         <a:t> </a:t>
                       </a:r>
@@ -18045,9 +18045,9 @@
                     <a:bodyPr/>
                     <a:lstStyle/>
                     <a:p>
-                      <a:pPr algn="l" marL="0" marR="0">
+                      <a:pPr algn="ctr" marL="0" marR="0">
                         <a:lnSpc>
-                          <a:spcPct val="10000"/>
+                          <a:spcPct val="100000"/>
                         </a:lnSpc>
                         <a:spcBef>
                           <a:spcPts val="0"/>
@@ -18064,10 +18064,10 @@
                               <a:alpha val="100000"/>
                             </a:srgbClr>
                           </a:solidFill>
-                          <a:latin typeface="Arial"/>
-                          <a:cs typeface="Arial"/>
-                          <a:ea typeface="Arial"/>
-                          <a:sym typeface="Arial"/>
+                          <a:latin typeface="Malgun Gothic"/>
+                          <a:cs typeface="Malgun Gothic"/>
+                          <a:ea typeface="Malgun Gothic"/>
+                          <a:sym typeface="Malgun Gothic"/>
                         </a:rPr>
                         <a:t> </a:t>
                       </a:r>
@@ -18118,9 +18118,9 @@
                     <a:bodyPr/>
                     <a:lstStyle/>
                     <a:p>
-                      <a:pPr algn="l" marL="0" marR="0">
+                      <a:pPr algn="ctr" marL="0" marR="0">
                         <a:lnSpc>
-                          <a:spcPct val="10000"/>
+                          <a:spcPct val="100000"/>
                         </a:lnSpc>
                         <a:spcBef>
                           <a:spcPts val="0"/>
@@ -18137,10 +18137,10 @@
                               <a:alpha val="100000"/>
                             </a:srgbClr>
                           </a:solidFill>
-                          <a:latin typeface="Arial"/>
-                          <a:cs typeface="Arial"/>
-                          <a:ea typeface="Arial"/>
-                          <a:sym typeface="Arial"/>
+                          <a:latin typeface="Malgun Gothic"/>
+                          <a:cs typeface="Malgun Gothic"/>
+                          <a:ea typeface="Malgun Gothic"/>
+                          <a:sym typeface="Malgun Gothic"/>
                         </a:rPr>
                         <a:t> </a:t>
                       </a:r>
@@ -18191,9 +18191,9 @@
                     <a:bodyPr/>
                     <a:lstStyle/>
                     <a:p>
-                      <a:pPr algn="l" marL="0" marR="0">
+                      <a:pPr algn="ctr" marL="0" marR="0">
                         <a:lnSpc>
-                          <a:spcPct val="10000"/>
+                          <a:spcPct val="100000"/>
                         </a:lnSpc>
                         <a:spcBef>
                           <a:spcPts val="0"/>
@@ -18210,10 +18210,10 @@
                               <a:alpha val="100000"/>
                             </a:srgbClr>
                           </a:solidFill>
-                          <a:latin typeface="Arial"/>
-                          <a:cs typeface="Arial"/>
-                          <a:ea typeface="Arial"/>
-                          <a:sym typeface="Arial"/>
+                          <a:latin typeface="Malgun Gothic"/>
+                          <a:cs typeface="Malgun Gothic"/>
+                          <a:ea typeface="Malgun Gothic"/>
+                          <a:sym typeface="Malgun Gothic"/>
                         </a:rPr>
                         <a:t> </a:t>
                       </a:r>
@@ -18266,9 +18266,9 @@
                     <a:bodyPr/>
                     <a:lstStyle/>
                     <a:p>
-                      <a:pPr algn="l" marL="0" marR="0">
+                      <a:pPr algn="ctr" marL="0" marR="0">
                         <a:lnSpc>
-                          <a:spcPct val="10000"/>
+                          <a:spcPct val="100000"/>
                         </a:lnSpc>
                         <a:spcBef>
                           <a:spcPts val="0"/>
@@ -18285,10 +18285,10 @@
                               <a:alpha val="100000"/>
                             </a:srgbClr>
                           </a:solidFill>
-                          <a:latin typeface="Arial"/>
-                          <a:cs typeface="Arial"/>
-                          <a:ea typeface="Arial"/>
-                          <a:sym typeface="Arial"/>
+                          <a:latin typeface="Malgun Gothic"/>
+                          <a:cs typeface="Malgun Gothic"/>
+                          <a:ea typeface="Malgun Gothic"/>
+                          <a:sym typeface="Malgun Gothic"/>
                         </a:rPr>
                         <a:t> </a:t>
                       </a:r>
@@ -18339,9 +18339,9 @@
                     <a:bodyPr/>
                     <a:lstStyle/>
                     <a:p>
-                      <a:pPr algn="l" marL="0" marR="0">
+                      <a:pPr algn="ctr" marL="0" marR="0">
                         <a:lnSpc>
-                          <a:spcPct val="10000"/>
+                          <a:spcPct val="100000"/>
                         </a:lnSpc>
                         <a:spcBef>
                           <a:spcPts val="0"/>
@@ -18358,10 +18358,10 @@
                               <a:alpha val="100000"/>
                             </a:srgbClr>
                           </a:solidFill>
-                          <a:latin typeface="Arial"/>
-                          <a:cs typeface="Arial"/>
-                          <a:ea typeface="Arial"/>
-                          <a:sym typeface="Arial"/>
+                          <a:latin typeface="Malgun Gothic"/>
+                          <a:cs typeface="Malgun Gothic"/>
+                          <a:ea typeface="Malgun Gothic"/>
+                          <a:sym typeface="Malgun Gothic"/>
                         </a:rPr>
                         <a:t> </a:t>
                       </a:r>
@@ -18412,9 +18412,9 @@
                     <a:bodyPr/>
                     <a:lstStyle/>
                     <a:p>
-                      <a:pPr algn="l" marL="0" marR="0">
+                      <a:pPr algn="ctr" marL="0" marR="0">
                         <a:lnSpc>
-                          <a:spcPct val="10000"/>
+                          <a:spcPct val="100000"/>
                         </a:lnSpc>
                         <a:spcBef>
                           <a:spcPts val="0"/>
@@ -18431,10 +18431,10 @@
                               <a:alpha val="100000"/>
                             </a:srgbClr>
                           </a:solidFill>
-                          <a:latin typeface="Arial"/>
-                          <a:cs typeface="Arial"/>
-                          <a:ea typeface="Arial"/>
-                          <a:sym typeface="Arial"/>
+                          <a:latin typeface="Malgun Gothic"/>
+                          <a:cs typeface="Malgun Gothic"/>
+                          <a:ea typeface="Malgun Gothic"/>
+                          <a:sym typeface="Malgun Gothic"/>
                         </a:rPr>
                         <a:t> </a:t>
                       </a:r>
@@ -18485,9 +18485,9 @@
                     <a:bodyPr/>
                     <a:lstStyle/>
                     <a:p>
-                      <a:pPr algn="l" marL="0" marR="0">
+                      <a:pPr algn="ctr" marL="0" marR="0">
                         <a:lnSpc>
-                          <a:spcPct val="10000"/>
+                          <a:spcPct val="100000"/>
                         </a:lnSpc>
                         <a:spcBef>
                           <a:spcPts val="0"/>
@@ -18504,10 +18504,10 @@
                               <a:alpha val="100000"/>
                             </a:srgbClr>
                           </a:solidFill>
-                          <a:latin typeface="Arial"/>
-                          <a:cs typeface="Arial"/>
-                          <a:ea typeface="Arial"/>
-                          <a:sym typeface="Arial"/>
+                          <a:latin typeface="Malgun Gothic"/>
+                          <a:cs typeface="Malgun Gothic"/>
+                          <a:ea typeface="Malgun Gothic"/>
+                          <a:sym typeface="Malgun Gothic"/>
                         </a:rPr>
                         <a:t> </a:t>
                       </a:r>
@@ -18602,10 +18602,10 @@
                     <a:alpha val="100000"/>
                   </a:srgbClr>
                 </a:solidFill>
-                <a:latin typeface="Arial"/>
-                <a:cs typeface="Arial"/>
-                <a:ea typeface="Arial"/>
-                <a:sym typeface="Arial"/>
+                <a:latin typeface="Malgun Gothic"/>
+                <a:cs typeface="Malgun Gothic"/>
+                <a:ea typeface="Malgun Gothic"/>
+                <a:sym typeface="Malgun Gothic"/>
               </a:rPr>
               <a:t>⬤</a:t>
             </a:r>
@@ -18616,10 +18616,10 @@
                     <a:alpha val="100000"/>
                   </a:srgbClr>
                 </a:solidFill>
-                <a:latin typeface="Arial"/>
-                <a:cs typeface="Arial"/>
-                <a:ea typeface="Arial"/>
-                <a:sym typeface="Arial"/>
+                <a:latin typeface="Malgun Gothic"/>
+                <a:cs typeface="Malgun Gothic"/>
+                <a:ea typeface="Malgun Gothic"/>
+                <a:sym typeface="Malgun Gothic"/>
               </a:rPr>
               <a:t> (ML_MSR_052) Peri_PB_052</a:t>
             </a:r>
@@ -18696,10 +18696,10 @@
                     <a:alpha val="100000"/>
                   </a:srgbClr>
                 </a:solidFill>
-                <a:latin typeface="Arial"/>
-                <a:cs typeface="Arial"/>
-                <a:ea typeface="Arial"/>
-                <a:sym typeface="Arial"/>
+                <a:latin typeface="Malgun Gothic"/>
+                <a:cs typeface="Malgun Gothic"/>
+                <a:ea typeface="Malgun Gothic"/>
+                <a:sym typeface="Malgun Gothic"/>
               </a:rPr>
               <a:t>+0.3sig</a:t>
             </a:r>
@@ -18750,10 +18750,10 @@
                     <a:alpha val="100000"/>
                   </a:srgbClr>
                 </a:solidFill>
-                <a:latin typeface="Arial"/>
-                <a:cs typeface="Arial"/>
-                <a:ea typeface="Arial"/>
-                <a:sym typeface="Arial"/>
+                <a:latin typeface="Malgun Gothic"/>
+                <a:cs typeface="Malgun Gothic"/>
+                <a:ea typeface="Malgun Gothic"/>
+                <a:sym typeface="Malgun Gothic"/>
               </a:rPr>
               <a:t>⬤</a:t>
             </a:r>
@@ -18764,10 +18764,10 @@
                     <a:alpha val="100000"/>
                   </a:srgbClr>
                 </a:solidFill>
-                <a:latin typeface="Arial"/>
-                <a:cs typeface="Arial"/>
-                <a:ea typeface="Arial"/>
-                <a:sym typeface="Arial"/>
+                <a:latin typeface="Malgun Gothic"/>
+                <a:cs typeface="Malgun Gothic"/>
+                <a:ea typeface="Malgun Gothic"/>
+                <a:sym typeface="Malgun Gothic"/>
               </a:rPr>
               <a:t> (ML_MSR_046) Peri_PB_046</a:t>
             </a:r>
@@ -18844,10 +18844,10 @@
                     <a:alpha val="100000"/>
                   </a:srgbClr>
                 </a:solidFill>
-                <a:latin typeface="Arial"/>
-                <a:cs typeface="Arial"/>
-                <a:ea typeface="Arial"/>
-                <a:sym typeface="Arial"/>
+                <a:latin typeface="Malgun Gothic"/>
+                <a:cs typeface="Malgun Gothic"/>
+                <a:ea typeface="Malgun Gothic"/>
+                <a:sym typeface="Malgun Gothic"/>
               </a:rPr>
               <a:t>-0.0sig</a:t>
             </a:r>
@@ -18898,10 +18898,10 @@
                     <a:alpha val="100000"/>
                   </a:srgbClr>
                 </a:solidFill>
-                <a:latin typeface="Arial"/>
-                <a:cs typeface="Arial"/>
-                <a:ea typeface="Arial"/>
-                <a:sym typeface="Arial"/>
+                <a:latin typeface="Malgun Gothic"/>
+                <a:cs typeface="Malgun Gothic"/>
+                <a:ea typeface="Malgun Gothic"/>
+                <a:sym typeface="Malgun Gothic"/>
               </a:rPr>
               <a:t>⬤</a:t>
             </a:r>
@@ -18912,10 +18912,10 @@
                     <a:alpha val="100000"/>
                   </a:srgbClr>
                 </a:solidFill>
-                <a:latin typeface="Arial"/>
-                <a:cs typeface="Arial"/>
-                <a:ea typeface="Arial"/>
-                <a:sym typeface="Arial"/>
+                <a:latin typeface="Malgun Gothic"/>
+                <a:cs typeface="Malgun Gothic"/>
+                <a:ea typeface="Malgun Gothic"/>
+                <a:sym typeface="Malgun Gothic"/>
               </a:rPr>
               <a:t> (ML_MSR_070) Peri_PB_070</a:t>
             </a:r>
@@ -18992,10 +18992,10 @@
                     <a:alpha val="100000"/>
                   </a:srgbClr>
                 </a:solidFill>
-                <a:latin typeface="Arial"/>
-                <a:cs typeface="Arial"/>
-                <a:ea typeface="Arial"/>
-                <a:sym typeface="Arial"/>
+                <a:latin typeface="Malgun Gothic"/>
+                <a:cs typeface="Malgun Gothic"/>
+                <a:ea typeface="Malgun Gothic"/>
+                <a:sym typeface="Malgun Gothic"/>
               </a:rPr>
               <a:t>-0.0sig</a:t>
             </a:r>
@@ -19046,10 +19046,10 @@
                     <a:alpha val="100000"/>
                   </a:srgbClr>
                 </a:solidFill>
-                <a:latin typeface="Arial"/>
-                <a:cs typeface="Arial"/>
-                <a:ea typeface="Arial"/>
-                <a:sym typeface="Arial"/>
+                <a:latin typeface="Malgun Gothic"/>
+                <a:cs typeface="Malgun Gothic"/>
+                <a:ea typeface="Malgun Gothic"/>
+                <a:sym typeface="Malgun Gothic"/>
               </a:rPr>
               <a:t>⬤</a:t>
             </a:r>
@@ -19060,10 +19060,10 @@
                     <a:alpha val="100000"/>
                   </a:srgbClr>
                 </a:solidFill>
-                <a:latin typeface="Arial"/>
-                <a:cs typeface="Arial"/>
-                <a:ea typeface="Arial"/>
-                <a:sym typeface="Arial"/>
+                <a:latin typeface="Malgun Gothic"/>
+                <a:cs typeface="Malgun Gothic"/>
+                <a:ea typeface="Malgun Gothic"/>
+                <a:sym typeface="Malgun Gothic"/>
               </a:rPr>
               <a:t> (ML_MSR_023) Peri_PB_023</a:t>
             </a:r>
@@ -19140,10 +19140,10 @@
                     <a:alpha val="100000"/>
                   </a:srgbClr>
                 </a:solidFill>
-                <a:latin typeface="Arial"/>
-                <a:cs typeface="Arial"/>
-                <a:ea typeface="Arial"/>
-                <a:sym typeface="Arial"/>
+                <a:latin typeface="Malgun Gothic"/>
+                <a:cs typeface="Malgun Gothic"/>
+                <a:ea typeface="Malgun Gothic"/>
+                <a:sym typeface="Malgun Gothic"/>
               </a:rPr>
               <a:t>-0.0sig</a:t>
             </a:r>
@@ -19194,10 +19194,10 @@
                     <a:alpha val="100000"/>
                   </a:srgbClr>
                 </a:solidFill>
-                <a:latin typeface="Arial"/>
-                <a:cs typeface="Arial"/>
-                <a:ea typeface="Arial"/>
-                <a:sym typeface="Arial"/>
+                <a:latin typeface="Malgun Gothic"/>
+                <a:cs typeface="Malgun Gothic"/>
+                <a:ea typeface="Malgun Gothic"/>
+                <a:sym typeface="Malgun Gothic"/>
               </a:rPr>
               <a:t>⬤</a:t>
             </a:r>
@@ -19208,10 +19208,10 @@
                     <a:alpha val="100000"/>
                   </a:srgbClr>
                 </a:solidFill>
-                <a:latin typeface="Arial"/>
-                <a:cs typeface="Arial"/>
-                <a:ea typeface="Arial"/>
-                <a:sym typeface="Arial"/>
+                <a:latin typeface="Malgun Gothic"/>
+                <a:cs typeface="Malgun Gothic"/>
+                <a:ea typeface="Malgun Gothic"/>
+                <a:sym typeface="Malgun Gothic"/>
               </a:rPr>
               <a:t> (ML_MSR_004) Peri_PB_004</a:t>
             </a:r>
@@ -19288,10 +19288,10 @@
                     <a:alpha val="100000"/>
                   </a:srgbClr>
                 </a:solidFill>
-                <a:latin typeface="Arial"/>
-                <a:cs typeface="Arial"/>
-                <a:ea typeface="Arial"/>
-                <a:sym typeface="Arial"/>
+                <a:latin typeface="Malgun Gothic"/>
+                <a:cs typeface="Malgun Gothic"/>
+                <a:ea typeface="Malgun Gothic"/>
+                <a:sym typeface="Malgun Gothic"/>
               </a:rPr>
               <a:t>+0.6sig</a:t>
             </a:r>
@@ -19342,10 +19342,10 @@
                     <a:alpha val="100000"/>
                   </a:srgbClr>
                 </a:solidFill>
-                <a:latin typeface="Arial"/>
-                <a:cs typeface="Arial"/>
-                <a:ea typeface="Arial"/>
-                <a:sym typeface="Arial"/>
+                <a:latin typeface="Malgun Gothic"/>
+                <a:cs typeface="Malgun Gothic"/>
+                <a:ea typeface="Malgun Gothic"/>
+                <a:sym typeface="Malgun Gothic"/>
               </a:rPr>
               <a:t>⬤</a:t>
             </a:r>
@@ -19356,10 +19356,10 @@
                     <a:alpha val="100000"/>
                   </a:srgbClr>
                 </a:solidFill>
-                <a:latin typeface="Arial"/>
-                <a:cs typeface="Arial"/>
-                <a:ea typeface="Arial"/>
-                <a:sym typeface="Arial"/>
+                <a:latin typeface="Malgun Gothic"/>
+                <a:cs typeface="Malgun Gothic"/>
+                <a:ea typeface="Malgun Gothic"/>
+                <a:sym typeface="Malgun Gothic"/>
               </a:rPr>
               <a:t> (ML_MSR_034) Peri_PB_034</a:t>
             </a:r>
@@ -19436,10 +19436,10 @@
                     <a:alpha val="100000"/>
                   </a:srgbClr>
                 </a:solidFill>
-                <a:latin typeface="Arial"/>
-                <a:cs typeface="Arial"/>
-                <a:ea typeface="Arial"/>
-                <a:sym typeface="Arial"/>
+                <a:latin typeface="Malgun Gothic"/>
+                <a:cs typeface="Malgun Gothic"/>
+                <a:ea typeface="Malgun Gothic"/>
+                <a:sym typeface="Malgun Gothic"/>
               </a:rPr>
               <a:t>+0.5sig</a:t>
             </a:r>
@@ -19458,8 +19458,8 @@
         </p:nvSpPr>
         <p:spPr>
           <a:xfrm>
-            <a:off x="4711446" y="6446520"/>
-            <a:ext cx="2766060" cy="219456"/>
+            <a:off x="4642866" y="6446520"/>
+            <a:ext cx="2903220" cy="219456"/>
           </a:xfrm>
           <a:solidFill>
             <a:srgbClr val="FFFFFF">
@@ -19490,10 +19490,10 @@
                     <a:alpha val="100000"/>
                   </a:srgbClr>
                 </a:solidFill>
-                <a:latin typeface="Arial"/>
-                <a:cs typeface="Arial"/>
-                <a:ea typeface="Arial"/>
-                <a:sym typeface="Arial"/>
+                <a:latin typeface="Malgun Gothic"/>
+                <a:cs typeface="Malgun Gothic"/>
+                <a:ea typeface="Malgun Gothic"/>
+                <a:sym typeface="Malgun Gothic"/>
               </a:rPr>
               <a:t>● A (REF, 16매)</a:t>
             </a:r>
@@ -19504,10 +19504,10 @@
                     <a:alpha val="100000"/>
                   </a:srgbClr>
                 </a:solidFill>
-                <a:latin typeface="Arial"/>
-                <a:cs typeface="Arial"/>
-                <a:ea typeface="Arial"/>
-                <a:sym typeface="Arial"/>
+                <a:latin typeface="Malgun Gothic"/>
+                <a:cs typeface="Malgun Gothic"/>
+                <a:ea typeface="Malgun Gothic"/>
+                <a:sym typeface="Malgun Gothic"/>
               </a:rPr>
               <a:t>    </a:t>
             </a:r>
@@ -19518,10 +19518,10 @@
                     <a:alpha val="100000"/>
                   </a:srgbClr>
                 </a:solidFill>
-                <a:latin typeface="Arial"/>
-                <a:cs typeface="Arial"/>
-                <a:ea typeface="Arial"/>
-                <a:sym typeface="Arial"/>
+                <a:latin typeface="Malgun Gothic"/>
+                <a:cs typeface="Malgun Gothic"/>
+                <a:ea typeface="Malgun Gothic"/>
+                <a:sym typeface="Malgun Gothic"/>
               </a:rPr>
               <a:t>● B (TARGET, 10매)</a:t>
             </a:r>
@@ -19597,10 +19597,10 @@
                     <a:alpha val="100000"/>
                   </a:srgbClr>
                 </a:solidFill>
-                <a:latin typeface="Arial"/>
-                <a:cs typeface="Arial"/>
-                <a:ea typeface="Arial"/>
-                <a:sym typeface="Arial"/>
+                <a:latin typeface="Malgun Gothic"/>
+                <a:cs typeface="Malgun Gothic"/>
+                <a:ea typeface="Malgun Gothic"/>
+                <a:sym typeface="Malgun Gothic"/>
               </a:rPr>
               <a:t>[DM] Data Review Board Auto Report</a:t>
             </a:r>
@@ -19651,10 +19651,10 @@
                     <a:alpha val="100000"/>
                   </a:srgbClr>
                 </a:solidFill>
-                <a:latin typeface="Arial"/>
-                <a:cs typeface="Arial"/>
-                <a:ea typeface="Arial"/>
-                <a:sym typeface="Arial"/>
+                <a:latin typeface="Malgun Gothic"/>
+                <a:cs typeface="Malgun Gothic"/>
+                <a:ea typeface="Malgun Gothic"/>
+                <a:sym typeface="Malgun Gothic"/>
               </a:rPr>
               <a:t>■</a:t>
             </a:r>
@@ -19665,10 +19665,10 @@
                     <a:alpha val="100000"/>
                   </a:srgbClr>
                 </a:solidFill>
-                <a:latin typeface="Arial"/>
-                <a:cs typeface="Arial"/>
-                <a:ea typeface="Arial"/>
-                <a:sym typeface="Arial"/>
+                <a:latin typeface="Malgun Gothic"/>
+                <a:cs typeface="Malgun Gothic"/>
+                <a:ea typeface="Malgun Gothic"/>
+                <a:sym typeface="Malgun Gothic"/>
               </a:rPr>
               <a:t> Category: Category2: WLS</a:t>
             </a:r>
@@ -19693,10 +19693,10 @@
                     <a:alpha val="100000"/>
                   </a:srgbClr>
                 </a:solidFill>
-                <a:latin typeface="Arial"/>
-                <a:cs typeface="Arial"/>
-                <a:ea typeface="Arial"/>
-                <a:sym typeface="Arial"/>
+                <a:latin typeface="Malgun Gothic"/>
+                <a:cs typeface="Malgun Gothic"/>
+                <a:ea typeface="Malgun Gothic"/>
+                <a:sym typeface="Malgun Gothic"/>
               </a:rPr>
               <a:t>■</a:t>
             </a:r>
@@ -19707,10 +19707,10 @@
                     <a:alpha val="100000"/>
                   </a:srgbClr>
                 </a:solidFill>
-                <a:latin typeface="Arial"/>
-                <a:cs typeface="Arial"/>
-                <a:ea typeface="Arial"/>
-                <a:sym typeface="Arial"/>
+                <a:latin typeface="Malgun Gothic"/>
+                <a:cs typeface="Malgun Gothic"/>
+                <a:ea typeface="Malgun Gothic"/>
+                <a:sym typeface="Malgun Gothic"/>
               </a:rPr>
               <a:t> REF: A / TARGET: B</a:t>
             </a:r>
@@ -19735,10 +19735,10 @@
                     <a:alpha val="100000"/>
                   </a:srgbClr>
                 </a:solidFill>
-                <a:latin typeface="Arial"/>
-                <a:cs typeface="Arial"/>
-                <a:ea typeface="Arial"/>
-                <a:sym typeface="Arial"/>
+                <a:latin typeface="Malgun Gothic"/>
+                <a:cs typeface="Malgun Gothic"/>
+                <a:ea typeface="Malgun Gothic"/>
+                <a:sym typeface="Malgun Gothic"/>
               </a:rPr>
               <a:t>■</a:t>
             </a:r>
@@ -19749,10 +19749,10 @@
                     <a:alpha val="100000"/>
                   </a:srgbClr>
                 </a:solidFill>
-                <a:latin typeface="Arial"/>
-                <a:cs typeface="Arial"/>
-                <a:ea typeface="Arial"/>
-                <a:sym typeface="Arial"/>
+                <a:latin typeface="Malgun Gothic"/>
+                <a:cs typeface="Malgun Gothic"/>
+                <a:ea typeface="Malgun Gothic"/>
+                <a:sym typeface="Malgun Gothic"/>
               </a:rPr>
               <a:t> Showing MSR 1-3 of 3; threshold 0.5</a:t>
             </a:r>
@@ -19806,10 +19806,10 @@
                               <a:alpha val="100000"/>
                             </a:srgbClr>
                           </a:solidFill>
-                          <a:latin typeface="Arial"/>
-                          <a:cs typeface="Arial"/>
-                          <a:ea typeface="Arial"/>
-                          <a:sym typeface="Arial"/>
+                          <a:latin typeface="Malgun Gothic"/>
+                          <a:cs typeface="Malgun Gothic"/>
+                          <a:ea typeface="Malgun Gothic"/>
+                          <a:sym typeface="Malgun Gothic"/>
                         </a:rPr>
                         <a:t>Category2: WLS - MSR 1-3 of 3</a:t>
                       </a:r>
@@ -19879,10 +19879,10 @@
                               <a:alpha val="100000"/>
                             </a:srgbClr>
                           </a:solidFill>
-                          <a:latin typeface="Arial"/>
-                          <a:cs typeface="Arial"/>
-                          <a:ea typeface="Arial"/>
-                          <a:sym typeface="Arial"/>
+                          <a:latin typeface="Malgun Gothic"/>
+                          <a:cs typeface="Malgun Gothic"/>
+                          <a:ea typeface="Malgun Gothic"/>
+                          <a:sym typeface="Malgun Gothic"/>
                         </a:rPr>
                         <a:t> </a:t>
                       </a:r>
@@ -19952,10 +19952,10 @@
                               <a:alpha val="100000"/>
                             </a:srgbClr>
                           </a:solidFill>
-                          <a:latin typeface="Arial"/>
-                          <a:cs typeface="Arial"/>
-                          <a:ea typeface="Arial"/>
-                          <a:sym typeface="Arial"/>
+                          <a:latin typeface="Malgun Gothic"/>
+                          <a:cs typeface="Malgun Gothic"/>
+                          <a:ea typeface="Malgun Gothic"/>
+                          <a:sym typeface="Malgun Gothic"/>
                         </a:rPr>
                         <a:t> </a:t>
                       </a:r>
@@ -20025,10 +20025,10 @@
                               <a:alpha val="100000"/>
                             </a:srgbClr>
                           </a:solidFill>
-                          <a:latin typeface="Arial"/>
-                          <a:cs typeface="Arial"/>
-                          <a:ea typeface="Arial"/>
-                          <a:sym typeface="Arial"/>
+                          <a:latin typeface="Malgun Gothic"/>
+                          <a:cs typeface="Malgun Gothic"/>
+                          <a:ea typeface="Malgun Gothic"/>
+                          <a:sym typeface="Malgun Gothic"/>
                         </a:rPr>
                         <a:t> </a:t>
                       </a:r>
@@ -20081,9 +20081,9 @@
                     <a:bodyPr/>
                     <a:lstStyle/>
                     <a:p>
-                      <a:pPr algn="l" marL="0" marR="0">
+                      <a:pPr algn="ctr" marL="0" marR="0">
                         <a:lnSpc>
-                          <a:spcPct val="10000"/>
+                          <a:spcPct val="100000"/>
                         </a:lnSpc>
                         <a:spcBef>
                           <a:spcPts val="0"/>
@@ -20100,10 +20100,10 @@
                               <a:alpha val="100000"/>
                             </a:srgbClr>
                           </a:solidFill>
-                          <a:latin typeface="Arial"/>
-                          <a:cs typeface="Arial"/>
-                          <a:ea typeface="Arial"/>
-                          <a:sym typeface="Arial"/>
+                          <a:latin typeface="Malgun Gothic"/>
+                          <a:cs typeface="Malgun Gothic"/>
+                          <a:ea typeface="Malgun Gothic"/>
+                          <a:sym typeface="Malgun Gothic"/>
                         </a:rPr>
                         <a:t> </a:t>
                       </a:r>
@@ -20154,9 +20154,9 @@
                     <a:bodyPr/>
                     <a:lstStyle/>
                     <a:p>
-                      <a:pPr algn="l" marL="0" marR="0">
+                      <a:pPr algn="ctr" marL="0" marR="0">
                         <a:lnSpc>
-                          <a:spcPct val="10000"/>
+                          <a:spcPct val="100000"/>
                         </a:lnSpc>
                         <a:spcBef>
                           <a:spcPts val="0"/>
@@ -20173,10 +20173,10 @@
                               <a:alpha val="100000"/>
                             </a:srgbClr>
                           </a:solidFill>
-                          <a:latin typeface="Arial"/>
-                          <a:cs typeface="Arial"/>
-                          <a:ea typeface="Arial"/>
-                          <a:sym typeface="Arial"/>
+                          <a:latin typeface="Malgun Gothic"/>
+                          <a:cs typeface="Malgun Gothic"/>
+                          <a:ea typeface="Malgun Gothic"/>
+                          <a:sym typeface="Malgun Gothic"/>
                         </a:rPr>
                         <a:t> </a:t>
                       </a:r>
@@ -20227,9 +20227,9 @@
                     <a:bodyPr/>
                     <a:lstStyle/>
                     <a:p>
-                      <a:pPr algn="l" marL="0" marR="0">
+                      <a:pPr algn="ctr" marL="0" marR="0">
                         <a:lnSpc>
-                          <a:spcPct val="10000"/>
+                          <a:spcPct val="100000"/>
                         </a:lnSpc>
                         <a:spcBef>
                           <a:spcPts val="0"/>
@@ -20246,10 +20246,10 @@
                               <a:alpha val="100000"/>
                             </a:srgbClr>
                           </a:solidFill>
-                          <a:latin typeface="Arial"/>
-                          <a:cs typeface="Arial"/>
-                          <a:ea typeface="Arial"/>
-                          <a:sym typeface="Arial"/>
+                          <a:latin typeface="Malgun Gothic"/>
+                          <a:cs typeface="Malgun Gothic"/>
+                          <a:ea typeface="Malgun Gothic"/>
+                          <a:sym typeface="Malgun Gothic"/>
                         </a:rPr>
                         <a:t> </a:t>
                       </a:r>
@@ -20300,9 +20300,9 @@
                     <a:bodyPr/>
                     <a:lstStyle/>
                     <a:p>
-                      <a:pPr algn="l" marL="0" marR="0">
+                      <a:pPr algn="ctr" marL="0" marR="0">
                         <a:lnSpc>
-                          <a:spcPct val="10000"/>
+                          <a:spcPct val="100000"/>
                         </a:lnSpc>
                         <a:spcBef>
                           <a:spcPts val="0"/>
@@ -20319,10 +20319,10 @@
                               <a:alpha val="100000"/>
                             </a:srgbClr>
                           </a:solidFill>
-                          <a:latin typeface="Arial"/>
-                          <a:cs typeface="Arial"/>
-                          <a:ea typeface="Arial"/>
-                          <a:sym typeface="Arial"/>
+                          <a:latin typeface="Malgun Gothic"/>
+                          <a:cs typeface="Malgun Gothic"/>
+                          <a:ea typeface="Malgun Gothic"/>
+                          <a:sym typeface="Malgun Gothic"/>
                         </a:rPr>
                         <a:t> </a:t>
                       </a:r>
@@ -20375,9 +20375,9 @@
                     <a:bodyPr/>
                     <a:lstStyle/>
                     <a:p>
-                      <a:pPr algn="l" marL="0" marR="0">
+                      <a:pPr algn="ctr" marL="0" marR="0">
                         <a:lnSpc>
-                          <a:spcPct val="10000"/>
+                          <a:spcPct val="100000"/>
                         </a:lnSpc>
                         <a:spcBef>
                           <a:spcPts val="0"/>
@@ -20394,10 +20394,10 @@
                               <a:alpha val="100000"/>
                             </a:srgbClr>
                           </a:solidFill>
-                          <a:latin typeface="Arial"/>
-                          <a:cs typeface="Arial"/>
-                          <a:ea typeface="Arial"/>
-                          <a:sym typeface="Arial"/>
+                          <a:latin typeface="Malgun Gothic"/>
+                          <a:cs typeface="Malgun Gothic"/>
+                          <a:ea typeface="Malgun Gothic"/>
+                          <a:sym typeface="Malgun Gothic"/>
                         </a:rPr>
                         <a:t> </a:t>
                       </a:r>
@@ -20448,9 +20448,9 @@
                     <a:bodyPr/>
                     <a:lstStyle/>
                     <a:p>
-                      <a:pPr algn="l" marL="0" marR="0">
+                      <a:pPr algn="ctr" marL="0" marR="0">
                         <a:lnSpc>
-                          <a:spcPct val="10000"/>
+                          <a:spcPct val="100000"/>
                         </a:lnSpc>
                         <a:spcBef>
                           <a:spcPts val="0"/>
@@ -20467,10 +20467,10 @@
                               <a:alpha val="100000"/>
                             </a:srgbClr>
                           </a:solidFill>
-                          <a:latin typeface="Arial"/>
-                          <a:cs typeface="Arial"/>
-                          <a:ea typeface="Arial"/>
-                          <a:sym typeface="Arial"/>
+                          <a:latin typeface="Malgun Gothic"/>
+                          <a:cs typeface="Malgun Gothic"/>
+                          <a:ea typeface="Malgun Gothic"/>
+                          <a:sym typeface="Malgun Gothic"/>
                         </a:rPr>
                         <a:t> </a:t>
                       </a:r>
@@ -20521,9 +20521,9 @@
                     <a:bodyPr/>
                     <a:lstStyle/>
                     <a:p>
-                      <a:pPr algn="l" marL="0" marR="0">
+                      <a:pPr algn="ctr" marL="0" marR="0">
                         <a:lnSpc>
-                          <a:spcPct val="10000"/>
+                          <a:spcPct val="100000"/>
                         </a:lnSpc>
                         <a:spcBef>
                           <a:spcPts val="0"/>
@@ -20540,10 +20540,10 @@
                               <a:alpha val="100000"/>
                             </a:srgbClr>
                           </a:solidFill>
-                          <a:latin typeface="Arial"/>
-                          <a:cs typeface="Arial"/>
-                          <a:ea typeface="Arial"/>
-                          <a:sym typeface="Arial"/>
+                          <a:latin typeface="Malgun Gothic"/>
+                          <a:cs typeface="Malgun Gothic"/>
+                          <a:ea typeface="Malgun Gothic"/>
+                          <a:sym typeface="Malgun Gothic"/>
                         </a:rPr>
                         <a:t> </a:t>
                       </a:r>
@@ -20594,9 +20594,9 @@
                     <a:bodyPr/>
                     <a:lstStyle/>
                     <a:p>
-                      <a:pPr algn="l" marL="0" marR="0">
+                      <a:pPr algn="ctr" marL="0" marR="0">
                         <a:lnSpc>
-                          <a:spcPct val="10000"/>
+                          <a:spcPct val="100000"/>
                         </a:lnSpc>
                         <a:spcBef>
                           <a:spcPts val="0"/>
@@ -20613,10 +20613,10 @@
                               <a:alpha val="100000"/>
                             </a:srgbClr>
                           </a:solidFill>
-                          <a:latin typeface="Arial"/>
-                          <a:cs typeface="Arial"/>
-                          <a:ea typeface="Arial"/>
-                          <a:sym typeface="Arial"/>
+                          <a:latin typeface="Malgun Gothic"/>
+                          <a:cs typeface="Malgun Gothic"/>
+                          <a:ea typeface="Malgun Gothic"/>
+                          <a:sym typeface="Malgun Gothic"/>
                         </a:rPr>
                         <a:t> </a:t>
                       </a:r>
@@ -20669,9 +20669,9 @@
                     <a:bodyPr/>
                     <a:lstStyle/>
                     <a:p>
-                      <a:pPr algn="l" marL="0" marR="0">
+                      <a:pPr algn="ctr" marL="0" marR="0">
                         <a:lnSpc>
-                          <a:spcPct val="10000"/>
+                          <a:spcPct val="100000"/>
                         </a:lnSpc>
                         <a:spcBef>
                           <a:spcPts val="0"/>
@@ -20688,10 +20688,10 @@
                               <a:alpha val="100000"/>
                             </a:srgbClr>
                           </a:solidFill>
-                          <a:latin typeface="Arial"/>
-                          <a:cs typeface="Arial"/>
-                          <a:ea typeface="Arial"/>
-                          <a:sym typeface="Arial"/>
+                          <a:latin typeface="Malgun Gothic"/>
+                          <a:cs typeface="Malgun Gothic"/>
+                          <a:ea typeface="Malgun Gothic"/>
+                          <a:sym typeface="Malgun Gothic"/>
                         </a:rPr>
                         <a:t> </a:t>
                       </a:r>
@@ -20742,9 +20742,9 @@
                     <a:bodyPr/>
                     <a:lstStyle/>
                     <a:p>
-                      <a:pPr algn="l" marL="0" marR="0">
+                      <a:pPr algn="ctr" marL="0" marR="0">
                         <a:lnSpc>
-                          <a:spcPct val="10000"/>
+                          <a:spcPct val="100000"/>
                         </a:lnSpc>
                         <a:spcBef>
                           <a:spcPts val="0"/>
@@ -20761,10 +20761,10 @@
                               <a:alpha val="100000"/>
                             </a:srgbClr>
                           </a:solidFill>
-                          <a:latin typeface="Arial"/>
-                          <a:cs typeface="Arial"/>
-                          <a:ea typeface="Arial"/>
-                          <a:sym typeface="Arial"/>
+                          <a:latin typeface="Malgun Gothic"/>
+                          <a:cs typeface="Malgun Gothic"/>
+                          <a:ea typeface="Malgun Gothic"/>
+                          <a:sym typeface="Malgun Gothic"/>
                         </a:rPr>
                         <a:t> </a:t>
                       </a:r>
@@ -20815,9 +20815,9 @@
                     <a:bodyPr/>
                     <a:lstStyle/>
                     <a:p>
-                      <a:pPr algn="l" marL="0" marR="0">
+                      <a:pPr algn="ctr" marL="0" marR="0">
                         <a:lnSpc>
-                          <a:spcPct val="10000"/>
+                          <a:spcPct val="100000"/>
                         </a:lnSpc>
                         <a:spcBef>
                           <a:spcPts val="0"/>
@@ -20834,10 +20834,10 @@
                               <a:alpha val="100000"/>
                             </a:srgbClr>
                           </a:solidFill>
-                          <a:latin typeface="Arial"/>
-                          <a:cs typeface="Arial"/>
-                          <a:ea typeface="Arial"/>
-                          <a:sym typeface="Arial"/>
+                          <a:latin typeface="Malgun Gothic"/>
+                          <a:cs typeface="Malgun Gothic"/>
+                          <a:ea typeface="Malgun Gothic"/>
+                          <a:sym typeface="Malgun Gothic"/>
                         </a:rPr>
                         <a:t> </a:t>
                       </a:r>
@@ -20888,9 +20888,9 @@
                     <a:bodyPr/>
                     <a:lstStyle/>
                     <a:p>
-                      <a:pPr algn="l" marL="0" marR="0">
+                      <a:pPr algn="ctr" marL="0" marR="0">
                         <a:lnSpc>
-                          <a:spcPct val="10000"/>
+                          <a:spcPct val="100000"/>
                         </a:lnSpc>
                         <a:spcBef>
                           <a:spcPts val="0"/>
@@ -20907,10 +20907,10 @@
                               <a:alpha val="100000"/>
                             </a:srgbClr>
                           </a:solidFill>
-                          <a:latin typeface="Arial"/>
-                          <a:cs typeface="Arial"/>
-                          <a:ea typeface="Arial"/>
-                          <a:sym typeface="Arial"/>
+                          <a:latin typeface="Malgun Gothic"/>
+                          <a:cs typeface="Malgun Gothic"/>
+                          <a:ea typeface="Malgun Gothic"/>
+                          <a:sym typeface="Malgun Gothic"/>
                         </a:rPr>
                         <a:t> </a:t>
                       </a:r>
@@ -20963,9 +20963,9 @@
                     <a:bodyPr/>
                     <a:lstStyle/>
                     <a:p>
-                      <a:pPr algn="l" marL="0" marR="0">
+                      <a:pPr algn="ctr" marL="0" marR="0">
                         <a:lnSpc>
-                          <a:spcPct val="10000"/>
+                          <a:spcPct val="100000"/>
                         </a:lnSpc>
                         <a:spcBef>
                           <a:spcPts val="0"/>
@@ -20982,10 +20982,10 @@
                               <a:alpha val="100000"/>
                             </a:srgbClr>
                           </a:solidFill>
-                          <a:latin typeface="Arial"/>
-                          <a:cs typeface="Arial"/>
-                          <a:ea typeface="Arial"/>
-                          <a:sym typeface="Arial"/>
+                          <a:latin typeface="Malgun Gothic"/>
+                          <a:cs typeface="Malgun Gothic"/>
+                          <a:ea typeface="Malgun Gothic"/>
+                          <a:sym typeface="Malgun Gothic"/>
                         </a:rPr>
                         <a:t> </a:t>
                       </a:r>
@@ -21036,9 +21036,9 @@
                     <a:bodyPr/>
                     <a:lstStyle/>
                     <a:p>
-                      <a:pPr algn="l" marL="0" marR="0">
+                      <a:pPr algn="ctr" marL="0" marR="0">
                         <a:lnSpc>
-                          <a:spcPct val="10000"/>
+                          <a:spcPct val="100000"/>
                         </a:lnSpc>
                         <a:spcBef>
                           <a:spcPts val="0"/>
@@ -21055,10 +21055,10 @@
                               <a:alpha val="100000"/>
                             </a:srgbClr>
                           </a:solidFill>
-                          <a:latin typeface="Arial"/>
-                          <a:cs typeface="Arial"/>
-                          <a:ea typeface="Arial"/>
-                          <a:sym typeface="Arial"/>
+                          <a:latin typeface="Malgun Gothic"/>
+                          <a:cs typeface="Malgun Gothic"/>
+                          <a:ea typeface="Malgun Gothic"/>
+                          <a:sym typeface="Malgun Gothic"/>
                         </a:rPr>
                         <a:t> </a:t>
                       </a:r>
@@ -21109,9 +21109,9 @@
                     <a:bodyPr/>
                     <a:lstStyle/>
                     <a:p>
-                      <a:pPr algn="l" marL="0" marR="0">
+                      <a:pPr algn="ctr" marL="0" marR="0">
                         <a:lnSpc>
-                          <a:spcPct val="10000"/>
+                          <a:spcPct val="100000"/>
                         </a:lnSpc>
                         <a:spcBef>
                           <a:spcPts val="0"/>
@@ -21128,10 +21128,10 @@
                               <a:alpha val="100000"/>
                             </a:srgbClr>
                           </a:solidFill>
-                          <a:latin typeface="Arial"/>
-                          <a:cs typeface="Arial"/>
-                          <a:ea typeface="Arial"/>
-                          <a:sym typeface="Arial"/>
+                          <a:latin typeface="Malgun Gothic"/>
+                          <a:cs typeface="Malgun Gothic"/>
+                          <a:ea typeface="Malgun Gothic"/>
+                          <a:sym typeface="Malgun Gothic"/>
                         </a:rPr>
                         <a:t> </a:t>
                       </a:r>
@@ -21182,9 +21182,9 @@
                     <a:bodyPr/>
                     <a:lstStyle/>
                     <a:p>
-                      <a:pPr algn="l" marL="0" marR="0">
+                      <a:pPr algn="ctr" marL="0" marR="0">
                         <a:lnSpc>
-                          <a:spcPct val="10000"/>
+                          <a:spcPct val="100000"/>
                         </a:lnSpc>
                         <a:spcBef>
                           <a:spcPts val="0"/>
@@ -21201,10 +21201,10 @@
                               <a:alpha val="100000"/>
                             </a:srgbClr>
                           </a:solidFill>
-                          <a:latin typeface="Arial"/>
-                          <a:cs typeface="Arial"/>
-                          <a:ea typeface="Arial"/>
-                          <a:sym typeface="Arial"/>
+                          <a:latin typeface="Malgun Gothic"/>
+                          <a:cs typeface="Malgun Gothic"/>
+                          <a:ea typeface="Malgun Gothic"/>
+                          <a:sym typeface="Malgun Gothic"/>
                         </a:rPr>
                         <a:t> </a:t>
                       </a:r>
@@ -21299,10 +21299,10 @@
                     <a:alpha val="100000"/>
                   </a:srgbClr>
                 </a:solidFill>
-                <a:latin typeface="Arial"/>
-                <a:cs typeface="Arial"/>
-                <a:ea typeface="Arial"/>
-                <a:sym typeface="Arial"/>
+                <a:latin typeface="Malgun Gothic"/>
+                <a:cs typeface="Malgun Gothic"/>
+                <a:ea typeface="Malgun Gothic"/>
+                <a:sym typeface="Malgun Gothic"/>
               </a:rPr>
               <a:t>⬤</a:t>
             </a:r>
@@ -21313,10 +21313,10 @@
                     <a:alpha val="100000"/>
                   </a:srgbClr>
                 </a:solidFill>
-                <a:latin typeface="Arial"/>
-                <a:cs typeface="Arial"/>
-                <a:ea typeface="Arial"/>
-                <a:sym typeface="Arial"/>
+                <a:latin typeface="Malgun Gothic"/>
+                <a:cs typeface="Malgun Gothic"/>
+                <a:ea typeface="Malgun Gothic"/>
+                <a:sym typeface="Malgun Gothic"/>
               </a:rPr>
               <a:t> (ML_MSR_180) Cell_WLS_180</a:t>
             </a:r>
@@ -21393,10 +21393,10 @@
                     <a:alpha val="100000"/>
                   </a:srgbClr>
                 </a:solidFill>
-                <a:latin typeface="Arial"/>
-                <a:cs typeface="Arial"/>
-                <a:ea typeface="Arial"/>
-                <a:sym typeface="Arial"/>
+                <a:latin typeface="Malgun Gothic"/>
+                <a:cs typeface="Malgun Gothic"/>
+                <a:ea typeface="Malgun Gothic"/>
+                <a:sym typeface="Malgun Gothic"/>
               </a:rPr>
               <a:t>-0.0sig</a:t>
             </a:r>
@@ -21447,10 +21447,10 @@
                     <a:alpha val="100000"/>
                   </a:srgbClr>
                 </a:solidFill>
-                <a:latin typeface="Arial"/>
-                <a:cs typeface="Arial"/>
-                <a:ea typeface="Arial"/>
-                <a:sym typeface="Arial"/>
+                <a:latin typeface="Malgun Gothic"/>
+                <a:cs typeface="Malgun Gothic"/>
+                <a:ea typeface="Malgun Gothic"/>
+                <a:sym typeface="Malgun Gothic"/>
               </a:rPr>
               <a:t>⬤</a:t>
             </a:r>
@@ -21461,10 +21461,10 @@
                     <a:alpha val="100000"/>
                   </a:srgbClr>
                 </a:solidFill>
-                <a:latin typeface="Arial"/>
-                <a:cs typeface="Arial"/>
-                <a:ea typeface="Arial"/>
-                <a:sym typeface="Arial"/>
+                <a:latin typeface="Malgun Gothic"/>
+                <a:cs typeface="Malgun Gothic"/>
+                <a:ea typeface="Malgun Gothic"/>
+                <a:sym typeface="Malgun Gothic"/>
               </a:rPr>
               <a:t> (ML_MSR_196) Cell_WLS_196</a:t>
             </a:r>
@@ -21541,10 +21541,10 @@
                     <a:alpha val="100000"/>
                   </a:srgbClr>
                 </a:solidFill>
-                <a:latin typeface="Arial"/>
-                <a:cs typeface="Arial"/>
-                <a:ea typeface="Arial"/>
-                <a:sym typeface="Arial"/>
+                <a:latin typeface="Malgun Gothic"/>
+                <a:cs typeface="Malgun Gothic"/>
+                <a:ea typeface="Malgun Gothic"/>
+                <a:sym typeface="Malgun Gothic"/>
               </a:rPr>
               <a:t>+0.5sig</a:t>
             </a:r>
@@ -21595,10 +21595,10 @@
                     <a:alpha val="100000"/>
                   </a:srgbClr>
                 </a:solidFill>
-                <a:latin typeface="Arial"/>
-                <a:cs typeface="Arial"/>
-                <a:ea typeface="Arial"/>
-                <a:sym typeface="Arial"/>
+                <a:latin typeface="Malgun Gothic"/>
+                <a:cs typeface="Malgun Gothic"/>
+                <a:ea typeface="Malgun Gothic"/>
+                <a:sym typeface="Malgun Gothic"/>
               </a:rPr>
               <a:t>⬤</a:t>
             </a:r>
@@ -21609,10 +21609,10 @@
                     <a:alpha val="100000"/>
                   </a:srgbClr>
                 </a:solidFill>
-                <a:latin typeface="Arial"/>
-                <a:cs typeface="Arial"/>
-                <a:ea typeface="Arial"/>
-                <a:sym typeface="Arial"/>
+                <a:latin typeface="Malgun Gothic"/>
+                <a:cs typeface="Malgun Gothic"/>
+                <a:ea typeface="Malgun Gothic"/>
+                <a:sym typeface="Malgun Gothic"/>
               </a:rPr>
               <a:t> (ML_MSR_193) Cell_WLS_193</a:t>
             </a:r>
@@ -21689,10 +21689,10 @@
                     <a:alpha val="100000"/>
                   </a:srgbClr>
                 </a:solidFill>
-                <a:latin typeface="Arial"/>
-                <a:cs typeface="Arial"/>
-                <a:ea typeface="Arial"/>
-                <a:sym typeface="Arial"/>
+                <a:latin typeface="Malgun Gothic"/>
+                <a:cs typeface="Malgun Gothic"/>
+                <a:ea typeface="Malgun Gothic"/>
+                <a:sym typeface="Malgun Gothic"/>
               </a:rPr>
               <a:t>+0.5sig</a:t>
             </a:r>
@@ -21711,8 +21711,8 @@
         </p:nvSpPr>
         <p:spPr>
           <a:xfrm>
-            <a:off x="4711446" y="6446520"/>
-            <a:ext cx="2766060" cy="219456"/>
+            <a:off x="4642866" y="6446520"/>
+            <a:ext cx="2903220" cy="219456"/>
           </a:xfrm>
           <a:solidFill>
             <a:srgbClr val="FFFFFF">
@@ -21743,10 +21743,10 @@
                     <a:alpha val="100000"/>
                   </a:srgbClr>
                 </a:solidFill>
-                <a:latin typeface="Arial"/>
-                <a:cs typeface="Arial"/>
-                <a:ea typeface="Arial"/>
-                <a:sym typeface="Arial"/>
+                <a:latin typeface="Malgun Gothic"/>
+                <a:cs typeface="Malgun Gothic"/>
+                <a:ea typeface="Malgun Gothic"/>
+                <a:sym typeface="Malgun Gothic"/>
               </a:rPr>
               <a:t>● A (REF, 16매)</a:t>
             </a:r>
@@ -21757,10 +21757,10 @@
                     <a:alpha val="100000"/>
                   </a:srgbClr>
                 </a:solidFill>
-                <a:latin typeface="Arial"/>
-                <a:cs typeface="Arial"/>
-                <a:ea typeface="Arial"/>
-                <a:sym typeface="Arial"/>
+                <a:latin typeface="Malgun Gothic"/>
+                <a:cs typeface="Malgun Gothic"/>
+                <a:ea typeface="Malgun Gothic"/>
+                <a:sym typeface="Malgun Gothic"/>
               </a:rPr>
               <a:t>    </a:t>
             </a:r>
@@ -21771,10 +21771,10 @@
                     <a:alpha val="100000"/>
                   </a:srgbClr>
                 </a:solidFill>
-                <a:latin typeface="Arial"/>
-                <a:cs typeface="Arial"/>
-                <a:ea typeface="Arial"/>
-                <a:sym typeface="Arial"/>
+                <a:latin typeface="Malgun Gothic"/>
+                <a:cs typeface="Malgun Gothic"/>
+                <a:ea typeface="Malgun Gothic"/>
+                <a:sym typeface="Malgun Gothic"/>
               </a:rPr>
               <a:t>● B (TARGET, 10매)</a:t>
             </a:r>
@@ -21850,10 +21850,10 @@
                     <a:alpha val="100000"/>
                   </a:srgbClr>
                 </a:solidFill>
-                <a:latin typeface="Arial"/>
-                <a:cs typeface="Arial"/>
-                <a:ea typeface="Arial"/>
-                <a:sym typeface="Arial"/>
+                <a:latin typeface="Malgun Gothic"/>
+                <a:cs typeface="Malgun Gothic"/>
+                <a:ea typeface="Malgun Gothic"/>
+                <a:sym typeface="Malgun Gothic"/>
               </a:rPr>
               <a:t>[DM] Data Review Board Auto Report</a:t>
             </a:r>
@@ -21904,10 +21904,10 @@
                     <a:alpha val="100000"/>
                   </a:srgbClr>
                 </a:solidFill>
-                <a:latin typeface="Arial"/>
-                <a:cs typeface="Arial"/>
-                <a:ea typeface="Arial"/>
-                <a:sym typeface="Arial"/>
+                <a:latin typeface="Malgun Gothic"/>
+                <a:cs typeface="Malgun Gothic"/>
+                <a:ea typeface="Malgun Gothic"/>
+                <a:sym typeface="Malgun Gothic"/>
               </a:rPr>
               <a:t>■</a:t>
             </a:r>
@@ -21918,10 +21918,10 @@
                     <a:alpha val="100000"/>
                   </a:srgbClr>
                 </a:solidFill>
-                <a:latin typeface="Arial"/>
-                <a:cs typeface="Arial"/>
-                <a:ea typeface="Arial"/>
-                <a:sym typeface="Arial"/>
+                <a:latin typeface="Malgun Gothic"/>
+                <a:cs typeface="Malgun Gothic"/>
+                <a:ea typeface="Malgun Gothic"/>
+                <a:sym typeface="Malgun Gothic"/>
               </a:rPr>
               <a:t> Category: Category2: BL</a:t>
             </a:r>
@@ -21946,10 +21946,10 @@
                     <a:alpha val="100000"/>
                   </a:srgbClr>
                 </a:solidFill>
-                <a:latin typeface="Arial"/>
-                <a:cs typeface="Arial"/>
-                <a:ea typeface="Arial"/>
-                <a:sym typeface="Arial"/>
+                <a:latin typeface="Malgun Gothic"/>
+                <a:cs typeface="Malgun Gothic"/>
+                <a:ea typeface="Malgun Gothic"/>
+                <a:sym typeface="Malgun Gothic"/>
               </a:rPr>
               <a:t>■</a:t>
             </a:r>
@@ -21960,10 +21960,10 @@
                     <a:alpha val="100000"/>
                   </a:srgbClr>
                 </a:solidFill>
-                <a:latin typeface="Arial"/>
-                <a:cs typeface="Arial"/>
-                <a:ea typeface="Arial"/>
-                <a:sym typeface="Arial"/>
+                <a:latin typeface="Malgun Gothic"/>
+                <a:cs typeface="Malgun Gothic"/>
+                <a:ea typeface="Malgun Gothic"/>
+                <a:sym typeface="Malgun Gothic"/>
               </a:rPr>
               <a:t> REF: A / TARGET: B</a:t>
             </a:r>
@@ -21988,10 +21988,10 @@
                     <a:alpha val="100000"/>
                   </a:srgbClr>
                 </a:solidFill>
-                <a:latin typeface="Arial"/>
-                <a:cs typeface="Arial"/>
-                <a:ea typeface="Arial"/>
-                <a:sym typeface="Arial"/>
+                <a:latin typeface="Malgun Gothic"/>
+                <a:cs typeface="Malgun Gothic"/>
+                <a:ea typeface="Malgun Gothic"/>
+                <a:sym typeface="Malgun Gothic"/>
               </a:rPr>
               <a:t>■</a:t>
             </a:r>
@@ -22002,10 +22002,10 @@
                     <a:alpha val="100000"/>
                   </a:srgbClr>
                 </a:solidFill>
-                <a:latin typeface="Arial"/>
-                <a:cs typeface="Arial"/>
-                <a:ea typeface="Arial"/>
-                <a:sym typeface="Arial"/>
+                <a:latin typeface="Malgun Gothic"/>
+                <a:cs typeface="Malgun Gothic"/>
+                <a:ea typeface="Malgun Gothic"/>
+                <a:sym typeface="Malgun Gothic"/>
               </a:rPr>
               <a:t> Showing MSR 1-6 of 6; threshold 0.5</a:t>
             </a:r>
@@ -22059,10 +22059,10 @@
                               <a:alpha val="100000"/>
                             </a:srgbClr>
                           </a:solidFill>
-                          <a:latin typeface="Arial"/>
-                          <a:cs typeface="Arial"/>
-                          <a:ea typeface="Arial"/>
-                          <a:sym typeface="Arial"/>
+                          <a:latin typeface="Malgun Gothic"/>
+                          <a:cs typeface="Malgun Gothic"/>
+                          <a:ea typeface="Malgun Gothic"/>
+                          <a:sym typeface="Malgun Gothic"/>
                         </a:rPr>
                         <a:t>Category2: BL - MSR 1-6 of 6</a:t>
                       </a:r>
@@ -22132,10 +22132,10 @@
                               <a:alpha val="100000"/>
                             </a:srgbClr>
                           </a:solidFill>
-                          <a:latin typeface="Arial"/>
-                          <a:cs typeface="Arial"/>
-                          <a:ea typeface="Arial"/>
-                          <a:sym typeface="Arial"/>
+                          <a:latin typeface="Malgun Gothic"/>
+                          <a:cs typeface="Malgun Gothic"/>
+                          <a:ea typeface="Malgun Gothic"/>
+                          <a:sym typeface="Malgun Gothic"/>
                         </a:rPr>
                         <a:t> </a:t>
                       </a:r>
@@ -22205,10 +22205,10 @@
                               <a:alpha val="100000"/>
                             </a:srgbClr>
                           </a:solidFill>
-                          <a:latin typeface="Arial"/>
-                          <a:cs typeface="Arial"/>
-                          <a:ea typeface="Arial"/>
-                          <a:sym typeface="Arial"/>
+                          <a:latin typeface="Malgun Gothic"/>
+                          <a:cs typeface="Malgun Gothic"/>
+                          <a:ea typeface="Malgun Gothic"/>
+                          <a:sym typeface="Malgun Gothic"/>
                         </a:rPr>
                         <a:t> </a:t>
                       </a:r>
@@ -22278,10 +22278,10 @@
                               <a:alpha val="100000"/>
                             </a:srgbClr>
                           </a:solidFill>
-                          <a:latin typeface="Arial"/>
-                          <a:cs typeface="Arial"/>
-                          <a:ea typeface="Arial"/>
-                          <a:sym typeface="Arial"/>
+                          <a:latin typeface="Malgun Gothic"/>
+                          <a:cs typeface="Malgun Gothic"/>
+                          <a:ea typeface="Malgun Gothic"/>
+                          <a:sym typeface="Malgun Gothic"/>
                         </a:rPr>
                         <a:t> </a:t>
                       </a:r>
@@ -22334,9 +22334,9 @@
                     <a:bodyPr/>
                     <a:lstStyle/>
                     <a:p>
-                      <a:pPr algn="l" marL="0" marR="0">
+                      <a:pPr algn="ctr" marL="0" marR="0">
                         <a:lnSpc>
-                          <a:spcPct val="10000"/>
+                          <a:spcPct val="100000"/>
                         </a:lnSpc>
                         <a:spcBef>
                           <a:spcPts val="0"/>
@@ -22353,10 +22353,10 @@
                               <a:alpha val="100000"/>
                             </a:srgbClr>
                           </a:solidFill>
-                          <a:latin typeface="Arial"/>
-                          <a:cs typeface="Arial"/>
-                          <a:ea typeface="Arial"/>
-                          <a:sym typeface="Arial"/>
+                          <a:latin typeface="Malgun Gothic"/>
+                          <a:cs typeface="Malgun Gothic"/>
+                          <a:ea typeface="Malgun Gothic"/>
+                          <a:sym typeface="Malgun Gothic"/>
                         </a:rPr>
                         <a:t> </a:t>
                       </a:r>
@@ -22407,9 +22407,9 @@
                     <a:bodyPr/>
                     <a:lstStyle/>
                     <a:p>
-                      <a:pPr algn="l" marL="0" marR="0">
+                      <a:pPr algn="ctr" marL="0" marR="0">
                         <a:lnSpc>
-                          <a:spcPct val="10000"/>
+                          <a:spcPct val="100000"/>
                         </a:lnSpc>
                         <a:spcBef>
                           <a:spcPts val="0"/>
@@ -22426,10 +22426,10 @@
                               <a:alpha val="100000"/>
                             </a:srgbClr>
                           </a:solidFill>
-                          <a:latin typeface="Arial"/>
-                          <a:cs typeface="Arial"/>
-                          <a:ea typeface="Arial"/>
-                          <a:sym typeface="Arial"/>
+                          <a:latin typeface="Malgun Gothic"/>
+                          <a:cs typeface="Malgun Gothic"/>
+                          <a:ea typeface="Malgun Gothic"/>
+                          <a:sym typeface="Malgun Gothic"/>
                         </a:rPr>
                         <a:t> </a:t>
                       </a:r>
@@ -22480,9 +22480,9 @@
                     <a:bodyPr/>
                     <a:lstStyle/>
                     <a:p>
-                      <a:pPr algn="l" marL="0" marR="0">
+                      <a:pPr algn="ctr" marL="0" marR="0">
                         <a:lnSpc>
-                          <a:spcPct val="10000"/>
+                          <a:spcPct val="100000"/>
                         </a:lnSpc>
                         <a:spcBef>
                           <a:spcPts val="0"/>
@@ -22499,10 +22499,10 @@
                               <a:alpha val="100000"/>
                             </a:srgbClr>
                           </a:solidFill>
-                          <a:latin typeface="Arial"/>
-                          <a:cs typeface="Arial"/>
-                          <a:ea typeface="Arial"/>
-                          <a:sym typeface="Arial"/>
+                          <a:latin typeface="Malgun Gothic"/>
+                          <a:cs typeface="Malgun Gothic"/>
+                          <a:ea typeface="Malgun Gothic"/>
+                          <a:sym typeface="Malgun Gothic"/>
                         </a:rPr>
                         <a:t> </a:t>
                       </a:r>
@@ -22553,9 +22553,9 @@
                     <a:bodyPr/>
                     <a:lstStyle/>
                     <a:p>
-                      <a:pPr algn="l" marL="0" marR="0">
+                      <a:pPr algn="ctr" marL="0" marR="0">
                         <a:lnSpc>
-                          <a:spcPct val="10000"/>
+                          <a:spcPct val="100000"/>
                         </a:lnSpc>
                         <a:spcBef>
                           <a:spcPts val="0"/>
@@ -22572,10 +22572,10 @@
                               <a:alpha val="100000"/>
                             </a:srgbClr>
                           </a:solidFill>
-                          <a:latin typeface="Arial"/>
-                          <a:cs typeface="Arial"/>
-                          <a:ea typeface="Arial"/>
-                          <a:sym typeface="Arial"/>
+                          <a:latin typeface="Malgun Gothic"/>
+                          <a:cs typeface="Malgun Gothic"/>
+                          <a:ea typeface="Malgun Gothic"/>
+                          <a:sym typeface="Malgun Gothic"/>
                         </a:rPr>
                         <a:t> </a:t>
                       </a:r>
@@ -22628,9 +22628,9 @@
                     <a:bodyPr/>
                     <a:lstStyle/>
                     <a:p>
-                      <a:pPr algn="l" marL="0" marR="0">
+                      <a:pPr algn="ctr" marL="0" marR="0">
                         <a:lnSpc>
-                          <a:spcPct val="10000"/>
+                          <a:spcPct val="100000"/>
                         </a:lnSpc>
                         <a:spcBef>
                           <a:spcPts val="0"/>
@@ -22647,10 +22647,10 @@
                               <a:alpha val="100000"/>
                             </a:srgbClr>
                           </a:solidFill>
-                          <a:latin typeface="Arial"/>
-                          <a:cs typeface="Arial"/>
-                          <a:ea typeface="Arial"/>
-                          <a:sym typeface="Arial"/>
+                          <a:latin typeface="Malgun Gothic"/>
+                          <a:cs typeface="Malgun Gothic"/>
+                          <a:ea typeface="Malgun Gothic"/>
+                          <a:sym typeface="Malgun Gothic"/>
                         </a:rPr>
                         <a:t> </a:t>
                       </a:r>
@@ -22701,9 +22701,9 @@
                     <a:bodyPr/>
                     <a:lstStyle/>
                     <a:p>
-                      <a:pPr algn="l" marL="0" marR="0">
+                      <a:pPr algn="ctr" marL="0" marR="0">
                         <a:lnSpc>
-                          <a:spcPct val="10000"/>
+                          <a:spcPct val="100000"/>
                         </a:lnSpc>
                         <a:spcBef>
                           <a:spcPts val="0"/>
@@ -22720,10 +22720,10 @@
                               <a:alpha val="100000"/>
                             </a:srgbClr>
                           </a:solidFill>
-                          <a:latin typeface="Arial"/>
-                          <a:cs typeface="Arial"/>
-                          <a:ea typeface="Arial"/>
-                          <a:sym typeface="Arial"/>
+                          <a:latin typeface="Malgun Gothic"/>
+                          <a:cs typeface="Malgun Gothic"/>
+                          <a:ea typeface="Malgun Gothic"/>
+                          <a:sym typeface="Malgun Gothic"/>
                         </a:rPr>
                         <a:t> </a:t>
                       </a:r>
@@ -22774,9 +22774,9 @@
                     <a:bodyPr/>
                     <a:lstStyle/>
                     <a:p>
-                      <a:pPr algn="l" marL="0" marR="0">
+                      <a:pPr algn="ctr" marL="0" marR="0">
                         <a:lnSpc>
-                          <a:spcPct val="10000"/>
+                          <a:spcPct val="100000"/>
                         </a:lnSpc>
                         <a:spcBef>
                           <a:spcPts val="0"/>
@@ -22793,10 +22793,10 @@
                               <a:alpha val="100000"/>
                             </a:srgbClr>
                           </a:solidFill>
-                          <a:latin typeface="Arial"/>
-                          <a:cs typeface="Arial"/>
-                          <a:ea typeface="Arial"/>
-                          <a:sym typeface="Arial"/>
+                          <a:latin typeface="Malgun Gothic"/>
+                          <a:cs typeface="Malgun Gothic"/>
+                          <a:ea typeface="Malgun Gothic"/>
+                          <a:sym typeface="Malgun Gothic"/>
                         </a:rPr>
                         <a:t> </a:t>
                       </a:r>
@@ -22847,9 +22847,9 @@
                     <a:bodyPr/>
                     <a:lstStyle/>
                     <a:p>
-                      <a:pPr algn="l" marL="0" marR="0">
+                      <a:pPr algn="ctr" marL="0" marR="0">
                         <a:lnSpc>
-                          <a:spcPct val="10000"/>
+                          <a:spcPct val="100000"/>
                         </a:lnSpc>
                         <a:spcBef>
                           <a:spcPts val="0"/>
@@ -22866,10 +22866,10 @@
                               <a:alpha val="100000"/>
                             </a:srgbClr>
                           </a:solidFill>
-                          <a:latin typeface="Arial"/>
-                          <a:cs typeface="Arial"/>
-                          <a:ea typeface="Arial"/>
-                          <a:sym typeface="Arial"/>
+                          <a:latin typeface="Malgun Gothic"/>
+                          <a:cs typeface="Malgun Gothic"/>
+                          <a:ea typeface="Malgun Gothic"/>
+                          <a:sym typeface="Malgun Gothic"/>
                         </a:rPr>
                         <a:t> </a:t>
                       </a:r>
@@ -22922,9 +22922,9 @@
                     <a:bodyPr/>
                     <a:lstStyle/>
                     <a:p>
-                      <a:pPr algn="l" marL="0" marR="0">
+                      <a:pPr algn="ctr" marL="0" marR="0">
                         <a:lnSpc>
-                          <a:spcPct val="10000"/>
+                          <a:spcPct val="100000"/>
                         </a:lnSpc>
                         <a:spcBef>
                           <a:spcPts val="0"/>
@@ -22941,10 +22941,10 @@
                               <a:alpha val="100000"/>
                             </a:srgbClr>
                           </a:solidFill>
-                          <a:latin typeface="Arial"/>
-                          <a:cs typeface="Arial"/>
-                          <a:ea typeface="Arial"/>
-                          <a:sym typeface="Arial"/>
+                          <a:latin typeface="Malgun Gothic"/>
+                          <a:cs typeface="Malgun Gothic"/>
+                          <a:ea typeface="Malgun Gothic"/>
+                          <a:sym typeface="Malgun Gothic"/>
                         </a:rPr>
                         <a:t> </a:t>
                       </a:r>
@@ -22995,9 +22995,9 @@
                     <a:bodyPr/>
                     <a:lstStyle/>
                     <a:p>
-                      <a:pPr algn="l" marL="0" marR="0">
+                      <a:pPr algn="ctr" marL="0" marR="0">
                         <a:lnSpc>
-                          <a:spcPct val="10000"/>
+                          <a:spcPct val="100000"/>
                         </a:lnSpc>
                         <a:spcBef>
                           <a:spcPts val="0"/>
@@ -23014,10 +23014,10 @@
                               <a:alpha val="100000"/>
                             </a:srgbClr>
                           </a:solidFill>
-                          <a:latin typeface="Arial"/>
-                          <a:cs typeface="Arial"/>
-                          <a:ea typeface="Arial"/>
-                          <a:sym typeface="Arial"/>
+                          <a:latin typeface="Malgun Gothic"/>
+                          <a:cs typeface="Malgun Gothic"/>
+                          <a:ea typeface="Malgun Gothic"/>
+                          <a:sym typeface="Malgun Gothic"/>
                         </a:rPr>
                         <a:t> </a:t>
                       </a:r>
@@ -23068,9 +23068,9 @@
                     <a:bodyPr/>
                     <a:lstStyle/>
                     <a:p>
-                      <a:pPr algn="l" marL="0" marR="0">
+                      <a:pPr algn="ctr" marL="0" marR="0">
                         <a:lnSpc>
-                          <a:spcPct val="10000"/>
+                          <a:spcPct val="100000"/>
                         </a:lnSpc>
                         <a:spcBef>
                           <a:spcPts val="0"/>
@@ -23087,10 +23087,10 @@
                               <a:alpha val="100000"/>
                             </a:srgbClr>
                           </a:solidFill>
-                          <a:latin typeface="Arial"/>
-                          <a:cs typeface="Arial"/>
-                          <a:ea typeface="Arial"/>
-                          <a:sym typeface="Arial"/>
+                          <a:latin typeface="Malgun Gothic"/>
+                          <a:cs typeface="Malgun Gothic"/>
+                          <a:ea typeface="Malgun Gothic"/>
+                          <a:sym typeface="Malgun Gothic"/>
                         </a:rPr>
                         <a:t> </a:t>
                       </a:r>
@@ -23141,9 +23141,9 @@
                     <a:bodyPr/>
                     <a:lstStyle/>
                     <a:p>
-                      <a:pPr algn="l" marL="0" marR="0">
+                      <a:pPr algn="ctr" marL="0" marR="0">
                         <a:lnSpc>
-                          <a:spcPct val="10000"/>
+                          <a:spcPct val="100000"/>
                         </a:lnSpc>
                         <a:spcBef>
                           <a:spcPts val="0"/>
@@ -23160,10 +23160,10 @@
                               <a:alpha val="100000"/>
                             </a:srgbClr>
                           </a:solidFill>
-                          <a:latin typeface="Arial"/>
-                          <a:cs typeface="Arial"/>
-                          <a:ea typeface="Arial"/>
-                          <a:sym typeface="Arial"/>
+                          <a:latin typeface="Malgun Gothic"/>
+                          <a:cs typeface="Malgun Gothic"/>
+                          <a:ea typeface="Malgun Gothic"/>
+                          <a:sym typeface="Malgun Gothic"/>
                         </a:rPr>
                         <a:t> </a:t>
                       </a:r>
@@ -23216,9 +23216,9 @@
                     <a:bodyPr/>
                     <a:lstStyle/>
                     <a:p>
-                      <a:pPr algn="l" marL="0" marR="0">
+                      <a:pPr algn="ctr" marL="0" marR="0">
                         <a:lnSpc>
-                          <a:spcPct val="10000"/>
+                          <a:spcPct val="100000"/>
                         </a:lnSpc>
                         <a:spcBef>
                           <a:spcPts val="0"/>
@@ -23235,10 +23235,10 @@
                               <a:alpha val="100000"/>
                             </a:srgbClr>
                           </a:solidFill>
-                          <a:latin typeface="Arial"/>
-                          <a:cs typeface="Arial"/>
-                          <a:ea typeface="Arial"/>
-                          <a:sym typeface="Arial"/>
+                          <a:latin typeface="Malgun Gothic"/>
+                          <a:cs typeface="Malgun Gothic"/>
+                          <a:ea typeface="Malgun Gothic"/>
+                          <a:sym typeface="Malgun Gothic"/>
                         </a:rPr>
                         <a:t> </a:t>
                       </a:r>
@@ -23289,9 +23289,9 @@
                     <a:bodyPr/>
                     <a:lstStyle/>
                     <a:p>
-                      <a:pPr algn="l" marL="0" marR="0">
+                      <a:pPr algn="ctr" marL="0" marR="0">
                         <a:lnSpc>
-                          <a:spcPct val="10000"/>
+                          <a:spcPct val="100000"/>
                         </a:lnSpc>
                         <a:spcBef>
                           <a:spcPts val="0"/>
@@ -23308,10 +23308,10 @@
                               <a:alpha val="100000"/>
                             </a:srgbClr>
                           </a:solidFill>
-                          <a:latin typeface="Arial"/>
-                          <a:cs typeface="Arial"/>
-                          <a:ea typeface="Arial"/>
-                          <a:sym typeface="Arial"/>
+                          <a:latin typeface="Malgun Gothic"/>
+                          <a:cs typeface="Malgun Gothic"/>
+                          <a:ea typeface="Malgun Gothic"/>
+                          <a:sym typeface="Malgun Gothic"/>
                         </a:rPr>
                         <a:t> </a:t>
                       </a:r>
@@ -23362,9 +23362,9 @@
                     <a:bodyPr/>
                     <a:lstStyle/>
                     <a:p>
-                      <a:pPr algn="l" marL="0" marR="0">
+                      <a:pPr algn="ctr" marL="0" marR="0">
                         <a:lnSpc>
-                          <a:spcPct val="10000"/>
+                          <a:spcPct val="100000"/>
                         </a:lnSpc>
                         <a:spcBef>
                           <a:spcPts val="0"/>
@@ -23381,10 +23381,10 @@
                               <a:alpha val="100000"/>
                             </a:srgbClr>
                           </a:solidFill>
-                          <a:latin typeface="Arial"/>
-                          <a:cs typeface="Arial"/>
-                          <a:ea typeface="Arial"/>
-                          <a:sym typeface="Arial"/>
+                          <a:latin typeface="Malgun Gothic"/>
+                          <a:cs typeface="Malgun Gothic"/>
+                          <a:ea typeface="Malgun Gothic"/>
+                          <a:sym typeface="Malgun Gothic"/>
                         </a:rPr>
                         <a:t> </a:t>
                       </a:r>
@@ -23435,9 +23435,9 @@
                     <a:bodyPr/>
                     <a:lstStyle/>
                     <a:p>
-                      <a:pPr algn="l" marL="0" marR="0">
+                      <a:pPr algn="ctr" marL="0" marR="0">
                         <a:lnSpc>
-                          <a:spcPct val="10000"/>
+                          <a:spcPct val="100000"/>
                         </a:lnSpc>
                         <a:spcBef>
                           <a:spcPts val="0"/>
@@ -23454,10 +23454,10 @@
                               <a:alpha val="100000"/>
                             </a:srgbClr>
                           </a:solidFill>
-                          <a:latin typeface="Arial"/>
-                          <a:cs typeface="Arial"/>
-                          <a:ea typeface="Arial"/>
-                          <a:sym typeface="Arial"/>
+                          <a:latin typeface="Malgun Gothic"/>
+                          <a:cs typeface="Malgun Gothic"/>
+                          <a:ea typeface="Malgun Gothic"/>
+                          <a:sym typeface="Malgun Gothic"/>
                         </a:rPr>
                         <a:t> </a:t>
                       </a:r>
@@ -23552,10 +23552,10 @@
                     <a:alpha val="100000"/>
                   </a:srgbClr>
                 </a:solidFill>
-                <a:latin typeface="Arial"/>
-                <a:cs typeface="Arial"/>
-                <a:ea typeface="Arial"/>
-                <a:sym typeface="Arial"/>
+                <a:latin typeface="Malgun Gothic"/>
+                <a:cs typeface="Malgun Gothic"/>
+                <a:ea typeface="Malgun Gothic"/>
+                <a:sym typeface="Malgun Gothic"/>
               </a:rPr>
               <a:t>⬤</a:t>
             </a:r>
@@ -23566,10 +23566,10 @@
                     <a:alpha val="100000"/>
                   </a:srgbClr>
                 </a:solidFill>
-                <a:latin typeface="Arial"/>
-                <a:cs typeface="Arial"/>
-                <a:ea typeface="Arial"/>
-                <a:sym typeface="Arial"/>
+                <a:latin typeface="Malgun Gothic"/>
+                <a:cs typeface="Malgun Gothic"/>
+                <a:ea typeface="Malgun Gothic"/>
+                <a:sym typeface="Malgun Gothic"/>
               </a:rPr>
               <a:t> (ML_MSR_134) Peri_BL_134</a:t>
             </a:r>
@@ -23646,10 +23646,10 @@
                     <a:alpha val="100000"/>
                   </a:srgbClr>
                 </a:solidFill>
-                <a:latin typeface="Arial"/>
-                <a:cs typeface="Arial"/>
-                <a:ea typeface="Arial"/>
-                <a:sym typeface="Arial"/>
+                <a:latin typeface="Malgun Gothic"/>
+                <a:cs typeface="Malgun Gothic"/>
+                <a:ea typeface="Malgun Gothic"/>
+                <a:sym typeface="Malgun Gothic"/>
               </a:rPr>
               <a:t>-0.0sig</a:t>
             </a:r>
@@ -23700,10 +23700,10 @@
                     <a:alpha val="100000"/>
                   </a:srgbClr>
                 </a:solidFill>
-                <a:latin typeface="Arial"/>
-                <a:cs typeface="Arial"/>
-                <a:ea typeface="Arial"/>
-                <a:sym typeface="Arial"/>
+                <a:latin typeface="Malgun Gothic"/>
+                <a:cs typeface="Malgun Gothic"/>
+                <a:ea typeface="Malgun Gothic"/>
+                <a:sym typeface="Malgun Gothic"/>
               </a:rPr>
               <a:t>⬤</a:t>
             </a:r>
@@ -23714,10 +23714,10 @@
                     <a:alpha val="100000"/>
                   </a:srgbClr>
                 </a:solidFill>
-                <a:latin typeface="Arial"/>
-                <a:cs typeface="Arial"/>
-                <a:ea typeface="Arial"/>
-                <a:sym typeface="Arial"/>
+                <a:latin typeface="Malgun Gothic"/>
+                <a:cs typeface="Malgun Gothic"/>
+                <a:ea typeface="Malgun Gothic"/>
+                <a:sym typeface="Malgun Gothic"/>
               </a:rPr>
               <a:t> (ML_MSR_122) Peri_BL_122</a:t>
             </a:r>
@@ -23794,10 +23794,10 @@
                     <a:alpha val="100000"/>
                   </a:srgbClr>
                 </a:solidFill>
-                <a:latin typeface="Arial"/>
-                <a:cs typeface="Arial"/>
-                <a:ea typeface="Arial"/>
-                <a:sym typeface="Arial"/>
+                <a:latin typeface="Malgun Gothic"/>
+                <a:cs typeface="Malgun Gothic"/>
+                <a:ea typeface="Malgun Gothic"/>
+                <a:sym typeface="Malgun Gothic"/>
               </a:rPr>
               <a:t>+0.7sig</a:t>
             </a:r>
@@ -23848,10 +23848,10 @@
                     <a:alpha val="100000"/>
                   </a:srgbClr>
                 </a:solidFill>
-                <a:latin typeface="Arial"/>
-                <a:cs typeface="Arial"/>
-                <a:ea typeface="Arial"/>
-                <a:sym typeface="Arial"/>
+                <a:latin typeface="Malgun Gothic"/>
+                <a:cs typeface="Malgun Gothic"/>
+                <a:ea typeface="Malgun Gothic"/>
+                <a:sym typeface="Malgun Gothic"/>
               </a:rPr>
               <a:t>⬤</a:t>
             </a:r>
@@ -23862,10 +23862,10 @@
                     <a:alpha val="100000"/>
                   </a:srgbClr>
                 </a:solidFill>
-                <a:latin typeface="Arial"/>
-                <a:cs typeface="Arial"/>
-                <a:ea typeface="Arial"/>
-                <a:sym typeface="Arial"/>
+                <a:latin typeface="Malgun Gothic"/>
+                <a:cs typeface="Malgun Gothic"/>
+                <a:ea typeface="Malgun Gothic"/>
+                <a:sym typeface="Malgun Gothic"/>
               </a:rPr>
               <a:t> (ML_MSR_139) Peri_BL_139</a:t>
             </a:r>
@@ -23942,10 +23942,10 @@
                     <a:alpha val="100000"/>
                   </a:srgbClr>
                 </a:solidFill>
-                <a:latin typeface="Arial"/>
-                <a:cs typeface="Arial"/>
-                <a:ea typeface="Arial"/>
-                <a:sym typeface="Arial"/>
+                <a:latin typeface="Malgun Gothic"/>
+                <a:cs typeface="Malgun Gothic"/>
+                <a:ea typeface="Malgun Gothic"/>
+                <a:sym typeface="Malgun Gothic"/>
               </a:rPr>
               <a:t>+0.5sig</a:t>
             </a:r>
@@ -23996,10 +23996,10 @@
                     <a:alpha val="100000"/>
                   </a:srgbClr>
                 </a:solidFill>
-                <a:latin typeface="Arial"/>
-                <a:cs typeface="Arial"/>
-                <a:ea typeface="Arial"/>
-                <a:sym typeface="Arial"/>
+                <a:latin typeface="Malgun Gothic"/>
+                <a:cs typeface="Malgun Gothic"/>
+                <a:ea typeface="Malgun Gothic"/>
+                <a:sym typeface="Malgun Gothic"/>
               </a:rPr>
               <a:t>⬤</a:t>
             </a:r>
@@ -24010,10 +24010,10 @@
                     <a:alpha val="100000"/>
                   </a:srgbClr>
                 </a:solidFill>
-                <a:latin typeface="Arial"/>
-                <a:cs typeface="Arial"/>
-                <a:ea typeface="Arial"/>
-                <a:sym typeface="Arial"/>
+                <a:latin typeface="Malgun Gothic"/>
+                <a:cs typeface="Malgun Gothic"/>
+                <a:ea typeface="Malgun Gothic"/>
+                <a:sym typeface="Malgun Gothic"/>
               </a:rPr>
               <a:t> (ML_MSR_141) Peri_BL_141</a:t>
             </a:r>
@@ -24090,10 +24090,10 @@
                     <a:alpha val="100000"/>
                   </a:srgbClr>
                 </a:solidFill>
-                <a:latin typeface="Arial"/>
-                <a:cs typeface="Arial"/>
-                <a:ea typeface="Arial"/>
-                <a:sym typeface="Arial"/>
+                <a:latin typeface="Malgun Gothic"/>
+                <a:cs typeface="Malgun Gothic"/>
+                <a:ea typeface="Malgun Gothic"/>
+                <a:sym typeface="Malgun Gothic"/>
               </a:rPr>
               <a:t>+0.5sig</a:t>
             </a:r>
@@ -24144,10 +24144,10 @@
                     <a:alpha val="100000"/>
                   </a:srgbClr>
                 </a:solidFill>
-                <a:latin typeface="Arial"/>
-                <a:cs typeface="Arial"/>
-                <a:ea typeface="Arial"/>
-                <a:sym typeface="Arial"/>
+                <a:latin typeface="Malgun Gothic"/>
+                <a:cs typeface="Malgun Gothic"/>
+                <a:ea typeface="Malgun Gothic"/>
+                <a:sym typeface="Malgun Gothic"/>
               </a:rPr>
               <a:t>⬤</a:t>
             </a:r>
@@ -24158,10 +24158,10 @@
                     <a:alpha val="100000"/>
                   </a:srgbClr>
                 </a:solidFill>
-                <a:latin typeface="Arial"/>
-                <a:cs typeface="Arial"/>
-                <a:ea typeface="Arial"/>
-                <a:sym typeface="Arial"/>
+                <a:latin typeface="Malgun Gothic"/>
+                <a:cs typeface="Malgun Gothic"/>
+                <a:ea typeface="Malgun Gothic"/>
+                <a:sym typeface="Malgun Gothic"/>
               </a:rPr>
               <a:t> (ML_MSR_121) Peri_BL_121</a:t>
             </a:r>
@@ -24238,10 +24238,10 @@
                     <a:alpha val="100000"/>
                   </a:srgbClr>
                 </a:solidFill>
-                <a:latin typeface="Arial"/>
-                <a:cs typeface="Arial"/>
-                <a:ea typeface="Arial"/>
-                <a:sym typeface="Arial"/>
+                <a:latin typeface="Malgun Gothic"/>
+                <a:cs typeface="Malgun Gothic"/>
+                <a:ea typeface="Malgun Gothic"/>
+                <a:sym typeface="Malgun Gothic"/>
               </a:rPr>
               <a:t>+0.5sig</a:t>
             </a:r>
@@ -24292,10 +24292,10 @@
                     <a:alpha val="100000"/>
                   </a:srgbClr>
                 </a:solidFill>
-                <a:latin typeface="Arial"/>
-                <a:cs typeface="Arial"/>
-                <a:ea typeface="Arial"/>
-                <a:sym typeface="Arial"/>
+                <a:latin typeface="Malgun Gothic"/>
+                <a:cs typeface="Malgun Gothic"/>
+                <a:ea typeface="Malgun Gothic"/>
+                <a:sym typeface="Malgun Gothic"/>
               </a:rPr>
               <a:t>⬤</a:t>
             </a:r>
@@ -24306,10 +24306,10 @@
                     <a:alpha val="100000"/>
                   </a:srgbClr>
                 </a:solidFill>
-                <a:latin typeface="Arial"/>
-                <a:cs typeface="Arial"/>
-                <a:ea typeface="Arial"/>
-                <a:sym typeface="Arial"/>
+                <a:latin typeface="Malgun Gothic"/>
+                <a:cs typeface="Malgun Gothic"/>
+                <a:ea typeface="Malgun Gothic"/>
+                <a:sym typeface="Malgun Gothic"/>
               </a:rPr>
               <a:t> (ML_MSR_101) Peri_BL_101</a:t>
             </a:r>
@@ -24386,10 +24386,10 @@
                     <a:alpha val="100000"/>
                   </a:srgbClr>
                 </a:solidFill>
-                <a:latin typeface="Arial"/>
-                <a:cs typeface="Arial"/>
-                <a:ea typeface="Arial"/>
-                <a:sym typeface="Arial"/>
+                <a:latin typeface="Malgun Gothic"/>
+                <a:cs typeface="Malgun Gothic"/>
+                <a:ea typeface="Malgun Gothic"/>
+                <a:sym typeface="Malgun Gothic"/>
               </a:rPr>
               <a:t>+0.5sig</a:t>
             </a:r>
@@ -24408,8 +24408,8 @@
         </p:nvSpPr>
         <p:spPr>
           <a:xfrm>
-            <a:off x="4711446" y="6446520"/>
-            <a:ext cx="2766060" cy="219456"/>
+            <a:off x="4642866" y="6446520"/>
+            <a:ext cx="2903220" cy="219456"/>
           </a:xfrm>
           <a:solidFill>
             <a:srgbClr val="FFFFFF">
@@ -24440,10 +24440,10 @@
                     <a:alpha val="100000"/>
                   </a:srgbClr>
                 </a:solidFill>
-                <a:latin typeface="Arial"/>
-                <a:cs typeface="Arial"/>
-                <a:ea typeface="Arial"/>
-                <a:sym typeface="Arial"/>
+                <a:latin typeface="Malgun Gothic"/>
+                <a:cs typeface="Malgun Gothic"/>
+                <a:ea typeface="Malgun Gothic"/>
+                <a:sym typeface="Malgun Gothic"/>
               </a:rPr>
               <a:t>● A (REF, 16매)</a:t>
             </a:r>
@@ -24454,10 +24454,10 @@
                     <a:alpha val="100000"/>
                   </a:srgbClr>
                 </a:solidFill>
-                <a:latin typeface="Arial"/>
-                <a:cs typeface="Arial"/>
-                <a:ea typeface="Arial"/>
-                <a:sym typeface="Arial"/>
+                <a:latin typeface="Malgun Gothic"/>
+                <a:cs typeface="Malgun Gothic"/>
+                <a:ea typeface="Malgun Gothic"/>
+                <a:sym typeface="Malgun Gothic"/>
               </a:rPr>
               <a:t>    </a:t>
             </a:r>
@@ -24468,10 +24468,10 @@
                     <a:alpha val="100000"/>
                   </a:srgbClr>
                 </a:solidFill>
-                <a:latin typeface="Arial"/>
-                <a:cs typeface="Arial"/>
-                <a:ea typeface="Arial"/>
-                <a:sym typeface="Arial"/>
+                <a:latin typeface="Malgun Gothic"/>
+                <a:cs typeface="Malgun Gothic"/>
+                <a:ea typeface="Malgun Gothic"/>
+                <a:sym typeface="Malgun Gothic"/>
               </a:rPr>
               <a:t>● B (TARGET, 10매)</a:t>
             </a:r>
@@ -24547,10 +24547,10 @@
                     <a:alpha val="100000"/>
                   </a:srgbClr>
                 </a:solidFill>
-                <a:latin typeface="Arial"/>
-                <a:cs typeface="Arial"/>
-                <a:ea typeface="Arial"/>
-                <a:sym typeface="Arial"/>
+                <a:latin typeface="Malgun Gothic"/>
+                <a:cs typeface="Malgun Gothic"/>
+                <a:ea typeface="Malgun Gothic"/>
+                <a:sym typeface="Malgun Gothic"/>
               </a:rPr>
               <a:t>[DM] Data Review Board Auto Report</a:t>
             </a:r>
@@ -24601,10 +24601,10 @@
                     <a:alpha val="100000"/>
                   </a:srgbClr>
                 </a:solidFill>
-                <a:latin typeface="Arial"/>
-                <a:cs typeface="Arial"/>
-                <a:ea typeface="Arial"/>
-                <a:sym typeface="Arial"/>
+                <a:latin typeface="Malgun Gothic"/>
+                <a:cs typeface="Malgun Gothic"/>
+                <a:ea typeface="Malgun Gothic"/>
+                <a:sym typeface="Malgun Gothic"/>
               </a:rPr>
               <a:t>■</a:t>
             </a:r>
@@ -24615,10 +24615,10 @@
                     <a:alpha val="100000"/>
                   </a:srgbClr>
                 </a:solidFill>
-                <a:latin typeface="Arial"/>
-                <a:cs typeface="Arial"/>
-                <a:ea typeface="Arial"/>
-                <a:sym typeface="Arial"/>
+                <a:latin typeface="Malgun Gothic"/>
+                <a:cs typeface="Malgun Gothic"/>
+                <a:ea typeface="Malgun Gothic"/>
+                <a:sym typeface="Malgun Gothic"/>
               </a:rPr>
               <a:t> Category: Category2: WTC</a:t>
             </a:r>
@@ -24643,10 +24643,10 @@
                     <a:alpha val="100000"/>
                   </a:srgbClr>
                 </a:solidFill>
-                <a:latin typeface="Arial"/>
-                <a:cs typeface="Arial"/>
-                <a:ea typeface="Arial"/>
-                <a:sym typeface="Arial"/>
+                <a:latin typeface="Malgun Gothic"/>
+                <a:cs typeface="Malgun Gothic"/>
+                <a:ea typeface="Malgun Gothic"/>
+                <a:sym typeface="Malgun Gothic"/>
               </a:rPr>
               <a:t>■</a:t>
             </a:r>
@@ -24657,10 +24657,10 @@
                     <a:alpha val="100000"/>
                   </a:srgbClr>
                 </a:solidFill>
-                <a:latin typeface="Arial"/>
-                <a:cs typeface="Arial"/>
-                <a:ea typeface="Arial"/>
-                <a:sym typeface="Arial"/>
+                <a:latin typeface="Malgun Gothic"/>
+                <a:cs typeface="Malgun Gothic"/>
+                <a:ea typeface="Malgun Gothic"/>
+                <a:sym typeface="Malgun Gothic"/>
               </a:rPr>
               <a:t> REF: A / TARGET: B</a:t>
             </a:r>
@@ -24685,10 +24685,10 @@
                     <a:alpha val="100000"/>
                   </a:srgbClr>
                 </a:solidFill>
-                <a:latin typeface="Arial"/>
-                <a:cs typeface="Arial"/>
-                <a:ea typeface="Arial"/>
-                <a:sym typeface="Arial"/>
+                <a:latin typeface="Malgun Gothic"/>
+                <a:cs typeface="Malgun Gothic"/>
+                <a:ea typeface="Malgun Gothic"/>
+                <a:sym typeface="Malgun Gothic"/>
               </a:rPr>
               <a:t>■</a:t>
             </a:r>
@@ -24699,10 +24699,10 @@
                     <a:alpha val="100000"/>
                   </a:srgbClr>
                 </a:solidFill>
-                <a:latin typeface="Arial"/>
-                <a:cs typeface="Arial"/>
-                <a:ea typeface="Arial"/>
-                <a:sym typeface="Arial"/>
+                <a:latin typeface="Malgun Gothic"/>
+                <a:cs typeface="Malgun Gothic"/>
+                <a:ea typeface="Malgun Gothic"/>
+                <a:sym typeface="Malgun Gothic"/>
               </a:rPr>
               <a:t> Showing MSR 1-4 of 4; threshold 0.5</a:t>
             </a:r>
@@ -24756,10 +24756,10 @@
                               <a:alpha val="100000"/>
                             </a:srgbClr>
                           </a:solidFill>
-                          <a:latin typeface="Arial"/>
-                          <a:cs typeface="Arial"/>
-                          <a:ea typeface="Arial"/>
-                          <a:sym typeface="Arial"/>
+                          <a:latin typeface="Malgun Gothic"/>
+                          <a:cs typeface="Malgun Gothic"/>
+                          <a:ea typeface="Malgun Gothic"/>
+                          <a:sym typeface="Malgun Gothic"/>
                         </a:rPr>
                         <a:t>Category2: WTC - MSR 1-4 of 4</a:t>
                       </a:r>
@@ -24829,10 +24829,10 @@
                               <a:alpha val="100000"/>
                             </a:srgbClr>
                           </a:solidFill>
-                          <a:latin typeface="Arial"/>
-                          <a:cs typeface="Arial"/>
-                          <a:ea typeface="Arial"/>
-                          <a:sym typeface="Arial"/>
+                          <a:latin typeface="Malgun Gothic"/>
+                          <a:cs typeface="Malgun Gothic"/>
+                          <a:ea typeface="Malgun Gothic"/>
+                          <a:sym typeface="Malgun Gothic"/>
                         </a:rPr>
                         <a:t> </a:t>
                       </a:r>
@@ -24902,10 +24902,10 @@
                               <a:alpha val="100000"/>
                             </a:srgbClr>
                           </a:solidFill>
-                          <a:latin typeface="Arial"/>
-                          <a:cs typeface="Arial"/>
-                          <a:ea typeface="Arial"/>
-                          <a:sym typeface="Arial"/>
+                          <a:latin typeface="Malgun Gothic"/>
+                          <a:cs typeface="Malgun Gothic"/>
+                          <a:ea typeface="Malgun Gothic"/>
+                          <a:sym typeface="Malgun Gothic"/>
                         </a:rPr>
                         <a:t> </a:t>
                       </a:r>
@@ -24975,10 +24975,10 @@
                               <a:alpha val="100000"/>
                             </a:srgbClr>
                           </a:solidFill>
-                          <a:latin typeface="Arial"/>
-                          <a:cs typeface="Arial"/>
-                          <a:ea typeface="Arial"/>
-                          <a:sym typeface="Arial"/>
+                          <a:latin typeface="Malgun Gothic"/>
+                          <a:cs typeface="Malgun Gothic"/>
+                          <a:ea typeface="Malgun Gothic"/>
+                          <a:sym typeface="Malgun Gothic"/>
                         </a:rPr>
                         <a:t> </a:t>
                       </a:r>
@@ -25031,9 +25031,9 @@
                     <a:bodyPr/>
                     <a:lstStyle/>
                     <a:p>
-                      <a:pPr algn="l" marL="0" marR="0">
+                      <a:pPr algn="ctr" marL="0" marR="0">
                         <a:lnSpc>
-                          <a:spcPct val="10000"/>
+                          <a:spcPct val="100000"/>
                         </a:lnSpc>
                         <a:spcBef>
                           <a:spcPts val="0"/>
@@ -25050,10 +25050,10 @@
                               <a:alpha val="100000"/>
                             </a:srgbClr>
                           </a:solidFill>
-                          <a:latin typeface="Arial"/>
-                          <a:cs typeface="Arial"/>
-                          <a:ea typeface="Arial"/>
-                          <a:sym typeface="Arial"/>
+                          <a:latin typeface="Malgun Gothic"/>
+                          <a:cs typeface="Malgun Gothic"/>
+                          <a:ea typeface="Malgun Gothic"/>
+                          <a:sym typeface="Malgun Gothic"/>
                         </a:rPr>
                         <a:t> </a:t>
                       </a:r>
@@ -25104,9 +25104,9 @@
                     <a:bodyPr/>
                     <a:lstStyle/>
                     <a:p>
-                      <a:pPr algn="l" marL="0" marR="0">
+                      <a:pPr algn="ctr" marL="0" marR="0">
                         <a:lnSpc>
-                          <a:spcPct val="10000"/>
+                          <a:spcPct val="100000"/>
                         </a:lnSpc>
                         <a:spcBef>
                           <a:spcPts val="0"/>
@@ -25123,10 +25123,10 @@
                               <a:alpha val="100000"/>
                             </a:srgbClr>
                           </a:solidFill>
-                          <a:latin typeface="Arial"/>
-                          <a:cs typeface="Arial"/>
-                          <a:ea typeface="Arial"/>
-                          <a:sym typeface="Arial"/>
+                          <a:latin typeface="Malgun Gothic"/>
+                          <a:cs typeface="Malgun Gothic"/>
+                          <a:ea typeface="Malgun Gothic"/>
+                          <a:sym typeface="Malgun Gothic"/>
                         </a:rPr>
                         <a:t> </a:t>
                       </a:r>
@@ -25177,9 +25177,9 @@
                     <a:bodyPr/>
                     <a:lstStyle/>
                     <a:p>
-                      <a:pPr algn="l" marL="0" marR="0">
+                      <a:pPr algn="ctr" marL="0" marR="0">
                         <a:lnSpc>
-                          <a:spcPct val="10000"/>
+                          <a:spcPct val="100000"/>
                         </a:lnSpc>
                         <a:spcBef>
                           <a:spcPts val="0"/>
@@ -25196,10 +25196,10 @@
                               <a:alpha val="100000"/>
                             </a:srgbClr>
                           </a:solidFill>
-                          <a:latin typeface="Arial"/>
-                          <a:cs typeface="Arial"/>
-                          <a:ea typeface="Arial"/>
-                          <a:sym typeface="Arial"/>
+                          <a:latin typeface="Malgun Gothic"/>
+                          <a:cs typeface="Malgun Gothic"/>
+                          <a:ea typeface="Malgun Gothic"/>
+                          <a:sym typeface="Malgun Gothic"/>
                         </a:rPr>
                         <a:t> </a:t>
                       </a:r>
@@ -25250,9 +25250,9 @@
                     <a:bodyPr/>
                     <a:lstStyle/>
                     <a:p>
-                      <a:pPr algn="l" marL="0" marR="0">
+                      <a:pPr algn="ctr" marL="0" marR="0">
                         <a:lnSpc>
-                          <a:spcPct val="10000"/>
+                          <a:spcPct val="100000"/>
                         </a:lnSpc>
                         <a:spcBef>
                           <a:spcPts val="0"/>
@@ -25269,10 +25269,10 @@
                               <a:alpha val="100000"/>
                             </a:srgbClr>
                           </a:solidFill>
-                          <a:latin typeface="Arial"/>
-                          <a:cs typeface="Arial"/>
-                          <a:ea typeface="Arial"/>
-                          <a:sym typeface="Arial"/>
+                          <a:latin typeface="Malgun Gothic"/>
+                          <a:cs typeface="Malgun Gothic"/>
+                          <a:ea typeface="Malgun Gothic"/>
+                          <a:sym typeface="Malgun Gothic"/>
                         </a:rPr>
                         <a:t> </a:t>
                       </a:r>
@@ -25325,9 +25325,9 @@
                     <a:bodyPr/>
                     <a:lstStyle/>
                     <a:p>
-                      <a:pPr algn="l" marL="0" marR="0">
+                      <a:pPr algn="ctr" marL="0" marR="0">
                         <a:lnSpc>
-                          <a:spcPct val="10000"/>
+                          <a:spcPct val="100000"/>
                         </a:lnSpc>
                         <a:spcBef>
                           <a:spcPts val="0"/>
@@ -25344,10 +25344,10 @@
                               <a:alpha val="100000"/>
                             </a:srgbClr>
                           </a:solidFill>
-                          <a:latin typeface="Arial"/>
-                          <a:cs typeface="Arial"/>
-                          <a:ea typeface="Arial"/>
-                          <a:sym typeface="Arial"/>
+                          <a:latin typeface="Malgun Gothic"/>
+                          <a:cs typeface="Malgun Gothic"/>
+                          <a:ea typeface="Malgun Gothic"/>
+                          <a:sym typeface="Malgun Gothic"/>
                         </a:rPr>
                         <a:t> </a:t>
                       </a:r>
@@ -25398,9 +25398,9 @@
                     <a:bodyPr/>
                     <a:lstStyle/>
                     <a:p>
-                      <a:pPr algn="l" marL="0" marR="0">
+                      <a:pPr algn="ctr" marL="0" marR="0">
                         <a:lnSpc>
-                          <a:spcPct val="10000"/>
+                          <a:spcPct val="100000"/>
                         </a:lnSpc>
                         <a:spcBef>
                           <a:spcPts val="0"/>
@@ -25417,10 +25417,10 @@
                               <a:alpha val="100000"/>
                             </a:srgbClr>
                           </a:solidFill>
-                          <a:latin typeface="Arial"/>
-                          <a:cs typeface="Arial"/>
-                          <a:ea typeface="Arial"/>
-                          <a:sym typeface="Arial"/>
+                          <a:latin typeface="Malgun Gothic"/>
+                          <a:cs typeface="Malgun Gothic"/>
+                          <a:ea typeface="Malgun Gothic"/>
+                          <a:sym typeface="Malgun Gothic"/>
                         </a:rPr>
                         <a:t> </a:t>
                       </a:r>
@@ -25471,9 +25471,9 @@
                     <a:bodyPr/>
                     <a:lstStyle/>
                     <a:p>
-                      <a:pPr algn="l" marL="0" marR="0">
+                      <a:pPr algn="ctr" marL="0" marR="0">
                         <a:lnSpc>
-                          <a:spcPct val="10000"/>
+                          <a:spcPct val="100000"/>
                         </a:lnSpc>
                         <a:spcBef>
                           <a:spcPts val="0"/>
@@ -25490,10 +25490,10 @@
                               <a:alpha val="100000"/>
                             </a:srgbClr>
                           </a:solidFill>
-                          <a:latin typeface="Arial"/>
-                          <a:cs typeface="Arial"/>
-                          <a:ea typeface="Arial"/>
-                          <a:sym typeface="Arial"/>
+                          <a:latin typeface="Malgun Gothic"/>
+                          <a:cs typeface="Malgun Gothic"/>
+                          <a:ea typeface="Malgun Gothic"/>
+                          <a:sym typeface="Malgun Gothic"/>
                         </a:rPr>
                         <a:t> </a:t>
                       </a:r>
@@ -25544,9 +25544,9 @@
                     <a:bodyPr/>
                     <a:lstStyle/>
                     <a:p>
-                      <a:pPr algn="l" marL="0" marR="0">
+                      <a:pPr algn="ctr" marL="0" marR="0">
                         <a:lnSpc>
-                          <a:spcPct val="10000"/>
+                          <a:spcPct val="100000"/>
                         </a:lnSpc>
                         <a:spcBef>
                           <a:spcPts val="0"/>
@@ -25563,10 +25563,10 @@
                               <a:alpha val="100000"/>
                             </a:srgbClr>
                           </a:solidFill>
-                          <a:latin typeface="Arial"/>
-                          <a:cs typeface="Arial"/>
-                          <a:ea typeface="Arial"/>
-                          <a:sym typeface="Arial"/>
+                          <a:latin typeface="Malgun Gothic"/>
+                          <a:cs typeface="Malgun Gothic"/>
+                          <a:ea typeface="Malgun Gothic"/>
+                          <a:sym typeface="Malgun Gothic"/>
                         </a:rPr>
                         <a:t> </a:t>
                       </a:r>
@@ -25619,9 +25619,9 @@
                     <a:bodyPr/>
                     <a:lstStyle/>
                     <a:p>
-                      <a:pPr algn="l" marL="0" marR="0">
+                      <a:pPr algn="ctr" marL="0" marR="0">
                         <a:lnSpc>
-                          <a:spcPct val="10000"/>
+                          <a:spcPct val="100000"/>
                         </a:lnSpc>
                         <a:spcBef>
                           <a:spcPts val="0"/>
@@ -25638,10 +25638,10 @@
                               <a:alpha val="100000"/>
                             </a:srgbClr>
                           </a:solidFill>
-                          <a:latin typeface="Arial"/>
-                          <a:cs typeface="Arial"/>
-                          <a:ea typeface="Arial"/>
-                          <a:sym typeface="Arial"/>
+                          <a:latin typeface="Malgun Gothic"/>
+                          <a:cs typeface="Malgun Gothic"/>
+                          <a:ea typeface="Malgun Gothic"/>
+                          <a:sym typeface="Malgun Gothic"/>
                         </a:rPr>
                         <a:t> </a:t>
                       </a:r>
@@ -25692,9 +25692,9 @@
                     <a:bodyPr/>
                     <a:lstStyle/>
                     <a:p>
-                      <a:pPr algn="l" marL="0" marR="0">
+                      <a:pPr algn="ctr" marL="0" marR="0">
                         <a:lnSpc>
-                          <a:spcPct val="10000"/>
+                          <a:spcPct val="100000"/>
                         </a:lnSpc>
                         <a:spcBef>
                           <a:spcPts val="0"/>
@@ -25711,10 +25711,10 @@
                               <a:alpha val="100000"/>
                             </a:srgbClr>
                           </a:solidFill>
-                          <a:latin typeface="Arial"/>
-                          <a:cs typeface="Arial"/>
-                          <a:ea typeface="Arial"/>
-                          <a:sym typeface="Arial"/>
+                          <a:latin typeface="Malgun Gothic"/>
+                          <a:cs typeface="Malgun Gothic"/>
+                          <a:ea typeface="Malgun Gothic"/>
+                          <a:sym typeface="Malgun Gothic"/>
                         </a:rPr>
                         <a:t> </a:t>
                       </a:r>
@@ -25765,9 +25765,9 @@
                     <a:bodyPr/>
                     <a:lstStyle/>
                     <a:p>
-                      <a:pPr algn="l" marL="0" marR="0">
+                      <a:pPr algn="ctr" marL="0" marR="0">
                         <a:lnSpc>
-                          <a:spcPct val="10000"/>
+                          <a:spcPct val="100000"/>
                         </a:lnSpc>
                         <a:spcBef>
                           <a:spcPts val="0"/>
@@ -25784,10 +25784,10 @@
                               <a:alpha val="100000"/>
                             </a:srgbClr>
                           </a:solidFill>
-                          <a:latin typeface="Arial"/>
-                          <a:cs typeface="Arial"/>
-                          <a:ea typeface="Arial"/>
-                          <a:sym typeface="Arial"/>
+                          <a:latin typeface="Malgun Gothic"/>
+                          <a:cs typeface="Malgun Gothic"/>
+                          <a:ea typeface="Malgun Gothic"/>
+                          <a:sym typeface="Malgun Gothic"/>
                         </a:rPr>
                         <a:t> </a:t>
                       </a:r>
@@ -25838,9 +25838,9 @@
                     <a:bodyPr/>
                     <a:lstStyle/>
                     <a:p>
-                      <a:pPr algn="l" marL="0" marR="0">
+                      <a:pPr algn="ctr" marL="0" marR="0">
                         <a:lnSpc>
-                          <a:spcPct val="10000"/>
+                          <a:spcPct val="100000"/>
                         </a:lnSpc>
                         <a:spcBef>
                           <a:spcPts val="0"/>
@@ -25857,10 +25857,10 @@
                               <a:alpha val="100000"/>
                             </a:srgbClr>
                           </a:solidFill>
-                          <a:latin typeface="Arial"/>
-                          <a:cs typeface="Arial"/>
-                          <a:ea typeface="Arial"/>
-                          <a:sym typeface="Arial"/>
+                          <a:latin typeface="Malgun Gothic"/>
+                          <a:cs typeface="Malgun Gothic"/>
+                          <a:ea typeface="Malgun Gothic"/>
+                          <a:sym typeface="Malgun Gothic"/>
                         </a:rPr>
                         <a:t> </a:t>
                       </a:r>
@@ -25913,9 +25913,9 @@
                     <a:bodyPr/>
                     <a:lstStyle/>
                     <a:p>
-                      <a:pPr algn="l" marL="0" marR="0">
+                      <a:pPr algn="ctr" marL="0" marR="0">
                         <a:lnSpc>
-                          <a:spcPct val="10000"/>
+                          <a:spcPct val="100000"/>
                         </a:lnSpc>
                         <a:spcBef>
                           <a:spcPts val="0"/>
@@ -25932,10 +25932,10 @@
                               <a:alpha val="100000"/>
                             </a:srgbClr>
                           </a:solidFill>
-                          <a:latin typeface="Arial"/>
-                          <a:cs typeface="Arial"/>
-                          <a:ea typeface="Arial"/>
-                          <a:sym typeface="Arial"/>
+                          <a:latin typeface="Malgun Gothic"/>
+                          <a:cs typeface="Malgun Gothic"/>
+                          <a:ea typeface="Malgun Gothic"/>
+                          <a:sym typeface="Malgun Gothic"/>
                         </a:rPr>
                         <a:t> </a:t>
                       </a:r>
@@ -25986,9 +25986,9 @@
                     <a:bodyPr/>
                     <a:lstStyle/>
                     <a:p>
-                      <a:pPr algn="l" marL="0" marR="0">
+                      <a:pPr algn="ctr" marL="0" marR="0">
                         <a:lnSpc>
-                          <a:spcPct val="10000"/>
+                          <a:spcPct val="100000"/>
                         </a:lnSpc>
                         <a:spcBef>
                           <a:spcPts val="0"/>
@@ -26005,10 +26005,10 @@
                               <a:alpha val="100000"/>
                             </a:srgbClr>
                           </a:solidFill>
-                          <a:latin typeface="Arial"/>
-                          <a:cs typeface="Arial"/>
-                          <a:ea typeface="Arial"/>
-                          <a:sym typeface="Arial"/>
+                          <a:latin typeface="Malgun Gothic"/>
+                          <a:cs typeface="Malgun Gothic"/>
+                          <a:ea typeface="Malgun Gothic"/>
+                          <a:sym typeface="Malgun Gothic"/>
                         </a:rPr>
                         <a:t> </a:t>
                       </a:r>
@@ -26059,9 +26059,9 @@
                     <a:bodyPr/>
                     <a:lstStyle/>
                     <a:p>
-                      <a:pPr algn="l" marL="0" marR="0">
+                      <a:pPr algn="ctr" marL="0" marR="0">
                         <a:lnSpc>
-                          <a:spcPct val="10000"/>
+                          <a:spcPct val="100000"/>
                         </a:lnSpc>
                         <a:spcBef>
                           <a:spcPts val="0"/>
@@ -26078,10 +26078,10 @@
                               <a:alpha val="100000"/>
                             </a:srgbClr>
                           </a:solidFill>
-                          <a:latin typeface="Arial"/>
-                          <a:cs typeface="Arial"/>
-                          <a:ea typeface="Arial"/>
-                          <a:sym typeface="Arial"/>
+                          <a:latin typeface="Malgun Gothic"/>
+                          <a:cs typeface="Malgun Gothic"/>
+                          <a:ea typeface="Malgun Gothic"/>
+                          <a:sym typeface="Malgun Gothic"/>
                         </a:rPr>
                         <a:t> </a:t>
                       </a:r>
@@ -26132,9 +26132,9 @@
                     <a:bodyPr/>
                     <a:lstStyle/>
                     <a:p>
-                      <a:pPr algn="l" marL="0" marR="0">
+                      <a:pPr algn="ctr" marL="0" marR="0">
                         <a:lnSpc>
-                          <a:spcPct val="10000"/>
+                          <a:spcPct val="100000"/>
                         </a:lnSpc>
                         <a:spcBef>
                           <a:spcPts val="0"/>
@@ -26151,10 +26151,10 @@
                               <a:alpha val="100000"/>
                             </a:srgbClr>
                           </a:solidFill>
-                          <a:latin typeface="Arial"/>
-                          <a:cs typeface="Arial"/>
-                          <a:ea typeface="Arial"/>
-                          <a:sym typeface="Arial"/>
+                          <a:latin typeface="Malgun Gothic"/>
+                          <a:cs typeface="Malgun Gothic"/>
+                          <a:ea typeface="Malgun Gothic"/>
+                          <a:sym typeface="Malgun Gothic"/>
                         </a:rPr>
                         <a:t> </a:t>
                       </a:r>
@@ -26249,10 +26249,10 @@
                     <a:alpha val="100000"/>
                   </a:srgbClr>
                 </a:solidFill>
-                <a:latin typeface="Arial"/>
-                <a:cs typeface="Arial"/>
-                <a:ea typeface="Arial"/>
-                <a:sym typeface="Arial"/>
+                <a:latin typeface="Malgun Gothic"/>
+                <a:cs typeface="Malgun Gothic"/>
+                <a:ea typeface="Malgun Gothic"/>
+                <a:sym typeface="Malgun Gothic"/>
               </a:rPr>
               <a:t>⬤</a:t>
             </a:r>
@@ -26263,10 +26263,10 @@
                     <a:alpha val="100000"/>
                   </a:srgbClr>
                 </a:solidFill>
-                <a:latin typeface="Arial"/>
-                <a:cs typeface="Arial"/>
-                <a:ea typeface="Arial"/>
-                <a:sym typeface="Arial"/>
+                <a:latin typeface="Malgun Gothic"/>
+                <a:cs typeface="Malgun Gothic"/>
+                <a:ea typeface="Malgun Gothic"/>
+                <a:sym typeface="Malgun Gothic"/>
               </a:rPr>
               <a:t> (ML_MSR_298) Cell_WTC_298</a:t>
             </a:r>
@@ -26343,10 +26343,10 @@
                     <a:alpha val="100000"/>
                   </a:srgbClr>
                 </a:solidFill>
-                <a:latin typeface="Arial"/>
-                <a:cs typeface="Arial"/>
-                <a:ea typeface="Arial"/>
-                <a:sym typeface="Arial"/>
+                <a:latin typeface="Malgun Gothic"/>
+                <a:cs typeface="Malgun Gothic"/>
+                <a:ea typeface="Malgun Gothic"/>
+                <a:sym typeface="Malgun Gothic"/>
               </a:rPr>
               <a:t>+0.0sig</a:t>
             </a:r>
@@ -26397,10 +26397,10 @@
                     <a:alpha val="100000"/>
                   </a:srgbClr>
                 </a:solidFill>
-                <a:latin typeface="Arial"/>
-                <a:cs typeface="Arial"/>
-                <a:ea typeface="Arial"/>
-                <a:sym typeface="Arial"/>
+                <a:latin typeface="Malgun Gothic"/>
+                <a:cs typeface="Malgun Gothic"/>
+                <a:ea typeface="Malgun Gothic"/>
+                <a:sym typeface="Malgun Gothic"/>
               </a:rPr>
               <a:t>⬤</a:t>
             </a:r>
@@ -26411,10 +26411,10 @@
                     <a:alpha val="100000"/>
                   </a:srgbClr>
                 </a:solidFill>
-                <a:latin typeface="Arial"/>
-                <a:cs typeface="Arial"/>
-                <a:ea typeface="Arial"/>
-                <a:sym typeface="Arial"/>
+                <a:latin typeface="Malgun Gothic"/>
+                <a:cs typeface="Malgun Gothic"/>
+                <a:ea typeface="Malgun Gothic"/>
+                <a:sym typeface="Malgun Gothic"/>
               </a:rPr>
               <a:t> (ML_MSR_266) Cell_WTC_266</a:t>
             </a:r>
@@ -26491,10 +26491,10 @@
                     <a:alpha val="100000"/>
                   </a:srgbClr>
                 </a:solidFill>
-                <a:latin typeface="Arial"/>
-                <a:cs typeface="Arial"/>
-                <a:ea typeface="Arial"/>
-                <a:sym typeface="Arial"/>
+                <a:latin typeface="Malgun Gothic"/>
+                <a:cs typeface="Malgun Gothic"/>
+                <a:ea typeface="Malgun Gothic"/>
+                <a:sym typeface="Malgun Gothic"/>
               </a:rPr>
               <a:t>+0.0sig</a:t>
             </a:r>
@@ -26545,10 +26545,10 @@
                     <a:alpha val="100000"/>
                   </a:srgbClr>
                 </a:solidFill>
-                <a:latin typeface="Arial"/>
-                <a:cs typeface="Arial"/>
-                <a:ea typeface="Arial"/>
-                <a:sym typeface="Arial"/>
+                <a:latin typeface="Malgun Gothic"/>
+                <a:cs typeface="Malgun Gothic"/>
+                <a:ea typeface="Malgun Gothic"/>
+                <a:sym typeface="Malgun Gothic"/>
               </a:rPr>
               <a:t>⬤</a:t>
             </a:r>
@@ -26559,10 +26559,10 @@
                     <a:alpha val="100000"/>
                   </a:srgbClr>
                 </a:solidFill>
-                <a:latin typeface="Arial"/>
-                <a:cs typeface="Arial"/>
-                <a:ea typeface="Arial"/>
-                <a:sym typeface="Arial"/>
+                <a:latin typeface="Malgun Gothic"/>
+                <a:cs typeface="Malgun Gothic"/>
+                <a:ea typeface="Malgun Gothic"/>
+                <a:sym typeface="Malgun Gothic"/>
               </a:rPr>
               <a:t> (ML_MSR_290) Cell_WTC_290</a:t>
             </a:r>
@@ -26639,10 +26639,10 @@
                     <a:alpha val="100000"/>
                   </a:srgbClr>
                 </a:solidFill>
-                <a:latin typeface="Arial"/>
-                <a:cs typeface="Arial"/>
-                <a:ea typeface="Arial"/>
-                <a:sym typeface="Arial"/>
+                <a:latin typeface="Malgun Gothic"/>
+                <a:cs typeface="Malgun Gothic"/>
+                <a:ea typeface="Malgun Gothic"/>
+                <a:sym typeface="Malgun Gothic"/>
               </a:rPr>
               <a:t>+0.5sig</a:t>
             </a:r>
@@ -26693,10 +26693,10 @@
                     <a:alpha val="100000"/>
                   </a:srgbClr>
                 </a:solidFill>
-                <a:latin typeface="Arial"/>
-                <a:cs typeface="Arial"/>
-                <a:ea typeface="Arial"/>
-                <a:sym typeface="Arial"/>
+                <a:latin typeface="Malgun Gothic"/>
+                <a:cs typeface="Malgun Gothic"/>
+                <a:ea typeface="Malgun Gothic"/>
+                <a:sym typeface="Malgun Gothic"/>
               </a:rPr>
               <a:t>⬤</a:t>
             </a:r>
@@ -26707,10 +26707,10 @@
                     <a:alpha val="100000"/>
                   </a:srgbClr>
                 </a:solidFill>
-                <a:latin typeface="Arial"/>
-                <a:cs typeface="Arial"/>
-                <a:ea typeface="Arial"/>
-                <a:sym typeface="Arial"/>
+                <a:latin typeface="Malgun Gothic"/>
+                <a:cs typeface="Malgun Gothic"/>
+                <a:ea typeface="Malgun Gothic"/>
+                <a:sym typeface="Malgun Gothic"/>
               </a:rPr>
               <a:t> (ML_MSR_271) Cell_WTC_271</a:t>
             </a:r>
@@ -26787,10 +26787,10 @@
                     <a:alpha val="100000"/>
                   </a:srgbClr>
                 </a:solidFill>
-                <a:latin typeface="Arial"/>
-                <a:cs typeface="Arial"/>
-                <a:ea typeface="Arial"/>
-                <a:sym typeface="Arial"/>
+                <a:latin typeface="Malgun Gothic"/>
+                <a:cs typeface="Malgun Gothic"/>
+                <a:ea typeface="Malgun Gothic"/>
+                <a:sym typeface="Malgun Gothic"/>
               </a:rPr>
               <a:t>+0.5sig</a:t>
             </a:r>
@@ -26809,8 +26809,8 @@
         </p:nvSpPr>
         <p:spPr>
           <a:xfrm>
-            <a:off x="4711446" y="6446520"/>
-            <a:ext cx="2766060" cy="219456"/>
+            <a:off x="4642866" y="6446520"/>
+            <a:ext cx="2903220" cy="219456"/>
           </a:xfrm>
           <a:solidFill>
             <a:srgbClr val="FFFFFF">
@@ -26841,10 +26841,10 @@
                     <a:alpha val="100000"/>
                   </a:srgbClr>
                 </a:solidFill>
-                <a:latin typeface="Arial"/>
-                <a:cs typeface="Arial"/>
-                <a:ea typeface="Arial"/>
-                <a:sym typeface="Arial"/>
+                <a:latin typeface="Malgun Gothic"/>
+                <a:cs typeface="Malgun Gothic"/>
+                <a:ea typeface="Malgun Gothic"/>
+                <a:sym typeface="Malgun Gothic"/>
               </a:rPr>
               <a:t>● A (REF, 16매)</a:t>
             </a:r>
@@ -26855,10 +26855,10 @@
                     <a:alpha val="100000"/>
                   </a:srgbClr>
                 </a:solidFill>
-                <a:latin typeface="Arial"/>
-                <a:cs typeface="Arial"/>
-                <a:ea typeface="Arial"/>
-                <a:sym typeface="Arial"/>
+                <a:latin typeface="Malgun Gothic"/>
+                <a:cs typeface="Malgun Gothic"/>
+                <a:ea typeface="Malgun Gothic"/>
+                <a:sym typeface="Malgun Gothic"/>
               </a:rPr>
               <a:t>    </a:t>
             </a:r>
@@ -26869,10 +26869,10 @@
                     <a:alpha val="100000"/>
                   </a:srgbClr>
                 </a:solidFill>
-                <a:latin typeface="Arial"/>
-                <a:cs typeface="Arial"/>
-                <a:ea typeface="Arial"/>
-                <a:sym typeface="Arial"/>
+                <a:latin typeface="Malgun Gothic"/>
+                <a:cs typeface="Malgun Gothic"/>
+                <a:ea typeface="Malgun Gothic"/>
+                <a:sym typeface="Malgun Gothic"/>
               </a:rPr>
               <a:t>● B (TARGET, 10매)</a:t>
             </a:r>
@@ -26948,10 +26948,10 @@
                     <a:alpha val="100000"/>
                   </a:srgbClr>
                 </a:solidFill>
-                <a:latin typeface="Arial"/>
-                <a:cs typeface="Arial"/>
-                <a:ea typeface="Arial"/>
-                <a:sym typeface="Arial"/>
+                <a:latin typeface="Malgun Gothic"/>
+                <a:cs typeface="Malgun Gothic"/>
+                <a:ea typeface="Malgun Gothic"/>
+                <a:sym typeface="Malgun Gothic"/>
               </a:rPr>
               <a:t>[DM] Data Review Board Auto Report</a:t>
             </a:r>
@@ -27002,10 +27002,10 @@
                     <a:alpha val="100000"/>
                   </a:srgbClr>
                 </a:solidFill>
-                <a:latin typeface="Arial"/>
-                <a:cs typeface="Arial"/>
-                <a:ea typeface="Arial"/>
-                <a:sym typeface="Arial"/>
+                <a:latin typeface="Malgun Gothic"/>
+                <a:cs typeface="Malgun Gothic"/>
+                <a:ea typeface="Malgun Gothic"/>
+                <a:sym typeface="Malgun Gothic"/>
               </a:rPr>
               <a:t>■</a:t>
             </a:r>
@@ -27016,10 +27016,10 @@
                     <a:alpha val="100000"/>
                   </a:srgbClr>
                 </a:solidFill>
-                <a:latin typeface="Arial"/>
-                <a:cs typeface="Arial"/>
-                <a:ea typeface="Arial"/>
-                <a:sym typeface="Arial"/>
+                <a:latin typeface="Malgun Gothic"/>
+                <a:cs typeface="Malgun Gothic"/>
+                <a:ea typeface="Malgun Gothic"/>
+                <a:sym typeface="Malgun Gothic"/>
               </a:rPr>
               <a:t> Category: Category2: TCMC</a:t>
             </a:r>
@@ -27044,10 +27044,10 @@
                     <a:alpha val="100000"/>
                   </a:srgbClr>
                 </a:solidFill>
-                <a:latin typeface="Arial"/>
-                <a:cs typeface="Arial"/>
-                <a:ea typeface="Arial"/>
-                <a:sym typeface="Arial"/>
+                <a:latin typeface="Malgun Gothic"/>
+                <a:cs typeface="Malgun Gothic"/>
+                <a:ea typeface="Malgun Gothic"/>
+                <a:sym typeface="Malgun Gothic"/>
               </a:rPr>
               <a:t>■</a:t>
             </a:r>
@@ -27058,10 +27058,10 @@
                     <a:alpha val="100000"/>
                   </a:srgbClr>
                 </a:solidFill>
-                <a:latin typeface="Arial"/>
-                <a:cs typeface="Arial"/>
-                <a:ea typeface="Arial"/>
-                <a:sym typeface="Arial"/>
+                <a:latin typeface="Malgun Gothic"/>
+                <a:cs typeface="Malgun Gothic"/>
+                <a:ea typeface="Malgun Gothic"/>
+                <a:sym typeface="Malgun Gothic"/>
               </a:rPr>
               <a:t> REF: A / TARGET: B</a:t>
             </a:r>
@@ -27086,10 +27086,10 @@
                     <a:alpha val="100000"/>
                   </a:srgbClr>
                 </a:solidFill>
-                <a:latin typeface="Arial"/>
-                <a:cs typeface="Arial"/>
-                <a:ea typeface="Arial"/>
-                <a:sym typeface="Arial"/>
+                <a:latin typeface="Malgun Gothic"/>
+                <a:cs typeface="Malgun Gothic"/>
+                <a:ea typeface="Malgun Gothic"/>
+                <a:sym typeface="Malgun Gothic"/>
               </a:rPr>
               <a:t>■</a:t>
             </a:r>
@@ -27100,10 +27100,10 @@
                     <a:alpha val="100000"/>
                   </a:srgbClr>
                 </a:solidFill>
-                <a:latin typeface="Arial"/>
-                <a:cs typeface="Arial"/>
-                <a:ea typeface="Arial"/>
-                <a:sym typeface="Arial"/>
+                <a:latin typeface="Malgun Gothic"/>
+                <a:cs typeface="Malgun Gothic"/>
+                <a:ea typeface="Malgun Gothic"/>
+                <a:sym typeface="Malgun Gothic"/>
               </a:rPr>
               <a:t> Showing MSR 1-6 of 6; threshold 0.5</a:t>
             </a:r>
@@ -27157,10 +27157,10 @@
                               <a:alpha val="100000"/>
                             </a:srgbClr>
                           </a:solidFill>
-                          <a:latin typeface="Arial"/>
-                          <a:cs typeface="Arial"/>
-                          <a:ea typeface="Arial"/>
-                          <a:sym typeface="Arial"/>
+                          <a:latin typeface="Malgun Gothic"/>
+                          <a:cs typeface="Malgun Gothic"/>
+                          <a:ea typeface="Malgun Gothic"/>
+                          <a:sym typeface="Malgun Gothic"/>
                         </a:rPr>
                         <a:t>Category2: TCMC - MSR 1-6 of 6</a:t>
                       </a:r>
@@ -27230,10 +27230,10 @@
                               <a:alpha val="100000"/>
                             </a:srgbClr>
                           </a:solidFill>
-                          <a:latin typeface="Arial"/>
-                          <a:cs typeface="Arial"/>
-                          <a:ea typeface="Arial"/>
-                          <a:sym typeface="Arial"/>
+                          <a:latin typeface="Malgun Gothic"/>
+                          <a:cs typeface="Malgun Gothic"/>
+                          <a:ea typeface="Malgun Gothic"/>
+                          <a:sym typeface="Malgun Gothic"/>
                         </a:rPr>
                         <a:t> </a:t>
                       </a:r>
@@ -27303,10 +27303,10 @@
                               <a:alpha val="100000"/>
                             </a:srgbClr>
                           </a:solidFill>
-                          <a:latin typeface="Arial"/>
-                          <a:cs typeface="Arial"/>
-                          <a:ea typeface="Arial"/>
-                          <a:sym typeface="Arial"/>
+                          <a:latin typeface="Malgun Gothic"/>
+                          <a:cs typeface="Malgun Gothic"/>
+                          <a:ea typeface="Malgun Gothic"/>
+                          <a:sym typeface="Malgun Gothic"/>
                         </a:rPr>
                         <a:t> </a:t>
                       </a:r>
@@ -27376,10 +27376,10 @@
                               <a:alpha val="100000"/>
                             </a:srgbClr>
                           </a:solidFill>
-                          <a:latin typeface="Arial"/>
-                          <a:cs typeface="Arial"/>
-                          <a:ea typeface="Arial"/>
-                          <a:sym typeface="Arial"/>
+                          <a:latin typeface="Malgun Gothic"/>
+                          <a:cs typeface="Malgun Gothic"/>
+                          <a:ea typeface="Malgun Gothic"/>
+                          <a:sym typeface="Malgun Gothic"/>
                         </a:rPr>
                         <a:t> </a:t>
                       </a:r>
@@ -27432,9 +27432,9 @@
                     <a:bodyPr/>
                     <a:lstStyle/>
                     <a:p>
-                      <a:pPr algn="l" marL="0" marR="0">
+                      <a:pPr algn="ctr" marL="0" marR="0">
                         <a:lnSpc>
-                          <a:spcPct val="10000"/>
+                          <a:spcPct val="100000"/>
                         </a:lnSpc>
                         <a:spcBef>
                           <a:spcPts val="0"/>
@@ -27451,10 +27451,10 @@
                               <a:alpha val="100000"/>
                             </a:srgbClr>
                           </a:solidFill>
-                          <a:latin typeface="Arial"/>
-                          <a:cs typeface="Arial"/>
-                          <a:ea typeface="Arial"/>
-                          <a:sym typeface="Arial"/>
+                          <a:latin typeface="Malgun Gothic"/>
+                          <a:cs typeface="Malgun Gothic"/>
+                          <a:ea typeface="Malgun Gothic"/>
+                          <a:sym typeface="Malgun Gothic"/>
                         </a:rPr>
                         <a:t> </a:t>
                       </a:r>
@@ -27505,9 +27505,9 @@
                     <a:bodyPr/>
                     <a:lstStyle/>
                     <a:p>
-                      <a:pPr algn="l" marL="0" marR="0">
+                      <a:pPr algn="ctr" marL="0" marR="0">
                         <a:lnSpc>
-                          <a:spcPct val="10000"/>
+                          <a:spcPct val="100000"/>
                         </a:lnSpc>
                         <a:spcBef>
                           <a:spcPts val="0"/>
@@ -27524,10 +27524,10 @@
                               <a:alpha val="100000"/>
                             </a:srgbClr>
                           </a:solidFill>
-                          <a:latin typeface="Arial"/>
-                          <a:cs typeface="Arial"/>
-                          <a:ea typeface="Arial"/>
-                          <a:sym typeface="Arial"/>
+                          <a:latin typeface="Malgun Gothic"/>
+                          <a:cs typeface="Malgun Gothic"/>
+                          <a:ea typeface="Malgun Gothic"/>
+                          <a:sym typeface="Malgun Gothic"/>
                         </a:rPr>
                         <a:t> </a:t>
                       </a:r>
@@ -27578,9 +27578,9 @@
                     <a:bodyPr/>
                     <a:lstStyle/>
                     <a:p>
-                      <a:pPr algn="l" marL="0" marR="0">
+                      <a:pPr algn="ctr" marL="0" marR="0">
                         <a:lnSpc>
-                          <a:spcPct val="10000"/>
+                          <a:spcPct val="100000"/>
                         </a:lnSpc>
                         <a:spcBef>
                           <a:spcPts val="0"/>
@@ -27597,10 +27597,10 @@
                               <a:alpha val="100000"/>
                             </a:srgbClr>
                           </a:solidFill>
-                          <a:latin typeface="Arial"/>
-                          <a:cs typeface="Arial"/>
-                          <a:ea typeface="Arial"/>
-                          <a:sym typeface="Arial"/>
+                          <a:latin typeface="Malgun Gothic"/>
+                          <a:cs typeface="Malgun Gothic"/>
+                          <a:ea typeface="Malgun Gothic"/>
+                          <a:sym typeface="Malgun Gothic"/>
                         </a:rPr>
                         <a:t> </a:t>
                       </a:r>
@@ -27651,9 +27651,9 @@
                     <a:bodyPr/>
                     <a:lstStyle/>
                     <a:p>
-                      <a:pPr algn="l" marL="0" marR="0">
+                      <a:pPr algn="ctr" marL="0" marR="0">
                         <a:lnSpc>
-                          <a:spcPct val="10000"/>
+                          <a:spcPct val="100000"/>
                         </a:lnSpc>
                         <a:spcBef>
                           <a:spcPts val="0"/>
@@ -27670,10 +27670,10 @@
                               <a:alpha val="100000"/>
                             </a:srgbClr>
                           </a:solidFill>
-                          <a:latin typeface="Arial"/>
-                          <a:cs typeface="Arial"/>
-                          <a:ea typeface="Arial"/>
-                          <a:sym typeface="Arial"/>
+                          <a:latin typeface="Malgun Gothic"/>
+                          <a:cs typeface="Malgun Gothic"/>
+                          <a:ea typeface="Malgun Gothic"/>
+                          <a:sym typeface="Malgun Gothic"/>
                         </a:rPr>
                         <a:t> </a:t>
                       </a:r>
@@ -27726,9 +27726,9 @@
                     <a:bodyPr/>
                     <a:lstStyle/>
                     <a:p>
-                      <a:pPr algn="l" marL="0" marR="0">
+                      <a:pPr algn="ctr" marL="0" marR="0">
                         <a:lnSpc>
-                          <a:spcPct val="10000"/>
+                          <a:spcPct val="100000"/>
                         </a:lnSpc>
                         <a:spcBef>
                           <a:spcPts val="0"/>
@@ -27745,10 +27745,10 @@
                               <a:alpha val="100000"/>
                             </a:srgbClr>
                           </a:solidFill>
-                          <a:latin typeface="Arial"/>
-                          <a:cs typeface="Arial"/>
-                          <a:ea typeface="Arial"/>
-                          <a:sym typeface="Arial"/>
+                          <a:latin typeface="Malgun Gothic"/>
+                          <a:cs typeface="Malgun Gothic"/>
+                          <a:ea typeface="Malgun Gothic"/>
+                          <a:sym typeface="Malgun Gothic"/>
                         </a:rPr>
                         <a:t> </a:t>
                       </a:r>
@@ -27799,9 +27799,9 @@
                     <a:bodyPr/>
                     <a:lstStyle/>
                     <a:p>
-                      <a:pPr algn="l" marL="0" marR="0">
+                      <a:pPr algn="ctr" marL="0" marR="0">
                         <a:lnSpc>
-                          <a:spcPct val="10000"/>
+                          <a:spcPct val="100000"/>
                         </a:lnSpc>
                         <a:spcBef>
                           <a:spcPts val="0"/>
@@ -27818,10 +27818,10 @@
                               <a:alpha val="100000"/>
                             </a:srgbClr>
                           </a:solidFill>
-                          <a:latin typeface="Arial"/>
-                          <a:cs typeface="Arial"/>
-                          <a:ea typeface="Arial"/>
-                          <a:sym typeface="Arial"/>
+                          <a:latin typeface="Malgun Gothic"/>
+                          <a:cs typeface="Malgun Gothic"/>
+                          <a:ea typeface="Malgun Gothic"/>
+                          <a:sym typeface="Malgun Gothic"/>
                         </a:rPr>
                         <a:t> </a:t>
                       </a:r>
@@ -27872,9 +27872,9 @@
                     <a:bodyPr/>
                     <a:lstStyle/>
                     <a:p>
-                      <a:pPr algn="l" marL="0" marR="0">
+                      <a:pPr algn="ctr" marL="0" marR="0">
                         <a:lnSpc>
-                          <a:spcPct val="10000"/>
+                          <a:spcPct val="100000"/>
                         </a:lnSpc>
                         <a:spcBef>
                           <a:spcPts val="0"/>
@@ -27891,10 +27891,10 @@
                               <a:alpha val="100000"/>
                             </a:srgbClr>
                           </a:solidFill>
-                          <a:latin typeface="Arial"/>
-                          <a:cs typeface="Arial"/>
-                          <a:ea typeface="Arial"/>
-                          <a:sym typeface="Arial"/>
+                          <a:latin typeface="Malgun Gothic"/>
+                          <a:cs typeface="Malgun Gothic"/>
+                          <a:ea typeface="Malgun Gothic"/>
+                          <a:sym typeface="Malgun Gothic"/>
                         </a:rPr>
                         <a:t> </a:t>
                       </a:r>
@@ -27945,9 +27945,9 @@
                     <a:bodyPr/>
                     <a:lstStyle/>
                     <a:p>
-                      <a:pPr algn="l" marL="0" marR="0">
+                      <a:pPr algn="ctr" marL="0" marR="0">
                         <a:lnSpc>
-                          <a:spcPct val="10000"/>
+                          <a:spcPct val="100000"/>
                         </a:lnSpc>
                         <a:spcBef>
                           <a:spcPts val="0"/>
@@ -27964,10 +27964,10 @@
                               <a:alpha val="100000"/>
                             </a:srgbClr>
                           </a:solidFill>
-                          <a:latin typeface="Arial"/>
-                          <a:cs typeface="Arial"/>
-                          <a:ea typeface="Arial"/>
-                          <a:sym typeface="Arial"/>
+                          <a:latin typeface="Malgun Gothic"/>
+                          <a:cs typeface="Malgun Gothic"/>
+                          <a:ea typeface="Malgun Gothic"/>
+                          <a:sym typeface="Malgun Gothic"/>
                         </a:rPr>
                         <a:t> </a:t>
                       </a:r>
@@ -28020,9 +28020,9 @@
                     <a:bodyPr/>
                     <a:lstStyle/>
                     <a:p>
-                      <a:pPr algn="l" marL="0" marR="0">
+                      <a:pPr algn="ctr" marL="0" marR="0">
                         <a:lnSpc>
-                          <a:spcPct val="10000"/>
+                          <a:spcPct val="100000"/>
                         </a:lnSpc>
                         <a:spcBef>
                           <a:spcPts val="0"/>
@@ -28039,10 +28039,10 @@
                               <a:alpha val="100000"/>
                             </a:srgbClr>
                           </a:solidFill>
-                          <a:latin typeface="Arial"/>
-                          <a:cs typeface="Arial"/>
-                          <a:ea typeface="Arial"/>
-                          <a:sym typeface="Arial"/>
+                          <a:latin typeface="Malgun Gothic"/>
+                          <a:cs typeface="Malgun Gothic"/>
+                          <a:ea typeface="Malgun Gothic"/>
+                          <a:sym typeface="Malgun Gothic"/>
                         </a:rPr>
                         <a:t> </a:t>
                       </a:r>
@@ -28093,9 +28093,9 @@
                     <a:bodyPr/>
                     <a:lstStyle/>
                     <a:p>
-                      <a:pPr algn="l" marL="0" marR="0">
+                      <a:pPr algn="ctr" marL="0" marR="0">
                         <a:lnSpc>
-                          <a:spcPct val="10000"/>
+                          <a:spcPct val="100000"/>
                         </a:lnSpc>
                         <a:spcBef>
                           <a:spcPts val="0"/>
@@ -28112,10 +28112,10 @@
                               <a:alpha val="100000"/>
                             </a:srgbClr>
                           </a:solidFill>
-                          <a:latin typeface="Arial"/>
-                          <a:cs typeface="Arial"/>
-                          <a:ea typeface="Arial"/>
-                          <a:sym typeface="Arial"/>
+                          <a:latin typeface="Malgun Gothic"/>
+                          <a:cs typeface="Malgun Gothic"/>
+                          <a:ea typeface="Malgun Gothic"/>
+                          <a:sym typeface="Malgun Gothic"/>
                         </a:rPr>
                         <a:t> </a:t>
                       </a:r>
@@ -28166,9 +28166,9 @@
                     <a:bodyPr/>
                     <a:lstStyle/>
                     <a:p>
-                      <a:pPr algn="l" marL="0" marR="0">
+                      <a:pPr algn="ctr" marL="0" marR="0">
                         <a:lnSpc>
-                          <a:spcPct val="10000"/>
+                          <a:spcPct val="100000"/>
                         </a:lnSpc>
                         <a:spcBef>
                           <a:spcPts val="0"/>
@@ -28185,10 +28185,10 @@
                               <a:alpha val="100000"/>
                             </a:srgbClr>
                           </a:solidFill>
-                          <a:latin typeface="Arial"/>
-                          <a:cs typeface="Arial"/>
-                          <a:ea typeface="Arial"/>
-                          <a:sym typeface="Arial"/>
+                          <a:latin typeface="Malgun Gothic"/>
+                          <a:cs typeface="Malgun Gothic"/>
+                          <a:ea typeface="Malgun Gothic"/>
+                          <a:sym typeface="Malgun Gothic"/>
                         </a:rPr>
                         <a:t> </a:t>
                       </a:r>
@@ -28239,9 +28239,9 @@
                     <a:bodyPr/>
                     <a:lstStyle/>
                     <a:p>
-                      <a:pPr algn="l" marL="0" marR="0">
+                      <a:pPr algn="ctr" marL="0" marR="0">
                         <a:lnSpc>
-                          <a:spcPct val="10000"/>
+                          <a:spcPct val="100000"/>
                         </a:lnSpc>
                         <a:spcBef>
                           <a:spcPts val="0"/>
@@ -28258,10 +28258,10 @@
                               <a:alpha val="100000"/>
                             </a:srgbClr>
                           </a:solidFill>
-                          <a:latin typeface="Arial"/>
-                          <a:cs typeface="Arial"/>
-                          <a:ea typeface="Arial"/>
-                          <a:sym typeface="Arial"/>
+                          <a:latin typeface="Malgun Gothic"/>
+                          <a:cs typeface="Malgun Gothic"/>
+                          <a:ea typeface="Malgun Gothic"/>
+                          <a:sym typeface="Malgun Gothic"/>
                         </a:rPr>
                         <a:t> </a:t>
                       </a:r>
@@ -28314,9 +28314,9 @@
                     <a:bodyPr/>
                     <a:lstStyle/>
                     <a:p>
-                      <a:pPr algn="l" marL="0" marR="0">
+                      <a:pPr algn="ctr" marL="0" marR="0">
                         <a:lnSpc>
-                          <a:spcPct val="10000"/>
+                          <a:spcPct val="100000"/>
                         </a:lnSpc>
                         <a:spcBef>
                           <a:spcPts val="0"/>
@@ -28333,10 +28333,10 @@
                               <a:alpha val="100000"/>
                             </a:srgbClr>
                           </a:solidFill>
-                          <a:latin typeface="Arial"/>
-                          <a:cs typeface="Arial"/>
-                          <a:ea typeface="Arial"/>
-                          <a:sym typeface="Arial"/>
+                          <a:latin typeface="Malgun Gothic"/>
+                          <a:cs typeface="Malgun Gothic"/>
+                          <a:ea typeface="Malgun Gothic"/>
+                          <a:sym typeface="Malgun Gothic"/>
                         </a:rPr>
                         <a:t> </a:t>
                       </a:r>
@@ -28387,9 +28387,9 @@
                     <a:bodyPr/>
                     <a:lstStyle/>
                     <a:p>
-                      <a:pPr algn="l" marL="0" marR="0">
+                      <a:pPr algn="ctr" marL="0" marR="0">
                         <a:lnSpc>
-                          <a:spcPct val="10000"/>
+                          <a:spcPct val="100000"/>
                         </a:lnSpc>
                         <a:spcBef>
                           <a:spcPts val="0"/>
@@ -28406,10 +28406,10 @@
                               <a:alpha val="100000"/>
                             </a:srgbClr>
                           </a:solidFill>
-                          <a:latin typeface="Arial"/>
-                          <a:cs typeface="Arial"/>
-                          <a:ea typeface="Arial"/>
-                          <a:sym typeface="Arial"/>
+                          <a:latin typeface="Malgun Gothic"/>
+                          <a:cs typeface="Malgun Gothic"/>
+                          <a:ea typeface="Malgun Gothic"/>
+                          <a:sym typeface="Malgun Gothic"/>
                         </a:rPr>
                         <a:t> </a:t>
                       </a:r>
@@ -28460,9 +28460,9 @@
                     <a:bodyPr/>
                     <a:lstStyle/>
                     <a:p>
-                      <a:pPr algn="l" marL="0" marR="0">
+                      <a:pPr algn="ctr" marL="0" marR="0">
                         <a:lnSpc>
-                          <a:spcPct val="10000"/>
+                          <a:spcPct val="100000"/>
                         </a:lnSpc>
                         <a:spcBef>
                           <a:spcPts val="0"/>
@@ -28479,10 +28479,10 @@
                               <a:alpha val="100000"/>
                             </a:srgbClr>
                           </a:solidFill>
-                          <a:latin typeface="Arial"/>
-                          <a:cs typeface="Arial"/>
-                          <a:ea typeface="Arial"/>
-                          <a:sym typeface="Arial"/>
+                          <a:latin typeface="Malgun Gothic"/>
+                          <a:cs typeface="Malgun Gothic"/>
+                          <a:ea typeface="Malgun Gothic"/>
+                          <a:sym typeface="Malgun Gothic"/>
                         </a:rPr>
                         <a:t> </a:t>
                       </a:r>
@@ -28533,9 +28533,9 @@
                     <a:bodyPr/>
                     <a:lstStyle/>
                     <a:p>
-                      <a:pPr algn="l" marL="0" marR="0">
+                      <a:pPr algn="ctr" marL="0" marR="0">
                         <a:lnSpc>
-                          <a:spcPct val="10000"/>
+                          <a:spcPct val="100000"/>
                         </a:lnSpc>
                         <a:spcBef>
                           <a:spcPts val="0"/>
@@ -28552,10 +28552,10 @@
                               <a:alpha val="100000"/>
                             </a:srgbClr>
                           </a:solidFill>
-                          <a:latin typeface="Arial"/>
-                          <a:cs typeface="Arial"/>
-                          <a:ea typeface="Arial"/>
-                          <a:sym typeface="Arial"/>
+                          <a:latin typeface="Malgun Gothic"/>
+                          <a:cs typeface="Malgun Gothic"/>
+                          <a:ea typeface="Malgun Gothic"/>
+                          <a:sym typeface="Malgun Gothic"/>
                         </a:rPr>
                         <a:t> </a:t>
                       </a:r>
@@ -28650,10 +28650,10 @@
                     <a:alpha val="100000"/>
                   </a:srgbClr>
                 </a:solidFill>
-                <a:latin typeface="Arial"/>
-                <a:cs typeface="Arial"/>
-                <a:ea typeface="Arial"/>
-                <a:sym typeface="Arial"/>
+                <a:latin typeface="Malgun Gothic"/>
+                <a:cs typeface="Malgun Gothic"/>
+                <a:ea typeface="Malgun Gothic"/>
+                <a:sym typeface="Malgun Gothic"/>
               </a:rPr>
               <a:t>⬤</a:t>
             </a:r>
@@ -28664,10 +28664,10 @@
                     <a:alpha val="100000"/>
                   </a:srgbClr>
                 </a:solidFill>
-                <a:latin typeface="Arial"/>
-                <a:cs typeface="Arial"/>
-                <a:ea typeface="Arial"/>
-                <a:sym typeface="Arial"/>
+                <a:latin typeface="Malgun Gothic"/>
+                <a:cs typeface="Malgun Gothic"/>
+                <a:ea typeface="Malgun Gothic"/>
+                <a:sym typeface="Malgun Gothic"/>
               </a:rPr>
               <a:t> (ML_MSR_207) Cell_TCMC_207</a:t>
             </a:r>
@@ -28744,10 +28744,10 @@
                     <a:alpha val="100000"/>
                   </a:srgbClr>
                 </a:solidFill>
-                <a:latin typeface="Arial"/>
-                <a:cs typeface="Arial"/>
-                <a:ea typeface="Arial"/>
-                <a:sym typeface="Arial"/>
+                <a:latin typeface="Malgun Gothic"/>
+                <a:cs typeface="Malgun Gothic"/>
+                <a:ea typeface="Malgun Gothic"/>
+                <a:sym typeface="Malgun Gothic"/>
               </a:rPr>
               <a:t>+0.7sig</a:t>
             </a:r>
@@ -28798,10 +28798,10 @@
                     <a:alpha val="100000"/>
                   </a:srgbClr>
                 </a:solidFill>
-                <a:latin typeface="Arial"/>
-                <a:cs typeface="Arial"/>
-                <a:ea typeface="Arial"/>
-                <a:sym typeface="Arial"/>
+                <a:latin typeface="Malgun Gothic"/>
+                <a:cs typeface="Malgun Gothic"/>
+                <a:ea typeface="Malgun Gothic"/>
+                <a:sym typeface="Malgun Gothic"/>
               </a:rPr>
               <a:t>⬤</a:t>
             </a:r>
@@ -28812,10 +28812,10 @@
                     <a:alpha val="100000"/>
                   </a:srgbClr>
                 </a:solidFill>
-                <a:latin typeface="Arial"/>
-                <a:cs typeface="Arial"/>
-                <a:ea typeface="Arial"/>
-                <a:sym typeface="Arial"/>
+                <a:latin typeface="Malgun Gothic"/>
+                <a:cs typeface="Malgun Gothic"/>
+                <a:ea typeface="Malgun Gothic"/>
+                <a:sym typeface="Malgun Gothic"/>
               </a:rPr>
               <a:t> (ML_MSR_212) Cell_TCMC_212</a:t>
             </a:r>
@@ -28892,10 +28892,10 @@
                     <a:alpha val="100000"/>
                   </a:srgbClr>
                 </a:solidFill>
-                <a:latin typeface="Arial"/>
-                <a:cs typeface="Arial"/>
-                <a:ea typeface="Arial"/>
-                <a:sym typeface="Arial"/>
+                <a:latin typeface="Malgun Gothic"/>
+                <a:cs typeface="Malgun Gothic"/>
+                <a:ea typeface="Malgun Gothic"/>
+                <a:sym typeface="Malgun Gothic"/>
               </a:rPr>
               <a:t>+0.7sig</a:t>
             </a:r>
@@ -28946,10 +28946,10 @@
                     <a:alpha val="100000"/>
                   </a:srgbClr>
                 </a:solidFill>
-                <a:latin typeface="Arial"/>
-                <a:cs typeface="Arial"/>
-                <a:ea typeface="Arial"/>
-                <a:sym typeface="Arial"/>
+                <a:latin typeface="Malgun Gothic"/>
+                <a:cs typeface="Malgun Gothic"/>
+                <a:ea typeface="Malgun Gothic"/>
+                <a:sym typeface="Malgun Gothic"/>
               </a:rPr>
               <a:t>⬤</a:t>
             </a:r>
@@ -28960,10 +28960,10 @@
                     <a:alpha val="100000"/>
                   </a:srgbClr>
                 </a:solidFill>
-                <a:latin typeface="Arial"/>
-                <a:cs typeface="Arial"/>
-                <a:ea typeface="Arial"/>
-                <a:sym typeface="Arial"/>
+                <a:latin typeface="Malgun Gothic"/>
+                <a:cs typeface="Malgun Gothic"/>
+                <a:ea typeface="Malgun Gothic"/>
+                <a:sym typeface="Malgun Gothic"/>
               </a:rPr>
               <a:t> (ML_MSR_234) Cell_TCMC_234</a:t>
             </a:r>
@@ -29040,10 +29040,10 @@
                     <a:alpha val="100000"/>
                   </a:srgbClr>
                 </a:solidFill>
-                <a:latin typeface="Arial"/>
-                <a:cs typeface="Arial"/>
-                <a:ea typeface="Arial"/>
-                <a:sym typeface="Arial"/>
+                <a:latin typeface="Malgun Gothic"/>
+                <a:cs typeface="Malgun Gothic"/>
+                <a:ea typeface="Malgun Gothic"/>
+                <a:sym typeface="Malgun Gothic"/>
               </a:rPr>
               <a:t>+0.7sig</a:t>
             </a:r>
@@ -29094,10 +29094,10 @@
                     <a:alpha val="100000"/>
                   </a:srgbClr>
                 </a:solidFill>
-                <a:latin typeface="Arial"/>
-                <a:cs typeface="Arial"/>
-                <a:ea typeface="Arial"/>
-                <a:sym typeface="Arial"/>
+                <a:latin typeface="Malgun Gothic"/>
+                <a:cs typeface="Malgun Gothic"/>
+                <a:ea typeface="Malgun Gothic"/>
+                <a:sym typeface="Malgun Gothic"/>
               </a:rPr>
               <a:t>⬤</a:t>
             </a:r>
@@ -29108,10 +29108,10 @@
                     <a:alpha val="100000"/>
                   </a:srgbClr>
                 </a:solidFill>
-                <a:latin typeface="Arial"/>
-                <a:cs typeface="Arial"/>
-                <a:ea typeface="Arial"/>
-                <a:sym typeface="Arial"/>
+                <a:latin typeface="Malgun Gothic"/>
+                <a:cs typeface="Malgun Gothic"/>
+                <a:ea typeface="Malgun Gothic"/>
+                <a:sym typeface="Malgun Gothic"/>
               </a:rPr>
               <a:t> (ML_MSR_235) Cell_TCMC_235</a:t>
             </a:r>
@@ -29188,10 +29188,10 @@
                     <a:alpha val="100000"/>
                   </a:srgbClr>
                 </a:solidFill>
-                <a:latin typeface="Arial"/>
-                <a:cs typeface="Arial"/>
-                <a:ea typeface="Arial"/>
-                <a:sym typeface="Arial"/>
+                <a:latin typeface="Malgun Gothic"/>
+                <a:cs typeface="Malgun Gothic"/>
+                <a:ea typeface="Malgun Gothic"/>
+                <a:sym typeface="Malgun Gothic"/>
               </a:rPr>
               <a:t>+0.7sig</a:t>
             </a:r>
@@ -29242,10 +29242,10 @@
                     <a:alpha val="100000"/>
                   </a:srgbClr>
                 </a:solidFill>
-                <a:latin typeface="Arial"/>
-                <a:cs typeface="Arial"/>
-                <a:ea typeface="Arial"/>
-                <a:sym typeface="Arial"/>
+                <a:latin typeface="Malgun Gothic"/>
+                <a:cs typeface="Malgun Gothic"/>
+                <a:ea typeface="Malgun Gothic"/>
+                <a:sym typeface="Malgun Gothic"/>
               </a:rPr>
               <a:t>⬤</a:t>
             </a:r>
@@ -29256,10 +29256,10 @@
                     <a:alpha val="100000"/>
                   </a:srgbClr>
                 </a:solidFill>
-                <a:latin typeface="Arial"/>
-                <a:cs typeface="Arial"/>
-                <a:ea typeface="Arial"/>
-                <a:sym typeface="Arial"/>
+                <a:latin typeface="Malgun Gothic"/>
+                <a:cs typeface="Malgun Gothic"/>
+                <a:ea typeface="Malgun Gothic"/>
+                <a:sym typeface="Malgun Gothic"/>
               </a:rPr>
               <a:t> (ML_MSR_203) Cell_TCMC_203</a:t>
             </a:r>
@@ -29336,10 +29336,10 @@
                     <a:alpha val="100000"/>
                   </a:srgbClr>
                 </a:solidFill>
-                <a:latin typeface="Arial"/>
-                <a:cs typeface="Arial"/>
-                <a:ea typeface="Arial"/>
-                <a:sym typeface="Arial"/>
+                <a:latin typeface="Malgun Gothic"/>
+                <a:cs typeface="Malgun Gothic"/>
+                <a:ea typeface="Malgun Gothic"/>
+                <a:sym typeface="Malgun Gothic"/>
               </a:rPr>
               <a:t>+0.6sig</a:t>
             </a:r>
@@ -29390,10 +29390,10 @@
                     <a:alpha val="100000"/>
                   </a:srgbClr>
                 </a:solidFill>
-                <a:latin typeface="Arial"/>
-                <a:cs typeface="Arial"/>
-                <a:ea typeface="Arial"/>
-                <a:sym typeface="Arial"/>
+                <a:latin typeface="Malgun Gothic"/>
+                <a:cs typeface="Malgun Gothic"/>
+                <a:ea typeface="Malgun Gothic"/>
+                <a:sym typeface="Malgun Gothic"/>
               </a:rPr>
               <a:t>⬤</a:t>
             </a:r>
@@ -29404,10 +29404,10 @@
                     <a:alpha val="100000"/>
                   </a:srgbClr>
                 </a:solidFill>
-                <a:latin typeface="Arial"/>
-                <a:cs typeface="Arial"/>
-                <a:ea typeface="Arial"/>
-                <a:sym typeface="Arial"/>
+                <a:latin typeface="Malgun Gothic"/>
+                <a:cs typeface="Malgun Gothic"/>
+                <a:ea typeface="Malgun Gothic"/>
+                <a:sym typeface="Malgun Gothic"/>
               </a:rPr>
               <a:t> (ML_MSR_219) Cell_TCMC_219</a:t>
             </a:r>
@@ -29484,10 +29484,10 @@
                     <a:alpha val="100000"/>
                   </a:srgbClr>
                 </a:solidFill>
-                <a:latin typeface="Arial"/>
-                <a:cs typeface="Arial"/>
-                <a:ea typeface="Arial"/>
-                <a:sym typeface="Arial"/>
+                <a:latin typeface="Malgun Gothic"/>
+                <a:cs typeface="Malgun Gothic"/>
+                <a:ea typeface="Malgun Gothic"/>
+                <a:sym typeface="Malgun Gothic"/>
               </a:rPr>
               <a:t>+0.5sig</a:t>
             </a:r>
@@ -29506,8 +29506,8 @@
         </p:nvSpPr>
         <p:spPr>
           <a:xfrm>
-            <a:off x="4711446" y="6446520"/>
-            <a:ext cx="2766060" cy="219456"/>
+            <a:off x="4642866" y="6446520"/>
+            <a:ext cx="2903220" cy="219456"/>
           </a:xfrm>
           <a:solidFill>
             <a:srgbClr val="FFFFFF">
@@ -29538,10 +29538,10 @@
                     <a:alpha val="100000"/>
                   </a:srgbClr>
                 </a:solidFill>
-                <a:latin typeface="Arial"/>
-                <a:cs typeface="Arial"/>
-                <a:ea typeface="Arial"/>
-                <a:sym typeface="Arial"/>
+                <a:latin typeface="Malgun Gothic"/>
+                <a:cs typeface="Malgun Gothic"/>
+                <a:ea typeface="Malgun Gothic"/>
+                <a:sym typeface="Malgun Gothic"/>
               </a:rPr>
               <a:t>● A (REF, 16매)</a:t>
             </a:r>
@@ -29552,10 +29552,10 @@
                     <a:alpha val="100000"/>
                   </a:srgbClr>
                 </a:solidFill>
-                <a:latin typeface="Arial"/>
-                <a:cs typeface="Arial"/>
-                <a:ea typeface="Arial"/>
-                <a:sym typeface="Arial"/>
+                <a:latin typeface="Malgun Gothic"/>
+                <a:cs typeface="Malgun Gothic"/>
+                <a:ea typeface="Malgun Gothic"/>
+                <a:sym typeface="Malgun Gothic"/>
               </a:rPr>
               <a:t>    </a:t>
             </a:r>
@@ -29566,10 +29566,10 @@
                     <a:alpha val="100000"/>
                   </a:srgbClr>
                 </a:solidFill>
-                <a:latin typeface="Arial"/>
-                <a:cs typeface="Arial"/>
-                <a:ea typeface="Arial"/>
-                <a:sym typeface="Arial"/>
+                <a:latin typeface="Malgun Gothic"/>
+                <a:cs typeface="Malgun Gothic"/>
+                <a:ea typeface="Malgun Gothic"/>
+                <a:sym typeface="Malgun Gothic"/>
               </a:rPr>
               <a:t>● B (TARGET, 10매)</a:t>
             </a:r>

--- a/output/sigma_summary_latest.pptx
+++ b/output/sigma_summary_latest.pptx
@@ -4,16 +4,19 @@
   <p:sldMasterIdLst>
     <p:sldMasterId id="2147483648" r:id="rId1"/>
   </p:sldMasterIdLst>
+  <p:notesMasterIdLst>
+    <p:notesMasterId r:id="rId3"/>
+  </p:notesMasterIdLst>
   <p:sldIdLst>
-    <p:sldId id="256" r:id="rId7"/>
-    <p:sldId id="257" r:id="rId8"/>
-    <p:sldId id="258" r:id="rId9"/>
-    <p:sldId id="259" r:id="rId10"/>
-    <p:sldId id="260" r:id="rId11"/>
-    <p:sldId id="261" r:id="rId12"/>
-    <p:sldId id="262" r:id="rId13"/>
+    <p:sldId id="256" r:id="rId8"/>
+    <p:sldId id="257" r:id="rId9"/>
+    <p:sldId id="258" r:id="rId10"/>
+    <p:sldId id="259" r:id="rId11"/>
+    <p:sldId id="260" r:id="rId12"/>
+    <p:sldId id="261" r:id="rId13"/>
+    <p:sldId id="262" r:id="rId14"/>
   </p:sldIdLst>
-  <p:sldSz cx="12191695" cy="6858000" type="screen4x3"/>
+  <p:sldSz cx="12192000" cy="6858000"/>
   <p:notesSz cx="6858000" cy="9144000"/>
   <p:defaultTextStyle>
     <a:defPPr>
@@ -110,7 +113,478 @@
       </a:defRPr>
     </a:lvl9pPr>
   </p:defaultTextStyle>
+  <p:extLst>
+    <p:ext uri="{EFAFB233-063F-42B5-8137-9DF3F51BA10A}">
+      <p15:sldGuideLst xmlns:p15="http://schemas.microsoft.com/office/powerpoint/2012/main">
+        <p15:guide id="1" orient="horz" pos="2160">
+          <p15:clr>
+            <a:srgbClr val="A4A3A4"/>
+          </p15:clr>
+        </p15:guide>
+        <p15:guide id="2" pos="2880">
+          <p15:clr>
+            <a:srgbClr val="A4A3A4"/>
+          </p15:clr>
+        </p15:guide>
+      </p15:sldGuideLst>
+    </p:ext>
+  </p:extLst>
 </p:presentation>
+</file>
+
+<file path=ppt/notesMasters/notesMaster1.xml><?xml version="1.0" encoding="utf-8"?>
+<p:notesMaster xmlns:a="http://schemas.openxmlformats.org/drawingml/2006/main" xmlns:r="http://schemas.openxmlformats.org/officeDocument/2006/relationships" xmlns:p="http://schemas.openxmlformats.org/presentationml/2006/main">
+  <p:cSld>
+    <p:bg>
+      <p:bgRef idx="1001">
+        <a:schemeClr val="bg1"/>
+      </p:bgRef>
+    </p:bg>
+    <p:spTree>
+      <p:nvGrpSpPr>
+        <p:cNvPr id="1" name=""/>
+        <p:cNvGrpSpPr/>
+        <p:nvPr/>
+      </p:nvGrpSpPr>
+      <p:grpSpPr>
+        <a:xfrm>
+          <a:off x="0" y="0"/>
+          <a:ext cx="0" cy="0"/>
+          <a:chOff x="0" y="0"/>
+          <a:chExt cx="0" cy="0"/>
+        </a:xfrm>
+      </p:grpSpPr>
+      <p:sp>
+        <p:nvSpPr>
+          <p:cNvPr id="2" name="머리글 개체 틀 1"/>
+          <p:cNvSpPr>
+            <a:spLocks noGrp="1"/>
+          </p:cNvSpPr>
+          <p:nvPr>
+            <p:ph type="hdr" sz="quarter"/>
+          </p:nvPr>
+        </p:nvSpPr>
+        <p:spPr>
+          <a:xfrm>
+            <a:off x="0" y="0"/>
+            <a:ext cx="2971800" cy="458788"/>
+          </a:xfrm>
+          <a:prstGeom prst="rect">
+            <a:avLst/>
+          </a:prstGeom>
+        </p:spPr>
+        <p:txBody>
+          <a:bodyPr vert="horz" lIns="91440" tIns="45720" rIns="91440" bIns="45720" rtlCol="0"/>
+          <a:lstStyle>
+            <a:lvl1pPr algn="l">
+              <a:defRPr sz="1200"/>
+            </a:lvl1pPr>
+          </a:lstStyle>
+          <a:p>
+            <a:endParaRPr lang="ko-KR" altLang="en-US"/>
+          </a:p>
+        </p:txBody>
+      </p:sp>
+      <p:sp>
+        <p:nvSpPr>
+          <p:cNvPr id="3" name="날짜 개체 틀 2"/>
+          <p:cNvSpPr>
+            <a:spLocks noGrp="1"/>
+          </p:cNvSpPr>
+          <p:nvPr>
+            <p:ph type="dt" idx="1"/>
+          </p:nvPr>
+        </p:nvSpPr>
+        <p:spPr>
+          <a:xfrm>
+            <a:off x="3884613" y="0"/>
+            <a:ext cx="2971800" cy="458788"/>
+          </a:xfrm>
+          <a:prstGeom prst="rect">
+            <a:avLst/>
+          </a:prstGeom>
+        </p:spPr>
+        <p:txBody>
+          <a:bodyPr vert="horz" lIns="91440" tIns="45720" rIns="91440" bIns="45720" rtlCol="0"/>
+          <a:lstStyle>
+            <a:lvl1pPr algn="r">
+              <a:defRPr sz="1200"/>
+            </a:lvl1pPr>
+          </a:lstStyle>
+          <a:p>
+            <a:fld id="{AC6DE22D-F941-4156-A001-D20DD8FDA104}" type="datetimeFigureOut">
+              <a:rPr lang="ko-KR" altLang="en-US" smtClean="0"/>
+              <a:t>2026-07-29</a:t>
+            </a:fld>
+            <a:endParaRPr lang="ko-KR" altLang="en-US"/>
+          </a:p>
+        </p:txBody>
+      </p:sp>
+      <p:sp>
+        <p:nvSpPr>
+          <p:cNvPr id="4" name="슬라이드 이미지 개체 틀 3"/>
+          <p:cNvSpPr>
+            <a:spLocks noGrp="1" noRot="1" noChangeAspect="1"/>
+          </p:cNvSpPr>
+          <p:nvPr>
+            <p:ph type="sldImg" idx="2"/>
+          </p:nvPr>
+        </p:nvSpPr>
+        <p:spPr>
+          <a:xfrm>
+            <a:off x="685800" y="1143000"/>
+            <a:ext cx="5486400" cy="3086100"/>
+          </a:xfrm>
+          <a:prstGeom prst="rect">
+            <a:avLst/>
+          </a:prstGeom>
+          <a:noFill/>
+          <a:ln w="12700">
+            <a:solidFill>
+              <a:prstClr val="black"/>
+            </a:solidFill>
+          </a:ln>
+        </p:spPr>
+        <p:txBody>
+          <a:bodyPr vert="horz" lIns="91440" tIns="45720" rIns="91440" bIns="45720" rtlCol="0" anchor="ctr"/>
+          <a:lstStyle/>
+          <a:p>
+            <a:endParaRPr lang="ko-KR" altLang="en-US"/>
+          </a:p>
+        </p:txBody>
+      </p:sp>
+      <p:sp>
+        <p:nvSpPr>
+          <p:cNvPr id="5" name="슬라이드 노트 개체 틀 4"/>
+          <p:cNvSpPr>
+            <a:spLocks noGrp="1"/>
+          </p:cNvSpPr>
+          <p:nvPr>
+            <p:ph type="body" sz="quarter" idx="3"/>
+          </p:nvPr>
+        </p:nvSpPr>
+        <p:spPr>
+          <a:xfrm>
+            <a:off x="685800" y="4400550"/>
+            <a:ext cx="5486400" cy="3600450"/>
+          </a:xfrm>
+          <a:prstGeom prst="rect">
+            <a:avLst/>
+          </a:prstGeom>
+        </p:spPr>
+        <p:txBody>
+          <a:bodyPr vert="horz" lIns="91440" tIns="45720" rIns="91440" bIns="45720" rtlCol="0"/>
+          <a:lstStyle/>
+          <a:p>
+            <a:pPr lvl="0"/>
+            <a:r>
+              <a:rPr lang="ko-KR" altLang="en-US"/>
+              <a:t>마스터 텍스트 스타일을 편집하려면 클릭</a:t>
+            </a:r>
+          </a:p>
+          <a:p>
+            <a:pPr lvl="1"/>
+            <a:r>
+              <a:rPr lang="ko-KR" altLang="en-US"/>
+              <a:t>두 번째 수준</a:t>
+            </a:r>
+          </a:p>
+          <a:p>
+            <a:pPr lvl="2"/>
+            <a:r>
+              <a:rPr lang="ko-KR" altLang="en-US"/>
+              <a:t>세 번째 수준</a:t>
+            </a:r>
+          </a:p>
+          <a:p>
+            <a:pPr lvl="3"/>
+            <a:r>
+              <a:rPr lang="ko-KR" altLang="en-US"/>
+              <a:t>네 번째 수준</a:t>
+            </a:r>
+          </a:p>
+          <a:p>
+            <a:pPr lvl="4"/>
+            <a:r>
+              <a:rPr lang="ko-KR" altLang="en-US"/>
+              <a:t>다섯 번째 수준</a:t>
+            </a:r>
+          </a:p>
+        </p:txBody>
+      </p:sp>
+      <p:sp>
+        <p:nvSpPr>
+          <p:cNvPr id="6" name="바닥글 개체 틀 5"/>
+          <p:cNvSpPr>
+            <a:spLocks noGrp="1"/>
+          </p:cNvSpPr>
+          <p:nvPr>
+            <p:ph type="ftr" sz="quarter" idx="4"/>
+          </p:nvPr>
+        </p:nvSpPr>
+        <p:spPr>
+          <a:xfrm>
+            <a:off x="0" y="8685213"/>
+            <a:ext cx="2971800" cy="458787"/>
+          </a:xfrm>
+          <a:prstGeom prst="rect">
+            <a:avLst/>
+          </a:prstGeom>
+        </p:spPr>
+        <p:txBody>
+          <a:bodyPr vert="horz" lIns="91440" tIns="45720" rIns="91440" bIns="45720" rtlCol="0" anchor="b"/>
+          <a:lstStyle>
+            <a:lvl1pPr algn="l">
+              <a:defRPr sz="1200"/>
+            </a:lvl1pPr>
+          </a:lstStyle>
+          <a:p>
+            <a:endParaRPr lang="ko-KR" altLang="en-US"/>
+          </a:p>
+        </p:txBody>
+      </p:sp>
+      <p:sp>
+        <p:nvSpPr>
+          <p:cNvPr id="7" name="슬라이드 번호 개체 틀 6"/>
+          <p:cNvSpPr>
+            <a:spLocks noGrp="1"/>
+          </p:cNvSpPr>
+          <p:nvPr>
+            <p:ph type="sldNum" sz="quarter" idx="5"/>
+          </p:nvPr>
+        </p:nvSpPr>
+        <p:spPr>
+          <a:xfrm>
+            <a:off x="3884613" y="8685213"/>
+            <a:ext cx="2971800" cy="458787"/>
+          </a:xfrm>
+          <a:prstGeom prst="rect">
+            <a:avLst/>
+          </a:prstGeom>
+        </p:spPr>
+        <p:txBody>
+          <a:bodyPr vert="horz" lIns="91440" tIns="45720" rIns="91440" bIns="45720" rtlCol="0" anchor="b"/>
+          <a:lstStyle>
+            <a:lvl1pPr algn="r">
+              <a:defRPr sz="1200"/>
+            </a:lvl1pPr>
+          </a:lstStyle>
+          <a:p>
+            <a:fld id="{C2425DC6-D927-40BA-AABB-29792EC49B12}" type="slidenum">
+              <a:rPr lang="ko-KR" altLang="en-US" smtClean="0"/>
+              <a:t>‹#›</a:t>
+            </a:fld>
+            <a:endParaRPr lang="ko-KR" altLang="en-US"/>
+          </a:p>
+        </p:txBody>
+      </p:sp>
+    </p:spTree>
+    <p:extLst>
+      <p:ext uri="{BB962C8B-B14F-4D97-AF65-F5344CB8AC3E}">
+        <p14:creationId xmlns:p14="http://schemas.microsoft.com/office/powerpoint/2010/main" val="3366342792"/>
+      </p:ext>
+    </p:extLst>
+  </p:cSld>
+  <p:clrMap bg1="lt1" tx1="dk1" bg2="lt2" tx2="dk2" accent1="accent1" accent2="accent2" accent3="accent3" accent4="accent4" accent5="accent5" accent6="accent6" hlink="hlink" folHlink="folHlink"/>
+  <p:notesStyle>
+    <a:lvl1pPr marL="0" algn="l" defTabSz="914400" rtl="0" eaLnBrk="1" latinLnBrk="1" hangingPunct="1">
+      <a:defRPr sz="1200" kern="1200">
+        <a:solidFill>
+          <a:schemeClr val="tx1"/>
+        </a:solidFill>
+        <a:latin typeface="+mn-lt"/>
+        <a:ea typeface="+mn-ea"/>
+        <a:cs typeface="+mn-cs"/>
+      </a:defRPr>
+    </a:lvl1pPr>
+    <a:lvl2pPr marL="457200" algn="l" defTabSz="914400" rtl="0" eaLnBrk="1" latinLnBrk="1" hangingPunct="1">
+      <a:defRPr sz="1200" kern="1200">
+        <a:solidFill>
+          <a:schemeClr val="tx1"/>
+        </a:solidFill>
+        <a:latin typeface="+mn-lt"/>
+        <a:ea typeface="+mn-ea"/>
+        <a:cs typeface="+mn-cs"/>
+      </a:defRPr>
+    </a:lvl2pPr>
+    <a:lvl3pPr marL="914400" algn="l" defTabSz="914400" rtl="0" eaLnBrk="1" latinLnBrk="1" hangingPunct="1">
+      <a:defRPr sz="1200" kern="1200">
+        <a:solidFill>
+          <a:schemeClr val="tx1"/>
+        </a:solidFill>
+        <a:latin typeface="+mn-lt"/>
+        <a:ea typeface="+mn-ea"/>
+        <a:cs typeface="+mn-cs"/>
+      </a:defRPr>
+    </a:lvl3pPr>
+    <a:lvl4pPr marL="1371600" algn="l" defTabSz="914400" rtl="0" eaLnBrk="1" latinLnBrk="1" hangingPunct="1">
+      <a:defRPr sz="1200" kern="1200">
+        <a:solidFill>
+          <a:schemeClr val="tx1"/>
+        </a:solidFill>
+        <a:latin typeface="+mn-lt"/>
+        <a:ea typeface="+mn-ea"/>
+        <a:cs typeface="+mn-cs"/>
+      </a:defRPr>
+    </a:lvl4pPr>
+    <a:lvl5pPr marL="1828800" algn="l" defTabSz="914400" rtl="0" eaLnBrk="1" latinLnBrk="1" hangingPunct="1">
+      <a:defRPr sz="1200" kern="1200">
+        <a:solidFill>
+          <a:schemeClr val="tx1"/>
+        </a:solidFill>
+        <a:latin typeface="+mn-lt"/>
+        <a:ea typeface="+mn-ea"/>
+        <a:cs typeface="+mn-cs"/>
+      </a:defRPr>
+    </a:lvl5pPr>
+    <a:lvl6pPr marL="2286000" algn="l" defTabSz="914400" rtl="0" eaLnBrk="1" latinLnBrk="1" hangingPunct="1">
+      <a:defRPr sz="1200" kern="1200">
+        <a:solidFill>
+          <a:schemeClr val="tx1"/>
+        </a:solidFill>
+        <a:latin typeface="+mn-lt"/>
+        <a:ea typeface="+mn-ea"/>
+        <a:cs typeface="+mn-cs"/>
+      </a:defRPr>
+    </a:lvl6pPr>
+    <a:lvl7pPr marL="2743200" algn="l" defTabSz="914400" rtl="0" eaLnBrk="1" latinLnBrk="1" hangingPunct="1">
+      <a:defRPr sz="1200" kern="1200">
+        <a:solidFill>
+          <a:schemeClr val="tx1"/>
+        </a:solidFill>
+        <a:latin typeface="+mn-lt"/>
+        <a:ea typeface="+mn-ea"/>
+        <a:cs typeface="+mn-cs"/>
+      </a:defRPr>
+    </a:lvl7pPr>
+    <a:lvl8pPr marL="3200400" algn="l" defTabSz="914400" rtl="0" eaLnBrk="1" latinLnBrk="1" hangingPunct="1">
+      <a:defRPr sz="1200" kern="1200">
+        <a:solidFill>
+          <a:schemeClr val="tx1"/>
+        </a:solidFill>
+        <a:latin typeface="+mn-lt"/>
+        <a:ea typeface="+mn-ea"/>
+        <a:cs typeface="+mn-cs"/>
+      </a:defRPr>
+    </a:lvl8pPr>
+    <a:lvl9pPr marL="3657600" algn="l" defTabSz="914400" rtl="0" eaLnBrk="1" latinLnBrk="1" hangingPunct="1">
+      <a:defRPr sz="1200" kern="1200">
+        <a:solidFill>
+          <a:schemeClr val="tx1"/>
+        </a:solidFill>
+        <a:latin typeface="+mn-lt"/>
+        <a:ea typeface="+mn-ea"/>
+        <a:cs typeface="+mn-cs"/>
+      </a:defRPr>
+    </a:lvl9pPr>
+  </p:notesStyle>
+</p:notesMaster>
+</file>
+
+<file path=ppt/notesSlides/notesSlide1.xml><?xml version="1.0" encoding="utf-8"?>
+<p:notes xmlns:a="http://schemas.openxmlformats.org/drawingml/2006/main" xmlns:r="http://schemas.openxmlformats.org/officeDocument/2006/relationships" xmlns:p="http://schemas.openxmlformats.org/presentationml/2006/main">
+  <p:cSld>
+    <p:spTree>
+      <p:nvGrpSpPr>
+        <p:cNvPr id="1" name=""/>
+        <p:cNvGrpSpPr/>
+        <p:nvPr/>
+      </p:nvGrpSpPr>
+      <p:grpSpPr>
+        <a:xfrm>
+          <a:off x="0" y="0"/>
+          <a:ext cx="0" cy="0"/>
+          <a:chOff x="0" y="0"/>
+          <a:chExt cx="0" cy="0"/>
+        </a:xfrm>
+      </p:grpSpPr>
+      <p:sp>
+        <p:nvSpPr>
+          <p:cNvPr id="2" name="슬라이드 이미지 개체 틀 1"/>
+          <p:cNvSpPr>
+            <a:spLocks noGrp="1" noRot="1" noChangeAspect="1"/>
+          </p:cNvSpPr>
+          <p:nvPr>
+            <p:ph type="sldImg"/>
+          </p:nvPr>
+        </p:nvSpPr>
+        <p:spPr/>
+      </p:sp>
+      <p:sp>
+        <p:nvSpPr>
+          <p:cNvPr id="3" name="슬라이드 노트 개체 틀 2"/>
+          <p:cNvSpPr>
+            <a:spLocks noGrp="1"/>
+          </p:cNvSpPr>
+          <p:nvPr>
+            <p:ph type="body" idx="1"/>
+          </p:nvPr>
+        </p:nvSpPr>
+        <p:spPr/>
+        <p:txBody>
+          <a:bodyPr/>
+          <a:lstStyle/>
+          <a:p>
+            <a:r>
+              <a:rPr lang="en-US" altLang="ko-KR"/>
+              <a:t>[Sources]</a:t>
+            </a:r>
+          </a:p>
+          <a:p>
+            <a:r>
+              <a:rPr lang="en-US" altLang="ko-KR"/>
+              <a:t>- https://news.samsung.com/es/imagenes-logotipo-samsung (Samsung official newsroom wordmark asset)</a:t>
+            </a:r>
+          </a:p>
+          <a:p>
+            <a:r>
+              <a:rPr lang="en-US" altLang="ko-KR"/>
+              <a:t>- Corporate layout measurements supplied by the user</a:t>
+            </a:r>
+          </a:p>
+          <a:p>
+            <a:r>
+              <a:rPr lang="en-US" altLang="ko-KR"/>
+              <a:t>[/Sources]</a:t>
+            </a:r>
+            <a:endParaRPr lang="ko-KR" altLang="en-US"/>
+          </a:p>
+        </p:txBody>
+      </p:sp>
+      <p:sp>
+        <p:nvSpPr>
+          <p:cNvPr id="4" name="슬라이드 번호 개체 틀 3"/>
+          <p:cNvSpPr>
+            <a:spLocks noGrp="1"/>
+          </p:cNvSpPr>
+          <p:nvPr>
+            <p:ph type="sldNum" sz="quarter" idx="5"/>
+          </p:nvPr>
+        </p:nvSpPr>
+        <p:spPr/>
+        <p:txBody>
+          <a:bodyPr/>
+          <a:lstStyle/>
+          <a:p>
+            <a:fld id="{C2425DC6-D927-40BA-AABB-29792EC49B12}" type="slidenum">
+              <a:rPr lang="ko-KR" altLang="en-US" smtClean="0"/>
+              <a:t>1</a:t>
+            </a:fld>
+            <a:endParaRPr lang="ko-KR" altLang="en-US"/>
+          </a:p>
+        </p:txBody>
+      </p:sp>
+    </p:spTree>
+    <p:extLst>
+      <p:ext uri="{BB962C8B-B14F-4D97-AF65-F5344CB8AC3E}">
+        <p14:creationId xmlns:p14="http://schemas.microsoft.com/office/powerpoint/2010/main" val="4244756395"/>
+      </p:ext>
+    </p:extLst>
+  </p:cSld>
+  <p:clrMapOvr>
+    <a:masterClrMapping/>
+  </p:clrMapOvr>
+</p:notes>
 </file>
 
 <file path=ppt/slideLayouts/slideLayout1.xml><?xml version="1.0" encoding="utf-8"?>
@@ -151,10 +625,9 @@
           <a:lstStyle/>
           <a:p>
             <a:r>
-              <a:rPr lang="en-US" smtClean="0"/>
+              <a:rPr lang="en-US"/>
               <a:t>Click to edit Master title style</a:t>
             </a:r>
-            <a:endParaRPr lang="en-US"/>
           </a:p>
         </p:txBody>
       </p:sp>
@@ -270,10 +743,9 @@
           </a:lstStyle>
           <a:p>
             <a:r>
-              <a:rPr lang="en-US" smtClean="0"/>
+              <a:rPr lang="en-US"/>
               <a:t>Click to edit Master subtitle style</a:t>
             </a:r>
-            <a:endParaRPr lang="en-US"/>
           </a:p>
         </p:txBody>
       </p:sp>
@@ -294,7 +766,7 @@
           <a:p>
             <a:fld id="{5BCAD085-E8A6-8845-BD4E-CB4CCA059FC4}" type="datetimeFigureOut">
               <a:rPr lang="en-US" smtClean="0"/>
-              <a:t>1/27/13</a:t>
+              <a:t>7/29/2026</a:t>
             </a:fld>
             <a:endParaRPr lang="en-US"/>
           </a:p>
@@ -388,10 +860,9 @@
           <a:lstStyle/>
           <a:p>
             <a:r>
-              <a:rPr lang="en-US" smtClean="0"/>
+              <a:rPr lang="en-US"/>
               <a:t>Click to edit Master title style</a:t>
             </a:r>
-            <a:endParaRPr lang="en-US"/>
           </a:p>
         </p:txBody>
       </p:sp>
@@ -412,38 +883,37 @@
           <a:p>
             <a:pPr lvl="0"/>
             <a:r>
-              <a:rPr lang="en-US" smtClean="0"/>
+              <a:rPr lang="en-US"/>
               <a:t>Click to edit Master text styles</a:t>
             </a:r>
           </a:p>
           <a:p>
             <a:pPr lvl="1"/>
             <a:r>
-              <a:rPr lang="en-US" smtClean="0"/>
+              <a:rPr lang="en-US"/>
               <a:t>Second level</a:t>
             </a:r>
           </a:p>
           <a:p>
             <a:pPr lvl="2"/>
             <a:r>
-              <a:rPr lang="en-US" smtClean="0"/>
+              <a:rPr lang="en-US"/>
               <a:t>Third level</a:t>
             </a:r>
           </a:p>
           <a:p>
             <a:pPr lvl="3"/>
             <a:r>
-              <a:rPr lang="en-US" smtClean="0"/>
+              <a:rPr lang="en-US"/>
               <a:t>Fourth level</a:t>
             </a:r>
           </a:p>
           <a:p>
             <a:pPr lvl="4"/>
             <a:r>
-              <a:rPr lang="en-US" smtClean="0"/>
+              <a:rPr lang="en-US"/>
               <a:t>Fifth level</a:t>
             </a:r>
-            <a:endParaRPr lang="en-US"/>
           </a:p>
         </p:txBody>
       </p:sp>
@@ -464,7 +934,7 @@
           <a:p>
             <a:fld id="{5BCAD085-E8A6-8845-BD4E-CB4CCA059FC4}" type="datetimeFigureOut">
               <a:rPr lang="en-US" smtClean="0"/>
-              <a:t>1/27/13</a:t>
+              <a:t>7/29/2026</a:t>
             </a:fld>
             <a:endParaRPr lang="en-US"/>
           </a:p>
@@ -563,10 +1033,9 @@
           <a:lstStyle/>
           <a:p>
             <a:r>
-              <a:rPr lang="en-US" smtClean="0"/>
+              <a:rPr lang="en-US"/>
               <a:t>Click to edit Master title style</a:t>
             </a:r>
-            <a:endParaRPr lang="en-US"/>
           </a:p>
         </p:txBody>
       </p:sp>
@@ -592,38 +1061,37 @@
           <a:p>
             <a:pPr lvl="0"/>
             <a:r>
-              <a:rPr lang="en-US" smtClean="0"/>
+              <a:rPr lang="en-US"/>
               <a:t>Click to edit Master text styles</a:t>
             </a:r>
           </a:p>
           <a:p>
             <a:pPr lvl="1"/>
             <a:r>
-              <a:rPr lang="en-US" smtClean="0"/>
+              <a:rPr lang="en-US"/>
               <a:t>Second level</a:t>
             </a:r>
           </a:p>
           <a:p>
             <a:pPr lvl="2"/>
             <a:r>
-              <a:rPr lang="en-US" smtClean="0"/>
+              <a:rPr lang="en-US"/>
               <a:t>Third level</a:t>
             </a:r>
           </a:p>
           <a:p>
             <a:pPr lvl="3"/>
             <a:r>
-              <a:rPr lang="en-US" smtClean="0"/>
+              <a:rPr lang="en-US"/>
               <a:t>Fourth level</a:t>
             </a:r>
           </a:p>
           <a:p>
             <a:pPr lvl="4"/>
             <a:r>
-              <a:rPr lang="en-US" smtClean="0"/>
+              <a:rPr lang="en-US"/>
               <a:t>Fifth level</a:t>
             </a:r>
-            <a:endParaRPr lang="en-US"/>
           </a:p>
         </p:txBody>
       </p:sp>
@@ -644,7 +1112,7 @@
           <a:p>
             <a:fld id="{5BCAD085-E8A6-8845-BD4E-CB4CCA059FC4}" type="datetimeFigureOut">
               <a:rPr lang="en-US" smtClean="0"/>
-              <a:t>1/27/13</a:t>
+              <a:t>7/29/2026</a:t>
             </a:fld>
             <a:endParaRPr lang="en-US"/>
           </a:p>
@@ -724,22 +1192,39 @@
       </p:grpSpPr>
       <p:sp>
         <p:nvSpPr>
-          <p:cNvPr id="2" name="Title 1"/>
+          <p:cNvPr id="2" name="DRB_Title_Placeholder"/>
           <p:cNvSpPr>
             <a:spLocks noGrp="1"/>
           </p:cNvSpPr>
           <p:nvPr>
-            <p:ph type="title"/>
+            <p:ph type="title" hasCustomPrompt="1"/>
           </p:nvPr>
         </p:nvSpPr>
-        <p:spPr/>
+        <p:spPr>
+          <a:xfrm>
+            <a:off x="270000" y="342000"/>
+            <a:ext cx="10302000" cy="486000"/>
+          </a:xfrm>
+        </p:spPr>
         <p:txBody>
-          <a:bodyPr/>
-          <a:lstStyle/>
+          <a:bodyPr wrap="none" lIns="0" tIns="0" rIns="0" bIns="0" anchor="ctr">
+            <a:noAutofit/>
+          </a:bodyPr>
+          <a:lstStyle>
+            <a:lvl1pPr algn="l">
+              <a:defRPr sz="2800" b="1">
+                <a:solidFill>
+                  <a:srgbClr val="111111"/>
+                </a:solidFill>
+                <a:latin typeface="맑은 고딕" panose="020B0503020000020004" pitchFamily="50" charset="-127"/>
+                <a:ea typeface="맑은 고딕" panose="020B0503020000020004" pitchFamily="50" charset="-127"/>
+              </a:defRPr>
+            </a:lvl1pPr>
+          </a:lstStyle>
           <a:p>
             <a:r>
-              <a:rPr lang="en-US" smtClean="0"/>
-              <a:t>Click to edit Master title style</a:t>
+              <a:rPr lang="ko-KR" altLang="en-US"/>
+              <a:t>슬라이드 제목</a:t>
             </a:r>
             <a:endParaRPr lang="en-US"/>
           </a:p>
@@ -747,51 +1232,42 @@
       </p:sp>
       <p:sp>
         <p:nvSpPr>
-          <p:cNvPr id="3" name="Content Placeholder 2"/>
+          <p:cNvPr id="3" name="DRB_Body_Placeholder"/>
           <p:cNvSpPr>
             <a:spLocks noGrp="1"/>
           </p:cNvSpPr>
           <p:nvPr>
-            <p:ph idx="1"/>
+            <p:ph idx="1" hasCustomPrompt="1"/>
           </p:nvPr>
         </p:nvSpPr>
-        <p:spPr/>
+        <p:spPr>
+          <a:xfrm>
+            <a:off x="270000" y="943200"/>
+            <a:ext cx="11520000" cy="583200"/>
+          </a:xfrm>
+        </p:spPr>
         <p:txBody>
-          <a:bodyPr/>
-          <a:lstStyle/>
+          <a:bodyPr wrap="none" lIns="0" tIns="0" rIns="0" bIns="0" anchor="ctr">
+            <a:noAutofit/>
+          </a:bodyPr>
+          <a:lstStyle>
+            <a:lvl1pPr marL="0" indent="0" algn="l">
+              <a:buFontTx/>
+              <a:buNone/>
+              <a:defRPr sz="1300" b="1">
+                <a:solidFill>
+                  <a:srgbClr val="333333"/>
+                </a:solidFill>
+                <a:latin typeface="맑은 고딕" panose="020B0503020000020004" pitchFamily="50" charset="-127"/>
+                <a:ea typeface="맑은 고딕" panose="020B0503020000020004" pitchFamily="50" charset="-127"/>
+              </a:defRPr>
+            </a:lvl1pPr>
+          </a:lstStyle>
           <a:p>
             <a:pPr lvl="0"/>
             <a:r>
-              <a:rPr lang="en-US" smtClean="0"/>
-              <a:t>Click to edit Master text styles</a:t>
-            </a:r>
-          </a:p>
-          <a:p>
-            <a:pPr lvl="1"/>
-            <a:r>
-              <a:rPr lang="en-US" smtClean="0"/>
-              <a:t>Second level</a:t>
-            </a:r>
-          </a:p>
-          <a:p>
-            <a:pPr lvl="2"/>
-            <a:r>
-              <a:rPr lang="en-US" smtClean="0"/>
-              <a:t>Third level</a:t>
-            </a:r>
-          </a:p>
-          <a:p>
-            <a:pPr lvl="3"/>
-            <a:r>
-              <a:rPr lang="en-US" smtClean="0"/>
-              <a:t>Fourth level</a:t>
-            </a:r>
-          </a:p>
-          <a:p>
-            <a:pPr lvl="4"/>
-            <a:r>
-              <a:rPr lang="en-US" smtClean="0"/>
-              <a:t>Fifth level</a:t>
+              <a:rPr lang="ko-KR" altLang="en-US"/>
+              <a:t>■ 본문</a:t>
             </a:r>
             <a:endParaRPr lang="en-US"/>
           </a:p>
@@ -814,7 +1290,7 @@
           <a:p>
             <a:fld id="{5BCAD085-E8A6-8845-BD4E-CB4CCA059FC4}" type="datetimeFigureOut">
               <a:rPr lang="en-US" smtClean="0"/>
-              <a:t>1/27/13</a:t>
+              <a:t>7/29/2026</a:t>
             </a:fld>
             <a:endParaRPr lang="en-US"/>
           </a:p>
@@ -859,6 +1335,182 @@
               <a:t>‹#›</a:t>
             </a:fld>
             <a:endParaRPr lang="en-US"/>
+          </a:p>
+        </p:txBody>
+      </p:sp>
+      <p:cxnSp>
+        <p:nvCxnSpPr>
+          <p:cNvPr id="8" name="DRB_Divider">
+            <a:extLst>
+              <a:ext uri="{FF2B5EF4-FFF2-40B4-BE49-F238E27FC236}">
+                <a16:creationId xmlns:a16="http://schemas.microsoft.com/office/drawing/2014/main" id="{56B9C05E-96DE-C606-E94C-2073B80F8DE6}"/>
+              </a:ext>
+            </a:extLst>
+          </p:cNvPr>
+          <p:cNvCxnSpPr/>
+          <p:nvPr userDrawn="1"/>
+        </p:nvCxnSpPr>
+        <p:spPr>
+          <a:xfrm>
+            <a:off x="336000" y="903600"/>
+            <a:ext cx="11520000" cy="0"/>
+          </a:xfrm>
+          <a:prstGeom prst="line">
+            <a:avLst/>
+          </a:prstGeom>
+          <a:ln w="6350">
+            <a:solidFill>
+              <a:srgbClr val="B7B7B7"/>
+            </a:solidFill>
+          </a:ln>
+          <a:effectLst/>
+          <a:extLst>
+            <a:ext uri="{AF507438-7753-43E0-B8FC-AC1667EBCBE1}">
+              <a14:hiddenEffects xmlns:a14="http://schemas.microsoft.com/office/drawing/2010/main">
+                <a:effectLst>
+                  <a:outerShdw blurRad="40000" dist="20000" dir="5400000" rotWithShape="0">
+                    <a:srgbClr val="000000">
+                      <a:alpha val="38000"/>
+                    </a:srgbClr>
+                  </a:outerShdw>
+                </a:effectLst>
+              </a14:hiddenEffects>
+            </a:ext>
+          </a:extLst>
+        </p:spPr>
+        <p:style>
+          <a:lnRef idx="2">
+            <a:schemeClr val="accent1"/>
+          </a:lnRef>
+          <a:fillRef idx="0">
+            <a:schemeClr val="accent1"/>
+          </a:fillRef>
+          <a:effectRef idx="1">
+            <a:schemeClr val="accent1"/>
+          </a:effectRef>
+          <a:fontRef idx="minor">
+            <a:schemeClr val="tx1"/>
+          </a:fontRef>
+        </p:style>
+      </p:cxnSp>
+      <p:pic>
+        <p:nvPicPr>
+          <p:cNvPr id="13" name="DRB_Samsung_Logo">
+            <a:extLst>
+              <a:ext uri="{FF2B5EF4-FFF2-40B4-BE49-F238E27FC236}">
+                <a16:creationId xmlns:a16="http://schemas.microsoft.com/office/drawing/2014/main" id="{E0CD44E5-E9D7-8D84-782F-DC6CFC89B218}"/>
+              </a:ext>
+            </a:extLst>
+          </p:cNvPr>
+          <p:cNvPicPr>
+            <a:picLocks/>
+          </p:cNvPicPr>
+          <p:nvPr userDrawn="1"/>
+        </p:nvPicPr>
+        <p:blipFill>
+          <a:blip r:embed="rId2"/>
+          <a:stretch>
+            <a:fillRect/>
+          </a:stretch>
+        </p:blipFill>
+        <p:spPr>
+          <a:xfrm>
+            <a:off x="10716000" y="360000"/>
+            <a:ext cx="1162800" cy="198000"/>
+          </a:xfrm>
+          <a:prstGeom prst="rect">
+            <a:avLst/>
+          </a:prstGeom>
+        </p:spPr>
+      </p:pic>
+      <p:sp>
+        <p:nvSpPr>
+          <p:cNvPr id="14" name="DRB_Footer_Message">
+            <a:extLst>
+              <a:ext uri="{FF2B5EF4-FFF2-40B4-BE49-F238E27FC236}">
+                <a16:creationId xmlns:a16="http://schemas.microsoft.com/office/drawing/2014/main" id="{09F0CB29-D2DE-4D53-11FC-12393E653311}"/>
+              </a:ext>
+            </a:extLst>
+          </p:cNvPr>
+          <p:cNvSpPr txBox="1"/>
+          <p:nvPr userDrawn="1"/>
+        </p:nvSpPr>
+        <p:spPr>
+          <a:xfrm>
+            <a:off x="439200" y="6462000"/>
+            <a:ext cx="2448000" cy="198000"/>
+          </a:xfrm>
+          <a:prstGeom prst="rect">
+            <a:avLst/>
+          </a:prstGeom>
+          <a:noFill/>
+        </p:spPr>
+        <p:txBody>
+          <a:bodyPr vert="horz" wrap="none" lIns="0" tIns="0" rIns="0" bIns="0" rtlCol="0" anchor="ctr">
+            <a:noAutofit/>
+          </a:bodyPr>
+          <a:lstStyle/>
+          <a:p>
+            <a:pPr algn="l"/>
+            <a:r>
+              <a:rPr lang="ko-KR" altLang="en-US" sz="1200" b="0">
+                <a:solidFill>
+                  <a:srgbClr val="A6A6A6"/>
+                </a:solidFill>
+                <a:latin typeface="맑은 고딕" panose="020B0503020000020004" pitchFamily="50" charset="-127"/>
+                <a:ea typeface="맑은 고딕" panose="020B0503020000020004" pitchFamily="50" charset="-127"/>
+              </a:rPr>
+              <a:t>함께 성장하는 행복한 메모리사업부</a:t>
+            </a:r>
+          </a:p>
+        </p:txBody>
+      </p:sp>
+      <p:sp>
+        <p:nvSpPr>
+          <p:cNvPr id="15" name="DRB_Confidential">
+            <a:extLst>
+              <a:ext uri="{FF2B5EF4-FFF2-40B4-BE49-F238E27FC236}">
+                <a16:creationId xmlns:a16="http://schemas.microsoft.com/office/drawing/2014/main" id="{000E919A-31A1-E63B-D34D-52261D514934}"/>
+              </a:ext>
+            </a:extLst>
+          </p:cNvPr>
+          <p:cNvSpPr txBox="1"/>
+          <p:nvPr userDrawn="1"/>
+        </p:nvSpPr>
+        <p:spPr>
+          <a:xfrm>
+            <a:off x="10842000" y="6422400"/>
+            <a:ext cx="1152000" cy="237600"/>
+          </a:xfrm>
+          <a:prstGeom prst="rect">
+            <a:avLst/>
+          </a:prstGeom>
+          <a:noFill/>
+        </p:spPr>
+        <p:txBody>
+          <a:bodyPr vert="horz" wrap="none" lIns="0" tIns="0" rIns="0" bIns="0" rtlCol="0" anchor="ctr">
+            <a:noAutofit/>
+          </a:bodyPr>
+          <a:lstStyle/>
+          <a:p>
+            <a:pPr algn="r"/>
+            <a:r>
+              <a:rPr lang="en-US" altLang="ko-KR" sz="1200" b="1">
+                <a:solidFill>
+                  <a:srgbClr val="E17D7D"/>
+                </a:solidFill>
+                <a:latin typeface="맑은 고딕" panose="020B0503020000020004" pitchFamily="50" charset="-127"/>
+                <a:ea typeface="맑은 고딕" panose="020B0503020000020004" pitchFamily="50" charset="-127"/>
+              </a:rPr>
+              <a:t>Confidential</a:t>
+            </a:r>
+            <a:endParaRPr lang="ko-KR" altLang="en-US" sz="1200" b="1">
+              <a:solidFill>
+                <a:srgbClr val="E17D7D"/>
+              </a:solidFill>
+              <a:latin typeface="맑은 고딕" panose="020B0503020000020004" pitchFamily="50" charset="-127"/>
+              <a:ea typeface="맑은 고딕" panose="020B0503020000020004" pitchFamily="50" charset="-127"/>
+            </a:endParaRPr>
           </a:p>
         </p:txBody>
       </p:sp>
@@ -917,10 +1569,9 @@
           </a:lstStyle>
           <a:p>
             <a:r>
-              <a:rPr lang="en-US" smtClean="0"/>
+              <a:rPr lang="en-US"/>
               <a:t>Click to edit Master title style</a:t>
             </a:r>
-            <a:endParaRPr lang="en-US"/>
           </a:p>
         </p:txBody>
       </p:sp>
@@ -1037,7 +1688,7 @@
           <a:p>
             <a:pPr lvl="0"/>
             <a:r>
-              <a:rPr lang="en-US" smtClean="0"/>
+              <a:rPr lang="en-US"/>
               <a:t>Click to edit Master text styles</a:t>
             </a:r>
           </a:p>
@@ -1060,7 +1711,7 @@
           <a:p>
             <a:fld id="{5BCAD085-E8A6-8845-BD4E-CB4CCA059FC4}" type="datetimeFigureOut">
               <a:rPr lang="en-US" smtClean="0"/>
-              <a:t>1/27/13</a:t>
+              <a:t>7/29/2026</a:t>
             </a:fld>
             <a:endParaRPr lang="en-US"/>
           </a:p>
@@ -1154,10 +1805,9 @@
           <a:lstStyle/>
           <a:p>
             <a:r>
-              <a:rPr lang="en-US" smtClean="0"/>
+              <a:rPr lang="en-US"/>
               <a:t>Click to edit Master title style</a:t>
             </a:r>
-            <a:endParaRPr lang="en-US"/>
           </a:p>
         </p:txBody>
       </p:sp>
@@ -1211,38 +1861,37 @@
           <a:p>
             <a:pPr lvl="0"/>
             <a:r>
-              <a:rPr lang="en-US" smtClean="0"/>
+              <a:rPr lang="en-US"/>
               <a:t>Click to edit Master text styles</a:t>
             </a:r>
           </a:p>
           <a:p>
             <a:pPr lvl="1"/>
             <a:r>
-              <a:rPr lang="en-US" smtClean="0"/>
+              <a:rPr lang="en-US"/>
               <a:t>Second level</a:t>
             </a:r>
           </a:p>
           <a:p>
             <a:pPr lvl="2"/>
             <a:r>
-              <a:rPr lang="en-US" smtClean="0"/>
+              <a:rPr lang="en-US"/>
               <a:t>Third level</a:t>
             </a:r>
           </a:p>
           <a:p>
             <a:pPr lvl="3"/>
             <a:r>
-              <a:rPr lang="en-US" smtClean="0"/>
+              <a:rPr lang="en-US"/>
               <a:t>Fourth level</a:t>
             </a:r>
           </a:p>
           <a:p>
             <a:pPr lvl="4"/>
             <a:r>
-              <a:rPr lang="en-US" smtClean="0"/>
+              <a:rPr lang="en-US"/>
               <a:t>Fifth level</a:t>
             </a:r>
-            <a:endParaRPr lang="en-US"/>
           </a:p>
         </p:txBody>
       </p:sp>
@@ -1296,38 +1945,37 @@
           <a:p>
             <a:pPr lvl="0"/>
             <a:r>
-              <a:rPr lang="en-US" smtClean="0"/>
+              <a:rPr lang="en-US"/>
               <a:t>Click to edit Master text styles</a:t>
             </a:r>
           </a:p>
           <a:p>
             <a:pPr lvl="1"/>
             <a:r>
-              <a:rPr lang="en-US" smtClean="0"/>
+              <a:rPr lang="en-US"/>
               <a:t>Second level</a:t>
             </a:r>
           </a:p>
           <a:p>
             <a:pPr lvl="2"/>
             <a:r>
-              <a:rPr lang="en-US" smtClean="0"/>
+              <a:rPr lang="en-US"/>
               <a:t>Third level</a:t>
             </a:r>
           </a:p>
           <a:p>
             <a:pPr lvl="3"/>
             <a:r>
-              <a:rPr lang="en-US" smtClean="0"/>
+              <a:rPr lang="en-US"/>
               <a:t>Fourth level</a:t>
             </a:r>
           </a:p>
           <a:p>
             <a:pPr lvl="4"/>
             <a:r>
-              <a:rPr lang="en-US" smtClean="0"/>
+              <a:rPr lang="en-US"/>
               <a:t>Fifth level</a:t>
             </a:r>
-            <a:endParaRPr lang="en-US"/>
           </a:p>
         </p:txBody>
       </p:sp>
@@ -1348,7 +1996,7 @@
           <a:p>
             <a:fld id="{5BCAD085-E8A6-8845-BD4E-CB4CCA059FC4}" type="datetimeFigureOut">
               <a:rPr lang="en-US" smtClean="0"/>
-              <a:t>1/27/13</a:t>
+              <a:t>7/29/2026</a:t>
             </a:fld>
             <a:endParaRPr lang="en-US"/>
           </a:p>
@@ -1446,10 +2094,9 @@
           </a:lstStyle>
           <a:p>
             <a:r>
-              <a:rPr lang="en-US" smtClean="0"/>
+              <a:rPr lang="en-US"/>
               <a:t>Click to edit Master title style</a:t>
             </a:r>
-            <a:endParaRPr lang="en-US"/>
           </a:p>
         </p:txBody>
       </p:sp>
@@ -1512,7 +2159,7 @@
           <a:p>
             <a:pPr lvl="0"/>
             <a:r>
-              <a:rPr lang="en-US" smtClean="0"/>
+              <a:rPr lang="en-US"/>
               <a:t>Click to edit Master text styles</a:t>
             </a:r>
           </a:p>
@@ -1568,38 +2215,37 @@
           <a:p>
             <a:pPr lvl="0"/>
             <a:r>
-              <a:rPr lang="en-US" smtClean="0"/>
+              <a:rPr lang="en-US"/>
               <a:t>Click to edit Master text styles</a:t>
             </a:r>
           </a:p>
           <a:p>
             <a:pPr lvl="1"/>
             <a:r>
-              <a:rPr lang="en-US" smtClean="0"/>
+              <a:rPr lang="en-US"/>
               <a:t>Second level</a:t>
             </a:r>
           </a:p>
           <a:p>
             <a:pPr lvl="2"/>
             <a:r>
-              <a:rPr lang="en-US" smtClean="0"/>
+              <a:rPr lang="en-US"/>
               <a:t>Third level</a:t>
             </a:r>
           </a:p>
           <a:p>
             <a:pPr lvl="3"/>
             <a:r>
-              <a:rPr lang="en-US" smtClean="0"/>
+              <a:rPr lang="en-US"/>
               <a:t>Fourth level</a:t>
             </a:r>
           </a:p>
           <a:p>
             <a:pPr lvl="4"/>
             <a:r>
-              <a:rPr lang="en-US" smtClean="0"/>
+              <a:rPr lang="en-US"/>
               <a:t>Fifth level</a:t>
             </a:r>
-            <a:endParaRPr lang="en-US"/>
           </a:p>
         </p:txBody>
       </p:sp>
@@ -1662,7 +2308,7 @@
           <a:p>
             <a:pPr lvl="0"/>
             <a:r>
-              <a:rPr lang="en-US" smtClean="0"/>
+              <a:rPr lang="en-US"/>
               <a:t>Click to edit Master text styles</a:t>
             </a:r>
           </a:p>
@@ -1718,38 +2364,37 @@
           <a:p>
             <a:pPr lvl="0"/>
             <a:r>
-              <a:rPr lang="en-US" smtClean="0"/>
+              <a:rPr lang="en-US"/>
               <a:t>Click to edit Master text styles</a:t>
             </a:r>
           </a:p>
           <a:p>
             <a:pPr lvl="1"/>
             <a:r>
-              <a:rPr lang="en-US" smtClean="0"/>
+              <a:rPr lang="en-US"/>
               <a:t>Second level</a:t>
             </a:r>
           </a:p>
           <a:p>
             <a:pPr lvl="2"/>
             <a:r>
-              <a:rPr lang="en-US" smtClean="0"/>
+              <a:rPr lang="en-US"/>
               <a:t>Third level</a:t>
             </a:r>
           </a:p>
           <a:p>
             <a:pPr lvl="3"/>
             <a:r>
-              <a:rPr lang="en-US" smtClean="0"/>
+              <a:rPr lang="en-US"/>
               <a:t>Fourth level</a:t>
             </a:r>
           </a:p>
           <a:p>
             <a:pPr lvl="4"/>
             <a:r>
-              <a:rPr lang="en-US" smtClean="0"/>
+              <a:rPr lang="en-US"/>
               <a:t>Fifth level</a:t>
             </a:r>
-            <a:endParaRPr lang="en-US"/>
           </a:p>
         </p:txBody>
       </p:sp>
@@ -1770,7 +2415,7 @@
           <a:p>
             <a:fld id="{5BCAD085-E8A6-8845-BD4E-CB4CCA059FC4}" type="datetimeFigureOut">
               <a:rPr lang="en-US" smtClean="0"/>
-              <a:t>1/27/13</a:t>
+              <a:t>7/29/2026</a:t>
             </a:fld>
             <a:endParaRPr lang="en-US"/>
           </a:p>
@@ -1850,22 +2495,39 @@
       </p:grpSpPr>
       <p:sp>
         <p:nvSpPr>
-          <p:cNvPr id="2" name="Title 1"/>
+          <p:cNvPr id="2" name="DRB_Title_Placeholder"/>
           <p:cNvSpPr>
             <a:spLocks noGrp="1"/>
           </p:cNvSpPr>
           <p:nvPr>
-            <p:ph type="title"/>
+            <p:ph type="title" hasCustomPrompt="1"/>
           </p:nvPr>
         </p:nvSpPr>
-        <p:spPr/>
+        <p:spPr>
+          <a:xfrm>
+            <a:off x="270000" y="342000"/>
+            <a:ext cx="10302000" cy="486000"/>
+          </a:xfrm>
+        </p:spPr>
         <p:txBody>
-          <a:bodyPr/>
-          <a:lstStyle/>
+          <a:bodyPr wrap="none" lIns="0" tIns="0" rIns="0" bIns="0" anchor="ctr">
+            <a:noAutofit/>
+          </a:bodyPr>
+          <a:lstStyle>
+            <a:lvl1pPr algn="l">
+              <a:defRPr sz="2800" b="1">
+                <a:solidFill>
+                  <a:srgbClr val="111111"/>
+                </a:solidFill>
+                <a:latin typeface="맑은 고딕" panose="020B0503020000020004" pitchFamily="50" charset="-127"/>
+                <a:ea typeface="맑은 고딕" panose="020B0503020000020004" pitchFamily="50" charset="-127"/>
+              </a:defRPr>
+            </a:lvl1pPr>
+          </a:lstStyle>
           <a:p>
             <a:r>
-              <a:rPr lang="en-US" smtClean="0"/>
-              <a:t>Click to edit Master title style</a:t>
+              <a:rPr lang="ko-KR" altLang="en-US"/>
+              <a:t>슬라이드 제목</a:t>
             </a:r>
             <a:endParaRPr lang="en-US"/>
           </a:p>
@@ -1888,7 +2550,7 @@
           <a:p>
             <a:fld id="{5BCAD085-E8A6-8845-BD4E-CB4CCA059FC4}" type="datetimeFigureOut">
               <a:rPr lang="en-US" smtClean="0"/>
-              <a:t>1/27/13</a:t>
+              <a:t>7/29/2026</a:t>
             </a:fld>
             <a:endParaRPr lang="en-US"/>
           </a:p>
@@ -1933,6 +2595,230 @@
               <a:t>‹#›</a:t>
             </a:fld>
             <a:endParaRPr lang="en-US"/>
+          </a:p>
+        </p:txBody>
+      </p:sp>
+      <p:sp>
+        <p:nvSpPr>
+          <p:cNvPr id="11" name="DRB_Body_Placeholder">
+            <a:extLst>
+              <a:ext uri="{FF2B5EF4-FFF2-40B4-BE49-F238E27FC236}">
+                <a16:creationId xmlns:a16="http://schemas.microsoft.com/office/drawing/2014/main" id="{E155BF77-A51A-D56F-58EB-6AD12F6E2296}"/>
+              </a:ext>
+            </a:extLst>
+          </p:cNvPr>
+          <p:cNvSpPr>
+            <a:spLocks noGrp="1"/>
+          </p:cNvSpPr>
+          <p:nvPr>
+            <p:ph idx="13" hasCustomPrompt="1"/>
+          </p:nvPr>
+        </p:nvSpPr>
+        <p:spPr>
+          <a:xfrm>
+            <a:off x="270000" y="943200"/>
+            <a:ext cx="11520000" cy="583200"/>
+          </a:xfrm>
+        </p:spPr>
+        <p:txBody>
+          <a:bodyPr wrap="none" lIns="0" tIns="0" rIns="0" bIns="0" anchor="ctr">
+            <a:noAutofit/>
+          </a:bodyPr>
+          <a:lstStyle>
+            <a:lvl1pPr marL="0" indent="0" algn="l">
+              <a:buFontTx/>
+              <a:buNone/>
+              <a:defRPr sz="1300" b="1">
+                <a:solidFill>
+                  <a:srgbClr val="333333"/>
+                </a:solidFill>
+                <a:latin typeface="맑은 고딕" panose="020B0503020000020004" pitchFamily="50" charset="-127"/>
+                <a:ea typeface="맑은 고딕" panose="020B0503020000020004" pitchFamily="50" charset="-127"/>
+              </a:defRPr>
+            </a:lvl1pPr>
+          </a:lstStyle>
+          <a:p>
+            <a:pPr lvl="0"/>
+            <a:r>
+              <a:rPr lang="ko-KR" altLang="en-US"/>
+              <a:t>■ 본문</a:t>
+            </a:r>
+          </a:p>
+        </p:txBody>
+      </p:sp>
+      <p:cxnSp>
+        <p:nvCxnSpPr>
+          <p:cNvPr id="7" name="DRB_Divider">
+            <a:extLst>
+              <a:ext uri="{FF2B5EF4-FFF2-40B4-BE49-F238E27FC236}">
+                <a16:creationId xmlns:a16="http://schemas.microsoft.com/office/drawing/2014/main" id="{8994E224-48C4-5F55-0E69-6911A9B2ECFD}"/>
+              </a:ext>
+            </a:extLst>
+          </p:cNvPr>
+          <p:cNvCxnSpPr/>
+          <p:nvPr userDrawn="1"/>
+        </p:nvCxnSpPr>
+        <p:spPr>
+          <a:xfrm>
+            <a:off x="336000" y="903600"/>
+            <a:ext cx="11520000" cy="0"/>
+          </a:xfrm>
+          <a:prstGeom prst="line">
+            <a:avLst/>
+          </a:prstGeom>
+          <a:ln w="6350">
+            <a:solidFill>
+              <a:srgbClr val="B7B7B7"/>
+            </a:solidFill>
+          </a:ln>
+          <a:effectLst/>
+          <a:extLst>
+            <a:ext uri="{AF507438-7753-43E0-B8FC-AC1667EBCBE1}">
+              <a14:hiddenEffects xmlns:a14="http://schemas.microsoft.com/office/drawing/2010/main">
+                <a:effectLst>
+                  <a:outerShdw blurRad="40000" dist="20000" dir="5400000" rotWithShape="0">
+                    <a:srgbClr val="000000">
+                      <a:alpha val="38000"/>
+                    </a:srgbClr>
+                  </a:outerShdw>
+                </a:effectLst>
+              </a14:hiddenEffects>
+            </a:ext>
+          </a:extLst>
+        </p:spPr>
+        <p:style>
+          <a:lnRef idx="2">
+            <a:schemeClr val="accent1"/>
+          </a:lnRef>
+          <a:fillRef idx="0">
+            <a:schemeClr val="accent1"/>
+          </a:fillRef>
+          <a:effectRef idx="1">
+            <a:schemeClr val="accent1"/>
+          </a:effectRef>
+          <a:fontRef idx="minor">
+            <a:schemeClr val="tx1"/>
+          </a:fontRef>
+        </p:style>
+      </p:cxnSp>
+      <p:pic>
+        <p:nvPicPr>
+          <p:cNvPr id="13" name="DRB_Samsung_Logo">
+            <a:extLst>
+              <a:ext uri="{FF2B5EF4-FFF2-40B4-BE49-F238E27FC236}">
+                <a16:creationId xmlns:a16="http://schemas.microsoft.com/office/drawing/2014/main" id="{D813056B-B96D-313D-2CA3-3532A24B6A25}"/>
+              </a:ext>
+            </a:extLst>
+          </p:cNvPr>
+          <p:cNvPicPr>
+            <a:picLocks/>
+          </p:cNvPicPr>
+          <p:nvPr userDrawn="1"/>
+        </p:nvPicPr>
+        <p:blipFill>
+          <a:blip r:embed="rId2"/>
+          <a:stretch>
+            <a:fillRect/>
+          </a:stretch>
+        </p:blipFill>
+        <p:spPr>
+          <a:xfrm>
+            <a:off x="10716000" y="360000"/>
+            <a:ext cx="1162800" cy="198000"/>
+          </a:xfrm>
+          <a:prstGeom prst="rect">
+            <a:avLst/>
+          </a:prstGeom>
+        </p:spPr>
+      </p:pic>
+      <p:sp>
+        <p:nvSpPr>
+          <p:cNvPr id="14" name="DRB_Footer_Message">
+            <a:extLst>
+              <a:ext uri="{FF2B5EF4-FFF2-40B4-BE49-F238E27FC236}">
+                <a16:creationId xmlns:a16="http://schemas.microsoft.com/office/drawing/2014/main" id="{B538CEB9-354C-206E-BB99-FC9FE179AB47}"/>
+              </a:ext>
+            </a:extLst>
+          </p:cNvPr>
+          <p:cNvSpPr txBox="1"/>
+          <p:nvPr userDrawn="1"/>
+        </p:nvSpPr>
+        <p:spPr>
+          <a:xfrm>
+            <a:off x="439200" y="6462000"/>
+            <a:ext cx="2448000" cy="198000"/>
+          </a:xfrm>
+          <a:prstGeom prst="rect">
+            <a:avLst/>
+          </a:prstGeom>
+          <a:noFill/>
+        </p:spPr>
+        <p:txBody>
+          <a:bodyPr vert="horz" wrap="none" lIns="0" tIns="0" rIns="0" bIns="0" rtlCol="0" anchor="ctr">
+            <a:noAutofit/>
+          </a:bodyPr>
+          <a:lstStyle/>
+          <a:p>
+            <a:pPr algn="l"/>
+            <a:r>
+              <a:rPr lang="ko-KR" altLang="en-US" sz="1200" b="0">
+                <a:solidFill>
+                  <a:srgbClr val="A6A6A6"/>
+                </a:solidFill>
+                <a:latin typeface="맑은 고딕" panose="020B0503020000020004" pitchFamily="50" charset="-127"/>
+                <a:ea typeface="맑은 고딕" panose="020B0503020000020004" pitchFamily="50" charset="-127"/>
+              </a:rPr>
+              <a:t>함께 성장하는 행복한 메모리사업부</a:t>
+            </a:r>
+          </a:p>
+        </p:txBody>
+      </p:sp>
+      <p:sp>
+        <p:nvSpPr>
+          <p:cNvPr id="15" name="DRB_Confidential">
+            <a:extLst>
+              <a:ext uri="{FF2B5EF4-FFF2-40B4-BE49-F238E27FC236}">
+                <a16:creationId xmlns:a16="http://schemas.microsoft.com/office/drawing/2014/main" id="{B4400CB8-75A8-2206-036E-92747DE04F4D}"/>
+              </a:ext>
+            </a:extLst>
+          </p:cNvPr>
+          <p:cNvSpPr txBox="1"/>
+          <p:nvPr userDrawn="1"/>
+        </p:nvSpPr>
+        <p:spPr>
+          <a:xfrm>
+            <a:off x="10842000" y="6422400"/>
+            <a:ext cx="1152000" cy="237600"/>
+          </a:xfrm>
+          <a:prstGeom prst="rect">
+            <a:avLst/>
+          </a:prstGeom>
+          <a:noFill/>
+        </p:spPr>
+        <p:txBody>
+          <a:bodyPr vert="horz" wrap="none" lIns="0" tIns="0" rIns="0" bIns="0" rtlCol="0" anchor="ctr">
+            <a:noAutofit/>
+          </a:bodyPr>
+          <a:lstStyle/>
+          <a:p>
+            <a:pPr algn="r"/>
+            <a:r>
+              <a:rPr lang="en-US" altLang="ko-KR" sz="1200" b="1">
+                <a:solidFill>
+                  <a:srgbClr val="E17D7D"/>
+                </a:solidFill>
+                <a:latin typeface="맑은 고딕" panose="020B0503020000020004" pitchFamily="50" charset="-127"/>
+                <a:ea typeface="맑은 고딕" panose="020B0503020000020004" pitchFamily="50" charset="-127"/>
+              </a:rPr>
+              <a:t>Confidential</a:t>
+            </a:r>
+            <a:endParaRPr lang="ko-KR" altLang="en-US" sz="1200" b="1">
+              <a:solidFill>
+                <a:srgbClr val="E17D7D"/>
+              </a:solidFill>
+              <a:latin typeface="맑은 고딕" panose="020B0503020000020004" pitchFamily="50" charset="-127"/>
+              <a:ea typeface="맑은 고딕" panose="020B0503020000020004" pitchFamily="50" charset="-127"/>
+            </a:endParaRPr>
           </a:p>
         </p:txBody>
       </p:sp>
@@ -1983,7 +2869,7 @@
           <a:p>
             <a:fld id="{5BCAD085-E8A6-8845-BD4E-CB4CCA059FC4}" type="datetimeFigureOut">
               <a:rPr lang="en-US" smtClean="0"/>
-              <a:t>1/27/13</a:t>
+              <a:t>7/29/2026</a:t>
             </a:fld>
             <a:endParaRPr lang="en-US"/>
           </a:p>
@@ -2086,10 +2972,9 @@
           </a:lstStyle>
           <a:p>
             <a:r>
-              <a:rPr lang="en-US" smtClean="0"/>
+              <a:rPr lang="en-US"/>
               <a:t>Click to edit Master title style</a:t>
             </a:r>
-            <a:endParaRPr lang="en-US"/>
           </a:p>
         </p:txBody>
       </p:sp>
@@ -2143,38 +3028,37 @@
           <a:p>
             <a:pPr lvl="0"/>
             <a:r>
-              <a:rPr lang="en-US" smtClean="0"/>
+              <a:rPr lang="en-US"/>
               <a:t>Click to edit Master text styles</a:t>
             </a:r>
           </a:p>
           <a:p>
             <a:pPr lvl="1"/>
             <a:r>
-              <a:rPr lang="en-US" smtClean="0"/>
+              <a:rPr lang="en-US"/>
               <a:t>Second level</a:t>
             </a:r>
           </a:p>
           <a:p>
             <a:pPr lvl="2"/>
             <a:r>
-              <a:rPr lang="en-US" smtClean="0"/>
+              <a:rPr lang="en-US"/>
               <a:t>Third level</a:t>
             </a:r>
           </a:p>
           <a:p>
             <a:pPr lvl="3"/>
             <a:r>
-              <a:rPr lang="en-US" smtClean="0"/>
+              <a:rPr lang="en-US"/>
               <a:t>Fourth level</a:t>
             </a:r>
           </a:p>
           <a:p>
             <a:pPr lvl="4"/>
             <a:r>
-              <a:rPr lang="en-US" smtClean="0"/>
+              <a:rPr lang="en-US"/>
               <a:t>Fifth level</a:t>
             </a:r>
-            <a:endParaRPr lang="en-US"/>
           </a:p>
         </p:txBody>
       </p:sp>
@@ -2237,7 +3121,7 @@
           <a:p>
             <a:pPr lvl="0"/>
             <a:r>
-              <a:rPr lang="en-US" smtClean="0"/>
+              <a:rPr lang="en-US"/>
               <a:t>Click to edit Master text styles</a:t>
             </a:r>
           </a:p>
@@ -2260,7 +3144,7 @@
           <a:p>
             <a:fld id="{5BCAD085-E8A6-8845-BD4E-CB4CCA059FC4}" type="datetimeFigureOut">
               <a:rPr lang="en-US" smtClean="0"/>
-              <a:t>1/27/13</a:t>
+              <a:t>7/29/2026</a:t>
             </a:fld>
             <a:endParaRPr lang="en-US"/>
           </a:p>
@@ -2363,10 +3247,9 @@
           </a:lstStyle>
           <a:p>
             <a:r>
-              <a:rPr lang="en-US" smtClean="0"/>
+              <a:rPr lang="en-US"/>
               <a:t>Click to edit Master title style</a:t>
             </a:r>
-            <a:endParaRPr lang="en-US"/>
           </a:p>
         </p:txBody>
       </p:sp>
@@ -2490,7 +3373,7 @@
           <a:p>
             <a:pPr lvl="0"/>
             <a:r>
-              <a:rPr lang="en-US" smtClean="0"/>
+              <a:rPr lang="en-US"/>
               <a:t>Click to edit Master text styles</a:t>
             </a:r>
           </a:p>
@@ -2513,7 +3396,7 @@
           <a:p>
             <a:fld id="{5BCAD085-E8A6-8845-BD4E-CB4CCA059FC4}" type="datetimeFigureOut">
               <a:rPr lang="en-US" smtClean="0"/>
-              <a:t>1/27/13</a:t>
+              <a:t>7/29/2026</a:t>
             </a:fld>
             <a:endParaRPr lang="en-US"/>
           </a:p>
@@ -2622,10 +3505,9 @@
           <a:lstStyle/>
           <a:p>
             <a:r>
-              <a:rPr lang="en-US" smtClean="0"/>
+              <a:rPr lang="en-US"/>
               <a:t>Click to edit Master title style</a:t>
             </a:r>
-            <a:endParaRPr lang="en-US"/>
           </a:p>
         </p:txBody>
       </p:sp>
@@ -2656,38 +3538,37 @@
           <a:p>
             <a:pPr lvl="0"/>
             <a:r>
-              <a:rPr lang="en-US" smtClean="0"/>
+              <a:rPr lang="en-US"/>
               <a:t>Click to edit Master text styles</a:t>
             </a:r>
           </a:p>
           <a:p>
             <a:pPr lvl="1"/>
             <a:r>
-              <a:rPr lang="en-US" smtClean="0"/>
+              <a:rPr lang="en-US"/>
               <a:t>Second level</a:t>
             </a:r>
           </a:p>
           <a:p>
             <a:pPr lvl="2"/>
             <a:r>
-              <a:rPr lang="en-US" smtClean="0"/>
+              <a:rPr lang="en-US"/>
               <a:t>Third level</a:t>
             </a:r>
           </a:p>
           <a:p>
             <a:pPr lvl="3"/>
             <a:r>
-              <a:rPr lang="en-US" smtClean="0"/>
+              <a:rPr lang="en-US"/>
               <a:t>Fourth level</a:t>
             </a:r>
           </a:p>
           <a:p>
             <a:pPr lvl="4"/>
             <a:r>
-              <a:rPr lang="en-US" smtClean="0"/>
+              <a:rPr lang="en-US"/>
               <a:t>Fifth level</a:t>
             </a:r>
-            <a:endParaRPr lang="en-US"/>
           </a:p>
         </p:txBody>
       </p:sp>
@@ -2726,7 +3607,7 @@
           <a:p>
             <a:fld id="{5BCAD085-E8A6-8845-BD4E-CB4CCA059FC4}" type="datetimeFigureOut">
               <a:rPr lang="en-US" smtClean="0"/>
-              <a:t>1/27/13</a:t>
+              <a:t>7/29/2026</a:t>
             </a:fld>
             <a:endParaRPr lang="en-US"/>
           </a:p>
@@ -3103,24 +3984,19 @@
       </p:grpSpPr>
       <p:sp>
         <p:nvSpPr>
-          <p:cNvPr id="2" name=""/>
+          <p:cNvPr id="2" name="DRB_Title_Placeholder"/>
           <p:cNvSpPr>
             <a:spLocks noGrp="1"/>
           </p:cNvSpPr>
           <p:nvPr>
-            <p:ph/>
+            <p:ph type="title" hasCustomPrompt="1"/>
           </p:nvPr>
         </p:nvSpPr>
         <p:spPr>
           <a:xfrm>
-            <a:off x="457200" y="237744"/>
-            <a:ext cx="11155680" cy="310896"/>
+            <a:off x="270000" y="342000"/>
+            <a:ext cx="10302000" cy="486000"/>
           </a:xfrm>
-          <a:solidFill>
-            <a:srgbClr val="FFFFFF">
-              <a:alpha val="0"/>
-            </a:srgbClr>
-          </a:solidFill>
         </p:spPr>
         <p:txBody>
           <a:bodyPr/>
@@ -3139,7 +4015,7 @@
               <a:buNone/>
             </a:pPr>
             <a:r>
-              <a:rPr cap="none" sz="2000" i="0" b="1" u="none" strike="noStrike">
+              <a:rPr cap="none" sz="2800" i="0" b="1" u="none" strike="noStrike">
                 <a:solidFill>
                   <a:srgbClr val="111111">
                     <a:alpha val="100000"/>
@@ -3157,24 +4033,19 @@
       </p:sp>
       <p:sp>
         <p:nvSpPr>
-          <p:cNvPr id="3" name=""/>
+          <p:cNvPr id="3" name="DRB_Body_Placeholder"/>
           <p:cNvSpPr>
             <a:spLocks noGrp="1"/>
           </p:cNvSpPr>
           <p:nvPr>
-            <p:ph/>
+            <p:ph idx="1" hasCustomPrompt="1"/>
           </p:nvPr>
         </p:nvSpPr>
         <p:spPr>
           <a:xfrm>
-            <a:off x="457200" y="694944"/>
-            <a:ext cx="11155680" cy="219456"/>
+            <a:off x="270000" y="943200"/>
+            <a:ext cx="11520000" cy="583200"/>
           </a:xfrm>
-          <a:solidFill>
-            <a:srgbClr val="FFFFFF">
-              <a:alpha val="0"/>
-            </a:srgbClr>
-          </a:solidFill>
         </p:spPr>
         <p:txBody>
           <a:bodyPr/>
@@ -3193,7 +4064,7 @@
               <a:buNone/>
             </a:pPr>
             <a:r>
-              <a:rPr cap="none" sz="950" i="0" b="1" u="none" strike="noStrike">
+              <a:rPr cap="none" sz="1300" i="0" b="1" u="none" strike="noStrike">
                 <a:solidFill>
                   <a:srgbClr val="333333">
                     <a:alpha val="100000"/>
@@ -3207,7 +4078,7 @@
               <a:t>■</a:t>
             </a:r>
             <a:r>
-              <a:rPr cap="none" sz="950" i="0" b="0" u="none" strike="noStrike">
+              <a:rPr cap="none" sz="1300" i="0" b="1" u="none" strike="noStrike">
                 <a:solidFill>
                   <a:srgbClr val="333333">
                     <a:alpha val="100000"/>
@@ -3218,22 +4089,118 @@
                 <a:ea typeface="Malgun Gothic"/>
                 <a:sym typeface="Malgun Gothic"/>
               </a:rPr>
-              <a:t> REF: A / TARGET: B | Threshold: 0.5 | TREND: plot 수동 부착 / 비고: 수동 작성</a:t>
+              <a:t> REF: A / TARGET: B | Threshold: 0.5</a:t>
+            </a:r>
+          </a:p>
+          <a:p>
+            <a:pPr algn="l" marL="0" marR="0">
+              <a:lnSpc>
+                <a:spcPct val="100000"/>
+              </a:lnSpc>
+              <a:spcBef>
+                <a:spcPts val="0"/>
+              </a:spcBef>
+              <a:spcAft>
+                <a:spcPts val="0"/>
+              </a:spcAft>
+              <a:buNone/>
+            </a:pPr>
+            <a:r>
+              <a:rPr cap="none" sz="1300" i="0" b="1" u="none" strike="noStrike">
+                <a:solidFill>
+                  <a:srgbClr val="333333">
+                    <a:alpha val="100000"/>
+                  </a:srgbClr>
+                </a:solidFill>
+                <a:latin typeface="Malgun Gothic"/>
+                <a:cs typeface="Malgun Gothic"/>
+                <a:ea typeface="Malgun Gothic"/>
+                <a:sym typeface="Malgun Gothic"/>
+              </a:rPr>
+              <a:t>■</a:t>
+            </a:r>
+            <a:r>
+              <a:rPr cap="none" sz="1300" i="0" b="1" u="none" strike="noStrike">
+                <a:solidFill>
+                  <a:srgbClr val="333333">
+                    <a:alpha val="100000"/>
+                  </a:srgbClr>
+                </a:solidFill>
+                <a:latin typeface="Malgun Gothic"/>
+                <a:cs typeface="Malgun Gothic"/>
+                <a:ea typeface="Malgun Gothic"/>
+                <a:sym typeface="Malgun Gothic"/>
+              </a:rPr>
+              <a:t> TREND: plot 수동 부착 / 비고: 수동 작성</a:t>
+            </a:r>
+          </a:p>
+        </p:txBody>
+      </p:sp>
+      <p:sp>
+        <p:nvSpPr>
+          <p:cNvPr id="4" name=""/>
+          <p:cNvSpPr>
+            <a:spLocks noGrp="1"/>
+          </p:cNvSpPr>
+          <p:nvPr>
+            <p:ph/>
+          </p:nvPr>
+        </p:nvSpPr>
+        <p:spPr>
+          <a:xfrm>
+            <a:off x="8268012" y="6451200"/>
+            <a:ext cx="2520000" cy="237600"/>
+          </a:xfrm>
+          <a:solidFill>
+            <a:srgbClr val="FFFFFF">
+              <a:alpha val="0"/>
+            </a:srgbClr>
+          </a:solidFill>
+        </p:spPr>
+        <p:txBody>
+          <a:bodyPr/>
+          <a:lstStyle/>
+          <a:p>
+            <a:pPr algn="r" marL="0" marR="0">
+              <a:lnSpc>
+                <a:spcPct val="100000"/>
+              </a:lnSpc>
+              <a:spcBef>
+                <a:spcPts val="0"/>
+              </a:spcBef>
+              <a:spcAft>
+                <a:spcPts val="0"/>
+              </a:spcAft>
+              <a:buNone/>
+            </a:pPr>
+            <a:r>
+              <a:rPr cap="none" sz="1200" i="0" b="0" u="none" strike="noStrike">
+                <a:solidFill>
+                  <a:srgbClr val="7F7F7F">
+                    <a:alpha val="100000"/>
+                  </a:srgbClr>
+                </a:solidFill>
+                <a:latin typeface="Malgun Gothic"/>
+                <a:cs typeface="Malgun Gothic"/>
+                <a:ea typeface="Malgun Gothic"/>
+                <a:sym typeface="Malgun Gothic"/>
+              </a:rPr>
+              <a:t>Flash PE / 홍길동</a:t>
             </a:r>
           </a:p>
         </p:txBody>
       </p:sp>
       <p:graphicFrame>
         <p:nvGraphicFramePr>
-          <p:cNvPr id="4" name=""/>
+          <p:cNvPr id="5" name=""/>
           <p:cNvGraphicFramePr>
             <a:graphicFrameLocks noGrp="true"/>
           </p:cNvGraphicFramePr>
           <p:nvPr/>
         </p:nvGraphicFramePr>
         <p:xfrm rot="0">
-          <a:off x="292608" y="1078992"/>
-          <a:ext cx="11603736" cy="5321808"/>
+          <a:off x="292608" y="1536192"/>
+          <a:ext cx="11603736" cy="4864608"/>
         </p:xfrm>
         <a:graphic>
           <a:graphicData uri="http://schemas.openxmlformats.org/drawingml/2006/table">
@@ -4702,7 +5669,7 @@
                   </a:tcPr>
                 </a:tc>
               </a:tr>
-              <a:tr h="408432">
+              <a:tr h="370332">
                 <a:tc rowSpan="6">
                   <a:txBody>
                     <a:bodyPr/>
@@ -5415,7 +6382,7 @@
                   </a:tcPr>
                 </a:tc>
               </a:tr>
-              <a:tr h="408432">
+              <a:tr h="370332">
                 <a:tc vMerge="true">
                   <a:txBody>
                     <a:bodyPr/>
@@ -6172,7 +7139,7 @@
                   </a:tcPr>
                 </a:tc>
               </a:tr>
-              <a:tr h="408432">
+              <a:tr h="370332">
                 <a:tc vMerge="true">
                   <a:txBody>
                     <a:bodyPr/>
@@ -6929,7 +7896,7 @@
                   </a:tcPr>
                 </a:tc>
               </a:tr>
-              <a:tr h="408432">
+              <a:tr h="370332">
                 <a:tc vMerge="true">
                   <a:txBody>
                     <a:bodyPr/>
@@ -7686,7 +8653,7 @@
                   </a:tcPr>
                 </a:tc>
               </a:tr>
-              <a:tr h="408432">
+              <a:tr h="370332">
                 <a:tc vMerge="true">
                   <a:txBody>
                     <a:bodyPr/>
@@ -8443,7 +9410,7 @@
                   </a:tcPr>
                 </a:tc>
               </a:tr>
-              <a:tr h="408432">
+              <a:tr h="370332">
                 <a:tc vMerge="true">
                   <a:txBody>
                     <a:bodyPr/>
@@ -9200,7 +10167,7 @@
                   </a:tcPr>
                 </a:tc>
               </a:tr>
-              <a:tr h="408432">
+              <a:tr h="370332">
                 <a:tc rowSpan="6">
                   <a:txBody>
                     <a:bodyPr/>
@@ -9957,7 +10924,7 @@
                   </a:tcPr>
                 </a:tc>
               </a:tr>
-              <a:tr h="408432">
+              <a:tr h="370332">
                 <a:tc vMerge="true">
                   <a:txBody>
                     <a:bodyPr/>
@@ -10714,7 +11681,7 @@
                   </a:tcPr>
                 </a:tc>
               </a:tr>
-              <a:tr h="408432">
+              <a:tr h="370332">
                 <a:tc vMerge="true">
                   <a:txBody>
                     <a:bodyPr/>
@@ -11471,7 +12438,7 @@
                   </a:tcPr>
                 </a:tc>
               </a:tr>
-              <a:tr h="408432">
+              <a:tr h="370332">
                 <a:tc vMerge="true">
                   <a:txBody>
                     <a:bodyPr/>
@@ -12228,7 +13195,7 @@
                   </a:tcPr>
                 </a:tc>
               </a:tr>
-              <a:tr h="408432">
+              <a:tr h="370332">
                 <a:tc vMerge="true">
                   <a:txBody>
                     <a:bodyPr/>
@@ -12985,7 +13952,7 @@
                   </a:tcPr>
                 </a:tc>
               </a:tr>
-              <a:tr h="408432">
+              <a:tr h="370332">
                 <a:tc vMerge="true">
                   <a:txBody>
                     <a:bodyPr/>
@@ -13771,215 +14738,9 @@
           <a:chExt cx="0" cy="0"/>
         </a:xfrm>
       </p:grpSpPr>
-      <p:sp>
-        <p:nvSpPr>
-          <p:cNvPr id="2" name=""/>
-          <p:cNvSpPr>
-            <a:spLocks noGrp="1"/>
-          </p:cNvSpPr>
-          <p:nvPr>
-            <p:ph/>
-          </p:nvPr>
-        </p:nvSpPr>
-        <p:spPr>
-          <a:xfrm>
-            <a:off x="457200" y="237744"/>
-            <a:ext cx="11155680" cy="310896"/>
-          </a:xfrm>
-          <a:solidFill>
-            <a:srgbClr val="FFFFFF">
-              <a:alpha val="0"/>
-            </a:srgbClr>
-          </a:solidFill>
-        </p:spPr>
-        <p:txBody>
-          <a:bodyPr/>
-          <a:lstStyle/>
-          <a:p>
-            <a:pPr algn="l" marL="0" marR="0">
-              <a:lnSpc>
-                <a:spcPct val="100000"/>
-              </a:lnSpc>
-              <a:spcBef>
-                <a:spcPts val="0"/>
-              </a:spcBef>
-              <a:spcAft>
-                <a:spcPts val="0"/>
-              </a:spcAft>
-              <a:buNone/>
-            </a:pPr>
-            <a:r>
-              <a:rPr cap="none" sz="2000" i="0" b="1" u="none" strike="noStrike">
-                <a:solidFill>
-                  <a:srgbClr val="111111">
-                    <a:alpha val="100000"/>
-                  </a:srgbClr>
-                </a:solidFill>
-                <a:latin typeface="Malgun Gothic"/>
-                <a:cs typeface="Malgun Gothic"/>
-                <a:ea typeface="Malgun Gothic"/>
-                <a:sym typeface="Malgun Gothic"/>
-              </a:rPr>
-              <a:t>[DM] Data Review Board Auto Report</a:t>
-            </a:r>
-          </a:p>
-        </p:txBody>
-      </p:sp>
-      <p:sp>
-        <p:nvSpPr>
-          <p:cNvPr id="3" name=""/>
-          <p:cNvSpPr>
-            <a:spLocks noGrp="1"/>
-          </p:cNvSpPr>
-          <p:nvPr>
-            <p:ph/>
-          </p:nvPr>
-        </p:nvSpPr>
-        <p:spPr>
-          <a:xfrm>
-            <a:off x="457200" y="676656"/>
-            <a:ext cx="11155680" cy="640080"/>
-          </a:xfrm>
-          <a:solidFill>
-            <a:srgbClr val="FFFFFF">
-              <a:alpha val="0"/>
-            </a:srgbClr>
-          </a:solidFill>
-        </p:spPr>
-        <p:txBody>
-          <a:bodyPr/>
-          <a:lstStyle/>
-          <a:p>
-            <a:pPr algn="l" marL="0" marR="0">
-              <a:lnSpc>
-                <a:spcPct val="100000"/>
-              </a:lnSpc>
-              <a:spcBef>
-                <a:spcPts val="0"/>
-              </a:spcBef>
-              <a:spcAft>
-                <a:spcPts val="0"/>
-              </a:spcAft>
-              <a:buNone/>
-            </a:pPr>
-            <a:r>
-              <a:rPr cap="none" sz="1100" i="0" b="1" u="none" strike="noStrike">
-                <a:solidFill>
-                  <a:srgbClr val="333333">
-                    <a:alpha val="100000"/>
-                  </a:srgbClr>
-                </a:solidFill>
-                <a:latin typeface="Malgun Gothic"/>
-                <a:cs typeface="Malgun Gothic"/>
-                <a:ea typeface="Malgun Gothic"/>
-                <a:sym typeface="Malgun Gothic"/>
-              </a:rPr>
-              <a:t>■</a:t>
-            </a:r>
-            <a:r>
-              <a:rPr cap="none" sz="1100" i="0" b="0" u="none" strike="noStrike">
-                <a:solidFill>
-                  <a:srgbClr val="333333">
-                    <a:alpha val="100000"/>
-                  </a:srgbClr>
-                </a:solidFill>
-                <a:latin typeface="Malgun Gothic"/>
-                <a:cs typeface="Malgun Gothic"/>
-                <a:ea typeface="Malgun Gothic"/>
-                <a:sym typeface="Malgun Gothic"/>
-              </a:rPr>
-              <a:t> GOOBAE: WL trend by REF/TARGET</a:t>
-            </a:r>
-          </a:p>
-          <a:p>
-            <a:pPr algn="l" marL="0" marR="0">
-              <a:lnSpc>
-                <a:spcPct val="100000"/>
-              </a:lnSpc>
-              <a:spcBef>
-                <a:spcPts val="0"/>
-              </a:spcBef>
-              <a:spcAft>
-                <a:spcPts val="0"/>
-              </a:spcAft>
-              <a:buNone/>
-            </a:pPr>
-            <a:r>
-              <a:rPr cap="none" sz="1100" i="0" b="1" u="none" strike="noStrike">
-                <a:solidFill>
-                  <a:srgbClr val="333333">
-                    <a:alpha val="100000"/>
-                  </a:srgbClr>
-                </a:solidFill>
-                <a:latin typeface="Malgun Gothic"/>
-                <a:cs typeface="Malgun Gothic"/>
-                <a:ea typeface="Malgun Gothic"/>
-                <a:sym typeface="Malgun Gothic"/>
-              </a:rPr>
-              <a:t>■</a:t>
-            </a:r>
-            <a:r>
-              <a:rPr cap="none" sz="1100" i="0" b="0" u="none" strike="noStrike">
-                <a:solidFill>
-                  <a:srgbClr val="333333">
-                    <a:alpha val="100000"/>
-                  </a:srgbClr>
-                </a:solidFill>
-                <a:latin typeface="Malgun Gothic"/>
-                <a:cs typeface="Malgun Gothic"/>
-                <a:ea typeface="Malgun Gothic"/>
-                <a:sym typeface="Malgun Gothic"/>
-              </a:rPr>
-              <a:t> REF: A / TARGET: B</a:t>
-            </a:r>
-          </a:p>
-          <a:p>
-            <a:pPr algn="l" marL="0" marR="0">
-              <a:lnSpc>
-                <a:spcPct val="100000"/>
-              </a:lnSpc>
-              <a:spcBef>
-                <a:spcPts val="0"/>
-              </a:spcBef>
-              <a:spcAft>
-                <a:spcPts val="0"/>
-              </a:spcAft>
-              <a:buNone/>
-            </a:pPr>
-            <a:r>
-              <a:rPr cap="none" sz="1100" i="0" b="1" u="none" strike="noStrike">
-                <a:solidFill>
-                  <a:srgbClr val="333333">
-                    <a:alpha val="100000"/>
-                  </a:srgbClr>
-                </a:solidFill>
-                <a:latin typeface="Malgun Gothic"/>
-                <a:cs typeface="Malgun Gothic"/>
-                <a:ea typeface="Malgun Gothic"/>
-                <a:sym typeface="Malgun Gothic"/>
-              </a:rPr>
-              <a:t>■</a:t>
-            </a:r>
-            <a:r>
-              <a:rPr cap="none" sz="1100" i="0" b="0" u="none" strike="noStrike">
-                <a:solidFill>
-                  <a:srgbClr val="333333">
-                    <a:alpha val="100000"/>
-                  </a:srgbClr>
-                </a:solidFill>
-                <a:latin typeface="Malgun Gothic"/>
-                <a:cs typeface="Malgun Gothic"/>
-                <a:ea typeface="Malgun Gothic"/>
-                <a:sym typeface="Malgun Gothic"/>
-              </a:rPr>
-              <a:t> Showing GOOBAE 1-3 of 3</a:t>
-            </a:r>
-          </a:p>
-        </p:txBody>
-      </p:sp>
       <p:graphicFrame>
         <p:nvGraphicFramePr>
-          <p:cNvPr id="4" name=""/>
+          <p:cNvPr id="2" name=""/>
           <p:cNvGraphicFramePr>
             <a:graphicFrameLocks noGrp="true"/>
           </p:cNvGraphicFramePr>
@@ -16647,7 +17408,7 @@
       </p:graphicFrame>
       <p:pic>
         <p:nvPicPr>
-          <p:cNvPr id="5" name="" descr=""/>
+          <p:cNvPr id="3" name="" descr=""/>
           <p:cNvPicPr>
             <a:picLocks noGrp="1"/>
           </p:cNvPicPr>
@@ -16673,7 +17434,7 @@
       </p:pic>
       <p:pic>
         <p:nvPicPr>
-          <p:cNvPr id="6" name="" descr=""/>
+          <p:cNvPr id="4" name="" descr=""/>
           <p:cNvPicPr>
             <a:picLocks noGrp="1"/>
           </p:cNvPicPr>
@@ -16699,7 +17460,7 @@
       </p:pic>
       <p:pic>
         <p:nvPicPr>
-          <p:cNvPr id="7" name="" descr=""/>
+          <p:cNvPr id="5" name="" descr=""/>
           <p:cNvPicPr>
             <a:picLocks noGrp="1"/>
           </p:cNvPicPr>
@@ -16725,7 +17486,7 @@
       </p:pic>
       <p:pic>
         <p:nvPicPr>
-          <p:cNvPr id="8" name="" descr=""/>
+          <p:cNvPr id="6" name="" descr=""/>
           <p:cNvPicPr>
             <a:picLocks noGrp="1"/>
           </p:cNvPicPr>
@@ -16751,7 +17512,7 @@
       </p:pic>
       <p:sp>
         <p:nvSpPr>
-          <p:cNvPr id="9" name=""/>
+          <p:cNvPr id="7" name=""/>
           <p:cNvSpPr>
             <a:spLocks noGrp="1"/>
           </p:cNvSpPr>
@@ -16831,6 +17592,214 @@
           </a:p>
         </p:txBody>
       </p:sp>
+      <p:sp>
+        <p:nvSpPr>
+          <p:cNvPr id="8" name="DRB_Title_Placeholder"/>
+          <p:cNvSpPr>
+            <a:spLocks noGrp="1"/>
+          </p:cNvSpPr>
+          <p:nvPr>
+            <p:ph type="title" hasCustomPrompt="1"/>
+          </p:nvPr>
+        </p:nvSpPr>
+        <p:spPr>
+          <a:xfrm>
+            <a:off x="270000" y="342000"/>
+            <a:ext cx="10302000" cy="486000"/>
+          </a:xfrm>
+        </p:spPr>
+        <p:txBody>
+          <a:bodyPr/>
+          <a:lstStyle/>
+          <a:p>
+            <a:pPr algn="l" marL="0" marR="0">
+              <a:lnSpc>
+                <a:spcPct val="100000"/>
+              </a:lnSpc>
+              <a:spcBef>
+                <a:spcPts val="0"/>
+              </a:spcBef>
+              <a:spcAft>
+                <a:spcPts val="0"/>
+              </a:spcAft>
+              <a:buNone/>
+            </a:pPr>
+            <a:r>
+              <a:rPr cap="none" sz="2800" i="0" b="1" u="none" strike="noStrike">
+                <a:solidFill>
+                  <a:srgbClr val="111111">
+                    <a:alpha val="100000"/>
+                  </a:srgbClr>
+                </a:solidFill>
+                <a:latin typeface="Malgun Gothic"/>
+                <a:cs typeface="Malgun Gothic"/>
+                <a:ea typeface="Malgun Gothic"/>
+                <a:sym typeface="Malgun Gothic"/>
+              </a:rPr>
+              <a:t>[DM] Data Review Board Auto Report</a:t>
+            </a:r>
+          </a:p>
+        </p:txBody>
+      </p:sp>
+      <p:sp>
+        <p:nvSpPr>
+          <p:cNvPr id="9" name="DRB_Body_Placeholder"/>
+          <p:cNvSpPr>
+            <a:spLocks noGrp="1"/>
+          </p:cNvSpPr>
+          <p:nvPr>
+            <p:ph idx="13" hasCustomPrompt="1"/>
+          </p:nvPr>
+        </p:nvSpPr>
+        <p:spPr>
+          <a:xfrm>
+            <a:off x="270000" y="943200"/>
+            <a:ext cx="11520000" cy="583200"/>
+          </a:xfrm>
+        </p:spPr>
+        <p:txBody>
+          <a:bodyPr/>
+          <a:lstStyle/>
+          <a:p>
+            <a:pPr algn="l" marL="0" marR="0">
+              <a:lnSpc>
+                <a:spcPct val="100000"/>
+              </a:lnSpc>
+              <a:spcBef>
+                <a:spcPts val="0"/>
+              </a:spcBef>
+              <a:spcAft>
+                <a:spcPts val="0"/>
+              </a:spcAft>
+              <a:buNone/>
+            </a:pPr>
+            <a:r>
+              <a:rPr cap="none" sz="1300" i="0" b="1" u="none" strike="noStrike">
+                <a:solidFill>
+                  <a:srgbClr val="333333">
+                    <a:alpha val="100000"/>
+                  </a:srgbClr>
+                </a:solidFill>
+                <a:latin typeface="Malgun Gothic"/>
+                <a:cs typeface="Malgun Gothic"/>
+                <a:ea typeface="Malgun Gothic"/>
+                <a:sym typeface="Malgun Gothic"/>
+              </a:rPr>
+              <a:t>■</a:t>
+            </a:r>
+            <a:r>
+              <a:rPr cap="none" sz="1300" i="0" b="1" u="none" strike="noStrike">
+                <a:solidFill>
+                  <a:srgbClr val="333333">
+                    <a:alpha val="100000"/>
+                  </a:srgbClr>
+                </a:solidFill>
+                <a:latin typeface="Malgun Gothic"/>
+                <a:cs typeface="Malgun Gothic"/>
+                <a:ea typeface="Malgun Gothic"/>
+                <a:sym typeface="Malgun Gothic"/>
+              </a:rPr>
+              <a:t> GOOBAE: WL trend | Showing 1-3 of 3</a:t>
+            </a:r>
+          </a:p>
+          <a:p>
+            <a:pPr algn="l" marL="0" marR="0">
+              <a:lnSpc>
+                <a:spcPct val="100000"/>
+              </a:lnSpc>
+              <a:spcBef>
+                <a:spcPts val="0"/>
+              </a:spcBef>
+              <a:spcAft>
+                <a:spcPts val="0"/>
+              </a:spcAft>
+              <a:buNone/>
+            </a:pPr>
+            <a:r>
+              <a:rPr cap="none" sz="1300" i="0" b="1" u="none" strike="noStrike">
+                <a:solidFill>
+                  <a:srgbClr val="333333">
+                    <a:alpha val="100000"/>
+                  </a:srgbClr>
+                </a:solidFill>
+                <a:latin typeface="Malgun Gothic"/>
+                <a:cs typeface="Malgun Gothic"/>
+                <a:ea typeface="Malgun Gothic"/>
+                <a:sym typeface="Malgun Gothic"/>
+              </a:rPr>
+              <a:t>■</a:t>
+            </a:r>
+            <a:r>
+              <a:rPr cap="none" sz="1300" i="0" b="1" u="none" strike="noStrike">
+                <a:solidFill>
+                  <a:srgbClr val="333333">
+                    <a:alpha val="100000"/>
+                  </a:srgbClr>
+                </a:solidFill>
+                <a:latin typeface="Malgun Gothic"/>
+                <a:cs typeface="Malgun Gothic"/>
+                <a:ea typeface="Malgun Gothic"/>
+                <a:sym typeface="Malgun Gothic"/>
+              </a:rPr>
+              <a:t> REF: A / TARGET: B | Threshold: 0.5</a:t>
+            </a:r>
+          </a:p>
+        </p:txBody>
+      </p:sp>
+      <p:sp>
+        <p:nvSpPr>
+          <p:cNvPr id="10" name=""/>
+          <p:cNvSpPr>
+            <a:spLocks noGrp="1"/>
+          </p:cNvSpPr>
+          <p:nvPr>
+            <p:ph/>
+          </p:nvPr>
+        </p:nvSpPr>
+        <p:spPr>
+          <a:xfrm>
+            <a:off x="8268012" y="6451200"/>
+            <a:ext cx="2520000" cy="237600"/>
+          </a:xfrm>
+          <a:solidFill>
+            <a:srgbClr val="FFFFFF">
+              <a:alpha val="0"/>
+            </a:srgbClr>
+          </a:solidFill>
+        </p:spPr>
+        <p:txBody>
+          <a:bodyPr/>
+          <a:lstStyle/>
+          <a:p>
+            <a:pPr algn="r" marL="0" marR="0">
+              <a:lnSpc>
+                <a:spcPct val="100000"/>
+              </a:lnSpc>
+              <a:spcBef>
+                <a:spcPts val="0"/>
+              </a:spcBef>
+              <a:spcAft>
+                <a:spcPts val="0"/>
+              </a:spcAft>
+              <a:buNone/>
+            </a:pPr>
+            <a:r>
+              <a:rPr cap="none" sz="1200" i="0" b="0" u="none" strike="noStrike">
+                <a:solidFill>
+                  <a:srgbClr val="7F7F7F">
+                    <a:alpha val="100000"/>
+                  </a:srgbClr>
+                </a:solidFill>
+                <a:latin typeface="Malgun Gothic"/>
+                <a:cs typeface="Malgun Gothic"/>
+                <a:ea typeface="Malgun Gothic"/>
+                <a:sym typeface="Malgun Gothic"/>
+              </a:rPr>
+              <a:t>Flash PE / 홍길동</a:t>
+            </a:r>
+          </a:p>
+        </p:txBody>
+      </p:sp>
     </p:spTree>
   </p:cSld>
   <p:clrMapOvr>
@@ -16856,215 +17825,9 @@
           <a:chExt cx="0" cy="0"/>
         </a:xfrm>
       </p:grpSpPr>
-      <p:sp>
-        <p:nvSpPr>
-          <p:cNvPr id="2" name=""/>
-          <p:cNvSpPr>
-            <a:spLocks noGrp="1"/>
-          </p:cNvSpPr>
-          <p:nvPr>
-            <p:ph/>
-          </p:nvPr>
-        </p:nvSpPr>
-        <p:spPr>
-          <a:xfrm>
-            <a:off x="457200" y="237744"/>
-            <a:ext cx="11155680" cy="310896"/>
-          </a:xfrm>
-          <a:solidFill>
-            <a:srgbClr val="FFFFFF">
-              <a:alpha val="0"/>
-            </a:srgbClr>
-          </a:solidFill>
-        </p:spPr>
-        <p:txBody>
-          <a:bodyPr/>
-          <a:lstStyle/>
-          <a:p>
-            <a:pPr algn="l" marL="0" marR="0">
-              <a:lnSpc>
-                <a:spcPct val="100000"/>
-              </a:lnSpc>
-              <a:spcBef>
-                <a:spcPts val="0"/>
-              </a:spcBef>
-              <a:spcAft>
-                <a:spcPts val="0"/>
-              </a:spcAft>
-              <a:buNone/>
-            </a:pPr>
-            <a:r>
-              <a:rPr cap="none" sz="2000" i="0" b="1" u="none" strike="noStrike">
-                <a:solidFill>
-                  <a:srgbClr val="111111">
-                    <a:alpha val="100000"/>
-                  </a:srgbClr>
-                </a:solidFill>
-                <a:latin typeface="Malgun Gothic"/>
-                <a:cs typeface="Malgun Gothic"/>
-                <a:ea typeface="Malgun Gothic"/>
-                <a:sym typeface="Malgun Gothic"/>
-              </a:rPr>
-              <a:t>[DM] Data Review Board Auto Report</a:t>
-            </a:r>
-          </a:p>
-        </p:txBody>
-      </p:sp>
-      <p:sp>
-        <p:nvSpPr>
-          <p:cNvPr id="3" name=""/>
-          <p:cNvSpPr>
-            <a:spLocks noGrp="1"/>
-          </p:cNvSpPr>
-          <p:nvPr>
-            <p:ph/>
-          </p:nvPr>
-        </p:nvSpPr>
-        <p:spPr>
-          <a:xfrm>
-            <a:off x="457200" y="676656"/>
-            <a:ext cx="11155680" cy="640080"/>
-          </a:xfrm>
-          <a:solidFill>
-            <a:srgbClr val="FFFFFF">
-              <a:alpha val="0"/>
-            </a:srgbClr>
-          </a:solidFill>
-        </p:spPr>
-        <p:txBody>
-          <a:bodyPr/>
-          <a:lstStyle/>
-          <a:p>
-            <a:pPr algn="l" marL="0" marR="0">
-              <a:lnSpc>
-                <a:spcPct val="100000"/>
-              </a:lnSpc>
-              <a:spcBef>
-                <a:spcPts val="0"/>
-              </a:spcBef>
-              <a:spcAft>
-                <a:spcPts val="0"/>
-              </a:spcAft>
-              <a:buNone/>
-            </a:pPr>
-            <a:r>
-              <a:rPr cap="none" sz="1100" i="0" b="1" u="none" strike="noStrike">
-                <a:solidFill>
-                  <a:srgbClr val="333333">
-                    <a:alpha val="100000"/>
-                  </a:srgbClr>
-                </a:solidFill>
-                <a:latin typeface="Malgun Gothic"/>
-                <a:cs typeface="Malgun Gothic"/>
-                <a:ea typeface="Malgun Gothic"/>
-                <a:sym typeface="Malgun Gothic"/>
-              </a:rPr>
-              <a:t>■</a:t>
-            </a:r>
-            <a:r>
-              <a:rPr cap="none" sz="1100" i="0" b="0" u="none" strike="noStrike">
-                <a:solidFill>
-                  <a:srgbClr val="333333">
-                    <a:alpha val="100000"/>
-                  </a:srgbClr>
-                </a:solidFill>
-                <a:latin typeface="Malgun Gothic"/>
-                <a:cs typeface="Malgun Gothic"/>
-                <a:ea typeface="Malgun Gothic"/>
-                <a:sym typeface="Malgun Gothic"/>
-              </a:rPr>
-              <a:t> Category: Category2: PB</a:t>
-            </a:r>
-          </a:p>
-          <a:p>
-            <a:pPr algn="l" marL="0" marR="0">
-              <a:lnSpc>
-                <a:spcPct val="100000"/>
-              </a:lnSpc>
-              <a:spcBef>
-                <a:spcPts val="0"/>
-              </a:spcBef>
-              <a:spcAft>
-                <a:spcPts val="0"/>
-              </a:spcAft>
-              <a:buNone/>
-            </a:pPr>
-            <a:r>
-              <a:rPr cap="none" sz="1100" i="0" b="1" u="none" strike="noStrike">
-                <a:solidFill>
-                  <a:srgbClr val="333333">
-                    <a:alpha val="100000"/>
-                  </a:srgbClr>
-                </a:solidFill>
-                <a:latin typeface="Malgun Gothic"/>
-                <a:cs typeface="Malgun Gothic"/>
-                <a:ea typeface="Malgun Gothic"/>
-                <a:sym typeface="Malgun Gothic"/>
-              </a:rPr>
-              <a:t>■</a:t>
-            </a:r>
-            <a:r>
-              <a:rPr cap="none" sz="1100" i="0" b="0" u="none" strike="noStrike">
-                <a:solidFill>
-                  <a:srgbClr val="333333">
-                    <a:alpha val="100000"/>
-                  </a:srgbClr>
-                </a:solidFill>
-                <a:latin typeface="Malgun Gothic"/>
-                <a:cs typeface="Malgun Gothic"/>
-                <a:ea typeface="Malgun Gothic"/>
-                <a:sym typeface="Malgun Gothic"/>
-              </a:rPr>
-              <a:t> REF: A / TARGET: B</a:t>
-            </a:r>
-          </a:p>
-          <a:p>
-            <a:pPr algn="l" marL="0" marR="0">
-              <a:lnSpc>
-                <a:spcPct val="100000"/>
-              </a:lnSpc>
-              <a:spcBef>
-                <a:spcPts val="0"/>
-              </a:spcBef>
-              <a:spcAft>
-                <a:spcPts val="0"/>
-              </a:spcAft>
-              <a:buNone/>
-            </a:pPr>
-            <a:r>
-              <a:rPr cap="none" sz="1100" i="0" b="1" u="none" strike="noStrike">
-                <a:solidFill>
-                  <a:srgbClr val="333333">
-                    <a:alpha val="100000"/>
-                  </a:srgbClr>
-                </a:solidFill>
-                <a:latin typeface="Malgun Gothic"/>
-                <a:cs typeface="Malgun Gothic"/>
-                <a:ea typeface="Malgun Gothic"/>
-                <a:sym typeface="Malgun Gothic"/>
-              </a:rPr>
-              <a:t>■</a:t>
-            </a:r>
-            <a:r>
-              <a:rPr cap="none" sz="1100" i="0" b="0" u="none" strike="noStrike">
-                <a:solidFill>
-                  <a:srgbClr val="333333">
-                    <a:alpha val="100000"/>
-                  </a:srgbClr>
-                </a:solidFill>
-                <a:latin typeface="Malgun Gothic"/>
-                <a:cs typeface="Malgun Gothic"/>
-                <a:ea typeface="Malgun Gothic"/>
-                <a:sym typeface="Malgun Gothic"/>
-              </a:rPr>
-              <a:t> Showing MSR 1-6 of 6; threshold 0.5</a:t>
-            </a:r>
-          </a:p>
-        </p:txBody>
-      </p:sp>
       <p:graphicFrame>
         <p:nvGraphicFramePr>
-          <p:cNvPr id="4" name=""/>
+          <p:cNvPr id="2" name=""/>
           <p:cNvGraphicFramePr>
             <a:graphicFrameLocks noGrp="true"/>
           </p:cNvGraphicFramePr>
@@ -18560,7 +19323,7 @@
       </p:graphicFrame>
       <p:sp>
         <p:nvSpPr>
-          <p:cNvPr id="5" name=""/>
+          <p:cNvPr id="3" name=""/>
           <p:cNvSpPr>
             <a:spLocks noGrp="1"/>
           </p:cNvSpPr>
@@ -18628,7 +19391,7 @@
       </p:sp>
       <p:pic>
         <p:nvPicPr>
-          <p:cNvPr id="6" name="" descr=""/>
+          <p:cNvPr id="4" name="" descr=""/>
           <p:cNvPicPr>
             <a:picLocks noGrp="1"/>
           </p:cNvPicPr>
@@ -18654,7 +19417,7 @@
       </p:pic>
       <p:sp>
         <p:nvSpPr>
-          <p:cNvPr id="7" name=""/>
+          <p:cNvPr id="5" name=""/>
           <p:cNvSpPr>
             <a:spLocks noGrp="1"/>
           </p:cNvSpPr>
@@ -18708,7 +19471,7 @@
       </p:sp>
       <p:sp>
         <p:nvSpPr>
-          <p:cNvPr id="8" name=""/>
+          <p:cNvPr id="6" name=""/>
           <p:cNvSpPr>
             <a:spLocks noGrp="1"/>
           </p:cNvSpPr>
@@ -18776,7 +19539,7 @@
       </p:sp>
       <p:pic>
         <p:nvPicPr>
-          <p:cNvPr id="9" name="" descr=""/>
+          <p:cNvPr id="7" name="" descr=""/>
           <p:cNvPicPr>
             <a:picLocks noGrp="1"/>
           </p:cNvPicPr>
@@ -18802,7 +19565,7 @@
       </p:pic>
       <p:sp>
         <p:nvSpPr>
-          <p:cNvPr id="10" name=""/>
+          <p:cNvPr id="8" name=""/>
           <p:cNvSpPr>
             <a:spLocks noGrp="1"/>
           </p:cNvSpPr>
@@ -18856,7 +19619,7 @@
       </p:sp>
       <p:sp>
         <p:nvSpPr>
-          <p:cNvPr id="11" name=""/>
+          <p:cNvPr id="9" name=""/>
           <p:cNvSpPr>
             <a:spLocks noGrp="1"/>
           </p:cNvSpPr>
@@ -18924,7 +19687,7 @@
       </p:sp>
       <p:pic>
         <p:nvPicPr>
-          <p:cNvPr id="12" name="" descr=""/>
+          <p:cNvPr id="10" name="" descr=""/>
           <p:cNvPicPr>
             <a:picLocks noGrp="1"/>
           </p:cNvPicPr>
@@ -18950,7 +19713,7 @@
       </p:pic>
       <p:sp>
         <p:nvSpPr>
-          <p:cNvPr id="13" name=""/>
+          <p:cNvPr id="11" name=""/>
           <p:cNvSpPr>
             <a:spLocks noGrp="1"/>
           </p:cNvSpPr>
@@ -19004,7 +19767,7 @@
       </p:sp>
       <p:sp>
         <p:nvSpPr>
-          <p:cNvPr id="14" name=""/>
+          <p:cNvPr id="12" name=""/>
           <p:cNvSpPr>
             <a:spLocks noGrp="1"/>
           </p:cNvSpPr>
@@ -19072,7 +19835,7 @@
       </p:sp>
       <p:pic>
         <p:nvPicPr>
-          <p:cNvPr id="15" name="" descr=""/>
+          <p:cNvPr id="13" name="" descr=""/>
           <p:cNvPicPr>
             <a:picLocks noGrp="1"/>
           </p:cNvPicPr>
@@ -19098,7 +19861,7 @@
       </p:pic>
       <p:sp>
         <p:nvSpPr>
-          <p:cNvPr id="16" name=""/>
+          <p:cNvPr id="14" name=""/>
           <p:cNvSpPr>
             <a:spLocks noGrp="1"/>
           </p:cNvSpPr>
@@ -19152,7 +19915,7 @@
       </p:sp>
       <p:sp>
         <p:nvSpPr>
-          <p:cNvPr id="17" name=""/>
+          <p:cNvPr id="15" name=""/>
           <p:cNvSpPr>
             <a:spLocks noGrp="1"/>
           </p:cNvSpPr>
@@ -19220,7 +19983,7 @@
       </p:sp>
       <p:pic>
         <p:nvPicPr>
-          <p:cNvPr id="18" name="" descr=""/>
+          <p:cNvPr id="16" name="" descr=""/>
           <p:cNvPicPr>
             <a:picLocks noGrp="1"/>
           </p:cNvPicPr>
@@ -19246,7 +20009,7 @@
       </p:pic>
       <p:sp>
         <p:nvSpPr>
-          <p:cNvPr id="19" name=""/>
+          <p:cNvPr id="17" name=""/>
           <p:cNvSpPr>
             <a:spLocks noGrp="1"/>
           </p:cNvSpPr>
@@ -19300,7 +20063,7 @@
       </p:sp>
       <p:sp>
         <p:nvSpPr>
-          <p:cNvPr id="20" name=""/>
+          <p:cNvPr id="18" name=""/>
           <p:cNvSpPr>
             <a:spLocks noGrp="1"/>
           </p:cNvSpPr>
@@ -19368,7 +20131,7 @@
       </p:sp>
       <p:pic>
         <p:nvPicPr>
-          <p:cNvPr id="21" name="" descr=""/>
+          <p:cNvPr id="19" name="" descr=""/>
           <p:cNvPicPr>
             <a:picLocks noGrp="1"/>
           </p:cNvPicPr>
@@ -19394,7 +20157,7 @@
       </p:pic>
       <p:sp>
         <p:nvSpPr>
-          <p:cNvPr id="22" name=""/>
+          <p:cNvPr id="20" name=""/>
           <p:cNvSpPr>
             <a:spLocks noGrp="1"/>
           </p:cNvSpPr>
@@ -19448,7 +20211,7 @@
       </p:sp>
       <p:sp>
         <p:nvSpPr>
-          <p:cNvPr id="23" name=""/>
+          <p:cNvPr id="21" name=""/>
           <p:cNvSpPr>
             <a:spLocks noGrp="1"/>
           </p:cNvSpPr>
@@ -19528,6 +20291,214 @@
           </a:p>
         </p:txBody>
       </p:sp>
+      <p:sp>
+        <p:nvSpPr>
+          <p:cNvPr id="22" name="DRB_Title_Placeholder"/>
+          <p:cNvSpPr>
+            <a:spLocks noGrp="1"/>
+          </p:cNvSpPr>
+          <p:nvPr>
+            <p:ph type="title" hasCustomPrompt="1"/>
+          </p:nvPr>
+        </p:nvSpPr>
+        <p:spPr>
+          <a:xfrm>
+            <a:off x="270000" y="342000"/>
+            <a:ext cx="10302000" cy="486000"/>
+          </a:xfrm>
+        </p:spPr>
+        <p:txBody>
+          <a:bodyPr/>
+          <a:lstStyle/>
+          <a:p>
+            <a:pPr algn="l" marL="0" marR="0">
+              <a:lnSpc>
+                <a:spcPct val="100000"/>
+              </a:lnSpc>
+              <a:spcBef>
+                <a:spcPts val="0"/>
+              </a:spcBef>
+              <a:spcAft>
+                <a:spcPts val="0"/>
+              </a:spcAft>
+              <a:buNone/>
+            </a:pPr>
+            <a:r>
+              <a:rPr cap="none" sz="2800" i="0" b="1" u="none" strike="noStrike">
+                <a:solidFill>
+                  <a:srgbClr val="111111">
+                    <a:alpha val="100000"/>
+                  </a:srgbClr>
+                </a:solidFill>
+                <a:latin typeface="Malgun Gothic"/>
+                <a:cs typeface="Malgun Gothic"/>
+                <a:ea typeface="Malgun Gothic"/>
+                <a:sym typeface="Malgun Gothic"/>
+              </a:rPr>
+              <a:t>[DM] Data Review Board Auto Report</a:t>
+            </a:r>
+          </a:p>
+        </p:txBody>
+      </p:sp>
+      <p:sp>
+        <p:nvSpPr>
+          <p:cNvPr id="23" name="DRB_Body_Placeholder"/>
+          <p:cNvSpPr>
+            <a:spLocks noGrp="1"/>
+          </p:cNvSpPr>
+          <p:nvPr>
+            <p:ph idx="13" hasCustomPrompt="1"/>
+          </p:nvPr>
+        </p:nvSpPr>
+        <p:spPr>
+          <a:xfrm>
+            <a:off x="270000" y="943200"/>
+            <a:ext cx="11520000" cy="583200"/>
+          </a:xfrm>
+        </p:spPr>
+        <p:txBody>
+          <a:bodyPr/>
+          <a:lstStyle/>
+          <a:p>
+            <a:pPr algn="l" marL="0" marR="0">
+              <a:lnSpc>
+                <a:spcPct val="100000"/>
+              </a:lnSpc>
+              <a:spcBef>
+                <a:spcPts val="0"/>
+              </a:spcBef>
+              <a:spcAft>
+                <a:spcPts val="0"/>
+              </a:spcAft>
+              <a:buNone/>
+            </a:pPr>
+            <a:r>
+              <a:rPr cap="none" sz="1300" i="0" b="1" u="none" strike="noStrike">
+                <a:solidFill>
+                  <a:srgbClr val="333333">
+                    <a:alpha val="100000"/>
+                  </a:srgbClr>
+                </a:solidFill>
+                <a:latin typeface="Malgun Gothic"/>
+                <a:cs typeface="Malgun Gothic"/>
+                <a:ea typeface="Malgun Gothic"/>
+                <a:sym typeface="Malgun Gothic"/>
+              </a:rPr>
+              <a:t>■</a:t>
+            </a:r>
+            <a:r>
+              <a:rPr cap="none" sz="1300" i="0" b="1" u="none" strike="noStrike">
+                <a:solidFill>
+                  <a:srgbClr val="333333">
+                    <a:alpha val="100000"/>
+                  </a:srgbClr>
+                </a:solidFill>
+                <a:latin typeface="Malgun Gothic"/>
+                <a:cs typeface="Malgun Gothic"/>
+                <a:ea typeface="Malgun Gothic"/>
+                <a:sym typeface="Malgun Gothic"/>
+              </a:rPr>
+              <a:t> Category: Category2: PB | Showing MSR 1-6 of 6</a:t>
+            </a:r>
+          </a:p>
+          <a:p>
+            <a:pPr algn="l" marL="0" marR="0">
+              <a:lnSpc>
+                <a:spcPct val="100000"/>
+              </a:lnSpc>
+              <a:spcBef>
+                <a:spcPts val="0"/>
+              </a:spcBef>
+              <a:spcAft>
+                <a:spcPts val="0"/>
+              </a:spcAft>
+              <a:buNone/>
+            </a:pPr>
+            <a:r>
+              <a:rPr cap="none" sz="1300" i="0" b="1" u="none" strike="noStrike">
+                <a:solidFill>
+                  <a:srgbClr val="333333">
+                    <a:alpha val="100000"/>
+                  </a:srgbClr>
+                </a:solidFill>
+                <a:latin typeface="Malgun Gothic"/>
+                <a:cs typeface="Malgun Gothic"/>
+                <a:ea typeface="Malgun Gothic"/>
+                <a:sym typeface="Malgun Gothic"/>
+              </a:rPr>
+              <a:t>■</a:t>
+            </a:r>
+            <a:r>
+              <a:rPr cap="none" sz="1300" i="0" b="1" u="none" strike="noStrike">
+                <a:solidFill>
+                  <a:srgbClr val="333333">
+                    <a:alpha val="100000"/>
+                  </a:srgbClr>
+                </a:solidFill>
+                <a:latin typeface="Malgun Gothic"/>
+                <a:cs typeface="Malgun Gothic"/>
+                <a:ea typeface="Malgun Gothic"/>
+                <a:sym typeface="Malgun Gothic"/>
+              </a:rPr>
+              <a:t> REF: A / TARGET: B | Threshold: 0.5</a:t>
+            </a:r>
+          </a:p>
+        </p:txBody>
+      </p:sp>
+      <p:sp>
+        <p:nvSpPr>
+          <p:cNvPr id="24" name=""/>
+          <p:cNvSpPr>
+            <a:spLocks noGrp="1"/>
+          </p:cNvSpPr>
+          <p:nvPr>
+            <p:ph/>
+          </p:nvPr>
+        </p:nvSpPr>
+        <p:spPr>
+          <a:xfrm>
+            <a:off x="8268012" y="6451200"/>
+            <a:ext cx="2520000" cy="237600"/>
+          </a:xfrm>
+          <a:solidFill>
+            <a:srgbClr val="FFFFFF">
+              <a:alpha val="0"/>
+            </a:srgbClr>
+          </a:solidFill>
+        </p:spPr>
+        <p:txBody>
+          <a:bodyPr/>
+          <a:lstStyle/>
+          <a:p>
+            <a:pPr algn="r" marL="0" marR="0">
+              <a:lnSpc>
+                <a:spcPct val="100000"/>
+              </a:lnSpc>
+              <a:spcBef>
+                <a:spcPts val="0"/>
+              </a:spcBef>
+              <a:spcAft>
+                <a:spcPts val="0"/>
+              </a:spcAft>
+              <a:buNone/>
+            </a:pPr>
+            <a:r>
+              <a:rPr cap="none" sz="1200" i="0" b="0" u="none" strike="noStrike">
+                <a:solidFill>
+                  <a:srgbClr val="7F7F7F">
+                    <a:alpha val="100000"/>
+                  </a:srgbClr>
+                </a:solidFill>
+                <a:latin typeface="Malgun Gothic"/>
+                <a:cs typeface="Malgun Gothic"/>
+                <a:ea typeface="Malgun Gothic"/>
+                <a:sym typeface="Malgun Gothic"/>
+              </a:rPr>
+              <a:t>Flash PE / 홍길동</a:t>
+            </a:r>
+          </a:p>
+        </p:txBody>
+      </p:sp>
     </p:spTree>
   </p:cSld>
   <p:clrMapOvr>
@@ -19553,215 +20524,9 @@
           <a:chExt cx="0" cy="0"/>
         </a:xfrm>
       </p:grpSpPr>
-      <p:sp>
-        <p:nvSpPr>
-          <p:cNvPr id="2" name=""/>
-          <p:cNvSpPr>
-            <a:spLocks noGrp="1"/>
-          </p:cNvSpPr>
-          <p:nvPr>
-            <p:ph/>
-          </p:nvPr>
-        </p:nvSpPr>
-        <p:spPr>
-          <a:xfrm>
-            <a:off x="457200" y="237744"/>
-            <a:ext cx="11155680" cy="310896"/>
-          </a:xfrm>
-          <a:solidFill>
-            <a:srgbClr val="FFFFFF">
-              <a:alpha val="0"/>
-            </a:srgbClr>
-          </a:solidFill>
-        </p:spPr>
-        <p:txBody>
-          <a:bodyPr/>
-          <a:lstStyle/>
-          <a:p>
-            <a:pPr algn="l" marL="0" marR="0">
-              <a:lnSpc>
-                <a:spcPct val="100000"/>
-              </a:lnSpc>
-              <a:spcBef>
-                <a:spcPts val="0"/>
-              </a:spcBef>
-              <a:spcAft>
-                <a:spcPts val="0"/>
-              </a:spcAft>
-              <a:buNone/>
-            </a:pPr>
-            <a:r>
-              <a:rPr cap="none" sz="2000" i="0" b="1" u="none" strike="noStrike">
-                <a:solidFill>
-                  <a:srgbClr val="111111">
-                    <a:alpha val="100000"/>
-                  </a:srgbClr>
-                </a:solidFill>
-                <a:latin typeface="Malgun Gothic"/>
-                <a:cs typeface="Malgun Gothic"/>
-                <a:ea typeface="Malgun Gothic"/>
-                <a:sym typeface="Malgun Gothic"/>
-              </a:rPr>
-              <a:t>[DM] Data Review Board Auto Report</a:t>
-            </a:r>
-          </a:p>
-        </p:txBody>
-      </p:sp>
-      <p:sp>
-        <p:nvSpPr>
-          <p:cNvPr id="3" name=""/>
-          <p:cNvSpPr>
-            <a:spLocks noGrp="1"/>
-          </p:cNvSpPr>
-          <p:nvPr>
-            <p:ph/>
-          </p:nvPr>
-        </p:nvSpPr>
-        <p:spPr>
-          <a:xfrm>
-            <a:off x="457200" y="676656"/>
-            <a:ext cx="11155680" cy="640080"/>
-          </a:xfrm>
-          <a:solidFill>
-            <a:srgbClr val="FFFFFF">
-              <a:alpha val="0"/>
-            </a:srgbClr>
-          </a:solidFill>
-        </p:spPr>
-        <p:txBody>
-          <a:bodyPr/>
-          <a:lstStyle/>
-          <a:p>
-            <a:pPr algn="l" marL="0" marR="0">
-              <a:lnSpc>
-                <a:spcPct val="100000"/>
-              </a:lnSpc>
-              <a:spcBef>
-                <a:spcPts val="0"/>
-              </a:spcBef>
-              <a:spcAft>
-                <a:spcPts val="0"/>
-              </a:spcAft>
-              <a:buNone/>
-            </a:pPr>
-            <a:r>
-              <a:rPr cap="none" sz="1100" i="0" b="1" u="none" strike="noStrike">
-                <a:solidFill>
-                  <a:srgbClr val="333333">
-                    <a:alpha val="100000"/>
-                  </a:srgbClr>
-                </a:solidFill>
-                <a:latin typeface="Malgun Gothic"/>
-                <a:cs typeface="Malgun Gothic"/>
-                <a:ea typeface="Malgun Gothic"/>
-                <a:sym typeface="Malgun Gothic"/>
-              </a:rPr>
-              <a:t>■</a:t>
-            </a:r>
-            <a:r>
-              <a:rPr cap="none" sz="1100" i="0" b="0" u="none" strike="noStrike">
-                <a:solidFill>
-                  <a:srgbClr val="333333">
-                    <a:alpha val="100000"/>
-                  </a:srgbClr>
-                </a:solidFill>
-                <a:latin typeface="Malgun Gothic"/>
-                <a:cs typeface="Malgun Gothic"/>
-                <a:ea typeface="Malgun Gothic"/>
-                <a:sym typeface="Malgun Gothic"/>
-              </a:rPr>
-              <a:t> Category: Category2: WLS</a:t>
-            </a:r>
-          </a:p>
-          <a:p>
-            <a:pPr algn="l" marL="0" marR="0">
-              <a:lnSpc>
-                <a:spcPct val="100000"/>
-              </a:lnSpc>
-              <a:spcBef>
-                <a:spcPts val="0"/>
-              </a:spcBef>
-              <a:spcAft>
-                <a:spcPts val="0"/>
-              </a:spcAft>
-              <a:buNone/>
-            </a:pPr>
-            <a:r>
-              <a:rPr cap="none" sz="1100" i="0" b="1" u="none" strike="noStrike">
-                <a:solidFill>
-                  <a:srgbClr val="333333">
-                    <a:alpha val="100000"/>
-                  </a:srgbClr>
-                </a:solidFill>
-                <a:latin typeface="Malgun Gothic"/>
-                <a:cs typeface="Malgun Gothic"/>
-                <a:ea typeface="Malgun Gothic"/>
-                <a:sym typeface="Malgun Gothic"/>
-              </a:rPr>
-              <a:t>■</a:t>
-            </a:r>
-            <a:r>
-              <a:rPr cap="none" sz="1100" i="0" b="0" u="none" strike="noStrike">
-                <a:solidFill>
-                  <a:srgbClr val="333333">
-                    <a:alpha val="100000"/>
-                  </a:srgbClr>
-                </a:solidFill>
-                <a:latin typeface="Malgun Gothic"/>
-                <a:cs typeface="Malgun Gothic"/>
-                <a:ea typeface="Malgun Gothic"/>
-                <a:sym typeface="Malgun Gothic"/>
-              </a:rPr>
-              <a:t> REF: A / TARGET: B</a:t>
-            </a:r>
-          </a:p>
-          <a:p>
-            <a:pPr algn="l" marL="0" marR="0">
-              <a:lnSpc>
-                <a:spcPct val="100000"/>
-              </a:lnSpc>
-              <a:spcBef>
-                <a:spcPts val="0"/>
-              </a:spcBef>
-              <a:spcAft>
-                <a:spcPts val="0"/>
-              </a:spcAft>
-              <a:buNone/>
-            </a:pPr>
-            <a:r>
-              <a:rPr cap="none" sz="1100" i="0" b="1" u="none" strike="noStrike">
-                <a:solidFill>
-                  <a:srgbClr val="333333">
-                    <a:alpha val="100000"/>
-                  </a:srgbClr>
-                </a:solidFill>
-                <a:latin typeface="Malgun Gothic"/>
-                <a:cs typeface="Malgun Gothic"/>
-                <a:ea typeface="Malgun Gothic"/>
-                <a:sym typeface="Malgun Gothic"/>
-              </a:rPr>
-              <a:t>■</a:t>
-            </a:r>
-            <a:r>
-              <a:rPr cap="none" sz="1100" i="0" b="0" u="none" strike="noStrike">
-                <a:solidFill>
-                  <a:srgbClr val="333333">
-                    <a:alpha val="100000"/>
-                  </a:srgbClr>
-                </a:solidFill>
-                <a:latin typeface="Malgun Gothic"/>
-                <a:cs typeface="Malgun Gothic"/>
-                <a:ea typeface="Malgun Gothic"/>
-                <a:sym typeface="Malgun Gothic"/>
-              </a:rPr>
-              <a:t> Showing MSR 1-3 of 3; threshold 0.5</a:t>
-            </a:r>
-          </a:p>
-        </p:txBody>
-      </p:sp>
       <p:graphicFrame>
         <p:nvGraphicFramePr>
-          <p:cNvPr id="4" name=""/>
+          <p:cNvPr id="2" name=""/>
           <p:cNvGraphicFramePr>
             <a:graphicFrameLocks noGrp="true"/>
           </p:cNvGraphicFramePr>
@@ -21257,7 +22022,7 @@
       </p:graphicFrame>
       <p:sp>
         <p:nvSpPr>
-          <p:cNvPr id="5" name=""/>
+          <p:cNvPr id="3" name=""/>
           <p:cNvSpPr>
             <a:spLocks noGrp="1"/>
           </p:cNvSpPr>
@@ -21325,7 +22090,7 @@
       </p:sp>
       <p:pic>
         <p:nvPicPr>
-          <p:cNvPr id="6" name="" descr=""/>
+          <p:cNvPr id="4" name="" descr=""/>
           <p:cNvPicPr>
             <a:picLocks noGrp="1"/>
           </p:cNvPicPr>
@@ -21351,7 +22116,7 @@
       </p:pic>
       <p:sp>
         <p:nvSpPr>
-          <p:cNvPr id="7" name=""/>
+          <p:cNvPr id="5" name=""/>
           <p:cNvSpPr>
             <a:spLocks noGrp="1"/>
           </p:cNvSpPr>
@@ -21405,7 +22170,7 @@
       </p:sp>
       <p:sp>
         <p:nvSpPr>
-          <p:cNvPr id="8" name=""/>
+          <p:cNvPr id="6" name=""/>
           <p:cNvSpPr>
             <a:spLocks noGrp="1"/>
           </p:cNvSpPr>
@@ -21473,7 +22238,7 @@
       </p:sp>
       <p:pic>
         <p:nvPicPr>
-          <p:cNvPr id="9" name="" descr=""/>
+          <p:cNvPr id="7" name="" descr=""/>
           <p:cNvPicPr>
             <a:picLocks noGrp="1"/>
           </p:cNvPicPr>
@@ -21499,7 +22264,7 @@
       </p:pic>
       <p:sp>
         <p:nvSpPr>
-          <p:cNvPr id="10" name=""/>
+          <p:cNvPr id="8" name=""/>
           <p:cNvSpPr>
             <a:spLocks noGrp="1"/>
           </p:cNvSpPr>
@@ -21553,7 +22318,7 @@
       </p:sp>
       <p:sp>
         <p:nvSpPr>
-          <p:cNvPr id="11" name=""/>
+          <p:cNvPr id="9" name=""/>
           <p:cNvSpPr>
             <a:spLocks noGrp="1"/>
           </p:cNvSpPr>
@@ -21621,7 +22386,7 @@
       </p:sp>
       <p:pic>
         <p:nvPicPr>
-          <p:cNvPr id="12" name="" descr=""/>
+          <p:cNvPr id="10" name="" descr=""/>
           <p:cNvPicPr>
             <a:picLocks noGrp="1"/>
           </p:cNvPicPr>
@@ -21647,7 +22412,7 @@
       </p:pic>
       <p:sp>
         <p:nvSpPr>
-          <p:cNvPr id="13" name=""/>
+          <p:cNvPr id="11" name=""/>
           <p:cNvSpPr>
             <a:spLocks noGrp="1"/>
           </p:cNvSpPr>
@@ -21701,7 +22466,7 @@
       </p:sp>
       <p:sp>
         <p:nvSpPr>
-          <p:cNvPr id="14" name=""/>
+          <p:cNvPr id="12" name=""/>
           <p:cNvSpPr>
             <a:spLocks noGrp="1"/>
           </p:cNvSpPr>
@@ -21781,6 +22546,214 @@
           </a:p>
         </p:txBody>
       </p:sp>
+      <p:sp>
+        <p:nvSpPr>
+          <p:cNvPr id="13" name="DRB_Title_Placeholder"/>
+          <p:cNvSpPr>
+            <a:spLocks noGrp="1"/>
+          </p:cNvSpPr>
+          <p:nvPr>
+            <p:ph type="title" hasCustomPrompt="1"/>
+          </p:nvPr>
+        </p:nvSpPr>
+        <p:spPr>
+          <a:xfrm>
+            <a:off x="270000" y="342000"/>
+            <a:ext cx="10302000" cy="486000"/>
+          </a:xfrm>
+        </p:spPr>
+        <p:txBody>
+          <a:bodyPr/>
+          <a:lstStyle/>
+          <a:p>
+            <a:pPr algn="l" marL="0" marR="0">
+              <a:lnSpc>
+                <a:spcPct val="100000"/>
+              </a:lnSpc>
+              <a:spcBef>
+                <a:spcPts val="0"/>
+              </a:spcBef>
+              <a:spcAft>
+                <a:spcPts val="0"/>
+              </a:spcAft>
+              <a:buNone/>
+            </a:pPr>
+            <a:r>
+              <a:rPr cap="none" sz="2800" i="0" b="1" u="none" strike="noStrike">
+                <a:solidFill>
+                  <a:srgbClr val="111111">
+                    <a:alpha val="100000"/>
+                  </a:srgbClr>
+                </a:solidFill>
+                <a:latin typeface="Malgun Gothic"/>
+                <a:cs typeface="Malgun Gothic"/>
+                <a:ea typeface="Malgun Gothic"/>
+                <a:sym typeface="Malgun Gothic"/>
+              </a:rPr>
+              <a:t>[DM] Data Review Board Auto Report</a:t>
+            </a:r>
+          </a:p>
+        </p:txBody>
+      </p:sp>
+      <p:sp>
+        <p:nvSpPr>
+          <p:cNvPr id="14" name="DRB_Body_Placeholder"/>
+          <p:cNvSpPr>
+            <a:spLocks noGrp="1"/>
+          </p:cNvSpPr>
+          <p:nvPr>
+            <p:ph idx="13" hasCustomPrompt="1"/>
+          </p:nvPr>
+        </p:nvSpPr>
+        <p:spPr>
+          <a:xfrm>
+            <a:off x="270000" y="943200"/>
+            <a:ext cx="11520000" cy="583200"/>
+          </a:xfrm>
+        </p:spPr>
+        <p:txBody>
+          <a:bodyPr/>
+          <a:lstStyle/>
+          <a:p>
+            <a:pPr algn="l" marL="0" marR="0">
+              <a:lnSpc>
+                <a:spcPct val="100000"/>
+              </a:lnSpc>
+              <a:spcBef>
+                <a:spcPts val="0"/>
+              </a:spcBef>
+              <a:spcAft>
+                <a:spcPts val="0"/>
+              </a:spcAft>
+              <a:buNone/>
+            </a:pPr>
+            <a:r>
+              <a:rPr cap="none" sz="1300" i="0" b="1" u="none" strike="noStrike">
+                <a:solidFill>
+                  <a:srgbClr val="333333">
+                    <a:alpha val="100000"/>
+                  </a:srgbClr>
+                </a:solidFill>
+                <a:latin typeface="Malgun Gothic"/>
+                <a:cs typeface="Malgun Gothic"/>
+                <a:ea typeface="Malgun Gothic"/>
+                <a:sym typeface="Malgun Gothic"/>
+              </a:rPr>
+              <a:t>■</a:t>
+            </a:r>
+            <a:r>
+              <a:rPr cap="none" sz="1300" i="0" b="1" u="none" strike="noStrike">
+                <a:solidFill>
+                  <a:srgbClr val="333333">
+                    <a:alpha val="100000"/>
+                  </a:srgbClr>
+                </a:solidFill>
+                <a:latin typeface="Malgun Gothic"/>
+                <a:cs typeface="Malgun Gothic"/>
+                <a:ea typeface="Malgun Gothic"/>
+                <a:sym typeface="Malgun Gothic"/>
+              </a:rPr>
+              <a:t> Category: Category2: WLS | Showing MSR 1-3 of 3</a:t>
+            </a:r>
+          </a:p>
+          <a:p>
+            <a:pPr algn="l" marL="0" marR="0">
+              <a:lnSpc>
+                <a:spcPct val="100000"/>
+              </a:lnSpc>
+              <a:spcBef>
+                <a:spcPts val="0"/>
+              </a:spcBef>
+              <a:spcAft>
+                <a:spcPts val="0"/>
+              </a:spcAft>
+              <a:buNone/>
+            </a:pPr>
+            <a:r>
+              <a:rPr cap="none" sz="1300" i="0" b="1" u="none" strike="noStrike">
+                <a:solidFill>
+                  <a:srgbClr val="333333">
+                    <a:alpha val="100000"/>
+                  </a:srgbClr>
+                </a:solidFill>
+                <a:latin typeface="Malgun Gothic"/>
+                <a:cs typeface="Malgun Gothic"/>
+                <a:ea typeface="Malgun Gothic"/>
+                <a:sym typeface="Malgun Gothic"/>
+              </a:rPr>
+              <a:t>■</a:t>
+            </a:r>
+            <a:r>
+              <a:rPr cap="none" sz="1300" i="0" b="1" u="none" strike="noStrike">
+                <a:solidFill>
+                  <a:srgbClr val="333333">
+                    <a:alpha val="100000"/>
+                  </a:srgbClr>
+                </a:solidFill>
+                <a:latin typeface="Malgun Gothic"/>
+                <a:cs typeface="Malgun Gothic"/>
+                <a:ea typeface="Malgun Gothic"/>
+                <a:sym typeface="Malgun Gothic"/>
+              </a:rPr>
+              <a:t> REF: A / TARGET: B | Threshold: 0.5</a:t>
+            </a:r>
+          </a:p>
+        </p:txBody>
+      </p:sp>
+      <p:sp>
+        <p:nvSpPr>
+          <p:cNvPr id="15" name=""/>
+          <p:cNvSpPr>
+            <a:spLocks noGrp="1"/>
+          </p:cNvSpPr>
+          <p:nvPr>
+            <p:ph/>
+          </p:nvPr>
+        </p:nvSpPr>
+        <p:spPr>
+          <a:xfrm>
+            <a:off x="8268012" y="6451200"/>
+            <a:ext cx="2520000" cy="237600"/>
+          </a:xfrm>
+          <a:solidFill>
+            <a:srgbClr val="FFFFFF">
+              <a:alpha val="0"/>
+            </a:srgbClr>
+          </a:solidFill>
+        </p:spPr>
+        <p:txBody>
+          <a:bodyPr/>
+          <a:lstStyle/>
+          <a:p>
+            <a:pPr algn="r" marL="0" marR="0">
+              <a:lnSpc>
+                <a:spcPct val="100000"/>
+              </a:lnSpc>
+              <a:spcBef>
+                <a:spcPts val="0"/>
+              </a:spcBef>
+              <a:spcAft>
+                <a:spcPts val="0"/>
+              </a:spcAft>
+              <a:buNone/>
+            </a:pPr>
+            <a:r>
+              <a:rPr cap="none" sz="1200" i="0" b="0" u="none" strike="noStrike">
+                <a:solidFill>
+                  <a:srgbClr val="7F7F7F">
+                    <a:alpha val="100000"/>
+                  </a:srgbClr>
+                </a:solidFill>
+                <a:latin typeface="Malgun Gothic"/>
+                <a:cs typeface="Malgun Gothic"/>
+                <a:ea typeface="Malgun Gothic"/>
+                <a:sym typeface="Malgun Gothic"/>
+              </a:rPr>
+              <a:t>Flash PE / 홍길동</a:t>
+            </a:r>
+          </a:p>
+        </p:txBody>
+      </p:sp>
     </p:spTree>
   </p:cSld>
   <p:clrMapOvr>
@@ -21806,215 +22779,9 @@
           <a:chExt cx="0" cy="0"/>
         </a:xfrm>
       </p:grpSpPr>
-      <p:sp>
-        <p:nvSpPr>
-          <p:cNvPr id="2" name=""/>
-          <p:cNvSpPr>
-            <a:spLocks noGrp="1"/>
-          </p:cNvSpPr>
-          <p:nvPr>
-            <p:ph/>
-          </p:nvPr>
-        </p:nvSpPr>
-        <p:spPr>
-          <a:xfrm>
-            <a:off x="457200" y="237744"/>
-            <a:ext cx="11155680" cy="310896"/>
-          </a:xfrm>
-          <a:solidFill>
-            <a:srgbClr val="FFFFFF">
-              <a:alpha val="0"/>
-            </a:srgbClr>
-          </a:solidFill>
-        </p:spPr>
-        <p:txBody>
-          <a:bodyPr/>
-          <a:lstStyle/>
-          <a:p>
-            <a:pPr algn="l" marL="0" marR="0">
-              <a:lnSpc>
-                <a:spcPct val="100000"/>
-              </a:lnSpc>
-              <a:spcBef>
-                <a:spcPts val="0"/>
-              </a:spcBef>
-              <a:spcAft>
-                <a:spcPts val="0"/>
-              </a:spcAft>
-              <a:buNone/>
-            </a:pPr>
-            <a:r>
-              <a:rPr cap="none" sz="2000" i="0" b="1" u="none" strike="noStrike">
-                <a:solidFill>
-                  <a:srgbClr val="111111">
-                    <a:alpha val="100000"/>
-                  </a:srgbClr>
-                </a:solidFill>
-                <a:latin typeface="Malgun Gothic"/>
-                <a:cs typeface="Malgun Gothic"/>
-                <a:ea typeface="Malgun Gothic"/>
-                <a:sym typeface="Malgun Gothic"/>
-              </a:rPr>
-              <a:t>[DM] Data Review Board Auto Report</a:t>
-            </a:r>
-          </a:p>
-        </p:txBody>
-      </p:sp>
-      <p:sp>
-        <p:nvSpPr>
-          <p:cNvPr id="3" name=""/>
-          <p:cNvSpPr>
-            <a:spLocks noGrp="1"/>
-          </p:cNvSpPr>
-          <p:nvPr>
-            <p:ph/>
-          </p:nvPr>
-        </p:nvSpPr>
-        <p:spPr>
-          <a:xfrm>
-            <a:off x="457200" y="676656"/>
-            <a:ext cx="11155680" cy="640080"/>
-          </a:xfrm>
-          <a:solidFill>
-            <a:srgbClr val="FFFFFF">
-              <a:alpha val="0"/>
-            </a:srgbClr>
-          </a:solidFill>
-        </p:spPr>
-        <p:txBody>
-          <a:bodyPr/>
-          <a:lstStyle/>
-          <a:p>
-            <a:pPr algn="l" marL="0" marR="0">
-              <a:lnSpc>
-                <a:spcPct val="100000"/>
-              </a:lnSpc>
-              <a:spcBef>
-                <a:spcPts val="0"/>
-              </a:spcBef>
-              <a:spcAft>
-                <a:spcPts val="0"/>
-              </a:spcAft>
-              <a:buNone/>
-            </a:pPr>
-            <a:r>
-              <a:rPr cap="none" sz="1100" i="0" b="1" u="none" strike="noStrike">
-                <a:solidFill>
-                  <a:srgbClr val="333333">
-                    <a:alpha val="100000"/>
-                  </a:srgbClr>
-                </a:solidFill>
-                <a:latin typeface="Malgun Gothic"/>
-                <a:cs typeface="Malgun Gothic"/>
-                <a:ea typeface="Malgun Gothic"/>
-                <a:sym typeface="Malgun Gothic"/>
-              </a:rPr>
-              <a:t>■</a:t>
-            </a:r>
-            <a:r>
-              <a:rPr cap="none" sz="1100" i="0" b="0" u="none" strike="noStrike">
-                <a:solidFill>
-                  <a:srgbClr val="333333">
-                    <a:alpha val="100000"/>
-                  </a:srgbClr>
-                </a:solidFill>
-                <a:latin typeface="Malgun Gothic"/>
-                <a:cs typeface="Malgun Gothic"/>
-                <a:ea typeface="Malgun Gothic"/>
-                <a:sym typeface="Malgun Gothic"/>
-              </a:rPr>
-              <a:t> Category: Category2: BL</a:t>
-            </a:r>
-          </a:p>
-          <a:p>
-            <a:pPr algn="l" marL="0" marR="0">
-              <a:lnSpc>
-                <a:spcPct val="100000"/>
-              </a:lnSpc>
-              <a:spcBef>
-                <a:spcPts val="0"/>
-              </a:spcBef>
-              <a:spcAft>
-                <a:spcPts val="0"/>
-              </a:spcAft>
-              <a:buNone/>
-            </a:pPr>
-            <a:r>
-              <a:rPr cap="none" sz="1100" i="0" b="1" u="none" strike="noStrike">
-                <a:solidFill>
-                  <a:srgbClr val="333333">
-                    <a:alpha val="100000"/>
-                  </a:srgbClr>
-                </a:solidFill>
-                <a:latin typeface="Malgun Gothic"/>
-                <a:cs typeface="Malgun Gothic"/>
-                <a:ea typeface="Malgun Gothic"/>
-                <a:sym typeface="Malgun Gothic"/>
-              </a:rPr>
-              <a:t>■</a:t>
-            </a:r>
-            <a:r>
-              <a:rPr cap="none" sz="1100" i="0" b="0" u="none" strike="noStrike">
-                <a:solidFill>
-                  <a:srgbClr val="333333">
-                    <a:alpha val="100000"/>
-                  </a:srgbClr>
-                </a:solidFill>
-                <a:latin typeface="Malgun Gothic"/>
-                <a:cs typeface="Malgun Gothic"/>
-                <a:ea typeface="Malgun Gothic"/>
-                <a:sym typeface="Malgun Gothic"/>
-              </a:rPr>
-              <a:t> REF: A / TARGET: B</a:t>
-            </a:r>
-          </a:p>
-          <a:p>
-            <a:pPr algn="l" marL="0" marR="0">
-              <a:lnSpc>
-                <a:spcPct val="100000"/>
-              </a:lnSpc>
-              <a:spcBef>
-                <a:spcPts val="0"/>
-              </a:spcBef>
-              <a:spcAft>
-                <a:spcPts val="0"/>
-              </a:spcAft>
-              <a:buNone/>
-            </a:pPr>
-            <a:r>
-              <a:rPr cap="none" sz="1100" i="0" b="1" u="none" strike="noStrike">
-                <a:solidFill>
-                  <a:srgbClr val="333333">
-                    <a:alpha val="100000"/>
-                  </a:srgbClr>
-                </a:solidFill>
-                <a:latin typeface="Malgun Gothic"/>
-                <a:cs typeface="Malgun Gothic"/>
-                <a:ea typeface="Malgun Gothic"/>
-                <a:sym typeface="Malgun Gothic"/>
-              </a:rPr>
-              <a:t>■</a:t>
-            </a:r>
-            <a:r>
-              <a:rPr cap="none" sz="1100" i="0" b="0" u="none" strike="noStrike">
-                <a:solidFill>
-                  <a:srgbClr val="333333">
-                    <a:alpha val="100000"/>
-                  </a:srgbClr>
-                </a:solidFill>
-                <a:latin typeface="Malgun Gothic"/>
-                <a:cs typeface="Malgun Gothic"/>
-                <a:ea typeface="Malgun Gothic"/>
-                <a:sym typeface="Malgun Gothic"/>
-              </a:rPr>
-              <a:t> Showing MSR 1-6 of 6; threshold 0.5</a:t>
-            </a:r>
-          </a:p>
-        </p:txBody>
-      </p:sp>
       <p:graphicFrame>
         <p:nvGraphicFramePr>
-          <p:cNvPr id="4" name=""/>
+          <p:cNvPr id="2" name=""/>
           <p:cNvGraphicFramePr>
             <a:graphicFrameLocks noGrp="true"/>
           </p:cNvGraphicFramePr>
@@ -23510,7 +24277,7 @@
       </p:graphicFrame>
       <p:sp>
         <p:nvSpPr>
-          <p:cNvPr id="5" name=""/>
+          <p:cNvPr id="3" name=""/>
           <p:cNvSpPr>
             <a:spLocks noGrp="1"/>
           </p:cNvSpPr>
@@ -23578,7 +24345,7 @@
       </p:sp>
       <p:pic>
         <p:nvPicPr>
-          <p:cNvPr id="6" name="" descr=""/>
+          <p:cNvPr id="4" name="" descr=""/>
           <p:cNvPicPr>
             <a:picLocks noGrp="1"/>
           </p:cNvPicPr>
@@ -23604,7 +24371,7 @@
       </p:pic>
       <p:sp>
         <p:nvSpPr>
-          <p:cNvPr id="7" name=""/>
+          <p:cNvPr id="5" name=""/>
           <p:cNvSpPr>
             <a:spLocks noGrp="1"/>
           </p:cNvSpPr>
@@ -23658,7 +24425,7 @@
       </p:sp>
       <p:sp>
         <p:nvSpPr>
-          <p:cNvPr id="8" name=""/>
+          <p:cNvPr id="6" name=""/>
           <p:cNvSpPr>
             <a:spLocks noGrp="1"/>
           </p:cNvSpPr>
@@ -23726,7 +24493,7 @@
       </p:sp>
       <p:pic>
         <p:nvPicPr>
-          <p:cNvPr id="9" name="" descr=""/>
+          <p:cNvPr id="7" name="" descr=""/>
           <p:cNvPicPr>
             <a:picLocks noGrp="1"/>
           </p:cNvPicPr>
@@ -23752,7 +24519,7 @@
       </p:pic>
       <p:sp>
         <p:nvSpPr>
-          <p:cNvPr id="10" name=""/>
+          <p:cNvPr id="8" name=""/>
           <p:cNvSpPr>
             <a:spLocks noGrp="1"/>
           </p:cNvSpPr>
@@ -23806,7 +24573,7 @@
       </p:sp>
       <p:sp>
         <p:nvSpPr>
-          <p:cNvPr id="11" name=""/>
+          <p:cNvPr id="9" name=""/>
           <p:cNvSpPr>
             <a:spLocks noGrp="1"/>
           </p:cNvSpPr>
@@ -23874,7 +24641,7 @@
       </p:sp>
       <p:pic>
         <p:nvPicPr>
-          <p:cNvPr id="12" name="" descr=""/>
+          <p:cNvPr id="10" name="" descr=""/>
           <p:cNvPicPr>
             <a:picLocks noGrp="1"/>
           </p:cNvPicPr>
@@ -23900,7 +24667,7 @@
       </p:pic>
       <p:sp>
         <p:nvSpPr>
-          <p:cNvPr id="13" name=""/>
+          <p:cNvPr id="11" name=""/>
           <p:cNvSpPr>
             <a:spLocks noGrp="1"/>
           </p:cNvSpPr>
@@ -23954,7 +24721,7 @@
       </p:sp>
       <p:sp>
         <p:nvSpPr>
-          <p:cNvPr id="14" name=""/>
+          <p:cNvPr id="12" name=""/>
           <p:cNvSpPr>
             <a:spLocks noGrp="1"/>
           </p:cNvSpPr>
@@ -24022,7 +24789,7 @@
       </p:sp>
       <p:pic>
         <p:nvPicPr>
-          <p:cNvPr id="15" name="" descr=""/>
+          <p:cNvPr id="13" name="" descr=""/>
           <p:cNvPicPr>
             <a:picLocks noGrp="1"/>
           </p:cNvPicPr>
@@ -24048,7 +24815,7 @@
       </p:pic>
       <p:sp>
         <p:nvSpPr>
-          <p:cNvPr id="16" name=""/>
+          <p:cNvPr id="14" name=""/>
           <p:cNvSpPr>
             <a:spLocks noGrp="1"/>
           </p:cNvSpPr>
@@ -24102,7 +24869,7 @@
       </p:sp>
       <p:sp>
         <p:nvSpPr>
-          <p:cNvPr id="17" name=""/>
+          <p:cNvPr id="15" name=""/>
           <p:cNvSpPr>
             <a:spLocks noGrp="1"/>
           </p:cNvSpPr>
@@ -24170,7 +24937,7 @@
       </p:sp>
       <p:pic>
         <p:nvPicPr>
-          <p:cNvPr id="18" name="" descr=""/>
+          <p:cNvPr id="16" name="" descr=""/>
           <p:cNvPicPr>
             <a:picLocks noGrp="1"/>
           </p:cNvPicPr>
@@ -24196,7 +24963,7 @@
       </p:pic>
       <p:sp>
         <p:nvSpPr>
-          <p:cNvPr id="19" name=""/>
+          <p:cNvPr id="17" name=""/>
           <p:cNvSpPr>
             <a:spLocks noGrp="1"/>
           </p:cNvSpPr>
@@ -24250,7 +25017,7 @@
       </p:sp>
       <p:sp>
         <p:nvSpPr>
-          <p:cNvPr id="20" name=""/>
+          <p:cNvPr id="18" name=""/>
           <p:cNvSpPr>
             <a:spLocks noGrp="1"/>
           </p:cNvSpPr>
@@ -24318,7 +25085,7 @@
       </p:sp>
       <p:pic>
         <p:nvPicPr>
-          <p:cNvPr id="21" name="" descr=""/>
+          <p:cNvPr id="19" name="" descr=""/>
           <p:cNvPicPr>
             <a:picLocks noGrp="1"/>
           </p:cNvPicPr>
@@ -24344,7 +25111,7 @@
       </p:pic>
       <p:sp>
         <p:nvSpPr>
-          <p:cNvPr id="22" name=""/>
+          <p:cNvPr id="20" name=""/>
           <p:cNvSpPr>
             <a:spLocks noGrp="1"/>
           </p:cNvSpPr>
@@ -24398,7 +25165,7 @@
       </p:sp>
       <p:sp>
         <p:nvSpPr>
-          <p:cNvPr id="23" name=""/>
+          <p:cNvPr id="21" name=""/>
           <p:cNvSpPr>
             <a:spLocks noGrp="1"/>
           </p:cNvSpPr>
@@ -24478,6 +25245,214 @@
           </a:p>
         </p:txBody>
       </p:sp>
+      <p:sp>
+        <p:nvSpPr>
+          <p:cNvPr id="22" name="DRB_Title_Placeholder"/>
+          <p:cNvSpPr>
+            <a:spLocks noGrp="1"/>
+          </p:cNvSpPr>
+          <p:nvPr>
+            <p:ph type="title" hasCustomPrompt="1"/>
+          </p:nvPr>
+        </p:nvSpPr>
+        <p:spPr>
+          <a:xfrm>
+            <a:off x="270000" y="342000"/>
+            <a:ext cx="10302000" cy="486000"/>
+          </a:xfrm>
+        </p:spPr>
+        <p:txBody>
+          <a:bodyPr/>
+          <a:lstStyle/>
+          <a:p>
+            <a:pPr algn="l" marL="0" marR="0">
+              <a:lnSpc>
+                <a:spcPct val="100000"/>
+              </a:lnSpc>
+              <a:spcBef>
+                <a:spcPts val="0"/>
+              </a:spcBef>
+              <a:spcAft>
+                <a:spcPts val="0"/>
+              </a:spcAft>
+              <a:buNone/>
+            </a:pPr>
+            <a:r>
+              <a:rPr cap="none" sz="2800" i="0" b="1" u="none" strike="noStrike">
+                <a:solidFill>
+                  <a:srgbClr val="111111">
+                    <a:alpha val="100000"/>
+                  </a:srgbClr>
+                </a:solidFill>
+                <a:latin typeface="Malgun Gothic"/>
+                <a:cs typeface="Malgun Gothic"/>
+                <a:ea typeface="Malgun Gothic"/>
+                <a:sym typeface="Malgun Gothic"/>
+              </a:rPr>
+              <a:t>[DM] Data Review Board Auto Report</a:t>
+            </a:r>
+          </a:p>
+        </p:txBody>
+      </p:sp>
+      <p:sp>
+        <p:nvSpPr>
+          <p:cNvPr id="23" name="DRB_Body_Placeholder"/>
+          <p:cNvSpPr>
+            <a:spLocks noGrp="1"/>
+          </p:cNvSpPr>
+          <p:nvPr>
+            <p:ph idx="13" hasCustomPrompt="1"/>
+          </p:nvPr>
+        </p:nvSpPr>
+        <p:spPr>
+          <a:xfrm>
+            <a:off x="270000" y="943200"/>
+            <a:ext cx="11520000" cy="583200"/>
+          </a:xfrm>
+        </p:spPr>
+        <p:txBody>
+          <a:bodyPr/>
+          <a:lstStyle/>
+          <a:p>
+            <a:pPr algn="l" marL="0" marR="0">
+              <a:lnSpc>
+                <a:spcPct val="100000"/>
+              </a:lnSpc>
+              <a:spcBef>
+                <a:spcPts val="0"/>
+              </a:spcBef>
+              <a:spcAft>
+                <a:spcPts val="0"/>
+              </a:spcAft>
+              <a:buNone/>
+            </a:pPr>
+            <a:r>
+              <a:rPr cap="none" sz="1300" i="0" b="1" u="none" strike="noStrike">
+                <a:solidFill>
+                  <a:srgbClr val="333333">
+                    <a:alpha val="100000"/>
+                  </a:srgbClr>
+                </a:solidFill>
+                <a:latin typeface="Malgun Gothic"/>
+                <a:cs typeface="Malgun Gothic"/>
+                <a:ea typeface="Malgun Gothic"/>
+                <a:sym typeface="Malgun Gothic"/>
+              </a:rPr>
+              <a:t>■</a:t>
+            </a:r>
+            <a:r>
+              <a:rPr cap="none" sz="1300" i="0" b="1" u="none" strike="noStrike">
+                <a:solidFill>
+                  <a:srgbClr val="333333">
+                    <a:alpha val="100000"/>
+                  </a:srgbClr>
+                </a:solidFill>
+                <a:latin typeface="Malgun Gothic"/>
+                <a:cs typeface="Malgun Gothic"/>
+                <a:ea typeface="Malgun Gothic"/>
+                <a:sym typeface="Malgun Gothic"/>
+              </a:rPr>
+              <a:t> Category: Category2: BL | Showing MSR 1-6 of 6</a:t>
+            </a:r>
+          </a:p>
+          <a:p>
+            <a:pPr algn="l" marL="0" marR="0">
+              <a:lnSpc>
+                <a:spcPct val="100000"/>
+              </a:lnSpc>
+              <a:spcBef>
+                <a:spcPts val="0"/>
+              </a:spcBef>
+              <a:spcAft>
+                <a:spcPts val="0"/>
+              </a:spcAft>
+              <a:buNone/>
+            </a:pPr>
+            <a:r>
+              <a:rPr cap="none" sz="1300" i="0" b="1" u="none" strike="noStrike">
+                <a:solidFill>
+                  <a:srgbClr val="333333">
+                    <a:alpha val="100000"/>
+                  </a:srgbClr>
+                </a:solidFill>
+                <a:latin typeface="Malgun Gothic"/>
+                <a:cs typeface="Malgun Gothic"/>
+                <a:ea typeface="Malgun Gothic"/>
+                <a:sym typeface="Malgun Gothic"/>
+              </a:rPr>
+              <a:t>■</a:t>
+            </a:r>
+            <a:r>
+              <a:rPr cap="none" sz="1300" i="0" b="1" u="none" strike="noStrike">
+                <a:solidFill>
+                  <a:srgbClr val="333333">
+                    <a:alpha val="100000"/>
+                  </a:srgbClr>
+                </a:solidFill>
+                <a:latin typeface="Malgun Gothic"/>
+                <a:cs typeface="Malgun Gothic"/>
+                <a:ea typeface="Malgun Gothic"/>
+                <a:sym typeface="Malgun Gothic"/>
+              </a:rPr>
+              <a:t> REF: A / TARGET: B | Threshold: 0.5</a:t>
+            </a:r>
+          </a:p>
+        </p:txBody>
+      </p:sp>
+      <p:sp>
+        <p:nvSpPr>
+          <p:cNvPr id="24" name=""/>
+          <p:cNvSpPr>
+            <a:spLocks noGrp="1"/>
+          </p:cNvSpPr>
+          <p:nvPr>
+            <p:ph/>
+          </p:nvPr>
+        </p:nvSpPr>
+        <p:spPr>
+          <a:xfrm>
+            <a:off x="8268012" y="6451200"/>
+            <a:ext cx="2520000" cy="237600"/>
+          </a:xfrm>
+          <a:solidFill>
+            <a:srgbClr val="FFFFFF">
+              <a:alpha val="0"/>
+            </a:srgbClr>
+          </a:solidFill>
+        </p:spPr>
+        <p:txBody>
+          <a:bodyPr/>
+          <a:lstStyle/>
+          <a:p>
+            <a:pPr algn="r" marL="0" marR="0">
+              <a:lnSpc>
+                <a:spcPct val="100000"/>
+              </a:lnSpc>
+              <a:spcBef>
+                <a:spcPts val="0"/>
+              </a:spcBef>
+              <a:spcAft>
+                <a:spcPts val="0"/>
+              </a:spcAft>
+              <a:buNone/>
+            </a:pPr>
+            <a:r>
+              <a:rPr cap="none" sz="1200" i="0" b="0" u="none" strike="noStrike">
+                <a:solidFill>
+                  <a:srgbClr val="7F7F7F">
+                    <a:alpha val="100000"/>
+                  </a:srgbClr>
+                </a:solidFill>
+                <a:latin typeface="Malgun Gothic"/>
+                <a:cs typeface="Malgun Gothic"/>
+                <a:ea typeface="Malgun Gothic"/>
+                <a:sym typeface="Malgun Gothic"/>
+              </a:rPr>
+              <a:t>Flash PE / 홍길동</a:t>
+            </a:r>
+          </a:p>
+        </p:txBody>
+      </p:sp>
     </p:spTree>
   </p:cSld>
   <p:clrMapOvr>
@@ -24503,215 +25478,9 @@
           <a:chExt cx="0" cy="0"/>
         </a:xfrm>
       </p:grpSpPr>
-      <p:sp>
-        <p:nvSpPr>
-          <p:cNvPr id="2" name=""/>
-          <p:cNvSpPr>
-            <a:spLocks noGrp="1"/>
-          </p:cNvSpPr>
-          <p:nvPr>
-            <p:ph/>
-          </p:nvPr>
-        </p:nvSpPr>
-        <p:spPr>
-          <a:xfrm>
-            <a:off x="457200" y="237744"/>
-            <a:ext cx="11155680" cy="310896"/>
-          </a:xfrm>
-          <a:solidFill>
-            <a:srgbClr val="FFFFFF">
-              <a:alpha val="0"/>
-            </a:srgbClr>
-          </a:solidFill>
-        </p:spPr>
-        <p:txBody>
-          <a:bodyPr/>
-          <a:lstStyle/>
-          <a:p>
-            <a:pPr algn="l" marL="0" marR="0">
-              <a:lnSpc>
-                <a:spcPct val="100000"/>
-              </a:lnSpc>
-              <a:spcBef>
-                <a:spcPts val="0"/>
-              </a:spcBef>
-              <a:spcAft>
-                <a:spcPts val="0"/>
-              </a:spcAft>
-              <a:buNone/>
-            </a:pPr>
-            <a:r>
-              <a:rPr cap="none" sz="2000" i="0" b="1" u="none" strike="noStrike">
-                <a:solidFill>
-                  <a:srgbClr val="111111">
-                    <a:alpha val="100000"/>
-                  </a:srgbClr>
-                </a:solidFill>
-                <a:latin typeface="Malgun Gothic"/>
-                <a:cs typeface="Malgun Gothic"/>
-                <a:ea typeface="Malgun Gothic"/>
-                <a:sym typeface="Malgun Gothic"/>
-              </a:rPr>
-              <a:t>[DM] Data Review Board Auto Report</a:t>
-            </a:r>
-          </a:p>
-        </p:txBody>
-      </p:sp>
-      <p:sp>
-        <p:nvSpPr>
-          <p:cNvPr id="3" name=""/>
-          <p:cNvSpPr>
-            <a:spLocks noGrp="1"/>
-          </p:cNvSpPr>
-          <p:nvPr>
-            <p:ph/>
-          </p:nvPr>
-        </p:nvSpPr>
-        <p:spPr>
-          <a:xfrm>
-            <a:off x="457200" y="676656"/>
-            <a:ext cx="11155680" cy="640080"/>
-          </a:xfrm>
-          <a:solidFill>
-            <a:srgbClr val="FFFFFF">
-              <a:alpha val="0"/>
-            </a:srgbClr>
-          </a:solidFill>
-        </p:spPr>
-        <p:txBody>
-          <a:bodyPr/>
-          <a:lstStyle/>
-          <a:p>
-            <a:pPr algn="l" marL="0" marR="0">
-              <a:lnSpc>
-                <a:spcPct val="100000"/>
-              </a:lnSpc>
-              <a:spcBef>
-                <a:spcPts val="0"/>
-              </a:spcBef>
-              <a:spcAft>
-                <a:spcPts val="0"/>
-              </a:spcAft>
-              <a:buNone/>
-            </a:pPr>
-            <a:r>
-              <a:rPr cap="none" sz="1100" i="0" b="1" u="none" strike="noStrike">
-                <a:solidFill>
-                  <a:srgbClr val="333333">
-                    <a:alpha val="100000"/>
-                  </a:srgbClr>
-                </a:solidFill>
-                <a:latin typeface="Malgun Gothic"/>
-                <a:cs typeface="Malgun Gothic"/>
-                <a:ea typeface="Malgun Gothic"/>
-                <a:sym typeface="Malgun Gothic"/>
-              </a:rPr>
-              <a:t>■</a:t>
-            </a:r>
-            <a:r>
-              <a:rPr cap="none" sz="1100" i="0" b="0" u="none" strike="noStrike">
-                <a:solidFill>
-                  <a:srgbClr val="333333">
-                    <a:alpha val="100000"/>
-                  </a:srgbClr>
-                </a:solidFill>
-                <a:latin typeface="Malgun Gothic"/>
-                <a:cs typeface="Malgun Gothic"/>
-                <a:ea typeface="Malgun Gothic"/>
-                <a:sym typeface="Malgun Gothic"/>
-              </a:rPr>
-              <a:t> Category: Category2: WTC</a:t>
-            </a:r>
-          </a:p>
-          <a:p>
-            <a:pPr algn="l" marL="0" marR="0">
-              <a:lnSpc>
-                <a:spcPct val="100000"/>
-              </a:lnSpc>
-              <a:spcBef>
-                <a:spcPts val="0"/>
-              </a:spcBef>
-              <a:spcAft>
-                <a:spcPts val="0"/>
-              </a:spcAft>
-              <a:buNone/>
-            </a:pPr>
-            <a:r>
-              <a:rPr cap="none" sz="1100" i="0" b="1" u="none" strike="noStrike">
-                <a:solidFill>
-                  <a:srgbClr val="333333">
-                    <a:alpha val="100000"/>
-                  </a:srgbClr>
-                </a:solidFill>
-                <a:latin typeface="Malgun Gothic"/>
-                <a:cs typeface="Malgun Gothic"/>
-                <a:ea typeface="Malgun Gothic"/>
-                <a:sym typeface="Malgun Gothic"/>
-              </a:rPr>
-              <a:t>■</a:t>
-            </a:r>
-            <a:r>
-              <a:rPr cap="none" sz="1100" i="0" b="0" u="none" strike="noStrike">
-                <a:solidFill>
-                  <a:srgbClr val="333333">
-                    <a:alpha val="100000"/>
-                  </a:srgbClr>
-                </a:solidFill>
-                <a:latin typeface="Malgun Gothic"/>
-                <a:cs typeface="Malgun Gothic"/>
-                <a:ea typeface="Malgun Gothic"/>
-                <a:sym typeface="Malgun Gothic"/>
-              </a:rPr>
-              <a:t> REF: A / TARGET: B</a:t>
-            </a:r>
-          </a:p>
-          <a:p>
-            <a:pPr algn="l" marL="0" marR="0">
-              <a:lnSpc>
-                <a:spcPct val="100000"/>
-              </a:lnSpc>
-              <a:spcBef>
-                <a:spcPts val="0"/>
-              </a:spcBef>
-              <a:spcAft>
-                <a:spcPts val="0"/>
-              </a:spcAft>
-              <a:buNone/>
-            </a:pPr>
-            <a:r>
-              <a:rPr cap="none" sz="1100" i="0" b="1" u="none" strike="noStrike">
-                <a:solidFill>
-                  <a:srgbClr val="333333">
-                    <a:alpha val="100000"/>
-                  </a:srgbClr>
-                </a:solidFill>
-                <a:latin typeface="Malgun Gothic"/>
-                <a:cs typeface="Malgun Gothic"/>
-                <a:ea typeface="Malgun Gothic"/>
-                <a:sym typeface="Malgun Gothic"/>
-              </a:rPr>
-              <a:t>■</a:t>
-            </a:r>
-            <a:r>
-              <a:rPr cap="none" sz="1100" i="0" b="0" u="none" strike="noStrike">
-                <a:solidFill>
-                  <a:srgbClr val="333333">
-                    <a:alpha val="100000"/>
-                  </a:srgbClr>
-                </a:solidFill>
-                <a:latin typeface="Malgun Gothic"/>
-                <a:cs typeface="Malgun Gothic"/>
-                <a:ea typeface="Malgun Gothic"/>
-                <a:sym typeface="Malgun Gothic"/>
-              </a:rPr>
-              <a:t> Showing MSR 1-4 of 4; threshold 0.5</a:t>
-            </a:r>
-          </a:p>
-        </p:txBody>
-      </p:sp>
       <p:graphicFrame>
         <p:nvGraphicFramePr>
-          <p:cNvPr id="4" name=""/>
+          <p:cNvPr id="2" name=""/>
           <p:cNvGraphicFramePr>
             <a:graphicFrameLocks noGrp="true"/>
           </p:cNvGraphicFramePr>
@@ -26207,7 +26976,7 @@
       </p:graphicFrame>
       <p:sp>
         <p:nvSpPr>
-          <p:cNvPr id="5" name=""/>
+          <p:cNvPr id="3" name=""/>
           <p:cNvSpPr>
             <a:spLocks noGrp="1"/>
           </p:cNvSpPr>
@@ -26275,7 +27044,7 @@
       </p:sp>
       <p:pic>
         <p:nvPicPr>
-          <p:cNvPr id="6" name="" descr=""/>
+          <p:cNvPr id="4" name="" descr=""/>
           <p:cNvPicPr>
             <a:picLocks noGrp="1"/>
           </p:cNvPicPr>
@@ -26301,7 +27070,7 @@
       </p:pic>
       <p:sp>
         <p:nvSpPr>
-          <p:cNvPr id="7" name=""/>
+          <p:cNvPr id="5" name=""/>
           <p:cNvSpPr>
             <a:spLocks noGrp="1"/>
           </p:cNvSpPr>
@@ -26355,7 +27124,7 @@
       </p:sp>
       <p:sp>
         <p:nvSpPr>
-          <p:cNvPr id="8" name=""/>
+          <p:cNvPr id="6" name=""/>
           <p:cNvSpPr>
             <a:spLocks noGrp="1"/>
           </p:cNvSpPr>
@@ -26423,7 +27192,7 @@
       </p:sp>
       <p:pic>
         <p:nvPicPr>
-          <p:cNvPr id="9" name="" descr=""/>
+          <p:cNvPr id="7" name="" descr=""/>
           <p:cNvPicPr>
             <a:picLocks noGrp="1"/>
           </p:cNvPicPr>
@@ -26449,7 +27218,7 @@
       </p:pic>
       <p:sp>
         <p:nvSpPr>
-          <p:cNvPr id="10" name=""/>
+          <p:cNvPr id="8" name=""/>
           <p:cNvSpPr>
             <a:spLocks noGrp="1"/>
           </p:cNvSpPr>
@@ -26503,7 +27272,7 @@
       </p:sp>
       <p:sp>
         <p:nvSpPr>
-          <p:cNvPr id="11" name=""/>
+          <p:cNvPr id="9" name=""/>
           <p:cNvSpPr>
             <a:spLocks noGrp="1"/>
           </p:cNvSpPr>
@@ -26571,7 +27340,7 @@
       </p:sp>
       <p:pic>
         <p:nvPicPr>
-          <p:cNvPr id="12" name="" descr=""/>
+          <p:cNvPr id="10" name="" descr=""/>
           <p:cNvPicPr>
             <a:picLocks noGrp="1"/>
           </p:cNvPicPr>
@@ -26597,7 +27366,7 @@
       </p:pic>
       <p:sp>
         <p:nvSpPr>
-          <p:cNvPr id="13" name=""/>
+          <p:cNvPr id="11" name=""/>
           <p:cNvSpPr>
             <a:spLocks noGrp="1"/>
           </p:cNvSpPr>
@@ -26651,7 +27420,7 @@
       </p:sp>
       <p:sp>
         <p:nvSpPr>
-          <p:cNvPr id="14" name=""/>
+          <p:cNvPr id="12" name=""/>
           <p:cNvSpPr>
             <a:spLocks noGrp="1"/>
           </p:cNvSpPr>
@@ -26719,7 +27488,7 @@
       </p:sp>
       <p:pic>
         <p:nvPicPr>
-          <p:cNvPr id="15" name="" descr=""/>
+          <p:cNvPr id="13" name="" descr=""/>
           <p:cNvPicPr>
             <a:picLocks noGrp="1"/>
           </p:cNvPicPr>
@@ -26745,7 +27514,7 @@
       </p:pic>
       <p:sp>
         <p:nvSpPr>
-          <p:cNvPr id="16" name=""/>
+          <p:cNvPr id="14" name=""/>
           <p:cNvSpPr>
             <a:spLocks noGrp="1"/>
           </p:cNvSpPr>
@@ -26799,7 +27568,7 @@
       </p:sp>
       <p:sp>
         <p:nvSpPr>
-          <p:cNvPr id="17" name=""/>
+          <p:cNvPr id="15" name=""/>
           <p:cNvSpPr>
             <a:spLocks noGrp="1"/>
           </p:cNvSpPr>
@@ -26879,6 +27648,214 @@
           </a:p>
         </p:txBody>
       </p:sp>
+      <p:sp>
+        <p:nvSpPr>
+          <p:cNvPr id="16" name="DRB_Title_Placeholder"/>
+          <p:cNvSpPr>
+            <a:spLocks noGrp="1"/>
+          </p:cNvSpPr>
+          <p:nvPr>
+            <p:ph type="title" hasCustomPrompt="1"/>
+          </p:nvPr>
+        </p:nvSpPr>
+        <p:spPr>
+          <a:xfrm>
+            <a:off x="270000" y="342000"/>
+            <a:ext cx="10302000" cy="486000"/>
+          </a:xfrm>
+        </p:spPr>
+        <p:txBody>
+          <a:bodyPr/>
+          <a:lstStyle/>
+          <a:p>
+            <a:pPr algn="l" marL="0" marR="0">
+              <a:lnSpc>
+                <a:spcPct val="100000"/>
+              </a:lnSpc>
+              <a:spcBef>
+                <a:spcPts val="0"/>
+              </a:spcBef>
+              <a:spcAft>
+                <a:spcPts val="0"/>
+              </a:spcAft>
+              <a:buNone/>
+            </a:pPr>
+            <a:r>
+              <a:rPr cap="none" sz="2800" i="0" b="1" u="none" strike="noStrike">
+                <a:solidFill>
+                  <a:srgbClr val="111111">
+                    <a:alpha val="100000"/>
+                  </a:srgbClr>
+                </a:solidFill>
+                <a:latin typeface="Malgun Gothic"/>
+                <a:cs typeface="Malgun Gothic"/>
+                <a:ea typeface="Malgun Gothic"/>
+                <a:sym typeface="Malgun Gothic"/>
+              </a:rPr>
+              <a:t>[DM] Data Review Board Auto Report</a:t>
+            </a:r>
+          </a:p>
+        </p:txBody>
+      </p:sp>
+      <p:sp>
+        <p:nvSpPr>
+          <p:cNvPr id="17" name="DRB_Body_Placeholder"/>
+          <p:cNvSpPr>
+            <a:spLocks noGrp="1"/>
+          </p:cNvSpPr>
+          <p:nvPr>
+            <p:ph idx="13" hasCustomPrompt="1"/>
+          </p:nvPr>
+        </p:nvSpPr>
+        <p:spPr>
+          <a:xfrm>
+            <a:off x="270000" y="943200"/>
+            <a:ext cx="11520000" cy="583200"/>
+          </a:xfrm>
+        </p:spPr>
+        <p:txBody>
+          <a:bodyPr/>
+          <a:lstStyle/>
+          <a:p>
+            <a:pPr algn="l" marL="0" marR="0">
+              <a:lnSpc>
+                <a:spcPct val="100000"/>
+              </a:lnSpc>
+              <a:spcBef>
+                <a:spcPts val="0"/>
+              </a:spcBef>
+              <a:spcAft>
+                <a:spcPts val="0"/>
+              </a:spcAft>
+              <a:buNone/>
+            </a:pPr>
+            <a:r>
+              <a:rPr cap="none" sz="1300" i="0" b="1" u="none" strike="noStrike">
+                <a:solidFill>
+                  <a:srgbClr val="333333">
+                    <a:alpha val="100000"/>
+                  </a:srgbClr>
+                </a:solidFill>
+                <a:latin typeface="Malgun Gothic"/>
+                <a:cs typeface="Malgun Gothic"/>
+                <a:ea typeface="Malgun Gothic"/>
+                <a:sym typeface="Malgun Gothic"/>
+              </a:rPr>
+              <a:t>■</a:t>
+            </a:r>
+            <a:r>
+              <a:rPr cap="none" sz="1300" i="0" b="1" u="none" strike="noStrike">
+                <a:solidFill>
+                  <a:srgbClr val="333333">
+                    <a:alpha val="100000"/>
+                  </a:srgbClr>
+                </a:solidFill>
+                <a:latin typeface="Malgun Gothic"/>
+                <a:cs typeface="Malgun Gothic"/>
+                <a:ea typeface="Malgun Gothic"/>
+                <a:sym typeface="Malgun Gothic"/>
+              </a:rPr>
+              <a:t> Category: Category2: WTC | Showing MSR 1-4 of 4</a:t>
+            </a:r>
+          </a:p>
+          <a:p>
+            <a:pPr algn="l" marL="0" marR="0">
+              <a:lnSpc>
+                <a:spcPct val="100000"/>
+              </a:lnSpc>
+              <a:spcBef>
+                <a:spcPts val="0"/>
+              </a:spcBef>
+              <a:spcAft>
+                <a:spcPts val="0"/>
+              </a:spcAft>
+              <a:buNone/>
+            </a:pPr>
+            <a:r>
+              <a:rPr cap="none" sz="1300" i="0" b="1" u="none" strike="noStrike">
+                <a:solidFill>
+                  <a:srgbClr val="333333">
+                    <a:alpha val="100000"/>
+                  </a:srgbClr>
+                </a:solidFill>
+                <a:latin typeface="Malgun Gothic"/>
+                <a:cs typeface="Malgun Gothic"/>
+                <a:ea typeface="Malgun Gothic"/>
+                <a:sym typeface="Malgun Gothic"/>
+              </a:rPr>
+              <a:t>■</a:t>
+            </a:r>
+            <a:r>
+              <a:rPr cap="none" sz="1300" i="0" b="1" u="none" strike="noStrike">
+                <a:solidFill>
+                  <a:srgbClr val="333333">
+                    <a:alpha val="100000"/>
+                  </a:srgbClr>
+                </a:solidFill>
+                <a:latin typeface="Malgun Gothic"/>
+                <a:cs typeface="Malgun Gothic"/>
+                <a:ea typeface="Malgun Gothic"/>
+                <a:sym typeface="Malgun Gothic"/>
+              </a:rPr>
+              <a:t> REF: A / TARGET: B | Threshold: 0.5</a:t>
+            </a:r>
+          </a:p>
+        </p:txBody>
+      </p:sp>
+      <p:sp>
+        <p:nvSpPr>
+          <p:cNvPr id="18" name=""/>
+          <p:cNvSpPr>
+            <a:spLocks noGrp="1"/>
+          </p:cNvSpPr>
+          <p:nvPr>
+            <p:ph/>
+          </p:nvPr>
+        </p:nvSpPr>
+        <p:spPr>
+          <a:xfrm>
+            <a:off x="8268012" y="6451200"/>
+            <a:ext cx="2520000" cy="237600"/>
+          </a:xfrm>
+          <a:solidFill>
+            <a:srgbClr val="FFFFFF">
+              <a:alpha val="0"/>
+            </a:srgbClr>
+          </a:solidFill>
+        </p:spPr>
+        <p:txBody>
+          <a:bodyPr/>
+          <a:lstStyle/>
+          <a:p>
+            <a:pPr algn="r" marL="0" marR="0">
+              <a:lnSpc>
+                <a:spcPct val="100000"/>
+              </a:lnSpc>
+              <a:spcBef>
+                <a:spcPts val="0"/>
+              </a:spcBef>
+              <a:spcAft>
+                <a:spcPts val="0"/>
+              </a:spcAft>
+              <a:buNone/>
+            </a:pPr>
+            <a:r>
+              <a:rPr cap="none" sz="1200" i="0" b="0" u="none" strike="noStrike">
+                <a:solidFill>
+                  <a:srgbClr val="7F7F7F">
+                    <a:alpha val="100000"/>
+                  </a:srgbClr>
+                </a:solidFill>
+                <a:latin typeface="Malgun Gothic"/>
+                <a:cs typeface="Malgun Gothic"/>
+                <a:ea typeface="Malgun Gothic"/>
+                <a:sym typeface="Malgun Gothic"/>
+              </a:rPr>
+              <a:t>Flash PE / 홍길동</a:t>
+            </a:r>
+          </a:p>
+        </p:txBody>
+      </p:sp>
     </p:spTree>
   </p:cSld>
   <p:clrMapOvr>
@@ -26904,215 +27881,9 @@
           <a:chExt cx="0" cy="0"/>
         </a:xfrm>
       </p:grpSpPr>
-      <p:sp>
-        <p:nvSpPr>
-          <p:cNvPr id="2" name=""/>
-          <p:cNvSpPr>
-            <a:spLocks noGrp="1"/>
-          </p:cNvSpPr>
-          <p:nvPr>
-            <p:ph/>
-          </p:nvPr>
-        </p:nvSpPr>
-        <p:spPr>
-          <a:xfrm>
-            <a:off x="457200" y="237744"/>
-            <a:ext cx="11155680" cy="310896"/>
-          </a:xfrm>
-          <a:solidFill>
-            <a:srgbClr val="FFFFFF">
-              <a:alpha val="0"/>
-            </a:srgbClr>
-          </a:solidFill>
-        </p:spPr>
-        <p:txBody>
-          <a:bodyPr/>
-          <a:lstStyle/>
-          <a:p>
-            <a:pPr algn="l" marL="0" marR="0">
-              <a:lnSpc>
-                <a:spcPct val="100000"/>
-              </a:lnSpc>
-              <a:spcBef>
-                <a:spcPts val="0"/>
-              </a:spcBef>
-              <a:spcAft>
-                <a:spcPts val="0"/>
-              </a:spcAft>
-              <a:buNone/>
-            </a:pPr>
-            <a:r>
-              <a:rPr cap="none" sz="2000" i="0" b="1" u="none" strike="noStrike">
-                <a:solidFill>
-                  <a:srgbClr val="111111">
-                    <a:alpha val="100000"/>
-                  </a:srgbClr>
-                </a:solidFill>
-                <a:latin typeface="Malgun Gothic"/>
-                <a:cs typeface="Malgun Gothic"/>
-                <a:ea typeface="Malgun Gothic"/>
-                <a:sym typeface="Malgun Gothic"/>
-              </a:rPr>
-              <a:t>[DM] Data Review Board Auto Report</a:t>
-            </a:r>
-          </a:p>
-        </p:txBody>
-      </p:sp>
-      <p:sp>
-        <p:nvSpPr>
-          <p:cNvPr id="3" name=""/>
-          <p:cNvSpPr>
-            <a:spLocks noGrp="1"/>
-          </p:cNvSpPr>
-          <p:nvPr>
-            <p:ph/>
-          </p:nvPr>
-        </p:nvSpPr>
-        <p:spPr>
-          <a:xfrm>
-            <a:off x="457200" y="676656"/>
-            <a:ext cx="11155680" cy="640080"/>
-          </a:xfrm>
-          <a:solidFill>
-            <a:srgbClr val="FFFFFF">
-              <a:alpha val="0"/>
-            </a:srgbClr>
-          </a:solidFill>
-        </p:spPr>
-        <p:txBody>
-          <a:bodyPr/>
-          <a:lstStyle/>
-          <a:p>
-            <a:pPr algn="l" marL="0" marR="0">
-              <a:lnSpc>
-                <a:spcPct val="100000"/>
-              </a:lnSpc>
-              <a:spcBef>
-                <a:spcPts val="0"/>
-              </a:spcBef>
-              <a:spcAft>
-                <a:spcPts val="0"/>
-              </a:spcAft>
-              <a:buNone/>
-            </a:pPr>
-            <a:r>
-              <a:rPr cap="none" sz="1100" i="0" b="1" u="none" strike="noStrike">
-                <a:solidFill>
-                  <a:srgbClr val="333333">
-                    <a:alpha val="100000"/>
-                  </a:srgbClr>
-                </a:solidFill>
-                <a:latin typeface="Malgun Gothic"/>
-                <a:cs typeface="Malgun Gothic"/>
-                <a:ea typeface="Malgun Gothic"/>
-                <a:sym typeface="Malgun Gothic"/>
-              </a:rPr>
-              <a:t>■</a:t>
-            </a:r>
-            <a:r>
-              <a:rPr cap="none" sz="1100" i="0" b="0" u="none" strike="noStrike">
-                <a:solidFill>
-                  <a:srgbClr val="333333">
-                    <a:alpha val="100000"/>
-                  </a:srgbClr>
-                </a:solidFill>
-                <a:latin typeface="Malgun Gothic"/>
-                <a:cs typeface="Malgun Gothic"/>
-                <a:ea typeface="Malgun Gothic"/>
-                <a:sym typeface="Malgun Gothic"/>
-              </a:rPr>
-              <a:t> Category: Category2: TCMC</a:t>
-            </a:r>
-          </a:p>
-          <a:p>
-            <a:pPr algn="l" marL="0" marR="0">
-              <a:lnSpc>
-                <a:spcPct val="100000"/>
-              </a:lnSpc>
-              <a:spcBef>
-                <a:spcPts val="0"/>
-              </a:spcBef>
-              <a:spcAft>
-                <a:spcPts val="0"/>
-              </a:spcAft>
-              <a:buNone/>
-            </a:pPr>
-            <a:r>
-              <a:rPr cap="none" sz="1100" i="0" b="1" u="none" strike="noStrike">
-                <a:solidFill>
-                  <a:srgbClr val="333333">
-                    <a:alpha val="100000"/>
-                  </a:srgbClr>
-                </a:solidFill>
-                <a:latin typeface="Malgun Gothic"/>
-                <a:cs typeface="Malgun Gothic"/>
-                <a:ea typeface="Malgun Gothic"/>
-                <a:sym typeface="Malgun Gothic"/>
-              </a:rPr>
-              <a:t>■</a:t>
-            </a:r>
-            <a:r>
-              <a:rPr cap="none" sz="1100" i="0" b="0" u="none" strike="noStrike">
-                <a:solidFill>
-                  <a:srgbClr val="333333">
-                    <a:alpha val="100000"/>
-                  </a:srgbClr>
-                </a:solidFill>
-                <a:latin typeface="Malgun Gothic"/>
-                <a:cs typeface="Malgun Gothic"/>
-                <a:ea typeface="Malgun Gothic"/>
-                <a:sym typeface="Malgun Gothic"/>
-              </a:rPr>
-              <a:t> REF: A / TARGET: B</a:t>
-            </a:r>
-          </a:p>
-          <a:p>
-            <a:pPr algn="l" marL="0" marR="0">
-              <a:lnSpc>
-                <a:spcPct val="100000"/>
-              </a:lnSpc>
-              <a:spcBef>
-                <a:spcPts val="0"/>
-              </a:spcBef>
-              <a:spcAft>
-                <a:spcPts val="0"/>
-              </a:spcAft>
-              <a:buNone/>
-            </a:pPr>
-            <a:r>
-              <a:rPr cap="none" sz="1100" i="0" b="1" u="none" strike="noStrike">
-                <a:solidFill>
-                  <a:srgbClr val="333333">
-                    <a:alpha val="100000"/>
-                  </a:srgbClr>
-                </a:solidFill>
-                <a:latin typeface="Malgun Gothic"/>
-                <a:cs typeface="Malgun Gothic"/>
-                <a:ea typeface="Malgun Gothic"/>
-                <a:sym typeface="Malgun Gothic"/>
-              </a:rPr>
-              <a:t>■</a:t>
-            </a:r>
-            <a:r>
-              <a:rPr cap="none" sz="1100" i="0" b="0" u="none" strike="noStrike">
-                <a:solidFill>
-                  <a:srgbClr val="333333">
-                    <a:alpha val="100000"/>
-                  </a:srgbClr>
-                </a:solidFill>
-                <a:latin typeface="Malgun Gothic"/>
-                <a:cs typeface="Malgun Gothic"/>
-                <a:ea typeface="Malgun Gothic"/>
-                <a:sym typeface="Malgun Gothic"/>
-              </a:rPr>
-              <a:t> Showing MSR 1-6 of 6; threshold 0.5</a:t>
-            </a:r>
-          </a:p>
-        </p:txBody>
-      </p:sp>
       <p:graphicFrame>
         <p:nvGraphicFramePr>
-          <p:cNvPr id="4" name=""/>
+          <p:cNvPr id="2" name=""/>
           <p:cNvGraphicFramePr>
             <a:graphicFrameLocks noGrp="true"/>
           </p:cNvGraphicFramePr>
@@ -28608,7 +29379,7 @@
       </p:graphicFrame>
       <p:sp>
         <p:nvSpPr>
-          <p:cNvPr id="5" name=""/>
+          <p:cNvPr id="3" name=""/>
           <p:cNvSpPr>
             <a:spLocks noGrp="1"/>
           </p:cNvSpPr>
@@ -28676,7 +29447,7 @@
       </p:sp>
       <p:pic>
         <p:nvPicPr>
-          <p:cNvPr id="6" name="" descr=""/>
+          <p:cNvPr id="4" name="" descr=""/>
           <p:cNvPicPr>
             <a:picLocks noGrp="1"/>
           </p:cNvPicPr>
@@ -28702,7 +29473,7 @@
       </p:pic>
       <p:sp>
         <p:nvSpPr>
-          <p:cNvPr id="7" name=""/>
+          <p:cNvPr id="5" name=""/>
           <p:cNvSpPr>
             <a:spLocks noGrp="1"/>
           </p:cNvSpPr>
@@ -28756,7 +29527,7 @@
       </p:sp>
       <p:sp>
         <p:nvSpPr>
-          <p:cNvPr id="8" name=""/>
+          <p:cNvPr id="6" name=""/>
           <p:cNvSpPr>
             <a:spLocks noGrp="1"/>
           </p:cNvSpPr>
@@ -28824,7 +29595,7 @@
       </p:sp>
       <p:pic>
         <p:nvPicPr>
-          <p:cNvPr id="9" name="" descr=""/>
+          <p:cNvPr id="7" name="" descr=""/>
           <p:cNvPicPr>
             <a:picLocks noGrp="1"/>
           </p:cNvPicPr>
@@ -28850,7 +29621,7 @@
       </p:pic>
       <p:sp>
         <p:nvSpPr>
-          <p:cNvPr id="10" name=""/>
+          <p:cNvPr id="8" name=""/>
           <p:cNvSpPr>
             <a:spLocks noGrp="1"/>
           </p:cNvSpPr>
@@ -28904,7 +29675,7 @@
       </p:sp>
       <p:sp>
         <p:nvSpPr>
-          <p:cNvPr id="11" name=""/>
+          <p:cNvPr id="9" name=""/>
           <p:cNvSpPr>
             <a:spLocks noGrp="1"/>
           </p:cNvSpPr>
@@ -28972,7 +29743,7 @@
       </p:sp>
       <p:pic>
         <p:nvPicPr>
-          <p:cNvPr id="12" name="" descr=""/>
+          <p:cNvPr id="10" name="" descr=""/>
           <p:cNvPicPr>
             <a:picLocks noGrp="1"/>
           </p:cNvPicPr>
@@ -28998,7 +29769,7 @@
       </p:pic>
       <p:sp>
         <p:nvSpPr>
-          <p:cNvPr id="13" name=""/>
+          <p:cNvPr id="11" name=""/>
           <p:cNvSpPr>
             <a:spLocks noGrp="1"/>
           </p:cNvSpPr>
@@ -29052,7 +29823,7 @@
       </p:sp>
       <p:sp>
         <p:nvSpPr>
-          <p:cNvPr id="14" name=""/>
+          <p:cNvPr id="12" name=""/>
           <p:cNvSpPr>
             <a:spLocks noGrp="1"/>
           </p:cNvSpPr>
@@ -29120,7 +29891,7 @@
       </p:sp>
       <p:pic>
         <p:nvPicPr>
-          <p:cNvPr id="15" name="" descr=""/>
+          <p:cNvPr id="13" name="" descr=""/>
           <p:cNvPicPr>
             <a:picLocks noGrp="1"/>
           </p:cNvPicPr>
@@ -29146,7 +29917,7 @@
       </p:pic>
       <p:sp>
         <p:nvSpPr>
-          <p:cNvPr id="16" name=""/>
+          <p:cNvPr id="14" name=""/>
           <p:cNvSpPr>
             <a:spLocks noGrp="1"/>
           </p:cNvSpPr>
@@ -29200,7 +29971,7 @@
       </p:sp>
       <p:sp>
         <p:nvSpPr>
-          <p:cNvPr id="17" name=""/>
+          <p:cNvPr id="15" name=""/>
           <p:cNvSpPr>
             <a:spLocks noGrp="1"/>
           </p:cNvSpPr>
@@ -29268,7 +30039,7 @@
       </p:sp>
       <p:pic>
         <p:nvPicPr>
-          <p:cNvPr id="18" name="" descr=""/>
+          <p:cNvPr id="16" name="" descr=""/>
           <p:cNvPicPr>
             <a:picLocks noGrp="1"/>
           </p:cNvPicPr>
@@ -29294,7 +30065,7 @@
       </p:pic>
       <p:sp>
         <p:nvSpPr>
-          <p:cNvPr id="19" name=""/>
+          <p:cNvPr id="17" name=""/>
           <p:cNvSpPr>
             <a:spLocks noGrp="1"/>
           </p:cNvSpPr>
@@ -29348,7 +30119,7 @@
       </p:sp>
       <p:sp>
         <p:nvSpPr>
-          <p:cNvPr id="20" name=""/>
+          <p:cNvPr id="18" name=""/>
           <p:cNvSpPr>
             <a:spLocks noGrp="1"/>
           </p:cNvSpPr>
@@ -29416,7 +30187,7 @@
       </p:sp>
       <p:pic>
         <p:nvPicPr>
-          <p:cNvPr id="21" name="" descr=""/>
+          <p:cNvPr id="19" name="" descr=""/>
           <p:cNvPicPr>
             <a:picLocks noGrp="1"/>
           </p:cNvPicPr>
@@ -29442,7 +30213,7 @@
       </p:pic>
       <p:sp>
         <p:nvSpPr>
-          <p:cNvPr id="22" name=""/>
+          <p:cNvPr id="20" name=""/>
           <p:cNvSpPr>
             <a:spLocks noGrp="1"/>
           </p:cNvSpPr>
@@ -29496,7 +30267,7 @@
       </p:sp>
       <p:sp>
         <p:nvSpPr>
-          <p:cNvPr id="23" name=""/>
+          <p:cNvPr id="21" name=""/>
           <p:cNvSpPr>
             <a:spLocks noGrp="1"/>
           </p:cNvSpPr>
@@ -29572,6 +30343,214 @@
                 <a:sym typeface="Malgun Gothic"/>
               </a:rPr>
               <a:t>● B (TARGET, 10매)</a:t>
+            </a:r>
+          </a:p>
+        </p:txBody>
+      </p:sp>
+      <p:sp>
+        <p:nvSpPr>
+          <p:cNvPr id="22" name="DRB_Title_Placeholder"/>
+          <p:cNvSpPr>
+            <a:spLocks noGrp="1"/>
+          </p:cNvSpPr>
+          <p:nvPr>
+            <p:ph type="title" hasCustomPrompt="1"/>
+          </p:nvPr>
+        </p:nvSpPr>
+        <p:spPr>
+          <a:xfrm>
+            <a:off x="270000" y="342000"/>
+            <a:ext cx="10302000" cy="486000"/>
+          </a:xfrm>
+        </p:spPr>
+        <p:txBody>
+          <a:bodyPr/>
+          <a:lstStyle/>
+          <a:p>
+            <a:pPr algn="l" marL="0" marR="0">
+              <a:lnSpc>
+                <a:spcPct val="100000"/>
+              </a:lnSpc>
+              <a:spcBef>
+                <a:spcPts val="0"/>
+              </a:spcBef>
+              <a:spcAft>
+                <a:spcPts val="0"/>
+              </a:spcAft>
+              <a:buNone/>
+            </a:pPr>
+            <a:r>
+              <a:rPr cap="none" sz="2800" i="0" b="1" u="none" strike="noStrike">
+                <a:solidFill>
+                  <a:srgbClr val="111111">
+                    <a:alpha val="100000"/>
+                  </a:srgbClr>
+                </a:solidFill>
+                <a:latin typeface="Malgun Gothic"/>
+                <a:cs typeface="Malgun Gothic"/>
+                <a:ea typeface="Malgun Gothic"/>
+                <a:sym typeface="Malgun Gothic"/>
+              </a:rPr>
+              <a:t>[DM] Data Review Board Auto Report</a:t>
+            </a:r>
+          </a:p>
+        </p:txBody>
+      </p:sp>
+      <p:sp>
+        <p:nvSpPr>
+          <p:cNvPr id="23" name="DRB_Body_Placeholder"/>
+          <p:cNvSpPr>
+            <a:spLocks noGrp="1"/>
+          </p:cNvSpPr>
+          <p:nvPr>
+            <p:ph idx="13" hasCustomPrompt="1"/>
+          </p:nvPr>
+        </p:nvSpPr>
+        <p:spPr>
+          <a:xfrm>
+            <a:off x="270000" y="943200"/>
+            <a:ext cx="11520000" cy="583200"/>
+          </a:xfrm>
+        </p:spPr>
+        <p:txBody>
+          <a:bodyPr/>
+          <a:lstStyle/>
+          <a:p>
+            <a:pPr algn="l" marL="0" marR="0">
+              <a:lnSpc>
+                <a:spcPct val="100000"/>
+              </a:lnSpc>
+              <a:spcBef>
+                <a:spcPts val="0"/>
+              </a:spcBef>
+              <a:spcAft>
+                <a:spcPts val="0"/>
+              </a:spcAft>
+              <a:buNone/>
+            </a:pPr>
+            <a:r>
+              <a:rPr cap="none" sz="1300" i="0" b="1" u="none" strike="noStrike">
+                <a:solidFill>
+                  <a:srgbClr val="333333">
+                    <a:alpha val="100000"/>
+                  </a:srgbClr>
+                </a:solidFill>
+                <a:latin typeface="Malgun Gothic"/>
+                <a:cs typeface="Malgun Gothic"/>
+                <a:ea typeface="Malgun Gothic"/>
+                <a:sym typeface="Malgun Gothic"/>
+              </a:rPr>
+              <a:t>■</a:t>
+            </a:r>
+            <a:r>
+              <a:rPr cap="none" sz="1300" i="0" b="1" u="none" strike="noStrike">
+                <a:solidFill>
+                  <a:srgbClr val="333333">
+                    <a:alpha val="100000"/>
+                  </a:srgbClr>
+                </a:solidFill>
+                <a:latin typeface="Malgun Gothic"/>
+                <a:cs typeface="Malgun Gothic"/>
+                <a:ea typeface="Malgun Gothic"/>
+                <a:sym typeface="Malgun Gothic"/>
+              </a:rPr>
+              <a:t> Category: Category2: TCMC | Showing MSR 1-6 of 6</a:t>
+            </a:r>
+          </a:p>
+          <a:p>
+            <a:pPr algn="l" marL="0" marR="0">
+              <a:lnSpc>
+                <a:spcPct val="100000"/>
+              </a:lnSpc>
+              <a:spcBef>
+                <a:spcPts val="0"/>
+              </a:spcBef>
+              <a:spcAft>
+                <a:spcPts val="0"/>
+              </a:spcAft>
+              <a:buNone/>
+            </a:pPr>
+            <a:r>
+              <a:rPr cap="none" sz="1300" i="0" b="1" u="none" strike="noStrike">
+                <a:solidFill>
+                  <a:srgbClr val="333333">
+                    <a:alpha val="100000"/>
+                  </a:srgbClr>
+                </a:solidFill>
+                <a:latin typeface="Malgun Gothic"/>
+                <a:cs typeface="Malgun Gothic"/>
+                <a:ea typeface="Malgun Gothic"/>
+                <a:sym typeface="Malgun Gothic"/>
+              </a:rPr>
+              <a:t>■</a:t>
+            </a:r>
+            <a:r>
+              <a:rPr cap="none" sz="1300" i="0" b="1" u="none" strike="noStrike">
+                <a:solidFill>
+                  <a:srgbClr val="333333">
+                    <a:alpha val="100000"/>
+                  </a:srgbClr>
+                </a:solidFill>
+                <a:latin typeface="Malgun Gothic"/>
+                <a:cs typeface="Malgun Gothic"/>
+                <a:ea typeface="Malgun Gothic"/>
+                <a:sym typeface="Malgun Gothic"/>
+              </a:rPr>
+              <a:t> REF: A / TARGET: B | Threshold: 0.5</a:t>
+            </a:r>
+          </a:p>
+        </p:txBody>
+      </p:sp>
+      <p:sp>
+        <p:nvSpPr>
+          <p:cNvPr id="24" name=""/>
+          <p:cNvSpPr>
+            <a:spLocks noGrp="1"/>
+          </p:cNvSpPr>
+          <p:nvPr>
+            <p:ph/>
+          </p:nvPr>
+        </p:nvSpPr>
+        <p:spPr>
+          <a:xfrm>
+            <a:off x="8268012" y="6451200"/>
+            <a:ext cx="2520000" cy="237600"/>
+          </a:xfrm>
+          <a:solidFill>
+            <a:srgbClr val="FFFFFF">
+              <a:alpha val="0"/>
+            </a:srgbClr>
+          </a:solidFill>
+        </p:spPr>
+        <p:txBody>
+          <a:bodyPr/>
+          <a:lstStyle/>
+          <a:p>
+            <a:pPr algn="r" marL="0" marR="0">
+              <a:lnSpc>
+                <a:spcPct val="100000"/>
+              </a:lnSpc>
+              <a:spcBef>
+                <a:spcPts val="0"/>
+              </a:spcBef>
+              <a:spcAft>
+                <a:spcPts val="0"/>
+              </a:spcAft>
+              <a:buNone/>
+            </a:pPr>
+            <a:r>
+              <a:rPr cap="none" sz="1200" i="0" b="0" u="none" strike="noStrike">
+                <a:solidFill>
+                  <a:srgbClr val="7F7F7F">
+                    <a:alpha val="100000"/>
+                  </a:srgbClr>
+                </a:solidFill>
+                <a:latin typeface="Malgun Gothic"/>
+                <a:cs typeface="Malgun Gothic"/>
+                <a:ea typeface="Malgun Gothic"/>
+                <a:sym typeface="Malgun Gothic"/>
+              </a:rPr>
+              <a:t>Flash PE / 홍길동</a:t>
             </a:r>
           </a:p>
         </p:txBody>
@@ -29902,4 +30881,299 @@
   </a:objectDefaults>
   <a:extraClrSchemeLst/>
 </a:theme>
+</file>
+
+<file path=ppt/theme/theme2.xml><?xml version="1.0" encoding="utf-8"?>
+<a:theme xmlns:a="http://schemas.openxmlformats.org/drawingml/2006/main" name="Office 테마">
+  <a:themeElements>
+    <a:clrScheme name="Office">
+      <a:dk1>
+        <a:sysClr val="windowText" lastClr="000000"/>
+      </a:dk1>
+      <a:lt1>
+        <a:sysClr val="window" lastClr="FFFFFF"/>
+      </a:lt1>
+      <a:dk2>
+        <a:srgbClr val="44546A"/>
+      </a:dk2>
+      <a:lt2>
+        <a:srgbClr val="E7E6E6"/>
+      </a:lt2>
+      <a:accent1>
+        <a:srgbClr val="4472C4"/>
+      </a:accent1>
+      <a:accent2>
+        <a:srgbClr val="ED7D31"/>
+      </a:accent2>
+      <a:accent3>
+        <a:srgbClr val="A5A5A5"/>
+      </a:accent3>
+      <a:accent4>
+        <a:srgbClr val="FFC000"/>
+      </a:accent4>
+      <a:accent5>
+        <a:srgbClr val="5B9BD5"/>
+      </a:accent5>
+      <a:accent6>
+        <a:srgbClr val="70AD47"/>
+      </a:accent6>
+      <a:hlink>
+        <a:srgbClr val="0563C1"/>
+      </a:hlink>
+      <a:folHlink>
+        <a:srgbClr val="954F72"/>
+      </a:folHlink>
+    </a:clrScheme>
+    <a:fontScheme name="Office">
+      <a:majorFont>
+        <a:latin typeface="맑은 고딕" panose="020F0302020204030204"/>
+        <a:ea typeface=""/>
+        <a:cs typeface=""/>
+        <a:font script="Jpan" typeface="游ゴシック Light"/>
+        <a:font script="Hang" typeface="맑은 고딕"/>
+        <a:font script="Hans" typeface="等线 Light"/>
+        <a:font script="Hant" typeface="新細明體"/>
+        <a:font script="Arab" typeface="Times New Roman"/>
+        <a:font script="Hebr" typeface="Times New Roman"/>
+        <a:font script="Thai" typeface="Angsana New"/>
+        <a:font script="Ethi" typeface="Nyala"/>
+        <a:font script="Beng" typeface="Vrinda"/>
+        <a:font script="Gujr" typeface="Shruti"/>
+        <a:font script="Khmr" typeface="MoolBoran"/>
+        <a:font script="Knda" typeface="Tunga"/>
+        <a:font script="Guru" typeface="Raavi"/>
+        <a:font script="Cans" typeface="Euphemia"/>
+        <a:font script="Cher" typeface="Plantagenet Cherokee"/>
+        <a:font script="Yiii" typeface="Microsoft Yi Baiti"/>
+        <a:font script="Tibt" typeface="Microsoft Himalaya"/>
+        <a:font script="Thaa" typeface="MV Boli"/>
+        <a:font script="Deva" typeface="Mangal"/>
+        <a:font script="Telu" typeface="Gautami"/>
+        <a:font script="Taml" typeface="Latha"/>
+        <a:font script="Syrc" typeface="Estrangelo Edessa"/>
+        <a:font script="Orya" typeface="Kalinga"/>
+        <a:font script="Mlym" typeface="Kartika"/>
+        <a:font script="Laoo" typeface="DokChampa"/>
+        <a:font script="Sinh" typeface="Iskoola Pota"/>
+        <a:font script="Mong" typeface="Mongolian Baiti"/>
+        <a:font script="Viet" typeface="Times New Roman"/>
+        <a:font script="Uigh" typeface="Microsoft Uighur"/>
+        <a:font script="Geor" typeface="Sylfaen"/>
+        <a:font script="Armn" typeface="Arial"/>
+        <a:font script="Bugi" typeface="Leelawadee UI"/>
+        <a:font script="Bopo" typeface="Microsoft JhengHei"/>
+        <a:font script="Java" typeface="Javanese Text"/>
+        <a:font script="Lisu" typeface="Segoe UI"/>
+        <a:font script="Mymr" typeface="Myanmar Text"/>
+        <a:font script="Nkoo" typeface="Ebrima"/>
+        <a:font script="Olck" typeface="Nirmala UI"/>
+        <a:font script="Osma" typeface="Ebrima"/>
+        <a:font script="Phag" typeface="Phagspa"/>
+        <a:font script="Syrn" typeface="Estrangelo Edessa"/>
+        <a:font script="Syrj" typeface="Estrangelo Edessa"/>
+        <a:font script="Syre" typeface="Estrangelo Edessa"/>
+        <a:font script="Sora" typeface="Nirmala UI"/>
+        <a:font script="Tale" typeface="Microsoft Tai Le"/>
+        <a:font script="Talu" typeface="Microsoft New Tai Lue"/>
+        <a:font script="Tfng" typeface="Ebrima"/>
+      </a:majorFont>
+      <a:minorFont>
+        <a:latin typeface="맑은 고딕" panose="020F0502020204030204"/>
+        <a:ea typeface=""/>
+        <a:cs typeface=""/>
+        <a:font script="Jpan" typeface="游ゴシック"/>
+        <a:font script="Hang" typeface="맑은 고딕"/>
+        <a:font script="Hans" typeface="等线"/>
+        <a:font script="Hant" typeface="新細明體"/>
+        <a:font script="Arab" typeface="Arial"/>
+        <a:font script="Hebr" typeface="Arial"/>
+        <a:font script="Thai" typeface="Cordia New"/>
+        <a:font script="Ethi" typeface="Nyala"/>
+        <a:font script="Beng" typeface="Vrinda"/>
+        <a:font script="Gujr" typeface="Shruti"/>
+        <a:font script="Khmr" typeface="DaunPenh"/>
+        <a:font script="Knda" typeface="Tunga"/>
+        <a:font script="Guru" typeface="Raavi"/>
+        <a:font script="Cans" typeface="Euphemia"/>
+        <a:font script="Cher" typeface="Plantagenet Cherokee"/>
+        <a:font script="Yiii" typeface="Microsoft Yi Baiti"/>
+        <a:font script="Tibt" typeface="Microsoft Himalaya"/>
+        <a:font script="Thaa" typeface="MV Boli"/>
+        <a:font script="Deva" typeface="Mangal"/>
+        <a:font script="Telu" typeface="Gautami"/>
+        <a:font script="Taml" typeface="Latha"/>
+        <a:font script="Syrc" typeface="Estrangelo Edessa"/>
+        <a:font script="Orya" typeface="Kalinga"/>
+        <a:font script="Mlym" typeface="Kartika"/>
+        <a:font script="Laoo" typeface="DokChampa"/>
+        <a:font script="Sinh" typeface="Iskoola Pota"/>
+        <a:font script="Mong" typeface="Mongolian Baiti"/>
+        <a:font script="Viet" typeface="Arial"/>
+        <a:font script="Uigh" typeface="Microsoft Uighur"/>
+        <a:font script="Geor" typeface="Sylfaen"/>
+        <a:font script="Armn" typeface="Arial"/>
+        <a:font script="Bugi" typeface="Leelawadee UI"/>
+        <a:font script="Bopo" typeface="Microsoft JhengHei"/>
+        <a:font script="Java" typeface="Javanese Text"/>
+        <a:font script="Lisu" typeface="Segoe UI"/>
+        <a:font script="Mymr" typeface="Myanmar Text"/>
+        <a:font script="Nkoo" typeface="Ebrima"/>
+        <a:font script="Olck" typeface="Nirmala UI"/>
+        <a:font script="Osma" typeface="Ebrima"/>
+        <a:font script="Phag" typeface="Phagspa"/>
+        <a:font script="Syrn" typeface="Estrangelo Edessa"/>
+        <a:font script="Syrj" typeface="Estrangelo Edessa"/>
+        <a:font script="Syre" typeface="Estrangelo Edessa"/>
+        <a:font script="Sora" typeface="Nirmala UI"/>
+        <a:font script="Tale" typeface="Microsoft Tai Le"/>
+        <a:font script="Talu" typeface="Microsoft New Tai Lue"/>
+        <a:font script="Tfng" typeface="Ebrima"/>
+      </a:minorFont>
+    </a:fontScheme>
+    <a:fmtScheme name="Office">
+      <a:fillStyleLst>
+        <a:solidFill>
+          <a:schemeClr val="phClr"/>
+        </a:solidFill>
+        <a:gradFill rotWithShape="1">
+          <a:gsLst>
+            <a:gs pos="0">
+              <a:schemeClr val="phClr">
+                <a:lumMod val="110000"/>
+                <a:satMod val="105000"/>
+                <a:tint val="67000"/>
+              </a:schemeClr>
+            </a:gs>
+            <a:gs pos="50000">
+              <a:schemeClr val="phClr">
+                <a:lumMod val="105000"/>
+                <a:satMod val="103000"/>
+                <a:tint val="73000"/>
+              </a:schemeClr>
+            </a:gs>
+            <a:gs pos="100000">
+              <a:schemeClr val="phClr">
+                <a:lumMod val="105000"/>
+                <a:satMod val="109000"/>
+                <a:tint val="81000"/>
+              </a:schemeClr>
+            </a:gs>
+          </a:gsLst>
+          <a:lin ang="5400000" scaled="0"/>
+        </a:gradFill>
+        <a:gradFill rotWithShape="1">
+          <a:gsLst>
+            <a:gs pos="0">
+              <a:schemeClr val="phClr">
+                <a:satMod val="103000"/>
+                <a:lumMod val="102000"/>
+                <a:tint val="94000"/>
+              </a:schemeClr>
+            </a:gs>
+            <a:gs pos="50000">
+              <a:schemeClr val="phClr">
+                <a:satMod val="110000"/>
+                <a:lumMod val="100000"/>
+                <a:shade val="100000"/>
+              </a:schemeClr>
+            </a:gs>
+            <a:gs pos="100000">
+              <a:schemeClr val="phClr">
+                <a:lumMod val="99000"/>
+                <a:satMod val="120000"/>
+                <a:shade val="78000"/>
+              </a:schemeClr>
+            </a:gs>
+          </a:gsLst>
+          <a:lin ang="5400000" scaled="0"/>
+        </a:gradFill>
+      </a:fillStyleLst>
+      <a:lnStyleLst>
+        <a:ln w="6350" cap="flat" cmpd="sng" algn="ctr">
+          <a:solidFill>
+            <a:schemeClr val="phClr"/>
+          </a:solidFill>
+          <a:prstDash val="solid"/>
+          <a:miter lim="800000"/>
+        </a:ln>
+        <a:ln w="12700" cap="flat" cmpd="sng" algn="ctr">
+          <a:solidFill>
+            <a:schemeClr val="phClr"/>
+          </a:solidFill>
+          <a:prstDash val="solid"/>
+          <a:miter lim="800000"/>
+        </a:ln>
+        <a:ln w="19050" cap="flat" cmpd="sng" algn="ctr">
+          <a:solidFill>
+            <a:schemeClr val="phClr"/>
+          </a:solidFill>
+          <a:prstDash val="solid"/>
+          <a:miter lim="800000"/>
+        </a:ln>
+      </a:lnStyleLst>
+      <a:effectStyleLst>
+        <a:effectStyle>
+          <a:effectLst/>
+        </a:effectStyle>
+        <a:effectStyle>
+          <a:effectLst/>
+        </a:effectStyle>
+        <a:effectStyle>
+          <a:effectLst>
+            <a:outerShdw blurRad="57150" dist="19050" dir="5400000" algn="ctr" rotWithShape="0">
+              <a:srgbClr val="000000">
+                <a:alpha val="63000"/>
+              </a:srgbClr>
+            </a:outerShdw>
+          </a:effectLst>
+        </a:effectStyle>
+      </a:effectStyleLst>
+      <a:bgFillStyleLst>
+        <a:solidFill>
+          <a:schemeClr val="phClr"/>
+        </a:solidFill>
+        <a:solidFill>
+          <a:schemeClr val="phClr">
+            <a:tint val="95000"/>
+            <a:satMod val="170000"/>
+          </a:schemeClr>
+        </a:solidFill>
+        <a:gradFill rotWithShape="1">
+          <a:gsLst>
+            <a:gs pos="0">
+              <a:schemeClr val="phClr">
+                <a:tint val="93000"/>
+                <a:satMod val="150000"/>
+                <a:shade val="98000"/>
+                <a:lumMod val="102000"/>
+              </a:schemeClr>
+            </a:gs>
+            <a:gs pos="50000">
+              <a:schemeClr val="phClr">
+                <a:tint val="98000"/>
+                <a:satMod val="130000"/>
+                <a:shade val="90000"/>
+                <a:lumMod val="103000"/>
+              </a:schemeClr>
+            </a:gs>
+            <a:gs pos="100000">
+              <a:schemeClr val="phClr">
+                <a:shade val="63000"/>
+                <a:satMod val="120000"/>
+              </a:schemeClr>
+            </a:gs>
+          </a:gsLst>
+          <a:lin ang="5400000" scaled="0"/>
+        </a:gradFill>
+      </a:bgFillStyleLst>
+    </a:fmtScheme>
+  </a:themeElements>
+  <a:objectDefaults/>
+  <a:extraClrSchemeLst/>
+  <a:extLst>
+    <a:ext uri="{05A4C25C-085E-4340-85A3-A5531E510DB2}">
+      <thm15:themeFamily xmlns:thm15="http://schemas.microsoft.com/office/thememl/2012/main" name="Office Theme" id="{62F939B6-93AF-4DB8-9C6B-D6C7DFDC589F}" vid="{4A3C46E8-61CC-4603-A589-7422A47A8E4A}"/>
+    </a:ext>
+  </a:extLst>
+</a:theme>
 </file>
--- a/output/sigma_summary_latest.pptx
+++ b/output/sigma_summary_latest.pptx
@@ -14,7 +14,6 @@
     <p:sldId id="259" r:id="rId11"/>
     <p:sldId id="260" r:id="rId12"/>
     <p:sldId id="261" r:id="rId13"/>
-    <p:sldId id="262" r:id="rId14"/>
   </p:sldIdLst>
   <p:sldSz cx="12192000" cy="6858000"/>
   <p:notesSz cx="6858000" cy="9144000"/>
@@ -5669,7 +5668,7 @@
                   </a:tcPr>
                 </a:tc>
               </a:tr>
-              <a:tr h="370332">
+              <a:tr h="296266">
                 <a:tc rowSpan="6">
                   <a:txBody>
                     <a:bodyPr/>
@@ -6382,7 +6381,7 @@
                   </a:tcPr>
                 </a:tc>
               </a:tr>
-              <a:tr h="370332">
+              <a:tr h="296266">
                 <a:tc vMerge="true">
                   <a:txBody>
                     <a:bodyPr/>
@@ -7139,7 +7138,7 @@
                   </a:tcPr>
                 </a:tc>
               </a:tr>
-              <a:tr h="370332">
+              <a:tr h="296266">
                 <a:tc vMerge="true">
                   <a:txBody>
                     <a:bodyPr/>
@@ -7896,7 +7895,7 @@
                   </a:tcPr>
                 </a:tc>
               </a:tr>
-              <a:tr h="370332">
+              <a:tr h="296266">
                 <a:tc vMerge="true">
                   <a:txBody>
                     <a:bodyPr/>
@@ -8653,7 +8652,7 @@
                   </a:tcPr>
                 </a:tc>
               </a:tr>
-              <a:tr h="370332">
+              <a:tr h="296266">
                 <a:tc vMerge="true">
                   <a:txBody>
                     <a:bodyPr/>
@@ -9410,7 +9409,7 @@
                   </a:tcPr>
                 </a:tc>
               </a:tr>
-              <a:tr h="370332">
+              <a:tr h="296266">
                 <a:tc vMerge="true">
                   <a:txBody>
                     <a:bodyPr/>
@@ -10167,7 +10166,7 @@
                   </a:tcPr>
                 </a:tc>
               </a:tr>
-              <a:tr h="370332">
+              <a:tr h="296266">
                 <a:tc rowSpan="6">
                   <a:txBody>
                     <a:bodyPr/>
@@ -10924,7 +10923,7 @@
                   </a:tcPr>
                 </a:tc>
               </a:tr>
-              <a:tr h="370332">
+              <a:tr h="296266">
                 <a:tc vMerge="true">
                   <a:txBody>
                     <a:bodyPr/>
@@ -11681,7 +11680,7 @@
                   </a:tcPr>
                 </a:tc>
               </a:tr>
-              <a:tr h="370332">
+              <a:tr h="296266">
                 <a:tc vMerge="true">
                   <a:txBody>
                     <a:bodyPr/>
@@ -12438,7 +12437,7 @@
                   </a:tcPr>
                 </a:tc>
               </a:tr>
-              <a:tr h="370332">
+              <a:tr h="296266">
                 <a:tc vMerge="true">
                   <a:txBody>
                     <a:bodyPr/>
@@ -13195,7 +13194,7 @@
                   </a:tcPr>
                 </a:tc>
               </a:tr>
-              <a:tr h="370332">
+              <a:tr h="296266">
                 <a:tc vMerge="true">
                   <a:txBody>
                     <a:bodyPr/>
@@ -13952,7 +13951,7 @@
                   </a:tcPr>
                 </a:tc>
               </a:tr>
-              <a:tr h="370332">
+              <a:tr h="296266">
                 <a:tc vMerge="true">
                   <a:txBody>
                     <a:bodyPr/>
@@ -17877,7 +17876,7 @@
                           <a:ea typeface="Malgun Gothic"/>
                           <a:sym typeface="Malgun Gothic"/>
                         </a:rPr>
-                        <a:t>Category2: PB - MSR 1-6 of 6</a:t>
+                        <a:t>Category2: PB - MSR 1-4 of 4</a:t>
                       </a:r>
                     </a:p>
                   </a:txBody>
@@ -19925,302 +19924,6 @@
         </p:nvSpPr>
         <p:spPr>
           <a:xfrm>
-            <a:off x="329184" y="4128516"/>
-            <a:ext cx="2827782" cy="228600"/>
-          </a:xfrm>
-          <a:solidFill>
-            <a:srgbClr val="FFFFFF">
-              <a:alpha val="0"/>
-            </a:srgbClr>
-          </a:solidFill>
-        </p:spPr>
-        <p:txBody>
-          <a:bodyPr/>
-          <a:lstStyle/>
-          <a:p>
-            <a:pPr algn="ctr" marL="0" marR="0">
-              <a:lnSpc>
-                <a:spcPct val="100000"/>
-              </a:lnSpc>
-              <a:spcBef>
-                <a:spcPts val="0"/>
-              </a:spcBef>
-              <a:spcAft>
-                <a:spcPts val="0"/>
-              </a:spcAft>
-              <a:buNone/>
-            </a:pPr>
-            <a:r>
-              <a:rPr cap="none" sz="900" i="0" b="1" u="none" strike="noStrike">
-                <a:solidFill>
-                  <a:srgbClr val="D62728">
-                    <a:alpha val="100000"/>
-                  </a:srgbClr>
-                </a:solidFill>
-                <a:latin typeface="Malgun Gothic"/>
-                <a:cs typeface="Malgun Gothic"/>
-                <a:ea typeface="Malgun Gothic"/>
-                <a:sym typeface="Malgun Gothic"/>
-              </a:rPr>
-              <a:t>⬤</a:t>
-            </a:r>
-            <a:r>
-              <a:rPr cap="none" sz="900" i="0" b="0" u="none" strike="noStrike">
-                <a:solidFill>
-                  <a:srgbClr val="333333">
-                    <a:alpha val="100000"/>
-                  </a:srgbClr>
-                </a:solidFill>
-                <a:latin typeface="Malgun Gothic"/>
-                <a:cs typeface="Malgun Gothic"/>
-                <a:ea typeface="Malgun Gothic"/>
-                <a:sym typeface="Malgun Gothic"/>
-              </a:rPr>
-              <a:t> (ML_MSR_004) Peri_PB_004</a:t>
-            </a:r>
-          </a:p>
-        </p:txBody>
-      </p:sp>
-      <p:pic>
-        <p:nvPicPr>
-          <p:cNvPr id="16" name="" descr=""/>
-          <p:cNvPicPr>
-            <a:picLocks noGrp="1"/>
-          </p:cNvPicPr>
-          <p:nvPr>
-            <p:ph/>
-          </p:nvPr>
-        </p:nvPicPr>
-        <p:blipFill>
-          <a:blip r:embed="rId6"/>
-          <a:stretch>
-            <a:fillRect/>
-          </a:stretch>
-        </p:blipFill>
-        <p:spPr>
-          <a:xfrm>
-            <a:off x="329184" y="4398264"/>
-            <a:ext cx="2827782" cy="1965960"/>
-          </a:xfrm>
-          <a:prstGeom prst="rect">
-            <a:avLst/>
-          </a:prstGeom>
-        </p:spPr>
-      </p:pic>
-      <p:sp>
-        <p:nvSpPr>
-          <p:cNvPr id="17" name=""/>
-          <p:cNvSpPr>
-            <a:spLocks noGrp="1"/>
-          </p:cNvSpPr>
-          <p:nvPr>
-            <p:ph/>
-          </p:nvPr>
-        </p:nvSpPr>
-        <p:spPr>
-          <a:xfrm>
-            <a:off x="2562606" y="4425696"/>
-            <a:ext cx="566928" cy="164592"/>
-          </a:xfrm>
-          <a:solidFill>
-            <a:srgbClr val="FFFFFF">
-              <a:alpha val="0"/>
-            </a:srgbClr>
-          </a:solidFill>
-        </p:spPr>
-        <p:txBody>
-          <a:bodyPr/>
-          <a:lstStyle/>
-          <a:p>
-            <a:pPr algn="r" marL="0" marR="0">
-              <a:lnSpc>
-                <a:spcPct val="100000"/>
-              </a:lnSpc>
-              <a:spcBef>
-                <a:spcPts val="0"/>
-              </a:spcBef>
-              <a:spcAft>
-                <a:spcPts val="0"/>
-              </a:spcAft>
-              <a:buNone/>
-            </a:pPr>
-            <a:r>
-              <a:rPr cap="none" sz="800" i="0" b="0" u="none" strike="noStrike">
-                <a:solidFill>
-                  <a:srgbClr val="808080">
-                    <a:alpha val="100000"/>
-                  </a:srgbClr>
-                </a:solidFill>
-                <a:latin typeface="Malgun Gothic"/>
-                <a:cs typeface="Malgun Gothic"/>
-                <a:ea typeface="Malgun Gothic"/>
-                <a:sym typeface="Malgun Gothic"/>
-              </a:rPr>
-              <a:t>+0.6sig</a:t>
-            </a:r>
-          </a:p>
-        </p:txBody>
-      </p:sp>
-      <p:sp>
-        <p:nvSpPr>
-          <p:cNvPr id="18" name=""/>
-          <p:cNvSpPr>
-            <a:spLocks noGrp="1"/>
-          </p:cNvSpPr>
-          <p:nvPr>
-            <p:ph/>
-          </p:nvPr>
-        </p:nvSpPr>
-        <p:spPr>
-          <a:xfrm>
-            <a:off x="3230118" y="4128516"/>
-            <a:ext cx="2827782" cy="228600"/>
-          </a:xfrm>
-          <a:solidFill>
-            <a:srgbClr val="FFFFFF">
-              <a:alpha val="0"/>
-            </a:srgbClr>
-          </a:solidFill>
-        </p:spPr>
-        <p:txBody>
-          <a:bodyPr/>
-          <a:lstStyle/>
-          <a:p>
-            <a:pPr algn="ctr" marL="0" marR="0">
-              <a:lnSpc>
-                <a:spcPct val="100000"/>
-              </a:lnSpc>
-              <a:spcBef>
-                <a:spcPts val="0"/>
-              </a:spcBef>
-              <a:spcAft>
-                <a:spcPts val="0"/>
-              </a:spcAft>
-              <a:buNone/>
-            </a:pPr>
-            <a:r>
-              <a:rPr cap="none" sz="900" i="0" b="1" u="none" strike="noStrike">
-                <a:solidFill>
-                  <a:srgbClr val="D62728">
-                    <a:alpha val="100000"/>
-                  </a:srgbClr>
-                </a:solidFill>
-                <a:latin typeface="Malgun Gothic"/>
-                <a:cs typeface="Malgun Gothic"/>
-                <a:ea typeface="Malgun Gothic"/>
-                <a:sym typeface="Malgun Gothic"/>
-              </a:rPr>
-              <a:t>⬤</a:t>
-            </a:r>
-            <a:r>
-              <a:rPr cap="none" sz="900" i="0" b="0" u="none" strike="noStrike">
-                <a:solidFill>
-                  <a:srgbClr val="333333">
-                    <a:alpha val="100000"/>
-                  </a:srgbClr>
-                </a:solidFill>
-                <a:latin typeface="Malgun Gothic"/>
-                <a:cs typeface="Malgun Gothic"/>
-                <a:ea typeface="Malgun Gothic"/>
-                <a:sym typeface="Malgun Gothic"/>
-              </a:rPr>
-              <a:t> (ML_MSR_034) Peri_PB_034</a:t>
-            </a:r>
-          </a:p>
-        </p:txBody>
-      </p:sp>
-      <p:pic>
-        <p:nvPicPr>
-          <p:cNvPr id="19" name="" descr=""/>
-          <p:cNvPicPr>
-            <a:picLocks noGrp="1"/>
-          </p:cNvPicPr>
-          <p:nvPr>
-            <p:ph/>
-          </p:nvPr>
-        </p:nvPicPr>
-        <p:blipFill>
-          <a:blip r:embed="rId7"/>
-          <a:stretch>
-            <a:fillRect/>
-          </a:stretch>
-        </p:blipFill>
-        <p:spPr>
-          <a:xfrm>
-            <a:off x="3230118" y="4398264"/>
-            <a:ext cx="2827782" cy="1965960"/>
-          </a:xfrm>
-          <a:prstGeom prst="rect">
-            <a:avLst/>
-          </a:prstGeom>
-        </p:spPr>
-      </p:pic>
-      <p:sp>
-        <p:nvSpPr>
-          <p:cNvPr id="20" name=""/>
-          <p:cNvSpPr>
-            <a:spLocks noGrp="1"/>
-          </p:cNvSpPr>
-          <p:nvPr>
-            <p:ph/>
-          </p:nvPr>
-        </p:nvSpPr>
-        <p:spPr>
-          <a:xfrm>
-            <a:off x="5463540" y="4425696"/>
-            <a:ext cx="566928" cy="164592"/>
-          </a:xfrm>
-          <a:solidFill>
-            <a:srgbClr val="FFFFFF">
-              <a:alpha val="0"/>
-            </a:srgbClr>
-          </a:solidFill>
-        </p:spPr>
-        <p:txBody>
-          <a:bodyPr/>
-          <a:lstStyle/>
-          <a:p>
-            <a:pPr algn="r" marL="0" marR="0">
-              <a:lnSpc>
-                <a:spcPct val="100000"/>
-              </a:lnSpc>
-              <a:spcBef>
-                <a:spcPts val="0"/>
-              </a:spcBef>
-              <a:spcAft>
-                <a:spcPts val="0"/>
-              </a:spcAft>
-              <a:buNone/>
-            </a:pPr>
-            <a:r>
-              <a:rPr cap="none" sz="800" i="0" b="0" u="none" strike="noStrike">
-                <a:solidFill>
-                  <a:srgbClr val="808080">
-                    <a:alpha val="100000"/>
-                  </a:srgbClr>
-                </a:solidFill>
-                <a:latin typeface="Malgun Gothic"/>
-                <a:cs typeface="Malgun Gothic"/>
-                <a:ea typeface="Malgun Gothic"/>
-                <a:sym typeface="Malgun Gothic"/>
-              </a:rPr>
-              <a:t>+0.5sig</a:t>
-            </a:r>
-          </a:p>
-        </p:txBody>
-      </p:sp>
-      <p:sp>
-        <p:nvSpPr>
-          <p:cNvPr id="21" name=""/>
-          <p:cNvSpPr>
-            <a:spLocks noGrp="1"/>
-          </p:cNvSpPr>
-          <p:nvPr>
-            <p:ph/>
-          </p:nvPr>
-        </p:nvSpPr>
-        <p:spPr>
-          <a:xfrm>
             <a:off x="4642866" y="6446520"/>
             <a:ext cx="2903220" cy="219456"/>
           </a:xfrm>
@@ -20293,7 +19996,7 @@
       </p:sp>
       <p:sp>
         <p:nvSpPr>
-          <p:cNvPr id="22" name="DRB_Title_Placeholder"/>
+          <p:cNvPr id="16" name="DRB_Title_Placeholder"/>
           <p:cNvSpPr>
             <a:spLocks noGrp="1"/>
           </p:cNvSpPr>
@@ -20342,7 +20045,7 @@
       </p:sp>
       <p:sp>
         <p:nvSpPr>
-          <p:cNvPr id="23" name="DRB_Body_Placeholder"/>
+          <p:cNvPr id="17" name="DRB_Body_Placeholder"/>
           <p:cNvSpPr>
             <a:spLocks noGrp="1"/>
           </p:cNvSpPr>
@@ -20398,7 +20101,7 @@
                 <a:ea typeface="Malgun Gothic"/>
                 <a:sym typeface="Malgun Gothic"/>
               </a:rPr>
-              <a:t> Category: Category2: PB | Showing MSR 1-6 of 6</a:t>
+              <a:t> Category: Category2: PB | Showing MSR 1-4 of 4</a:t>
             </a:r>
           </a:p>
           <a:p>
@@ -20447,7 +20150,7 @@
       </p:sp>
       <p:sp>
         <p:nvSpPr>
-          <p:cNvPr id="24" name=""/>
+          <p:cNvPr id="18" name=""/>
           <p:cNvSpPr>
             <a:spLocks noGrp="1"/>
           </p:cNvSpPr>
@@ -20576,7 +20279,7 @@
                           <a:ea typeface="Malgun Gothic"/>
                           <a:sym typeface="Malgun Gothic"/>
                         </a:rPr>
-                        <a:t>Category2: WLS - MSR 1-3 of 3</a:t>
+                        <a:t>Category2: WLS - MSR 1 of 1</a:t>
                       </a:r>
                     </a:p>
                   </a:txBody>
@@ -22180,302 +21883,6 @@
         </p:nvSpPr>
         <p:spPr>
           <a:xfrm>
-            <a:off x="3230118" y="1842516"/>
-            <a:ext cx="2827782" cy="228600"/>
-          </a:xfrm>
-          <a:solidFill>
-            <a:srgbClr val="FFFFFF">
-              <a:alpha val="0"/>
-            </a:srgbClr>
-          </a:solidFill>
-        </p:spPr>
-        <p:txBody>
-          <a:bodyPr/>
-          <a:lstStyle/>
-          <a:p>
-            <a:pPr algn="ctr" marL="0" marR="0">
-              <a:lnSpc>
-                <a:spcPct val="100000"/>
-              </a:lnSpc>
-              <a:spcBef>
-                <a:spcPts val="0"/>
-              </a:spcBef>
-              <a:spcAft>
-                <a:spcPts val="0"/>
-              </a:spcAft>
-              <a:buNone/>
-            </a:pPr>
-            <a:r>
-              <a:rPr cap="none" sz="900" i="0" b="1" u="none" strike="noStrike">
-                <a:solidFill>
-                  <a:srgbClr val="D62728">
-                    <a:alpha val="100000"/>
-                  </a:srgbClr>
-                </a:solidFill>
-                <a:latin typeface="Malgun Gothic"/>
-                <a:cs typeface="Malgun Gothic"/>
-                <a:ea typeface="Malgun Gothic"/>
-                <a:sym typeface="Malgun Gothic"/>
-              </a:rPr>
-              <a:t>⬤</a:t>
-            </a:r>
-            <a:r>
-              <a:rPr cap="none" sz="900" i="0" b="0" u="none" strike="noStrike">
-                <a:solidFill>
-                  <a:srgbClr val="333333">
-                    <a:alpha val="100000"/>
-                  </a:srgbClr>
-                </a:solidFill>
-                <a:latin typeface="Malgun Gothic"/>
-                <a:cs typeface="Malgun Gothic"/>
-                <a:ea typeface="Malgun Gothic"/>
-                <a:sym typeface="Malgun Gothic"/>
-              </a:rPr>
-              <a:t> (ML_MSR_196) Cell_WLS_196</a:t>
-            </a:r>
-          </a:p>
-        </p:txBody>
-      </p:sp>
-      <p:pic>
-        <p:nvPicPr>
-          <p:cNvPr id="7" name="" descr=""/>
-          <p:cNvPicPr>
-            <a:picLocks noGrp="1"/>
-          </p:cNvPicPr>
-          <p:nvPr>
-            <p:ph/>
-          </p:nvPr>
-        </p:nvPicPr>
-        <p:blipFill>
-          <a:blip r:embed="rId3"/>
-          <a:stretch>
-            <a:fillRect/>
-          </a:stretch>
-        </p:blipFill>
-        <p:spPr>
-          <a:xfrm>
-            <a:off x="3230118" y="2112264"/>
-            <a:ext cx="2827782" cy="1965960"/>
-          </a:xfrm>
-          <a:prstGeom prst="rect">
-            <a:avLst/>
-          </a:prstGeom>
-        </p:spPr>
-      </p:pic>
-      <p:sp>
-        <p:nvSpPr>
-          <p:cNvPr id="8" name=""/>
-          <p:cNvSpPr>
-            <a:spLocks noGrp="1"/>
-          </p:cNvSpPr>
-          <p:nvPr>
-            <p:ph/>
-          </p:nvPr>
-        </p:nvSpPr>
-        <p:spPr>
-          <a:xfrm>
-            <a:off x="5463540" y="2139696"/>
-            <a:ext cx="566928" cy="164592"/>
-          </a:xfrm>
-          <a:solidFill>
-            <a:srgbClr val="FFFFFF">
-              <a:alpha val="0"/>
-            </a:srgbClr>
-          </a:solidFill>
-        </p:spPr>
-        <p:txBody>
-          <a:bodyPr/>
-          <a:lstStyle/>
-          <a:p>
-            <a:pPr algn="r" marL="0" marR="0">
-              <a:lnSpc>
-                <a:spcPct val="100000"/>
-              </a:lnSpc>
-              <a:spcBef>
-                <a:spcPts val="0"/>
-              </a:spcBef>
-              <a:spcAft>
-                <a:spcPts val="0"/>
-              </a:spcAft>
-              <a:buNone/>
-            </a:pPr>
-            <a:r>
-              <a:rPr cap="none" sz="800" i="0" b="0" u="none" strike="noStrike">
-                <a:solidFill>
-                  <a:srgbClr val="808080">
-                    <a:alpha val="100000"/>
-                  </a:srgbClr>
-                </a:solidFill>
-                <a:latin typeface="Malgun Gothic"/>
-                <a:cs typeface="Malgun Gothic"/>
-                <a:ea typeface="Malgun Gothic"/>
-                <a:sym typeface="Malgun Gothic"/>
-              </a:rPr>
-              <a:t>+0.5sig</a:t>
-            </a:r>
-          </a:p>
-        </p:txBody>
-      </p:sp>
-      <p:sp>
-        <p:nvSpPr>
-          <p:cNvPr id="9" name=""/>
-          <p:cNvSpPr>
-            <a:spLocks noGrp="1"/>
-          </p:cNvSpPr>
-          <p:nvPr>
-            <p:ph/>
-          </p:nvPr>
-        </p:nvSpPr>
-        <p:spPr>
-          <a:xfrm>
-            <a:off x="6131052" y="1842516"/>
-            <a:ext cx="2827782" cy="228600"/>
-          </a:xfrm>
-          <a:solidFill>
-            <a:srgbClr val="FFFFFF">
-              <a:alpha val="0"/>
-            </a:srgbClr>
-          </a:solidFill>
-        </p:spPr>
-        <p:txBody>
-          <a:bodyPr/>
-          <a:lstStyle/>
-          <a:p>
-            <a:pPr algn="ctr" marL="0" marR="0">
-              <a:lnSpc>
-                <a:spcPct val="100000"/>
-              </a:lnSpc>
-              <a:spcBef>
-                <a:spcPts val="0"/>
-              </a:spcBef>
-              <a:spcAft>
-                <a:spcPts val="0"/>
-              </a:spcAft>
-              <a:buNone/>
-            </a:pPr>
-            <a:r>
-              <a:rPr cap="none" sz="900" i="0" b="1" u="none" strike="noStrike">
-                <a:solidFill>
-                  <a:srgbClr val="D62728">
-                    <a:alpha val="100000"/>
-                  </a:srgbClr>
-                </a:solidFill>
-                <a:latin typeface="Malgun Gothic"/>
-                <a:cs typeface="Malgun Gothic"/>
-                <a:ea typeface="Malgun Gothic"/>
-                <a:sym typeface="Malgun Gothic"/>
-              </a:rPr>
-              <a:t>⬤</a:t>
-            </a:r>
-            <a:r>
-              <a:rPr cap="none" sz="900" i="0" b="0" u="none" strike="noStrike">
-                <a:solidFill>
-                  <a:srgbClr val="333333">
-                    <a:alpha val="100000"/>
-                  </a:srgbClr>
-                </a:solidFill>
-                <a:latin typeface="Malgun Gothic"/>
-                <a:cs typeface="Malgun Gothic"/>
-                <a:ea typeface="Malgun Gothic"/>
-                <a:sym typeface="Malgun Gothic"/>
-              </a:rPr>
-              <a:t> (ML_MSR_193) Cell_WLS_193</a:t>
-            </a:r>
-          </a:p>
-        </p:txBody>
-      </p:sp>
-      <p:pic>
-        <p:nvPicPr>
-          <p:cNvPr id="10" name="" descr=""/>
-          <p:cNvPicPr>
-            <a:picLocks noGrp="1"/>
-          </p:cNvPicPr>
-          <p:nvPr>
-            <p:ph/>
-          </p:nvPr>
-        </p:nvPicPr>
-        <p:blipFill>
-          <a:blip r:embed="rId4"/>
-          <a:stretch>
-            <a:fillRect/>
-          </a:stretch>
-        </p:blipFill>
-        <p:spPr>
-          <a:xfrm>
-            <a:off x="6131052" y="2112264"/>
-            <a:ext cx="2827782" cy="1965960"/>
-          </a:xfrm>
-          <a:prstGeom prst="rect">
-            <a:avLst/>
-          </a:prstGeom>
-        </p:spPr>
-      </p:pic>
-      <p:sp>
-        <p:nvSpPr>
-          <p:cNvPr id="11" name=""/>
-          <p:cNvSpPr>
-            <a:spLocks noGrp="1"/>
-          </p:cNvSpPr>
-          <p:nvPr>
-            <p:ph/>
-          </p:nvPr>
-        </p:nvSpPr>
-        <p:spPr>
-          <a:xfrm>
-            <a:off x="8364474" y="2139696"/>
-            <a:ext cx="566928" cy="164592"/>
-          </a:xfrm>
-          <a:solidFill>
-            <a:srgbClr val="FFFFFF">
-              <a:alpha val="0"/>
-            </a:srgbClr>
-          </a:solidFill>
-        </p:spPr>
-        <p:txBody>
-          <a:bodyPr/>
-          <a:lstStyle/>
-          <a:p>
-            <a:pPr algn="r" marL="0" marR="0">
-              <a:lnSpc>
-                <a:spcPct val="100000"/>
-              </a:lnSpc>
-              <a:spcBef>
-                <a:spcPts val="0"/>
-              </a:spcBef>
-              <a:spcAft>
-                <a:spcPts val="0"/>
-              </a:spcAft>
-              <a:buNone/>
-            </a:pPr>
-            <a:r>
-              <a:rPr cap="none" sz="800" i="0" b="0" u="none" strike="noStrike">
-                <a:solidFill>
-                  <a:srgbClr val="808080">
-                    <a:alpha val="100000"/>
-                  </a:srgbClr>
-                </a:solidFill>
-                <a:latin typeface="Malgun Gothic"/>
-                <a:cs typeface="Malgun Gothic"/>
-                <a:ea typeface="Malgun Gothic"/>
-                <a:sym typeface="Malgun Gothic"/>
-              </a:rPr>
-              <a:t>+0.5sig</a:t>
-            </a:r>
-          </a:p>
-        </p:txBody>
-      </p:sp>
-      <p:sp>
-        <p:nvSpPr>
-          <p:cNvPr id="12" name=""/>
-          <p:cNvSpPr>
-            <a:spLocks noGrp="1"/>
-          </p:cNvSpPr>
-          <p:nvPr>
-            <p:ph/>
-          </p:nvPr>
-        </p:nvSpPr>
-        <p:spPr>
-          <a:xfrm>
             <a:off x="4642866" y="6446520"/>
             <a:ext cx="2903220" cy="219456"/>
           </a:xfrm>
@@ -22548,7 +21955,7 @@
       </p:sp>
       <p:sp>
         <p:nvSpPr>
-          <p:cNvPr id="13" name="DRB_Title_Placeholder"/>
+          <p:cNvPr id="7" name="DRB_Title_Placeholder"/>
           <p:cNvSpPr>
             <a:spLocks noGrp="1"/>
           </p:cNvSpPr>
@@ -22597,7 +22004,7 @@
       </p:sp>
       <p:sp>
         <p:nvSpPr>
-          <p:cNvPr id="14" name="DRB_Body_Placeholder"/>
+          <p:cNvPr id="8" name="DRB_Body_Placeholder"/>
           <p:cNvSpPr>
             <a:spLocks noGrp="1"/>
           </p:cNvSpPr>
@@ -22653,7 +22060,7 @@
                 <a:ea typeface="Malgun Gothic"/>
                 <a:sym typeface="Malgun Gothic"/>
               </a:rPr>
-              <a:t> Category: Category2: WLS | Showing MSR 1-3 of 3</a:t>
+              <a:t> Category: Category2: WLS | Showing MSR 1-1 of 1</a:t>
             </a:r>
           </a:p>
           <a:p>
@@ -22702,7 +22109,7 @@
       </p:sp>
       <p:sp>
         <p:nvSpPr>
-          <p:cNvPr id="15" name=""/>
+          <p:cNvPr id="9" name=""/>
           <p:cNvSpPr>
             <a:spLocks noGrp="1"/>
           </p:cNvSpPr>
@@ -22831,7 +22238,7 @@
                           <a:ea typeface="Malgun Gothic"/>
                           <a:sym typeface="Malgun Gothic"/>
                         </a:rPr>
-                        <a:t>Category2: BL - MSR 1-6 of 6</a:t>
+                        <a:t>Category2: BL - MSR 1 of 1</a:t>
                       </a:r>
                     </a:p>
                   </a:txBody>
@@ -24435,746 +23842,6 @@
         </p:nvSpPr>
         <p:spPr>
           <a:xfrm>
-            <a:off x="3230118" y="1842516"/>
-            <a:ext cx="2827782" cy="228600"/>
-          </a:xfrm>
-          <a:solidFill>
-            <a:srgbClr val="FFFFFF">
-              <a:alpha val="0"/>
-            </a:srgbClr>
-          </a:solidFill>
-        </p:spPr>
-        <p:txBody>
-          <a:bodyPr/>
-          <a:lstStyle/>
-          <a:p>
-            <a:pPr algn="ctr" marL="0" marR="0">
-              <a:lnSpc>
-                <a:spcPct val="100000"/>
-              </a:lnSpc>
-              <a:spcBef>
-                <a:spcPts val="0"/>
-              </a:spcBef>
-              <a:spcAft>
-                <a:spcPts val="0"/>
-              </a:spcAft>
-              <a:buNone/>
-            </a:pPr>
-            <a:r>
-              <a:rPr cap="none" sz="900" i="0" b="1" u="none" strike="noStrike">
-                <a:solidFill>
-                  <a:srgbClr val="D62728">
-                    <a:alpha val="100000"/>
-                  </a:srgbClr>
-                </a:solidFill>
-                <a:latin typeface="Malgun Gothic"/>
-                <a:cs typeface="Malgun Gothic"/>
-                <a:ea typeface="Malgun Gothic"/>
-                <a:sym typeface="Malgun Gothic"/>
-              </a:rPr>
-              <a:t>⬤</a:t>
-            </a:r>
-            <a:r>
-              <a:rPr cap="none" sz="900" i="0" b="0" u="none" strike="noStrike">
-                <a:solidFill>
-                  <a:srgbClr val="333333">
-                    <a:alpha val="100000"/>
-                  </a:srgbClr>
-                </a:solidFill>
-                <a:latin typeface="Malgun Gothic"/>
-                <a:cs typeface="Malgun Gothic"/>
-                <a:ea typeface="Malgun Gothic"/>
-                <a:sym typeface="Malgun Gothic"/>
-              </a:rPr>
-              <a:t> (ML_MSR_122) Peri_BL_122</a:t>
-            </a:r>
-          </a:p>
-        </p:txBody>
-      </p:sp>
-      <p:pic>
-        <p:nvPicPr>
-          <p:cNvPr id="7" name="" descr=""/>
-          <p:cNvPicPr>
-            <a:picLocks noGrp="1"/>
-          </p:cNvPicPr>
-          <p:nvPr>
-            <p:ph/>
-          </p:nvPr>
-        </p:nvPicPr>
-        <p:blipFill>
-          <a:blip r:embed="rId3"/>
-          <a:stretch>
-            <a:fillRect/>
-          </a:stretch>
-        </p:blipFill>
-        <p:spPr>
-          <a:xfrm>
-            <a:off x="3230118" y="2112264"/>
-            <a:ext cx="2827782" cy="1965960"/>
-          </a:xfrm>
-          <a:prstGeom prst="rect">
-            <a:avLst/>
-          </a:prstGeom>
-        </p:spPr>
-      </p:pic>
-      <p:sp>
-        <p:nvSpPr>
-          <p:cNvPr id="8" name=""/>
-          <p:cNvSpPr>
-            <a:spLocks noGrp="1"/>
-          </p:cNvSpPr>
-          <p:nvPr>
-            <p:ph/>
-          </p:nvPr>
-        </p:nvSpPr>
-        <p:spPr>
-          <a:xfrm>
-            <a:off x="5463540" y="2139696"/>
-            <a:ext cx="566928" cy="164592"/>
-          </a:xfrm>
-          <a:solidFill>
-            <a:srgbClr val="FFFFFF">
-              <a:alpha val="0"/>
-            </a:srgbClr>
-          </a:solidFill>
-        </p:spPr>
-        <p:txBody>
-          <a:bodyPr/>
-          <a:lstStyle/>
-          <a:p>
-            <a:pPr algn="r" marL="0" marR="0">
-              <a:lnSpc>
-                <a:spcPct val="100000"/>
-              </a:lnSpc>
-              <a:spcBef>
-                <a:spcPts val="0"/>
-              </a:spcBef>
-              <a:spcAft>
-                <a:spcPts val="0"/>
-              </a:spcAft>
-              <a:buNone/>
-            </a:pPr>
-            <a:r>
-              <a:rPr cap="none" sz="800" i="0" b="0" u="none" strike="noStrike">
-                <a:solidFill>
-                  <a:srgbClr val="808080">
-                    <a:alpha val="100000"/>
-                  </a:srgbClr>
-                </a:solidFill>
-                <a:latin typeface="Malgun Gothic"/>
-                <a:cs typeface="Malgun Gothic"/>
-                <a:ea typeface="Malgun Gothic"/>
-                <a:sym typeface="Malgun Gothic"/>
-              </a:rPr>
-              <a:t>+0.7sig</a:t>
-            </a:r>
-          </a:p>
-        </p:txBody>
-      </p:sp>
-      <p:sp>
-        <p:nvSpPr>
-          <p:cNvPr id="9" name=""/>
-          <p:cNvSpPr>
-            <a:spLocks noGrp="1"/>
-          </p:cNvSpPr>
-          <p:nvPr>
-            <p:ph/>
-          </p:nvPr>
-        </p:nvSpPr>
-        <p:spPr>
-          <a:xfrm>
-            <a:off x="6131052" y="1842516"/>
-            <a:ext cx="2827782" cy="228600"/>
-          </a:xfrm>
-          <a:solidFill>
-            <a:srgbClr val="FFFFFF">
-              <a:alpha val="0"/>
-            </a:srgbClr>
-          </a:solidFill>
-        </p:spPr>
-        <p:txBody>
-          <a:bodyPr/>
-          <a:lstStyle/>
-          <a:p>
-            <a:pPr algn="ctr" marL="0" marR="0">
-              <a:lnSpc>
-                <a:spcPct val="100000"/>
-              </a:lnSpc>
-              <a:spcBef>
-                <a:spcPts val="0"/>
-              </a:spcBef>
-              <a:spcAft>
-                <a:spcPts val="0"/>
-              </a:spcAft>
-              <a:buNone/>
-            </a:pPr>
-            <a:r>
-              <a:rPr cap="none" sz="900" i="0" b="1" u="none" strike="noStrike">
-                <a:solidFill>
-                  <a:srgbClr val="D62728">
-                    <a:alpha val="100000"/>
-                  </a:srgbClr>
-                </a:solidFill>
-                <a:latin typeface="Malgun Gothic"/>
-                <a:cs typeface="Malgun Gothic"/>
-                <a:ea typeface="Malgun Gothic"/>
-                <a:sym typeface="Malgun Gothic"/>
-              </a:rPr>
-              <a:t>⬤</a:t>
-            </a:r>
-            <a:r>
-              <a:rPr cap="none" sz="900" i="0" b="0" u="none" strike="noStrike">
-                <a:solidFill>
-                  <a:srgbClr val="333333">
-                    <a:alpha val="100000"/>
-                  </a:srgbClr>
-                </a:solidFill>
-                <a:latin typeface="Malgun Gothic"/>
-                <a:cs typeface="Malgun Gothic"/>
-                <a:ea typeface="Malgun Gothic"/>
-                <a:sym typeface="Malgun Gothic"/>
-              </a:rPr>
-              <a:t> (ML_MSR_139) Peri_BL_139</a:t>
-            </a:r>
-          </a:p>
-        </p:txBody>
-      </p:sp>
-      <p:pic>
-        <p:nvPicPr>
-          <p:cNvPr id="10" name="" descr=""/>
-          <p:cNvPicPr>
-            <a:picLocks noGrp="1"/>
-          </p:cNvPicPr>
-          <p:nvPr>
-            <p:ph/>
-          </p:nvPr>
-        </p:nvPicPr>
-        <p:blipFill>
-          <a:blip r:embed="rId4"/>
-          <a:stretch>
-            <a:fillRect/>
-          </a:stretch>
-        </p:blipFill>
-        <p:spPr>
-          <a:xfrm>
-            <a:off x="6131052" y="2112264"/>
-            <a:ext cx="2827782" cy="1965960"/>
-          </a:xfrm>
-          <a:prstGeom prst="rect">
-            <a:avLst/>
-          </a:prstGeom>
-        </p:spPr>
-      </p:pic>
-      <p:sp>
-        <p:nvSpPr>
-          <p:cNvPr id="11" name=""/>
-          <p:cNvSpPr>
-            <a:spLocks noGrp="1"/>
-          </p:cNvSpPr>
-          <p:nvPr>
-            <p:ph/>
-          </p:nvPr>
-        </p:nvSpPr>
-        <p:spPr>
-          <a:xfrm>
-            <a:off x="8364474" y="2139696"/>
-            <a:ext cx="566928" cy="164592"/>
-          </a:xfrm>
-          <a:solidFill>
-            <a:srgbClr val="FFFFFF">
-              <a:alpha val="0"/>
-            </a:srgbClr>
-          </a:solidFill>
-        </p:spPr>
-        <p:txBody>
-          <a:bodyPr/>
-          <a:lstStyle/>
-          <a:p>
-            <a:pPr algn="r" marL="0" marR="0">
-              <a:lnSpc>
-                <a:spcPct val="100000"/>
-              </a:lnSpc>
-              <a:spcBef>
-                <a:spcPts val="0"/>
-              </a:spcBef>
-              <a:spcAft>
-                <a:spcPts val="0"/>
-              </a:spcAft>
-              <a:buNone/>
-            </a:pPr>
-            <a:r>
-              <a:rPr cap="none" sz="800" i="0" b="0" u="none" strike="noStrike">
-                <a:solidFill>
-                  <a:srgbClr val="808080">
-                    <a:alpha val="100000"/>
-                  </a:srgbClr>
-                </a:solidFill>
-                <a:latin typeface="Malgun Gothic"/>
-                <a:cs typeface="Malgun Gothic"/>
-                <a:ea typeface="Malgun Gothic"/>
-                <a:sym typeface="Malgun Gothic"/>
-              </a:rPr>
-              <a:t>+0.5sig</a:t>
-            </a:r>
-          </a:p>
-        </p:txBody>
-      </p:sp>
-      <p:sp>
-        <p:nvSpPr>
-          <p:cNvPr id="12" name=""/>
-          <p:cNvSpPr>
-            <a:spLocks noGrp="1"/>
-          </p:cNvSpPr>
-          <p:nvPr>
-            <p:ph/>
-          </p:nvPr>
-        </p:nvSpPr>
-        <p:spPr>
-          <a:xfrm>
-            <a:off x="9031986" y="1842516"/>
-            <a:ext cx="2827782" cy="228600"/>
-          </a:xfrm>
-          <a:solidFill>
-            <a:srgbClr val="FFFFFF">
-              <a:alpha val="0"/>
-            </a:srgbClr>
-          </a:solidFill>
-        </p:spPr>
-        <p:txBody>
-          <a:bodyPr/>
-          <a:lstStyle/>
-          <a:p>
-            <a:pPr algn="ctr" marL="0" marR="0">
-              <a:lnSpc>
-                <a:spcPct val="100000"/>
-              </a:lnSpc>
-              <a:spcBef>
-                <a:spcPts val="0"/>
-              </a:spcBef>
-              <a:spcAft>
-                <a:spcPts val="0"/>
-              </a:spcAft>
-              <a:buNone/>
-            </a:pPr>
-            <a:r>
-              <a:rPr cap="none" sz="900" i="0" b="1" u="none" strike="noStrike">
-                <a:solidFill>
-                  <a:srgbClr val="D62728">
-                    <a:alpha val="100000"/>
-                  </a:srgbClr>
-                </a:solidFill>
-                <a:latin typeface="Malgun Gothic"/>
-                <a:cs typeface="Malgun Gothic"/>
-                <a:ea typeface="Malgun Gothic"/>
-                <a:sym typeface="Malgun Gothic"/>
-              </a:rPr>
-              <a:t>⬤</a:t>
-            </a:r>
-            <a:r>
-              <a:rPr cap="none" sz="900" i="0" b="0" u="none" strike="noStrike">
-                <a:solidFill>
-                  <a:srgbClr val="333333">
-                    <a:alpha val="100000"/>
-                  </a:srgbClr>
-                </a:solidFill>
-                <a:latin typeface="Malgun Gothic"/>
-                <a:cs typeface="Malgun Gothic"/>
-                <a:ea typeface="Malgun Gothic"/>
-                <a:sym typeface="Malgun Gothic"/>
-              </a:rPr>
-              <a:t> (ML_MSR_141) Peri_BL_141</a:t>
-            </a:r>
-          </a:p>
-        </p:txBody>
-      </p:sp>
-      <p:pic>
-        <p:nvPicPr>
-          <p:cNvPr id="13" name="" descr=""/>
-          <p:cNvPicPr>
-            <a:picLocks noGrp="1"/>
-          </p:cNvPicPr>
-          <p:nvPr>
-            <p:ph/>
-          </p:nvPr>
-        </p:nvPicPr>
-        <p:blipFill>
-          <a:blip r:embed="rId5"/>
-          <a:stretch>
-            <a:fillRect/>
-          </a:stretch>
-        </p:blipFill>
-        <p:spPr>
-          <a:xfrm>
-            <a:off x="9031986" y="2112264"/>
-            <a:ext cx="2827782" cy="1965960"/>
-          </a:xfrm>
-          <a:prstGeom prst="rect">
-            <a:avLst/>
-          </a:prstGeom>
-        </p:spPr>
-      </p:pic>
-      <p:sp>
-        <p:nvSpPr>
-          <p:cNvPr id="14" name=""/>
-          <p:cNvSpPr>
-            <a:spLocks noGrp="1"/>
-          </p:cNvSpPr>
-          <p:nvPr>
-            <p:ph/>
-          </p:nvPr>
-        </p:nvSpPr>
-        <p:spPr>
-          <a:xfrm>
-            <a:off x="11265408" y="2139696"/>
-            <a:ext cx="566928" cy="164592"/>
-          </a:xfrm>
-          <a:solidFill>
-            <a:srgbClr val="FFFFFF">
-              <a:alpha val="0"/>
-            </a:srgbClr>
-          </a:solidFill>
-        </p:spPr>
-        <p:txBody>
-          <a:bodyPr/>
-          <a:lstStyle/>
-          <a:p>
-            <a:pPr algn="r" marL="0" marR="0">
-              <a:lnSpc>
-                <a:spcPct val="100000"/>
-              </a:lnSpc>
-              <a:spcBef>
-                <a:spcPts val="0"/>
-              </a:spcBef>
-              <a:spcAft>
-                <a:spcPts val="0"/>
-              </a:spcAft>
-              <a:buNone/>
-            </a:pPr>
-            <a:r>
-              <a:rPr cap="none" sz="800" i="0" b="0" u="none" strike="noStrike">
-                <a:solidFill>
-                  <a:srgbClr val="808080">
-                    <a:alpha val="100000"/>
-                  </a:srgbClr>
-                </a:solidFill>
-                <a:latin typeface="Malgun Gothic"/>
-                <a:cs typeface="Malgun Gothic"/>
-                <a:ea typeface="Malgun Gothic"/>
-                <a:sym typeface="Malgun Gothic"/>
-              </a:rPr>
-              <a:t>+0.5sig</a:t>
-            </a:r>
-          </a:p>
-        </p:txBody>
-      </p:sp>
-      <p:sp>
-        <p:nvSpPr>
-          <p:cNvPr id="15" name=""/>
-          <p:cNvSpPr>
-            <a:spLocks noGrp="1"/>
-          </p:cNvSpPr>
-          <p:nvPr>
-            <p:ph/>
-          </p:nvPr>
-        </p:nvSpPr>
-        <p:spPr>
-          <a:xfrm>
-            <a:off x="329184" y="4128516"/>
-            <a:ext cx="2827782" cy="228600"/>
-          </a:xfrm>
-          <a:solidFill>
-            <a:srgbClr val="FFFFFF">
-              <a:alpha val="0"/>
-            </a:srgbClr>
-          </a:solidFill>
-        </p:spPr>
-        <p:txBody>
-          <a:bodyPr/>
-          <a:lstStyle/>
-          <a:p>
-            <a:pPr algn="ctr" marL="0" marR="0">
-              <a:lnSpc>
-                <a:spcPct val="100000"/>
-              </a:lnSpc>
-              <a:spcBef>
-                <a:spcPts val="0"/>
-              </a:spcBef>
-              <a:spcAft>
-                <a:spcPts val="0"/>
-              </a:spcAft>
-              <a:buNone/>
-            </a:pPr>
-            <a:r>
-              <a:rPr cap="none" sz="900" i="0" b="1" u="none" strike="noStrike">
-                <a:solidFill>
-                  <a:srgbClr val="D62728">
-                    <a:alpha val="100000"/>
-                  </a:srgbClr>
-                </a:solidFill>
-                <a:latin typeface="Malgun Gothic"/>
-                <a:cs typeface="Malgun Gothic"/>
-                <a:ea typeface="Malgun Gothic"/>
-                <a:sym typeface="Malgun Gothic"/>
-              </a:rPr>
-              <a:t>⬤</a:t>
-            </a:r>
-            <a:r>
-              <a:rPr cap="none" sz="900" i="0" b="0" u="none" strike="noStrike">
-                <a:solidFill>
-                  <a:srgbClr val="333333">
-                    <a:alpha val="100000"/>
-                  </a:srgbClr>
-                </a:solidFill>
-                <a:latin typeface="Malgun Gothic"/>
-                <a:cs typeface="Malgun Gothic"/>
-                <a:ea typeface="Malgun Gothic"/>
-                <a:sym typeface="Malgun Gothic"/>
-              </a:rPr>
-              <a:t> (ML_MSR_121) Peri_BL_121</a:t>
-            </a:r>
-          </a:p>
-        </p:txBody>
-      </p:sp>
-      <p:pic>
-        <p:nvPicPr>
-          <p:cNvPr id="16" name="" descr=""/>
-          <p:cNvPicPr>
-            <a:picLocks noGrp="1"/>
-          </p:cNvPicPr>
-          <p:nvPr>
-            <p:ph/>
-          </p:nvPr>
-        </p:nvPicPr>
-        <p:blipFill>
-          <a:blip r:embed="rId6"/>
-          <a:stretch>
-            <a:fillRect/>
-          </a:stretch>
-        </p:blipFill>
-        <p:spPr>
-          <a:xfrm>
-            <a:off x="329184" y="4398264"/>
-            <a:ext cx="2827782" cy="1965960"/>
-          </a:xfrm>
-          <a:prstGeom prst="rect">
-            <a:avLst/>
-          </a:prstGeom>
-        </p:spPr>
-      </p:pic>
-      <p:sp>
-        <p:nvSpPr>
-          <p:cNvPr id="17" name=""/>
-          <p:cNvSpPr>
-            <a:spLocks noGrp="1"/>
-          </p:cNvSpPr>
-          <p:nvPr>
-            <p:ph/>
-          </p:nvPr>
-        </p:nvSpPr>
-        <p:spPr>
-          <a:xfrm>
-            <a:off x="2562606" y="4425696"/>
-            <a:ext cx="566928" cy="164592"/>
-          </a:xfrm>
-          <a:solidFill>
-            <a:srgbClr val="FFFFFF">
-              <a:alpha val="0"/>
-            </a:srgbClr>
-          </a:solidFill>
-        </p:spPr>
-        <p:txBody>
-          <a:bodyPr/>
-          <a:lstStyle/>
-          <a:p>
-            <a:pPr algn="r" marL="0" marR="0">
-              <a:lnSpc>
-                <a:spcPct val="100000"/>
-              </a:lnSpc>
-              <a:spcBef>
-                <a:spcPts val="0"/>
-              </a:spcBef>
-              <a:spcAft>
-                <a:spcPts val="0"/>
-              </a:spcAft>
-              <a:buNone/>
-            </a:pPr>
-            <a:r>
-              <a:rPr cap="none" sz="800" i="0" b="0" u="none" strike="noStrike">
-                <a:solidFill>
-                  <a:srgbClr val="808080">
-                    <a:alpha val="100000"/>
-                  </a:srgbClr>
-                </a:solidFill>
-                <a:latin typeface="Malgun Gothic"/>
-                <a:cs typeface="Malgun Gothic"/>
-                <a:ea typeface="Malgun Gothic"/>
-                <a:sym typeface="Malgun Gothic"/>
-              </a:rPr>
-              <a:t>+0.5sig</a:t>
-            </a:r>
-          </a:p>
-        </p:txBody>
-      </p:sp>
-      <p:sp>
-        <p:nvSpPr>
-          <p:cNvPr id="18" name=""/>
-          <p:cNvSpPr>
-            <a:spLocks noGrp="1"/>
-          </p:cNvSpPr>
-          <p:nvPr>
-            <p:ph/>
-          </p:nvPr>
-        </p:nvSpPr>
-        <p:spPr>
-          <a:xfrm>
-            <a:off x="3230118" y="4128516"/>
-            <a:ext cx="2827782" cy="228600"/>
-          </a:xfrm>
-          <a:solidFill>
-            <a:srgbClr val="FFFFFF">
-              <a:alpha val="0"/>
-            </a:srgbClr>
-          </a:solidFill>
-        </p:spPr>
-        <p:txBody>
-          <a:bodyPr/>
-          <a:lstStyle/>
-          <a:p>
-            <a:pPr algn="ctr" marL="0" marR="0">
-              <a:lnSpc>
-                <a:spcPct val="100000"/>
-              </a:lnSpc>
-              <a:spcBef>
-                <a:spcPts val="0"/>
-              </a:spcBef>
-              <a:spcAft>
-                <a:spcPts val="0"/>
-              </a:spcAft>
-              <a:buNone/>
-            </a:pPr>
-            <a:r>
-              <a:rPr cap="none" sz="900" i="0" b="1" u="none" strike="noStrike">
-                <a:solidFill>
-                  <a:srgbClr val="D62728">
-                    <a:alpha val="100000"/>
-                  </a:srgbClr>
-                </a:solidFill>
-                <a:latin typeface="Malgun Gothic"/>
-                <a:cs typeface="Malgun Gothic"/>
-                <a:ea typeface="Malgun Gothic"/>
-                <a:sym typeface="Malgun Gothic"/>
-              </a:rPr>
-              <a:t>⬤</a:t>
-            </a:r>
-            <a:r>
-              <a:rPr cap="none" sz="900" i="0" b="0" u="none" strike="noStrike">
-                <a:solidFill>
-                  <a:srgbClr val="333333">
-                    <a:alpha val="100000"/>
-                  </a:srgbClr>
-                </a:solidFill>
-                <a:latin typeface="Malgun Gothic"/>
-                <a:cs typeface="Malgun Gothic"/>
-                <a:ea typeface="Malgun Gothic"/>
-                <a:sym typeface="Malgun Gothic"/>
-              </a:rPr>
-              <a:t> (ML_MSR_101) Peri_BL_101</a:t>
-            </a:r>
-          </a:p>
-        </p:txBody>
-      </p:sp>
-      <p:pic>
-        <p:nvPicPr>
-          <p:cNvPr id="19" name="" descr=""/>
-          <p:cNvPicPr>
-            <a:picLocks noGrp="1"/>
-          </p:cNvPicPr>
-          <p:nvPr>
-            <p:ph/>
-          </p:nvPr>
-        </p:nvPicPr>
-        <p:blipFill>
-          <a:blip r:embed="rId7"/>
-          <a:stretch>
-            <a:fillRect/>
-          </a:stretch>
-        </p:blipFill>
-        <p:spPr>
-          <a:xfrm>
-            <a:off x="3230118" y="4398264"/>
-            <a:ext cx="2827782" cy="1965960"/>
-          </a:xfrm>
-          <a:prstGeom prst="rect">
-            <a:avLst/>
-          </a:prstGeom>
-        </p:spPr>
-      </p:pic>
-      <p:sp>
-        <p:nvSpPr>
-          <p:cNvPr id="20" name=""/>
-          <p:cNvSpPr>
-            <a:spLocks noGrp="1"/>
-          </p:cNvSpPr>
-          <p:nvPr>
-            <p:ph/>
-          </p:nvPr>
-        </p:nvSpPr>
-        <p:spPr>
-          <a:xfrm>
-            <a:off x="5463540" y="4425696"/>
-            <a:ext cx="566928" cy="164592"/>
-          </a:xfrm>
-          <a:solidFill>
-            <a:srgbClr val="FFFFFF">
-              <a:alpha val="0"/>
-            </a:srgbClr>
-          </a:solidFill>
-        </p:spPr>
-        <p:txBody>
-          <a:bodyPr/>
-          <a:lstStyle/>
-          <a:p>
-            <a:pPr algn="r" marL="0" marR="0">
-              <a:lnSpc>
-                <a:spcPct val="100000"/>
-              </a:lnSpc>
-              <a:spcBef>
-                <a:spcPts val="0"/>
-              </a:spcBef>
-              <a:spcAft>
-                <a:spcPts val="0"/>
-              </a:spcAft>
-              <a:buNone/>
-            </a:pPr>
-            <a:r>
-              <a:rPr cap="none" sz="800" i="0" b="0" u="none" strike="noStrike">
-                <a:solidFill>
-                  <a:srgbClr val="808080">
-                    <a:alpha val="100000"/>
-                  </a:srgbClr>
-                </a:solidFill>
-                <a:latin typeface="Malgun Gothic"/>
-                <a:cs typeface="Malgun Gothic"/>
-                <a:ea typeface="Malgun Gothic"/>
-                <a:sym typeface="Malgun Gothic"/>
-              </a:rPr>
-              <a:t>+0.5sig</a:t>
-            </a:r>
-          </a:p>
-        </p:txBody>
-      </p:sp>
-      <p:sp>
-        <p:nvSpPr>
-          <p:cNvPr id="21" name=""/>
-          <p:cNvSpPr>
-            <a:spLocks noGrp="1"/>
-          </p:cNvSpPr>
-          <p:nvPr>
-            <p:ph/>
-          </p:nvPr>
-        </p:nvSpPr>
-        <p:spPr>
-          <a:xfrm>
             <a:off x="4642866" y="6446520"/>
             <a:ext cx="2903220" cy="219456"/>
           </a:xfrm>
@@ -25247,7 +23914,7 @@
       </p:sp>
       <p:sp>
         <p:nvSpPr>
-          <p:cNvPr id="22" name="DRB_Title_Placeholder"/>
+          <p:cNvPr id="7" name="DRB_Title_Placeholder"/>
           <p:cNvSpPr>
             <a:spLocks noGrp="1"/>
           </p:cNvSpPr>
@@ -25296,7 +23963,7 @@
       </p:sp>
       <p:sp>
         <p:nvSpPr>
-          <p:cNvPr id="23" name="DRB_Body_Placeholder"/>
+          <p:cNvPr id="8" name="DRB_Body_Placeholder"/>
           <p:cNvSpPr>
             <a:spLocks noGrp="1"/>
           </p:cNvSpPr>
@@ -25352,7 +24019,7 @@
                 <a:ea typeface="Malgun Gothic"/>
                 <a:sym typeface="Malgun Gothic"/>
               </a:rPr>
-              <a:t> Category: Category2: BL | Showing MSR 1-6 of 6</a:t>
+              <a:t> Category: Category2: BL | Showing MSR 1-1 of 1</a:t>
             </a:r>
           </a:p>
           <a:p>
@@ -25401,7 +24068,7 @@
       </p:sp>
       <p:sp>
         <p:nvSpPr>
-          <p:cNvPr id="24" name=""/>
+          <p:cNvPr id="9" name=""/>
           <p:cNvSpPr>
             <a:spLocks noGrp="1"/>
           </p:cNvSpPr>
@@ -25530,7 +24197,7 @@
                           <a:ea typeface="Malgun Gothic"/>
                           <a:sym typeface="Malgun Gothic"/>
                         </a:rPr>
-                        <a:t>Category2: WTC - MSR 1-4 of 4</a:t>
+                        <a:t>Category2: WTC - MSR 1-2 of 2</a:t>
                       </a:r>
                     </a:p>
                   </a:txBody>
@@ -27282,302 +25949,6 @@
         </p:nvSpPr>
         <p:spPr>
           <a:xfrm>
-            <a:off x="6131052" y="1842516"/>
-            <a:ext cx="2827782" cy="228600"/>
-          </a:xfrm>
-          <a:solidFill>
-            <a:srgbClr val="FFFFFF">
-              <a:alpha val="0"/>
-            </a:srgbClr>
-          </a:solidFill>
-        </p:spPr>
-        <p:txBody>
-          <a:bodyPr/>
-          <a:lstStyle/>
-          <a:p>
-            <a:pPr algn="ctr" marL="0" marR="0">
-              <a:lnSpc>
-                <a:spcPct val="100000"/>
-              </a:lnSpc>
-              <a:spcBef>
-                <a:spcPts val="0"/>
-              </a:spcBef>
-              <a:spcAft>
-                <a:spcPts val="0"/>
-              </a:spcAft>
-              <a:buNone/>
-            </a:pPr>
-            <a:r>
-              <a:rPr cap="none" sz="900" i="0" b="1" u="none" strike="noStrike">
-                <a:solidFill>
-                  <a:srgbClr val="D62728">
-                    <a:alpha val="100000"/>
-                  </a:srgbClr>
-                </a:solidFill>
-                <a:latin typeface="Malgun Gothic"/>
-                <a:cs typeface="Malgun Gothic"/>
-                <a:ea typeface="Malgun Gothic"/>
-                <a:sym typeface="Malgun Gothic"/>
-              </a:rPr>
-              <a:t>⬤</a:t>
-            </a:r>
-            <a:r>
-              <a:rPr cap="none" sz="900" i="0" b="0" u="none" strike="noStrike">
-                <a:solidFill>
-                  <a:srgbClr val="333333">
-                    <a:alpha val="100000"/>
-                  </a:srgbClr>
-                </a:solidFill>
-                <a:latin typeface="Malgun Gothic"/>
-                <a:cs typeface="Malgun Gothic"/>
-                <a:ea typeface="Malgun Gothic"/>
-                <a:sym typeface="Malgun Gothic"/>
-              </a:rPr>
-              <a:t> (ML_MSR_290) Cell_WTC_290</a:t>
-            </a:r>
-          </a:p>
-        </p:txBody>
-      </p:sp>
-      <p:pic>
-        <p:nvPicPr>
-          <p:cNvPr id="10" name="" descr=""/>
-          <p:cNvPicPr>
-            <a:picLocks noGrp="1"/>
-          </p:cNvPicPr>
-          <p:nvPr>
-            <p:ph/>
-          </p:nvPr>
-        </p:nvPicPr>
-        <p:blipFill>
-          <a:blip r:embed="rId4"/>
-          <a:stretch>
-            <a:fillRect/>
-          </a:stretch>
-        </p:blipFill>
-        <p:spPr>
-          <a:xfrm>
-            <a:off x="6131052" y="2112264"/>
-            <a:ext cx="2827782" cy="1965960"/>
-          </a:xfrm>
-          <a:prstGeom prst="rect">
-            <a:avLst/>
-          </a:prstGeom>
-        </p:spPr>
-      </p:pic>
-      <p:sp>
-        <p:nvSpPr>
-          <p:cNvPr id="11" name=""/>
-          <p:cNvSpPr>
-            <a:spLocks noGrp="1"/>
-          </p:cNvSpPr>
-          <p:nvPr>
-            <p:ph/>
-          </p:nvPr>
-        </p:nvSpPr>
-        <p:spPr>
-          <a:xfrm>
-            <a:off x="8364474" y="2139696"/>
-            <a:ext cx="566928" cy="164592"/>
-          </a:xfrm>
-          <a:solidFill>
-            <a:srgbClr val="FFFFFF">
-              <a:alpha val="0"/>
-            </a:srgbClr>
-          </a:solidFill>
-        </p:spPr>
-        <p:txBody>
-          <a:bodyPr/>
-          <a:lstStyle/>
-          <a:p>
-            <a:pPr algn="r" marL="0" marR="0">
-              <a:lnSpc>
-                <a:spcPct val="100000"/>
-              </a:lnSpc>
-              <a:spcBef>
-                <a:spcPts val="0"/>
-              </a:spcBef>
-              <a:spcAft>
-                <a:spcPts val="0"/>
-              </a:spcAft>
-              <a:buNone/>
-            </a:pPr>
-            <a:r>
-              <a:rPr cap="none" sz="800" i="0" b="0" u="none" strike="noStrike">
-                <a:solidFill>
-                  <a:srgbClr val="808080">
-                    <a:alpha val="100000"/>
-                  </a:srgbClr>
-                </a:solidFill>
-                <a:latin typeface="Malgun Gothic"/>
-                <a:cs typeface="Malgun Gothic"/>
-                <a:ea typeface="Malgun Gothic"/>
-                <a:sym typeface="Malgun Gothic"/>
-              </a:rPr>
-              <a:t>+0.5sig</a:t>
-            </a:r>
-          </a:p>
-        </p:txBody>
-      </p:sp>
-      <p:sp>
-        <p:nvSpPr>
-          <p:cNvPr id="12" name=""/>
-          <p:cNvSpPr>
-            <a:spLocks noGrp="1"/>
-          </p:cNvSpPr>
-          <p:nvPr>
-            <p:ph/>
-          </p:nvPr>
-        </p:nvSpPr>
-        <p:spPr>
-          <a:xfrm>
-            <a:off x="9031986" y="1842516"/>
-            <a:ext cx="2827782" cy="228600"/>
-          </a:xfrm>
-          <a:solidFill>
-            <a:srgbClr val="FFFFFF">
-              <a:alpha val="0"/>
-            </a:srgbClr>
-          </a:solidFill>
-        </p:spPr>
-        <p:txBody>
-          <a:bodyPr/>
-          <a:lstStyle/>
-          <a:p>
-            <a:pPr algn="ctr" marL="0" marR="0">
-              <a:lnSpc>
-                <a:spcPct val="100000"/>
-              </a:lnSpc>
-              <a:spcBef>
-                <a:spcPts val="0"/>
-              </a:spcBef>
-              <a:spcAft>
-                <a:spcPts val="0"/>
-              </a:spcAft>
-              <a:buNone/>
-            </a:pPr>
-            <a:r>
-              <a:rPr cap="none" sz="900" i="0" b="1" u="none" strike="noStrike">
-                <a:solidFill>
-                  <a:srgbClr val="D62728">
-                    <a:alpha val="100000"/>
-                  </a:srgbClr>
-                </a:solidFill>
-                <a:latin typeface="Malgun Gothic"/>
-                <a:cs typeface="Malgun Gothic"/>
-                <a:ea typeface="Malgun Gothic"/>
-                <a:sym typeface="Malgun Gothic"/>
-              </a:rPr>
-              <a:t>⬤</a:t>
-            </a:r>
-            <a:r>
-              <a:rPr cap="none" sz="900" i="0" b="0" u="none" strike="noStrike">
-                <a:solidFill>
-                  <a:srgbClr val="333333">
-                    <a:alpha val="100000"/>
-                  </a:srgbClr>
-                </a:solidFill>
-                <a:latin typeface="Malgun Gothic"/>
-                <a:cs typeface="Malgun Gothic"/>
-                <a:ea typeface="Malgun Gothic"/>
-                <a:sym typeface="Malgun Gothic"/>
-              </a:rPr>
-              <a:t> (ML_MSR_271) Cell_WTC_271</a:t>
-            </a:r>
-          </a:p>
-        </p:txBody>
-      </p:sp>
-      <p:pic>
-        <p:nvPicPr>
-          <p:cNvPr id="13" name="" descr=""/>
-          <p:cNvPicPr>
-            <a:picLocks noGrp="1"/>
-          </p:cNvPicPr>
-          <p:nvPr>
-            <p:ph/>
-          </p:nvPr>
-        </p:nvPicPr>
-        <p:blipFill>
-          <a:blip r:embed="rId5"/>
-          <a:stretch>
-            <a:fillRect/>
-          </a:stretch>
-        </p:blipFill>
-        <p:spPr>
-          <a:xfrm>
-            <a:off x="9031986" y="2112264"/>
-            <a:ext cx="2827782" cy="1965960"/>
-          </a:xfrm>
-          <a:prstGeom prst="rect">
-            <a:avLst/>
-          </a:prstGeom>
-        </p:spPr>
-      </p:pic>
-      <p:sp>
-        <p:nvSpPr>
-          <p:cNvPr id="14" name=""/>
-          <p:cNvSpPr>
-            <a:spLocks noGrp="1"/>
-          </p:cNvSpPr>
-          <p:nvPr>
-            <p:ph/>
-          </p:nvPr>
-        </p:nvSpPr>
-        <p:spPr>
-          <a:xfrm>
-            <a:off x="11265408" y="2139696"/>
-            <a:ext cx="566928" cy="164592"/>
-          </a:xfrm>
-          <a:solidFill>
-            <a:srgbClr val="FFFFFF">
-              <a:alpha val="0"/>
-            </a:srgbClr>
-          </a:solidFill>
-        </p:spPr>
-        <p:txBody>
-          <a:bodyPr/>
-          <a:lstStyle/>
-          <a:p>
-            <a:pPr algn="r" marL="0" marR="0">
-              <a:lnSpc>
-                <a:spcPct val="100000"/>
-              </a:lnSpc>
-              <a:spcBef>
-                <a:spcPts val="0"/>
-              </a:spcBef>
-              <a:spcAft>
-                <a:spcPts val="0"/>
-              </a:spcAft>
-              <a:buNone/>
-            </a:pPr>
-            <a:r>
-              <a:rPr cap="none" sz="800" i="0" b="0" u="none" strike="noStrike">
-                <a:solidFill>
-                  <a:srgbClr val="808080">
-                    <a:alpha val="100000"/>
-                  </a:srgbClr>
-                </a:solidFill>
-                <a:latin typeface="Malgun Gothic"/>
-                <a:cs typeface="Malgun Gothic"/>
-                <a:ea typeface="Malgun Gothic"/>
-                <a:sym typeface="Malgun Gothic"/>
-              </a:rPr>
-              <a:t>+0.5sig</a:t>
-            </a:r>
-          </a:p>
-        </p:txBody>
-      </p:sp>
-      <p:sp>
-        <p:nvSpPr>
-          <p:cNvPr id="15" name=""/>
-          <p:cNvSpPr>
-            <a:spLocks noGrp="1"/>
-          </p:cNvSpPr>
-          <p:nvPr>
-            <p:ph/>
-          </p:nvPr>
-        </p:nvSpPr>
-        <p:spPr>
-          <a:xfrm>
             <a:off x="4642866" y="6446520"/>
             <a:ext cx="2903220" cy="219456"/>
           </a:xfrm>
@@ -27650,7 +26021,7 @@
       </p:sp>
       <p:sp>
         <p:nvSpPr>
-          <p:cNvPr id="16" name="DRB_Title_Placeholder"/>
+          <p:cNvPr id="10" name="DRB_Title_Placeholder"/>
           <p:cNvSpPr>
             <a:spLocks noGrp="1"/>
           </p:cNvSpPr>
@@ -27699,7 +26070,7 @@
       </p:sp>
       <p:sp>
         <p:nvSpPr>
-          <p:cNvPr id="17" name="DRB_Body_Placeholder"/>
+          <p:cNvPr id="11" name="DRB_Body_Placeholder"/>
           <p:cNvSpPr>
             <a:spLocks noGrp="1"/>
           </p:cNvSpPr>
@@ -27755,7 +26126,7 @@
                 <a:ea typeface="Malgun Gothic"/>
                 <a:sym typeface="Malgun Gothic"/>
               </a:rPr>
-              <a:t> Category: Category2: WTC | Showing MSR 1-4 of 4</a:t>
+              <a:t> Category: Category2: WTC | Showing MSR 1-2 of 2</a:t>
             </a:r>
           </a:p>
           <a:p>
@@ -27804,2706 +26175,7 @@
       </p:sp>
       <p:sp>
         <p:nvSpPr>
-          <p:cNvPr id="18" name=""/>
-          <p:cNvSpPr>
-            <a:spLocks noGrp="1"/>
-          </p:cNvSpPr>
-          <p:nvPr>
-            <p:ph/>
-          </p:nvPr>
-        </p:nvSpPr>
-        <p:spPr>
-          <a:xfrm>
-            <a:off x="8268012" y="6451200"/>
-            <a:ext cx="2520000" cy="237600"/>
-          </a:xfrm>
-          <a:solidFill>
-            <a:srgbClr val="FFFFFF">
-              <a:alpha val="0"/>
-            </a:srgbClr>
-          </a:solidFill>
-        </p:spPr>
-        <p:txBody>
-          <a:bodyPr/>
-          <a:lstStyle/>
-          <a:p>
-            <a:pPr algn="r" marL="0" marR="0">
-              <a:lnSpc>
-                <a:spcPct val="100000"/>
-              </a:lnSpc>
-              <a:spcBef>
-                <a:spcPts val="0"/>
-              </a:spcBef>
-              <a:spcAft>
-                <a:spcPts val="0"/>
-              </a:spcAft>
-              <a:buNone/>
-            </a:pPr>
-            <a:r>
-              <a:rPr cap="none" sz="1200" i="0" b="0" u="none" strike="noStrike">
-                <a:solidFill>
-                  <a:srgbClr val="7F7F7F">
-                    <a:alpha val="100000"/>
-                  </a:srgbClr>
-                </a:solidFill>
-                <a:latin typeface="Malgun Gothic"/>
-                <a:cs typeface="Malgun Gothic"/>
-                <a:ea typeface="Malgun Gothic"/>
-                <a:sym typeface="Malgun Gothic"/>
-              </a:rPr>
-              <a:t>Flash PE / 홍길동</a:t>
-            </a:r>
-          </a:p>
-        </p:txBody>
-      </p:sp>
-    </p:spTree>
-  </p:cSld>
-  <p:clrMapOvr>
-    <a:masterClrMapping/>
-  </p:clrMapOvr>
-</p:sld>
-</file>
-
-<file path=ppt/slides/slide7.xml><?xml version="1.0" encoding="utf-8"?>
-<p:sld xmlns:a="http://schemas.openxmlformats.org/drawingml/2006/main" xmlns:r="http://schemas.openxmlformats.org/officeDocument/2006/relationships" xmlns:p="http://schemas.openxmlformats.org/presentationml/2006/main">
-  <p:cSld>
-    <p:spTree>
-      <p:nvGrpSpPr>
-        <p:cNvPr id="1" name=""/>
-        <p:cNvGrpSpPr/>
-        <p:nvPr/>
-      </p:nvGrpSpPr>
-      <p:grpSpPr>
-        <a:xfrm>
-          <a:off x="0" y="0"/>
-          <a:ext cx="0" cy="0"/>
-          <a:chOff x="0" y="0"/>
-          <a:chExt cx="0" cy="0"/>
-        </a:xfrm>
-      </p:grpSpPr>
-      <p:graphicFrame>
-        <p:nvGraphicFramePr>
-          <p:cNvPr id="2" name=""/>
-          <p:cNvGraphicFramePr>
-            <a:graphicFrameLocks noGrp="true"/>
-          </p:cNvGraphicFramePr>
-          <p:nvPr/>
-        </p:nvGraphicFramePr>
-        <p:xfrm rot="0">
-          <a:off x="292608" y="1536192"/>
-          <a:ext cx="11603736" cy="4864608"/>
-        </p:xfrm>
-        <a:graphic>
-          <a:graphicData uri="http://schemas.openxmlformats.org/drawingml/2006/table">
-            <a:tbl>
-              <a:tblPr/>
-              <a:tblGrid>
-                <a:gridCol w="2900934"/>
-                <a:gridCol w="2900934"/>
-                <a:gridCol w="2900934"/>
-                <a:gridCol w="2900934"/>
-              </a:tblGrid>
-              <a:tr h="292608">
-                <a:tc gridSpan="4">
-                  <a:txBody>
-                    <a:bodyPr/>
-                    <a:lstStyle/>
-                    <a:p>
-                      <a:pPr algn="ctr" marL="0" marR="0">
-                        <a:lnSpc>
-                          <a:spcPct val="100000"/>
-                        </a:lnSpc>
-                        <a:spcBef>
-                          <a:spcPts val="0"/>
-                        </a:spcBef>
-                        <a:spcAft>
-                          <a:spcPts val="0"/>
-                        </a:spcAft>
-                        <a:buNone/>
-                      </a:pPr>
-                      <a:r>
-                        <a:rPr cap="none" sz="1000" i="0" b="1" u="none" strike="noStrike">
-                          <a:solidFill>
-                            <a:srgbClr val="333333">
-                              <a:alpha val="100000"/>
-                            </a:srgbClr>
-                          </a:solidFill>
-                          <a:latin typeface="Malgun Gothic"/>
-                          <a:cs typeface="Malgun Gothic"/>
-                          <a:ea typeface="Malgun Gothic"/>
-                          <a:sym typeface="Malgun Gothic"/>
-                        </a:rPr>
-                        <a:t>Category2: TCMC - MSR 1-6 of 6</a:t>
-                      </a:r>
-                    </a:p>
-                  </a:txBody>
-                  <a:tcPr anchor="ctr" marB="0" marT="0" marR="0" marL="0">
-                    <a:lnL algn="ctr" cmpd="sng" cap="flat" w="6350">
-                      <a:solidFill>
-                        <a:srgbClr val="D9D9D9">
-                          <a:alpha val="100000"/>
-                        </a:srgbClr>
-                      </a:solidFill>
-                      <a:prstDash val="solid"/>
-                    </a:lnL>
-                    <a:lnR algn="ctr" cmpd="sng" cap="flat" w="6350">
-                      <a:solidFill>
-                        <a:srgbClr val="D9D9D9">
-                          <a:alpha val="100000"/>
-                        </a:srgbClr>
-                      </a:solidFill>
-                      <a:prstDash val="solid"/>
-                    </a:lnR>
-                    <a:lnT algn="ctr" cmpd="sng" cap="flat" w="6350">
-                      <a:solidFill>
-                        <a:srgbClr val="D9D9D9">
-                          <a:alpha val="100000"/>
-                        </a:srgbClr>
-                      </a:solidFill>
-                      <a:prstDash val="solid"/>
-                    </a:lnT>
-                    <a:lnB algn="ctr" cmpd="sng" cap="flat" w="6350">
-                      <a:solidFill>
-                        <a:srgbClr val="D9D9D9">
-                          <a:alpha val="100000"/>
-                        </a:srgbClr>
-                      </a:solidFill>
-                      <a:prstDash val="solid"/>
-                    </a:lnB>
-                    <a:solidFill>
-                      <a:srgbClr val="E0E0E0">
-                        <a:alpha val="100000"/>
-                      </a:srgbClr>
-                    </a:solidFill>
-                  </a:tcPr>
-                </a:tc>
-                <a:tc hMerge="true">
-                  <a:txBody>
-                    <a:bodyPr/>
-                    <a:lstStyle/>
-                    <a:p>
-                      <a:pPr algn="ctr" marL="0" marR="0">
-                        <a:lnSpc>
-                          <a:spcPct val="100000"/>
-                        </a:lnSpc>
-                        <a:spcBef>
-                          <a:spcPts val="0"/>
-                        </a:spcBef>
-                        <a:spcAft>
-                          <a:spcPts val="0"/>
-                        </a:spcAft>
-                        <a:buNone/>
-                      </a:pPr>
-                      <a:r>
-                        <a:rPr cap="none" sz="1000" i="0" b="1" u="none" strike="noStrike">
-                          <a:solidFill>
-                            <a:srgbClr val="333333">
-                              <a:alpha val="100000"/>
-                            </a:srgbClr>
-                          </a:solidFill>
-                          <a:latin typeface="Malgun Gothic"/>
-                          <a:cs typeface="Malgun Gothic"/>
-                          <a:ea typeface="Malgun Gothic"/>
-                          <a:sym typeface="Malgun Gothic"/>
-                        </a:rPr>
-                        <a:t> </a:t>
-                      </a:r>
-                    </a:p>
-                  </a:txBody>
-                  <a:tcPr anchor="ctr" marB="0" marT="0" marR="0" marL="0">
-                    <a:lnL algn="ctr" cmpd="sng" cap="flat" w="6350">
-                      <a:solidFill>
-                        <a:srgbClr val="D9D9D9">
-                          <a:alpha val="100000"/>
-                        </a:srgbClr>
-                      </a:solidFill>
-                      <a:prstDash val="solid"/>
-                    </a:lnL>
-                    <a:lnR algn="ctr" cmpd="sng" cap="flat" w="6350">
-                      <a:solidFill>
-                        <a:srgbClr val="D9D9D9">
-                          <a:alpha val="100000"/>
-                        </a:srgbClr>
-                      </a:solidFill>
-                      <a:prstDash val="solid"/>
-                    </a:lnR>
-                    <a:lnT algn="ctr" cmpd="sng" cap="flat" w="6350">
-                      <a:solidFill>
-                        <a:srgbClr val="D9D9D9">
-                          <a:alpha val="100000"/>
-                        </a:srgbClr>
-                      </a:solidFill>
-                      <a:prstDash val="solid"/>
-                    </a:lnT>
-                    <a:lnB algn="ctr" cmpd="sng" cap="flat" w="6350">
-                      <a:solidFill>
-                        <a:srgbClr val="D9D9D9">
-                          <a:alpha val="100000"/>
-                        </a:srgbClr>
-                      </a:solidFill>
-                      <a:prstDash val="solid"/>
-                    </a:lnB>
-                    <a:solidFill>
-                      <a:srgbClr val="E0E0E0">
-                        <a:alpha val="100000"/>
-                      </a:srgbClr>
-                    </a:solidFill>
-                  </a:tcPr>
-                </a:tc>
-                <a:tc hMerge="true">
-                  <a:txBody>
-                    <a:bodyPr/>
-                    <a:lstStyle/>
-                    <a:p>
-                      <a:pPr algn="ctr" marL="0" marR="0">
-                        <a:lnSpc>
-                          <a:spcPct val="100000"/>
-                        </a:lnSpc>
-                        <a:spcBef>
-                          <a:spcPts val="0"/>
-                        </a:spcBef>
-                        <a:spcAft>
-                          <a:spcPts val="0"/>
-                        </a:spcAft>
-                        <a:buNone/>
-                      </a:pPr>
-                      <a:r>
-                        <a:rPr cap="none" sz="1000" i="0" b="1" u="none" strike="noStrike">
-                          <a:solidFill>
-                            <a:srgbClr val="333333">
-                              <a:alpha val="100000"/>
-                            </a:srgbClr>
-                          </a:solidFill>
-                          <a:latin typeface="Malgun Gothic"/>
-                          <a:cs typeface="Malgun Gothic"/>
-                          <a:ea typeface="Malgun Gothic"/>
-                          <a:sym typeface="Malgun Gothic"/>
-                        </a:rPr>
-                        <a:t> </a:t>
-                      </a:r>
-                    </a:p>
-                  </a:txBody>
-                  <a:tcPr anchor="ctr" marB="0" marT="0" marR="0" marL="0">
-                    <a:lnL algn="ctr" cmpd="sng" cap="flat" w="6350">
-                      <a:solidFill>
-                        <a:srgbClr val="D9D9D9">
-                          <a:alpha val="100000"/>
-                        </a:srgbClr>
-                      </a:solidFill>
-                      <a:prstDash val="solid"/>
-                    </a:lnL>
-                    <a:lnR algn="ctr" cmpd="sng" cap="flat" w="6350">
-                      <a:solidFill>
-                        <a:srgbClr val="D9D9D9">
-                          <a:alpha val="100000"/>
-                        </a:srgbClr>
-                      </a:solidFill>
-                      <a:prstDash val="solid"/>
-                    </a:lnR>
-                    <a:lnT algn="ctr" cmpd="sng" cap="flat" w="6350">
-                      <a:solidFill>
-                        <a:srgbClr val="D9D9D9">
-                          <a:alpha val="100000"/>
-                        </a:srgbClr>
-                      </a:solidFill>
-                      <a:prstDash val="solid"/>
-                    </a:lnT>
-                    <a:lnB algn="ctr" cmpd="sng" cap="flat" w="6350">
-                      <a:solidFill>
-                        <a:srgbClr val="D9D9D9">
-                          <a:alpha val="100000"/>
-                        </a:srgbClr>
-                      </a:solidFill>
-                      <a:prstDash val="solid"/>
-                    </a:lnB>
-                    <a:solidFill>
-                      <a:srgbClr val="E0E0E0">
-                        <a:alpha val="100000"/>
-                      </a:srgbClr>
-                    </a:solidFill>
-                  </a:tcPr>
-                </a:tc>
-                <a:tc hMerge="true">
-                  <a:txBody>
-                    <a:bodyPr/>
-                    <a:lstStyle/>
-                    <a:p>
-                      <a:pPr algn="ctr" marL="0" marR="0">
-                        <a:lnSpc>
-                          <a:spcPct val="100000"/>
-                        </a:lnSpc>
-                        <a:spcBef>
-                          <a:spcPts val="0"/>
-                        </a:spcBef>
-                        <a:spcAft>
-                          <a:spcPts val="0"/>
-                        </a:spcAft>
-                        <a:buNone/>
-                      </a:pPr>
-                      <a:r>
-                        <a:rPr cap="none" sz="1000" i="0" b="1" u="none" strike="noStrike">
-                          <a:solidFill>
-                            <a:srgbClr val="333333">
-                              <a:alpha val="100000"/>
-                            </a:srgbClr>
-                          </a:solidFill>
-                          <a:latin typeface="Malgun Gothic"/>
-                          <a:cs typeface="Malgun Gothic"/>
-                          <a:ea typeface="Malgun Gothic"/>
-                          <a:sym typeface="Malgun Gothic"/>
-                        </a:rPr>
-                        <a:t> </a:t>
-                      </a:r>
-                    </a:p>
-                  </a:txBody>
-                  <a:tcPr anchor="ctr" marB="0" marT="0" marR="0" marL="0">
-                    <a:lnL algn="ctr" cmpd="sng" cap="flat" w="6350">
-                      <a:solidFill>
-                        <a:srgbClr val="D9D9D9">
-                          <a:alpha val="100000"/>
-                        </a:srgbClr>
-                      </a:solidFill>
-                      <a:prstDash val="solid"/>
-                    </a:lnL>
-                    <a:lnR algn="ctr" cmpd="sng" cap="flat" w="6350">
-                      <a:solidFill>
-                        <a:srgbClr val="D9D9D9">
-                          <a:alpha val="100000"/>
-                        </a:srgbClr>
-                      </a:solidFill>
-                      <a:prstDash val="solid"/>
-                    </a:lnR>
-                    <a:lnT algn="ctr" cmpd="sng" cap="flat" w="6350">
-                      <a:solidFill>
-                        <a:srgbClr val="D9D9D9">
-                          <a:alpha val="100000"/>
-                        </a:srgbClr>
-                      </a:solidFill>
-                      <a:prstDash val="solid"/>
-                    </a:lnT>
-                    <a:lnB algn="ctr" cmpd="sng" cap="flat" w="6350">
-                      <a:solidFill>
-                        <a:srgbClr val="D9D9D9">
-                          <a:alpha val="100000"/>
-                        </a:srgbClr>
-                      </a:solidFill>
-                      <a:prstDash val="solid"/>
-                    </a:lnB>
-                    <a:solidFill>
-                      <a:srgbClr val="E0E0E0">
-                        <a:alpha val="100000"/>
-                      </a:srgbClr>
-                    </a:solidFill>
-                  </a:tcPr>
-                </a:tc>
-              </a:tr>
-              <a:tr h="256032">
-                <a:tc>
-                  <a:txBody>
-                    <a:bodyPr/>
-                    <a:lstStyle/>
-                    <a:p>
-                      <a:pPr algn="ctr" marL="0" marR="0">
-                        <a:lnSpc>
-                          <a:spcPct val="100000"/>
-                        </a:lnSpc>
-                        <a:spcBef>
-                          <a:spcPts val="0"/>
-                        </a:spcBef>
-                        <a:spcAft>
-                          <a:spcPts val="0"/>
-                        </a:spcAft>
-                        <a:buNone/>
-                      </a:pPr>
-                      <a:r>
-                        <a:rPr cap="none" sz="800" i="0" b="0" u="none" strike="noStrike">
-                          <a:solidFill>
-                            <a:srgbClr val="000000">
-                              <a:alpha val="100000"/>
-                            </a:srgbClr>
-                          </a:solidFill>
-                          <a:latin typeface="Malgun Gothic"/>
-                          <a:cs typeface="Malgun Gothic"/>
-                          <a:ea typeface="Malgun Gothic"/>
-                          <a:sym typeface="Malgun Gothic"/>
-                        </a:rPr>
-                        <a:t> </a:t>
-                      </a:r>
-                    </a:p>
-                  </a:txBody>
-                  <a:tcPr anchor="ctr" marB="0" marT="0" marR="0" marL="0">
-                    <a:lnL algn="ctr" cmpd="sng" cap="flat" w="6350">
-                      <a:solidFill>
-                        <a:srgbClr val="D9D9D9">
-                          <a:alpha val="100000"/>
-                        </a:srgbClr>
-                      </a:solidFill>
-                      <a:prstDash val="solid"/>
-                    </a:lnL>
-                    <a:lnR algn="ctr" cmpd="sng" cap="flat" w="6350">
-                      <a:solidFill>
-                        <a:srgbClr val="D9D9D9">
-                          <a:alpha val="100000"/>
-                        </a:srgbClr>
-                      </a:solidFill>
-                      <a:prstDash val="solid"/>
-                    </a:lnR>
-                    <a:lnT algn="ctr" cmpd="sng" cap="flat" w="6350">
-                      <a:solidFill>
-                        <a:srgbClr val="D9D9D9">
-                          <a:alpha val="100000"/>
-                        </a:srgbClr>
-                      </a:solidFill>
-                      <a:prstDash val="solid"/>
-                    </a:lnT>
-                    <a:lnB algn="ctr" cmpd="sng" cap="flat" w="6350">
-                      <a:solidFill>
-                        <a:srgbClr val="D9D9D9">
-                          <a:alpha val="100000"/>
-                        </a:srgbClr>
-                      </a:solidFill>
-                      <a:prstDash val="solid"/>
-                    </a:lnB>
-                    <a:solidFill>
-                      <a:srgbClr val="F2F2F2">
-                        <a:alpha val="100000"/>
-                      </a:srgbClr>
-                    </a:solidFill>
-                  </a:tcPr>
-                </a:tc>
-                <a:tc>
-                  <a:txBody>
-                    <a:bodyPr/>
-                    <a:lstStyle/>
-                    <a:p>
-                      <a:pPr algn="ctr" marL="0" marR="0">
-                        <a:lnSpc>
-                          <a:spcPct val="100000"/>
-                        </a:lnSpc>
-                        <a:spcBef>
-                          <a:spcPts val="0"/>
-                        </a:spcBef>
-                        <a:spcAft>
-                          <a:spcPts val="0"/>
-                        </a:spcAft>
-                        <a:buNone/>
-                      </a:pPr>
-                      <a:r>
-                        <a:rPr cap="none" sz="800" i="0" b="0" u="none" strike="noStrike">
-                          <a:solidFill>
-                            <a:srgbClr val="000000">
-                              <a:alpha val="100000"/>
-                            </a:srgbClr>
-                          </a:solidFill>
-                          <a:latin typeface="Malgun Gothic"/>
-                          <a:cs typeface="Malgun Gothic"/>
-                          <a:ea typeface="Malgun Gothic"/>
-                          <a:sym typeface="Malgun Gothic"/>
-                        </a:rPr>
-                        <a:t> </a:t>
-                      </a:r>
-                    </a:p>
-                  </a:txBody>
-                  <a:tcPr anchor="ctr" marB="0" marT="0" marR="0" marL="0">
-                    <a:lnL algn="ctr" cmpd="sng" cap="flat" w="6350">
-                      <a:solidFill>
-                        <a:srgbClr val="D9D9D9">
-                          <a:alpha val="100000"/>
-                        </a:srgbClr>
-                      </a:solidFill>
-                      <a:prstDash val="solid"/>
-                    </a:lnL>
-                    <a:lnR algn="ctr" cmpd="sng" cap="flat" w="6350">
-                      <a:solidFill>
-                        <a:srgbClr val="D9D9D9">
-                          <a:alpha val="100000"/>
-                        </a:srgbClr>
-                      </a:solidFill>
-                      <a:prstDash val="solid"/>
-                    </a:lnR>
-                    <a:lnT algn="ctr" cmpd="sng" cap="flat" w="6350">
-                      <a:solidFill>
-                        <a:srgbClr val="D9D9D9">
-                          <a:alpha val="100000"/>
-                        </a:srgbClr>
-                      </a:solidFill>
-                      <a:prstDash val="solid"/>
-                    </a:lnT>
-                    <a:lnB algn="ctr" cmpd="sng" cap="flat" w="6350">
-                      <a:solidFill>
-                        <a:srgbClr val="D9D9D9">
-                          <a:alpha val="100000"/>
-                        </a:srgbClr>
-                      </a:solidFill>
-                      <a:prstDash val="solid"/>
-                    </a:lnB>
-                    <a:solidFill>
-                      <a:srgbClr val="F2F2F2">
-                        <a:alpha val="100000"/>
-                      </a:srgbClr>
-                    </a:solidFill>
-                  </a:tcPr>
-                </a:tc>
-                <a:tc>
-                  <a:txBody>
-                    <a:bodyPr/>
-                    <a:lstStyle/>
-                    <a:p>
-                      <a:pPr algn="ctr" marL="0" marR="0">
-                        <a:lnSpc>
-                          <a:spcPct val="100000"/>
-                        </a:lnSpc>
-                        <a:spcBef>
-                          <a:spcPts val="0"/>
-                        </a:spcBef>
-                        <a:spcAft>
-                          <a:spcPts val="0"/>
-                        </a:spcAft>
-                        <a:buNone/>
-                      </a:pPr>
-                      <a:r>
-                        <a:rPr cap="none" sz="800" i="0" b="0" u="none" strike="noStrike">
-                          <a:solidFill>
-                            <a:srgbClr val="000000">
-                              <a:alpha val="100000"/>
-                            </a:srgbClr>
-                          </a:solidFill>
-                          <a:latin typeface="Malgun Gothic"/>
-                          <a:cs typeface="Malgun Gothic"/>
-                          <a:ea typeface="Malgun Gothic"/>
-                          <a:sym typeface="Malgun Gothic"/>
-                        </a:rPr>
-                        <a:t> </a:t>
-                      </a:r>
-                    </a:p>
-                  </a:txBody>
-                  <a:tcPr anchor="ctr" marB="0" marT="0" marR="0" marL="0">
-                    <a:lnL algn="ctr" cmpd="sng" cap="flat" w="6350">
-                      <a:solidFill>
-                        <a:srgbClr val="D9D9D9">
-                          <a:alpha val="100000"/>
-                        </a:srgbClr>
-                      </a:solidFill>
-                      <a:prstDash val="solid"/>
-                    </a:lnL>
-                    <a:lnR algn="ctr" cmpd="sng" cap="flat" w="6350">
-                      <a:solidFill>
-                        <a:srgbClr val="D9D9D9">
-                          <a:alpha val="100000"/>
-                        </a:srgbClr>
-                      </a:solidFill>
-                      <a:prstDash val="solid"/>
-                    </a:lnR>
-                    <a:lnT algn="ctr" cmpd="sng" cap="flat" w="6350">
-                      <a:solidFill>
-                        <a:srgbClr val="D9D9D9">
-                          <a:alpha val="100000"/>
-                        </a:srgbClr>
-                      </a:solidFill>
-                      <a:prstDash val="solid"/>
-                    </a:lnT>
-                    <a:lnB algn="ctr" cmpd="sng" cap="flat" w="6350">
-                      <a:solidFill>
-                        <a:srgbClr val="D9D9D9">
-                          <a:alpha val="100000"/>
-                        </a:srgbClr>
-                      </a:solidFill>
-                      <a:prstDash val="solid"/>
-                    </a:lnB>
-                    <a:solidFill>
-                      <a:srgbClr val="F2F2F2">
-                        <a:alpha val="100000"/>
-                      </a:srgbClr>
-                    </a:solidFill>
-                  </a:tcPr>
-                </a:tc>
-                <a:tc>
-                  <a:txBody>
-                    <a:bodyPr/>
-                    <a:lstStyle/>
-                    <a:p>
-                      <a:pPr algn="ctr" marL="0" marR="0">
-                        <a:lnSpc>
-                          <a:spcPct val="100000"/>
-                        </a:lnSpc>
-                        <a:spcBef>
-                          <a:spcPts val="0"/>
-                        </a:spcBef>
-                        <a:spcAft>
-                          <a:spcPts val="0"/>
-                        </a:spcAft>
-                        <a:buNone/>
-                      </a:pPr>
-                      <a:r>
-                        <a:rPr cap="none" sz="800" i="0" b="0" u="none" strike="noStrike">
-                          <a:solidFill>
-                            <a:srgbClr val="000000">
-                              <a:alpha val="100000"/>
-                            </a:srgbClr>
-                          </a:solidFill>
-                          <a:latin typeface="Malgun Gothic"/>
-                          <a:cs typeface="Malgun Gothic"/>
-                          <a:ea typeface="Malgun Gothic"/>
-                          <a:sym typeface="Malgun Gothic"/>
-                        </a:rPr>
-                        <a:t> </a:t>
-                      </a:r>
-                    </a:p>
-                  </a:txBody>
-                  <a:tcPr anchor="ctr" marB="0" marT="0" marR="0" marL="0">
-                    <a:lnL algn="ctr" cmpd="sng" cap="flat" w="6350">
-                      <a:solidFill>
-                        <a:srgbClr val="D9D9D9">
-                          <a:alpha val="100000"/>
-                        </a:srgbClr>
-                      </a:solidFill>
-                      <a:prstDash val="solid"/>
-                    </a:lnL>
-                    <a:lnR algn="ctr" cmpd="sng" cap="flat" w="6350">
-                      <a:solidFill>
-                        <a:srgbClr val="D9D9D9">
-                          <a:alpha val="100000"/>
-                        </a:srgbClr>
-                      </a:solidFill>
-                      <a:prstDash val="solid"/>
-                    </a:lnR>
-                    <a:lnT algn="ctr" cmpd="sng" cap="flat" w="6350">
-                      <a:solidFill>
-                        <a:srgbClr val="D9D9D9">
-                          <a:alpha val="100000"/>
-                        </a:srgbClr>
-                      </a:solidFill>
-                      <a:prstDash val="solid"/>
-                    </a:lnT>
-                    <a:lnB algn="ctr" cmpd="sng" cap="flat" w="6350">
-                      <a:solidFill>
-                        <a:srgbClr val="D9D9D9">
-                          <a:alpha val="100000"/>
-                        </a:srgbClr>
-                      </a:solidFill>
-                      <a:prstDash val="solid"/>
-                    </a:lnB>
-                    <a:solidFill>
-                      <a:srgbClr val="F2F2F2">
-                        <a:alpha val="100000"/>
-                      </a:srgbClr>
-                    </a:solidFill>
-                  </a:tcPr>
-                </a:tc>
-              </a:tr>
-              <a:tr h="2029968">
-                <a:tc>
-                  <a:txBody>
-                    <a:bodyPr/>
-                    <a:lstStyle/>
-                    <a:p>
-                      <a:pPr algn="ctr" marL="0" marR="0">
-                        <a:lnSpc>
-                          <a:spcPct val="100000"/>
-                        </a:lnSpc>
-                        <a:spcBef>
-                          <a:spcPts val="0"/>
-                        </a:spcBef>
-                        <a:spcAft>
-                          <a:spcPts val="0"/>
-                        </a:spcAft>
-                        <a:buNone/>
-                      </a:pPr>
-                      <a:r>
-                        <a:rPr cap="none" sz="800" i="0" b="0" u="none" strike="noStrike">
-                          <a:solidFill>
-                            <a:srgbClr val="000000">
-                              <a:alpha val="100000"/>
-                            </a:srgbClr>
-                          </a:solidFill>
-                          <a:latin typeface="Malgun Gothic"/>
-                          <a:cs typeface="Malgun Gothic"/>
-                          <a:ea typeface="Malgun Gothic"/>
-                          <a:sym typeface="Malgun Gothic"/>
-                        </a:rPr>
-                        <a:t> </a:t>
-                      </a:r>
-                    </a:p>
-                  </a:txBody>
-                  <a:tcPr anchor="ctr" marB="0" marT="0" marR="0" marL="0">
-                    <a:lnL algn="ctr" cmpd="sng" cap="flat" w="6350">
-                      <a:solidFill>
-                        <a:srgbClr val="D9D9D9">
-                          <a:alpha val="100000"/>
-                        </a:srgbClr>
-                      </a:solidFill>
-                      <a:prstDash val="solid"/>
-                    </a:lnL>
-                    <a:lnR algn="ctr" cmpd="sng" cap="flat" w="6350">
-                      <a:solidFill>
-                        <a:srgbClr val="D9D9D9">
-                          <a:alpha val="100000"/>
-                        </a:srgbClr>
-                      </a:solidFill>
-                      <a:prstDash val="solid"/>
-                    </a:lnR>
-                    <a:lnT algn="ctr" cmpd="sng" cap="flat" w="6350">
-                      <a:solidFill>
-                        <a:srgbClr val="D9D9D9">
-                          <a:alpha val="100000"/>
-                        </a:srgbClr>
-                      </a:solidFill>
-                      <a:prstDash val="solid"/>
-                    </a:lnT>
-                    <a:lnB algn="ctr" cmpd="sng" cap="flat" w="6350">
-                      <a:solidFill>
-                        <a:srgbClr val="D9D9D9">
-                          <a:alpha val="100000"/>
-                        </a:srgbClr>
-                      </a:solidFill>
-                      <a:prstDash val="solid"/>
-                    </a:lnB>
-                    <a:solidFill>
-                      <a:srgbClr val="FFFFFF">
-                        <a:alpha val="0"/>
-                      </a:srgbClr>
-                    </a:solidFill>
-                  </a:tcPr>
-                </a:tc>
-                <a:tc>
-                  <a:txBody>
-                    <a:bodyPr/>
-                    <a:lstStyle/>
-                    <a:p>
-                      <a:pPr algn="ctr" marL="0" marR="0">
-                        <a:lnSpc>
-                          <a:spcPct val="100000"/>
-                        </a:lnSpc>
-                        <a:spcBef>
-                          <a:spcPts val="0"/>
-                        </a:spcBef>
-                        <a:spcAft>
-                          <a:spcPts val="0"/>
-                        </a:spcAft>
-                        <a:buNone/>
-                      </a:pPr>
-                      <a:r>
-                        <a:rPr cap="none" sz="800" i="0" b="0" u="none" strike="noStrike">
-                          <a:solidFill>
-                            <a:srgbClr val="000000">
-                              <a:alpha val="100000"/>
-                            </a:srgbClr>
-                          </a:solidFill>
-                          <a:latin typeface="Malgun Gothic"/>
-                          <a:cs typeface="Malgun Gothic"/>
-                          <a:ea typeface="Malgun Gothic"/>
-                          <a:sym typeface="Malgun Gothic"/>
-                        </a:rPr>
-                        <a:t> </a:t>
-                      </a:r>
-                    </a:p>
-                  </a:txBody>
-                  <a:tcPr anchor="ctr" marB="0" marT="0" marR="0" marL="0">
-                    <a:lnL algn="ctr" cmpd="sng" cap="flat" w="6350">
-                      <a:solidFill>
-                        <a:srgbClr val="D9D9D9">
-                          <a:alpha val="100000"/>
-                        </a:srgbClr>
-                      </a:solidFill>
-                      <a:prstDash val="solid"/>
-                    </a:lnL>
-                    <a:lnR algn="ctr" cmpd="sng" cap="flat" w="6350">
-                      <a:solidFill>
-                        <a:srgbClr val="D9D9D9">
-                          <a:alpha val="100000"/>
-                        </a:srgbClr>
-                      </a:solidFill>
-                      <a:prstDash val="solid"/>
-                    </a:lnR>
-                    <a:lnT algn="ctr" cmpd="sng" cap="flat" w="6350">
-                      <a:solidFill>
-                        <a:srgbClr val="D9D9D9">
-                          <a:alpha val="100000"/>
-                        </a:srgbClr>
-                      </a:solidFill>
-                      <a:prstDash val="solid"/>
-                    </a:lnT>
-                    <a:lnB algn="ctr" cmpd="sng" cap="flat" w="6350">
-                      <a:solidFill>
-                        <a:srgbClr val="D9D9D9">
-                          <a:alpha val="100000"/>
-                        </a:srgbClr>
-                      </a:solidFill>
-                      <a:prstDash val="solid"/>
-                    </a:lnB>
-                    <a:solidFill>
-                      <a:srgbClr val="FFFFFF">
-                        <a:alpha val="0"/>
-                      </a:srgbClr>
-                    </a:solidFill>
-                  </a:tcPr>
-                </a:tc>
-                <a:tc>
-                  <a:txBody>
-                    <a:bodyPr/>
-                    <a:lstStyle/>
-                    <a:p>
-                      <a:pPr algn="ctr" marL="0" marR="0">
-                        <a:lnSpc>
-                          <a:spcPct val="100000"/>
-                        </a:lnSpc>
-                        <a:spcBef>
-                          <a:spcPts val="0"/>
-                        </a:spcBef>
-                        <a:spcAft>
-                          <a:spcPts val="0"/>
-                        </a:spcAft>
-                        <a:buNone/>
-                      </a:pPr>
-                      <a:r>
-                        <a:rPr cap="none" sz="800" i="0" b="0" u="none" strike="noStrike">
-                          <a:solidFill>
-                            <a:srgbClr val="000000">
-                              <a:alpha val="100000"/>
-                            </a:srgbClr>
-                          </a:solidFill>
-                          <a:latin typeface="Malgun Gothic"/>
-                          <a:cs typeface="Malgun Gothic"/>
-                          <a:ea typeface="Malgun Gothic"/>
-                          <a:sym typeface="Malgun Gothic"/>
-                        </a:rPr>
-                        <a:t> </a:t>
-                      </a:r>
-                    </a:p>
-                  </a:txBody>
-                  <a:tcPr anchor="ctr" marB="0" marT="0" marR="0" marL="0">
-                    <a:lnL algn="ctr" cmpd="sng" cap="flat" w="6350">
-                      <a:solidFill>
-                        <a:srgbClr val="D9D9D9">
-                          <a:alpha val="100000"/>
-                        </a:srgbClr>
-                      </a:solidFill>
-                      <a:prstDash val="solid"/>
-                    </a:lnL>
-                    <a:lnR algn="ctr" cmpd="sng" cap="flat" w="6350">
-                      <a:solidFill>
-                        <a:srgbClr val="D9D9D9">
-                          <a:alpha val="100000"/>
-                        </a:srgbClr>
-                      </a:solidFill>
-                      <a:prstDash val="solid"/>
-                    </a:lnR>
-                    <a:lnT algn="ctr" cmpd="sng" cap="flat" w="6350">
-                      <a:solidFill>
-                        <a:srgbClr val="D9D9D9">
-                          <a:alpha val="100000"/>
-                        </a:srgbClr>
-                      </a:solidFill>
-                      <a:prstDash val="solid"/>
-                    </a:lnT>
-                    <a:lnB algn="ctr" cmpd="sng" cap="flat" w="6350">
-                      <a:solidFill>
-                        <a:srgbClr val="D9D9D9">
-                          <a:alpha val="100000"/>
-                        </a:srgbClr>
-                      </a:solidFill>
-                      <a:prstDash val="solid"/>
-                    </a:lnB>
-                    <a:solidFill>
-                      <a:srgbClr val="FFFFFF">
-                        <a:alpha val="0"/>
-                      </a:srgbClr>
-                    </a:solidFill>
-                  </a:tcPr>
-                </a:tc>
-                <a:tc>
-                  <a:txBody>
-                    <a:bodyPr/>
-                    <a:lstStyle/>
-                    <a:p>
-                      <a:pPr algn="ctr" marL="0" marR="0">
-                        <a:lnSpc>
-                          <a:spcPct val="100000"/>
-                        </a:lnSpc>
-                        <a:spcBef>
-                          <a:spcPts val="0"/>
-                        </a:spcBef>
-                        <a:spcAft>
-                          <a:spcPts val="0"/>
-                        </a:spcAft>
-                        <a:buNone/>
-                      </a:pPr>
-                      <a:r>
-                        <a:rPr cap="none" sz="800" i="0" b="0" u="none" strike="noStrike">
-                          <a:solidFill>
-                            <a:srgbClr val="000000">
-                              <a:alpha val="100000"/>
-                            </a:srgbClr>
-                          </a:solidFill>
-                          <a:latin typeface="Malgun Gothic"/>
-                          <a:cs typeface="Malgun Gothic"/>
-                          <a:ea typeface="Malgun Gothic"/>
-                          <a:sym typeface="Malgun Gothic"/>
-                        </a:rPr>
-                        <a:t> </a:t>
-                      </a:r>
-                    </a:p>
-                  </a:txBody>
-                  <a:tcPr anchor="ctr" marB="0" marT="0" marR="0" marL="0">
-                    <a:lnL algn="ctr" cmpd="sng" cap="flat" w="6350">
-                      <a:solidFill>
-                        <a:srgbClr val="D9D9D9">
-                          <a:alpha val="100000"/>
-                        </a:srgbClr>
-                      </a:solidFill>
-                      <a:prstDash val="solid"/>
-                    </a:lnL>
-                    <a:lnR algn="ctr" cmpd="sng" cap="flat" w="6350">
-                      <a:solidFill>
-                        <a:srgbClr val="D9D9D9">
-                          <a:alpha val="100000"/>
-                        </a:srgbClr>
-                      </a:solidFill>
-                      <a:prstDash val="solid"/>
-                    </a:lnR>
-                    <a:lnT algn="ctr" cmpd="sng" cap="flat" w="6350">
-                      <a:solidFill>
-                        <a:srgbClr val="D9D9D9">
-                          <a:alpha val="100000"/>
-                        </a:srgbClr>
-                      </a:solidFill>
-                      <a:prstDash val="solid"/>
-                    </a:lnT>
-                    <a:lnB algn="ctr" cmpd="sng" cap="flat" w="6350">
-                      <a:solidFill>
-                        <a:srgbClr val="D9D9D9">
-                          <a:alpha val="100000"/>
-                        </a:srgbClr>
-                      </a:solidFill>
-                      <a:prstDash val="solid"/>
-                    </a:lnB>
-                    <a:solidFill>
-                      <a:srgbClr val="FFFFFF">
-                        <a:alpha val="0"/>
-                      </a:srgbClr>
-                    </a:solidFill>
-                  </a:tcPr>
-                </a:tc>
-              </a:tr>
-              <a:tr h="256032">
-                <a:tc>
-                  <a:txBody>
-                    <a:bodyPr/>
-                    <a:lstStyle/>
-                    <a:p>
-                      <a:pPr algn="ctr" marL="0" marR="0">
-                        <a:lnSpc>
-                          <a:spcPct val="100000"/>
-                        </a:lnSpc>
-                        <a:spcBef>
-                          <a:spcPts val="0"/>
-                        </a:spcBef>
-                        <a:spcAft>
-                          <a:spcPts val="0"/>
-                        </a:spcAft>
-                        <a:buNone/>
-                      </a:pPr>
-                      <a:r>
-                        <a:rPr cap="none" sz="800" i="0" b="0" u="none" strike="noStrike">
-                          <a:solidFill>
-                            <a:srgbClr val="000000">
-                              <a:alpha val="100000"/>
-                            </a:srgbClr>
-                          </a:solidFill>
-                          <a:latin typeface="Malgun Gothic"/>
-                          <a:cs typeface="Malgun Gothic"/>
-                          <a:ea typeface="Malgun Gothic"/>
-                          <a:sym typeface="Malgun Gothic"/>
-                        </a:rPr>
-                        <a:t> </a:t>
-                      </a:r>
-                    </a:p>
-                  </a:txBody>
-                  <a:tcPr anchor="ctr" marB="0" marT="0" marR="0" marL="0">
-                    <a:lnL algn="ctr" cmpd="sng" cap="flat" w="6350">
-                      <a:solidFill>
-                        <a:srgbClr val="D9D9D9">
-                          <a:alpha val="100000"/>
-                        </a:srgbClr>
-                      </a:solidFill>
-                      <a:prstDash val="solid"/>
-                    </a:lnL>
-                    <a:lnR algn="ctr" cmpd="sng" cap="flat" w="6350">
-                      <a:solidFill>
-                        <a:srgbClr val="D9D9D9">
-                          <a:alpha val="100000"/>
-                        </a:srgbClr>
-                      </a:solidFill>
-                      <a:prstDash val="solid"/>
-                    </a:lnR>
-                    <a:lnT algn="ctr" cmpd="sng" cap="flat" w="6350">
-                      <a:solidFill>
-                        <a:srgbClr val="D9D9D9">
-                          <a:alpha val="100000"/>
-                        </a:srgbClr>
-                      </a:solidFill>
-                      <a:prstDash val="solid"/>
-                    </a:lnT>
-                    <a:lnB algn="ctr" cmpd="sng" cap="flat" w="6350">
-                      <a:solidFill>
-                        <a:srgbClr val="D9D9D9">
-                          <a:alpha val="100000"/>
-                        </a:srgbClr>
-                      </a:solidFill>
-                      <a:prstDash val="solid"/>
-                    </a:lnB>
-                    <a:solidFill>
-                      <a:srgbClr val="F2F2F2">
-                        <a:alpha val="100000"/>
-                      </a:srgbClr>
-                    </a:solidFill>
-                  </a:tcPr>
-                </a:tc>
-                <a:tc>
-                  <a:txBody>
-                    <a:bodyPr/>
-                    <a:lstStyle/>
-                    <a:p>
-                      <a:pPr algn="ctr" marL="0" marR="0">
-                        <a:lnSpc>
-                          <a:spcPct val="100000"/>
-                        </a:lnSpc>
-                        <a:spcBef>
-                          <a:spcPts val="0"/>
-                        </a:spcBef>
-                        <a:spcAft>
-                          <a:spcPts val="0"/>
-                        </a:spcAft>
-                        <a:buNone/>
-                      </a:pPr>
-                      <a:r>
-                        <a:rPr cap="none" sz="800" i="0" b="0" u="none" strike="noStrike">
-                          <a:solidFill>
-                            <a:srgbClr val="000000">
-                              <a:alpha val="100000"/>
-                            </a:srgbClr>
-                          </a:solidFill>
-                          <a:latin typeface="Malgun Gothic"/>
-                          <a:cs typeface="Malgun Gothic"/>
-                          <a:ea typeface="Malgun Gothic"/>
-                          <a:sym typeface="Malgun Gothic"/>
-                        </a:rPr>
-                        <a:t> </a:t>
-                      </a:r>
-                    </a:p>
-                  </a:txBody>
-                  <a:tcPr anchor="ctr" marB="0" marT="0" marR="0" marL="0">
-                    <a:lnL algn="ctr" cmpd="sng" cap="flat" w="6350">
-                      <a:solidFill>
-                        <a:srgbClr val="D9D9D9">
-                          <a:alpha val="100000"/>
-                        </a:srgbClr>
-                      </a:solidFill>
-                      <a:prstDash val="solid"/>
-                    </a:lnL>
-                    <a:lnR algn="ctr" cmpd="sng" cap="flat" w="6350">
-                      <a:solidFill>
-                        <a:srgbClr val="D9D9D9">
-                          <a:alpha val="100000"/>
-                        </a:srgbClr>
-                      </a:solidFill>
-                      <a:prstDash val="solid"/>
-                    </a:lnR>
-                    <a:lnT algn="ctr" cmpd="sng" cap="flat" w="6350">
-                      <a:solidFill>
-                        <a:srgbClr val="D9D9D9">
-                          <a:alpha val="100000"/>
-                        </a:srgbClr>
-                      </a:solidFill>
-                      <a:prstDash val="solid"/>
-                    </a:lnT>
-                    <a:lnB algn="ctr" cmpd="sng" cap="flat" w="6350">
-                      <a:solidFill>
-                        <a:srgbClr val="D9D9D9">
-                          <a:alpha val="100000"/>
-                        </a:srgbClr>
-                      </a:solidFill>
-                      <a:prstDash val="solid"/>
-                    </a:lnB>
-                    <a:solidFill>
-                      <a:srgbClr val="F2F2F2">
-                        <a:alpha val="100000"/>
-                      </a:srgbClr>
-                    </a:solidFill>
-                  </a:tcPr>
-                </a:tc>
-                <a:tc>
-                  <a:txBody>
-                    <a:bodyPr/>
-                    <a:lstStyle/>
-                    <a:p>
-                      <a:pPr algn="ctr" marL="0" marR="0">
-                        <a:lnSpc>
-                          <a:spcPct val="100000"/>
-                        </a:lnSpc>
-                        <a:spcBef>
-                          <a:spcPts val="0"/>
-                        </a:spcBef>
-                        <a:spcAft>
-                          <a:spcPts val="0"/>
-                        </a:spcAft>
-                        <a:buNone/>
-                      </a:pPr>
-                      <a:r>
-                        <a:rPr cap="none" sz="800" i="0" b="0" u="none" strike="noStrike">
-                          <a:solidFill>
-                            <a:srgbClr val="000000">
-                              <a:alpha val="100000"/>
-                            </a:srgbClr>
-                          </a:solidFill>
-                          <a:latin typeface="Malgun Gothic"/>
-                          <a:cs typeface="Malgun Gothic"/>
-                          <a:ea typeface="Malgun Gothic"/>
-                          <a:sym typeface="Malgun Gothic"/>
-                        </a:rPr>
-                        <a:t> </a:t>
-                      </a:r>
-                    </a:p>
-                  </a:txBody>
-                  <a:tcPr anchor="ctr" marB="0" marT="0" marR="0" marL="0">
-                    <a:lnL algn="ctr" cmpd="sng" cap="flat" w="6350">
-                      <a:solidFill>
-                        <a:srgbClr val="D9D9D9">
-                          <a:alpha val="100000"/>
-                        </a:srgbClr>
-                      </a:solidFill>
-                      <a:prstDash val="solid"/>
-                    </a:lnL>
-                    <a:lnR algn="ctr" cmpd="sng" cap="flat" w="6350">
-                      <a:solidFill>
-                        <a:srgbClr val="D9D9D9">
-                          <a:alpha val="100000"/>
-                        </a:srgbClr>
-                      </a:solidFill>
-                      <a:prstDash val="solid"/>
-                    </a:lnR>
-                    <a:lnT algn="ctr" cmpd="sng" cap="flat" w="6350">
-                      <a:solidFill>
-                        <a:srgbClr val="D9D9D9">
-                          <a:alpha val="100000"/>
-                        </a:srgbClr>
-                      </a:solidFill>
-                      <a:prstDash val="solid"/>
-                    </a:lnT>
-                    <a:lnB algn="ctr" cmpd="sng" cap="flat" w="6350">
-                      <a:solidFill>
-                        <a:srgbClr val="D9D9D9">
-                          <a:alpha val="100000"/>
-                        </a:srgbClr>
-                      </a:solidFill>
-                      <a:prstDash val="solid"/>
-                    </a:lnB>
-                    <a:solidFill>
-                      <a:srgbClr val="F2F2F2">
-                        <a:alpha val="100000"/>
-                      </a:srgbClr>
-                    </a:solidFill>
-                  </a:tcPr>
-                </a:tc>
-                <a:tc>
-                  <a:txBody>
-                    <a:bodyPr/>
-                    <a:lstStyle/>
-                    <a:p>
-                      <a:pPr algn="ctr" marL="0" marR="0">
-                        <a:lnSpc>
-                          <a:spcPct val="100000"/>
-                        </a:lnSpc>
-                        <a:spcBef>
-                          <a:spcPts val="0"/>
-                        </a:spcBef>
-                        <a:spcAft>
-                          <a:spcPts val="0"/>
-                        </a:spcAft>
-                        <a:buNone/>
-                      </a:pPr>
-                      <a:r>
-                        <a:rPr cap="none" sz="800" i="0" b="0" u="none" strike="noStrike">
-                          <a:solidFill>
-                            <a:srgbClr val="000000">
-                              <a:alpha val="100000"/>
-                            </a:srgbClr>
-                          </a:solidFill>
-                          <a:latin typeface="Malgun Gothic"/>
-                          <a:cs typeface="Malgun Gothic"/>
-                          <a:ea typeface="Malgun Gothic"/>
-                          <a:sym typeface="Malgun Gothic"/>
-                        </a:rPr>
-                        <a:t> </a:t>
-                      </a:r>
-                    </a:p>
-                  </a:txBody>
-                  <a:tcPr anchor="ctr" marB="0" marT="0" marR="0" marL="0">
-                    <a:lnL algn="ctr" cmpd="sng" cap="flat" w="6350">
-                      <a:solidFill>
-                        <a:srgbClr val="D9D9D9">
-                          <a:alpha val="100000"/>
-                        </a:srgbClr>
-                      </a:solidFill>
-                      <a:prstDash val="solid"/>
-                    </a:lnL>
-                    <a:lnR algn="ctr" cmpd="sng" cap="flat" w="6350">
-                      <a:solidFill>
-                        <a:srgbClr val="D9D9D9">
-                          <a:alpha val="100000"/>
-                        </a:srgbClr>
-                      </a:solidFill>
-                      <a:prstDash val="solid"/>
-                    </a:lnR>
-                    <a:lnT algn="ctr" cmpd="sng" cap="flat" w="6350">
-                      <a:solidFill>
-                        <a:srgbClr val="D9D9D9">
-                          <a:alpha val="100000"/>
-                        </a:srgbClr>
-                      </a:solidFill>
-                      <a:prstDash val="solid"/>
-                    </a:lnT>
-                    <a:lnB algn="ctr" cmpd="sng" cap="flat" w="6350">
-                      <a:solidFill>
-                        <a:srgbClr val="D9D9D9">
-                          <a:alpha val="100000"/>
-                        </a:srgbClr>
-                      </a:solidFill>
-                      <a:prstDash val="solid"/>
-                    </a:lnB>
-                    <a:solidFill>
-                      <a:srgbClr val="F2F2F2">
-                        <a:alpha val="100000"/>
-                      </a:srgbClr>
-                    </a:solidFill>
-                  </a:tcPr>
-                </a:tc>
-              </a:tr>
-              <a:tr h="2029968">
-                <a:tc>
-                  <a:txBody>
-                    <a:bodyPr/>
-                    <a:lstStyle/>
-                    <a:p>
-                      <a:pPr algn="ctr" marL="0" marR="0">
-                        <a:lnSpc>
-                          <a:spcPct val="100000"/>
-                        </a:lnSpc>
-                        <a:spcBef>
-                          <a:spcPts val="0"/>
-                        </a:spcBef>
-                        <a:spcAft>
-                          <a:spcPts val="0"/>
-                        </a:spcAft>
-                        <a:buNone/>
-                      </a:pPr>
-                      <a:r>
-                        <a:rPr cap="none" sz="800" i="0" b="0" u="none" strike="noStrike">
-                          <a:solidFill>
-                            <a:srgbClr val="000000">
-                              <a:alpha val="100000"/>
-                            </a:srgbClr>
-                          </a:solidFill>
-                          <a:latin typeface="Malgun Gothic"/>
-                          <a:cs typeface="Malgun Gothic"/>
-                          <a:ea typeface="Malgun Gothic"/>
-                          <a:sym typeface="Malgun Gothic"/>
-                        </a:rPr>
-                        <a:t> </a:t>
-                      </a:r>
-                    </a:p>
-                  </a:txBody>
-                  <a:tcPr anchor="ctr" marB="0" marT="0" marR="0" marL="0">
-                    <a:lnL algn="ctr" cmpd="sng" cap="flat" w="6350">
-                      <a:solidFill>
-                        <a:srgbClr val="D9D9D9">
-                          <a:alpha val="100000"/>
-                        </a:srgbClr>
-                      </a:solidFill>
-                      <a:prstDash val="solid"/>
-                    </a:lnL>
-                    <a:lnR algn="ctr" cmpd="sng" cap="flat" w="6350">
-                      <a:solidFill>
-                        <a:srgbClr val="D9D9D9">
-                          <a:alpha val="100000"/>
-                        </a:srgbClr>
-                      </a:solidFill>
-                      <a:prstDash val="solid"/>
-                    </a:lnR>
-                    <a:lnT algn="ctr" cmpd="sng" cap="flat" w="6350">
-                      <a:solidFill>
-                        <a:srgbClr val="D9D9D9">
-                          <a:alpha val="100000"/>
-                        </a:srgbClr>
-                      </a:solidFill>
-                      <a:prstDash val="solid"/>
-                    </a:lnT>
-                    <a:lnB algn="ctr" cmpd="sng" cap="flat" w="6350">
-                      <a:solidFill>
-                        <a:srgbClr val="D9D9D9">
-                          <a:alpha val="100000"/>
-                        </a:srgbClr>
-                      </a:solidFill>
-                      <a:prstDash val="solid"/>
-                    </a:lnB>
-                    <a:solidFill>
-                      <a:srgbClr val="FFFFFF">
-                        <a:alpha val="0"/>
-                      </a:srgbClr>
-                    </a:solidFill>
-                  </a:tcPr>
-                </a:tc>
-                <a:tc>
-                  <a:txBody>
-                    <a:bodyPr/>
-                    <a:lstStyle/>
-                    <a:p>
-                      <a:pPr algn="ctr" marL="0" marR="0">
-                        <a:lnSpc>
-                          <a:spcPct val="100000"/>
-                        </a:lnSpc>
-                        <a:spcBef>
-                          <a:spcPts val="0"/>
-                        </a:spcBef>
-                        <a:spcAft>
-                          <a:spcPts val="0"/>
-                        </a:spcAft>
-                        <a:buNone/>
-                      </a:pPr>
-                      <a:r>
-                        <a:rPr cap="none" sz="800" i="0" b="0" u="none" strike="noStrike">
-                          <a:solidFill>
-                            <a:srgbClr val="000000">
-                              <a:alpha val="100000"/>
-                            </a:srgbClr>
-                          </a:solidFill>
-                          <a:latin typeface="Malgun Gothic"/>
-                          <a:cs typeface="Malgun Gothic"/>
-                          <a:ea typeface="Malgun Gothic"/>
-                          <a:sym typeface="Malgun Gothic"/>
-                        </a:rPr>
-                        <a:t> </a:t>
-                      </a:r>
-                    </a:p>
-                  </a:txBody>
-                  <a:tcPr anchor="ctr" marB="0" marT="0" marR="0" marL="0">
-                    <a:lnL algn="ctr" cmpd="sng" cap="flat" w="6350">
-                      <a:solidFill>
-                        <a:srgbClr val="D9D9D9">
-                          <a:alpha val="100000"/>
-                        </a:srgbClr>
-                      </a:solidFill>
-                      <a:prstDash val="solid"/>
-                    </a:lnL>
-                    <a:lnR algn="ctr" cmpd="sng" cap="flat" w="6350">
-                      <a:solidFill>
-                        <a:srgbClr val="D9D9D9">
-                          <a:alpha val="100000"/>
-                        </a:srgbClr>
-                      </a:solidFill>
-                      <a:prstDash val="solid"/>
-                    </a:lnR>
-                    <a:lnT algn="ctr" cmpd="sng" cap="flat" w="6350">
-                      <a:solidFill>
-                        <a:srgbClr val="D9D9D9">
-                          <a:alpha val="100000"/>
-                        </a:srgbClr>
-                      </a:solidFill>
-                      <a:prstDash val="solid"/>
-                    </a:lnT>
-                    <a:lnB algn="ctr" cmpd="sng" cap="flat" w="6350">
-                      <a:solidFill>
-                        <a:srgbClr val="D9D9D9">
-                          <a:alpha val="100000"/>
-                        </a:srgbClr>
-                      </a:solidFill>
-                      <a:prstDash val="solid"/>
-                    </a:lnB>
-                    <a:solidFill>
-                      <a:srgbClr val="FFFFFF">
-                        <a:alpha val="0"/>
-                      </a:srgbClr>
-                    </a:solidFill>
-                  </a:tcPr>
-                </a:tc>
-                <a:tc>
-                  <a:txBody>
-                    <a:bodyPr/>
-                    <a:lstStyle/>
-                    <a:p>
-                      <a:pPr algn="ctr" marL="0" marR="0">
-                        <a:lnSpc>
-                          <a:spcPct val="100000"/>
-                        </a:lnSpc>
-                        <a:spcBef>
-                          <a:spcPts val="0"/>
-                        </a:spcBef>
-                        <a:spcAft>
-                          <a:spcPts val="0"/>
-                        </a:spcAft>
-                        <a:buNone/>
-                      </a:pPr>
-                      <a:r>
-                        <a:rPr cap="none" sz="800" i="0" b="0" u="none" strike="noStrike">
-                          <a:solidFill>
-                            <a:srgbClr val="000000">
-                              <a:alpha val="100000"/>
-                            </a:srgbClr>
-                          </a:solidFill>
-                          <a:latin typeface="Malgun Gothic"/>
-                          <a:cs typeface="Malgun Gothic"/>
-                          <a:ea typeface="Malgun Gothic"/>
-                          <a:sym typeface="Malgun Gothic"/>
-                        </a:rPr>
-                        <a:t> </a:t>
-                      </a:r>
-                    </a:p>
-                  </a:txBody>
-                  <a:tcPr anchor="ctr" marB="0" marT="0" marR="0" marL="0">
-                    <a:lnL algn="ctr" cmpd="sng" cap="flat" w="6350">
-                      <a:solidFill>
-                        <a:srgbClr val="D9D9D9">
-                          <a:alpha val="100000"/>
-                        </a:srgbClr>
-                      </a:solidFill>
-                      <a:prstDash val="solid"/>
-                    </a:lnL>
-                    <a:lnR algn="ctr" cmpd="sng" cap="flat" w="6350">
-                      <a:solidFill>
-                        <a:srgbClr val="D9D9D9">
-                          <a:alpha val="100000"/>
-                        </a:srgbClr>
-                      </a:solidFill>
-                      <a:prstDash val="solid"/>
-                    </a:lnR>
-                    <a:lnT algn="ctr" cmpd="sng" cap="flat" w="6350">
-                      <a:solidFill>
-                        <a:srgbClr val="D9D9D9">
-                          <a:alpha val="100000"/>
-                        </a:srgbClr>
-                      </a:solidFill>
-                      <a:prstDash val="solid"/>
-                    </a:lnT>
-                    <a:lnB algn="ctr" cmpd="sng" cap="flat" w="6350">
-                      <a:solidFill>
-                        <a:srgbClr val="D9D9D9">
-                          <a:alpha val="100000"/>
-                        </a:srgbClr>
-                      </a:solidFill>
-                      <a:prstDash val="solid"/>
-                    </a:lnB>
-                    <a:solidFill>
-                      <a:srgbClr val="FFFFFF">
-                        <a:alpha val="0"/>
-                      </a:srgbClr>
-                    </a:solidFill>
-                  </a:tcPr>
-                </a:tc>
-                <a:tc>
-                  <a:txBody>
-                    <a:bodyPr/>
-                    <a:lstStyle/>
-                    <a:p>
-                      <a:pPr algn="ctr" marL="0" marR="0">
-                        <a:lnSpc>
-                          <a:spcPct val="100000"/>
-                        </a:lnSpc>
-                        <a:spcBef>
-                          <a:spcPts val="0"/>
-                        </a:spcBef>
-                        <a:spcAft>
-                          <a:spcPts val="0"/>
-                        </a:spcAft>
-                        <a:buNone/>
-                      </a:pPr>
-                      <a:r>
-                        <a:rPr cap="none" sz="800" i="0" b="0" u="none" strike="noStrike">
-                          <a:solidFill>
-                            <a:srgbClr val="000000">
-                              <a:alpha val="100000"/>
-                            </a:srgbClr>
-                          </a:solidFill>
-                          <a:latin typeface="Malgun Gothic"/>
-                          <a:cs typeface="Malgun Gothic"/>
-                          <a:ea typeface="Malgun Gothic"/>
-                          <a:sym typeface="Malgun Gothic"/>
-                        </a:rPr>
-                        <a:t> </a:t>
-                      </a:r>
-                    </a:p>
-                  </a:txBody>
-                  <a:tcPr anchor="ctr" marB="0" marT="0" marR="0" marL="0">
-                    <a:lnL algn="ctr" cmpd="sng" cap="flat" w="6350">
-                      <a:solidFill>
-                        <a:srgbClr val="D9D9D9">
-                          <a:alpha val="100000"/>
-                        </a:srgbClr>
-                      </a:solidFill>
-                      <a:prstDash val="solid"/>
-                    </a:lnL>
-                    <a:lnR algn="ctr" cmpd="sng" cap="flat" w="6350">
-                      <a:solidFill>
-                        <a:srgbClr val="D9D9D9">
-                          <a:alpha val="100000"/>
-                        </a:srgbClr>
-                      </a:solidFill>
-                      <a:prstDash val="solid"/>
-                    </a:lnR>
-                    <a:lnT algn="ctr" cmpd="sng" cap="flat" w="6350">
-                      <a:solidFill>
-                        <a:srgbClr val="D9D9D9">
-                          <a:alpha val="100000"/>
-                        </a:srgbClr>
-                      </a:solidFill>
-                      <a:prstDash val="solid"/>
-                    </a:lnT>
-                    <a:lnB algn="ctr" cmpd="sng" cap="flat" w="6350">
-                      <a:solidFill>
-                        <a:srgbClr val="D9D9D9">
-                          <a:alpha val="100000"/>
-                        </a:srgbClr>
-                      </a:solidFill>
-                      <a:prstDash val="solid"/>
-                    </a:lnB>
-                    <a:solidFill>
-                      <a:srgbClr val="FFFFFF">
-                        <a:alpha val="0"/>
-                      </a:srgbClr>
-                    </a:solidFill>
-                  </a:tcPr>
-                </a:tc>
-              </a:tr>
-            </a:tbl>
-          </a:graphicData>
-        </a:graphic>
-      </p:graphicFrame>
-      <p:sp>
-        <p:nvSpPr>
-          <p:cNvPr id="3" name=""/>
-          <p:cNvSpPr>
-            <a:spLocks noGrp="1"/>
-          </p:cNvSpPr>
-          <p:nvPr>
-            <p:ph/>
-          </p:nvPr>
-        </p:nvSpPr>
-        <p:spPr>
-          <a:xfrm>
-            <a:off x="329184" y="1842516"/>
-            <a:ext cx="2827782" cy="228600"/>
-          </a:xfrm>
-          <a:solidFill>
-            <a:srgbClr val="FFFFFF">
-              <a:alpha val="0"/>
-            </a:srgbClr>
-          </a:solidFill>
-        </p:spPr>
-        <p:txBody>
-          <a:bodyPr/>
-          <a:lstStyle/>
-          <a:p>
-            <a:pPr algn="ctr" marL="0" marR="0">
-              <a:lnSpc>
-                <a:spcPct val="100000"/>
-              </a:lnSpc>
-              <a:spcBef>
-                <a:spcPts val="0"/>
-              </a:spcBef>
-              <a:spcAft>
-                <a:spcPts val="0"/>
-              </a:spcAft>
-              <a:buNone/>
-            </a:pPr>
-            <a:r>
-              <a:rPr cap="none" sz="900" i="0" b="1" u="none" strike="noStrike">
-                <a:solidFill>
-                  <a:srgbClr val="D62728">
-                    <a:alpha val="100000"/>
-                  </a:srgbClr>
-                </a:solidFill>
-                <a:latin typeface="Malgun Gothic"/>
-                <a:cs typeface="Malgun Gothic"/>
-                <a:ea typeface="Malgun Gothic"/>
-                <a:sym typeface="Malgun Gothic"/>
-              </a:rPr>
-              <a:t>⬤</a:t>
-            </a:r>
-            <a:r>
-              <a:rPr cap="none" sz="900" i="0" b="0" u="none" strike="noStrike">
-                <a:solidFill>
-                  <a:srgbClr val="333333">
-                    <a:alpha val="100000"/>
-                  </a:srgbClr>
-                </a:solidFill>
-                <a:latin typeface="Malgun Gothic"/>
-                <a:cs typeface="Malgun Gothic"/>
-                <a:ea typeface="Malgun Gothic"/>
-                <a:sym typeface="Malgun Gothic"/>
-              </a:rPr>
-              <a:t> (ML_MSR_207) Cell_TCMC_207</a:t>
-            </a:r>
-          </a:p>
-        </p:txBody>
-      </p:sp>
-      <p:pic>
-        <p:nvPicPr>
-          <p:cNvPr id="4" name="" descr=""/>
-          <p:cNvPicPr>
-            <a:picLocks noGrp="1"/>
-          </p:cNvPicPr>
-          <p:nvPr>
-            <p:ph/>
-          </p:nvPr>
-        </p:nvPicPr>
-        <p:blipFill>
-          <a:blip r:embed="rId2"/>
-          <a:stretch>
-            <a:fillRect/>
-          </a:stretch>
-        </p:blipFill>
-        <p:spPr>
-          <a:xfrm>
-            <a:off x="329184" y="2112264"/>
-            <a:ext cx="2827782" cy="1965960"/>
-          </a:xfrm>
-          <a:prstGeom prst="rect">
-            <a:avLst/>
-          </a:prstGeom>
-        </p:spPr>
-      </p:pic>
-      <p:sp>
-        <p:nvSpPr>
-          <p:cNvPr id="5" name=""/>
-          <p:cNvSpPr>
-            <a:spLocks noGrp="1"/>
-          </p:cNvSpPr>
-          <p:nvPr>
-            <p:ph/>
-          </p:nvPr>
-        </p:nvSpPr>
-        <p:spPr>
-          <a:xfrm>
-            <a:off x="2562606" y="2139696"/>
-            <a:ext cx="566928" cy="164592"/>
-          </a:xfrm>
-          <a:solidFill>
-            <a:srgbClr val="FFFFFF">
-              <a:alpha val="0"/>
-            </a:srgbClr>
-          </a:solidFill>
-        </p:spPr>
-        <p:txBody>
-          <a:bodyPr/>
-          <a:lstStyle/>
-          <a:p>
-            <a:pPr algn="r" marL="0" marR="0">
-              <a:lnSpc>
-                <a:spcPct val="100000"/>
-              </a:lnSpc>
-              <a:spcBef>
-                <a:spcPts val="0"/>
-              </a:spcBef>
-              <a:spcAft>
-                <a:spcPts val="0"/>
-              </a:spcAft>
-              <a:buNone/>
-            </a:pPr>
-            <a:r>
-              <a:rPr cap="none" sz="800" i="0" b="0" u="none" strike="noStrike">
-                <a:solidFill>
-                  <a:srgbClr val="808080">
-                    <a:alpha val="100000"/>
-                  </a:srgbClr>
-                </a:solidFill>
-                <a:latin typeface="Malgun Gothic"/>
-                <a:cs typeface="Malgun Gothic"/>
-                <a:ea typeface="Malgun Gothic"/>
-                <a:sym typeface="Malgun Gothic"/>
-              </a:rPr>
-              <a:t>+0.7sig</a:t>
-            </a:r>
-          </a:p>
-        </p:txBody>
-      </p:sp>
-      <p:sp>
-        <p:nvSpPr>
-          <p:cNvPr id="6" name=""/>
-          <p:cNvSpPr>
-            <a:spLocks noGrp="1"/>
-          </p:cNvSpPr>
-          <p:nvPr>
-            <p:ph/>
-          </p:nvPr>
-        </p:nvSpPr>
-        <p:spPr>
-          <a:xfrm>
-            <a:off x="3230118" y="1842516"/>
-            <a:ext cx="2827782" cy="228600"/>
-          </a:xfrm>
-          <a:solidFill>
-            <a:srgbClr val="FFFFFF">
-              <a:alpha val="0"/>
-            </a:srgbClr>
-          </a:solidFill>
-        </p:spPr>
-        <p:txBody>
-          <a:bodyPr/>
-          <a:lstStyle/>
-          <a:p>
-            <a:pPr algn="ctr" marL="0" marR="0">
-              <a:lnSpc>
-                <a:spcPct val="100000"/>
-              </a:lnSpc>
-              <a:spcBef>
-                <a:spcPts val="0"/>
-              </a:spcBef>
-              <a:spcAft>
-                <a:spcPts val="0"/>
-              </a:spcAft>
-              <a:buNone/>
-            </a:pPr>
-            <a:r>
-              <a:rPr cap="none" sz="900" i="0" b="1" u="none" strike="noStrike">
-                <a:solidFill>
-                  <a:srgbClr val="D62728">
-                    <a:alpha val="100000"/>
-                  </a:srgbClr>
-                </a:solidFill>
-                <a:latin typeface="Malgun Gothic"/>
-                <a:cs typeface="Malgun Gothic"/>
-                <a:ea typeface="Malgun Gothic"/>
-                <a:sym typeface="Malgun Gothic"/>
-              </a:rPr>
-              <a:t>⬤</a:t>
-            </a:r>
-            <a:r>
-              <a:rPr cap="none" sz="900" i="0" b="0" u="none" strike="noStrike">
-                <a:solidFill>
-                  <a:srgbClr val="333333">
-                    <a:alpha val="100000"/>
-                  </a:srgbClr>
-                </a:solidFill>
-                <a:latin typeface="Malgun Gothic"/>
-                <a:cs typeface="Malgun Gothic"/>
-                <a:ea typeface="Malgun Gothic"/>
-                <a:sym typeface="Malgun Gothic"/>
-              </a:rPr>
-              <a:t> (ML_MSR_212) Cell_TCMC_212</a:t>
-            </a:r>
-          </a:p>
-        </p:txBody>
-      </p:sp>
-      <p:pic>
-        <p:nvPicPr>
-          <p:cNvPr id="7" name="" descr=""/>
-          <p:cNvPicPr>
-            <a:picLocks noGrp="1"/>
-          </p:cNvPicPr>
-          <p:nvPr>
-            <p:ph/>
-          </p:nvPr>
-        </p:nvPicPr>
-        <p:blipFill>
-          <a:blip r:embed="rId3"/>
-          <a:stretch>
-            <a:fillRect/>
-          </a:stretch>
-        </p:blipFill>
-        <p:spPr>
-          <a:xfrm>
-            <a:off x="3230118" y="2112264"/>
-            <a:ext cx="2827782" cy="1965960"/>
-          </a:xfrm>
-          <a:prstGeom prst="rect">
-            <a:avLst/>
-          </a:prstGeom>
-        </p:spPr>
-      </p:pic>
-      <p:sp>
-        <p:nvSpPr>
-          <p:cNvPr id="8" name=""/>
-          <p:cNvSpPr>
-            <a:spLocks noGrp="1"/>
-          </p:cNvSpPr>
-          <p:nvPr>
-            <p:ph/>
-          </p:nvPr>
-        </p:nvSpPr>
-        <p:spPr>
-          <a:xfrm>
-            <a:off x="5463540" y="2139696"/>
-            <a:ext cx="566928" cy="164592"/>
-          </a:xfrm>
-          <a:solidFill>
-            <a:srgbClr val="FFFFFF">
-              <a:alpha val="0"/>
-            </a:srgbClr>
-          </a:solidFill>
-        </p:spPr>
-        <p:txBody>
-          <a:bodyPr/>
-          <a:lstStyle/>
-          <a:p>
-            <a:pPr algn="r" marL="0" marR="0">
-              <a:lnSpc>
-                <a:spcPct val="100000"/>
-              </a:lnSpc>
-              <a:spcBef>
-                <a:spcPts val="0"/>
-              </a:spcBef>
-              <a:spcAft>
-                <a:spcPts val="0"/>
-              </a:spcAft>
-              <a:buNone/>
-            </a:pPr>
-            <a:r>
-              <a:rPr cap="none" sz="800" i="0" b="0" u="none" strike="noStrike">
-                <a:solidFill>
-                  <a:srgbClr val="808080">
-                    <a:alpha val="100000"/>
-                  </a:srgbClr>
-                </a:solidFill>
-                <a:latin typeface="Malgun Gothic"/>
-                <a:cs typeface="Malgun Gothic"/>
-                <a:ea typeface="Malgun Gothic"/>
-                <a:sym typeface="Malgun Gothic"/>
-              </a:rPr>
-              <a:t>+0.7sig</a:t>
-            </a:r>
-          </a:p>
-        </p:txBody>
-      </p:sp>
-      <p:sp>
-        <p:nvSpPr>
-          <p:cNvPr id="9" name=""/>
-          <p:cNvSpPr>
-            <a:spLocks noGrp="1"/>
-          </p:cNvSpPr>
-          <p:nvPr>
-            <p:ph/>
-          </p:nvPr>
-        </p:nvSpPr>
-        <p:spPr>
-          <a:xfrm>
-            <a:off x="6131052" y="1842516"/>
-            <a:ext cx="2827782" cy="228600"/>
-          </a:xfrm>
-          <a:solidFill>
-            <a:srgbClr val="FFFFFF">
-              <a:alpha val="0"/>
-            </a:srgbClr>
-          </a:solidFill>
-        </p:spPr>
-        <p:txBody>
-          <a:bodyPr/>
-          <a:lstStyle/>
-          <a:p>
-            <a:pPr algn="ctr" marL="0" marR="0">
-              <a:lnSpc>
-                <a:spcPct val="100000"/>
-              </a:lnSpc>
-              <a:spcBef>
-                <a:spcPts val="0"/>
-              </a:spcBef>
-              <a:spcAft>
-                <a:spcPts val="0"/>
-              </a:spcAft>
-              <a:buNone/>
-            </a:pPr>
-            <a:r>
-              <a:rPr cap="none" sz="900" i="0" b="1" u="none" strike="noStrike">
-                <a:solidFill>
-                  <a:srgbClr val="D62728">
-                    <a:alpha val="100000"/>
-                  </a:srgbClr>
-                </a:solidFill>
-                <a:latin typeface="Malgun Gothic"/>
-                <a:cs typeface="Malgun Gothic"/>
-                <a:ea typeface="Malgun Gothic"/>
-                <a:sym typeface="Malgun Gothic"/>
-              </a:rPr>
-              <a:t>⬤</a:t>
-            </a:r>
-            <a:r>
-              <a:rPr cap="none" sz="900" i="0" b="0" u="none" strike="noStrike">
-                <a:solidFill>
-                  <a:srgbClr val="333333">
-                    <a:alpha val="100000"/>
-                  </a:srgbClr>
-                </a:solidFill>
-                <a:latin typeface="Malgun Gothic"/>
-                <a:cs typeface="Malgun Gothic"/>
-                <a:ea typeface="Malgun Gothic"/>
-                <a:sym typeface="Malgun Gothic"/>
-              </a:rPr>
-              <a:t> (ML_MSR_234) Cell_TCMC_234</a:t>
-            </a:r>
-          </a:p>
-        </p:txBody>
-      </p:sp>
-      <p:pic>
-        <p:nvPicPr>
-          <p:cNvPr id="10" name="" descr=""/>
-          <p:cNvPicPr>
-            <a:picLocks noGrp="1"/>
-          </p:cNvPicPr>
-          <p:nvPr>
-            <p:ph/>
-          </p:nvPr>
-        </p:nvPicPr>
-        <p:blipFill>
-          <a:blip r:embed="rId4"/>
-          <a:stretch>
-            <a:fillRect/>
-          </a:stretch>
-        </p:blipFill>
-        <p:spPr>
-          <a:xfrm>
-            <a:off x="6131052" y="2112264"/>
-            <a:ext cx="2827782" cy="1965960"/>
-          </a:xfrm>
-          <a:prstGeom prst="rect">
-            <a:avLst/>
-          </a:prstGeom>
-        </p:spPr>
-      </p:pic>
-      <p:sp>
-        <p:nvSpPr>
-          <p:cNvPr id="11" name=""/>
-          <p:cNvSpPr>
-            <a:spLocks noGrp="1"/>
-          </p:cNvSpPr>
-          <p:nvPr>
-            <p:ph/>
-          </p:nvPr>
-        </p:nvSpPr>
-        <p:spPr>
-          <a:xfrm>
-            <a:off x="8364474" y="2139696"/>
-            <a:ext cx="566928" cy="164592"/>
-          </a:xfrm>
-          <a:solidFill>
-            <a:srgbClr val="FFFFFF">
-              <a:alpha val="0"/>
-            </a:srgbClr>
-          </a:solidFill>
-        </p:spPr>
-        <p:txBody>
-          <a:bodyPr/>
-          <a:lstStyle/>
-          <a:p>
-            <a:pPr algn="r" marL="0" marR="0">
-              <a:lnSpc>
-                <a:spcPct val="100000"/>
-              </a:lnSpc>
-              <a:spcBef>
-                <a:spcPts val="0"/>
-              </a:spcBef>
-              <a:spcAft>
-                <a:spcPts val="0"/>
-              </a:spcAft>
-              <a:buNone/>
-            </a:pPr>
-            <a:r>
-              <a:rPr cap="none" sz="800" i="0" b="0" u="none" strike="noStrike">
-                <a:solidFill>
-                  <a:srgbClr val="808080">
-                    <a:alpha val="100000"/>
-                  </a:srgbClr>
-                </a:solidFill>
-                <a:latin typeface="Malgun Gothic"/>
-                <a:cs typeface="Malgun Gothic"/>
-                <a:ea typeface="Malgun Gothic"/>
-                <a:sym typeface="Malgun Gothic"/>
-              </a:rPr>
-              <a:t>+0.7sig</a:t>
-            </a:r>
-          </a:p>
-        </p:txBody>
-      </p:sp>
-      <p:sp>
-        <p:nvSpPr>
           <p:cNvPr id="12" name=""/>
-          <p:cNvSpPr>
-            <a:spLocks noGrp="1"/>
-          </p:cNvSpPr>
-          <p:nvPr>
-            <p:ph/>
-          </p:nvPr>
-        </p:nvSpPr>
-        <p:spPr>
-          <a:xfrm>
-            <a:off x="9031986" y="1842516"/>
-            <a:ext cx="2827782" cy="228600"/>
-          </a:xfrm>
-          <a:solidFill>
-            <a:srgbClr val="FFFFFF">
-              <a:alpha val="0"/>
-            </a:srgbClr>
-          </a:solidFill>
-        </p:spPr>
-        <p:txBody>
-          <a:bodyPr/>
-          <a:lstStyle/>
-          <a:p>
-            <a:pPr algn="ctr" marL="0" marR="0">
-              <a:lnSpc>
-                <a:spcPct val="100000"/>
-              </a:lnSpc>
-              <a:spcBef>
-                <a:spcPts val="0"/>
-              </a:spcBef>
-              <a:spcAft>
-                <a:spcPts val="0"/>
-              </a:spcAft>
-              <a:buNone/>
-            </a:pPr>
-            <a:r>
-              <a:rPr cap="none" sz="900" i="0" b="1" u="none" strike="noStrike">
-                <a:solidFill>
-                  <a:srgbClr val="D62728">
-                    <a:alpha val="100000"/>
-                  </a:srgbClr>
-                </a:solidFill>
-                <a:latin typeface="Malgun Gothic"/>
-                <a:cs typeface="Malgun Gothic"/>
-                <a:ea typeface="Malgun Gothic"/>
-                <a:sym typeface="Malgun Gothic"/>
-              </a:rPr>
-              <a:t>⬤</a:t>
-            </a:r>
-            <a:r>
-              <a:rPr cap="none" sz="900" i="0" b="0" u="none" strike="noStrike">
-                <a:solidFill>
-                  <a:srgbClr val="333333">
-                    <a:alpha val="100000"/>
-                  </a:srgbClr>
-                </a:solidFill>
-                <a:latin typeface="Malgun Gothic"/>
-                <a:cs typeface="Malgun Gothic"/>
-                <a:ea typeface="Malgun Gothic"/>
-                <a:sym typeface="Malgun Gothic"/>
-              </a:rPr>
-              <a:t> (ML_MSR_235) Cell_TCMC_235</a:t>
-            </a:r>
-          </a:p>
-        </p:txBody>
-      </p:sp>
-      <p:pic>
-        <p:nvPicPr>
-          <p:cNvPr id="13" name="" descr=""/>
-          <p:cNvPicPr>
-            <a:picLocks noGrp="1"/>
-          </p:cNvPicPr>
-          <p:nvPr>
-            <p:ph/>
-          </p:nvPr>
-        </p:nvPicPr>
-        <p:blipFill>
-          <a:blip r:embed="rId5"/>
-          <a:stretch>
-            <a:fillRect/>
-          </a:stretch>
-        </p:blipFill>
-        <p:spPr>
-          <a:xfrm>
-            <a:off x="9031986" y="2112264"/>
-            <a:ext cx="2827782" cy="1965960"/>
-          </a:xfrm>
-          <a:prstGeom prst="rect">
-            <a:avLst/>
-          </a:prstGeom>
-        </p:spPr>
-      </p:pic>
-      <p:sp>
-        <p:nvSpPr>
-          <p:cNvPr id="14" name=""/>
-          <p:cNvSpPr>
-            <a:spLocks noGrp="1"/>
-          </p:cNvSpPr>
-          <p:nvPr>
-            <p:ph/>
-          </p:nvPr>
-        </p:nvSpPr>
-        <p:spPr>
-          <a:xfrm>
-            <a:off x="11265408" y="2139696"/>
-            <a:ext cx="566928" cy="164592"/>
-          </a:xfrm>
-          <a:solidFill>
-            <a:srgbClr val="FFFFFF">
-              <a:alpha val="0"/>
-            </a:srgbClr>
-          </a:solidFill>
-        </p:spPr>
-        <p:txBody>
-          <a:bodyPr/>
-          <a:lstStyle/>
-          <a:p>
-            <a:pPr algn="r" marL="0" marR="0">
-              <a:lnSpc>
-                <a:spcPct val="100000"/>
-              </a:lnSpc>
-              <a:spcBef>
-                <a:spcPts val="0"/>
-              </a:spcBef>
-              <a:spcAft>
-                <a:spcPts val="0"/>
-              </a:spcAft>
-              <a:buNone/>
-            </a:pPr>
-            <a:r>
-              <a:rPr cap="none" sz="800" i="0" b="0" u="none" strike="noStrike">
-                <a:solidFill>
-                  <a:srgbClr val="808080">
-                    <a:alpha val="100000"/>
-                  </a:srgbClr>
-                </a:solidFill>
-                <a:latin typeface="Malgun Gothic"/>
-                <a:cs typeface="Malgun Gothic"/>
-                <a:ea typeface="Malgun Gothic"/>
-                <a:sym typeface="Malgun Gothic"/>
-              </a:rPr>
-              <a:t>+0.7sig</a:t>
-            </a:r>
-          </a:p>
-        </p:txBody>
-      </p:sp>
-      <p:sp>
-        <p:nvSpPr>
-          <p:cNvPr id="15" name=""/>
-          <p:cNvSpPr>
-            <a:spLocks noGrp="1"/>
-          </p:cNvSpPr>
-          <p:nvPr>
-            <p:ph/>
-          </p:nvPr>
-        </p:nvSpPr>
-        <p:spPr>
-          <a:xfrm>
-            <a:off x="329184" y="4128516"/>
-            <a:ext cx="2827782" cy="228600"/>
-          </a:xfrm>
-          <a:solidFill>
-            <a:srgbClr val="FFFFFF">
-              <a:alpha val="0"/>
-            </a:srgbClr>
-          </a:solidFill>
-        </p:spPr>
-        <p:txBody>
-          <a:bodyPr/>
-          <a:lstStyle/>
-          <a:p>
-            <a:pPr algn="ctr" marL="0" marR="0">
-              <a:lnSpc>
-                <a:spcPct val="100000"/>
-              </a:lnSpc>
-              <a:spcBef>
-                <a:spcPts val="0"/>
-              </a:spcBef>
-              <a:spcAft>
-                <a:spcPts val="0"/>
-              </a:spcAft>
-              <a:buNone/>
-            </a:pPr>
-            <a:r>
-              <a:rPr cap="none" sz="900" i="0" b="1" u="none" strike="noStrike">
-                <a:solidFill>
-                  <a:srgbClr val="D62728">
-                    <a:alpha val="100000"/>
-                  </a:srgbClr>
-                </a:solidFill>
-                <a:latin typeface="Malgun Gothic"/>
-                <a:cs typeface="Malgun Gothic"/>
-                <a:ea typeface="Malgun Gothic"/>
-                <a:sym typeface="Malgun Gothic"/>
-              </a:rPr>
-              <a:t>⬤</a:t>
-            </a:r>
-            <a:r>
-              <a:rPr cap="none" sz="900" i="0" b="0" u="none" strike="noStrike">
-                <a:solidFill>
-                  <a:srgbClr val="333333">
-                    <a:alpha val="100000"/>
-                  </a:srgbClr>
-                </a:solidFill>
-                <a:latin typeface="Malgun Gothic"/>
-                <a:cs typeface="Malgun Gothic"/>
-                <a:ea typeface="Malgun Gothic"/>
-                <a:sym typeface="Malgun Gothic"/>
-              </a:rPr>
-              <a:t> (ML_MSR_203) Cell_TCMC_203</a:t>
-            </a:r>
-          </a:p>
-        </p:txBody>
-      </p:sp>
-      <p:pic>
-        <p:nvPicPr>
-          <p:cNvPr id="16" name="" descr=""/>
-          <p:cNvPicPr>
-            <a:picLocks noGrp="1"/>
-          </p:cNvPicPr>
-          <p:nvPr>
-            <p:ph/>
-          </p:nvPr>
-        </p:nvPicPr>
-        <p:blipFill>
-          <a:blip r:embed="rId6"/>
-          <a:stretch>
-            <a:fillRect/>
-          </a:stretch>
-        </p:blipFill>
-        <p:spPr>
-          <a:xfrm>
-            <a:off x="329184" y="4398264"/>
-            <a:ext cx="2827782" cy="1965960"/>
-          </a:xfrm>
-          <a:prstGeom prst="rect">
-            <a:avLst/>
-          </a:prstGeom>
-        </p:spPr>
-      </p:pic>
-      <p:sp>
-        <p:nvSpPr>
-          <p:cNvPr id="17" name=""/>
-          <p:cNvSpPr>
-            <a:spLocks noGrp="1"/>
-          </p:cNvSpPr>
-          <p:nvPr>
-            <p:ph/>
-          </p:nvPr>
-        </p:nvSpPr>
-        <p:spPr>
-          <a:xfrm>
-            <a:off x="2562606" y="4425696"/>
-            <a:ext cx="566928" cy="164592"/>
-          </a:xfrm>
-          <a:solidFill>
-            <a:srgbClr val="FFFFFF">
-              <a:alpha val="0"/>
-            </a:srgbClr>
-          </a:solidFill>
-        </p:spPr>
-        <p:txBody>
-          <a:bodyPr/>
-          <a:lstStyle/>
-          <a:p>
-            <a:pPr algn="r" marL="0" marR="0">
-              <a:lnSpc>
-                <a:spcPct val="100000"/>
-              </a:lnSpc>
-              <a:spcBef>
-                <a:spcPts val="0"/>
-              </a:spcBef>
-              <a:spcAft>
-                <a:spcPts val="0"/>
-              </a:spcAft>
-              <a:buNone/>
-            </a:pPr>
-            <a:r>
-              <a:rPr cap="none" sz="800" i="0" b="0" u="none" strike="noStrike">
-                <a:solidFill>
-                  <a:srgbClr val="808080">
-                    <a:alpha val="100000"/>
-                  </a:srgbClr>
-                </a:solidFill>
-                <a:latin typeface="Malgun Gothic"/>
-                <a:cs typeface="Malgun Gothic"/>
-                <a:ea typeface="Malgun Gothic"/>
-                <a:sym typeface="Malgun Gothic"/>
-              </a:rPr>
-              <a:t>+0.6sig</a:t>
-            </a:r>
-          </a:p>
-        </p:txBody>
-      </p:sp>
-      <p:sp>
-        <p:nvSpPr>
-          <p:cNvPr id="18" name=""/>
-          <p:cNvSpPr>
-            <a:spLocks noGrp="1"/>
-          </p:cNvSpPr>
-          <p:nvPr>
-            <p:ph/>
-          </p:nvPr>
-        </p:nvSpPr>
-        <p:spPr>
-          <a:xfrm>
-            <a:off x="3230118" y="4128516"/>
-            <a:ext cx="2827782" cy="228600"/>
-          </a:xfrm>
-          <a:solidFill>
-            <a:srgbClr val="FFFFFF">
-              <a:alpha val="0"/>
-            </a:srgbClr>
-          </a:solidFill>
-        </p:spPr>
-        <p:txBody>
-          <a:bodyPr/>
-          <a:lstStyle/>
-          <a:p>
-            <a:pPr algn="ctr" marL="0" marR="0">
-              <a:lnSpc>
-                <a:spcPct val="100000"/>
-              </a:lnSpc>
-              <a:spcBef>
-                <a:spcPts val="0"/>
-              </a:spcBef>
-              <a:spcAft>
-                <a:spcPts val="0"/>
-              </a:spcAft>
-              <a:buNone/>
-            </a:pPr>
-            <a:r>
-              <a:rPr cap="none" sz="900" i="0" b="1" u="none" strike="noStrike">
-                <a:solidFill>
-                  <a:srgbClr val="D62728">
-                    <a:alpha val="100000"/>
-                  </a:srgbClr>
-                </a:solidFill>
-                <a:latin typeface="Malgun Gothic"/>
-                <a:cs typeface="Malgun Gothic"/>
-                <a:ea typeface="Malgun Gothic"/>
-                <a:sym typeface="Malgun Gothic"/>
-              </a:rPr>
-              <a:t>⬤</a:t>
-            </a:r>
-            <a:r>
-              <a:rPr cap="none" sz="900" i="0" b="0" u="none" strike="noStrike">
-                <a:solidFill>
-                  <a:srgbClr val="333333">
-                    <a:alpha val="100000"/>
-                  </a:srgbClr>
-                </a:solidFill>
-                <a:latin typeface="Malgun Gothic"/>
-                <a:cs typeface="Malgun Gothic"/>
-                <a:ea typeface="Malgun Gothic"/>
-                <a:sym typeface="Malgun Gothic"/>
-              </a:rPr>
-              <a:t> (ML_MSR_219) Cell_TCMC_219</a:t>
-            </a:r>
-          </a:p>
-        </p:txBody>
-      </p:sp>
-      <p:pic>
-        <p:nvPicPr>
-          <p:cNvPr id="19" name="" descr=""/>
-          <p:cNvPicPr>
-            <a:picLocks noGrp="1"/>
-          </p:cNvPicPr>
-          <p:nvPr>
-            <p:ph/>
-          </p:nvPr>
-        </p:nvPicPr>
-        <p:blipFill>
-          <a:blip r:embed="rId7"/>
-          <a:stretch>
-            <a:fillRect/>
-          </a:stretch>
-        </p:blipFill>
-        <p:spPr>
-          <a:xfrm>
-            <a:off x="3230118" y="4398264"/>
-            <a:ext cx="2827782" cy="1965960"/>
-          </a:xfrm>
-          <a:prstGeom prst="rect">
-            <a:avLst/>
-          </a:prstGeom>
-        </p:spPr>
-      </p:pic>
-      <p:sp>
-        <p:nvSpPr>
-          <p:cNvPr id="20" name=""/>
-          <p:cNvSpPr>
-            <a:spLocks noGrp="1"/>
-          </p:cNvSpPr>
-          <p:nvPr>
-            <p:ph/>
-          </p:nvPr>
-        </p:nvSpPr>
-        <p:spPr>
-          <a:xfrm>
-            <a:off x="5463540" y="4425696"/>
-            <a:ext cx="566928" cy="164592"/>
-          </a:xfrm>
-          <a:solidFill>
-            <a:srgbClr val="FFFFFF">
-              <a:alpha val="0"/>
-            </a:srgbClr>
-          </a:solidFill>
-        </p:spPr>
-        <p:txBody>
-          <a:bodyPr/>
-          <a:lstStyle/>
-          <a:p>
-            <a:pPr algn="r" marL="0" marR="0">
-              <a:lnSpc>
-                <a:spcPct val="100000"/>
-              </a:lnSpc>
-              <a:spcBef>
-                <a:spcPts val="0"/>
-              </a:spcBef>
-              <a:spcAft>
-                <a:spcPts val="0"/>
-              </a:spcAft>
-              <a:buNone/>
-            </a:pPr>
-            <a:r>
-              <a:rPr cap="none" sz="800" i="0" b="0" u="none" strike="noStrike">
-                <a:solidFill>
-                  <a:srgbClr val="808080">
-                    <a:alpha val="100000"/>
-                  </a:srgbClr>
-                </a:solidFill>
-                <a:latin typeface="Malgun Gothic"/>
-                <a:cs typeface="Malgun Gothic"/>
-                <a:ea typeface="Malgun Gothic"/>
-                <a:sym typeface="Malgun Gothic"/>
-              </a:rPr>
-              <a:t>+0.5sig</a:t>
-            </a:r>
-          </a:p>
-        </p:txBody>
-      </p:sp>
-      <p:sp>
-        <p:nvSpPr>
-          <p:cNvPr id="21" name=""/>
-          <p:cNvSpPr>
-            <a:spLocks noGrp="1"/>
-          </p:cNvSpPr>
-          <p:nvPr>
-            <p:ph/>
-          </p:nvPr>
-        </p:nvSpPr>
-        <p:spPr>
-          <a:xfrm>
-            <a:off x="4642866" y="6446520"/>
-            <a:ext cx="2903220" cy="219456"/>
-          </a:xfrm>
-          <a:solidFill>
-            <a:srgbClr val="FFFFFF">
-              <a:alpha val="0"/>
-            </a:srgbClr>
-          </a:solidFill>
-        </p:spPr>
-        <p:txBody>
-          <a:bodyPr/>
-          <a:lstStyle/>
-          <a:p>
-            <a:pPr algn="ctr" marL="0" marR="0">
-              <a:lnSpc>
-                <a:spcPct val="100000"/>
-              </a:lnSpc>
-              <a:spcBef>
-                <a:spcPts val="0"/>
-              </a:spcBef>
-              <a:spcAft>
-                <a:spcPts val="0"/>
-              </a:spcAft>
-              <a:buNone/>
-            </a:pPr>
-            <a:r>
-              <a:rPr cap="none" sz="1000" i="0" b="1" u="none" strike="noStrike">
-                <a:solidFill>
-                  <a:srgbClr val="6489FA">
-                    <a:alpha val="100000"/>
-                  </a:srgbClr>
-                </a:solidFill>
-                <a:latin typeface="Malgun Gothic"/>
-                <a:cs typeface="Malgun Gothic"/>
-                <a:ea typeface="Malgun Gothic"/>
-                <a:sym typeface="Malgun Gothic"/>
-              </a:rPr>
-              <a:t>● A (REF, 16매)</a:t>
-            </a:r>
-            <a:r>
-              <a:rPr cap="none" sz="1000" i="0" b="0" u="none" strike="noStrike">
-                <a:solidFill>
-                  <a:srgbClr val="333333">
-                    <a:alpha val="100000"/>
-                  </a:srgbClr>
-                </a:solidFill>
-                <a:latin typeface="Malgun Gothic"/>
-                <a:cs typeface="Malgun Gothic"/>
-                <a:ea typeface="Malgun Gothic"/>
-                <a:sym typeface="Malgun Gothic"/>
-              </a:rPr>
-              <a:t>    </a:t>
-            </a:r>
-            <a:r>
-              <a:rPr cap="none" sz="1000" i="0" b="1" u="none" strike="noStrike">
-                <a:solidFill>
-                  <a:srgbClr val="FA7864">
-                    <a:alpha val="100000"/>
-                  </a:srgbClr>
-                </a:solidFill>
-                <a:latin typeface="Malgun Gothic"/>
-                <a:cs typeface="Malgun Gothic"/>
-                <a:ea typeface="Malgun Gothic"/>
-                <a:sym typeface="Malgun Gothic"/>
-              </a:rPr>
-              <a:t>● B (TARGET, 10매)</a:t>
-            </a:r>
-          </a:p>
-        </p:txBody>
-      </p:sp>
-      <p:sp>
-        <p:nvSpPr>
-          <p:cNvPr id="22" name="DRB_Title_Placeholder"/>
-          <p:cNvSpPr>
-            <a:spLocks noGrp="1"/>
-          </p:cNvSpPr>
-          <p:nvPr>
-            <p:ph type="title" hasCustomPrompt="1"/>
-          </p:nvPr>
-        </p:nvSpPr>
-        <p:spPr>
-          <a:xfrm>
-            <a:off x="270000" y="342000"/>
-            <a:ext cx="10302000" cy="486000"/>
-          </a:xfrm>
-        </p:spPr>
-        <p:txBody>
-          <a:bodyPr/>
-          <a:lstStyle/>
-          <a:p>
-            <a:pPr algn="l" marL="0" marR="0">
-              <a:lnSpc>
-                <a:spcPct val="100000"/>
-              </a:lnSpc>
-              <a:spcBef>
-                <a:spcPts val="0"/>
-              </a:spcBef>
-              <a:spcAft>
-                <a:spcPts val="0"/>
-              </a:spcAft>
-              <a:buNone/>
-            </a:pPr>
-            <a:r>
-              <a:rPr cap="none" sz="2800" i="0" b="1" u="none" strike="noStrike">
-                <a:solidFill>
-                  <a:srgbClr val="111111">
-                    <a:alpha val="100000"/>
-                  </a:srgbClr>
-                </a:solidFill>
-                <a:latin typeface="Malgun Gothic"/>
-                <a:cs typeface="Malgun Gothic"/>
-                <a:ea typeface="Malgun Gothic"/>
-                <a:sym typeface="Malgun Gothic"/>
-              </a:rPr>
-              <a:t>[DM] Data Review Board Auto Report</a:t>
-            </a:r>
-          </a:p>
-        </p:txBody>
-      </p:sp>
-      <p:sp>
-        <p:nvSpPr>
-          <p:cNvPr id="23" name="DRB_Body_Placeholder"/>
-          <p:cNvSpPr>
-            <a:spLocks noGrp="1"/>
-          </p:cNvSpPr>
-          <p:nvPr>
-            <p:ph idx="13" hasCustomPrompt="1"/>
-          </p:nvPr>
-        </p:nvSpPr>
-        <p:spPr>
-          <a:xfrm>
-            <a:off x="270000" y="943200"/>
-            <a:ext cx="11520000" cy="583200"/>
-          </a:xfrm>
-        </p:spPr>
-        <p:txBody>
-          <a:bodyPr/>
-          <a:lstStyle/>
-          <a:p>
-            <a:pPr algn="l" marL="0" marR="0">
-              <a:lnSpc>
-                <a:spcPct val="100000"/>
-              </a:lnSpc>
-              <a:spcBef>
-                <a:spcPts val="0"/>
-              </a:spcBef>
-              <a:spcAft>
-                <a:spcPts val="0"/>
-              </a:spcAft>
-              <a:buNone/>
-            </a:pPr>
-            <a:r>
-              <a:rPr cap="none" sz="1300" i="0" b="1" u="none" strike="noStrike">
-                <a:solidFill>
-                  <a:srgbClr val="333333">
-                    <a:alpha val="100000"/>
-                  </a:srgbClr>
-                </a:solidFill>
-                <a:latin typeface="Malgun Gothic"/>
-                <a:cs typeface="Malgun Gothic"/>
-                <a:ea typeface="Malgun Gothic"/>
-                <a:sym typeface="Malgun Gothic"/>
-              </a:rPr>
-              <a:t>■</a:t>
-            </a:r>
-            <a:r>
-              <a:rPr cap="none" sz="1300" i="0" b="1" u="none" strike="noStrike">
-                <a:solidFill>
-                  <a:srgbClr val="333333">
-                    <a:alpha val="100000"/>
-                  </a:srgbClr>
-                </a:solidFill>
-                <a:latin typeface="Malgun Gothic"/>
-                <a:cs typeface="Malgun Gothic"/>
-                <a:ea typeface="Malgun Gothic"/>
-                <a:sym typeface="Malgun Gothic"/>
-              </a:rPr>
-              <a:t> Category: Category2: TCMC | Showing MSR 1-6 of 6</a:t>
-            </a:r>
-          </a:p>
-          <a:p>
-            <a:pPr algn="l" marL="0" marR="0">
-              <a:lnSpc>
-                <a:spcPct val="100000"/>
-              </a:lnSpc>
-              <a:spcBef>
-                <a:spcPts val="0"/>
-              </a:spcBef>
-              <a:spcAft>
-                <a:spcPts val="0"/>
-              </a:spcAft>
-              <a:buNone/>
-            </a:pPr>
-            <a:r>
-              <a:rPr cap="none" sz="1300" i="0" b="1" u="none" strike="noStrike">
-                <a:solidFill>
-                  <a:srgbClr val="333333">
-                    <a:alpha val="100000"/>
-                  </a:srgbClr>
-                </a:solidFill>
-                <a:latin typeface="Malgun Gothic"/>
-                <a:cs typeface="Malgun Gothic"/>
-                <a:ea typeface="Malgun Gothic"/>
-                <a:sym typeface="Malgun Gothic"/>
-              </a:rPr>
-              <a:t>■</a:t>
-            </a:r>
-            <a:r>
-              <a:rPr cap="none" sz="1300" i="0" b="1" u="none" strike="noStrike">
-                <a:solidFill>
-                  <a:srgbClr val="333333">
-                    <a:alpha val="100000"/>
-                  </a:srgbClr>
-                </a:solidFill>
-                <a:latin typeface="Malgun Gothic"/>
-                <a:cs typeface="Malgun Gothic"/>
-                <a:ea typeface="Malgun Gothic"/>
-                <a:sym typeface="Malgun Gothic"/>
-              </a:rPr>
-              <a:t> REF: A / TARGET: B | Threshold: 0.5</a:t>
-            </a:r>
-          </a:p>
-        </p:txBody>
-      </p:sp>
-      <p:sp>
-        <p:nvSpPr>
-          <p:cNvPr id="24" name=""/>
           <p:cNvSpPr>
             <a:spLocks noGrp="1"/>
           </p:cNvSpPr>
